--- a/LINEOA媒体最新情報_2026年9月トレンドレポート.pptx
+++ b/LINEOA媒体最新情報_2026年9月トレンドレポート.pptx
@@ -1,30 +1,37 @@
 
 <file path=ppt/presentation.xml><?xml version="1.0" encoding="utf-8"?>
-<p:presentation xmlns:a="http://schemas.openxmlformats.org/drawingml/2006/main" xmlns:r="http://schemas.openxmlformats.org/officeDocument/2006/relationships" xmlns:p="http://schemas.openxmlformats.org/presentationml/2006/main" saveSubsetFonts="1" autoCompressPictures="0">
+<p:presentation xmlns:a="http://schemas.openxmlformats.org/drawingml/2006/main" xmlns:r="http://schemas.openxmlformats.org/officeDocument/2006/relationships" xmlns:p="http://schemas.openxmlformats.org/presentationml/2006/main" saveSubsetFonts="1">
   <p:sldMasterIdLst>
-    <p:sldMasterId id="2147483648" r:id="rId1"/>
+    <p:sldMasterId id="2147483674" r:id="rId1"/>
+    <p:sldMasterId id="2147483687" r:id="rId2"/>
   </p:sldMasterIdLst>
+  <p:notesMasterIdLst>
+    <p:notesMasterId r:id="rId39"/>
+  </p:notesMasterIdLst>
+  <p:handoutMasterIdLst>
+    <p:handoutMasterId r:id="rId40"/>
+  </p:handoutMasterIdLst>
   <p:sldIdLst>
-    <p:sldId id="256" r:id="rId7"/>
-    <p:sldId id="257" r:id="rId8"/>
-    <p:sldId id="258" r:id="rId9"/>
-    <p:sldId id="259" r:id="rId10"/>
-    <p:sldId id="260" r:id="rId11"/>
-    <p:sldId id="261" r:id="rId12"/>
-    <p:sldId id="262" r:id="rId13"/>
-    <p:sldId id="263" r:id="rId14"/>
-    <p:sldId id="264" r:id="rId15"/>
-    <p:sldId id="265" r:id="rId16"/>
-    <p:sldId id="266" r:id="rId17"/>
+    <p:sldId id="2363" r:id="rId3"/>
+    <p:sldId id="2935" r:id="rId4"/>
+    <p:sldId id="2956" r:id="rId5"/>
+    <p:sldId id="2988" r:id="rId6"/>
+    <p:sldId id="2972" r:id="rId7"/>
+    <p:sldId id="2977" r:id="rId8"/>
+    <p:sldId id="2974" r:id="rId9"/>
+    <p:sldId id="2975" r:id="rId10"/>
+    <p:sldId id="2979" r:id="rId11"/>
+    <p:sldId id="2982" r:id="rId12"/>
+    <p:sldId id="2736" r:id="rId13"/>
   </p:sldIdLst>
-  <p:sldSz cx="9902952" cy="6858000" type="screen4x3"/>
-  <p:notesSz cx="6858000" cy="9144000"/>
+  <p:sldSz cx="9906000" cy="6858000" type="A4"/>
+  <p:notesSz cx="6807200" cy="9939338"/>
   <p:defaultTextStyle>
     <a:defPPr>
-      <a:defRPr lang="en-US"/>
+      <a:defRPr lang="ja-JP"/>
     </a:defPPr>
-    <a:lvl1pPr marL="0" algn="l" defTabSz="457200" rtl="0" eaLnBrk="1" latinLnBrk="0" hangingPunct="1">
-      <a:defRPr sz="1800" kern="1200">
+    <a:lvl1pPr marL="0" algn="l" defTabSz="914400" rtl="0" eaLnBrk="1" latinLnBrk="0" hangingPunct="1">
+      <a:defRPr kumimoji="1" sz="1800" kern="1200">
         <a:solidFill>
           <a:schemeClr val="tx1"/>
         </a:solidFill>
@@ -33,8 +40,8 @@
         <a:cs typeface="+mn-cs"/>
       </a:defRPr>
     </a:lvl1pPr>
-    <a:lvl2pPr marL="457200" algn="l" defTabSz="457200" rtl="0" eaLnBrk="1" latinLnBrk="0" hangingPunct="1">
-      <a:defRPr sz="1800" kern="1200">
+    <a:lvl2pPr marL="457200" algn="l" defTabSz="914400" rtl="0" eaLnBrk="1" latinLnBrk="0" hangingPunct="1">
+      <a:defRPr kumimoji="1" sz="1800" kern="1200">
         <a:solidFill>
           <a:schemeClr val="tx1"/>
         </a:solidFill>
@@ -43,8 +50,8 @@
         <a:cs typeface="+mn-cs"/>
       </a:defRPr>
     </a:lvl2pPr>
-    <a:lvl3pPr marL="914400" algn="l" defTabSz="457200" rtl="0" eaLnBrk="1" latinLnBrk="0" hangingPunct="1">
-      <a:defRPr sz="1800" kern="1200">
+    <a:lvl3pPr marL="914400" algn="l" defTabSz="914400" rtl="0" eaLnBrk="1" latinLnBrk="0" hangingPunct="1">
+      <a:defRPr kumimoji="1" sz="1800" kern="1200">
         <a:solidFill>
           <a:schemeClr val="tx1"/>
         </a:solidFill>
@@ -53,8 +60,8 @@
         <a:cs typeface="+mn-cs"/>
       </a:defRPr>
     </a:lvl3pPr>
-    <a:lvl4pPr marL="1371600" algn="l" defTabSz="457200" rtl="0" eaLnBrk="1" latinLnBrk="0" hangingPunct="1">
-      <a:defRPr sz="1800" kern="1200">
+    <a:lvl4pPr marL="1371600" algn="l" defTabSz="914400" rtl="0" eaLnBrk="1" latinLnBrk="0" hangingPunct="1">
+      <a:defRPr kumimoji="1" sz="1800" kern="1200">
         <a:solidFill>
           <a:schemeClr val="tx1"/>
         </a:solidFill>
@@ -63,8 +70,8 @@
         <a:cs typeface="+mn-cs"/>
       </a:defRPr>
     </a:lvl4pPr>
-    <a:lvl5pPr marL="1828800" algn="l" defTabSz="457200" rtl="0" eaLnBrk="1" latinLnBrk="0" hangingPunct="1">
-      <a:defRPr sz="1800" kern="1200">
+    <a:lvl5pPr marL="1828800" algn="l" defTabSz="914400" rtl="0" eaLnBrk="1" latinLnBrk="0" hangingPunct="1">
+      <a:defRPr kumimoji="1" sz="1800" kern="1200">
         <a:solidFill>
           <a:schemeClr val="tx1"/>
         </a:solidFill>
@@ -73,8 +80,8 @@
         <a:cs typeface="+mn-cs"/>
       </a:defRPr>
     </a:lvl5pPr>
-    <a:lvl6pPr marL="2286000" algn="l" defTabSz="457200" rtl="0" eaLnBrk="1" latinLnBrk="0" hangingPunct="1">
-      <a:defRPr sz="1800" kern="1200">
+    <a:lvl6pPr marL="2286000" algn="l" defTabSz="914400" rtl="0" eaLnBrk="1" latinLnBrk="0" hangingPunct="1">
+      <a:defRPr kumimoji="1" sz="1800" kern="1200">
         <a:solidFill>
           <a:schemeClr val="tx1"/>
         </a:solidFill>
@@ -83,8 +90,8 @@
         <a:cs typeface="+mn-cs"/>
       </a:defRPr>
     </a:lvl6pPr>
-    <a:lvl7pPr marL="2743200" algn="l" defTabSz="457200" rtl="0" eaLnBrk="1" latinLnBrk="0" hangingPunct="1">
-      <a:defRPr sz="1800" kern="1200">
+    <a:lvl7pPr marL="2743200" algn="l" defTabSz="914400" rtl="0" eaLnBrk="1" latinLnBrk="0" hangingPunct="1">
+      <a:defRPr kumimoji="1" sz="1800" kern="1200">
         <a:solidFill>
           <a:schemeClr val="tx1"/>
         </a:solidFill>
@@ -93,8 +100,8 @@
         <a:cs typeface="+mn-cs"/>
       </a:defRPr>
     </a:lvl7pPr>
-    <a:lvl8pPr marL="3200400" algn="l" defTabSz="457200" rtl="0" eaLnBrk="1" latinLnBrk="0" hangingPunct="1">
-      <a:defRPr sz="1800" kern="1200">
+    <a:lvl8pPr marL="3200400" algn="l" defTabSz="914400" rtl="0" eaLnBrk="1" latinLnBrk="0" hangingPunct="1">
+      <a:defRPr kumimoji="1" sz="1800" kern="1200">
         <a:solidFill>
           <a:schemeClr val="tx1"/>
         </a:solidFill>
@@ -103,8 +110,8 @@
         <a:cs typeface="+mn-cs"/>
       </a:defRPr>
     </a:lvl8pPr>
-    <a:lvl9pPr marL="3657600" algn="l" defTabSz="457200" rtl="0" eaLnBrk="1" latinLnBrk="0" hangingPunct="1">
-      <a:defRPr sz="1800" kern="1200">
+    <a:lvl9pPr marL="3657600" algn="l" defTabSz="914400" rtl="0" eaLnBrk="1" latinLnBrk="0" hangingPunct="1">
+      <a:defRPr kumimoji="1" sz="1800" kern="1200">
         <a:solidFill>
           <a:schemeClr val="tx1"/>
         </a:solidFill>
@@ -114,2472 +121,30 @@
       </a:defRPr>
     </a:lvl9pPr>
   </p:defaultTextStyle>
+  <p:extLst>
+    <p:ext uri="{EFAFB233-063F-42B5-8137-9DF3F51BA10A}">
+      <p15:sldGuideLst xmlns:p15="http://schemas.microsoft.com/office/powerpoint/2012/main">
+        <p15:guide id="1" orient="horz" pos="3158" userDrawn="1">
+          <p15:clr>
+            <a:srgbClr val="A4A3A4"/>
+          </p15:clr>
+        </p15:guide>
+        <p15:guide id="2" pos="308" userDrawn="1">
+          <p15:clr>
+            <a:srgbClr val="A4A3A4"/>
+          </p15:clr>
+        </p15:guide>
+      </p15:sldGuideLst>
+    </p:ext>
+    <p:ext uri="{2D200454-40CA-4A62-9FC3-DE9A4176ACB9}">
+      <p15:notesGuideLst xmlns:p15="http://schemas.microsoft.com/office/powerpoint/2012/main"/>
+    </p:ext>
+  </p:extLst>
 </p:presentation>
 </file>
 
-<file path=ppt/slideLayouts/slideLayout1.xml><?xml version="1.0" encoding="utf-8"?>
-<p:sldLayout xmlns:a="http://schemas.openxmlformats.org/drawingml/2006/main" xmlns:r="http://schemas.openxmlformats.org/officeDocument/2006/relationships" xmlns:p="http://schemas.openxmlformats.org/presentationml/2006/main" type="title" preserve="1">
-  <p:cSld name="Title Slide">
-    <p:spTree>
-      <p:nvGrpSpPr>
-        <p:cNvPr id="1" name=""/>
-        <p:cNvGrpSpPr/>
-        <p:nvPr/>
-      </p:nvGrpSpPr>
-      <p:grpSpPr>
-        <a:xfrm>
-          <a:off x="0" y="0"/>
-          <a:ext cx="0" cy="0"/>
-          <a:chOff x="0" y="0"/>
-          <a:chExt cx="0" cy="0"/>
-        </a:xfrm>
-      </p:grpSpPr>
-      <p:sp>
-        <p:nvSpPr>
-          <p:cNvPr id="2" name="Title 1"/>
-          <p:cNvSpPr>
-            <a:spLocks noGrp="1"/>
-          </p:cNvSpPr>
-          <p:nvPr>
-            <p:ph type="ctrTitle"/>
-          </p:nvPr>
-        </p:nvSpPr>
-        <p:spPr>
-          <a:xfrm>
-            <a:off x="685800" y="2130425"/>
-            <a:ext cx="7772400" cy="1470025"/>
-          </a:xfrm>
-        </p:spPr>
-        <p:txBody>
-          <a:bodyPr/>
-          <a:lstStyle/>
-          <a:p>
-            <a:r>
-              <a:rPr lang="en-US" smtClean="0"/>
-              <a:t>Click to edit Master title style</a:t>
-            </a:r>
-            <a:endParaRPr lang="en-US"/>
-          </a:p>
-        </p:txBody>
-      </p:sp>
-      <p:sp>
-        <p:nvSpPr>
-          <p:cNvPr id="3" name="Subtitle 2"/>
-          <p:cNvSpPr>
-            <a:spLocks noGrp="1"/>
-          </p:cNvSpPr>
-          <p:nvPr>
-            <p:ph type="subTitle" idx="1"/>
-          </p:nvPr>
-        </p:nvSpPr>
-        <p:spPr>
-          <a:xfrm>
-            <a:off x="1371600" y="3886200"/>
-            <a:ext cx="6400800" cy="1752600"/>
-          </a:xfrm>
-        </p:spPr>
-        <p:txBody>
-          <a:bodyPr/>
-          <a:lstStyle>
-            <a:lvl1pPr marL="0" indent="0" algn="ctr">
-              <a:buNone/>
-              <a:defRPr>
-                <a:solidFill>
-                  <a:schemeClr val="tx1">
-                    <a:tint val="75000"/>
-                  </a:schemeClr>
-                </a:solidFill>
-              </a:defRPr>
-            </a:lvl1pPr>
-            <a:lvl2pPr marL="457200" indent="0" algn="ctr">
-              <a:buNone/>
-              <a:defRPr>
-                <a:solidFill>
-                  <a:schemeClr val="tx1">
-                    <a:tint val="75000"/>
-                  </a:schemeClr>
-                </a:solidFill>
-              </a:defRPr>
-            </a:lvl2pPr>
-            <a:lvl3pPr marL="914400" indent="0" algn="ctr">
-              <a:buNone/>
-              <a:defRPr>
-                <a:solidFill>
-                  <a:schemeClr val="tx1">
-                    <a:tint val="75000"/>
-                  </a:schemeClr>
-                </a:solidFill>
-              </a:defRPr>
-            </a:lvl3pPr>
-            <a:lvl4pPr marL="1371600" indent="0" algn="ctr">
-              <a:buNone/>
-              <a:defRPr>
-                <a:solidFill>
-                  <a:schemeClr val="tx1">
-                    <a:tint val="75000"/>
-                  </a:schemeClr>
-                </a:solidFill>
-              </a:defRPr>
-            </a:lvl4pPr>
-            <a:lvl5pPr marL="1828800" indent="0" algn="ctr">
-              <a:buNone/>
-              <a:defRPr>
-                <a:solidFill>
-                  <a:schemeClr val="tx1">
-                    <a:tint val="75000"/>
-                  </a:schemeClr>
-                </a:solidFill>
-              </a:defRPr>
-            </a:lvl5pPr>
-            <a:lvl6pPr marL="2286000" indent="0" algn="ctr">
-              <a:buNone/>
-              <a:defRPr>
-                <a:solidFill>
-                  <a:schemeClr val="tx1">
-                    <a:tint val="75000"/>
-                  </a:schemeClr>
-                </a:solidFill>
-              </a:defRPr>
-            </a:lvl6pPr>
-            <a:lvl7pPr marL="2743200" indent="0" algn="ctr">
-              <a:buNone/>
-              <a:defRPr>
-                <a:solidFill>
-                  <a:schemeClr val="tx1">
-                    <a:tint val="75000"/>
-                  </a:schemeClr>
-                </a:solidFill>
-              </a:defRPr>
-            </a:lvl7pPr>
-            <a:lvl8pPr marL="3200400" indent="0" algn="ctr">
-              <a:buNone/>
-              <a:defRPr>
-                <a:solidFill>
-                  <a:schemeClr val="tx1">
-                    <a:tint val="75000"/>
-                  </a:schemeClr>
-                </a:solidFill>
-              </a:defRPr>
-            </a:lvl8pPr>
-            <a:lvl9pPr marL="3657600" indent="0" algn="ctr">
-              <a:buNone/>
-              <a:defRPr>
-                <a:solidFill>
-                  <a:schemeClr val="tx1">
-                    <a:tint val="75000"/>
-                  </a:schemeClr>
-                </a:solidFill>
-              </a:defRPr>
-            </a:lvl9pPr>
-          </a:lstStyle>
-          <a:p>
-            <a:r>
-              <a:rPr lang="en-US" smtClean="0"/>
-              <a:t>Click to edit Master subtitle style</a:t>
-            </a:r>
-            <a:endParaRPr lang="en-US"/>
-          </a:p>
-        </p:txBody>
-      </p:sp>
-      <p:sp>
-        <p:nvSpPr>
-          <p:cNvPr id="4" name="Date Placeholder 3"/>
-          <p:cNvSpPr>
-            <a:spLocks noGrp="1"/>
-          </p:cNvSpPr>
-          <p:nvPr>
-            <p:ph type="dt" sz="half" idx="10"/>
-          </p:nvPr>
-        </p:nvSpPr>
-        <p:spPr/>
-        <p:txBody>
-          <a:bodyPr/>
-          <a:lstStyle/>
-          <a:p>
-            <a:fld id="{5BCAD085-E8A6-8845-BD4E-CB4CCA059FC4}" type="datetimeFigureOut">
-              <a:rPr lang="en-US" smtClean="0"/>
-              <a:t>1/27/13</a:t>
-            </a:fld>
-            <a:endParaRPr lang="en-US"/>
-          </a:p>
-        </p:txBody>
-      </p:sp>
-      <p:sp>
-        <p:nvSpPr>
-          <p:cNvPr id="5" name="Footer Placeholder 4"/>
-          <p:cNvSpPr>
-            <a:spLocks noGrp="1"/>
-          </p:cNvSpPr>
-          <p:nvPr>
-            <p:ph type="ftr" sz="quarter" idx="11"/>
-          </p:nvPr>
-        </p:nvSpPr>
-        <p:spPr/>
-        <p:txBody>
-          <a:bodyPr/>
-          <a:lstStyle/>
-          <a:p>
-            <a:endParaRPr lang="en-US"/>
-          </a:p>
-        </p:txBody>
-      </p:sp>
-      <p:sp>
-        <p:nvSpPr>
-          <p:cNvPr id="6" name="Slide Number Placeholder 5"/>
-          <p:cNvSpPr>
-            <a:spLocks noGrp="1"/>
-          </p:cNvSpPr>
-          <p:nvPr>
-            <p:ph type="sldNum" sz="quarter" idx="12"/>
-          </p:nvPr>
-        </p:nvSpPr>
-        <p:spPr/>
-        <p:txBody>
-          <a:bodyPr/>
-          <a:lstStyle/>
-          <a:p>
-            <a:fld id="{C1FF6DA9-008F-8B48-92A6-B652298478BF}" type="slidenum">
-              <a:rPr lang="en-US" smtClean="0"/>
-              <a:t>‹#›</a:t>
-            </a:fld>
-            <a:endParaRPr lang="en-US"/>
-          </a:p>
-        </p:txBody>
-      </p:sp>
-    </p:spTree>
-    <p:extLst>
-      <p:ext uri="{BB962C8B-B14F-4D97-AF65-F5344CB8AC3E}">
-        <p14:creationId xmlns:p14="http://schemas.microsoft.com/office/powerpoint/2010/main" val="3168075583"/>
-      </p:ext>
-    </p:extLst>
-  </p:cSld>
-  <p:clrMapOvr>
-    <a:masterClrMapping/>
-  </p:clrMapOvr>
-</p:sldLayout>
-</file>
-
-<file path=ppt/slideLayouts/slideLayout10.xml><?xml version="1.0" encoding="utf-8"?>
-<p:sldLayout xmlns:a="http://schemas.openxmlformats.org/drawingml/2006/main" xmlns:r="http://schemas.openxmlformats.org/officeDocument/2006/relationships" xmlns:p="http://schemas.openxmlformats.org/presentationml/2006/main" type="vertTx" preserve="1">
-  <p:cSld name="Title and Vertical Text">
-    <p:spTree>
-      <p:nvGrpSpPr>
-        <p:cNvPr id="1" name=""/>
-        <p:cNvGrpSpPr/>
-        <p:nvPr/>
-      </p:nvGrpSpPr>
-      <p:grpSpPr>
-        <a:xfrm>
-          <a:off x="0" y="0"/>
-          <a:ext cx="0" cy="0"/>
-          <a:chOff x="0" y="0"/>
-          <a:chExt cx="0" cy="0"/>
-        </a:xfrm>
-      </p:grpSpPr>
-      <p:sp>
-        <p:nvSpPr>
-          <p:cNvPr id="2" name="Title 1"/>
-          <p:cNvSpPr>
-            <a:spLocks noGrp="1"/>
-          </p:cNvSpPr>
-          <p:nvPr>
-            <p:ph type="title"/>
-          </p:nvPr>
-        </p:nvSpPr>
-        <p:spPr/>
-        <p:txBody>
-          <a:bodyPr/>
-          <a:lstStyle/>
-          <a:p>
-            <a:r>
-              <a:rPr lang="en-US" smtClean="0"/>
-              <a:t>Click to edit Master title style</a:t>
-            </a:r>
-            <a:endParaRPr lang="en-US"/>
-          </a:p>
-        </p:txBody>
-      </p:sp>
-      <p:sp>
-        <p:nvSpPr>
-          <p:cNvPr id="3" name="Vertical Text Placeholder 2"/>
-          <p:cNvSpPr>
-            <a:spLocks noGrp="1"/>
-          </p:cNvSpPr>
-          <p:nvPr>
-            <p:ph type="body" orient="vert" idx="1"/>
-          </p:nvPr>
-        </p:nvSpPr>
-        <p:spPr/>
-        <p:txBody>
-          <a:bodyPr vert="eaVert"/>
-          <a:lstStyle/>
-          <a:p>
-            <a:pPr lvl="0"/>
-            <a:r>
-              <a:rPr lang="en-US" smtClean="0"/>
-              <a:t>Click to edit Master text styles</a:t>
-            </a:r>
-          </a:p>
-          <a:p>
-            <a:pPr lvl="1"/>
-            <a:r>
-              <a:rPr lang="en-US" smtClean="0"/>
-              <a:t>Second level</a:t>
-            </a:r>
-          </a:p>
-          <a:p>
-            <a:pPr lvl="2"/>
-            <a:r>
-              <a:rPr lang="en-US" smtClean="0"/>
-              <a:t>Third level</a:t>
-            </a:r>
-          </a:p>
-          <a:p>
-            <a:pPr lvl="3"/>
-            <a:r>
-              <a:rPr lang="en-US" smtClean="0"/>
-              <a:t>Fourth level</a:t>
-            </a:r>
-          </a:p>
-          <a:p>
-            <a:pPr lvl="4"/>
-            <a:r>
-              <a:rPr lang="en-US" smtClean="0"/>
-              <a:t>Fifth level</a:t>
-            </a:r>
-            <a:endParaRPr lang="en-US"/>
-          </a:p>
-        </p:txBody>
-      </p:sp>
-      <p:sp>
-        <p:nvSpPr>
-          <p:cNvPr id="4" name="Date Placeholder 3"/>
-          <p:cNvSpPr>
-            <a:spLocks noGrp="1"/>
-          </p:cNvSpPr>
-          <p:nvPr>
-            <p:ph type="dt" sz="half" idx="10"/>
-          </p:nvPr>
-        </p:nvSpPr>
-        <p:spPr/>
-        <p:txBody>
-          <a:bodyPr/>
-          <a:lstStyle/>
-          <a:p>
-            <a:fld id="{5BCAD085-E8A6-8845-BD4E-CB4CCA059FC4}" type="datetimeFigureOut">
-              <a:rPr lang="en-US" smtClean="0"/>
-              <a:t>1/27/13</a:t>
-            </a:fld>
-            <a:endParaRPr lang="en-US"/>
-          </a:p>
-        </p:txBody>
-      </p:sp>
-      <p:sp>
-        <p:nvSpPr>
-          <p:cNvPr id="5" name="Footer Placeholder 4"/>
-          <p:cNvSpPr>
-            <a:spLocks noGrp="1"/>
-          </p:cNvSpPr>
-          <p:nvPr>
-            <p:ph type="ftr" sz="quarter" idx="11"/>
-          </p:nvPr>
-        </p:nvSpPr>
-        <p:spPr/>
-        <p:txBody>
-          <a:bodyPr/>
-          <a:lstStyle/>
-          <a:p>
-            <a:endParaRPr lang="en-US"/>
-          </a:p>
-        </p:txBody>
-      </p:sp>
-      <p:sp>
-        <p:nvSpPr>
-          <p:cNvPr id="6" name="Slide Number Placeholder 5"/>
-          <p:cNvSpPr>
-            <a:spLocks noGrp="1"/>
-          </p:cNvSpPr>
-          <p:nvPr>
-            <p:ph type="sldNum" sz="quarter" idx="12"/>
-          </p:nvPr>
-        </p:nvSpPr>
-        <p:spPr/>
-        <p:txBody>
-          <a:bodyPr/>
-          <a:lstStyle/>
-          <a:p>
-            <a:fld id="{C1FF6DA9-008F-8B48-92A6-B652298478BF}" type="slidenum">
-              <a:rPr lang="en-US" smtClean="0"/>
-              <a:t>‹#›</a:t>
-            </a:fld>
-            <a:endParaRPr lang="en-US"/>
-          </a:p>
-        </p:txBody>
-      </p:sp>
-    </p:spTree>
-    <p:extLst>
-      <p:ext uri="{BB962C8B-B14F-4D97-AF65-F5344CB8AC3E}">
-        <p14:creationId xmlns:p14="http://schemas.microsoft.com/office/powerpoint/2010/main" val="2910927964"/>
-      </p:ext>
-    </p:extLst>
-  </p:cSld>
-  <p:clrMapOvr>
-    <a:masterClrMapping/>
-  </p:clrMapOvr>
-</p:sldLayout>
-</file>
-
-<file path=ppt/slideLayouts/slideLayout11.xml><?xml version="1.0" encoding="utf-8"?>
-<p:sldLayout xmlns:a="http://schemas.openxmlformats.org/drawingml/2006/main" xmlns:r="http://schemas.openxmlformats.org/officeDocument/2006/relationships" xmlns:p="http://schemas.openxmlformats.org/presentationml/2006/main" type="vertTitleAndTx" preserve="1">
-  <p:cSld name="Vertical Title and Text">
-    <p:spTree>
-      <p:nvGrpSpPr>
-        <p:cNvPr id="1" name=""/>
-        <p:cNvGrpSpPr/>
-        <p:nvPr/>
-      </p:nvGrpSpPr>
-      <p:grpSpPr>
-        <a:xfrm>
-          <a:off x="0" y="0"/>
-          <a:ext cx="0" cy="0"/>
-          <a:chOff x="0" y="0"/>
-          <a:chExt cx="0" cy="0"/>
-        </a:xfrm>
-      </p:grpSpPr>
-      <p:sp>
-        <p:nvSpPr>
-          <p:cNvPr id="2" name="Vertical Title 1"/>
-          <p:cNvSpPr>
-            <a:spLocks noGrp="1"/>
-          </p:cNvSpPr>
-          <p:nvPr>
-            <p:ph type="title" orient="vert"/>
-          </p:nvPr>
-        </p:nvSpPr>
-        <p:spPr>
-          <a:xfrm>
-            <a:off x="6629400" y="274638"/>
-            <a:ext cx="2057400" cy="5851525"/>
-          </a:xfrm>
-        </p:spPr>
-        <p:txBody>
-          <a:bodyPr vert="eaVert"/>
-          <a:lstStyle/>
-          <a:p>
-            <a:r>
-              <a:rPr lang="en-US" smtClean="0"/>
-              <a:t>Click to edit Master title style</a:t>
-            </a:r>
-            <a:endParaRPr lang="en-US"/>
-          </a:p>
-        </p:txBody>
-      </p:sp>
-      <p:sp>
-        <p:nvSpPr>
-          <p:cNvPr id="3" name="Vertical Text Placeholder 2"/>
-          <p:cNvSpPr>
-            <a:spLocks noGrp="1"/>
-          </p:cNvSpPr>
-          <p:nvPr>
-            <p:ph type="body" orient="vert" idx="1"/>
-          </p:nvPr>
-        </p:nvSpPr>
-        <p:spPr>
-          <a:xfrm>
-            <a:off x="457200" y="274638"/>
-            <a:ext cx="6019800" cy="5851525"/>
-          </a:xfrm>
-        </p:spPr>
-        <p:txBody>
-          <a:bodyPr vert="eaVert"/>
-          <a:lstStyle/>
-          <a:p>
-            <a:pPr lvl="0"/>
-            <a:r>
-              <a:rPr lang="en-US" smtClean="0"/>
-              <a:t>Click to edit Master text styles</a:t>
-            </a:r>
-          </a:p>
-          <a:p>
-            <a:pPr lvl="1"/>
-            <a:r>
-              <a:rPr lang="en-US" smtClean="0"/>
-              <a:t>Second level</a:t>
-            </a:r>
-          </a:p>
-          <a:p>
-            <a:pPr lvl="2"/>
-            <a:r>
-              <a:rPr lang="en-US" smtClean="0"/>
-              <a:t>Third level</a:t>
-            </a:r>
-          </a:p>
-          <a:p>
-            <a:pPr lvl="3"/>
-            <a:r>
-              <a:rPr lang="en-US" smtClean="0"/>
-              <a:t>Fourth level</a:t>
-            </a:r>
-          </a:p>
-          <a:p>
-            <a:pPr lvl="4"/>
-            <a:r>
-              <a:rPr lang="en-US" smtClean="0"/>
-              <a:t>Fifth level</a:t>
-            </a:r>
-            <a:endParaRPr lang="en-US"/>
-          </a:p>
-        </p:txBody>
-      </p:sp>
-      <p:sp>
-        <p:nvSpPr>
-          <p:cNvPr id="4" name="Date Placeholder 3"/>
-          <p:cNvSpPr>
-            <a:spLocks noGrp="1"/>
-          </p:cNvSpPr>
-          <p:nvPr>
-            <p:ph type="dt" sz="half" idx="10"/>
-          </p:nvPr>
-        </p:nvSpPr>
-        <p:spPr/>
-        <p:txBody>
-          <a:bodyPr/>
-          <a:lstStyle/>
-          <a:p>
-            <a:fld id="{5BCAD085-E8A6-8845-BD4E-CB4CCA059FC4}" type="datetimeFigureOut">
-              <a:rPr lang="en-US" smtClean="0"/>
-              <a:t>1/27/13</a:t>
-            </a:fld>
-            <a:endParaRPr lang="en-US"/>
-          </a:p>
-        </p:txBody>
-      </p:sp>
-      <p:sp>
-        <p:nvSpPr>
-          <p:cNvPr id="5" name="Footer Placeholder 4"/>
-          <p:cNvSpPr>
-            <a:spLocks noGrp="1"/>
-          </p:cNvSpPr>
-          <p:nvPr>
-            <p:ph type="ftr" sz="quarter" idx="11"/>
-          </p:nvPr>
-        </p:nvSpPr>
-        <p:spPr/>
-        <p:txBody>
-          <a:bodyPr/>
-          <a:lstStyle/>
-          <a:p>
-            <a:endParaRPr lang="en-US"/>
-          </a:p>
-        </p:txBody>
-      </p:sp>
-      <p:sp>
-        <p:nvSpPr>
-          <p:cNvPr id="6" name="Slide Number Placeholder 5"/>
-          <p:cNvSpPr>
-            <a:spLocks noGrp="1"/>
-          </p:cNvSpPr>
-          <p:nvPr>
-            <p:ph type="sldNum" sz="quarter" idx="12"/>
-          </p:nvPr>
-        </p:nvSpPr>
-        <p:spPr/>
-        <p:txBody>
-          <a:bodyPr/>
-          <a:lstStyle/>
-          <a:p>
-            <a:fld id="{C1FF6DA9-008F-8B48-92A6-B652298478BF}" type="slidenum">
-              <a:rPr lang="en-US" smtClean="0"/>
-              <a:t>‹#›</a:t>
-            </a:fld>
-            <a:endParaRPr lang="en-US"/>
-          </a:p>
-        </p:txBody>
-      </p:sp>
-    </p:spTree>
-    <p:extLst>
-      <p:ext uri="{BB962C8B-B14F-4D97-AF65-F5344CB8AC3E}">
-        <p14:creationId xmlns:p14="http://schemas.microsoft.com/office/powerpoint/2010/main" val="3612223792"/>
-      </p:ext>
-    </p:extLst>
-  </p:cSld>
-  <p:clrMapOvr>
-    <a:masterClrMapping/>
-  </p:clrMapOvr>
-</p:sldLayout>
-</file>
-
-<file path=ppt/slideLayouts/slideLayout2.xml><?xml version="1.0" encoding="utf-8"?>
-<p:sldLayout xmlns:a="http://schemas.openxmlformats.org/drawingml/2006/main" xmlns:r="http://schemas.openxmlformats.org/officeDocument/2006/relationships" xmlns:p="http://schemas.openxmlformats.org/presentationml/2006/main" type="obj" preserve="1">
-  <p:cSld name="Title and Content">
-    <p:spTree>
-      <p:nvGrpSpPr>
-        <p:cNvPr id="1" name=""/>
-        <p:cNvGrpSpPr/>
-        <p:nvPr/>
-      </p:nvGrpSpPr>
-      <p:grpSpPr>
-        <a:xfrm>
-          <a:off x="0" y="0"/>
-          <a:ext cx="0" cy="0"/>
-          <a:chOff x="0" y="0"/>
-          <a:chExt cx="0" cy="0"/>
-        </a:xfrm>
-      </p:grpSpPr>
-      <p:sp>
-        <p:nvSpPr>
-          <p:cNvPr id="2" name="Title 1"/>
-          <p:cNvSpPr>
-            <a:spLocks noGrp="1"/>
-          </p:cNvSpPr>
-          <p:nvPr>
-            <p:ph type="title"/>
-          </p:nvPr>
-        </p:nvSpPr>
-        <p:spPr/>
-        <p:txBody>
-          <a:bodyPr/>
-          <a:lstStyle/>
-          <a:p>
-            <a:r>
-              <a:rPr lang="en-US" smtClean="0"/>
-              <a:t>Click to edit Master title style</a:t>
-            </a:r>
-            <a:endParaRPr lang="en-US"/>
-          </a:p>
-        </p:txBody>
-      </p:sp>
-      <p:sp>
-        <p:nvSpPr>
-          <p:cNvPr id="3" name="Content Placeholder 2"/>
-          <p:cNvSpPr>
-            <a:spLocks noGrp="1"/>
-          </p:cNvSpPr>
-          <p:nvPr>
-            <p:ph idx="1"/>
-          </p:nvPr>
-        </p:nvSpPr>
-        <p:spPr/>
-        <p:txBody>
-          <a:bodyPr/>
-          <a:lstStyle/>
-          <a:p>
-            <a:pPr lvl="0"/>
-            <a:r>
-              <a:rPr lang="en-US" smtClean="0"/>
-              <a:t>Click to edit Master text styles</a:t>
-            </a:r>
-          </a:p>
-          <a:p>
-            <a:pPr lvl="1"/>
-            <a:r>
-              <a:rPr lang="en-US" smtClean="0"/>
-              <a:t>Second level</a:t>
-            </a:r>
-          </a:p>
-          <a:p>
-            <a:pPr lvl="2"/>
-            <a:r>
-              <a:rPr lang="en-US" smtClean="0"/>
-              <a:t>Third level</a:t>
-            </a:r>
-          </a:p>
-          <a:p>
-            <a:pPr lvl="3"/>
-            <a:r>
-              <a:rPr lang="en-US" smtClean="0"/>
-              <a:t>Fourth level</a:t>
-            </a:r>
-          </a:p>
-          <a:p>
-            <a:pPr lvl="4"/>
-            <a:r>
-              <a:rPr lang="en-US" smtClean="0"/>
-              <a:t>Fifth level</a:t>
-            </a:r>
-            <a:endParaRPr lang="en-US"/>
-          </a:p>
-        </p:txBody>
-      </p:sp>
-      <p:sp>
-        <p:nvSpPr>
-          <p:cNvPr id="4" name="Date Placeholder 3"/>
-          <p:cNvSpPr>
-            <a:spLocks noGrp="1"/>
-          </p:cNvSpPr>
-          <p:nvPr>
-            <p:ph type="dt" sz="half" idx="10"/>
-          </p:nvPr>
-        </p:nvSpPr>
-        <p:spPr/>
-        <p:txBody>
-          <a:bodyPr/>
-          <a:lstStyle/>
-          <a:p>
-            <a:fld id="{5BCAD085-E8A6-8845-BD4E-CB4CCA059FC4}" type="datetimeFigureOut">
-              <a:rPr lang="en-US" smtClean="0"/>
-              <a:t>1/27/13</a:t>
-            </a:fld>
-            <a:endParaRPr lang="en-US"/>
-          </a:p>
-        </p:txBody>
-      </p:sp>
-      <p:sp>
-        <p:nvSpPr>
-          <p:cNvPr id="5" name="Footer Placeholder 4"/>
-          <p:cNvSpPr>
-            <a:spLocks noGrp="1"/>
-          </p:cNvSpPr>
-          <p:nvPr>
-            <p:ph type="ftr" sz="quarter" idx="11"/>
-          </p:nvPr>
-        </p:nvSpPr>
-        <p:spPr/>
-        <p:txBody>
-          <a:bodyPr/>
-          <a:lstStyle/>
-          <a:p>
-            <a:endParaRPr lang="en-US"/>
-          </a:p>
-        </p:txBody>
-      </p:sp>
-      <p:sp>
-        <p:nvSpPr>
-          <p:cNvPr id="6" name="Slide Number Placeholder 5"/>
-          <p:cNvSpPr>
-            <a:spLocks noGrp="1"/>
-          </p:cNvSpPr>
-          <p:nvPr>
-            <p:ph type="sldNum" sz="quarter" idx="12"/>
-          </p:nvPr>
-        </p:nvSpPr>
-        <p:spPr/>
-        <p:txBody>
-          <a:bodyPr/>
-          <a:lstStyle/>
-          <a:p>
-            <a:fld id="{C1FF6DA9-008F-8B48-92A6-B652298478BF}" type="slidenum">
-              <a:rPr lang="en-US" smtClean="0"/>
-              <a:t>‹#›</a:t>
-            </a:fld>
-            <a:endParaRPr lang="en-US"/>
-          </a:p>
-        </p:txBody>
-      </p:sp>
-    </p:spTree>
-    <p:extLst>
-      <p:ext uri="{BB962C8B-B14F-4D97-AF65-F5344CB8AC3E}">
-        <p14:creationId xmlns:p14="http://schemas.microsoft.com/office/powerpoint/2010/main" val="2614314258"/>
-      </p:ext>
-    </p:extLst>
-  </p:cSld>
-  <p:clrMapOvr>
-    <a:masterClrMapping/>
-  </p:clrMapOvr>
-</p:sldLayout>
-</file>
-
-<file path=ppt/slideLayouts/slideLayout3.xml><?xml version="1.0" encoding="utf-8"?>
-<p:sldLayout xmlns:a="http://schemas.openxmlformats.org/drawingml/2006/main" xmlns:r="http://schemas.openxmlformats.org/officeDocument/2006/relationships" xmlns:p="http://schemas.openxmlformats.org/presentationml/2006/main" type="secHead" preserve="1">
-  <p:cSld name="Section Header">
-    <p:spTree>
-      <p:nvGrpSpPr>
-        <p:cNvPr id="1" name=""/>
-        <p:cNvGrpSpPr/>
-        <p:nvPr/>
-      </p:nvGrpSpPr>
-      <p:grpSpPr>
-        <a:xfrm>
-          <a:off x="0" y="0"/>
-          <a:ext cx="0" cy="0"/>
-          <a:chOff x="0" y="0"/>
-          <a:chExt cx="0" cy="0"/>
-        </a:xfrm>
-      </p:grpSpPr>
-      <p:sp>
-        <p:nvSpPr>
-          <p:cNvPr id="2" name="Title 1"/>
-          <p:cNvSpPr>
-            <a:spLocks noGrp="1"/>
-          </p:cNvSpPr>
-          <p:nvPr>
-            <p:ph type="title"/>
-          </p:nvPr>
-        </p:nvSpPr>
-        <p:spPr>
-          <a:xfrm>
-            <a:off x="722313" y="4406900"/>
-            <a:ext cx="7772400" cy="1362075"/>
-          </a:xfrm>
-        </p:spPr>
-        <p:txBody>
-          <a:bodyPr anchor="t"/>
-          <a:lstStyle>
-            <a:lvl1pPr algn="l">
-              <a:defRPr sz="4000" b="1" cap="all"/>
-            </a:lvl1pPr>
-          </a:lstStyle>
-          <a:p>
-            <a:r>
-              <a:rPr lang="en-US" smtClean="0"/>
-              <a:t>Click to edit Master title style</a:t>
-            </a:r>
-            <a:endParaRPr lang="en-US"/>
-          </a:p>
-        </p:txBody>
-      </p:sp>
-      <p:sp>
-        <p:nvSpPr>
-          <p:cNvPr id="3" name="Text Placeholder 2"/>
-          <p:cNvSpPr>
-            <a:spLocks noGrp="1"/>
-          </p:cNvSpPr>
-          <p:nvPr>
-            <p:ph type="body" idx="1"/>
-          </p:nvPr>
-        </p:nvSpPr>
-        <p:spPr>
-          <a:xfrm>
-            <a:off x="722313" y="2906713"/>
-            <a:ext cx="7772400" cy="1500187"/>
-          </a:xfrm>
-        </p:spPr>
-        <p:txBody>
-          <a:bodyPr anchor="b"/>
-          <a:lstStyle>
-            <a:lvl1pPr marL="0" indent="0">
-              <a:buNone/>
-              <a:defRPr sz="2000">
-                <a:solidFill>
-                  <a:schemeClr val="tx1">
-                    <a:tint val="75000"/>
-                  </a:schemeClr>
-                </a:solidFill>
-              </a:defRPr>
-            </a:lvl1pPr>
-            <a:lvl2pPr marL="457200" indent="0">
-              <a:buNone/>
-              <a:defRPr sz="1800">
-                <a:solidFill>
-                  <a:schemeClr val="tx1">
-                    <a:tint val="75000"/>
-                  </a:schemeClr>
-                </a:solidFill>
-              </a:defRPr>
-            </a:lvl2pPr>
-            <a:lvl3pPr marL="914400" indent="0">
-              <a:buNone/>
-              <a:defRPr sz="1600">
-                <a:solidFill>
-                  <a:schemeClr val="tx1">
-                    <a:tint val="75000"/>
-                  </a:schemeClr>
-                </a:solidFill>
-              </a:defRPr>
-            </a:lvl3pPr>
-            <a:lvl4pPr marL="1371600" indent="0">
-              <a:buNone/>
-              <a:defRPr sz="1400">
-                <a:solidFill>
-                  <a:schemeClr val="tx1">
-                    <a:tint val="75000"/>
-                  </a:schemeClr>
-                </a:solidFill>
-              </a:defRPr>
-            </a:lvl4pPr>
-            <a:lvl5pPr marL="1828800" indent="0">
-              <a:buNone/>
-              <a:defRPr sz="1400">
-                <a:solidFill>
-                  <a:schemeClr val="tx1">
-                    <a:tint val="75000"/>
-                  </a:schemeClr>
-                </a:solidFill>
-              </a:defRPr>
-            </a:lvl5pPr>
-            <a:lvl6pPr marL="2286000" indent="0">
-              <a:buNone/>
-              <a:defRPr sz="1400">
-                <a:solidFill>
-                  <a:schemeClr val="tx1">
-                    <a:tint val="75000"/>
-                  </a:schemeClr>
-                </a:solidFill>
-              </a:defRPr>
-            </a:lvl6pPr>
-            <a:lvl7pPr marL="2743200" indent="0">
-              <a:buNone/>
-              <a:defRPr sz="1400">
-                <a:solidFill>
-                  <a:schemeClr val="tx1">
-                    <a:tint val="75000"/>
-                  </a:schemeClr>
-                </a:solidFill>
-              </a:defRPr>
-            </a:lvl7pPr>
-            <a:lvl8pPr marL="3200400" indent="0">
-              <a:buNone/>
-              <a:defRPr sz="1400">
-                <a:solidFill>
-                  <a:schemeClr val="tx1">
-                    <a:tint val="75000"/>
-                  </a:schemeClr>
-                </a:solidFill>
-              </a:defRPr>
-            </a:lvl8pPr>
-            <a:lvl9pPr marL="3657600" indent="0">
-              <a:buNone/>
-              <a:defRPr sz="1400">
-                <a:solidFill>
-                  <a:schemeClr val="tx1">
-                    <a:tint val="75000"/>
-                  </a:schemeClr>
-                </a:solidFill>
-              </a:defRPr>
-            </a:lvl9pPr>
-          </a:lstStyle>
-          <a:p>
-            <a:pPr lvl="0"/>
-            <a:r>
-              <a:rPr lang="en-US" smtClean="0"/>
-              <a:t>Click to edit Master text styles</a:t>
-            </a:r>
-          </a:p>
-        </p:txBody>
-      </p:sp>
-      <p:sp>
-        <p:nvSpPr>
-          <p:cNvPr id="4" name="Date Placeholder 3"/>
-          <p:cNvSpPr>
-            <a:spLocks noGrp="1"/>
-          </p:cNvSpPr>
-          <p:nvPr>
-            <p:ph type="dt" sz="half" idx="10"/>
-          </p:nvPr>
-        </p:nvSpPr>
-        <p:spPr/>
-        <p:txBody>
-          <a:bodyPr/>
-          <a:lstStyle/>
-          <a:p>
-            <a:fld id="{5BCAD085-E8A6-8845-BD4E-CB4CCA059FC4}" type="datetimeFigureOut">
-              <a:rPr lang="en-US" smtClean="0"/>
-              <a:t>1/27/13</a:t>
-            </a:fld>
-            <a:endParaRPr lang="en-US"/>
-          </a:p>
-        </p:txBody>
-      </p:sp>
-      <p:sp>
-        <p:nvSpPr>
-          <p:cNvPr id="5" name="Footer Placeholder 4"/>
-          <p:cNvSpPr>
-            <a:spLocks noGrp="1"/>
-          </p:cNvSpPr>
-          <p:nvPr>
-            <p:ph type="ftr" sz="quarter" idx="11"/>
-          </p:nvPr>
-        </p:nvSpPr>
-        <p:spPr/>
-        <p:txBody>
-          <a:bodyPr/>
-          <a:lstStyle/>
-          <a:p>
-            <a:endParaRPr lang="en-US"/>
-          </a:p>
-        </p:txBody>
-      </p:sp>
-      <p:sp>
-        <p:nvSpPr>
-          <p:cNvPr id="6" name="Slide Number Placeholder 5"/>
-          <p:cNvSpPr>
-            <a:spLocks noGrp="1"/>
-          </p:cNvSpPr>
-          <p:nvPr>
-            <p:ph type="sldNum" sz="quarter" idx="12"/>
-          </p:nvPr>
-        </p:nvSpPr>
-        <p:spPr/>
-        <p:txBody>
-          <a:bodyPr/>
-          <a:lstStyle/>
-          <a:p>
-            <a:fld id="{C1FF6DA9-008F-8B48-92A6-B652298478BF}" type="slidenum">
-              <a:rPr lang="en-US" smtClean="0"/>
-              <a:t>‹#›</a:t>
-            </a:fld>
-            <a:endParaRPr lang="en-US"/>
-          </a:p>
-        </p:txBody>
-      </p:sp>
-    </p:spTree>
-    <p:extLst>
-      <p:ext uri="{BB962C8B-B14F-4D97-AF65-F5344CB8AC3E}">
-        <p14:creationId xmlns:p14="http://schemas.microsoft.com/office/powerpoint/2010/main" val="960648375"/>
-      </p:ext>
-    </p:extLst>
-  </p:cSld>
-  <p:clrMapOvr>
-    <a:masterClrMapping/>
-  </p:clrMapOvr>
-</p:sldLayout>
-</file>
-
-<file path=ppt/slideLayouts/slideLayout4.xml><?xml version="1.0" encoding="utf-8"?>
-<p:sldLayout xmlns:a="http://schemas.openxmlformats.org/drawingml/2006/main" xmlns:r="http://schemas.openxmlformats.org/officeDocument/2006/relationships" xmlns:p="http://schemas.openxmlformats.org/presentationml/2006/main" type="twoObj" preserve="1">
-  <p:cSld name="Two Content">
-    <p:spTree>
-      <p:nvGrpSpPr>
-        <p:cNvPr id="1" name=""/>
-        <p:cNvGrpSpPr/>
-        <p:nvPr/>
-      </p:nvGrpSpPr>
-      <p:grpSpPr>
-        <a:xfrm>
-          <a:off x="0" y="0"/>
-          <a:ext cx="0" cy="0"/>
-          <a:chOff x="0" y="0"/>
-          <a:chExt cx="0" cy="0"/>
-        </a:xfrm>
-      </p:grpSpPr>
-      <p:sp>
-        <p:nvSpPr>
-          <p:cNvPr id="2" name="Title 1"/>
-          <p:cNvSpPr>
-            <a:spLocks noGrp="1"/>
-          </p:cNvSpPr>
-          <p:nvPr>
-            <p:ph type="title"/>
-          </p:nvPr>
-        </p:nvSpPr>
-        <p:spPr/>
-        <p:txBody>
-          <a:bodyPr/>
-          <a:lstStyle/>
-          <a:p>
-            <a:r>
-              <a:rPr lang="en-US" smtClean="0"/>
-              <a:t>Click to edit Master title style</a:t>
-            </a:r>
-            <a:endParaRPr lang="en-US"/>
-          </a:p>
-        </p:txBody>
-      </p:sp>
-      <p:sp>
-        <p:nvSpPr>
-          <p:cNvPr id="3" name="Content Placeholder 2"/>
-          <p:cNvSpPr>
-            <a:spLocks noGrp="1"/>
-          </p:cNvSpPr>
-          <p:nvPr>
-            <p:ph sz="half" idx="1"/>
-          </p:nvPr>
-        </p:nvSpPr>
-        <p:spPr>
-          <a:xfrm>
-            <a:off x="457200" y="1600200"/>
-            <a:ext cx="4038600" cy="4525963"/>
-          </a:xfrm>
-        </p:spPr>
-        <p:txBody>
-          <a:bodyPr/>
-          <a:lstStyle>
-            <a:lvl1pPr>
-              <a:defRPr sz="2800"/>
-            </a:lvl1pPr>
-            <a:lvl2pPr>
-              <a:defRPr sz="2400"/>
-            </a:lvl2pPr>
-            <a:lvl3pPr>
-              <a:defRPr sz="2000"/>
-            </a:lvl3pPr>
-            <a:lvl4pPr>
-              <a:defRPr sz="1800"/>
-            </a:lvl4pPr>
-            <a:lvl5pPr>
-              <a:defRPr sz="1800"/>
-            </a:lvl5pPr>
-            <a:lvl6pPr>
-              <a:defRPr sz="1800"/>
-            </a:lvl6pPr>
-            <a:lvl7pPr>
-              <a:defRPr sz="1800"/>
-            </a:lvl7pPr>
-            <a:lvl8pPr>
-              <a:defRPr sz="1800"/>
-            </a:lvl8pPr>
-            <a:lvl9pPr>
-              <a:defRPr sz="1800"/>
-            </a:lvl9pPr>
-          </a:lstStyle>
-          <a:p>
-            <a:pPr lvl="0"/>
-            <a:r>
-              <a:rPr lang="en-US" smtClean="0"/>
-              <a:t>Click to edit Master text styles</a:t>
-            </a:r>
-          </a:p>
-          <a:p>
-            <a:pPr lvl="1"/>
-            <a:r>
-              <a:rPr lang="en-US" smtClean="0"/>
-              <a:t>Second level</a:t>
-            </a:r>
-          </a:p>
-          <a:p>
-            <a:pPr lvl="2"/>
-            <a:r>
-              <a:rPr lang="en-US" smtClean="0"/>
-              <a:t>Third level</a:t>
-            </a:r>
-          </a:p>
-          <a:p>
-            <a:pPr lvl="3"/>
-            <a:r>
-              <a:rPr lang="en-US" smtClean="0"/>
-              <a:t>Fourth level</a:t>
-            </a:r>
-          </a:p>
-          <a:p>
-            <a:pPr lvl="4"/>
-            <a:r>
-              <a:rPr lang="en-US" smtClean="0"/>
-              <a:t>Fifth level</a:t>
-            </a:r>
-            <a:endParaRPr lang="en-US"/>
-          </a:p>
-        </p:txBody>
-      </p:sp>
-      <p:sp>
-        <p:nvSpPr>
-          <p:cNvPr id="4" name="Content Placeholder 3"/>
-          <p:cNvSpPr>
-            <a:spLocks noGrp="1"/>
-          </p:cNvSpPr>
-          <p:nvPr>
-            <p:ph sz="half" idx="2"/>
-          </p:nvPr>
-        </p:nvSpPr>
-        <p:spPr>
-          <a:xfrm>
-            <a:off x="4648200" y="1600200"/>
-            <a:ext cx="4038600" cy="4525963"/>
-          </a:xfrm>
-        </p:spPr>
-        <p:txBody>
-          <a:bodyPr/>
-          <a:lstStyle>
-            <a:lvl1pPr>
-              <a:defRPr sz="2800"/>
-            </a:lvl1pPr>
-            <a:lvl2pPr>
-              <a:defRPr sz="2400"/>
-            </a:lvl2pPr>
-            <a:lvl3pPr>
-              <a:defRPr sz="2000"/>
-            </a:lvl3pPr>
-            <a:lvl4pPr>
-              <a:defRPr sz="1800"/>
-            </a:lvl4pPr>
-            <a:lvl5pPr>
-              <a:defRPr sz="1800"/>
-            </a:lvl5pPr>
-            <a:lvl6pPr>
-              <a:defRPr sz="1800"/>
-            </a:lvl6pPr>
-            <a:lvl7pPr>
-              <a:defRPr sz="1800"/>
-            </a:lvl7pPr>
-            <a:lvl8pPr>
-              <a:defRPr sz="1800"/>
-            </a:lvl8pPr>
-            <a:lvl9pPr>
-              <a:defRPr sz="1800"/>
-            </a:lvl9pPr>
-          </a:lstStyle>
-          <a:p>
-            <a:pPr lvl="0"/>
-            <a:r>
-              <a:rPr lang="en-US" smtClean="0"/>
-              <a:t>Click to edit Master text styles</a:t>
-            </a:r>
-          </a:p>
-          <a:p>
-            <a:pPr lvl="1"/>
-            <a:r>
-              <a:rPr lang="en-US" smtClean="0"/>
-              <a:t>Second level</a:t>
-            </a:r>
-          </a:p>
-          <a:p>
-            <a:pPr lvl="2"/>
-            <a:r>
-              <a:rPr lang="en-US" smtClean="0"/>
-              <a:t>Third level</a:t>
-            </a:r>
-          </a:p>
-          <a:p>
-            <a:pPr lvl="3"/>
-            <a:r>
-              <a:rPr lang="en-US" smtClean="0"/>
-              <a:t>Fourth level</a:t>
-            </a:r>
-          </a:p>
-          <a:p>
-            <a:pPr lvl="4"/>
-            <a:r>
-              <a:rPr lang="en-US" smtClean="0"/>
-              <a:t>Fifth level</a:t>
-            </a:r>
-            <a:endParaRPr lang="en-US"/>
-          </a:p>
-        </p:txBody>
-      </p:sp>
-      <p:sp>
-        <p:nvSpPr>
-          <p:cNvPr id="5" name="Date Placeholder 4"/>
-          <p:cNvSpPr>
-            <a:spLocks noGrp="1"/>
-          </p:cNvSpPr>
-          <p:nvPr>
-            <p:ph type="dt" sz="half" idx="10"/>
-          </p:nvPr>
-        </p:nvSpPr>
-        <p:spPr/>
-        <p:txBody>
-          <a:bodyPr/>
-          <a:lstStyle/>
-          <a:p>
-            <a:fld id="{5BCAD085-E8A6-8845-BD4E-CB4CCA059FC4}" type="datetimeFigureOut">
-              <a:rPr lang="en-US" smtClean="0"/>
-              <a:t>1/27/13</a:t>
-            </a:fld>
-            <a:endParaRPr lang="en-US"/>
-          </a:p>
-        </p:txBody>
-      </p:sp>
-      <p:sp>
-        <p:nvSpPr>
-          <p:cNvPr id="6" name="Footer Placeholder 5"/>
-          <p:cNvSpPr>
-            <a:spLocks noGrp="1"/>
-          </p:cNvSpPr>
-          <p:nvPr>
-            <p:ph type="ftr" sz="quarter" idx="11"/>
-          </p:nvPr>
-        </p:nvSpPr>
-        <p:spPr/>
-        <p:txBody>
-          <a:bodyPr/>
-          <a:lstStyle/>
-          <a:p>
-            <a:endParaRPr lang="en-US"/>
-          </a:p>
-        </p:txBody>
-      </p:sp>
-      <p:sp>
-        <p:nvSpPr>
-          <p:cNvPr id="7" name="Slide Number Placeholder 6"/>
-          <p:cNvSpPr>
-            <a:spLocks noGrp="1"/>
-          </p:cNvSpPr>
-          <p:nvPr>
-            <p:ph type="sldNum" sz="quarter" idx="12"/>
-          </p:nvPr>
-        </p:nvSpPr>
-        <p:spPr/>
-        <p:txBody>
-          <a:bodyPr/>
-          <a:lstStyle/>
-          <a:p>
-            <a:fld id="{C1FF6DA9-008F-8B48-92A6-B652298478BF}" type="slidenum">
-              <a:rPr lang="en-US" smtClean="0"/>
-              <a:t>‹#›</a:t>
-            </a:fld>
-            <a:endParaRPr lang="en-US"/>
-          </a:p>
-        </p:txBody>
-      </p:sp>
-    </p:spTree>
-    <p:extLst>
-      <p:ext uri="{BB962C8B-B14F-4D97-AF65-F5344CB8AC3E}">
-        <p14:creationId xmlns:p14="http://schemas.microsoft.com/office/powerpoint/2010/main" val="2782244947"/>
-      </p:ext>
-    </p:extLst>
-  </p:cSld>
-  <p:clrMapOvr>
-    <a:masterClrMapping/>
-  </p:clrMapOvr>
-</p:sldLayout>
-</file>
-
-<file path=ppt/slideLayouts/slideLayout5.xml><?xml version="1.0" encoding="utf-8"?>
-<p:sldLayout xmlns:a="http://schemas.openxmlformats.org/drawingml/2006/main" xmlns:r="http://schemas.openxmlformats.org/officeDocument/2006/relationships" xmlns:p="http://schemas.openxmlformats.org/presentationml/2006/main" type="twoTxTwoObj" preserve="1">
-  <p:cSld name="Comparison">
-    <p:spTree>
-      <p:nvGrpSpPr>
-        <p:cNvPr id="1" name=""/>
-        <p:cNvGrpSpPr/>
-        <p:nvPr/>
-      </p:nvGrpSpPr>
-      <p:grpSpPr>
-        <a:xfrm>
-          <a:off x="0" y="0"/>
-          <a:ext cx="0" cy="0"/>
-          <a:chOff x="0" y="0"/>
-          <a:chExt cx="0" cy="0"/>
-        </a:xfrm>
-      </p:grpSpPr>
-      <p:sp>
-        <p:nvSpPr>
-          <p:cNvPr id="2" name="Title 1"/>
-          <p:cNvSpPr>
-            <a:spLocks noGrp="1"/>
-          </p:cNvSpPr>
-          <p:nvPr>
-            <p:ph type="title"/>
-          </p:nvPr>
-        </p:nvSpPr>
-        <p:spPr/>
-        <p:txBody>
-          <a:bodyPr/>
-          <a:lstStyle>
-            <a:lvl1pPr>
-              <a:defRPr/>
-            </a:lvl1pPr>
-          </a:lstStyle>
-          <a:p>
-            <a:r>
-              <a:rPr lang="en-US" smtClean="0"/>
-              <a:t>Click to edit Master title style</a:t>
-            </a:r>
-            <a:endParaRPr lang="en-US"/>
-          </a:p>
-        </p:txBody>
-      </p:sp>
-      <p:sp>
-        <p:nvSpPr>
-          <p:cNvPr id="3" name="Text Placeholder 2"/>
-          <p:cNvSpPr>
-            <a:spLocks noGrp="1"/>
-          </p:cNvSpPr>
-          <p:nvPr>
-            <p:ph type="body" idx="1"/>
-          </p:nvPr>
-        </p:nvSpPr>
-        <p:spPr>
-          <a:xfrm>
-            <a:off x="457200" y="1535113"/>
-            <a:ext cx="4040188" cy="639762"/>
-          </a:xfrm>
-        </p:spPr>
-        <p:txBody>
-          <a:bodyPr anchor="b"/>
-          <a:lstStyle>
-            <a:lvl1pPr marL="0" indent="0">
-              <a:buNone/>
-              <a:defRPr sz="2400" b="1"/>
-            </a:lvl1pPr>
-            <a:lvl2pPr marL="457200" indent="0">
-              <a:buNone/>
-              <a:defRPr sz="2000" b="1"/>
-            </a:lvl2pPr>
-            <a:lvl3pPr marL="914400" indent="0">
-              <a:buNone/>
-              <a:defRPr sz="1800" b="1"/>
-            </a:lvl3pPr>
-            <a:lvl4pPr marL="1371600" indent="0">
-              <a:buNone/>
-              <a:defRPr sz="1600" b="1"/>
-            </a:lvl4pPr>
-            <a:lvl5pPr marL="1828800" indent="0">
-              <a:buNone/>
-              <a:defRPr sz="1600" b="1"/>
-            </a:lvl5pPr>
-            <a:lvl6pPr marL="2286000" indent="0">
-              <a:buNone/>
-              <a:defRPr sz="1600" b="1"/>
-            </a:lvl6pPr>
-            <a:lvl7pPr marL="2743200" indent="0">
-              <a:buNone/>
-              <a:defRPr sz="1600" b="1"/>
-            </a:lvl7pPr>
-            <a:lvl8pPr marL="3200400" indent="0">
-              <a:buNone/>
-              <a:defRPr sz="1600" b="1"/>
-            </a:lvl8pPr>
-            <a:lvl9pPr marL="3657600" indent="0">
-              <a:buNone/>
-              <a:defRPr sz="1600" b="1"/>
-            </a:lvl9pPr>
-          </a:lstStyle>
-          <a:p>
-            <a:pPr lvl="0"/>
-            <a:r>
-              <a:rPr lang="en-US" smtClean="0"/>
-              <a:t>Click to edit Master text styles</a:t>
-            </a:r>
-          </a:p>
-        </p:txBody>
-      </p:sp>
-      <p:sp>
-        <p:nvSpPr>
-          <p:cNvPr id="4" name="Content Placeholder 3"/>
-          <p:cNvSpPr>
-            <a:spLocks noGrp="1"/>
-          </p:cNvSpPr>
-          <p:nvPr>
-            <p:ph sz="half" idx="2"/>
-          </p:nvPr>
-        </p:nvSpPr>
-        <p:spPr>
-          <a:xfrm>
-            <a:off x="457200" y="2174875"/>
-            <a:ext cx="4040188" cy="3951288"/>
-          </a:xfrm>
-        </p:spPr>
-        <p:txBody>
-          <a:bodyPr/>
-          <a:lstStyle>
-            <a:lvl1pPr>
-              <a:defRPr sz="2400"/>
-            </a:lvl1pPr>
-            <a:lvl2pPr>
-              <a:defRPr sz="2000"/>
-            </a:lvl2pPr>
-            <a:lvl3pPr>
-              <a:defRPr sz="1800"/>
-            </a:lvl3pPr>
-            <a:lvl4pPr>
-              <a:defRPr sz="1600"/>
-            </a:lvl4pPr>
-            <a:lvl5pPr>
-              <a:defRPr sz="1600"/>
-            </a:lvl5pPr>
-            <a:lvl6pPr>
-              <a:defRPr sz="1600"/>
-            </a:lvl6pPr>
-            <a:lvl7pPr>
-              <a:defRPr sz="1600"/>
-            </a:lvl7pPr>
-            <a:lvl8pPr>
-              <a:defRPr sz="1600"/>
-            </a:lvl8pPr>
-            <a:lvl9pPr>
-              <a:defRPr sz="1600"/>
-            </a:lvl9pPr>
-          </a:lstStyle>
-          <a:p>
-            <a:pPr lvl="0"/>
-            <a:r>
-              <a:rPr lang="en-US" smtClean="0"/>
-              <a:t>Click to edit Master text styles</a:t>
-            </a:r>
-          </a:p>
-          <a:p>
-            <a:pPr lvl="1"/>
-            <a:r>
-              <a:rPr lang="en-US" smtClean="0"/>
-              <a:t>Second level</a:t>
-            </a:r>
-          </a:p>
-          <a:p>
-            <a:pPr lvl="2"/>
-            <a:r>
-              <a:rPr lang="en-US" smtClean="0"/>
-              <a:t>Third level</a:t>
-            </a:r>
-          </a:p>
-          <a:p>
-            <a:pPr lvl="3"/>
-            <a:r>
-              <a:rPr lang="en-US" smtClean="0"/>
-              <a:t>Fourth level</a:t>
-            </a:r>
-          </a:p>
-          <a:p>
-            <a:pPr lvl="4"/>
-            <a:r>
-              <a:rPr lang="en-US" smtClean="0"/>
-              <a:t>Fifth level</a:t>
-            </a:r>
-            <a:endParaRPr lang="en-US"/>
-          </a:p>
-        </p:txBody>
-      </p:sp>
-      <p:sp>
-        <p:nvSpPr>
-          <p:cNvPr id="5" name="Text Placeholder 4"/>
-          <p:cNvSpPr>
-            <a:spLocks noGrp="1"/>
-          </p:cNvSpPr>
-          <p:nvPr>
-            <p:ph type="body" sz="quarter" idx="3"/>
-          </p:nvPr>
-        </p:nvSpPr>
-        <p:spPr>
-          <a:xfrm>
-            <a:off x="4645025" y="1535113"/>
-            <a:ext cx="4041775" cy="639762"/>
-          </a:xfrm>
-        </p:spPr>
-        <p:txBody>
-          <a:bodyPr anchor="b"/>
-          <a:lstStyle>
-            <a:lvl1pPr marL="0" indent="0">
-              <a:buNone/>
-              <a:defRPr sz="2400" b="1"/>
-            </a:lvl1pPr>
-            <a:lvl2pPr marL="457200" indent="0">
-              <a:buNone/>
-              <a:defRPr sz="2000" b="1"/>
-            </a:lvl2pPr>
-            <a:lvl3pPr marL="914400" indent="0">
-              <a:buNone/>
-              <a:defRPr sz="1800" b="1"/>
-            </a:lvl3pPr>
-            <a:lvl4pPr marL="1371600" indent="0">
-              <a:buNone/>
-              <a:defRPr sz="1600" b="1"/>
-            </a:lvl4pPr>
-            <a:lvl5pPr marL="1828800" indent="0">
-              <a:buNone/>
-              <a:defRPr sz="1600" b="1"/>
-            </a:lvl5pPr>
-            <a:lvl6pPr marL="2286000" indent="0">
-              <a:buNone/>
-              <a:defRPr sz="1600" b="1"/>
-            </a:lvl6pPr>
-            <a:lvl7pPr marL="2743200" indent="0">
-              <a:buNone/>
-              <a:defRPr sz="1600" b="1"/>
-            </a:lvl7pPr>
-            <a:lvl8pPr marL="3200400" indent="0">
-              <a:buNone/>
-              <a:defRPr sz="1600" b="1"/>
-            </a:lvl8pPr>
-            <a:lvl9pPr marL="3657600" indent="0">
-              <a:buNone/>
-              <a:defRPr sz="1600" b="1"/>
-            </a:lvl9pPr>
-          </a:lstStyle>
-          <a:p>
-            <a:pPr lvl="0"/>
-            <a:r>
-              <a:rPr lang="en-US" smtClean="0"/>
-              <a:t>Click to edit Master text styles</a:t>
-            </a:r>
-          </a:p>
-        </p:txBody>
-      </p:sp>
-      <p:sp>
-        <p:nvSpPr>
-          <p:cNvPr id="6" name="Content Placeholder 5"/>
-          <p:cNvSpPr>
-            <a:spLocks noGrp="1"/>
-          </p:cNvSpPr>
-          <p:nvPr>
-            <p:ph sz="quarter" idx="4"/>
-          </p:nvPr>
-        </p:nvSpPr>
-        <p:spPr>
-          <a:xfrm>
-            <a:off x="4645025" y="2174875"/>
-            <a:ext cx="4041775" cy="3951288"/>
-          </a:xfrm>
-        </p:spPr>
-        <p:txBody>
-          <a:bodyPr/>
-          <a:lstStyle>
-            <a:lvl1pPr>
-              <a:defRPr sz="2400"/>
-            </a:lvl1pPr>
-            <a:lvl2pPr>
-              <a:defRPr sz="2000"/>
-            </a:lvl2pPr>
-            <a:lvl3pPr>
-              <a:defRPr sz="1800"/>
-            </a:lvl3pPr>
-            <a:lvl4pPr>
-              <a:defRPr sz="1600"/>
-            </a:lvl4pPr>
-            <a:lvl5pPr>
-              <a:defRPr sz="1600"/>
-            </a:lvl5pPr>
-            <a:lvl6pPr>
-              <a:defRPr sz="1600"/>
-            </a:lvl6pPr>
-            <a:lvl7pPr>
-              <a:defRPr sz="1600"/>
-            </a:lvl7pPr>
-            <a:lvl8pPr>
-              <a:defRPr sz="1600"/>
-            </a:lvl8pPr>
-            <a:lvl9pPr>
-              <a:defRPr sz="1600"/>
-            </a:lvl9pPr>
-          </a:lstStyle>
-          <a:p>
-            <a:pPr lvl="0"/>
-            <a:r>
-              <a:rPr lang="en-US" smtClean="0"/>
-              <a:t>Click to edit Master text styles</a:t>
-            </a:r>
-          </a:p>
-          <a:p>
-            <a:pPr lvl="1"/>
-            <a:r>
-              <a:rPr lang="en-US" smtClean="0"/>
-              <a:t>Second level</a:t>
-            </a:r>
-          </a:p>
-          <a:p>
-            <a:pPr lvl="2"/>
-            <a:r>
-              <a:rPr lang="en-US" smtClean="0"/>
-              <a:t>Third level</a:t>
-            </a:r>
-          </a:p>
-          <a:p>
-            <a:pPr lvl="3"/>
-            <a:r>
-              <a:rPr lang="en-US" smtClean="0"/>
-              <a:t>Fourth level</a:t>
-            </a:r>
-          </a:p>
-          <a:p>
-            <a:pPr lvl="4"/>
-            <a:r>
-              <a:rPr lang="en-US" smtClean="0"/>
-              <a:t>Fifth level</a:t>
-            </a:r>
-            <a:endParaRPr lang="en-US"/>
-          </a:p>
-        </p:txBody>
-      </p:sp>
-      <p:sp>
-        <p:nvSpPr>
-          <p:cNvPr id="7" name="Date Placeholder 6"/>
-          <p:cNvSpPr>
-            <a:spLocks noGrp="1"/>
-          </p:cNvSpPr>
-          <p:nvPr>
-            <p:ph type="dt" sz="half" idx="10"/>
-          </p:nvPr>
-        </p:nvSpPr>
-        <p:spPr/>
-        <p:txBody>
-          <a:bodyPr/>
-          <a:lstStyle/>
-          <a:p>
-            <a:fld id="{5BCAD085-E8A6-8845-BD4E-CB4CCA059FC4}" type="datetimeFigureOut">
-              <a:rPr lang="en-US" smtClean="0"/>
-              <a:t>1/27/13</a:t>
-            </a:fld>
-            <a:endParaRPr lang="en-US"/>
-          </a:p>
-        </p:txBody>
-      </p:sp>
-      <p:sp>
-        <p:nvSpPr>
-          <p:cNvPr id="8" name="Footer Placeholder 7"/>
-          <p:cNvSpPr>
-            <a:spLocks noGrp="1"/>
-          </p:cNvSpPr>
-          <p:nvPr>
-            <p:ph type="ftr" sz="quarter" idx="11"/>
-          </p:nvPr>
-        </p:nvSpPr>
-        <p:spPr/>
-        <p:txBody>
-          <a:bodyPr/>
-          <a:lstStyle/>
-          <a:p>
-            <a:endParaRPr lang="en-US"/>
-          </a:p>
-        </p:txBody>
-      </p:sp>
-      <p:sp>
-        <p:nvSpPr>
-          <p:cNvPr id="9" name="Slide Number Placeholder 8"/>
-          <p:cNvSpPr>
-            <a:spLocks noGrp="1"/>
-          </p:cNvSpPr>
-          <p:nvPr>
-            <p:ph type="sldNum" sz="quarter" idx="12"/>
-          </p:nvPr>
-        </p:nvSpPr>
-        <p:spPr/>
-        <p:txBody>
-          <a:bodyPr/>
-          <a:lstStyle/>
-          <a:p>
-            <a:fld id="{C1FF6DA9-008F-8B48-92A6-B652298478BF}" type="slidenum">
-              <a:rPr lang="en-US" smtClean="0"/>
-              <a:t>‹#›</a:t>
-            </a:fld>
-            <a:endParaRPr lang="en-US"/>
-          </a:p>
-        </p:txBody>
-      </p:sp>
-    </p:spTree>
-    <p:extLst>
-      <p:ext uri="{BB962C8B-B14F-4D97-AF65-F5344CB8AC3E}">
-        <p14:creationId xmlns:p14="http://schemas.microsoft.com/office/powerpoint/2010/main" val="990158736"/>
-      </p:ext>
-    </p:extLst>
-  </p:cSld>
-  <p:clrMapOvr>
-    <a:masterClrMapping/>
-  </p:clrMapOvr>
-</p:sldLayout>
-</file>
-
-<file path=ppt/slideLayouts/slideLayout6.xml><?xml version="1.0" encoding="utf-8"?>
-<p:sldLayout xmlns:a="http://schemas.openxmlformats.org/drawingml/2006/main" xmlns:r="http://schemas.openxmlformats.org/officeDocument/2006/relationships" xmlns:p="http://schemas.openxmlformats.org/presentationml/2006/main" type="titleOnly" preserve="1">
-  <p:cSld name="Title Only">
-    <p:spTree>
-      <p:nvGrpSpPr>
-        <p:cNvPr id="1" name=""/>
-        <p:cNvGrpSpPr/>
-        <p:nvPr/>
-      </p:nvGrpSpPr>
-      <p:grpSpPr>
-        <a:xfrm>
-          <a:off x="0" y="0"/>
-          <a:ext cx="0" cy="0"/>
-          <a:chOff x="0" y="0"/>
-          <a:chExt cx="0" cy="0"/>
-        </a:xfrm>
-      </p:grpSpPr>
-      <p:sp>
-        <p:nvSpPr>
-          <p:cNvPr id="2" name="Title 1"/>
-          <p:cNvSpPr>
-            <a:spLocks noGrp="1"/>
-          </p:cNvSpPr>
-          <p:nvPr>
-            <p:ph type="title"/>
-          </p:nvPr>
-        </p:nvSpPr>
-        <p:spPr/>
-        <p:txBody>
-          <a:bodyPr/>
-          <a:lstStyle/>
-          <a:p>
-            <a:r>
-              <a:rPr lang="en-US" smtClean="0"/>
-              <a:t>Click to edit Master title style</a:t>
-            </a:r>
-            <a:endParaRPr lang="en-US"/>
-          </a:p>
-        </p:txBody>
-      </p:sp>
-      <p:sp>
-        <p:nvSpPr>
-          <p:cNvPr id="3" name="Date Placeholder 2"/>
-          <p:cNvSpPr>
-            <a:spLocks noGrp="1"/>
-          </p:cNvSpPr>
-          <p:nvPr>
-            <p:ph type="dt" sz="half" idx="10"/>
-          </p:nvPr>
-        </p:nvSpPr>
-        <p:spPr/>
-        <p:txBody>
-          <a:bodyPr/>
-          <a:lstStyle/>
-          <a:p>
-            <a:fld id="{5BCAD085-E8A6-8845-BD4E-CB4CCA059FC4}" type="datetimeFigureOut">
-              <a:rPr lang="en-US" smtClean="0"/>
-              <a:t>1/27/13</a:t>
-            </a:fld>
-            <a:endParaRPr lang="en-US"/>
-          </a:p>
-        </p:txBody>
-      </p:sp>
-      <p:sp>
-        <p:nvSpPr>
-          <p:cNvPr id="4" name="Footer Placeholder 3"/>
-          <p:cNvSpPr>
-            <a:spLocks noGrp="1"/>
-          </p:cNvSpPr>
-          <p:nvPr>
-            <p:ph type="ftr" sz="quarter" idx="11"/>
-          </p:nvPr>
-        </p:nvSpPr>
-        <p:spPr/>
-        <p:txBody>
-          <a:bodyPr/>
-          <a:lstStyle/>
-          <a:p>
-            <a:endParaRPr lang="en-US"/>
-          </a:p>
-        </p:txBody>
-      </p:sp>
-      <p:sp>
-        <p:nvSpPr>
-          <p:cNvPr id="5" name="Slide Number Placeholder 4"/>
-          <p:cNvSpPr>
-            <a:spLocks noGrp="1"/>
-          </p:cNvSpPr>
-          <p:nvPr>
-            <p:ph type="sldNum" sz="quarter" idx="12"/>
-          </p:nvPr>
-        </p:nvSpPr>
-        <p:spPr/>
-        <p:txBody>
-          <a:bodyPr/>
-          <a:lstStyle/>
-          <a:p>
-            <a:fld id="{C1FF6DA9-008F-8B48-92A6-B652298478BF}" type="slidenum">
-              <a:rPr lang="en-US" smtClean="0"/>
-              <a:t>‹#›</a:t>
-            </a:fld>
-            <a:endParaRPr lang="en-US"/>
-          </a:p>
-        </p:txBody>
-      </p:sp>
-    </p:spTree>
-    <p:extLst>
-      <p:ext uri="{BB962C8B-B14F-4D97-AF65-F5344CB8AC3E}">
-        <p14:creationId xmlns:p14="http://schemas.microsoft.com/office/powerpoint/2010/main" val="727027711"/>
-      </p:ext>
-    </p:extLst>
-  </p:cSld>
-  <p:clrMapOvr>
-    <a:masterClrMapping/>
-  </p:clrMapOvr>
-</p:sldLayout>
-</file>
-
-<file path=ppt/slideLayouts/slideLayout7.xml><?xml version="1.0" encoding="utf-8"?>
-<p:sldLayout xmlns:a="http://schemas.openxmlformats.org/drawingml/2006/main" xmlns:r="http://schemas.openxmlformats.org/officeDocument/2006/relationships" xmlns:p="http://schemas.openxmlformats.org/presentationml/2006/main" type="blank" preserve="1">
-  <p:cSld name="Blank">
-    <p:spTree>
-      <p:nvGrpSpPr>
-        <p:cNvPr id="1" name=""/>
-        <p:cNvGrpSpPr/>
-        <p:nvPr/>
-      </p:nvGrpSpPr>
-      <p:grpSpPr>
-        <a:xfrm>
-          <a:off x="0" y="0"/>
-          <a:ext cx="0" cy="0"/>
-          <a:chOff x="0" y="0"/>
-          <a:chExt cx="0" cy="0"/>
-        </a:xfrm>
-      </p:grpSpPr>
-      <p:sp>
-        <p:nvSpPr>
-          <p:cNvPr id="2" name="Date Placeholder 1"/>
-          <p:cNvSpPr>
-            <a:spLocks noGrp="1"/>
-          </p:cNvSpPr>
-          <p:nvPr>
-            <p:ph type="dt" sz="half" idx="10"/>
-          </p:nvPr>
-        </p:nvSpPr>
-        <p:spPr/>
-        <p:txBody>
-          <a:bodyPr/>
-          <a:lstStyle/>
-          <a:p>
-            <a:fld id="{5BCAD085-E8A6-8845-BD4E-CB4CCA059FC4}" type="datetimeFigureOut">
-              <a:rPr lang="en-US" smtClean="0"/>
-              <a:t>1/27/13</a:t>
-            </a:fld>
-            <a:endParaRPr lang="en-US"/>
-          </a:p>
-        </p:txBody>
-      </p:sp>
-      <p:sp>
-        <p:nvSpPr>
-          <p:cNvPr id="3" name="Footer Placeholder 2"/>
-          <p:cNvSpPr>
-            <a:spLocks noGrp="1"/>
-          </p:cNvSpPr>
-          <p:nvPr>
-            <p:ph type="ftr" sz="quarter" idx="11"/>
-          </p:nvPr>
-        </p:nvSpPr>
-        <p:spPr/>
-        <p:txBody>
-          <a:bodyPr/>
-          <a:lstStyle/>
-          <a:p>
-            <a:endParaRPr lang="en-US"/>
-          </a:p>
-        </p:txBody>
-      </p:sp>
-      <p:sp>
-        <p:nvSpPr>
-          <p:cNvPr id="4" name="Slide Number Placeholder 3"/>
-          <p:cNvSpPr>
-            <a:spLocks noGrp="1"/>
-          </p:cNvSpPr>
-          <p:nvPr>
-            <p:ph type="sldNum" sz="quarter" idx="12"/>
-          </p:nvPr>
-        </p:nvSpPr>
-        <p:spPr/>
-        <p:txBody>
-          <a:bodyPr/>
-          <a:lstStyle/>
-          <a:p>
-            <a:fld id="{C1FF6DA9-008F-8B48-92A6-B652298478BF}" type="slidenum">
-              <a:rPr lang="en-US" smtClean="0"/>
-              <a:t>‹#›</a:t>
-            </a:fld>
-            <a:endParaRPr lang="en-US"/>
-          </a:p>
-        </p:txBody>
-      </p:sp>
-    </p:spTree>
-    <p:extLst>
-      <p:ext uri="{BB962C8B-B14F-4D97-AF65-F5344CB8AC3E}">
-        <p14:creationId xmlns:p14="http://schemas.microsoft.com/office/powerpoint/2010/main" val="1212999818"/>
-      </p:ext>
-    </p:extLst>
-  </p:cSld>
-  <p:clrMapOvr>
-    <a:masterClrMapping/>
-  </p:clrMapOvr>
-</p:sldLayout>
-</file>
-
-<file path=ppt/slideLayouts/slideLayout8.xml><?xml version="1.0" encoding="utf-8"?>
-<p:sldLayout xmlns:a="http://schemas.openxmlformats.org/drawingml/2006/main" xmlns:r="http://schemas.openxmlformats.org/officeDocument/2006/relationships" xmlns:p="http://schemas.openxmlformats.org/presentationml/2006/main" type="objTx" preserve="1">
-  <p:cSld name="Content with Caption">
-    <p:spTree>
-      <p:nvGrpSpPr>
-        <p:cNvPr id="1" name=""/>
-        <p:cNvGrpSpPr/>
-        <p:nvPr/>
-      </p:nvGrpSpPr>
-      <p:grpSpPr>
-        <a:xfrm>
-          <a:off x="0" y="0"/>
-          <a:ext cx="0" cy="0"/>
-          <a:chOff x="0" y="0"/>
-          <a:chExt cx="0" cy="0"/>
-        </a:xfrm>
-      </p:grpSpPr>
-      <p:sp>
-        <p:nvSpPr>
-          <p:cNvPr id="2" name="Title 1"/>
-          <p:cNvSpPr>
-            <a:spLocks noGrp="1"/>
-          </p:cNvSpPr>
-          <p:nvPr>
-            <p:ph type="title"/>
-          </p:nvPr>
-        </p:nvSpPr>
-        <p:spPr>
-          <a:xfrm>
-            <a:off x="457200" y="273050"/>
-            <a:ext cx="3008313" cy="1162050"/>
-          </a:xfrm>
-        </p:spPr>
-        <p:txBody>
-          <a:bodyPr anchor="b"/>
-          <a:lstStyle>
-            <a:lvl1pPr algn="l">
-              <a:defRPr sz="2000" b="1"/>
-            </a:lvl1pPr>
-          </a:lstStyle>
-          <a:p>
-            <a:r>
-              <a:rPr lang="en-US" smtClean="0"/>
-              <a:t>Click to edit Master title style</a:t>
-            </a:r>
-            <a:endParaRPr lang="en-US"/>
-          </a:p>
-        </p:txBody>
-      </p:sp>
-      <p:sp>
-        <p:nvSpPr>
-          <p:cNvPr id="3" name="Content Placeholder 2"/>
-          <p:cNvSpPr>
-            <a:spLocks noGrp="1"/>
-          </p:cNvSpPr>
-          <p:nvPr>
-            <p:ph idx="1"/>
-          </p:nvPr>
-        </p:nvSpPr>
-        <p:spPr>
-          <a:xfrm>
-            <a:off x="3575050" y="273050"/>
-            <a:ext cx="5111750" cy="5853113"/>
-          </a:xfrm>
-        </p:spPr>
-        <p:txBody>
-          <a:bodyPr/>
-          <a:lstStyle>
-            <a:lvl1pPr>
-              <a:defRPr sz="3200"/>
-            </a:lvl1pPr>
-            <a:lvl2pPr>
-              <a:defRPr sz="2800"/>
-            </a:lvl2pPr>
-            <a:lvl3pPr>
-              <a:defRPr sz="2400"/>
-            </a:lvl3pPr>
-            <a:lvl4pPr>
-              <a:defRPr sz="2000"/>
-            </a:lvl4pPr>
-            <a:lvl5pPr>
-              <a:defRPr sz="2000"/>
-            </a:lvl5pPr>
-            <a:lvl6pPr>
-              <a:defRPr sz="2000"/>
-            </a:lvl6pPr>
-            <a:lvl7pPr>
-              <a:defRPr sz="2000"/>
-            </a:lvl7pPr>
-            <a:lvl8pPr>
-              <a:defRPr sz="2000"/>
-            </a:lvl8pPr>
-            <a:lvl9pPr>
-              <a:defRPr sz="2000"/>
-            </a:lvl9pPr>
-          </a:lstStyle>
-          <a:p>
-            <a:pPr lvl="0"/>
-            <a:r>
-              <a:rPr lang="en-US" smtClean="0"/>
-              <a:t>Click to edit Master text styles</a:t>
-            </a:r>
-          </a:p>
-          <a:p>
-            <a:pPr lvl="1"/>
-            <a:r>
-              <a:rPr lang="en-US" smtClean="0"/>
-              <a:t>Second level</a:t>
-            </a:r>
-          </a:p>
-          <a:p>
-            <a:pPr lvl="2"/>
-            <a:r>
-              <a:rPr lang="en-US" smtClean="0"/>
-              <a:t>Third level</a:t>
-            </a:r>
-          </a:p>
-          <a:p>
-            <a:pPr lvl="3"/>
-            <a:r>
-              <a:rPr lang="en-US" smtClean="0"/>
-              <a:t>Fourth level</a:t>
-            </a:r>
-          </a:p>
-          <a:p>
-            <a:pPr lvl="4"/>
-            <a:r>
-              <a:rPr lang="en-US" smtClean="0"/>
-              <a:t>Fifth level</a:t>
-            </a:r>
-            <a:endParaRPr lang="en-US"/>
-          </a:p>
-        </p:txBody>
-      </p:sp>
-      <p:sp>
-        <p:nvSpPr>
-          <p:cNvPr id="4" name="Text Placeholder 3"/>
-          <p:cNvSpPr>
-            <a:spLocks noGrp="1"/>
-          </p:cNvSpPr>
-          <p:nvPr>
-            <p:ph type="body" sz="half" idx="2"/>
-          </p:nvPr>
-        </p:nvSpPr>
-        <p:spPr>
-          <a:xfrm>
-            <a:off x="457200" y="1435100"/>
-            <a:ext cx="3008313" cy="4691063"/>
-          </a:xfrm>
-        </p:spPr>
-        <p:txBody>
-          <a:bodyPr/>
-          <a:lstStyle>
-            <a:lvl1pPr marL="0" indent="0">
-              <a:buNone/>
-              <a:defRPr sz="1400"/>
-            </a:lvl1pPr>
-            <a:lvl2pPr marL="457200" indent="0">
-              <a:buNone/>
-              <a:defRPr sz="1200"/>
-            </a:lvl2pPr>
-            <a:lvl3pPr marL="914400" indent="0">
-              <a:buNone/>
-              <a:defRPr sz="1000"/>
-            </a:lvl3pPr>
-            <a:lvl4pPr marL="1371600" indent="0">
-              <a:buNone/>
-              <a:defRPr sz="900"/>
-            </a:lvl4pPr>
-            <a:lvl5pPr marL="1828800" indent="0">
-              <a:buNone/>
-              <a:defRPr sz="900"/>
-            </a:lvl5pPr>
-            <a:lvl6pPr marL="2286000" indent="0">
-              <a:buNone/>
-              <a:defRPr sz="900"/>
-            </a:lvl6pPr>
-            <a:lvl7pPr marL="2743200" indent="0">
-              <a:buNone/>
-              <a:defRPr sz="900"/>
-            </a:lvl7pPr>
-            <a:lvl8pPr marL="3200400" indent="0">
-              <a:buNone/>
-              <a:defRPr sz="900"/>
-            </a:lvl8pPr>
-            <a:lvl9pPr marL="3657600" indent="0">
-              <a:buNone/>
-              <a:defRPr sz="900"/>
-            </a:lvl9pPr>
-          </a:lstStyle>
-          <a:p>
-            <a:pPr lvl="0"/>
-            <a:r>
-              <a:rPr lang="en-US" smtClean="0"/>
-              <a:t>Click to edit Master text styles</a:t>
-            </a:r>
-          </a:p>
-        </p:txBody>
-      </p:sp>
-      <p:sp>
-        <p:nvSpPr>
-          <p:cNvPr id="5" name="Date Placeholder 4"/>
-          <p:cNvSpPr>
-            <a:spLocks noGrp="1"/>
-          </p:cNvSpPr>
-          <p:nvPr>
-            <p:ph type="dt" sz="half" idx="10"/>
-          </p:nvPr>
-        </p:nvSpPr>
-        <p:spPr/>
-        <p:txBody>
-          <a:bodyPr/>
-          <a:lstStyle/>
-          <a:p>
-            <a:fld id="{5BCAD085-E8A6-8845-BD4E-CB4CCA059FC4}" type="datetimeFigureOut">
-              <a:rPr lang="en-US" smtClean="0"/>
-              <a:t>1/27/13</a:t>
-            </a:fld>
-            <a:endParaRPr lang="en-US"/>
-          </a:p>
-        </p:txBody>
-      </p:sp>
-      <p:sp>
-        <p:nvSpPr>
-          <p:cNvPr id="6" name="Footer Placeholder 5"/>
-          <p:cNvSpPr>
-            <a:spLocks noGrp="1"/>
-          </p:cNvSpPr>
-          <p:nvPr>
-            <p:ph type="ftr" sz="quarter" idx="11"/>
-          </p:nvPr>
-        </p:nvSpPr>
-        <p:spPr/>
-        <p:txBody>
-          <a:bodyPr/>
-          <a:lstStyle/>
-          <a:p>
-            <a:endParaRPr lang="en-US"/>
-          </a:p>
-        </p:txBody>
-      </p:sp>
-      <p:sp>
-        <p:nvSpPr>
-          <p:cNvPr id="7" name="Slide Number Placeholder 6"/>
-          <p:cNvSpPr>
-            <a:spLocks noGrp="1"/>
-          </p:cNvSpPr>
-          <p:nvPr>
-            <p:ph type="sldNum" sz="quarter" idx="12"/>
-          </p:nvPr>
-        </p:nvSpPr>
-        <p:spPr/>
-        <p:txBody>
-          <a:bodyPr/>
-          <a:lstStyle/>
-          <a:p>
-            <a:fld id="{C1FF6DA9-008F-8B48-92A6-B652298478BF}" type="slidenum">
-              <a:rPr lang="en-US" smtClean="0"/>
-              <a:t>‹#›</a:t>
-            </a:fld>
-            <a:endParaRPr lang="en-US"/>
-          </a:p>
-        </p:txBody>
-      </p:sp>
-    </p:spTree>
-    <p:extLst>
-      <p:ext uri="{BB962C8B-B14F-4D97-AF65-F5344CB8AC3E}">
-        <p14:creationId xmlns:p14="http://schemas.microsoft.com/office/powerpoint/2010/main" val="1840726560"/>
-      </p:ext>
-    </p:extLst>
-  </p:cSld>
-  <p:clrMapOvr>
-    <a:masterClrMapping/>
-  </p:clrMapOvr>
-</p:sldLayout>
-</file>
-
-<file path=ppt/slideLayouts/slideLayout9.xml><?xml version="1.0" encoding="utf-8"?>
-<p:sldLayout xmlns:a="http://schemas.openxmlformats.org/drawingml/2006/main" xmlns:r="http://schemas.openxmlformats.org/officeDocument/2006/relationships" xmlns:p="http://schemas.openxmlformats.org/presentationml/2006/main" type="picTx" preserve="1">
-  <p:cSld name="Picture with Caption">
-    <p:spTree>
-      <p:nvGrpSpPr>
-        <p:cNvPr id="1" name=""/>
-        <p:cNvGrpSpPr/>
-        <p:nvPr/>
-      </p:nvGrpSpPr>
-      <p:grpSpPr>
-        <a:xfrm>
-          <a:off x="0" y="0"/>
-          <a:ext cx="0" cy="0"/>
-          <a:chOff x="0" y="0"/>
-          <a:chExt cx="0" cy="0"/>
-        </a:xfrm>
-      </p:grpSpPr>
-      <p:sp>
-        <p:nvSpPr>
-          <p:cNvPr id="2" name="Title 1"/>
-          <p:cNvSpPr>
-            <a:spLocks noGrp="1"/>
-          </p:cNvSpPr>
-          <p:nvPr>
-            <p:ph type="title"/>
-          </p:nvPr>
-        </p:nvSpPr>
-        <p:spPr>
-          <a:xfrm>
-            <a:off x="1792288" y="4800600"/>
-            <a:ext cx="5486400" cy="566738"/>
-          </a:xfrm>
-        </p:spPr>
-        <p:txBody>
-          <a:bodyPr anchor="b"/>
-          <a:lstStyle>
-            <a:lvl1pPr algn="l">
-              <a:defRPr sz="2000" b="1"/>
-            </a:lvl1pPr>
-          </a:lstStyle>
-          <a:p>
-            <a:r>
-              <a:rPr lang="en-US" smtClean="0"/>
-              <a:t>Click to edit Master title style</a:t>
-            </a:r>
-            <a:endParaRPr lang="en-US"/>
-          </a:p>
-        </p:txBody>
-      </p:sp>
-      <p:sp>
-        <p:nvSpPr>
-          <p:cNvPr id="3" name="Picture Placeholder 2"/>
-          <p:cNvSpPr>
-            <a:spLocks noGrp="1"/>
-          </p:cNvSpPr>
-          <p:nvPr>
-            <p:ph type="pic" idx="1"/>
-          </p:nvPr>
-        </p:nvSpPr>
-        <p:spPr>
-          <a:xfrm>
-            <a:off x="1792288" y="612775"/>
-            <a:ext cx="5486400" cy="4114800"/>
-          </a:xfrm>
-        </p:spPr>
-        <p:txBody>
-          <a:bodyPr/>
-          <a:lstStyle>
-            <a:lvl1pPr marL="0" indent="0">
-              <a:buNone/>
-              <a:defRPr sz="3200"/>
-            </a:lvl1pPr>
-            <a:lvl2pPr marL="457200" indent="0">
-              <a:buNone/>
-              <a:defRPr sz="2800"/>
-            </a:lvl2pPr>
-            <a:lvl3pPr marL="914400" indent="0">
-              <a:buNone/>
-              <a:defRPr sz="2400"/>
-            </a:lvl3pPr>
-            <a:lvl4pPr marL="1371600" indent="0">
-              <a:buNone/>
-              <a:defRPr sz="2000"/>
-            </a:lvl4pPr>
-            <a:lvl5pPr marL="1828800" indent="0">
-              <a:buNone/>
-              <a:defRPr sz="2000"/>
-            </a:lvl5pPr>
-            <a:lvl6pPr marL="2286000" indent="0">
-              <a:buNone/>
-              <a:defRPr sz="2000"/>
-            </a:lvl6pPr>
-            <a:lvl7pPr marL="2743200" indent="0">
-              <a:buNone/>
-              <a:defRPr sz="2000"/>
-            </a:lvl7pPr>
-            <a:lvl8pPr marL="3200400" indent="0">
-              <a:buNone/>
-              <a:defRPr sz="2000"/>
-            </a:lvl8pPr>
-            <a:lvl9pPr marL="3657600" indent="0">
-              <a:buNone/>
-              <a:defRPr sz="2000"/>
-            </a:lvl9pPr>
-          </a:lstStyle>
-          <a:p>
-            <a:endParaRPr lang="en-US"/>
-          </a:p>
-        </p:txBody>
-      </p:sp>
-      <p:sp>
-        <p:nvSpPr>
-          <p:cNvPr id="4" name="Text Placeholder 3"/>
-          <p:cNvSpPr>
-            <a:spLocks noGrp="1"/>
-          </p:cNvSpPr>
-          <p:nvPr>
-            <p:ph type="body" sz="half" idx="2"/>
-          </p:nvPr>
-        </p:nvSpPr>
-        <p:spPr>
-          <a:xfrm>
-            <a:off x="1792288" y="5367338"/>
-            <a:ext cx="5486400" cy="804862"/>
-          </a:xfrm>
-        </p:spPr>
-        <p:txBody>
-          <a:bodyPr/>
-          <a:lstStyle>
-            <a:lvl1pPr marL="0" indent="0">
-              <a:buNone/>
-              <a:defRPr sz="1400"/>
-            </a:lvl1pPr>
-            <a:lvl2pPr marL="457200" indent="0">
-              <a:buNone/>
-              <a:defRPr sz="1200"/>
-            </a:lvl2pPr>
-            <a:lvl3pPr marL="914400" indent="0">
-              <a:buNone/>
-              <a:defRPr sz="1000"/>
-            </a:lvl3pPr>
-            <a:lvl4pPr marL="1371600" indent="0">
-              <a:buNone/>
-              <a:defRPr sz="900"/>
-            </a:lvl4pPr>
-            <a:lvl5pPr marL="1828800" indent="0">
-              <a:buNone/>
-              <a:defRPr sz="900"/>
-            </a:lvl5pPr>
-            <a:lvl6pPr marL="2286000" indent="0">
-              <a:buNone/>
-              <a:defRPr sz="900"/>
-            </a:lvl6pPr>
-            <a:lvl7pPr marL="2743200" indent="0">
-              <a:buNone/>
-              <a:defRPr sz="900"/>
-            </a:lvl7pPr>
-            <a:lvl8pPr marL="3200400" indent="0">
-              <a:buNone/>
-              <a:defRPr sz="900"/>
-            </a:lvl8pPr>
-            <a:lvl9pPr marL="3657600" indent="0">
-              <a:buNone/>
-              <a:defRPr sz="900"/>
-            </a:lvl9pPr>
-          </a:lstStyle>
-          <a:p>
-            <a:pPr lvl="0"/>
-            <a:r>
-              <a:rPr lang="en-US" smtClean="0"/>
-              <a:t>Click to edit Master text styles</a:t>
-            </a:r>
-          </a:p>
-        </p:txBody>
-      </p:sp>
-      <p:sp>
-        <p:nvSpPr>
-          <p:cNvPr id="5" name="Date Placeholder 4"/>
-          <p:cNvSpPr>
-            <a:spLocks noGrp="1"/>
-          </p:cNvSpPr>
-          <p:nvPr>
-            <p:ph type="dt" sz="half" idx="10"/>
-          </p:nvPr>
-        </p:nvSpPr>
-        <p:spPr/>
-        <p:txBody>
-          <a:bodyPr/>
-          <a:lstStyle/>
-          <a:p>
-            <a:fld id="{5BCAD085-E8A6-8845-BD4E-CB4CCA059FC4}" type="datetimeFigureOut">
-              <a:rPr lang="en-US" smtClean="0"/>
-              <a:t>1/27/13</a:t>
-            </a:fld>
-            <a:endParaRPr lang="en-US"/>
-          </a:p>
-        </p:txBody>
-      </p:sp>
-      <p:sp>
-        <p:nvSpPr>
-          <p:cNvPr id="6" name="Footer Placeholder 5"/>
-          <p:cNvSpPr>
-            <a:spLocks noGrp="1"/>
-          </p:cNvSpPr>
-          <p:nvPr>
-            <p:ph type="ftr" sz="quarter" idx="11"/>
-          </p:nvPr>
-        </p:nvSpPr>
-        <p:spPr/>
-        <p:txBody>
-          <a:bodyPr/>
-          <a:lstStyle/>
-          <a:p>
-            <a:endParaRPr lang="en-US"/>
-          </a:p>
-        </p:txBody>
-      </p:sp>
-      <p:sp>
-        <p:nvSpPr>
-          <p:cNvPr id="7" name="Slide Number Placeholder 6"/>
-          <p:cNvSpPr>
-            <a:spLocks noGrp="1"/>
-          </p:cNvSpPr>
-          <p:nvPr>
-            <p:ph type="sldNum" sz="quarter" idx="12"/>
-          </p:nvPr>
-        </p:nvSpPr>
-        <p:spPr/>
-        <p:txBody>
-          <a:bodyPr/>
-          <a:lstStyle/>
-          <a:p>
-            <a:fld id="{C1FF6DA9-008F-8B48-92A6-B652298478BF}" type="slidenum">
-              <a:rPr lang="en-US" smtClean="0"/>
-              <a:t>‹#›</a:t>
-            </a:fld>
-            <a:endParaRPr lang="en-US"/>
-          </a:p>
-        </p:txBody>
-      </p:sp>
-    </p:spTree>
-    <p:extLst>
-      <p:ext uri="{BB962C8B-B14F-4D97-AF65-F5344CB8AC3E}">
-        <p14:creationId xmlns:p14="http://schemas.microsoft.com/office/powerpoint/2010/main" val="3889236939"/>
-      </p:ext>
-    </p:extLst>
-  </p:cSld>
-  <p:clrMapOvr>
-    <a:masterClrMapping/>
-  </p:clrMapOvr>
-</p:sldLayout>
-</file>
-
-<file path=ppt/slideMasters/slideMaster1.xml><?xml version="1.0" encoding="utf-8"?>
-<p:sldMaster xmlns:a="http://schemas.openxmlformats.org/drawingml/2006/main" xmlns:r="http://schemas.openxmlformats.org/officeDocument/2006/relationships" xmlns:p="http://schemas.openxmlformats.org/presentationml/2006/main">
+<file path=ppt/handoutMasters/handoutMaster1.xml><?xml version="1.0" encoding="utf-8"?>
+<p:handoutMaster xmlns:a="http://schemas.openxmlformats.org/drawingml/2006/main" xmlns:r="http://schemas.openxmlformats.org/officeDocument/2006/relationships" xmlns:p="http://schemas.openxmlformats.org/presentationml/2006/main">
   <p:cSld>
     <p:bg>
       <p:bgRef idx="1001">
@@ -2602,40 +167,512 @@
       </p:grpSpPr>
       <p:sp>
         <p:nvSpPr>
-          <p:cNvPr id="2" name="Title Placeholder 1"/>
+          <p:cNvPr id="4" name="フッター プレースホルダー 3"/>
           <p:cNvSpPr>
             <a:spLocks noGrp="1"/>
           </p:cNvSpPr>
           <p:nvPr>
-            <p:ph type="title"/>
+            <p:ph type="ftr" sz="quarter" idx="2"/>
           </p:nvPr>
         </p:nvSpPr>
         <p:spPr>
           <a:xfrm>
-            <a:off x="457200" y="274638"/>
-            <a:ext cx="8229600" cy="1143000"/>
-          </a:xfrm>
-          <a:prstGeom prst="rect">
-            <a:avLst/>
-          </a:prstGeom>
-        </p:spPr>
-        <p:txBody>
-          <a:bodyPr vert="horz" lIns="91440" tIns="45720" rIns="91440" bIns="45720" rtlCol="0" anchor="ctr">
-            <a:normAutofit/>
-          </a:bodyPr>
-          <a:lstStyle/>
-          <a:p>
-            <a:r>
-              <a:rPr lang="en-US" smtClean="0"/>
-              <a:t>Click to edit Master title style</a:t>
-            </a:r>
-            <a:endParaRPr lang="en-US"/>
-          </a:p>
-        </p:txBody>
-      </p:sp>
-      <p:sp>
-        <p:nvSpPr>
-          <p:cNvPr id="3" name="Text Placeholder 2"/>
+            <a:off x="0" y="9441662"/>
+            <a:ext cx="2949420" cy="497676"/>
+          </a:xfrm>
+          <a:prstGeom prst="rect">
+            <a:avLst/>
+          </a:prstGeom>
+        </p:spPr>
+        <p:txBody>
+          <a:bodyPr vert="horz" lIns="90561" tIns="45280" rIns="90561" bIns="45280" rtlCol="0" anchor="b"/>
+          <a:lstStyle>
+            <a:lvl1pPr algn="l">
+              <a:defRPr sz="1200"/>
+            </a:lvl1pPr>
+          </a:lstStyle>
+          <a:p>
+            <a:endParaRPr kumimoji="1" lang="ja-JP" altLang="en-US"/>
+          </a:p>
+        </p:txBody>
+      </p:sp>
+      <p:sp>
+        <p:nvSpPr>
+          <p:cNvPr id="5" name="スライド番号プレースホルダー 4"/>
+          <p:cNvSpPr>
+            <a:spLocks noGrp="1"/>
+          </p:cNvSpPr>
+          <p:nvPr>
+            <p:ph type="sldNum" sz="quarter" idx="3"/>
+          </p:nvPr>
+        </p:nvSpPr>
+        <p:spPr>
+          <a:xfrm>
+            <a:off x="3856210" y="9441662"/>
+            <a:ext cx="2949420" cy="497676"/>
+          </a:xfrm>
+          <a:prstGeom prst="rect">
+            <a:avLst/>
+          </a:prstGeom>
+        </p:spPr>
+        <p:txBody>
+          <a:bodyPr vert="horz" lIns="90561" tIns="45280" rIns="90561" bIns="45280" rtlCol="0" anchor="b"/>
+          <a:lstStyle>
+            <a:lvl1pPr algn="r">
+              <a:defRPr sz="1200"/>
+            </a:lvl1pPr>
+          </a:lstStyle>
+          <a:p>
+            <a:fld id="{7B45B759-5475-4693-BFD4-53BF6401E48A}" type="slidenum">
+              <a:rPr kumimoji="1" lang="ja-JP" altLang="en-US" smtClean="0"/>
+              <a:t>‹#›</a:t>
+            </a:fld>
+            <a:endParaRPr kumimoji="1" lang="ja-JP" altLang="en-US"/>
+          </a:p>
+        </p:txBody>
+      </p:sp>
+    </p:spTree>
+    <p:extLst>
+      <p:ext uri="{BB962C8B-B14F-4D97-AF65-F5344CB8AC3E}">
+        <p14:creationId xmlns:p14="http://schemas.microsoft.com/office/powerpoint/2010/main" val="3259530797"/>
+      </p:ext>
+    </p:extLst>
+  </p:cSld>
+  <p:clrMap bg1="lt1" tx1="dk1" bg2="lt2" tx2="dk2" accent1="accent1" accent2="accent2" accent3="accent3" accent4="accent4" accent5="accent5" accent6="accent6" hlink="hlink" folHlink="folHlink"/>
+</p:handoutMaster>
+</file>
+
+<file path=ppt/notesMasters/notesMaster1.xml><?xml version="1.0" encoding="utf-8"?>
+<p:notesMaster xmlns:a="http://schemas.openxmlformats.org/drawingml/2006/main" xmlns:r="http://schemas.openxmlformats.org/officeDocument/2006/relationships" xmlns:p="http://schemas.openxmlformats.org/presentationml/2006/main">
+  <p:cSld>
+    <p:bg>
+      <p:bgRef idx="1001">
+        <a:schemeClr val="bg1"/>
+      </p:bgRef>
+    </p:bg>
+    <p:spTree>
+      <p:nvGrpSpPr>
+        <p:cNvPr id="1" name=""/>
+        <p:cNvGrpSpPr/>
+        <p:nvPr/>
+      </p:nvGrpSpPr>
+      <p:grpSpPr>
+        <a:xfrm>
+          <a:off x="0" y="0"/>
+          <a:ext cx="0" cy="0"/>
+          <a:chOff x="0" y="0"/>
+          <a:chExt cx="0" cy="0"/>
+        </a:xfrm>
+      </p:grpSpPr>
+      <p:sp>
+        <p:nvSpPr>
+          <p:cNvPr id="2" name="ヘッダー プレースホルダー 1"/>
+          <p:cNvSpPr>
+            <a:spLocks noGrp="1"/>
+          </p:cNvSpPr>
+          <p:nvPr>
+            <p:ph type="hdr" sz="quarter"/>
+          </p:nvPr>
+        </p:nvSpPr>
+        <p:spPr>
+          <a:xfrm>
+            <a:off x="1" y="2"/>
+            <a:ext cx="2950528" cy="497524"/>
+          </a:xfrm>
+          <a:prstGeom prst="rect">
+            <a:avLst/>
+          </a:prstGeom>
+        </p:spPr>
+        <p:txBody>
+          <a:bodyPr vert="horz" lIns="91529" tIns="45765" rIns="91529" bIns="45765" rtlCol="0"/>
+          <a:lstStyle>
+            <a:lvl1pPr algn="l">
+              <a:defRPr sz="1200"/>
+            </a:lvl1pPr>
+          </a:lstStyle>
+          <a:p>
+            <a:endParaRPr kumimoji="1" lang="ja-JP" altLang="en-US"/>
+          </a:p>
+        </p:txBody>
+      </p:sp>
+      <p:sp>
+        <p:nvSpPr>
+          <p:cNvPr id="3" name="日付プレースホルダー 2"/>
+          <p:cNvSpPr>
+            <a:spLocks noGrp="1"/>
+          </p:cNvSpPr>
+          <p:nvPr>
+            <p:ph type="dt" idx="1"/>
+          </p:nvPr>
+        </p:nvSpPr>
+        <p:spPr>
+          <a:xfrm>
+            <a:off x="3855082" y="2"/>
+            <a:ext cx="2950528" cy="497524"/>
+          </a:xfrm>
+          <a:prstGeom prst="rect">
+            <a:avLst/>
+          </a:prstGeom>
+        </p:spPr>
+        <p:txBody>
+          <a:bodyPr vert="horz" lIns="91529" tIns="45765" rIns="91529" bIns="45765" rtlCol="0"/>
+          <a:lstStyle>
+            <a:lvl1pPr algn="r">
+              <a:defRPr sz="1200"/>
+            </a:lvl1pPr>
+          </a:lstStyle>
+          <a:p>
+            <a:fld id="{6AF8158D-F6B1-45E0-9831-E70689DC8490}" type="datetimeFigureOut">
+              <a:rPr kumimoji="1" lang="ja-JP" altLang="en-US" smtClean="0"/>
+              <a:t>2026/7/21</a:t>
+            </a:fld>
+            <a:endParaRPr kumimoji="1" lang="ja-JP" altLang="en-US"/>
+          </a:p>
+        </p:txBody>
+      </p:sp>
+      <p:sp>
+        <p:nvSpPr>
+          <p:cNvPr id="4" name="スライド イメージ プレースホルダー 3"/>
+          <p:cNvSpPr>
+            <a:spLocks noGrp="1" noRot="1" noChangeAspect="1"/>
+          </p:cNvSpPr>
+          <p:nvPr>
+            <p:ph type="sldImg" idx="2"/>
+          </p:nvPr>
+        </p:nvSpPr>
+        <p:spPr>
+          <a:xfrm>
+            <a:off x="981075" y="1243013"/>
+            <a:ext cx="4845050" cy="3354387"/>
+          </a:xfrm>
+          <a:prstGeom prst="rect">
+            <a:avLst/>
+          </a:prstGeom>
+          <a:noFill/>
+          <a:ln w="12700">
+            <a:solidFill>
+              <a:prstClr val="black"/>
+            </a:solidFill>
+          </a:ln>
+        </p:spPr>
+        <p:txBody>
+          <a:bodyPr vert="horz" lIns="91529" tIns="45765" rIns="91529" bIns="45765" rtlCol="0" anchor="ctr"/>
+          <a:lstStyle/>
+          <a:p>
+            <a:endParaRPr lang="ja-JP" altLang="en-US"/>
+          </a:p>
+        </p:txBody>
+      </p:sp>
+      <p:sp>
+        <p:nvSpPr>
+          <p:cNvPr id="5" name="ノート プレースホルダー 4"/>
+          <p:cNvSpPr>
+            <a:spLocks noGrp="1"/>
+          </p:cNvSpPr>
+          <p:nvPr>
+            <p:ph type="body" sz="quarter" idx="3"/>
+          </p:nvPr>
+        </p:nvSpPr>
+        <p:spPr>
+          <a:xfrm>
+            <a:off x="680402" y="4782901"/>
+            <a:ext cx="5446396" cy="3913426"/>
+          </a:xfrm>
+          <a:prstGeom prst="rect">
+            <a:avLst/>
+          </a:prstGeom>
+        </p:spPr>
+        <p:txBody>
+          <a:bodyPr vert="horz" lIns="91529" tIns="45765" rIns="91529" bIns="45765" rtlCol="0"/>
+          <a:lstStyle/>
+          <a:p>
+            <a:pPr lvl="0"/>
+            <a:r>
+              <a:rPr kumimoji="1" lang="ja-JP" altLang="en-US"/>
+              <a:t>マスター テキストの書式設定</a:t>
+            </a:r>
+          </a:p>
+          <a:p>
+            <a:pPr lvl="1"/>
+            <a:r>
+              <a:rPr kumimoji="1" lang="ja-JP" altLang="en-US"/>
+              <a:t>第 </a:t>
+            </a:r>
+            <a:r>
+              <a:rPr kumimoji="1" lang="en-US" altLang="ja-JP"/>
+              <a:t>2 </a:t>
+            </a:r>
+            <a:r>
+              <a:rPr kumimoji="1" lang="ja-JP" altLang="en-US"/>
+              <a:t>レベル</a:t>
+            </a:r>
+          </a:p>
+          <a:p>
+            <a:pPr lvl="2"/>
+            <a:r>
+              <a:rPr kumimoji="1" lang="ja-JP" altLang="en-US"/>
+              <a:t>第 </a:t>
+            </a:r>
+            <a:r>
+              <a:rPr kumimoji="1" lang="en-US" altLang="ja-JP"/>
+              <a:t>3 </a:t>
+            </a:r>
+            <a:r>
+              <a:rPr kumimoji="1" lang="ja-JP" altLang="en-US"/>
+              <a:t>レベル</a:t>
+            </a:r>
+          </a:p>
+          <a:p>
+            <a:pPr lvl="3"/>
+            <a:r>
+              <a:rPr kumimoji="1" lang="ja-JP" altLang="en-US"/>
+              <a:t>第 </a:t>
+            </a:r>
+            <a:r>
+              <a:rPr kumimoji="1" lang="en-US" altLang="ja-JP"/>
+              <a:t>4 </a:t>
+            </a:r>
+            <a:r>
+              <a:rPr kumimoji="1" lang="ja-JP" altLang="en-US"/>
+              <a:t>レベル</a:t>
+            </a:r>
+          </a:p>
+          <a:p>
+            <a:pPr lvl="4"/>
+            <a:r>
+              <a:rPr kumimoji="1" lang="ja-JP" altLang="en-US"/>
+              <a:t>第 </a:t>
+            </a:r>
+            <a:r>
+              <a:rPr kumimoji="1" lang="en-US" altLang="ja-JP"/>
+              <a:t>5 </a:t>
+            </a:r>
+            <a:r>
+              <a:rPr kumimoji="1" lang="ja-JP" altLang="en-US"/>
+              <a:t>レベル</a:t>
+            </a:r>
+          </a:p>
+        </p:txBody>
+      </p:sp>
+      <p:sp>
+        <p:nvSpPr>
+          <p:cNvPr id="6" name="フッター プレースホルダー 5"/>
+          <p:cNvSpPr>
+            <a:spLocks noGrp="1"/>
+          </p:cNvSpPr>
+          <p:nvPr>
+            <p:ph type="ftr" sz="quarter" idx="4"/>
+          </p:nvPr>
+        </p:nvSpPr>
+        <p:spPr>
+          <a:xfrm>
+            <a:off x="1" y="9441817"/>
+            <a:ext cx="2950528" cy="497524"/>
+          </a:xfrm>
+          <a:prstGeom prst="rect">
+            <a:avLst/>
+          </a:prstGeom>
+        </p:spPr>
+        <p:txBody>
+          <a:bodyPr vert="horz" lIns="91529" tIns="45765" rIns="91529" bIns="45765" rtlCol="0" anchor="b"/>
+          <a:lstStyle>
+            <a:lvl1pPr algn="l">
+              <a:defRPr sz="1200"/>
+            </a:lvl1pPr>
+          </a:lstStyle>
+          <a:p>
+            <a:endParaRPr kumimoji="1" lang="ja-JP" altLang="en-US"/>
+          </a:p>
+        </p:txBody>
+      </p:sp>
+      <p:sp>
+        <p:nvSpPr>
+          <p:cNvPr id="7" name="スライド番号プレースホルダー 6"/>
+          <p:cNvSpPr>
+            <a:spLocks noGrp="1"/>
+          </p:cNvSpPr>
+          <p:nvPr>
+            <p:ph type="sldNum" sz="quarter" idx="5"/>
+          </p:nvPr>
+        </p:nvSpPr>
+        <p:spPr>
+          <a:xfrm>
+            <a:off x="3855082" y="9441817"/>
+            <a:ext cx="2950528" cy="497524"/>
+          </a:xfrm>
+          <a:prstGeom prst="rect">
+            <a:avLst/>
+          </a:prstGeom>
+        </p:spPr>
+        <p:txBody>
+          <a:bodyPr vert="horz" lIns="91529" tIns="45765" rIns="91529" bIns="45765" rtlCol="0" anchor="b"/>
+          <a:lstStyle>
+            <a:lvl1pPr algn="r">
+              <a:defRPr sz="1200"/>
+            </a:lvl1pPr>
+          </a:lstStyle>
+          <a:p>
+            <a:fld id="{022E43C0-6795-4B13-B37C-259C826D4B6A}" type="slidenum">
+              <a:rPr kumimoji="1" lang="ja-JP" altLang="en-US" smtClean="0"/>
+              <a:t>‹#›</a:t>
+            </a:fld>
+            <a:endParaRPr kumimoji="1" lang="ja-JP" altLang="en-US"/>
+          </a:p>
+        </p:txBody>
+      </p:sp>
+    </p:spTree>
+    <p:extLst>
+      <p:ext uri="{BB962C8B-B14F-4D97-AF65-F5344CB8AC3E}">
+        <p14:creationId xmlns:p14="http://schemas.microsoft.com/office/powerpoint/2010/main" val="640918907"/>
+      </p:ext>
+    </p:extLst>
+  </p:cSld>
+  <p:clrMap bg1="lt1" tx1="dk1" bg2="lt2" tx2="dk2" accent1="accent1" accent2="accent2" accent3="accent3" accent4="accent4" accent5="accent5" accent6="accent6" hlink="hlink" folHlink="folHlink"/>
+  <p:notesStyle>
+    <a:lvl1pPr marL="0" algn="l" defTabSz="914400" rtl="0" eaLnBrk="1" latinLnBrk="0" hangingPunct="1">
+      <a:defRPr kumimoji="1" sz="1200" kern="1200">
+        <a:solidFill>
+          <a:schemeClr val="tx1"/>
+        </a:solidFill>
+        <a:latin typeface="+mn-lt"/>
+        <a:ea typeface="+mn-ea"/>
+        <a:cs typeface="+mn-cs"/>
+      </a:defRPr>
+    </a:lvl1pPr>
+    <a:lvl2pPr marL="457200" algn="l" defTabSz="914400" rtl="0" eaLnBrk="1" latinLnBrk="0" hangingPunct="1">
+      <a:defRPr kumimoji="1" sz="1200" kern="1200">
+        <a:solidFill>
+          <a:schemeClr val="tx1"/>
+        </a:solidFill>
+        <a:latin typeface="+mn-lt"/>
+        <a:ea typeface="+mn-ea"/>
+        <a:cs typeface="+mn-cs"/>
+      </a:defRPr>
+    </a:lvl2pPr>
+    <a:lvl3pPr marL="914400" algn="l" defTabSz="914400" rtl="0" eaLnBrk="1" latinLnBrk="0" hangingPunct="1">
+      <a:defRPr kumimoji="1" sz="1200" kern="1200">
+        <a:solidFill>
+          <a:schemeClr val="tx1"/>
+        </a:solidFill>
+        <a:latin typeface="+mn-lt"/>
+        <a:ea typeface="+mn-ea"/>
+        <a:cs typeface="+mn-cs"/>
+      </a:defRPr>
+    </a:lvl3pPr>
+    <a:lvl4pPr marL="1371600" algn="l" defTabSz="914400" rtl="0" eaLnBrk="1" latinLnBrk="0" hangingPunct="1">
+      <a:defRPr kumimoji="1" sz="1200" kern="1200">
+        <a:solidFill>
+          <a:schemeClr val="tx1"/>
+        </a:solidFill>
+        <a:latin typeface="+mn-lt"/>
+        <a:ea typeface="+mn-ea"/>
+        <a:cs typeface="+mn-cs"/>
+      </a:defRPr>
+    </a:lvl4pPr>
+    <a:lvl5pPr marL="1828800" algn="l" defTabSz="914400" rtl="0" eaLnBrk="1" latinLnBrk="0" hangingPunct="1">
+      <a:defRPr kumimoji="1" sz="1200" kern="1200">
+        <a:solidFill>
+          <a:schemeClr val="tx1"/>
+        </a:solidFill>
+        <a:latin typeface="+mn-lt"/>
+        <a:ea typeface="+mn-ea"/>
+        <a:cs typeface="+mn-cs"/>
+      </a:defRPr>
+    </a:lvl5pPr>
+    <a:lvl6pPr marL="2286000" algn="l" defTabSz="914400" rtl="0" eaLnBrk="1" latinLnBrk="0" hangingPunct="1">
+      <a:defRPr kumimoji="1" sz="1200" kern="1200">
+        <a:solidFill>
+          <a:schemeClr val="tx1"/>
+        </a:solidFill>
+        <a:latin typeface="+mn-lt"/>
+        <a:ea typeface="+mn-ea"/>
+        <a:cs typeface="+mn-cs"/>
+      </a:defRPr>
+    </a:lvl6pPr>
+    <a:lvl7pPr marL="2743200" algn="l" defTabSz="914400" rtl="0" eaLnBrk="1" latinLnBrk="0" hangingPunct="1">
+      <a:defRPr kumimoji="1" sz="1200" kern="1200">
+        <a:solidFill>
+          <a:schemeClr val="tx1"/>
+        </a:solidFill>
+        <a:latin typeface="+mn-lt"/>
+        <a:ea typeface="+mn-ea"/>
+        <a:cs typeface="+mn-cs"/>
+      </a:defRPr>
+    </a:lvl7pPr>
+    <a:lvl8pPr marL="3200400" algn="l" defTabSz="914400" rtl="0" eaLnBrk="1" latinLnBrk="0" hangingPunct="1">
+      <a:defRPr kumimoji="1" sz="1200" kern="1200">
+        <a:solidFill>
+          <a:schemeClr val="tx1"/>
+        </a:solidFill>
+        <a:latin typeface="+mn-lt"/>
+        <a:ea typeface="+mn-ea"/>
+        <a:cs typeface="+mn-cs"/>
+      </a:defRPr>
+    </a:lvl8pPr>
+    <a:lvl9pPr marL="3657600" algn="l" defTabSz="914400" rtl="0" eaLnBrk="1" latinLnBrk="0" hangingPunct="1">
+      <a:defRPr kumimoji="1" sz="1200" kern="1200">
+        <a:solidFill>
+          <a:schemeClr val="tx1"/>
+        </a:solidFill>
+        <a:latin typeface="+mn-lt"/>
+        <a:ea typeface="+mn-ea"/>
+        <a:cs typeface="+mn-cs"/>
+      </a:defRPr>
+    </a:lvl9pPr>
+  </p:notesStyle>
+</p:notesMaster>
+</file>
+
+<file path=ppt/notesSlides/notesSlide1.xml><?xml version="1.0" encoding="utf-8"?>
+<p:notes xmlns:a="http://schemas.openxmlformats.org/drawingml/2006/main" xmlns:r="http://schemas.openxmlformats.org/officeDocument/2006/relationships" xmlns:p="http://schemas.openxmlformats.org/presentationml/2006/main">
+  <p:cSld>
+    <p:spTree>
+      <p:nvGrpSpPr>
+        <p:cNvPr id="1" name="">
+          <a:extLst>
+            <a:ext uri="{FF2B5EF4-FFF2-40B4-BE49-F238E27FC236}">
+              <a16:creationId xmlns:a16="http://schemas.microsoft.com/office/drawing/2014/main" id="{16EE855B-5535-79F7-D3A0-C0A506787C8C}"/>
+            </a:ext>
+          </a:extLst>
+        </p:cNvPr>
+        <p:cNvGrpSpPr/>
+        <p:nvPr/>
+      </p:nvGrpSpPr>
+      <p:grpSpPr>
+        <a:xfrm>
+          <a:off x="0" y="0"/>
+          <a:ext cx="0" cy="0"/>
+          <a:chOff x="0" y="0"/>
+          <a:chExt cx="0" cy="0"/>
+        </a:xfrm>
+      </p:grpSpPr>
+      <p:sp>
+        <p:nvSpPr>
+          <p:cNvPr id="2" name="スライド イメージ プレースホルダー 1">
+            <a:extLst>
+              <a:ext uri="{FF2B5EF4-FFF2-40B4-BE49-F238E27FC236}">
+                <a16:creationId xmlns:a16="http://schemas.microsoft.com/office/drawing/2014/main" id="{3C6FB8FB-0888-2275-ABE8-A13FDAA10E3F}"/>
+              </a:ext>
+            </a:extLst>
+          </p:cNvPr>
+          <p:cNvSpPr>
+            <a:spLocks noGrp="1" noRot="1" noChangeAspect="1"/>
+          </p:cNvSpPr>
+          <p:nvPr>
+            <p:ph type="sldImg"/>
+          </p:nvPr>
+        </p:nvSpPr>
+        <p:spPr/>
+      </p:sp>
+      <p:sp>
+        <p:nvSpPr>
+          <p:cNvPr id="3" name="ノート プレースホルダー 2">
+            <a:extLst>
+              <a:ext uri="{FF2B5EF4-FFF2-40B4-BE49-F238E27FC236}">
+                <a16:creationId xmlns:a16="http://schemas.microsoft.com/office/drawing/2014/main" id="{2D71EA6C-9577-A559-064D-4DE5700FB2FB}"/>
+              </a:ext>
+            </a:extLst>
+          </p:cNvPr>
           <p:cNvSpPr>
             <a:spLocks noGrp="1"/>
           </p:cNvSpPr>
@@ -2643,206 +680,1408 @@
             <p:ph type="body" idx="1"/>
           </p:nvPr>
         </p:nvSpPr>
-        <p:spPr>
-          <a:xfrm>
-            <a:off x="457200" y="1600200"/>
-            <a:ext cx="8229600" cy="4525963"/>
-          </a:xfrm>
-          <a:prstGeom prst="rect">
-            <a:avLst/>
-          </a:prstGeom>
-        </p:spPr>
-        <p:txBody>
-          <a:bodyPr vert="horz" lIns="91440" tIns="45720" rIns="91440" bIns="45720" rtlCol="0">
-            <a:normAutofit/>
-          </a:bodyPr>
-          <a:lstStyle/>
-          <a:p>
-            <a:pPr lvl="0"/>
-            <a:r>
-              <a:rPr lang="en-US" smtClean="0"/>
-              <a:t>Click to edit Master text styles</a:t>
-            </a:r>
-          </a:p>
-          <a:p>
-            <a:pPr lvl="1"/>
-            <a:r>
-              <a:rPr lang="en-US" smtClean="0"/>
-              <a:t>Second level</a:t>
-            </a:r>
-          </a:p>
-          <a:p>
-            <a:pPr lvl="2"/>
-            <a:r>
-              <a:rPr lang="en-US" smtClean="0"/>
-              <a:t>Third level</a:t>
-            </a:r>
-          </a:p>
-          <a:p>
-            <a:pPr lvl="3"/>
-            <a:r>
-              <a:rPr lang="en-US" smtClean="0"/>
-              <a:t>Fourth level</a:t>
-            </a:r>
-          </a:p>
-          <a:p>
-            <a:pPr lvl="4"/>
-            <a:r>
-              <a:rPr lang="en-US" smtClean="0"/>
-              <a:t>Fifth level</a:t>
-            </a:r>
-            <a:endParaRPr lang="en-US"/>
-          </a:p>
-        </p:txBody>
-      </p:sp>
-      <p:sp>
-        <p:nvSpPr>
-          <p:cNvPr id="4" name="Date Placeholder 3"/>
+        <p:spPr/>
+        <p:txBody>
+          <a:bodyPr/>
+          <a:lstStyle/>
+          <a:p>
+            <a:endParaRPr kumimoji="1" lang="ja-JP" altLang="en-US" dirty="0"/>
+          </a:p>
+        </p:txBody>
+      </p:sp>
+      <p:sp>
+        <p:nvSpPr>
+          <p:cNvPr id="4" name="スライド番号プレースホルダー 3">
+            <a:extLst>
+              <a:ext uri="{FF2B5EF4-FFF2-40B4-BE49-F238E27FC236}">
+                <a16:creationId xmlns:a16="http://schemas.microsoft.com/office/drawing/2014/main" id="{A1C4F904-4503-6BD1-FC32-6AA038134FF0}"/>
+              </a:ext>
+            </a:extLst>
+          </p:cNvPr>
           <p:cNvSpPr>
             <a:spLocks noGrp="1"/>
           </p:cNvSpPr>
           <p:nvPr>
-            <p:ph type="dt" sz="half" idx="2"/>
+            <p:ph type="sldNum" sz="quarter" idx="10"/>
           </p:nvPr>
         </p:nvSpPr>
-        <p:spPr>
-          <a:xfrm>
-            <a:off x="457200" y="6356350"/>
-            <a:ext cx="2133600" cy="365125"/>
-          </a:xfrm>
-          <a:prstGeom prst="rect">
-            <a:avLst/>
-          </a:prstGeom>
-        </p:spPr>
-        <p:txBody>
-          <a:bodyPr vert="horz" lIns="91440" tIns="45720" rIns="91440" bIns="45720" rtlCol="0" anchor="ctr"/>
-          <a:lstStyle>
-            <a:lvl1pPr algn="l">
-              <a:defRPr sz="1200">
-                <a:solidFill>
-                  <a:schemeClr val="tx1">
-                    <a:tint val="75000"/>
-                  </a:schemeClr>
-                </a:solidFill>
-              </a:defRPr>
-            </a:lvl1pPr>
-          </a:lstStyle>
-          <a:p>
-            <a:fld id="{5BCAD085-E8A6-8845-BD4E-CB4CCA059FC4}" type="datetimeFigureOut">
-              <a:rPr lang="en-US" smtClean="0"/>
-              <a:t>1/27/13</a:t>
+        <p:spPr/>
+        <p:txBody>
+          <a:bodyPr/>
+          <a:lstStyle/>
+          <a:p>
+            <a:fld id="{022E43C0-6795-4B13-B37C-259C826D4B6A}" type="slidenum">
+              <a:rPr kumimoji="1" lang="ja-JP" altLang="en-US" smtClean="0"/>
+              <a:t>2</a:t>
             </a:fld>
-            <a:endParaRPr lang="en-US"/>
-          </a:p>
-        </p:txBody>
-      </p:sp>
-      <p:sp>
-        <p:nvSpPr>
-          <p:cNvPr id="5" name="Footer Placeholder 4"/>
+            <a:endParaRPr kumimoji="1" lang="ja-JP" altLang="en-US"/>
+          </a:p>
+        </p:txBody>
+      </p:sp>
+    </p:spTree>
+    <p:extLst>
+      <p:ext uri="{BB962C8B-B14F-4D97-AF65-F5344CB8AC3E}">
+        <p14:creationId xmlns:p14="http://schemas.microsoft.com/office/powerpoint/2010/main" val="1125421082"/>
+      </p:ext>
+    </p:extLst>
+  </p:cSld>
+  <p:clrMapOvr>
+    <a:masterClrMapping/>
+  </p:clrMapOvr>
+</p:notes>
+</file>
+
+<file path=ppt/notesSlides/notesSlide2.xml><?xml version="1.0" encoding="utf-8"?>
+<p:notes xmlns:a="http://schemas.openxmlformats.org/drawingml/2006/main" xmlns:r="http://schemas.openxmlformats.org/officeDocument/2006/relationships" xmlns:p="http://schemas.openxmlformats.org/presentationml/2006/main">
+  <p:cSld>
+    <p:spTree>
+      <p:nvGrpSpPr>
+        <p:cNvPr id="1" name="">
+          <a:extLst>
+            <a:ext uri="{FF2B5EF4-FFF2-40B4-BE49-F238E27FC236}">
+              <a16:creationId xmlns:a16="http://schemas.microsoft.com/office/drawing/2014/main" id="{A9440A72-79AB-D734-F919-6B5353A07685}"/>
+            </a:ext>
+          </a:extLst>
+        </p:cNvPr>
+        <p:cNvGrpSpPr/>
+        <p:nvPr/>
+      </p:nvGrpSpPr>
+      <p:grpSpPr>
+        <a:xfrm>
+          <a:off x="0" y="0"/>
+          <a:ext cx="0" cy="0"/>
+          <a:chOff x="0" y="0"/>
+          <a:chExt cx="0" cy="0"/>
+        </a:xfrm>
+      </p:grpSpPr>
+      <p:sp>
+        <p:nvSpPr>
+          <p:cNvPr id="2" name="スライド イメージ プレースホルダー 1">
+            <a:extLst>
+              <a:ext uri="{FF2B5EF4-FFF2-40B4-BE49-F238E27FC236}">
+                <a16:creationId xmlns:a16="http://schemas.microsoft.com/office/drawing/2014/main" id="{0043DCC9-013F-5916-497A-3173AB3EE696}"/>
+              </a:ext>
+            </a:extLst>
+          </p:cNvPr>
+          <p:cNvSpPr>
+            <a:spLocks noGrp="1" noRot="1" noChangeAspect="1"/>
+          </p:cNvSpPr>
+          <p:nvPr>
+            <p:ph type="sldImg"/>
+          </p:nvPr>
+        </p:nvSpPr>
+        <p:spPr/>
+      </p:sp>
+      <p:sp>
+        <p:nvSpPr>
+          <p:cNvPr id="3" name="ノート プレースホルダー 2">
+            <a:extLst>
+              <a:ext uri="{FF2B5EF4-FFF2-40B4-BE49-F238E27FC236}">
+                <a16:creationId xmlns:a16="http://schemas.microsoft.com/office/drawing/2014/main" id="{1AE4841C-3C6F-F028-ED9E-D25D3936D70F}"/>
+              </a:ext>
+            </a:extLst>
+          </p:cNvPr>
           <p:cNvSpPr>
             <a:spLocks noGrp="1"/>
           </p:cNvSpPr>
           <p:nvPr>
-            <p:ph type="ftr" sz="quarter" idx="3"/>
+            <p:ph type="body" idx="1"/>
           </p:nvPr>
         </p:nvSpPr>
-        <p:spPr>
-          <a:xfrm>
-            <a:off x="3124200" y="6356350"/>
-            <a:ext cx="2895600" cy="365125"/>
-          </a:xfrm>
-          <a:prstGeom prst="rect">
-            <a:avLst/>
-          </a:prstGeom>
-        </p:spPr>
-        <p:txBody>
-          <a:bodyPr vert="horz" lIns="91440" tIns="45720" rIns="91440" bIns="45720" rtlCol="0" anchor="ctr"/>
-          <a:lstStyle>
-            <a:lvl1pPr algn="ctr">
-              <a:defRPr sz="1200">
-                <a:solidFill>
-                  <a:schemeClr val="tx1">
-                    <a:tint val="75000"/>
-                  </a:schemeClr>
-                </a:solidFill>
-              </a:defRPr>
-            </a:lvl1pPr>
-          </a:lstStyle>
-          <a:p>
-            <a:endParaRPr lang="en-US"/>
-          </a:p>
-        </p:txBody>
-      </p:sp>
-      <p:sp>
-        <p:nvSpPr>
-          <p:cNvPr id="6" name="Slide Number Placeholder 5"/>
+        <p:spPr/>
+        <p:txBody>
+          <a:bodyPr/>
+          <a:lstStyle/>
+          <a:p>
+            <a:endParaRPr kumimoji="1" lang="ja-JP" altLang="en-US" dirty="0"/>
+          </a:p>
+        </p:txBody>
+      </p:sp>
+      <p:sp>
+        <p:nvSpPr>
+          <p:cNvPr id="4" name="スライド番号プレースホルダー 3">
+            <a:extLst>
+              <a:ext uri="{FF2B5EF4-FFF2-40B4-BE49-F238E27FC236}">
+                <a16:creationId xmlns:a16="http://schemas.microsoft.com/office/drawing/2014/main" id="{8A806F5D-B3E8-8EF8-D9FF-5F440AE7245B}"/>
+              </a:ext>
+            </a:extLst>
+          </p:cNvPr>
           <p:cNvSpPr>
             <a:spLocks noGrp="1"/>
           </p:cNvSpPr>
           <p:nvPr>
-            <p:ph type="sldNum" sz="quarter" idx="4"/>
+            <p:ph type="sldNum" sz="quarter" idx="10"/>
           </p:nvPr>
         </p:nvSpPr>
-        <p:spPr>
-          <a:xfrm>
-            <a:off x="6553200" y="6356350"/>
-            <a:ext cx="2133600" cy="365125"/>
-          </a:xfrm>
-          <a:prstGeom prst="rect">
-            <a:avLst/>
-          </a:prstGeom>
-        </p:spPr>
-        <p:txBody>
-          <a:bodyPr vert="horz" lIns="91440" tIns="45720" rIns="91440" bIns="45720" rtlCol="0" anchor="ctr"/>
-          <a:lstStyle>
-            <a:lvl1pPr algn="r">
-              <a:defRPr sz="1200">
-                <a:solidFill>
-                  <a:schemeClr val="tx1">
-                    <a:tint val="75000"/>
-                  </a:schemeClr>
-                </a:solidFill>
-              </a:defRPr>
-            </a:lvl1pPr>
-          </a:lstStyle>
-          <a:p>
-            <a:fld id="{C1FF6DA9-008F-8B48-92A6-B652298478BF}" type="slidenum">
-              <a:rPr lang="en-US" smtClean="0"/>
-              <a:t>‹#›</a:t>
+        <p:spPr/>
+        <p:txBody>
+          <a:bodyPr/>
+          <a:lstStyle/>
+          <a:p>
+            <a:fld id="{022E43C0-6795-4B13-B37C-259C826D4B6A}" type="slidenum">
+              <a:rPr kumimoji="1" lang="ja-JP" altLang="en-US" smtClean="0"/>
+              <a:t>5</a:t>
             </a:fld>
-            <a:endParaRPr lang="en-US"/>
+            <a:endParaRPr kumimoji="1" lang="ja-JP" altLang="en-US"/>
           </a:p>
         </p:txBody>
       </p:sp>
     </p:spTree>
     <p:extLst>
       <p:ext uri="{BB962C8B-B14F-4D97-AF65-F5344CB8AC3E}">
-        <p14:creationId xmlns:p14="http://schemas.microsoft.com/office/powerpoint/2010/main" val="2209977519"/>
+        <p14:creationId xmlns:p14="http://schemas.microsoft.com/office/powerpoint/2010/main" val="4260632558"/>
+      </p:ext>
+    </p:extLst>
+  </p:cSld>
+  <p:clrMapOvr>
+    <a:masterClrMapping/>
+  </p:clrMapOvr>
+</p:notes>
+</file>
+
+<file path=ppt/notesSlides/notesSlide3.xml><?xml version="1.0" encoding="utf-8"?>
+<p:notes xmlns:a="http://schemas.openxmlformats.org/drawingml/2006/main" xmlns:r="http://schemas.openxmlformats.org/officeDocument/2006/relationships" xmlns:p="http://schemas.openxmlformats.org/presentationml/2006/main">
+  <p:cSld>
+    <p:spTree>
+      <p:nvGrpSpPr>
+        <p:cNvPr id="1" name="">
+          <a:extLst>
+            <a:ext uri="{FF2B5EF4-FFF2-40B4-BE49-F238E27FC236}">
+              <a16:creationId xmlns:a16="http://schemas.microsoft.com/office/drawing/2014/main" id="{35FCC596-88E7-2BC9-7631-7B2FF864C8B0}"/>
+            </a:ext>
+          </a:extLst>
+        </p:cNvPr>
+        <p:cNvGrpSpPr/>
+        <p:nvPr/>
+      </p:nvGrpSpPr>
+      <p:grpSpPr>
+        <a:xfrm>
+          <a:off x="0" y="0"/>
+          <a:ext cx="0" cy="0"/>
+          <a:chOff x="0" y="0"/>
+          <a:chExt cx="0" cy="0"/>
+        </a:xfrm>
+      </p:grpSpPr>
+      <p:sp>
+        <p:nvSpPr>
+          <p:cNvPr id="2" name="スライド イメージ プレースホルダー 1">
+            <a:extLst>
+              <a:ext uri="{FF2B5EF4-FFF2-40B4-BE49-F238E27FC236}">
+                <a16:creationId xmlns:a16="http://schemas.microsoft.com/office/drawing/2014/main" id="{978EA305-DD4B-4755-1A79-3ECAA1BFAEF8}"/>
+              </a:ext>
+            </a:extLst>
+          </p:cNvPr>
+          <p:cNvSpPr>
+            <a:spLocks noGrp="1" noRot="1" noChangeAspect="1"/>
+          </p:cNvSpPr>
+          <p:nvPr>
+            <p:ph type="sldImg"/>
+          </p:nvPr>
+        </p:nvSpPr>
+        <p:spPr/>
+      </p:sp>
+      <p:sp>
+        <p:nvSpPr>
+          <p:cNvPr id="3" name="ノート プレースホルダー 2">
+            <a:extLst>
+              <a:ext uri="{FF2B5EF4-FFF2-40B4-BE49-F238E27FC236}">
+                <a16:creationId xmlns:a16="http://schemas.microsoft.com/office/drawing/2014/main" id="{3E530CFC-96E0-CB7F-D9F4-B974123A5BE9}"/>
+              </a:ext>
+            </a:extLst>
+          </p:cNvPr>
+          <p:cNvSpPr>
+            <a:spLocks noGrp="1"/>
+          </p:cNvSpPr>
+          <p:nvPr>
+            <p:ph type="body" idx="1"/>
+          </p:nvPr>
+        </p:nvSpPr>
+        <p:spPr/>
+        <p:txBody>
+          <a:bodyPr/>
+          <a:lstStyle/>
+          <a:p>
+            <a:endParaRPr kumimoji="1" lang="ja-JP" altLang="en-US" dirty="0"/>
+          </a:p>
+        </p:txBody>
+      </p:sp>
+      <p:sp>
+        <p:nvSpPr>
+          <p:cNvPr id="4" name="スライド番号プレースホルダー 3">
+            <a:extLst>
+              <a:ext uri="{FF2B5EF4-FFF2-40B4-BE49-F238E27FC236}">
+                <a16:creationId xmlns:a16="http://schemas.microsoft.com/office/drawing/2014/main" id="{2C657086-8B2C-117D-A7A7-81B2D30759FF}"/>
+              </a:ext>
+            </a:extLst>
+          </p:cNvPr>
+          <p:cNvSpPr>
+            <a:spLocks noGrp="1"/>
+          </p:cNvSpPr>
+          <p:nvPr>
+            <p:ph type="sldNum" sz="quarter" idx="10"/>
+          </p:nvPr>
+        </p:nvSpPr>
+        <p:spPr/>
+        <p:txBody>
+          <a:bodyPr/>
+          <a:lstStyle/>
+          <a:p>
+            <a:fld id="{022E43C0-6795-4B13-B37C-259C826D4B6A}" type="slidenum">
+              <a:rPr kumimoji="1" lang="ja-JP" altLang="en-US" smtClean="0"/>
+              <a:t>6</a:t>
+            </a:fld>
+            <a:endParaRPr kumimoji="1" lang="ja-JP" altLang="en-US"/>
+          </a:p>
+        </p:txBody>
+      </p:sp>
+    </p:spTree>
+    <p:extLst>
+      <p:ext uri="{BB962C8B-B14F-4D97-AF65-F5344CB8AC3E}">
+        <p14:creationId xmlns:p14="http://schemas.microsoft.com/office/powerpoint/2010/main" val="1244022156"/>
+      </p:ext>
+    </p:extLst>
+  </p:cSld>
+  <p:clrMapOvr>
+    <a:masterClrMapping/>
+  </p:clrMapOvr>
+</p:notes>
+</file>
+
+<file path=ppt/notesSlides/notesSlide4.xml><?xml version="1.0" encoding="utf-8"?>
+<p:notes xmlns:a="http://schemas.openxmlformats.org/drawingml/2006/main" xmlns:r="http://schemas.openxmlformats.org/officeDocument/2006/relationships" xmlns:p="http://schemas.openxmlformats.org/presentationml/2006/main">
+  <p:cSld>
+    <p:spTree>
+      <p:nvGrpSpPr>
+        <p:cNvPr id="1" name="">
+          <a:extLst>
+            <a:ext uri="{FF2B5EF4-FFF2-40B4-BE49-F238E27FC236}">
+              <a16:creationId xmlns:a16="http://schemas.microsoft.com/office/drawing/2014/main" id="{382B3E24-A18E-3FB1-1BEB-F78B7876B61F}"/>
+            </a:ext>
+          </a:extLst>
+        </p:cNvPr>
+        <p:cNvGrpSpPr/>
+        <p:nvPr/>
+      </p:nvGrpSpPr>
+      <p:grpSpPr>
+        <a:xfrm>
+          <a:off x="0" y="0"/>
+          <a:ext cx="0" cy="0"/>
+          <a:chOff x="0" y="0"/>
+          <a:chExt cx="0" cy="0"/>
+        </a:xfrm>
+      </p:grpSpPr>
+      <p:sp>
+        <p:nvSpPr>
+          <p:cNvPr id="2" name="スライド イメージ プレースホルダー 1">
+            <a:extLst>
+              <a:ext uri="{FF2B5EF4-FFF2-40B4-BE49-F238E27FC236}">
+                <a16:creationId xmlns:a16="http://schemas.microsoft.com/office/drawing/2014/main" id="{83BD67E3-1B96-BBBF-6E58-9F584C1E4219}"/>
+              </a:ext>
+            </a:extLst>
+          </p:cNvPr>
+          <p:cNvSpPr>
+            <a:spLocks noGrp="1" noRot="1" noChangeAspect="1"/>
+          </p:cNvSpPr>
+          <p:nvPr>
+            <p:ph type="sldImg"/>
+          </p:nvPr>
+        </p:nvSpPr>
+        <p:spPr/>
+      </p:sp>
+      <p:sp>
+        <p:nvSpPr>
+          <p:cNvPr id="3" name="ノート プレースホルダー 2">
+            <a:extLst>
+              <a:ext uri="{FF2B5EF4-FFF2-40B4-BE49-F238E27FC236}">
+                <a16:creationId xmlns:a16="http://schemas.microsoft.com/office/drawing/2014/main" id="{3415CA0F-593B-424A-AB1E-372C80A5306F}"/>
+              </a:ext>
+            </a:extLst>
+          </p:cNvPr>
+          <p:cNvSpPr>
+            <a:spLocks noGrp="1"/>
+          </p:cNvSpPr>
+          <p:nvPr>
+            <p:ph type="body" idx="1"/>
+          </p:nvPr>
+        </p:nvSpPr>
+        <p:spPr/>
+        <p:txBody>
+          <a:bodyPr/>
+          <a:lstStyle/>
+          <a:p>
+            <a:endParaRPr kumimoji="1" lang="ja-JP" altLang="en-US" dirty="0"/>
+          </a:p>
+        </p:txBody>
+      </p:sp>
+      <p:sp>
+        <p:nvSpPr>
+          <p:cNvPr id="4" name="スライド番号プレースホルダー 3">
+            <a:extLst>
+              <a:ext uri="{FF2B5EF4-FFF2-40B4-BE49-F238E27FC236}">
+                <a16:creationId xmlns:a16="http://schemas.microsoft.com/office/drawing/2014/main" id="{ADC1FAE7-9B14-4C23-B5D8-2C06D3E82C52}"/>
+              </a:ext>
+            </a:extLst>
+          </p:cNvPr>
+          <p:cNvSpPr>
+            <a:spLocks noGrp="1"/>
+          </p:cNvSpPr>
+          <p:nvPr>
+            <p:ph type="sldNum" sz="quarter" idx="10"/>
+          </p:nvPr>
+        </p:nvSpPr>
+        <p:spPr/>
+        <p:txBody>
+          <a:bodyPr/>
+          <a:lstStyle/>
+          <a:p>
+            <a:fld id="{022E43C0-6795-4B13-B37C-259C826D4B6A}" type="slidenum">
+              <a:rPr kumimoji="1" lang="ja-JP" altLang="en-US" smtClean="0"/>
+              <a:t>7</a:t>
+            </a:fld>
+            <a:endParaRPr kumimoji="1" lang="ja-JP" altLang="en-US"/>
+          </a:p>
+        </p:txBody>
+      </p:sp>
+    </p:spTree>
+    <p:extLst>
+      <p:ext uri="{BB962C8B-B14F-4D97-AF65-F5344CB8AC3E}">
+        <p14:creationId xmlns:p14="http://schemas.microsoft.com/office/powerpoint/2010/main" val="4053493258"/>
+      </p:ext>
+    </p:extLst>
+  </p:cSld>
+  <p:clrMapOvr>
+    <a:masterClrMapping/>
+  </p:clrMapOvr>
+</p:notes>
+</file>
+
+<file path=ppt/notesSlides/notesSlide5.xml><?xml version="1.0" encoding="utf-8"?>
+<p:notes xmlns:a="http://schemas.openxmlformats.org/drawingml/2006/main" xmlns:r="http://schemas.openxmlformats.org/officeDocument/2006/relationships" xmlns:p="http://schemas.openxmlformats.org/presentationml/2006/main">
+  <p:cSld>
+    <p:spTree>
+      <p:nvGrpSpPr>
+        <p:cNvPr id="1" name="">
+          <a:extLst>
+            <a:ext uri="{FF2B5EF4-FFF2-40B4-BE49-F238E27FC236}">
+              <a16:creationId xmlns:a16="http://schemas.microsoft.com/office/drawing/2014/main" id="{1D068803-9F0E-9C31-9560-2094718579F9}"/>
+            </a:ext>
+          </a:extLst>
+        </p:cNvPr>
+        <p:cNvGrpSpPr/>
+        <p:nvPr/>
+      </p:nvGrpSpPr>
+      <p:grpSpPr>
+        <a:xfrm>
+          <a:off x="0" y="0"/>
+          <a:ext cx="0" cy="0"/>
+          <a:chOff x="0" y="0"/>
+          <a:chExt cx="0" cy="0"/>
+        </a:xfrm>
+      </p:grpSpPr>
+      <p:sp>
+        <p:nvSpPr>
+          <p:cNvPr id="2" name="スライド イメージ プレースホルダー 1">
+            <a:extLst>
+              <a:ext uri="{FF2B5EF4-FFF2-40B4-BE49-F238E27FC236}">
+                <a16:creationId xmlns:a16="http://schemas.microsoft.com/office/drawing/2014/main" id="{809DBAC0-C8E1-8C5B-7FC3-E2F967DE37DB}"/>
+              </a:ext>
+            </a:extLst>
+          </p:cNvPr>
+          <p:cNvSpPr>
+            <a:spLocks noGrp="1" noRot="1" noChangeAspect="1"/>
+          </p:cNvSpPr>
+          <p:nvPr>
+            <p:ph type="sldImg"/>
+          </p:nvPr>
+        </p:nvSpPr>
+        <p:spPr/>
+      </p:sp>
+      <p:sp>
+        <p:nvSpPr>
+          <p:cNvPr id="3" name="ノート プレースホルダー 2">
+            <a:extLst>
+              <a:ext uri="{FF2B5EF4-FFF2-40B4-BE49-F238E27FC236}">
+                <a16:creationId xmlns:a16="http://schemas.microsoft.com/office/drawing/2014/main" id="{4C9E6ECD-81E8-9621-C097-7F38D3F575C9}"/>
+              </a:ext>
+            </a:extLst>
+          </p:cNvPr>
+          <p:cNvSpPr>
+            <a:spLocks noGrp="1"/>
+          </p:cNvSpPr>
+          <p:nvPr>
+            <p:ph type="body" idx="1"/>
+          </p:nvPr>
+        </p:nvSpPr>
+        <p:spPr/>
+        <p:txBody>
+          <a:bodyPr/>
+          <a:lstStyle/>
+          <a:p>
+            <a:endParaRPr kumimoji="1" lang="ja-JP" altLang="en-US" dirty="0"/>
+          </a:p>
+        </p:txBody>
+      </p:sp>
+      <p:sp>
+        <p:nvSpPr>
+          <p:cNvPr id="4" name="スライド番号プレースホルダー 3">
+            <a:extLst>
+              <a:ext uri="{FF2B5EF4-FFF2-40B4-BE49-F238E27FC236}">
+                <a16:creationId xmlns:a16="http://schemas.microsoft.com/office/drawing/2014/main" id="{F0567096-EE1C-9444-DCCA-A268D8AAC4E0}"/>
+              </a:ext>
+            </a:extLst>
+          </p:cNvPr>
+          <p:cNvSpPr>
+            <a:spLocks noGrp="1"/>
+          </p:cNvSpPr>
+          <p:nvPr>
+            <p:ph type="sldNum" sz="quarter" idx="10"/>
+          </p:nvPr>
+        </p:nvSpPr>
+        <p:spPr/>
+        <p:txBody>
+          <a:bodyPr/>
+          <a:lstStyle/>
+          <a:p>
+            <a:fld id="{022E43C0-6795-4B13-B37C-259C826D4B6A}" type="slidenum">
+              <a:rPr kumimoji="1" lang="ja-JP" altLang="en-US" smtClean="0"/>
+              <a:t>8</a:t>
+            </a:fld>
+            <a:endParaRPr kumimoji="1" lang="ja-JP" altLang="en-US"/>
+          </a:p>
+        </p:txBody>
+      </p:sp>
+    </p:spTree>
+    <p:extLst>
+      <p:ext uri="{BB962C8B-B14F-4D97-AF65-F5344CB8AC3E}">
+        <p14:creationId xmlns:p14="http://schemas.microsoft.com/office/powerpoint/2010/main" val="1686084847"/>
+      </p:ext>
+    </p:extLst>
+  </p:cSld>
+  <p:clrMapOvr>
+    <a:masterClrMapping/>
+  </p:clrMapOvr>
+</p:notes>
+</file>
+
+<file path=ppt/notesSlides/notesSlide6.xml><?xml version="1.0" encoding="utf-8"?>
+<p:notes xmlns:a="http://schemas.openxmlformats.org/drawingml/2006/main" xmlns:r="http://schemas.openxmlformats.org/officeDocument/2006/relationships" xmlns:p="http://schemas.openxmlformats.org/presentationml/2006/main">
+  <p:cSld>
+    <p:spTree>
+      <p:nvGrpSpPr>
+        <p:cNvPr id="1" name="">
+          <a:extLst>
+            <a:ext uri="{FF2B5EF4-FFF2-40B4-BE49-F238E27FC236}">
+              <a16:creationId xmlns:a16="http://schemas.microsoft.com/office/drawing/2014/main" id="{74215D0A-BA72-DE45-32FA-363803F140CE}"/>
+            </a:ext>
+          </a:extLst>
+        </p:cNvPr>
+        <p:cNvGrpSpPr/>
+        <p:nvPr/>
+      </p:nvGrpSpPr>
+      <p:grpSpPr>
+        <a:xfrm>
+          <a:off x="0" y="0"/>
+          <a:ext cx="0" cy="0"/>
+          <a:chOff x="0" y="0"/>
+          <a:chExt cx="0" cy="0"/>
+        </a:xfrm>
+      </p:grpSpPr>
+      <p:sp>
+        <p:nvSpPr>
+          <p:cNvPr id="2" name="スライド イメージ プレースホルダー 1">
+            <a:extLst>
+              <a:ext uri="{FF2B5EF4-FFF2-40B4-BE49-F238E27FC236}">
+                <a16:creationId xmlns:a16="http://schemas.microsoft.com/office/drawing/2014/main" id="{27D2F8A3-D4B3-B9E6-A613-A157696B87F2}"/>
+              </a:ext>
+            </a:extLst>
+          </p:cNvPr>
+          <p:cNvSpPr>
+            <a:spLocks noGrp="1" noRot="1" noChangeAspect="1"/>
+          </p:cNvSpPr>
+          <p:nvPr>
+            <p:ph type="sldImg"/>
+          </p:nvPr>
+        </p:nvSpPr>
+        <p:spPr/>
+      </p:sp>
+      <p:sp>
+        <p:nvSpPr>
+          <p:cNvPr id="3" name="ノート プレースホルダー 2">
+            <a:extLst>
+              <a:ext uri="{FF2B5EF4-FFF2-40B4-BE49-F238E27FC236}">
+                <a16:creationId xmlns:a16="http://schemas.microsoft.com/office/drawing/2014/main" id="{933FBD4A-B575-3375-091A-F6A24B5A9BD0}"/>
+              </a:ext>
+            </a:extLst>
+          </p:cNvPr>
+          <p:cNvSpPr>
+            <a:spLocks noGrp="1"/>
+          </p:cNvSpPr>
+          <p:nvPr>
+            <p:ph type="body" idx="1"/>
+          </p:nvPr>
+        </p:nvSpPr>
+        <p:spPr/>
+        <p:txBody>
+          <a:bodyPr/>
+          <a:lstStyle/>
+          <a:p>
+            <a:endParaRPr kumimoji="1" lang="ja-JP" altLang="en-US" dirty="0"/>
+          </a:p>
+        </p:txBody>
+      </p:sp>
+      <p:sp>
+        <p:nvSpPr>
+          <p:cNvPr id="4" name="スライド番号プレースホルダー 3">
+            <a:extLst>
+              <a:ext uri="{FF2B5EF4-FFF2-40B4-BE49-F238E27FC236}">
+                <a16:creationId xmlns:a16="http://schemas.microsoft.com/office/drawing/2014/main" id="{4CAEAEB9-E37C-569F-CBB7-45D65E2A0906}"/>
+              </a:ext>
+            </a:extLst>
+          </p:cNvPr>
+          <p:cNvSpPr>
+            <a:spLocks noGrp="1"/>
+          </p:cNvSpPr>
+          <p:nvPr>
+            <p:ph type="sldNum" sz="quarter" idx="10"/>
+          </p:nvPr>
+        </p:nvSpPr>
+        <p:spPr/>
+        <p:txBody>
+          <a:bodyPr/>
+          <a:lstStyle/>
+          <a:p>
+            <a:fld id="{022E43C0-6795-4B13-B37C-259C826D4B6A}" type="slidenum">
+              <a:rPr kumimoji="1" lang="ja-JP" altLang="en-US" smtClean="0"/>
+              <a:t>9</a:t>
+            </a:fld>
+            <a:endParaRPr kumimoji="1" lang="ja-JP" altLang="en-US"/>
+          </a:p>
+        </p:txBody>
+      </p:sp>
+    </p:spTree>
+    <p:extLst>
+      <p:ext uri="{BB962C8B-B14F-4D97-AF65-F5344CB8AC3E}">
+        <p14:creationId xmlns:p14="http://schemas.microsoft.com/office/powerpoint/2010/main" val="1585148626"/>
+      </p:ext>
+    </p:extLst>
+  </p:cSld>
+  <p:clrMapOvr>
+    <a:masterClrMapping/>
+  </p:clrMapOvr>
+</p:notes>
+</file>
+
+<file path=ppt/notesSlides/notesSlide7.xml><?xml version="1.0" encoding="utf-8"?>
+<p:notes xmlns:a="http://schemas.openxmlformats.org/drawingml/2006/main" xmlns:r="http://schemas.openxmlformats.org/officeDocument/2006/relationships" xmlns:p="http://schemas.openxmlformats.org/presentationml/2006/main">
+  <p:cSld>
+    <p:spTree>
+      <p:nvGrpSpPr>
+        <p:cNvPr id="1" name="">
+          <a:extLst>
+            <a:ext uri="{FF2B5EF4-FFF2-40B4-BE49-F238E27FC236}">
+              <a16:creationId xmlns:a16="http://schemas.microsoft.com/office/drawing/2014/main" id="{139F8CEE-BA77-7F59-159F-47D256C6C92E}"/>
+            </a:ext>
+          </a:extLst>
+        </p:cNvPr>
+        <p:cNvGrpSpPr/>
+        <p:nvPr/>
+      </p:nvGrpSpPr>
+      <p:grpSpPr>
+        <a:xfrm>
+          <a:off x="0" y="0"/>
+          <a:ext cx="0" cy="0"/>
+          <a:chOff x="0" y="0"/>
+          <a:chExt cx="0" cy="0"/>
+        </a:xfrm>
+      </p:grpSpPr>
+      <p:sp>
+        <p:nvSpPr>
+          <p:cNvPr id="2" name="スライド イメージ プレースホルダー 1">
+            <a:extLst>
+              <a:ext uri="{FF2B5EF4-FFF2-40B4-BE49-F238E27FC236}">
+                <a16:creationId xmlns:a16="http://schemas.microsoft.com/office/drawing/2014/main" id="{A920AAE9-56BE-66E5-82F7-A32C5F5E37D7}"/>
+              </a:ext>
+            </a:extLst>
+          </p:cNvPr>
+          <p:cNvSpPr>
+            <a:spLocks noGrp="1" noRot="1" noChangeAspect="1"/>
+          </p:cNvSpPr>
+          <p:nvPr>
+            <p:ph type="sldImg"/>
+          </p:nvPr>
+        </p:nvSpPr>
+        <p:spPr/>
+      </p:sp>
+      <p:sp>
+        <p:nvSpPr>
+          <p:cNvPr id="3" name="ノート プレースホルダー 2">
+            <a:extLst>
+              <a:ext uri="{FF2B5EF4-FFF2-40B4-BE49-F238E27FC236}">
+                <a16:creationId xmlns:a16="http://schemas.microsoft.com/office/drawing/2014/main" id="{523263BB-84E3-A23F-F50A-22409A9D0377}"/>
+              </a:ext>
+            </a:extLst>
+          </p:cNvPr>
+          <p:cNvSpPr>
+            <a:spLocks noGrp="1"/>
+          </p:cNvSpPr>
+          <p:nvPr>
+            <p:ph type="body" idx="1"/>
+          </p:nvPr>
+        </p:nvSpPr>
+        <p:spPr/>
+        <p:txBody>
+          <a:bodyPr/>
+          <a:lstStyle/>
+          <a:p>
+            <a:endParaRPr kumimoji="1" lang="ja-JP" altLang="en-US" dirty="0"/>
+          </a:p>
+        </p:txBody>
+      </p:sp>
+      <p:sp>
+        <p:nvSpPr>
+          <p:cNvPr id="4" name="スライド番号プレースホルダー 3">
+            <a:extLst>
+              <a:ext uri="{FF2B5EF4-FFF2-40B4-BE49-F238E27FC236}">
+                <a16:creationId xmlns:a16="http://schemas.microsoft.com/office/drawing/2014/main" id="{AAE676F0-0850-6080-8D54-24CC34C00E13}"/>
+              </a:ext>
+            </a:extLst>
+          </p:cNvPr>
+          <p:cNvSpPr>
+            <a:spLocks noGrp="1"/>
+          </p:cNvSpPr>
+          <p:nvPr>
+            <p:ph type="sldNum" sz="quarter" idx="10"/>
+          </p:nvPr>
+        </p:nvSpPr>
+        <p:spPr/>
+        <p:txBody>
+          <a:bodyPr/>
+          <a:lstStyle/>
+          <a:p>
+            <a:fld id="{022E43C0-6795-4B13-B37C-259C826D4B6A}" type="slidenum">
+              <a:rPr kumimoji="1" lang="ja-JP" altLang="en-US" smtClean="0"/>
+              <a:t>10</a:t>
+            </a:fld>
+            <a:endParaRPr kumimoji="1" lang="ja-JP" altLang="en-US"/>
+          </a:p>
+        </p:txBody>
+      </p:sp>
+    </p:spTree>
+    <p:extLst>
+      <p:ext uri="{BB962C8B-B14F-4D97-AF65-F5344CB8AC3E}">
+        <p14:creationId xmlns:p14="http://schemas.microsoft.com/office/powerpoint/2010/main" val="2181456021"/>
+      </p:ext>
+    </p:extLst>
+  </p:cSld>
+  <p:clrMapOvr>
+    <a:masterClrMapping/>
+  </p:clrMapOvr>
+</p:notes>
+</file>
+
+<file path=ppt/slideLayouts/slideLayout1.xml><?xml version="1.0" encoding="utf-8"?>
+<p:sldLayout xmlns:a="http://schemas.openxmlformats.org/drawingml/2006/main" xmlns:r="http://schemas.openxmlformats.org/officeDocument/2006/relationships" xmlns:p="http://schemas.openxmlformats.org/presentationml/2006/main" preserve="1">
+  <p:cSld name="2_タイトルとコンテンツ">
+    <p:spTree>
+      <p:nvGrpSpPr>
+        <p:cNvPr id="1" name=""/>
+        <p:cNvGrpSpPr/>
+        <p:nvPr/>
+      </p:nvGrpSpPr>
+      <p:grpSpPr>
+        <a:xfrm>
+          <a:off x="0" y="0"/>
+          <a:ext cx="0" cy="0"/>
+          <a:chOff x="0" y="0"/>
+          <a:chExt cx="0" cy="0"/>
+        </a:xfrm>
+      </p:grpSpPr>
+      <p:sp>
+        <p:nvSpPr>
+          <p:cNvPr id="2" name="正方形/長方形 1"/>
+          <p:cNvSpPr/>
+          <p:nvPr userDrawn="1"/>
+        </p:nvSpPr>
+        <p:spPr>
+          <a:xfrm>
+            <a:off x="9398000" y="6591300"/>
+            <a:ext cx="419100" cy="266700"/>
+          </a:xfrm>
+          <a:prstGeom prst="rect">
+            <a:avLst/>
+          </a:prstGeom>
+          <a:solidFill>
+            <a:srgbClr val="191F54"/>
+          </a:solidFill>
+          <a:ln>
+            <a:noFill/>
+          </a:ln>
+        </p:spPr>
+        <p:style>
+          <a:lnRef idx="2">
+            <a:schemeClr val="accent1">
+              <a:shade val="50000"/>
+            </a:schemeClr>
+          </a:lnRef>
+          <a:fillRef idx="1">
+            <a:schemeClr val="accent1"/>
+          </a:fillRef>
+          <a:effectRef idx="0">
+            <a:schemeClr val="accent1"/>
+          </a:effectRef>
+          <a:fontRef idx="minor">
+            <a:schemeClr val="lt1"/>
+          </a:fontRef>
+        </p:style>
+        <p:txBody>
+          <a:bodyPr rtlCol="0" anchor="ctr"/>
+          <a:lstStyle/>
+          <a:p>
+            <a:pPr algn="ctr"/>
+            <a:endParaRPr kumimoji="1" lang="ja-JP" altLang="en-US"/>
+          </a:p>
+        </p:txBody>
+      </p:sp>
+    </p:spTree>
+    <p:extLst>
+      <p:ext uri="{BB962C8B-B14F-4D97-AF65-F5344CB8AC3E}">
+        <p14:creationId xmlns:p14="http://schemas.microsoft.com/office/powerpoint/2010/main" val="2758107768"/>
+      </p:ext>
+    </p:extLst>
+  </p:cSld>
+  <p:clrMapOvr>
+    <a:masterClrMapping/>
+  </p:clrMapOvr>
+  <p:hf hdr="0" dt="0"/>
+</p:sldLayout>
+</file>
+
+<file path=ppt/slideLayouts/slideLayout2.xml><?xml version="1.0" encoding="utf-8"?>
+<p:sldLayout xmlns:a="http://schemas.openxmlformats.org/drawingml/2006/main" xmlns:r="http://schemas.openxmlformats.org/officeDocument/2006/relationships" xmlns:p="http://schemas.openxmlformats.org/presentationml/2006/main" preserve="1">
+  <p:cSld name="4_タイトルとコンテンツ">
+    <p:spTree>
+      <p:nvGrpSpPr>
+        <p:cNvPr id="1" name=""/>
+        <p:cNvGrpSpPr/>
+        <p:nvPr/>
+      </p:nvGrpSpPr>
+      <p:grpSpPr>
+        <a:xfrm>
+          <a:off x="0" y="0"/>
+          <a:ext cx="0" cy="0"/>
+          <a:chOff x="0" y="0"/>
+          <a:chExt cx="0" cy="0"/>
+        </a:xfrm>
+      </p:grpSpPr>
+      <p:cxnSp>
+        <p:nvCxnSpPr>
+          <p:cNvPr id="5" name="直線コネクタ 4"/>
+          <p:cNvCxnSpPr/>
+          <p:nvPr/>
+        </p:nvCxnSpPr>
+        <p:spPr>
+          <a:xfrm>
+            <a:off x="0" y="548680"/>
+            <a:ext cx="9906000" cy="0"/>
+          </a:xfrm>
+          <a:prstGeom prst="line">
+            <a:avLst/>
+          </a:prstGeom>
+          <a:ln>
+            <a:solidFill>
+              <a:srgbClr val="191F54"/>
+            </a:solidFill>
+          </a:ln>
+          <a:effectLst/>
+        </p:spPr>
+        <p:style>
+          <a:lnRef idx="2">
+            <a:schemeClr val="accent1"/>
+          </a:lnRef>
+          <a:fillRef idx="0">
+            <a:schemeClr val="accent1"/>
+          </a:fillRef>
+          <a:effectRef idx="1">
+            <a:schemeClr val="accent1"/>
+          </a:effectRef>
+          <a:fontRef idx="minor">
+            <a:schemeClr val="tx1"/>
+          </a:fontRef>
+        </p:style>
+      </p:cxnSp>
+      <p:sp>
+        <p:nvSpPr>
+          <p:cNvPr id="7" name="正方形/長方形 6"/>
+          <p:cNvSpPr/>
+          <p:nvPr/>
+        </p:nvSpPr>
+        <p:spPr>
+          <a:xfrm>
+            <a:off x="0" y="0"/>
+            <a:ext cx="451204" cy="548680"/>
+          </a:xfrm>
+          <a:prstGeom prst="rect">
+            <a:avLst/>
+          </a:prstGeom>
+          <a:solidFill>
+            <a:srgbClr val="191F54"/>
+          </a:solidFill>
+          <a:ln>
+            <a:noFill/>
+          </a:ln>
+          <a:effectLst/>
+        </p:spPr>
+        <p:style>
+          <a:lnRef idx="1">
+            <a:schemeClr val="accent1"/>
+          </a:lnRef>
+          <a:fillRef idx="3">
+            <a:schemeClr val="accent1"/>
+          </a:fillRef>
+          <a:effectRef idx="2">
+            <a:schemeClr val="accent1"/>
+          </a:effectRef>
+          <a:fontRef idx="minor">
+            <a:schemeClr val="lt1"/>
+          </a:fontRef>
+        </p:style>
+        <p:txBody>
+          <a:bodyPr rtlCol="0" anchor="ctr"/>
+          <a:lstStyle/>
+          <a:p>
+            <a:pPr algn="ctr"/>
+            <a:endParaRPr lang="ja-JP" altLang="en-US" sz="1800">
+              <a:solidFill>
+                <a:prstClr val="white"/>
+              </a:solidFill>
+            </a:endParaRPr>
+          </a:p>
+        </p:txBody>
+      </p:sp>
+    </p:spTree>
+    <p:extLst>
+      <p:ext uri="{BB962C8B-B14F-4D97-AF65-F5344CB8AC3E}">
+        <p14:creationId xmlns:p14="http://schemas.microsoft.com/office/powerpoint/2010/main" val="1958189266"/>
+      </p:ext>
+    </p:extLst>
+  </p:cSld>
+  <p:clrMapOvr>
+    <a:masterClrMapping/>
+  </p:clrMapOvr>
+  <p:hf hdr="0" dt="0"/>
+</p:sldLayout>
+</file>
+
+<file path=ppt/slideLayouts/slideLayout3.xml><?xml version="1.0" encoding="utf-8"?>
+<p:sldLayout xmlns:a="http://schemas.openxmlformats.org/drawingml/2006/main" xmlns:r="http://schemas.openxmlformats.org/officeDocument/2006/relationships" xmlns:p="http://schemas.openxmlformats.org/presentationml/2006/main" userDrawn="1">
+  <p:cSld name="1_タイトル スライド">
+    <p:spTree>
+      <p:nvGrpSpPr>
+        <p:cNvPr id="1" name=""/>
+        <p:cNvGrpSpPr/>
+        <p:nvPr/>
+      </p:nvGrpSpPr>
+      <p:grpSpPr>
+        <a:xfrm>
+          <a:off x="0" y="0"/>
+          <a:ext cx="0" cy="0"/>
+          <a:chOff x="0" y="0"/>
+          <a:chExt cx="0" cy="0"/>
+        </a:xfrm>
+      </p:grpSpPr>
+    </p:spTree>
+    <p:extLst>
+      <p:ext uri="{BB962C8B-B14F-4D97-AF65-F5344CB8AC3E}">
+        <p14:creationId xmlns:p14="http://schemas.microsoft.com/office/powerpoint/2010/main" val="3785212341"/>
+      </p:ext>
+    </p:extLst>
+  </p:cSld>
+  <p:clrMapOvr>
+    <a:masterClrMapping/>
+  </p:clrMapOvr>
+</p:sldLayout>
+</file>
+
+<file path=ppt/slideMasters/slideMaster1.xml><?xml version="1.0" encoding="utf-8"?>
+<p:sldMaster xmlns:a="http://schemas.openxmlformats.org/drawingml/2006/main" xmlns:r="http://schemas.openxmlformats.org/officeDocument/2006/relationships" xmlns:p="http://schemas.openxmlformats.org/presentationml/2006/main" preserve="1">
+  <p:cSld>
+    <p:bg>
+      <p:bgRef idx="1001">
+        <a:schemeClr val="bg1"/>
+      </p:bgRef>
+    </p:bg>
+    <p:spTree>
+      <p:nvGrpSpPr>
+        <p:cNvPr id="1" name=""/>
+        <p:cNvGrpSpPr/>
+        <p:nvPr/>
+      </p:nvGrpSpPr>
+      <p:grpSpPr>
+        <a:xfrm>
+          <a:off x="0" y="0"/>
+          <a:ext cx="0" cy="0"/>
+          <a:chOff x="0" y="0"/>
+          <a:chExt cx="0" cy="0"/>
+        </a:xfrm>
+      </p:grpSpPr>
+      <p:pic>
+        <p:nvPicPr>
+          <p:cNvPr id="2" name="図 1"/>
+          <p:cNvPicPr>
+            <a:picLocks noChangeAspect="1"/>
+          </p:cNvPicPr>
+          <p:nvPr/>
+        </p:nvPicPr>
+        <p:blipFill>
+          <a:blip r:embed="rId5" cstate="print">
+            <a:extLst>
+              <a:ext uri="{28A0092B-C50C-407E-A947-70E740481C1C}">
+                <a14:useLocalDpi xmlns:a14="http://schemas.microsoft.com/office/drawing/2010/main" val="0"/>
+              </a:ext>
+            </a:extLst>
+          </a:blip>
+          <a:stretch>
+            <a:fillRect/>
+          </a:stretch>
+        </p:blipFill>
+        <p:spPr>
+          <a:xfrm>
+            <a:off x="8151357" y="72255"/>
+            <a:ext cx="1598627" cy="424153"/>
+          </a:xfrm>
+          <a:prstGeom prst="rect">
+            <a:avLst/>
+          </a:prstGeom>
+        </p:spPr>
+      </p:pic>
+      <p:pic>
+        <p:nvPicPr>
+          <p:cNvPr id="5" name="図 4"/>
+          <p:cNvPicPr>
+            <a:picLocks noChangeAspect="1"/>
+          </p:cNvPicPr>
+          <p:nvPr/>
+        </p:nvPicPr>
+        <p:blipFill>
+          <a:blip r:embed="rId6"/>
+          <a:stretch>
+            <a:fillRect/>
+          </a:stretch>
+        </p:blipFill>
+        <p:spPr>
+          <a:xfrm>
+            <a:off x="8151355" y="32333"/>
+            <a:ext cx="1653069" cy="635796"/>
+          </a:xfrm>
+          <a:prstGeom prst="rect">
+            <a:avLst/>
+          </a:prstGeom>
+        </p:spPr>
+      </p:pic>
+      <p:sp>
+        <p:nvSpPr>
+          <p:cNvPr id="6" name="正方形/長方形 5"/>
+          <p:cNvSpPr/>
+          <p:nvPr/>
+        </p:nvSpPr>
+        <p:spPr>
+          <a:xfrm>
+            <a:off x="0" y="6552728"/>
+            <a:ext cx="9906000" cy="332656"/>
+          </a:xfrm>
+          <a:prstGeom prst="rect">
+            <a:avLst/>
+          </a:prstGeom>
+          <a:solidFill>
+            <a:srgbClr val="191F54"/>
+          </a:solidFill>
+          <a:ln>
+            <a:noFill/>
+          </a:ln>
+          <a:effectLst/>
+        </p:spPr>
+        <p:style>
+          <a:lnRef idx="1">
+            <a:schemeClr val="accent1"/>
+          </a:lnRef>
+          <a:fillRef idx="3">
+            <a:schemeClr val="accent1"/>
+          </a:fillRef>
+          <a:effectRef idx="2">
+            <a:schemeClr val="accent1"/>
+          </a:effectRef>
+          <a:fontRef idx="minor">
+            <a:schemeClr val="lt1"/>
+          </a:fontRef>
+        </p:style>
+        <p:txBody>
+          <a:bodyPr rtlCol="0" anchor="ctr"/>
+          <a:lstStyle/>
+          <a:p>
+            <a:pPr algn="ctr"/>
+            <a:endParaRPr lang="ja-JP" altLang="en-US" sz="1800">
+              <a:solidFill>
+                <a:prstClr val="white"/>
+              </a:solidFill>
+            </a:endParaRPr>
+          </a:p>
+        </p:txBody>
+      </p:sp>
+      <p:sp>
+        <p:nvSpPr>
+          <p:cNvPr id="8" name="スライド番号プレースホルダ 1"/>
+          <p:cNvSpPr txBox="1">
+            <a:spLocks/>
+          </p:cNvSpPr>
+          <p:nvPr/>
+        </p:nvSpPr>
+        <p:spPr>
+          <a:xfrm>
+            <a:off x="7594600" y="6552729"/>
+            <a:ext cx="2311400" cy="365125"/>
+          </a:xfrm>
+          <a:prstGeom prst="rect">
+            <a:avLst/>
+          </a:prstGeom>
+        </p:spPr>
+        <p:txBody>
+          <a:bodyPr/>
+          <a:lstStyle>
+            <a:defPPr>
+              <a:defRPr lang="ja-JP"/>
+            </a:defPPr>
+            <a:lvl1pPr marL="0" algn="l" defTabSz="914400" rtl="0" eaLnBrk="1" latinLnBrk="0" hangingPunct="1">
+              <a:defRPr kumimoji="1" sz="1800" kern="1200">
+                <a:solidFill>
+                  <a:schemeClr val="tx1"/>
+                </a:solidFill>
+                <a:latin typeface="+mn-lt"/>
+                <a:ea typeface="+mn-ea"/>
+                <a:cs typeface="+mn-cs"/>
+              </a:defRPr>
+            </a:lvl1pPr>
+            <a:lvl2pPr marL="457200" algn="l" defTabSz="914400" rtl="0" eaLnBrk="1" latinLnBrk="0" hangingPunct="1">
+              <a:defRPr kumimoji="1" sz="1800" kern="1200">
+                <a:solidFill>
+                  <a:schemeClr val="tx1"/>
+                </a:solidFill>
+                <a:latin typeface="+mn-lt"/>
+                <a:ea typeface="+mn-ea"/>
+                <a:cs typeface="+mn-cs"/>
+              </a:defRPr>
+            </a:lvl2pPr>
+            <a:lvl3pPr marL="914400" algn="l" defTabSz="914400" rtl="0" eaLnBrk="1" latinLnBrk="0" hangingPunct="1">
+              <a:defRPr kumimoji="1" sz="1800" kern="1200">
+                <a:solidFill>
+                  <a:schemeClr val="tx1"/>
+                </a:solidFill>
+                <a:latin typeface="+mn-lt"/>
+                <a:ea typeface="+mn-ea"/>
+                <a:cs typeface="+mn-cs"/>
+              </a:defRPr>
+            </a:lvl3pPr>
+            <a:lvl4pPr marL="1371600" algn="l" defTabSz="914400" rtl="0" eaLnBrk="1" latinLnBrk="0" hangingPunct="1">
+              <a:defRPr kumimoji="1" sz="1800" kern="1200">
+                <a:solidFill>
+                  <a:schemeClr val="tx1"/>
+                </a:solidFill>
+                <a:latin typeface="+mn-lt"/>
+                <a:ea typeface="+mn-ea"/>
+                <a:cs typeface="+mn-cs"/>
+              </a:defRPr>
+            </a:lvl4pPr>
+            <a:lvl5pPr marL="1828800" algn="l" defTabSz="914400" rtl="0" eaLnBrk="1" latinLnBrk="0" hangingPunct="1">
+              <a:defRPr kumimoji="1" sz="1800" kern="1200">
+                <a:solidFill>
+                  <a:schemeClr val="tx1"/>
+                </a:solidFill>
+                <a:latin typeface="+mn-lt"/>
+                <a:ea typeface="+mn-ea"/>
+                <a:cs typeface="+mn-cs"/>
+              </a:defRPr>
+            </a:lvl5pPr>
+            <a:lvl6pPr marL="2286000" algn="l" defTabSz="914400" rtl="0" eaLnBrk="1" latinLnBrk="0" hangingPunct="1">
+              <a:defRPr kumimoji="1" sz="1800" kern="1200">
+                <a:solidFill>
+                  <a:schemeClr val="tx1"/>
+                </a:solidFill>
+                <a:latin typeface="+mn-lt"/>
+                <a:ea typeface="+mn-ea"/>
+                <a:cs typeface="+mn-cs"/>
+              </a:defRPr>
+            </a:lvl6pPr>
+            <a:lvl7pPr marL="2743200" algn="l" defTabSz="914400" rtl="0" eaLnBrk="1" latinLnBrk="0" hangingPunct="1">
+              <a:defRPr kumimoji="1" sz="1800" kern="1200">
+                <a:solidFill>
+                  <a:schemeClr val="tx1"/>
+                </a:solidFill>
+                <a:latin typeface="+mn-lt"/>
+                <a:ea typeface="+mn-ea"/>
+                <a:cs typeface="+mn-cs"/>
+              </a:defRPr>
+            </a:lvl7pPr>
+            <a:lvl8pPr marL="3200400" algn="l" defTabSz="914400" rtl="0" eaLnBrk="1" latinLnBrk="0" hangingPunct="1">
+              <a:defRPr kumimoji="1" sz="1800" kern="1200">
+                <a:solidFill>
+                  <a:schemeClr val="tx1"/>
+                </a:solidFill>
+                <a:latin typeface="+mn-lt"/>
+                <a:ea typeface="+mn-ea"/>
+                <a:cs typeface="+mn-cs"/>
+              </a:defRPr>
+            </a:lvl8pPr>
+            <a:lvl9pPr marL="3657600" algn="l" defTabSz="914400" rtl="0" eaLnBrk="1" latinLnBrk="0" hangingPunct="1">
+              <a:defRPr kumimoji="1" sz="1800" kern="1200">
+                <a:solidFill>
+                  <a:schemeClr val="tx1"/>
+                </a:solidFill>
+                <a:latin typeface="+mn-lt"/>
+                <a:ea typeface="+mn-ea"/>
+                <a:cs typeface="+mn-cs"/>
+              </a:defRPr>
+            </a:lvl9pPr>
+          </a:lstStyle>
+          <a:p>
+            <a:pPr algn="r"/>
+            <a:fld id="{9FC100E3-15F5-4145-A942-47DB1D8B776D}" type="slidenum">
+              <a:rPr lang="ja-JP" altLang="en-US" sz="1400" b="1" smtClean="0">
+                <a:solidFill>
+                  <a:schemeClr val="bg1"/>
+                </a:solidFill>
+                <a:latin typeface="メイリオ" panose="020B0604030504040204" pitchFamily="50" charset="-128"/>
+                <a:ea typeface="メイリオ" panose="020B0604030504040204" pitchFamily="50" charset="-128"/>
+                <a:cs typeface="メイリオ" panose="020B0604030504040204" pitchFamily="50" charset="-128"/>
+              </a:rPr>
+              <a:pPr algn="r"/>
+              <a:t>‹#›</a:t>
+            </a:fld>
+            <a:endParaRPr lang="ja-JP" altLang="en-US" sz="1400" b="1" dirty="0">
+              <a:solidFill>
+                <a:schemeClr val="bg1"/>
+              </a:solidFill>
+              <a:latin typeface="メイリオ" panose="020B0604030504040204" pitchFamily="50" charset="-128"/>
+              <a:ea typeface="メイリオ" panose="020B0604030504040204" pitchFamily="50" charset="-128"/>
+              <a:cs typeface="メイリオ" panose="020B0604030504040204" pitchFamily="50" charset="-128"/>
+            </a:endParaRPr>
+          </a:p>
+        </p:txBody>
+      </p:sp>
+      <p:sp>
+        <p:nvSpPr>
+          <p:cNvPr id="9" name="テキスト ボックス 8"/>
+          <p:cNvSpPr txBox="1">
+            <a:spLocks noChangeArrowheads="1"/>
+          </p:cNvSpPr>
+          <p:nvPr userDrawn="1"/>
+        </p:nvSpPr>
+        <p:spPr bwMode="auto">
+          <a:xfrm>
+            <a:off x="116569" y="6597932"/>
+            <a:ext cx="3666301" cy="215444"/>
+          </a:xfrm>
+          <a:prstGeom prst="rect">
+            <a:avLst/>
+          </a:prstGeom>
+          <a:noFill/>
+          <a:ln>
+            <a:noFill/>
+          </a:ln>
+          <a:extLst>
+            <a:ext uri="{909E8E84-426E-40DD-AFC4-6F175D3DCCD1}">
+              <a14:hiddenFill xmlns:a14="http://schemas.microsoft.com/office/drawing/2010/main">
+                <a:solidFill>
+                  <a:srgbClr val="FFFFFF"/>
+                </a:solidFill>
+              </a14:hiddenFill>
+            </a:ext>
+            <a:ext uri="{91240B29-F687-4F45-9708-019B960494DF}">
+              <a14:hiddenLine xmlns:a14="http://schemas.microsoft.com/office/drawing/2010/main" w="9525">
+                <a:solidFill>
+                  <a:srgbClr val="000000"/>
+                </a:solidFill>
+                <a:miter lim="800000"/>
+                <a:headEnd/>
+                <a:tailEnd/>
+              </a14:hiddenLine>
+            </a:ext>
+          </a:extLst>
+        </p:spPr>
+        <p:txBody>
+          <a:bodyPr wrap="square">
+            <a:spAutoFit/>
+          </a:bodyPr>
+          <a:lstStyle>
+            <a:lvl1pPr>
+              <a:defRPr kumimoji="1" sz="2400">
+                <a:solidFill>
+                  <a:schemeClr val="tx1"/>
+                </a:solidFill>
+                <a:latin typeface="Arial" charset="0"/>
+                <a:ea typeface="ＭＳ Ｐゴシック" charset="0"/>
+                <a:cs typeface="ＭＳ Ｐゴシック" charset="0"/>
+              </a:defRPr>
+            </a:lvl1pPr>
+            <a:lvl2pPr marL="742950" indent="-285750">
+              <a:defRPr kumimoji="1" sz="2400">
+                <a:solidFill>
+                  <a:schemeClr val="tx1"/>
+                </a:solidFill>
+                <a:latin typeface="Arial" charset="0"/>
+                <a:ea typeface="ＭＳ Ｐゴシック" charset="0"/>
+              </a:defRPr>
+            </a:lvl2pPr>
+            <a:lvl3pPr marL="1143000" indent="-228600">
+              <a:defRPr kumimoji="1" sz="2400">
+                <a:solidFill>
+                  <a:schemeClr val="tx1"/>
+                </a:solidFill>
+                <a:latin typeface="Arial" charset="0"/>
+                <a:ea typeface="ＭＳ Ｐゴシック" charset="0"/>
+              </a:defRPr>
+            </a:lvl3pPr>
+            <a:lvl4pPr marL="1600200" indent="-228600">
+              <a:defRPr kumimoji="1" sz="2400">
+                <a:solidFill>
+                  <a:schemeClr val="tx1"/>
+                </a:solidFill>
+                <a:latin typeface="Arial" charset="0"/>
+                <a:ea typeface="ＭＳ Ｐゴシック" charset="0"/>
+              </a:defRPr>
+            </a:lvl4pPr>
+            <a:lvl5pPr marL="2057400" indent="-228600">
+              <a:defRPr kumimoji="1" sz="2400">
+                <a:solidFill>
+                  <a:schemeClr val="tx1"/>
+                </a:solidFill>
+                <a:latin typeface="Arial" charset="0"/>
+                <a:ea typeface="ＭＳ Ｐゴシック" charset="0"/>
+              </a:defRPr>
+            </a:lvl5pPr>
+            <a:lvl6pPr marL="2514600" indent="-228600" fontAlgn="base">
+              <a:spcBef>
+                <a:spcPct val="0"/>
+              </a:spcBef>
+              <a:spcAft>
+                <a:spcPct val="0"/>
+              </a:spcAft>
+              <a:defRPr kumimoji="1" sz="2400">
+                <a:solidFill>
+                  <a:schemeClr val="tx1"/>
+                </a:solidFill>
+                <a:latin typeface="Arial" charset="0"/>
+                <a:ea typeface="ＭＳ Ｐゴシック" charset="0"/>
+              </a:defRPr>
+            </a:lvl6pPr>
+            <a:lvl7pPr marL="2971800" indent="-228600" fontAlgn="base">
+              <a:spcBef>
+                <a:spcPct val="0"/>
+              </a:spcBef>
+              <a:spcAft>
+                <a:spcPct val="0"/>
+              </a:spcAft>
+              <a:defRPr kumimoji="1" sz="2400">
+                <a:solidFill>
+                  <a:schemeClr val="tx1"/>
+                </a:solidFill>
+                <a:latin typeface="Arial" charset="0"/>
+                <a:ea typeface="ＭＳ Ｐゴシック" charset="0"/>
+              </a:defRPr>
+            </a:lvl7pPr>
+            <a:lvl8pPr marL="3429000" indent="-228600" fontAlgn="base">
+              <a:spcBef>
+                <a:spcPct val="0"/>
+              </a:spcBef>
+              <a:spcAft>
+                <a:spcPct val="0"/>
+              </a:spcAft>
+              <a:defRPr kumimoji="1" sz="2400">
+                <a:solidFill>
+                  <a:schemeClr val="tx1"/>
+                </a:solidFill>
+                <a:latin typeface="Arial" charset="0"/>
+                <a:ea typeface="ＭＳ Ｐゴシック" charset="0"/>
+              </a:defRPr>
+            </a:lvl8pPr>
+            <a:lvl9pPr marL="3886200" indent="-228600" fontAlgn="base">
+              <a:spcBef>
+                <a:spcPct val="0"/>
+              </a:spcBef>
+              <a:spcAft>
+                <a:spcPct val="0"/>
+              </a:spcAft>
+              <a:defRPr kumimoji="1" sz="2400">
+                <a:solidFill>
+                  <a:schemeClr val="tx1"/>
+                </a:solidFill>
+                <a:latin typeface="Arial" charset="0"/>
+                <a:ea typeface="ＭＳ Ｐゴシック" charset="0"/>
+              </a:defRPr>
+            </a:lvl9pPr>
+          </a:lstStyle>
+          <a:p>
+            <a:pPr>
+              <a:defRPr/>
+            </a:pPr>
+            <a:r>
+              <a:rPr lang="en-US" altLang="ja-JP" sz="800" b="1" dirty="0">
+                <a:solidFill>
+                  <a:schemeClr val="bg1"/>
+                </a:solidFill>
+                <a:latin typeface="メイリオ"/>
+                <a:ea typeface="メイリオ"/>
+                <a:cs typeface="メイリオ"/>
+              </a:rPr>
+              <a:t>Copyright(c) DYM Co., Ltd</a:t>
+            </a:r>
+            <a:r>
+              <a:rPr lang="ja-JP" altLang="en-US" sz="800" b="1" dirty="0" err="1">
+                <a:solidFill>
+                  <a:schemeClr val="bg1"/>
+                </a:solidFill>
+                <a:latin typeface="メイリオ"/>
+                <a:ea typeface="メイリオ"/>
+                <a:cs typeface="メイリオ"/>
+              </a:rPr>
+              <a:t>．</a:t>
+            </a:r>
+            <a:r>
+              <a:rPr lang="en-US" altLang="ja-JP" sz="800" b="1" dirty="0">
+                <a:solidFill>
+                  <a:schemeClr val="bg1"/>
+                </a:solidFill>
+                <a:latin typeface="メイリオ"/>
+                <a:ea typeface="メイリオ"/>
+                <a:cs typeface="メイリオ"/>
+              </a:rPr>
+              <a:t> All Rights Reserved.</a:t>
+            </a:r>
+          </a:p>
+        </p:txBody>
+      </p:sp>
+    </p:spTree>
+    <p:extLst>
+      <p:ext uri="{BB962C8B-B14F-4D97-AF65-F5344CB8AC3E}">
+        <p14:creationId xmlns:p14="http://schemas.microsoft.com/office/powerpoint/2010/main" val="345870335"/>
       </p:ext>
     </p:extLst>
   </p:cSld>
   <p:clrMap bg1="lt1" tx1="dk1" bg2="lt2" tx2="dk2" accent1="accent1" accent2="accent2" accent3="accent3" accent4="accent4" accent5="accent5" accent6="accent6" hlink="hlink" folHlink="folHlink"/>
   <p:sldLayoutIdLst>
-    <p:sldLayoutId id="2147483649" r:id="rId1"/>
-    <p:sldLayoutId id="2147483650" r:id="rId2"/>
-    <p:sldLayoutId id="2147483651" r:id="rId3"/>
-    <p:sldLayoutId id="2147483652" r:id="rId4"/>
-    <p:sldLayoutId id="2147483653" r:id="rId5"/>
-    <p:sldLayoutId id="2147483654" r:id="rId6"/>
-    <p:sldLayoutId id="2147483655" r:id="rId7"/>
-    <p:sldLayoutId id="2147483656" r:id="rId8"/>
-    <p:sldLayoutId id="2147483657" r:id="rId9"/>
-    <p:sldLayoutId id="2147483658" r:id="rId10"/>
-    <p:sldLayoutId id="2147483659" r:id="rId11"/>
+    <p:sldLayoutId id="2147483676" r:id="rId1"/>
+    <p:sldLayoutId id="2147483683" r:id="rId2"/>
+    <p:sldLayoutId id="2147483689" r:id="rId3"/>
   </p:sldLayoutIdLst>
+  <p:hf hdr="0" dt="0"/>
   <p:txStyles>
     <p:titleStyle>
-      <a:lvl1pPr algn="ctr" defTabSz="457200" rtl="0" eaLnBrk="1" latinLnBrk="0" hangingPunct="1">
+      <a:lvl1pPr algn="ctr" rtl="0" eaLnBrk="1" fontAlgn="base" hangingPunct="1">
         <a:spcBef>
           <a:spcPct val="0"/>
         </a:spcBef>
-        <a:buNone/>
-        <a:defRPr sz="4400" kern="1200">
+        <a:spcAft>
+          <a:spcPct val="0"/>
+        </a:spcAft>
+        <a:defRPr kumimoji="1" sz="4400" kern="1200">
           <a:solidFill>
             <a:schemeClr val="tx1"/>
           </a:solidFill>
@@ -2851,15 +2090,138 @@
           <a:cs typeface="+mj-cs"/>
         </a:defRPr>
       </a:lvl1pPr>
+      <a:lvl2pPr algn="ctr" rtl="0" eaLnBrk="1" fontAlgn="base" hangingPunct="1">
+        <a:spcBef>
+          <a:spcPct val="0"/>
+        </a:spcBef>
+        <a:spcAft>
+          <a:spcPct val="0"/>
+        </a:spcAft>
+        <a:defRPr kumimoji="1" sz="4400">
+          <a:solidFill>
+            <a:schemeClr val="tx1"/>
+          </a:solidFill>
+          <a:latin typeface="Calibri" pitchFamily="34" charset="0"/>
+          <a:ea typeface="ＭＳ Ｐゴシック" pitchFamily="50" charset="-128"/>
+        </a:defRPr>
+      </a:lvl2pPr>
+      <a:lvl3pPr algn="ctr" rtl="0" eaLnBrk="1" fontAlgn="base" hangingPunct="1">
+        <a:spcBef>
+          <a:spcPct val="0"/>
+        </a:spcBef>
+        <a:spcAft>
+          <a:spcPct val="0"/>
+        </a:spcAft>
+        <a:defRPr kumimoji="1" sz="4400">
+          <a:solidFill>
+            <a:schemeClr val="tx1"/>
+          </a:solidFill>
+          <a:latin typeface="Calibri" pitchFamily="34" charset="0"/>
+          <a:ea typeface="ＭＳ Ｐゴシック" pitchFamily="50" charset="-128"/>
+        </a:defRPr>
+      </a:lvl3pPr>
+      <a:lvl4pPr algn="ctr" rtl="0" eaLnBrk="1" fontAlgn="base" hangingPunct="1">
+        <a:spcBef>
+          <a:spcPct val="0"/>
+        </a:spcBef>
+        <a:spcAft>
+          <a:spcPct val="0"/>
+        </a:spcAft>
+        <a:defRPr kumimoji="1" sz="4400">
+          <a:solidFill>
+            <a:schemeClr val="tx1"/>
+          </a:solidFill>
+          <a:latin typeface="Calibri" pitchFamily="34" charset="0"/>
+          <a:ea typeface="ＭＳ Ｐゴシック" pitchFamily="50" charset="-128"/>
+        </a:defRPr>
+      </a:lvl4pPr>
+      <a:lvl5pPr algn="ctr" rtl="0" eaLnBrk="1" fontAlgn="base" hangingPunct="1">
+        <a:spcBef>
+          <a:spcPct val="0"/>
+        </a:spcBef>
+        <a:spcAft>
+          <a:spcPct val="0"/>
+        </a:spcAft>
+        <a:defRPr kumimoji="1" sz="4400">
+          <a:solidFill>
+            <a:schemeClr val="tx1"/>
+          </a:solidFill>
+          <a:latin typeface="Calibri" pitchFamily="34" charset="0"/>
+          <a:ea typeface="ＭＳ Ｐゴシック" pitchFamily="50" charset="-128"/>
+        </a:defRPr>
+      </a:lvl5pPr>
+      <a:lvl6pPr marL="457200" algn="ctr" rtl="0" eaLnBrk="1" fontAlgn="base" hangingPunct="1">
+        <a:spcBef>
+          <a:spcPct val="0"/>
+        </a:spcBef>
+        <a:spcAft>
+          <a:spcPct val="0"/>
+        </a:spcAft>
+        <a:defRPr kumimoji="1" sz="4400">
+          <a:solidFill>
+            <a:schemeClr val="tx1"/>
+          </a:solidFill>
+          <a:latin typeface="Calibri" pitchFamily="34" charset="0"/>
+          <a:ea typeface="ＭＳ Ｐゴシック" pitchFamily="50" charset="-128"/>
+        </a:defRPr>
+      </a:lvl6pPr>
+      <a:lvl7pPr marL="914400" algn="ctr" rtl="0" eaLnBrk="1" fontAlgn="base" hangingPunct="1">
+        <a:spcBef>
+          <a:spcPct val="0"/>
+        </a:spcBef>
+        <a:spcAft>
+          <a:spcPct val="0"/>
+        </a:spcAft>
+        <a:defRPr kumimoji="1" sz="4400">
+          <a:solidFill>
+            <a:schemeClr val="tx1"/>
+          </a:solidFill>
+          <a:latin typeface="Calibri" pitchFamily="34" charset="0"/>
+          <a:ea typeface="ＭＳ Ｐゴシック" pitchFamily="50" charset="-128"/>
+        </a:defRPr>
+      </a:lvl7pPr>
+      <a:lvl8pPr marL="1371600" algn="ctr" rtl="0" eaLnBrk="1" fontAlgn="base" hangingPunct="1">
+        <a:spcBef>
+          <a:spcPct val="0"/>
+        </a:spcBef>
+        <a:spcAft>
+          <a:spcPct val="0"/>
+        </a:spcAft>
+        <a:defRPr kumimoji="1" sz="4400">
+          <a:solidFill>
+            <a:schemeClr val="tx1"/>
+          </a:solidFill>
+          <a:latin typeface="Calibri" pitchFamily="34" charset="0"/>
+          <a:ea typeface="ＭＳ Ｐゴシック" pitchFamily="50" charset="-128"/>
+        </a:defRPr>
+      </a:lvl8pPr>
+      <a:lvl9pPr marL="1828800" algn="ctr" rtl="0" eaLnBrk="1" fontAlgn="base" hangingPunct="1">
+        <a:spcBef>
+          <a:spcPct val="0"/>
+        </a:spcBef>
+        <a:spcAft>
+          <a:spcPct val="0"/>
+        </a:spcAft>
+        <a:defRPr kumimoji="1" sz="4400">
+          <a:solidFill>
+            <a:schemeClr val="tx1"/>
+          </a:solidFill>
+          <a:latin typeface="Calibri" pitchFamily="34" charset="0"/>
+          <a:ea typeface="ＭＳ Ｐゴシック" pitchFamily="50" charset="-128"/>
+        </a:defRPr>
+      </a:lvl9pPr>
     </p:titleStyle>
     <p:bodyStyle>
-      <a:lvl1pPr marL="342900" indent="-342900" algn="l" defTabSz="457200" rtl="0" eaLnBrk="1" latinLnBrk="0" hangingPunct="1">
+      <a:lvl1pPr marL="342900" indent="-342900" algn="l" rtl="0" eaLnBrk="1" fontAlgn="base" hangingPunct="1">
         <a:spcBef>
           <a:spcPct val="20000"/>
         </a:spcBef>
-        <a:buFont typeface="Arial"/>
+        <a:spcAft>
+          <a:spcPct val="0"/>
+        </a:spcAft>
+        <a:buFont typeface="Arial" charset="0"/>
         <a:buChar char="•"/>
-        <a:defRPr sz="3200" kern="1200">
+        <a:defRPr kumimoji="1" sz="3200" kern="1200">
           <a:solidFill>
             <a:schemeClr val="tx1"/>
           </a:solidFill>
@@ -2868,13 +2230,16 @@
           <a:cs typeface="+mn-cs"/>
         </a:defRPr>
       </a:lvl1pPr>
-      <a:lvl2pPr marL="742950" indent="-285750" algn="l" defTabSz="457200" rtl="0" eaLnBrk="1" latinLnBrk="0" hangingPunct="1">
+      <a:lvl2pPr marL="742950" indent="-285750" algn="l" rtl="0" eaLnBrk="1" fontAlgn="base" hangingPunct="1">
         <a:spcBef>
           <a:spcPct val="20000"/>
         </a:spcBef>
-        <a:buFont typeface="Arial"/>
+        <a:spcAft>
+          <a:spcPct val="0"/>
+        </a:spcAft>
+        <a:buFont typeface="Arial" charset="0"/>
         <a:buChar char="–"/>
-        <a:defRPr sz="2800" kern="1200">
+        <a:defRPr kumimoji="1" sz="2800" kern="1200">
           <a:solidFill>
             <a:schemeClr val="tx1"/>
           </a:solidFill>
@@ -2883,13 +2248,16 @@
           <a:cs typeface="+mn-cs"/>
         </a:defRPr>
       </a:lvl2pPr>
-      <a:lvl3pPr marL="1143000" indent="-228600" algn="l" defTabSz="457200" rtl="0" eaLnBrk="1" latinLnBrk="0" hangingPunct="1">
+      <a:lvl3pPr marL="1143000" indent="-228600" algn="l" rtl="0" eaLnBrk="1" fontAlgn="base" hangingPunct="1">
         <a:spcBef>
           <a:spcPct val="20000"/>
         </a:spcBef>
-        <a:buFont typeface="Arial"/>
+        <a:spcAft>
+          <a:spcPct val="0"/>
+        </a:spcAft>
+        <a:buFont typeface="Arial" charset="0"/>
         <a:buChar char="•"/>
-        <a:defRPr sz="2400" kern="1200">
+        <a:defRPr kumimoji="1" sz="2400" kern="1200">
           <a:solidFill>
             <a:schemeClr val="tx1"/>
           </a:solidFill>
@@ -2898,13 +2266,16 @@
           <a:cs typeface="+mn-cs"/>
         </a:defRPr>
       </a:lvl3pPr>
-      <a:lvl4pPr marL="1600200" indent="-228600" algn="l" defTabSz="457200" rtl="0" eaLnBrk="1" latinLnBrk="0" hangingPunct="1">
+      <a:lvl4pPr marL="1600200" indent="-228600" algn="l" rtl="0" eaLnBrk="1" fontAlgn="base" hangingPunct="1">
         <a:spcBef>
           <a:spcPct val="20000"/>
         </a:spcBef>
-        <a:buFont typeface="Arial"/>
+        <a:spcAft>
+          <a:spcPct val="0"/>
+        </a:spcAft>
+        <a:buFont typeface="Arial" charset="0"/>
         <a:buChar char="–"/>
-        <a:defRPr sz="2000" kern="1200">
+        <a:defRPr kumimoji="1" sz="2000" kern="1200">
           <a:solidFill>
             <a:schemeClr val="tx1"/>
           </a:solidFill>
@@ -2913,13 +2284,959 @@
           <a:cs typeface="+mn-cs"/>
         </a:defRPr>
       </a:lvl4pPr>
-      <a:lvl5pPr marL="2057400" indent="-228600" algn="l" defTabSz="457200" rtl="0" eaLnBrk="1" latinLnBrk="0" hangingPunct="1">
+      <a:lvl5pPr marL="2057400" indent="-228600" algn="l" rtl="0" eaLnBrk="1" fontAlgn="base" hangingPunct="1">
         <a:spcBef>
           <a:spcPct val="20000"/>
         </a:spcBef>
-        <a:buFont typeface="Arial"/>
+        <a:spcAft>
+          <a:spcPct val="0"/>
+        </a:spcAft>
+        <a:buFont typeface="Arial" charset="0"/>
         <a:buChar char="»"/>
-        <a:defRPr sz="2000" kern="1200">
+        <a:defRPr kumimoji="1" sz="2000" kern="1200">
+          <a:solidFill>
+            <a:schemeClr val="tx1"/>
+          </a:solidFill>
+          <a:latin typeface="+mn-lt"/>
+          <a:ea typeface="+mn-ea"/>
+          <a:cs typeface="+mn-cs"/>
+        </a:defRPr>
+      </a:lvl5pPr>
+      <a:lvl6pPr marL="2514600" indent="-228600" algn="l" defTabSz="914400" rtl="0" eaLnBrk="1" latinLnBrk="0" hangingPunct="1">
+        <a:spcBef>
+          <a:spcPct val="20000"/>
+        </a:spcBef>
+        <a:buFont typeface="Arial" pitchFamily="34" charset="0"/>
+        <a:buChar char="•"/>
+        <a:defRPr kumimoji="1" sz="2000" kern="1200">
+          <a:solidFill>
+            <a:schemeClr val="tx1"/>
+          </a:solidFill>
+          <a:latin typeface="+mn-lt"/>
+          <a:ea typeface="+mn-ea"/>
+          <a:cs typeface="+mn-cs"/>
+        </a:defRPr>
+      </a:lvl6pPr>
+      <a:lvl7pPr marL="2971800" indent="-228600" algn="l" defTabSz="914400" rtl="0" eaLnBrk="1" latinLnBrk="0" hangingPunct="1">
+        <a:spcBef>
+          <a:spcPct val="20000"/>
+        </a:spcBef>
+        <a:buFont typeface="Arial" pitchFamily="34" charset="0"/>
+        <a:buChar char="•"/>
+        <a:defRPr kumimoji="1" sz="2000" kern="1200">
+          <a:solidFill>
+            <a:schemeClr val="tx1"/>
+          </a:solidFill>
+          <a:latin typeface="+mn-lt"/>
+          <a:ea typeface="+mn-ea"/>
+          <a:cs typeface="+mn-cs"/>
+        </a:defRPr>
+      </a:lvl7pPr>
+      <a:lvl8pPr marL="3429000" indent="-228600" algn="l" defTabSz="914400" rtl="0" eaLnBrk="1" latinLnBrk="0" hangingPunct="1">
+        <a:spcBef>
+          <a:spcPct val="20000"/>
+        </a:spcBef>
+        <a:buFont typeface="Arial" pitchFamily="34" charset="0"/>
+        <a:buChar char="•"/>
+        <a:defRPr kumimoji="1" sz="2000" kern="1200">
+          <a:solidFill>
+            <a:schemeClr val="tx1"/>
+          </a:solidFill>
+          <a:latin typeface="+mn-lt"/>
+          <a:ea typeface="+mn-ea"/>
+          <a:cs typeface="+mn-cs"/>
+        </a:defRPr>
+      </a:lvl8pPr>
+      <a:lvl9pPr marL="3886200" indent="-228600" algn="l" defTabSz="914400" rtl="0" eaLnBrk="1" latinLnBrk="0" hangingPunct="1">
+        <a:spcBef>
+          <a:spcPct val="20000"/>
+        </a:spcBef>
+        <a:buFont typeface="Arial" pitchFamily="34" charset="0"/>
+        <a:buChar char="•"/>
+        <a:defRPr kumimoji="1" sz="2000" kern="1200">
+          <a:solidFill>
+            <a:schemeClr val="tx1"/>
+          </a:solidFill>
+          <a:latin typeface="+mn-lt"/>
+          <a:ea typeface="+mn-ea"/>
+          <a:cs typeface="+mn-cs"/>
+        </a:defRPr>
+      </a:lvl9pPr>
+    </p:bodyStyle>
+    <p:otherStyle>
+      <a:defPPr>
+        <a:defRPr lang="ja-JP"/>
+      </a:defPPr>
+      <a:lvl1pPr marL="0" algn="l" defTabSz="914400" rtl="0" eaLnBrk="1" latinLnBrk="0" hangingPunct="1">
+        <a:defRPr kumimoji="1" sz="1800" kern="1200">
+          <a:solidFill>
+            <a:schemeClr val="tx1"/>
+          </a:solidFill>
+          <a:latin typeface="+mn-lt"/>
+          <a:ea typeface="+mn-ea"/>
+          <a:cs typeface="+mn-cs"/>
+        </a:defRPr>
+      </a:lvl1pPr>
+      <a:lvl2pPr marL="457200" algn="l" defTabSz="914400" rtl="0" eaLnBrk="1" latinLnBrk="0" hangingPunct="1">
+        <a:defRPr kumimoji="1" sz="1800" kern="1200">
+          <a:solidFill>
+            <a:schemeClr val="tx1"/>
+          </a:solidFill>
+          <a:latin typeface="+mn-lt"/>
+          <a:ea typeface="+mn-ea"/>
+          <a:cs typeface="+mn-cs"/>
+        </a:defRPr>
+      </a:lvl2pPr>
+      <a:lvl3pPr marL="914400" algn="l" defTabSz="914400" rtl="0" eaLnBrk="1" latinLnBrk="0" hangingPunct="1">
+        <a:defRPr kumimoji="1" sz="1800" kern="1200">
+          <a:solidFill>
+            <a:schemeClr val="tx1"/>
+          </a:solidFill>
+          <a:latin typeface="+mn-lt"/>
+          <a:ea typeface="+mn-ea"/>
+          <a:cs typeface="+mn-cs"/>
+        </a:defRPr>
+      </a:lvl3pPr>
+      <a:lvl4pPr marL="1371600" algn="l" defTabSz="914400" rtl="0" eaLnBrk="1" latinLnBrk="0" hangingPunct="1">
+        <a:defRPr kumimoji="1" sz="1800" kern="1200">
+          <a:solidFill>
+            <a:schemeClr val="tx1"/>
+          </a:solidFill>
+          <a:latin typeface="+mn-lt"/>
+          <a:ea typeface="+mn-ea"/>
+          <a:cs typeface="+mn-cs"/>
+        </a:defRPr>
+      </a:lvl4pPr>
+      <a:lvl5pPr marL="1828800" algn="l" defTabSz="914400" rtl="0" eaLnBrk="1" latinLnBrk="0" hangingPunct="1">
+        <a:defRPr kumimoji="1" sz="1800" kern="1200">
+          <a:solidFill>
+            <a:schemeClr val="tx1"/>
+          </a:solidFill>
+          <a:latin typeface="+mn-lt"/>
+          <a:ea typeface="+mn-ea"/>
+          <a:cs typeface="+mn-cs"/>
+        </a:defRPr>
+      </a:lvl5pPr>
+      <a:lvl6pPr marL="2286000" algn="l" defTabSz="914400" rtl="0" eaLnBrk="1" latinLnBrk="0" hangingPunct="1">
+        <a:defRPr kumimoji="1" sz="1800" kern="1200">
+          <a:solidFill>
+            <a:schemeClr val="tx1"/>
+          </a:solidFill>
+          <a:latin typeface="+mn-lt"/>
+          <a:ea typeface="+mn-ea"/>
+          <a:cs typeface="+mn-cs"/>
+        </a:defRPr>
+      </a:lvl6pPr>
+      <a:lvl7pPr marL="2743200" algn="l" defTabSz="914400" rtl="0" eaLnBrk="1" latinLnBrk="0" hangingPunct="1">
+        <a:defRPr kumimoji="1" sz="1800" kern="1200">
+          <a:solidFill>
+            <a:schemeClr val="tx1"/>
+          </a:solidFill>
+          <a:latin typeface="+mn-lt"/>
+          <a:ea typeface="+mn-ea"/>
+          <a:cs typeface="+mn-cs"/>
+        </a:defRPr>
+      </a:lvl7pPr>
+      <a:lvl8pPr marL="3200400" algn="l" defTabSz="914400" rtl="0" eaLnBrk="1" latinLnBrk="0" hangingPunct="1">
+        <a:defRPr kumimoji="1" sz="1800" kern="1200">
+          <a:solidFill>
+            <a:schemeClr val="tx1"/>
+          </a:solidFill>
+          <a:latin typeface="+mn-lt"/>
+          <a:ea typeface="+mn-ea"/>
+          <a:cs typeface="+mn-cs"/>
+        </a:defRPr>
+      </a:lvl8pPr>
+      <a:lvl9pPr marL="3657600" algn="l" defTabSz="914400" rtl="0" eaLnBrk="1" latinLnBrk="0" hangingPunct="1">
+        <a:defRPr kumimoji="1" sz="1800" kern="1200">
+          <a:solidFill>
+            <a:schemeClr val="tx1"/>
+          </a:solidFill>
+          <a:latin typeface="+mn-lt"/>
+          <a:ea typeface="+mn-ea"/>
+          <a:cs typeface="+mn-cs"/>
+        </a:defRPr>
+      </a:lvl9pPr>
+    </p:otherStyle>
+  </p:txStyles>
+</p:sldMaster>
+</file>
+
+<file path=ppt/slideMasters/slideMaster2.xml><?xml version="1.0" encoding="utf-8"?>
+<p:sldMaster xmlns:a="http://schemas.openxmlformats.org/drawingml/2006/main" xmlns:r="http://schemas.openxmlformats.org/officeDocument/2006/relationships" xmlns:p="http://schemas.openxmlformats.org/presentationml/2006/main" preserve="1">
+  <p:cSld>
+    <p:bg>
+      <p:bgRef idx="1001">
+        <a:schemeClr val="bg1"/>
+      </p:bgRef>
+    </p:bg>
+    <p:spTree>
+      <p:nvGrpSpPr>
+        <p:cNvPr id="1" name=""/>
+        <p:cNvGrpSpPr/>
+        <p:nvPr/>
+      </p:nvGrpSpPr>
+      <p:grpSpPr>
+        <a:xfrm>
+          <a:off x="0" y="0"/>
+          <a:ext cx="0" cy="0"/>
+          <a:chOff x="0" y="0"/>
+          <a:chExt cx="0" cy="0"/>
+        </a:xfrm>
+      </p:grpSpPr>
+      <p:sp>
+        <p:nvSpPr>
+          <p:cNvPr id="5" name="正方形/長方形 4"/>
+          <p:cNvSpPr/>
+          <p:nvPr/>
+        </p:nvSpPr>
+        <p:spPr>
+          <a:xfrm>
+            <a:off x="0" y="6552728"/>
+            <a:ext cx="9906000" cy="332656"/>
+          </a:xfrm>
+          <a:prstGeom prst="rect">
+            <a:avLst/>
+          </a:prstGeom>
+          <a:solidFill>
+            <a:srgbClr val="191F54"/>
+          </a:solidFill>
+          <a:ln>
+            <a:noFill/>
+          </a:ln>
+          <a:effectLst/>
+        </p:spPr>
+        <p:style>
+          <a:lnRef idx="1">
+            <a:schemeClr val="accent1"/>
+          </a:lnRef>
+          <a:fillRef idx="3">
+            <a:schemeClr val="accent1"/>
+          </a:fillRef>
+          <a:effectRef idx="2">
+            <a:schemeClr val="accent1"/>
+          </a:effectRef>
+          <a:fontRef idx="minor">
+            <a:schemeClr val="lt1"/>
+          </a:fontRef>
+        </p:style>
+        <p:txBody>
+          <a:bodyPr rtlCol="0" anchor="ctr"/>
+          <a:lstStyle/>
+          <a:p>
+            <a:pPr algn="ctr"/>
+            <a:endParaRPr lang="ja-JP" altLang="en-US">
+              <a:solidFill>
+                <a:prstClr val="white"/>
+              </a:solidFill>
+            </a:endParaRPr>
+          </a:p>
+        </p:txBody>
+      </p:sp>
+      <p:sp>
+        <p:nvSpPr>
+          <p:cNvPr id="10" name="テキスト ボックス 9"/>
+          <p:cNvSpPr txBox="1">
+            <a:spLocks noChangeArrowheads="1"/>
+          </p:cNvSpPr>
+          <p:nvPr/>
+        </p:nvSpPr>
+        <p:spPr bwMode="auto">
+          <a:xfrm>
+            <a:off x="116569" y="6597932"/>
+            <a:ext cx="3666301" cy="215444"/>
+          </a:xfrm>
+          <a:prstGeom prst="rect">
+            <a:avLst/>
+          </a:prstGeom>
+          <a:noFill/>
+          <a:ln>
+            <a:noFill/>
+          </a:ln>
+          <a:extLst>
+            <a:ext uri="{909E8E84-426E-40DD-AFC4-6F175D3DCCD1}">
+              <a14:hiddenFill xmlns:a14="http://schemas.microsoft.com/office/drawing/2010/main">
+                <a:solidFill>
+                  <a:srgbClr val="FFFFFF"/>
+                </a:solidFill>
+              </a14:hiddenFill>
+            </a:ext>
+            <a:ext uri="{91240B29-F687-4F45-9708-019B960494DF}">
+              <a14:hiddenLine xmlns:a14="http://schemas.microsoft.com/office/drawing/2010/main" w="9525">
+                <a:solidFill>
+                  <a:srgbClr val="000000"/>
+                </a:solidFill>
+                <a:miter lim="800000"/>
+                <a:headEnd/>
+                <a:tailEnd/>
+              </a14:hiddenLine>
+            </a:ext>
+          </a:extLst>
+        </p:spPr>
+        <p:txBody>
+          <a:bodyPr wrap="square">
+            <a:spAutoFit/>
+          </a:bodyPr>
+          <a:lstStyle>
+            <a:lvl1pPr>
+              <a:defRPr kumimoji="1" sz="2400">
+                <a:solidFill>
+                  <a:schemeClr val="tx1"/>
+                </a:solidFill>
+                <a:latin typeface="Arial" charset="0"/>
+                <a:ea typeface="ＭＳ Ｐゴシック" charset="0"/>
+                <a:cs typeface="ＭＳ Ｐゴシック" charset="0"/>
+              </a:defRPr>
+            </a:lvl1pPr>
+            <a:lvl2pPr marL="742950" indent="-285750">
+              <a:defRPr kumimoji="1" sz="2400">
+                <a:solidFill>
+                  <a:schemeClr val="tx1"/>
+                </a:solidFill>
+                <a:latin typeface="Arial" charset="0"/>
+                <a:ea typeface="ＭＳ Ｐゴシック" charset="0"/>
+              </a:defRPr>
+            </a:lvl2pPr>
+            <a:lvl3pPr marL="1143000" indent="-228600">
+              <a:defRPr kumimoji="1" sz="2400">
+                <a:solidFill>
+                  <a:schemeClr val="tx1"/>
+                </a:solidFill>
+                <a:latin typeface="Arial" charset="0"/>
+                <a:ea typeface="ＭＳ Ｐゴシック" charset="0"/>
+              </a:defRPr>
+            </a:lvl3pPr>
+            <a:lvl4pPr marL="1600200" indent="-228600">
+              <a:defRPr kumimoji="1" sz="2400">
+                <a:solidFill>
+                  <a:schemeClr val="tx1"/>
+                </a:solidFill>
+                <a:latin typeface="Arial" charset="0"/>
+                <a:ea typeface="ＭＳ Ｐゴシック" charset="0"/>
+              </a:defRPr>
+            </a:lvl4pPr>
+            <a:lvl5pPr marL="2057400" indent="-228600">
+              <a:defRPr kumimoji="1" sz="2400">
+                <a:solidFill>
+                  <a:schemeClr val="tx1"/>
+                </a:solidFill>
+                <a:latin typeface="Arial" charset="0"/>
+                <a:ea typeface="ＭＳ Ｐゴシック" charset="0"/>
+              </a:defRPr>
+            </a:lvl5pPr>
+            <a:lvl6pPr marL="2514600" indent="-228600" fontAlgn="base">
+              <a:spcBef>
+                <a:spcPct val="0"/>
+              </a:spcBef>
+              <a:spcAft>
+                <a:spcPct val="0"/>
+              </a:spcAft>
+              <a:defRPr kumimoji="1" sz="2400">
+                <a:solidFill>
+                  <a:schemeClr val="tx1"/>
+                </a:solidFill>
+                <a:latin typeface="Arial" charset="0"/>
+                <a:ea typeface="ＭＳ Ｐゴシック" charset="0"/>
+              </a:defRPr>
+            </a:lvl6pPr>
+            <a:lvl7pPr marL="2971800" indent="-228600" fontAlgn="base">
+              <a:spcBef>
+                <a:spcPct val="0"/>
+              </a:spcBef>
+              <a:spcAft>
+                <a:spcPct val="0"/>
+              </a:spcAft>
+              <a:defRPr kumimoji="1" sz="2400">
+                <a:solidFill>
+                  <a:schemeClr val="tx1"/>
+                </a:solidFill>
+                <a:latin typeface="Arial" charset="0"/>
+                <a:ea typeface="ＭＳ Ｐゴシック" charset="0"/>
+              </a:defRPr>
+            </a:lvl7pPr>
+            <a:lvl8pPr marL="3429000" indent="-228600" fontAlgn="base">
+              <a:spcBef>
+                <a:spcPct val="0"/>
+              </a:spcBef>
+              <a:spcAft>
+                <a:spcPct val="0"/>
+              </a:spcAft>
+              <a:defRPr kumimoji="1" sz="2400">
+                <a:solidFill>
+                  <a:schemeClr val="tx1"/>
+                </a:solidFill>
+                <a:latin typeface="Arial" charset="0"/>
+                <a:ea typeface="ＭＳ Ｐゴシック" charset="0"/>
+              </a:defRPr>
+            </a:lvl8pPr>
+            <a:lvl9pPr marL="3886200" indent="-228600" fontAlgn="base">
+              <a:spcBef>
+                <a:spcPct val="0"/>
+              </a:spcBef>
+              <a:spcAft>
+                <a:spcPct val="0"/>
+              </a:spcAft>
+              <a:defRPr kumimoji="1" sz="2400">
+                <a:solidFill>
+                  <a:schemeClr val="tx1"/>
+                </a:solidFill>
+                <a:latin typeface="Arial" charset="0"/>
+                <a:ea typeface="ＭＳ Ｐゴシック" charset="0"/>
+              </a:defRPr>
+            </a:lvl9pPr>
+          </a:lstStyle>
+          <a:p>
+            <a:pPr>
+              <a:defRPr/>
+            </a:pPr>
+            <a:r>
+              <a:rPr lang="en-US" altLang="ja-JP" sz="800" b="1" dirty="0">
+                <a:solidFill>
+                  <a:prstClr val="white"/>
+                </a:solidFill>
+                <a:latin typeface="メイリオ"/>
+                <a:ea typeface="メイリオ"/>
+                <a:cs typeface="メイリオ"/>
+              </a:rPr>
+              <a:t>Copyright(c) DYM Co., </a:t>
+            </a:r>
+            <a:r>
+              <a:rPr lang="en-US" altLang="ja-JP" sz="800" b="1" dirty="0" err="1">
+                <a:solidFill>
+                  <a:prstClr val="white"/>
+                </a:solidFill>
+                <a:latin typeface="メイリオ"/>
+                <a:ea typeface="メイリオ"/>
+                <a:cs typeface="メイリオ"/>
+              </a:rPr>
+              <a:t>Ltd.All</a:t>
+            </a:r>
+            <a:r>
+              <a:rPr lang="en-US" altLang="ja-JP" sz="800" b="1" dirty="0">
+                <a:solidFill>
+                  <a:prstClr val="white"/>
+                </a:solidFill>
+                <a:latin typeface="メイリオ"/>
+                <a:ea typeface="メイリオ"/>
+                <a:cs typeface="メイリオ"/>
+              </a:rPr>
+              <a:t> Rights Reserved.</a:t>
+            </a:r>
+          </a:p>
+        </p:txBody>
+      </p:sp>
+      <p:sp>
+        <p:nvSpPr>
+          <p:cNvPr id="8" name="正方形/長方形 7"/>
+          <p:cNvSpPr/>
+          <p:nvPr/>
+        </p:nvSpPr>
+        <p:spPr>
+          <a:xfrm>
+            <a:off x="0" y="0"/>
+            <a:ext cx="416496" cy="548680"/>
+          </a:xfrm>
+          <a:prstGeom prst="rect">
+            <a:avLst/>
+          </a:prstGeom>
+          <a:solidFill>
+            <a:srgbClr val="191F54"/>
+          </a:solidFill>
+          <a:ln>
+            <a:noFill/>
+          </a:ln>
+          <a:effectLst/>
+        </p:spPr>
+        <p:style>
+          <a:lnRef idx="1">
+            <a:schemeClr val="accent1"/>
+          </a:lnRef>
+          <a:fillRef idx="3">
+            <a:schemeClr val="accent1"/>
+          </a:fillRef>
+          <a:effectRef idx="2">
+            <a:schemeClr val="accent1"/>
+          </a:effectRef>
+          <a:fontRef idx="minor">
+            <a:schemeClr val="lt1"/>
+          </a:fontRef>
+        </p:style>
+        <p:txBody>
+          <a:bodyPr rtlCol="0" anchor="ctr"/>
+          <a:lstStyle/>
+          <a:p>
+            <a:pPr algn="ctr"/>
+            <a:endParaRPr lang="ja-JP" altLang="en-US">
+              <a:solidFill>
+                <a:prstClr val="white"/>
+              </a:solidFill>
+            </a:endParaRPr>
+          </a:p>
+        </p:txBody>
+      </p:sp>
+      <p:cxnSp>
+        <p:nvCxnSpPr>
+          <p:cNvPr id="4" name="直線コネクタ 3"/>
+          <p:cNvCxnSpPr/>
+          <p:nvPr/>
+        </p:nvCxnSpPr>
+        <p:spPr>
+          <a:xfrm>
+            <a:off x="0" y="548680"/>
+            <a:ext cx="9906000" cy="0"/>
+          </a:xfrm>
+          <a:prstGeom prst="line">
+            <a:avLst/>
+          </a:prstGeom>
+          <a:ln>
+            <a:solidFill>
+              <a:srgbClr val="00324B"/>
+            </a:solidFill>
+          </a:ln>
+          <a:effectLst/>
+        </p:spPr>
+        <p:style>
+          <a:lnRef idx="2">
+            <a:schemeClr val="accent1"/>
+          </a:lnRef>
+          <a:fillRef idx="0">
+            <a:schemeClr val="accent1"/>
+          </a:fillRef>
+          <a:effectRef idx="1">
+            <a:schemeClr val="accent1"/>
+          </a:effectRef>
+          <a:fontRef idx="minor">
+            <a:schemeClr val="tx1"/>
+          </a:fontRef>
+        </p:style>
+      </p:cxnSp>
+      <p:pic>
+        <p:nvPicPr>
+          <p:cNvPr id="9" name="図 1"/>
+          <p:cNvPicPr>
+            <a:picLocks/>
+          </p:cNvPicPr>
+          <p:nvPr userDrawn="1"/>
+        </p:nvPicPr>
+        <p:blipFill rotWithShape="1">
+          <a:blip r:embed="rId2" cstate="hqprint">
+            <a:extLst>
+              <a:ext uri="{28A0092B-C50C-407E-A947-70E740481C1C}">
+                <a14:useLocalDpi xmlns:a14="http://schemas.microsoft.com/office/drawing/2010/main" val="0"/>
+              </a:ext>
+            </a:extLst>
+          </a:blip>
+          <a:srcRect l="-1647" r="-11171"/>
+          <a:stretch/>
+        </p:blipFill>
+        <p:spPr bwMode="auto">
+          <a:xfrm>
+            <a:off x="8619408" y="161057"/>
+            <a:ext cx="1192729" cy="263314"/>
+          </a:xfrm>
+          <a:prstGeom prst="rect">
+            <a:avLst/>
+          </a:prstGeom>
+          <a:noFill/>
+          <a:ln>
+            <a:noFill/>
+          </a:ln>
+          <a:effectLst/>
+          <a:extLst>
+            <a:ext uri="{909E8E84-426E-40DD-AFC4-6F175D3DCCD1}">
+              <a14:hiddenFill xmlns:a14="http://schemas.microsoft.com/office/drawing/2010/main">
+                <a:solidFill>
+                  <a:srgbClr val="FFFFFF"/>
+                </a:solidFill>
+              </a14:hiddenFill>
+            </a:ext>
+            <a:ext uri="{91240B29-F687-4F45-9708-019B960494DF}">
+              <a14:hiddenLine xmlns:a14="http://schemas.microsoft.com/office/drawing/2010/main" w="9525">
+                <a:solidFill>
+                  <a:srgbClr val="000000"/>
+                </a:solidFill>
+                <a:miter lim="800000"/>
+                <a:headEnd/>
+                <a:tailEnd/>
+              </a14:hiddenLine>
+            </a:ext>
+          </a:extLst>
+        </p:spPr>
+      </p:pic>
+      <p:sp>
+        <p:nvSpPr>
+          <p:cNvPr id="11" name="スライド番号プレースホルダ 1"/>
+          <p:cNvSpPr txBox="1">
+            <a:spLocks/>
+          </p:cNvSpPr>
+          <p:nvPr userDrawn="1"/>
+        </p:nvSpPr>
+        <p:spPr>
+          <a:xfrm>
+            <a:off x="7545288" y="6571255"/>
+            <a:ext cx="2133600" cy="216000"/>
+          </a:xfrm>
+          <a:prstGeom prst="rect">
+            <a:avLst/>
+          </a:prstGeom>
+        </p:spPr>
+        <p:txBody>
+          <a:bodyPr tIns="25200"/>
+          <a:lstStyle>
+            <a:defPPr>
+              <a:defRPr lang="ja-JP"/>
+            </a:defPPr>
+            <a:lvl1pPr marL="0" algn="l" defTabSz="914400" rtl="0" eaLnBrk="1" latinLnBrk="0" hangingPunct="1">
+              <a:defRPr kumimoji="1" sz="1800" kern="1200">
+                <a:solidFill>
+                  <a:schemeClr val="tx1"/>
+                </a:solidFill>
+                <a:latin typeface="+mn-lt"/>
+                <a:ea typeface="+mn-ea"/>
+                <a:cs typeface="+mn-cs"/>
+              </a:defRPr>
+            </a:lvl1pPr>
+            <a:lvl2pPr marL="457200" algn="l" defTabSz="914400" rtl="0" eaLnBrk="1" latinLnBrk="0" hangingPunct="1">
+              <a:defRPr kumimoji="1" sz="1800" kern="1200">
+                <a:solidFill>
+                  <a:schemeClr val="tx1"/>
+                </a:solidFill>
+                <a:latin typeface="+mn-lt"/>
+                <a:ea typeface="+mn-ea"/>
+                <a:cs typeface="+mn-cs"/>
+              </a:defRPr>
+            </a:lvl2pPr>
+            <a:lvl3pPr marL="914400" algn="l" defTabSz="914400" rtl="0" eaLnBrk="1" latinLnBrk="0" hangingPunct="1">
+              <a:defRPr kumimoji="1" sz="1800" kern="1200">
+                <a:solidFill>
+                  <a:schemeClr val="tx1"/>
+                </a:solidFill>
+                <a:latin typeface="+mn-lt"/>
+                <a:ea typeface="+mn-ea"/>
+                <a:cs typeface="+mn-cs"/>
+              </a:defRPr>
+            </a:lvl3pPr>
+            <a:lvl4pPr marL="1371600" algn="l" defTabSz="914400" rtl="0" eaLnBrk="1" latinLnBrk="0" hangingPunct="1">
+              <a:defRPr kumimoji="1" sz="1800" kern="1200">
+                <a:solidFill>
+                  <a:schemeClr val="tx1"/>
+                </a:solidFill>
+                <a:latin typeface="+mn-lt"/>
+                <a:ea typeface="+mn-ea"/>
+                <a:cs typeface="+mn-cs"/>
+              </a:defRPr>
+            </a:lvl4pPr>
+            <a:lvl5pPr marL="1828800" algn="l" defTabSz="914400" rtl="0" eaLnBrk="1" latinLnBrk="0" hangingPunct="1">
+              <a:defRPr kumimoji="1" sz="1800" kern="1200">
+                <a:solidFill>
+                  <a:schemeClr val="tx1"/>
+                </a:solidFill>
+                <a:latin typeface="+mn-lt"/>
+                <a:ea typeface="+mn-ea"/>
+                <a:cs typeface="+mn-cs"/>
+              </a:defRPr>
+            </a:lvl5pPr>
+            <a:lvl6pPr marL="2286000" algn="l" defTabSz="914400" rtl="0" eaLnBrk="1" latinLnBrk="0" hangingPunct="1">
+              <a:defRPr kumimoji="1" sz="1800" kern="1200">
+                <a:solidFill>
+                  <a:schemeClr val="tx1"/>
+                </a:solidFill>
+                <a:latin typeface="+mn-lt"/>
+                <a:ea typeface="+mn-ea"/>
+                <a:cs typeface="+mn-cs"/>
+              </a:defRPr>
+            </a:lvl6pPr>
+            <a:lvl7pPr marL="2743200" algn="l" defTabSz="914400" rtl="0" eaLnBrk="1" latinLnBrk="0" hangingPunct="1">
+              <a:defRPr kumimoji="1" sz="1800" kern="1200">
+                <a:solidFill>
+                  <a:schemeClr val="tx1"/>
+                </a:solidFill>
+                <a:latin typeface="+mn-lt"/>
+                <a:ea typeface="+mn-ea"/>
+                <a:cs typeface="+mn-cs"/>
+              </a:defRPr>
+            </a:lvl7pPr>
+            <a:lvl8pPr marL="3200400" algn="l" defTabSz="914400" rtl="0" eaLnBrk="1" latinLnBrk="0" hangingPunct="1">
+              <a:defRPr kumimoji="1" sz="1800" kern="1200">
+                <a:solidFill>
+                  <a:schemeClr val="tx1"/>
+                </a:solidFill>
+                <a:latin typeface="+mn-lt"/>
+                <a:ea typeface="+mn-ea"/>
+                <a:cs typeface="+mn-cs"/>
+              </a:defRPr>
+            </a:lvl8pPr>
+            <a:lvl9pPr marL="3657600" algn="l" defTabSz="914400" rtl="0" eaLnBrk="1" latinLnBrk="0" hangingPunct="1">
+              <a:defRPr kumimoji="1" sz="1800" kern="1200">
+                <a:solidFill>
+                  <a:schemeClr val="tx1"/>
+                </a:solidFill>
+                <a:latin typeface="+mn-lt"/>
+                <a:ea typeface="+mn-ea"/>
+                <a:cs typeface="+mn-cs"/>
+              </a:defRPr>
+            </a:lvl9pPr>
+          </a:lstStyle>
+          <a:p>
+            <a:pPr algn="r"/>
+            <a:fld id="{9FC100E3-15F5-4145-A942-47DB1D8B776D}" type="slidenum">
+              <a:rPr lang="ja-JP" altLang="en-US" sz="1400" i="1" smtClean="0">
+                <a:solidFill>
+                  <a:prstClr val="white"/>
+                </a:solidFill>
+                <a:latin typeface="Century Gothic" panose="020B0502020202020204" pitchFamily="34" charset="0"/>
+              </a:rPr>
+              <a:pPr algn="r"/>
+              <a:t>‹#›</a:t>
+            </a:fld>
+            <a:endParaRPr lang="ja-JP" altLang="en-US" sz="1400" i="1" dirty="0">
+              <a:solidFill>
+                <a:prstClr val="white"/>
+              </a:solidFill>
+              <a:latin typeface="Century Gothic" panose="020B0502020202020204" pitchFamily="34" charset="0"/>
+            </a:endParaRPr>
+          </a:p>
+        </p:txBody>
+      </p:sp>
+    </p:spTree>
+    <p:extLst>
+      <p:ext uri="{BB962C8B-B14F-4D97-AF65-F5344CB8AC3E}">
+        <p14:creationId xmlns:p14="http://schemas.microsoft.com/office/powerpoint/2010/main" val="611138245"/>
+      </p:ext>
+    </p:extLst>
+  </p:cSld>
+  <p:clrMap bg1="lt1" tx1="dk1" bg2="lt2" tx2="dk2" accent1="accent1" accent2="accent2" accent3="accent3" accent4="accent4" accent5="accent5" accent6="accent6" hlink="hlink" folHlink="folHlink"/>
+  <p:hf hdr="0" dt="0"/>
+  <p:txStyles>
+    <p:titleStyle>
+      <a:lvl1pPr algn="ctr" defTabSz="457200" rtl="0" eaLnBrk="1" fontAlgn="base" hangingPunct="1">
+        <a:spcBef>
+          <a:spcPct val="0"/>
+        </a:spcBef>
+        <a:spcAft>
+          <a:spcPct val="0"/>
+        </a:spcAft>
+        <a:defRPr kumimoji="1" sz="4400" kern="1200">
+          <a:solidFill>
+            <a:schemeClr val="tx1"/>
+          </a:solidFill>
+          <a:latin typeface="+mj-lt"/>
+          <a:ea typeface="+mj-ea"/>
+          <a:cs typeface="ＭＳ Ｐゴシック" charset="0"/>
+        </a:defRPr>
+      </a:lvl1pPr>
+      <a:lvl2pPr algn="ctr" defTabSz="457200" rtl="0" eaLnBrk="1" fontAlgn="base" hangingPunct="1">
+        <a:spcBef>
+          <a:spcPct val="0"/>
+        </a:spcBef>
+        <a:spcAft>
+          <a:spcPct val="0"/>
+        </a:spcAft>
+        <a:defRPr kumimoji="1" sz="4400">
+          <a:solidFill>
+            <a:schemeClr val="tx1"/>
+          </a:solidFill>
+          <a:latin typeface="Calibri" charset="0"/>
+          <a:ea typeface="ＭＳ Ｐゴシック" charset="0"/>
+          <a:cs typeface="ＭＳ Ｐゴシック" charset="0"/>
+        </a:defRPr>
+      </a:lvl2pPr>
+      <a:lvl3pPr algn="ctr" defTabSz="457200" rtl="0" eaLnBrk="1" fontAlgn="base" hangingPunct="1">
+        <a:spcBef>
+          <a:spcPct val="0"/>
+        </a:spcBef>
+        <a:spcAft>
+          <a:spcPct val="0"/>
+        </a:spcAft>
+        <a:defRPr kumimoji="1" sz="4400">
+          <a:solidFill>
+            <a:schemeClr val="tx1"/>
+          </a:solidFill>
+          <a:latin typeface="Calibri" charset="0"/>
+          <a:ea typeface="ＭＳ Ｐゴシック" charset="0"/>
+          <a:cs typeface="ＭＳ Ｐゴシック" charset="0"/>
+        </a:defRPr>
+      </a:lvl3pPr>
+      <a:lvl4pPr algn="ctr" defTabSz="457200" rtl="0" eaLnBrk="1" fontAlgn="base" hangingPunct="1">
+        <a:spcBef>
+          <a:spcPct val="0"/>
+        </a:spcBef>
+        <a:spcAft>
+          <a:spcPct val="0"/>
+        </a:spcAft>
+        <a:defRPr kumimoji="1" sz="4400">
+          <a:solidFill>
+            <a:schemeClr val="tx1"/>
+          </a:solidFill>
+          <a:latin typeface="Calibri" charset="0"/>
+          <a:ea typeface="ＭＳ Ｐゴシック" charset="0"/>
+          <a:cs typeface="ＭＳ Ｐゴシック" charset="0"/>
+        </a:defRPr>
+      </a:lvl4pPr>
+      <a:lvl5pPr algn="ctr" defTabSz="457200" rtl="0" eaLnBrk="1" fontAlgn="base" hangingPunct="1">
+        <a:spcBef>
+          <a:spcPct val="0"/>
+        </a:spcBef>
+        <a:spcAft>
+          <a:spcPct val="0"/>
+        </a:spcAft>
+        <a:defRPr kumimoji="1" sz="4400">
+          <a:solidFill>
+            <a:schemeClr val="tx1"/>
+          </a:solidFill>
+          <a:latin typeface="Calibri" charset="0"/>
+          <a:ea typeface="ＭＳ Ｐゴシック" charset="0"/>
+          <a:cs typeface="ＭＳ Ｐゴシック" charset="0"/>
+        </a:defRPr>
+      </a:lvl5pPr>
+      <a:lvl6pPr marL="457200" algn="ctr" defTabSz="457200" rtl="0" eaLnBrk="1" fontAlgn="base" hangingPunct="1">
+        <a:spcBef>
+          <a:spcPct val="0"/>
+        </a:spcBef>
+        <a:spcAft>
+          <a:spcPct val="0"/>
+        </a:spcAft>
+        <a:defRPr kumimoji="1" sz="4400">
+          <a:solidFill>
+            <a:schemeClr val="tx1"/>
+          </a:solidFill>
+          <a:latin typeface="Calibri" charset="0"/>
+          <a:ea typeface="ＭＳ Ｐゴシック" charset="0"/>
+          <a:cs typeface="ＭＳ Ｐゴシック" charset="0"/>
+        </a:defRPr>
+      </a:lvl6pPr>
+      <a:lvl7pPr marL="914400" algn="ctr" defTabSz="457200" rtl="0" eaLnBrk="1" fontAlgn="base" hangingPunct="1">
+        <a:spcBef>
+          <a:spcPct val="0"/>
+        </a:spcBef>
+        <a:spcAft>
+          <a:spcPct val="0"/>
+        </a:spcAft>
+        <a:defRPr kumimoji="1" sz="4400">
+          <a:solidFill>
+            <a:schemeClr val="tx1"/>
+          </a:solidFill>
+          <a:latin typeface="Calibri" charset="0"/>
+          <a:ea typeface="ＭＳ Ｐゴシック" charset="0"/>
+          <a:cs typeface="ＭＳ Ｐゴシック" charset="0"/>
+        </a:defRPr>
+      </a:lvl7pPr>
+      <a:lvl8pPr marL="1371600" algn="ctr" defTabSz="457200" rtl="0" eaLnBrk="1" fontAlgn="base" hangingPunct="1">
+        <a:spcBef>
+          <a:spcPct val="0"/>
+        </a:spcBef>
+        <a:spcAft>
+          <a:spcPct val="0"/>
+        </a:spcAft>
+        <a:defRPr kumimoji="1" sz="4400">
+          <a:solidFill>
+            <a:schemeClr val="tx1"/>
+          </a:solidFill>
+          <a:latin typeface="Calibri" charset="0"/>
+          <a:ea typeface="ＭＳ Ｐゴシック" charset="0"/>
+          <a:cs typeface="ＭＳ Ｐゴシック" charset="0"/>
+        </a:defRPr>
+      </a:lvl8pPr>
+      <a:lvl9pPr marL="1828800" algn="ctr" defTabSz="457200" rtl="0" eaLnBrk="1" fontAlgn="base" hangingPunct="1">
+        <a:spcBef>
+          <a:spcPct val="0"/>
+        </a:spcBef>
+        <a:spcAft>
+          <a:spcPct val="0"/>
+        </a:spcAft>
+        <a:defRPr kumimoji="1" sz="4400">
+          <a:solidFill>
+            <a:schemeClr val="tx1"/>
+          </a:solidFill>
+          <a:latin typeface="Calibri" charset="0"/>
+          <a:ea typeface="ＭＳ Ｐゴシック" charset="0"/>
+          <a:cs typeface="ＭＳ Ｐゴシック" charset="0"/>
+        </a:defRPr>
+      </a:lvl9pPr>
+    </p:titleStyle>
+    <p:bodyStyle>
+      <a:lvl1pPr marL="342900" indent="-342900" algn="l" defTabSz="457200" rtl="0" eaLnBrk="1" fontAlgn="base" hangingPunct="1">
+        <a:spcBef>
+          <a:spcPct val="20000"/>
+        </a:spcBef>
+        <a:spcAft>
+          <a:spcPct val="0"/>
+        </a:spcAft>
+        <a:buFont typeface="Arial" charset="0"/>
+        <a:buChar char="•"/>
+        <a:defRPr kumimoji="1" sz="3200" kern="1200">
+          <a:solidFill>
+            <a:schemeClr val="tx1"/>
+          </a:solidFill>
+          <a:latin typeface="+mn-lt"/>
+          <a:ea typeface="+mn-ea"/>
+          <a:cs typeface="ＭＳ Ｐゴシック" charset="0"/>
+        </a:defRPr>
+      </a:lvl1pPr>
+      <a:lvl2pPr marL="742950" indent="-285750" algn="l" defTabSz="457200" rtl="0" eaLnBrk="1" fontAlgn="base" hangingPunct="1">
+        <a:spcBef>
+          <a:spcPct val="20000"/>
+        </a:spcBef>
+        <a:spcAft>
+          <a:spcPct val="0"/>
+        </a:spcAft>
+        <a:buFont typeface="Arial" charset="0"/>
+        <a:buChar char="–"/>
+        <a:defRPr kumimoji="1" sz="2800" kern="1200">
+          <a:solidFill>
+            <a:schemeClr val="tx1"/>
+          </a:solidFill>
+          <a:latin typeface="+mn-lt"/>
+          <a:ea typeface="+mn-ea"/>
+          <a:cs typeface="+mn-cs"/>
+        </a:defRPr>
+      </a:lvl2pPr>
+      <a:lvl3pPr marL="1143000" indent="-228600" algn="l" defTabSz="457200" rtl="0" eaLnBrk="1" fontAlgn="base" hangingPunct="1">
+        <a:spcBef>
+          <a:spcPct val="20000"/>
+        </a:spcBef>
+        <a:spcAft>
+          <a:spcPct val="0"/>
+        </a:spcAft>
+        <a:buFont typeface="Arial" charset="0"/>
+        <a:buChar char="•"/>
+        <a:defRPr kumimoji="1" sz="2400" kern="1200">
+          <a:solidFill>
+            <a:schemeClr val="tx1"/>
+          </a:solidFill>
+          <a:latin typeface="+mn-lt"/>
+          <a:ea typeface="+mn-ea"/>
+          <a:cs typeface="+mn-cs"/>
+        </a:defRPr>
+      </a:lvl3pPr>
+      <a:lvl4pPr marL="1600200" indent="-228600" algn="l" defTabSz="457200" rtl="0" eaLnBrk="1" fontAlgn="base" hangingPunct="1">
+        <a:spcBef>
+          <a:spcPct val="20000"/>
+        </a:spcBef>
+        <a:spcAft>
+          <a:spcPct val="0"/>
+        </a:spcAft>
+        <a:buFont typeface="Arial" charset="0"/>
+        <a:buChar char="–"/>
+        <a:defRPr kumimoji="1" sz="2000" kern="1200">
+          <a:solidFill>
+            <a:schemeClr val="tx1"/>
+          </a:solidFill>
+          <a:latin typeface="+mn-lt"/>
+          <a:ea typeface="+mn-ea"/>
+          <a:cs typeface="+mn-cs"/>
+        </a:defRPr>
+      </a:lvl4pPr>
+      <a:lvl5pPr marL="2057400" indent="-228600" algn="l" defTabSz="457200" rtl="0" eaLnBrk="1" fontAlgn="base" hangingPunct="1">
+        <a:spcBef>
+          <a:spcPct val="20000"/>
+        </a:spcBef>
+        <a:spcAft>
+          <a:spcPct val="0"/>
+        </a:spcAft>
+        <a:buFont typeface="Arial" charset="0"/>
+        <a:buChar char="»"/>
+        <a:defRPr kumimoji="1" sz="2000" kern="1200">
           <a:solidFill>
             <a:schemeClr val="tx1"/>
           </a:solidFill>
@@ -2934,7 +3251,7 @@
         </a:spcBef>
         <a:buFont typeface="Arial"/>
         <a:buChar char="•"/>
-        <a:defRPr sz="2000" kern="1200">
+        <a:defRPr kumimoji="1" sz="2000" kern="1200">
           <a:solidFill>
             <a:schemeClr val="tx1"/>
           </a:solidFill>
@@ -2949,7 +3266,7 @@
         </a:spcBef>
         <a:buFont typeface="Arial"/>
         <a:buChar char="•"/>
-        <a:defRPr sz="2000" kern="1200">
+        <a:defRPr kumimoji="1" sz="2000" kern="1200">
           <a:solidFill>
             <a:schemeClr val="tx1"/>
           </a:solidFill>
@@ -2964,7 +3281,7 @@
         </a:spcBef>
         <a:buFont typeface="Arial"/>
         <a:buChar char="•"/>
-        <a:defRPr sz="2000" kern="1200">
+        <a:defRPr kumimoji="1" sz="2000" kern="1200">
           <a:solidFill>
             <a:schemeClr val="tx1"/>
           </a:solidFill>
@@ -2979,7 +3296,7 @@
         </a:spcBef>
         <a:buFont typeface="Arial"/>
         <a:buChar char="•"/>
-        <a:defRPr sz="2000" kern="1200">
+        <a:defRPr kumimoji="1" sz="2000" kern="1200">
           <a:solidFill>
             <a:schemeClr val="tx1"/>
           </a:solidFill>
@@ -2991,10 +3308,10 @@
     </p:bodyStyle>
     <p:otherStyle>
       <a:defPPr>
-        <a:defRPr lang="en-US"/>
+        <a:defRPr lang="ja-JP"/>
       </a:defPPr>
       <a:lvl1pPr marL="0" algn="l" defTabSz="457200" rtl="0" eaLnBrk="1" latinLnBrk="0" hangingPunct="1">
-        <a:defRPr sz="1800" kern="1200">
+        <a:defRPr kumimoji="1" sz="1800" kern="1200">
           <a:solidFill>
             <a:schemeClr val="tx1"/>
           </a:solidFill>
@@ -3004,7 +3321,7 @@
         </a:defRPr>
       </a:lvl1pPr>
       <a:lvl2pPr marL="457200" algn="l" defTabSz="457200" rtl="0" eaLnBrk="1" latinLnBrk="0" hangingPunct="1">
-        <a:defRPr sz="1800" kern="1200">
+        <a:defRPr kumimoji="1" sz="1800" kern="1200">
           <a:solidFill>
             <a:schemeClr val="tx1"/>
           </a:solidFill>
@@ -3014,7 +3331,7 @@
         </a:defRPr>
       </a:lvl2pPr>
       <a:lvl3pPr marL="914400" algn="l" defTabSz="457200" rtl="0" eaLnBrk="1" latinLnBrk="0" hangingPunct="1">
-        <a:defRPr sz="1800" kern="1200">
+        <a:defRPr kumimoji="1" sz="1800" kern="1200">
           <a:solidFill>
             <a:schemeClr val="tx1"/>
           </a:solidFill>
@@ -3024,7 +3341,7 @@
         </a:defRPr>
       </a:lvl3pPr>
       <a:lvl4pPr marL="1371600" algn="l" defTabSz="457200" rtl="0" eaLnBrk="1" latinLnBrk="0" hangingPunct="1">
-        <a:defRPr sz="1800" kern="1200">
+        <a:defRPr kumimoji="1" sz="1800" kern="1200">
           <a:solidFill>
             <a:schemeClr val="tx1"/>
           </a:solidFill>
@@ -3034,7 +3351,7 @@
         </a:defRPr>
       </a:lvl4pPr>
       <a:lvl5pPr marL="1828800" algn="l" defTabSz="457200" rtl="0" eaLnBrk="1" latinLnBrk="0" hangingPunct="1">
-        <a:defRPr sz="1800" kern="1200">
+        <a:defRPr kumimoji="1" sz="1800" kern="1200">
           <a:solidFill>
             <a:schemeClr val="tx1"/>
           </a:solidFill>
@@ -3044,7 +3361,7 @@
         </a:defRPr>
       </a:lvl5pPr>
       <a:lvl6pPr marL="2286000" algn="l" defTabSz="457200" rtl="0" eaLnBrk="1" latinLnBrk="0" hangingPunct="1">
-        <a:defRPr sz="1800" kern="1200">
+        <a:defRPr kumimoji="1" sz="1800" kern="1200">
           <a:solidFill>
             <a:schemeClr val="tx1"/>
           </a:solidFill>
@@ -3054,7 +3371,7 @@
         </a:defRPr>
       </a:lvl6pPr>
       <a:lvl7pPr marL="2743200" algn="l" defTabSz="457200" rtl="0" eaLnBrk="1" latinLnBrk="0" hangingPunct="1">
-        <a:defRPr sz="1800" kern="1200">
+        <a:defRPr kumimoji="1" sz="1800" kern="1200">
           <a:solidFill>
             <a:schemeClr val="tx1"/>
           </a:solidFill>
@@ -3064,7 +3381,7 @@
         </a:defRPr>
       </a:lvl7pPr>
       <a:lvl8pPr marL="3200400" algn="l" defTabSz="457200" rtl="0" eaLnBrk="1" latinLnBrk="0" hangingPunct="1">
-        <a:defRPr sz="1800" kern="1200">
+        <a:defRPr kumimoji="1" sz="1800" kern="1200">
           <a:solidFill>
             <a:schemeClr val="tx1"/>
           </a:solidFill>
@@ -3074,7 +3391,7 @@
         </a:defRPr>
       </a:lvl8pPr>
       <a:lvl9pPr marL="3657600" algn="l" defTabSz="457200" rtl="0" eaLnBrk="1" latinLnBrk="0" hangingPunct="1">
-        <a:defRPr sz="1800" kern="1200">
+        <a:defRPr kumimoji="1" sz="1800" kern="1200">
           <a:solidFill>
             <a:schemeClr val="tx1"/>
           </a:solidFill>
@@ -3089,7 +3406,7 @@
 </file>
 
 <file path=ppt/slides/slide1.xml><?xml version="1.0" encoding="utf-8"?>
-<p:sld xmlns:a="http://schemas.openxmlformats.org/drawingml/2006/main" xmlns:p="http://schemas.openxmlformats.org/presentationml/2006/main" xmlns:r="http://schemas.openxmlformats.org/officeDocument/2006/relationships">
+<p:sld xmlns:a="http://schemas.openxmlformats.org/drawingml/2006/main" xmlns:r="http://schemas.openxmlformats.org/officeDocument/2006/relationships" xmlns:p="http://schemas.openxmlformats.org/presentationml/2006/main">
   <p:cSld>
     <p:spTree>
       <p:nvGrpSpPr>
@@ -3097,7 +3414,14 @@
         <p:cNvGrpSpPr/>
         <p:nvPr/>
       </p:nvGrpSpPr>
-      <p:grpSpPr/>
+      <p:grpSpPr>
+        <a:xfrm>
+          <a:off x="0" y="0"/>
+          <a:ext cx="0" cy="0"/>
+          <a:chOff x="0" y="0"/>
+          <a:chExt cx="0" cy="0"/>
+        </a:xfrm>
+      </p:grpSpPr>
       <p:sp>
         <p:nvSpPr>
           <p:cNvPr id="2" name="Rectangle 1"/>
@@ -3320,6 +3644,11 @@
         </p:txBody>
       </p:sp>
     </p:spTree>
+    <p:extLst>
+      <p:ext uri="{BB962C8B-B14F-4D97-AF65-F5344CB8AC3E}">
+        <p14:creationId xmlns:p14="http://schemas.microsoft.com/office/powerpoint/2010/main" val="3944598036"/>
+      </p:ext>
+    </p:extLst>
   </p:cSld>
   <p:clrMapOvr>
     <a:masterClrMapping/>
@@ -3328,15 +3657,28 @@
 </file>
 
 <file path=ppt/slides/slide10.xml><?xml version="1.0" encoding="utf-8"?>
-<p:sld xmlns:a="http://schemas.openxmlformats.org/drawingml/2006/main" xmlns:p="http://schemas.openxmlformats.org/presentationml/2006/main" xmlns:r="http://schemas.openxmlformats.org/officeDocument/2006/relationships">
+<p:sld xmlns:a="http://schemas.openxmlformats.org/drawingml/2006/main" xmlns:r="http://schemas.openxmlformats.org/officeDocument/2006/relationships" xmlns:p="http://schemas.openxmlformats.org/presentationml/2006/main">
   <p:cSld>
     <p:spTree>
       <p:nvGrpSpPr>
-        <p:cNvPr id="1" name=""/>
+        <p:cNvPr id="1" name="">
+          <a:extLst>
+            <a:ext uri="{FF2B5EF4-FFF2-40B4-BE49-F238E27FC236}">
+              <a16:creationId xmlns:a16="http://schemas.microsoft.com/office/drawing/2014/main" id="{B137598A-7489-8F6D-91D8-19CE7F507B2C}"/>
+            </a:ext>
+          </a:extLst>
+        </p:cNvPr>
         <p:cNvGrpSpPr/>
         <p:nvPr/>
       </p:nvGrpSpPr>
-      <p:grpSpPr/>
+      <p:grpSpPr>
+        <a:xfrm>
+          <a:off x="0" y="0"/>
+          <a:ext cx="0" cy="0"/>
+          <a:chOff x="0" y="0"/>
+          <a:chExt cx="0" cy="0"/>
+        </a:xfrm>
+      </p:grpSpPr>
       <p:sp>
         <p:nvSpPr>
           <p:cNvPr id="2" name="Rectangle 1"/>
@@ -4695,6 +5037,11 @@
         </p:txBody>
       </p:sp>
     </p:spTree>
+    <p:extLst>
+      <p:ext uri="{BB962C8B-B14F-4D97-AF65-F5344CB8AC3E}">
+        <p14:creationId xmlns:p14="http://schemas.microsoft.com/office/powerpoint/2010/main" val="653866009"/>
+      </p:ext>
+    </p:extLst>
   </p:cSld>
   <p:clrMapOvr>
     <a:masterClrMapping/>
@@ -4703,15 +5050,28 @@
 </file>
 
 <file path=ppt/slides/slide11.xml><?xml version="1.0" encoding="utf-8"?>
-<p:sld xmlns:a="http://schemas.openxmlformats.org/drawingml/2006/main" xmlns:p="http://schemas.openxmlformats.org/presentationml/2006/main" xmlns:r="http://schemas.openxmlformats.org/officeDocument/2006/relationships">
+<p:sld xmlns:a="http://schemas.openxmlformats.org/drawingml/2006/main" xmlns:r="http://schemas.openxmlformats.org/officeDocument/2006/relationships" xmlns:p="http://schemas.openxmlformats.org/presentationml/2006/main">
   <p:cSld>
     <p:spTree>
       <p:nvGrpSpPr>
-        <p:cNvPr id="1" name=""/>
+        <p:cNvPr id="1" name="">
+          <a:extLst>
+            <a:ext uri="{FF2B5EF4-FFF2-40B4-BE49-F238E27FC236}">
+              <a16:creationId xmlns:a16="http://schemas.microsoft.com/office/drawing/2014/main" id="{49AD501E-4538-865B-06FF-B4530B24F063}"/>
+            </a:ext>
+          </a:extLst>
+        </p:cNvPr>
         <p:cNvGrpSpPr/>
         <p:nvPr/>
       </p:nvGrpSpPr>
-      <p:grpSpPr/>
+      <p:grpSpPr>
+        <a:xfrm>
+          <a:off x="0" y="0"/>
+          <a:ext cx="0" cy="0"/>
+          <a:chOff x="0" y="0"/>
+          <a:chExt cx="0" cy="0"/>
+        </a:xfrm>
+      </p:grpSpPr>
       <p:sp>
         <p:nvSpPr>
           <p:cNvPr id="2" name="Rectangle 1"/>
@@ -6091,6 +6451,11 @@
         </p:txBody>
       </p:sp>
     </p:spTree>
+    <p:extLst>
+      <p:ext uri="{BB962C8B-B14F-4D97-AF65-F5344CB8AC3E}">
+        <p14:creationId xmlns:p14="http://schemas.microsoft.com/office/powerpoint/2010/main" val="3112803767"/>
+      </p:ext>
+    </p:extLst>
   </p:cSld>
   <p:clrMapOvr>
     <a:masterClrMapping/>
@@ -6099,15 +6464,28 @@
 </file>
 
 <file path=ppt/slides/slide2.xml><?xml version="1.0" encoding="utf-8"?>
-<p:sld xmlns:a="http://schemas.openxmlformats.org/drawingml/2006/main" xmlns:p="http://schemas.openxmlformats.org/presentationml/2006/main" xmlns:r="http://schemas.openxmlformats.org/officeDocument/2006/relationships">
+<p:sld xmlns:a="http://schemas.openxmlformats.org/drawingml/2006/main" xmlns:r="http://schemas.openxmlformats.org/officeDocument/2006/relationships" xmlns:p="http://schemas.openxmlformats.org/presentationml/2006/main">
   <p:cSld>
     <p:spTree>
       <p:nvGrpSpPr>
-        <p:cNvPr id="1" name=""/>
+        <p:cNvPr id="1" name="">
+          <a:extLst>
+            <a:ext uri="{FF2B5EF4-FFF2-40B4-BE49-F238E27FC236}">
+              <a16:creationId xmlns:a16="http://schemas.microsoft.com/office/drawing/2014/main" id="{40B579F4-FB71-CB84-349D-670C2D29F6A3}"/>
+            </a:ext>
+          </a:extLst>
+        </p:cNvPr>
         <p:cNvGrpSpPr/>
         <p:nvPr/>
       </p:nvGrpSpPr>
-      <p:grpSpPr/>
+      <p:grpSpPr>
+        <a:xfrm>
+          <a:off x="0" y="0"/>
+          <a:ext cx="0" cy="0"/>
+          <a:chOff x="0" y="0"/>
+          <a:chExt cx="0" cy="0"/>
+        </a:xfrm>
+      </p:grpSpPr>
       <p:sp>
         <p:nvSpPr>
           <p:cNvPr id="2" name="Rectangle 1"/>
@@ -7617,6 +7995,11 @@
         </p:txBody>
       </p:sp>
     </p:spTree>
+    <p:extLst>
+      <p:ext uri="{BB962C8B-B14F-4D97-AF65-F5344CB8AC3E}">
+        <p14:creationId xmlns:p14="http://schemas.microsoft.com/office/powerpoint/2010/main" val="99384669"/>
+      </p:ext>
+    </p:extLst>
   </p:cSld>
   <p:clrMapOvr>
     <a:masterClrMapping/>
@@ -7625,15 +8008,28 @@
 </file>
 
 <file path=ppt/slides/slide3.xml><?xml version="1.0" encoding="utf-8"?>
-<p:sld xmlns:a="http://schemas.openxmlformats.org/drawingml/2006/main" xmlns:p="http://schemas.openxmlformats.org/presentationml/2006/main" xmlns:r="http://schemas.openxmlformats.org/officeDocument/2006/relationships">
+<p:sld xmlns:a="http://schemas.openxmlformats.org/drawingml/2006/main" xmlns:r="http://schemas.openxmlformats.org/officeDocument/2006/relationships" xmlns:p="http://schemas.openxmlformats.org/presentationml/2006/main">
   <p:cSld>
     <p:spTree>
       <p:nvGrpSpPr>
-        <p:cNvPr id="1" name=""/>
+        <p:cNvPr id="1" name="">
+          <a:extLst>
+            <a:ext uri="{FF2B5EF4-FFF2-40B4-BE49-F238E27FC236}">
+              <a16:creationId xmlns:a16="http://schemas.microsoft.com/office/drawing/2014/main" id="{DD692180-D336-F255-C39D-17584774E386}"/>
+            </a:ext>
+          </a:extLst>
+        </p:cNvPr>
         <p:cNvGrpSpPr/>
         <p:nvPr/>
       </p:nvGrpSpPr>
-      <p:grpSpPr/>
+      <p:grpSpPr>
+        <a:xfrm>
+          <a:off x="0" y="0"/>
+          <a:ext cx="0" cy="0"/>
+          <a:chOff x="0" y="0"/>
+          <a:chExt cx="0" cy="0"/>
+        </a:xfrm>
+      </p:grpSpPr>
       <p:sp>
         <p:nvSpPr>
           <p:cNvPr id="2" name="Rectangle 1"/>
@@ -9013,6 +9409,11 @@
         </p:txBody>
       </p:sp>
     </p:spTree>
+    <p:extLst>
+      <p:ext uri="{BB962C8B-B14F-4D97-AF65-F5344CB8AC3E}">
+        <p14:creationId xmlns:p14="http://schemas.microsoft.com/office/powerpoint/2010/main" val="676230439"/>
+      </p:ext>
+    </p:extLst>
   </p:cSld>
   <p:clrMapOvr>
     <a:masterClrMapping/>
@@ -9021,15 +9422,28 @@
 </file>
 
 <file path=ppt/slides/slide4.xml><?xml version="1.0" encoding="utf-8"?>
-<p:sld xmlns:a="http://schemas.openxmlformats.org/drawingml/2006/main" xmlns:p="http://schemas.openxmlformats.org/presentationml/2006/main" xmlns:r="http://schemas.openxmlformats.org/officeDocument/2006/relationships">
+<p:sld xmlns:a="http://schemas.openxmlformats.org/drawingml/2006/main" xmlns:r="http://schemas.openxmlformats.org/officeDocument/2006/relationships" xmlns:p="http://schemas.openxmlformats.org/presentationml/2006/main">
   <p:cSld>
     <p:spTree>
       <p:nvGrpSpPr>
-        <p:cNvPr id="1" name=""/>
+        <p:cNvPr id="1" name="">
+          <a:extLst>
+            <a:ext uri="{FF2B5EF4-FFF2-40B4-BE49-F238E27FC236}">
+              <a16:creationId xmlns:a16="http://schemas.microsoft.com/office/drawing/2014/main" id="{8686673A-9013-9BC2-61FD-9A9839050AB4}"/>
+            </a:ext>
+          </a:extLst>
+        </p:cNvPr>
         <p:cNvGrpSpPr/>
         <p:nvPr/>
       </p:nvGrpSpPr>
-      <p:grpSpPr/>
+      <p:grpSpPr>
+        <a:xfrm>
+          <a:off x="0" y="0"/>
+          <a:ext cx="0" cy="0"/>
+          <a:chOff x="0" y="0"/>
+          <a:chExt cx="0" cy="0"/>
+        </a:xfrm>
+      </p:grpSpPr>
       <p:sp>
         <p:nvSpPr>
           <p:cNvPr id="2" name="Rectangle 1"/>
@@ -10367,6 +10781,11 @@
         </p:txBody>
       </p:sp>
     </p:spTree>
+    <p:extLst>
+      <p:ext uri="{BB962C8B-B14F-4D97-AF65-F5344CB8AC3E}">
+        <p14:creationId xmlns:p14="http://schemas.microsoft.com/office/powerpoint/2010/main" val="3509480210"/>
+      </p:ext>
+    </p:extLst>
   </p:cSld>
   <p:clrMapOvr>
     <a:masterClrMapping/>
@@ -10375,15 +10794,28 @@
 </file>
 
 <file path=ppt/slides/slide5.xml><?xml version="1.0" encoding="utf-8"?>
-<p:sld xmlns:a="http://schemas.openxmlformats.org/drawingml/2006/main" xmlns:p="http://schemas.openxmlformats.org/presentationml/2006/main" xmlns:r="http://schemas.openxmlformats.org/officeDocument/2006/relationships">
+<p:sld xmlns:a="http://schemas.openxmlformats.org/drawingml/2006/main" xmlns:r="http://schemas.openxmlformats.org/officeDocument/2006/relationships" xmlns:p="http://schemas.openxmlformats.org/presentationml/2006/main">
   <p:cSld>
     <p:spTree>
       <p:nvGrpSpPr>
-        <p:cNvPr id="1" name=""/>
+        <p:cNvPr id="1" name="">
+          <a:extLst>
+            <a:ext uri="{FF2B5EF4-FFF2-40B4-BE49-F238E27FC236}">
+              <a16:creationId xmlns:a16="http://schemas.microsoft.com/office/drawing/2014/main" id="{A2758B38-C7A2-1CE4-FDFD-8D6A744BB635}"/>
+            </a:ext>
+          </a:extLst>
+        </p:cNvPr>
         <p:cNvGrpSpPr/>
         <p:nvPr/>
       </p:nvGrpSpPr>
-      <p:grpSpPr/>
+      <p:grpSpPr>
+        <a:xfrm>
+          <a:off x="0" y="0"/>
+          <a:ext cx="0" cy="0"/>
+          <a:chOff x="0" y="0"/>
+          <a:chExt cx="0" cy="0"/>
+        </a:xfrm>
+      </p:grpSpPr>
       <p:sp>
         <p:nvSpPr>
           <p:cNvPr id="2" name="Rectangle 1"/>
@@ -11742,6 +12174,11 @@
         </p:txBody>
       </p:sp>
     </p:spTree>
+    <p:extLst>
+      <p:ext uri="{BB962C8B-B14F-4D97-AF65-F5344CB8AC3E}">
+        <p14:creationId xmlns:p14="http://schemas.microsoft.com/office/powerpoint/2010/main" val="1187594771"/>
+      </p:ext>
+    </p:extLst>
   </p:cSld>
   <p:clrMapOvr>
     <a:masterClrMapping/>
@@ -11750,15 +12187,28 @@
 </file>
 
 <file path=ppt/slides/slide6.xml><?xml version="1.0" encoding="utf-8"?>
-<p:sld xmlns:a="http://schemas.openxmlformats.org/drawingml/2006/main" xmlns:p="http://schemas.openxmlformats.org/presentationml/2006/main" xmlns:r="http://schemas.openxmlformats.org/officeDocument/2006/relationships">
+<p:sld xmlns:a="http://schemas.openxmlformats.org/drawingml/2006/main" xmlns:r="http://schemas.openxmlformats.org/officeDocument/2006/relationships" xmlns:p="http://schemas.openxmlformats.org/presentationml/2006/main">
   <p:cSld>
     <p:spTree>
       <p:nvGrpSpPr>
-        <p:cNvPr id="1" name=""/>
+        <p:cNvPr id="1" name="">
+          <a:extLst>
+            <a:ext uri="{FF2B5EF4-FFF2-40B4-BE49-F238E27FC236}">
+              <a16:creationId xmlns:a16="http://schemas.microsoft.com/office/drawing/2014/main" id="{CE7E587B-DB18-248C-DB39-A170420D4342}"/>
+            </a:ext>
+          </a:extLst>
+        </p:cNvPr>
         <p:cNvGrpSpPr/>
         <p:nvPr/>
       </p:nvGrpSpPr>
-      <p:grpSpPr/>
+      <p:grpSpPr>
+        <a:xfrm>
+          <a:off x="0" y="0"/>
+          <a:ext cx="0" cy="0"/>
+          <a:chOff x="0" y="0"/>
+          <a:chExt cx="0" cy="0"/>
+        </a:xfrm>
+      </p:grpSpPr>
       <p:sp>
         <p:nvSpPr>
           <p:cNvPr id="2" name="Rectangle 1"/>
@@ -13138,6 +13588,11 @@
         </p:txBody>
       </p:sp>
     </p:spTree>
+    <p:extLst>
+      <p:ext uri="{BB962C8B-B14F-4D97-AF65-F5344CB8AC3E}">
+        <p14:creationId xmlns:p14="http://schemas.microsoft.com/office/powerpoint/2010/main" val="466478031"/>
+      </p:ext>
+    </p:extLst>
   </p:cSld>
   <p:clrMapOvr>
     <a:masterClrMapping/>
@@ -13146,15 +13601,28 @@
 </file>
 
 <file path=ppt/slides/slide7.xml><?xml version="1.0" encoding="utf-8"?>
-<p:sld xmlns:a="http://schemas.openxmlformats.org/drawingml/2006/main" xmlns:p="http://schemas.openxmlformats.org/presentationml/2006/main" xmlns:r="http://schemas.openxmlformats.org/officeDocument/2006/relationships">
+<p:sld xmlns:a="http://schemas.openxmlformats.org/drawingml/2006/main" xmlns:r="http://schemas.openxmlformats.org/officeDocument/2006/relationships" xmlns:p="http://schemas.openxmlformats.org/presentationml/2006/main">
   <p:cSld>
     <p:spTree>
       <p:nvGrpSpPr>
-        <p:cNvPr id="1" name=""/>
+        <p:cNvPr id="1" name="">
+          <a:extLst>
+            <a:ext uri="{FF2B5EF4-FFF2-40B4-BE49-F238E27FC236}">
+              <a16:creationId xmlns:a16="http://schemas.microsoft.com/office/drawing/2014/main" id="{C3E2D860-D20C-DFFA-89EA-A46B82A5DB11}"/>
+            </a:ext>
+          </a:extLst>
+        </p:cNvPr>
         <p:cNvGrpSpPr/>
         <p:nvPr/>
       </p:nvGrpSpPr>
-      <p:grpSpPr/>
+      <p:grpSpPr>
+        <a:xfrm>
+          <a:off x="0" y="0"/>
+          <a:ext cx="0" cy="0"/>
+          <a:chOff x="0" y="0"/>
+          <a:chExt cx="0" cy="0"/>
+        </a:xfrm>
+      </p:grpSpPr>
       <p:sp>
         <p:nvSpPr>
           <p:cNvPr id="2" name="Rectangle 1"/>
@@ -14513,6 +14981,11 @@
         </p:txBody>
       </p:sp>
     </p:spTree>
+    <p:extLst>
+      <p:ext uri="{BB962C8B-B14F-4D97-AF65-F5344CB8AC3E}">
+        <p14:creationId xmlns:p14="http://schemas.microsoft.com/office/powerpoint/2010/main" val="142908944"/>
+      </p:ext>
+    </p:extLst>
   </p:cSld>
   <p:clrMapOvr>
     <a:masterClrMapping/>
@@ -14521,15 +14994,28 @@
 </file>
 
 <file path=ppt/slides/slide8.xml><?xml version="1.0" encoding="utf-8"?>
-<p:sld xmlns:a="http://schemas.openxmlformats.org/drawingml/2006/main" xmlns:p="http://schemas.openxmlformats.org/presentationml/2006/main" xmlns:r="http://schemas.openxmlformats.org/officeDocument/2006/relationships">
+<p:sld xmlns:a="http://schemas.openxmlformats.org/drawingml/2006/main" xmlns:r="http://schemas.openxmlformats.org/officeDocument/2006/relationships" xmlns:p="http://schemas.openxmlformats.org/presentationml/2006/main">
   <p:cSld>
     <p:spTree>
       <p:nvGrpSpPr>
-        <p:cNvPr id="1" name=""/>
+        <p:cNvPr id="1" name="">
+          <a:extLst>
+            <a:ext uri="{FF2B5EF4-FFF2-40B4-BE49-F238E27FC236}">
+              <a16:creationId xmlns:a16="http://schemas.microsoft.com/office/drawing/2014/main" id="{5B9E4664-0791-AB23-9ACF-A79FA4D2CD12}"/>
+            </a:ext>
+          </a:extLst>
+        </p:cNvPr>
         <p:cNvGrpSpPr/>
         <p:nvPr/>
       </p:nvGrpSpPr>
-      <p:grpSpPr/>
+      <p:grpSpPr>
+        <a:xfrm>
+          <a:off x="0" y="0"/>
+          <a:ext cx="0" cy="0"/>
+          <a:chOff x="0" y="0"/>
+          <a:chExt cx="0" cy="0"/>
+        </a:xfrm>
+      </p:grpSpPr>
       <p:sp>
         <p:nvSpPr>
           <p:cNvPr id="2" name="Rectangle 1"/>
@@ -15909,6 +16395,11 @@
         </p:txBody>
       </p:sp>
     </p:spTree>
+    <p:extLst>
+      <p:ext uri="{BB962C8B-B14F-4D97-AF65-F5344CB8AC3E}">
+        <p14:creationId xmlns:p14="http://schemas.microsoft.com/office/powerpoint/2010/main" val="1438123704"/>
+      </p:ext>
+    </p:extLst>
   </p:cSld>
   <p:clrMapOvr>
     <a:masterClrMapping/>
@@ -15917,15 +16408,28 @@
 </file>
 
 <file path=ppt/slides/slide9.xml><?xml version="1.0" encoding="utf-8"?>
-<p:sld xmlns:a="http://schemas.openxmlformats.org/drawingml/2006/main" xmlns:p="http://schemas.openxmlformats.org/presentationml/2006/main" xmlns:r="http://schemas.openxmlformats.org/officeDocument/2006/relationships">
+<p:sld xmlns:a="http://schemas.openxmlformats.org/drawingml/2006/main" xmlns:r="http://schemas.openxmlformats.org/officeDocument/2006/relationships" xmlns:p="http://schemas.openxmlformats.org/presentationml/2006/main">
   <p:cSld>
     <p:spTree>
       <p:nvGrpSpPr>
-        <p:cNvPr id="1" name=""/>
+        <p:cNvPr id="1" name="">
+          <a:extLst>
+            <a:ext uri="{FF2B5EF4-FFF2-40B4-BE49-F238E27FC236}">
+              <a16:creationId xmlns:a16="http://schemas.microsoft.com/office/drawing/2014/main" id="{AD6A8E8E-25CB-4B86-C4F6-E5A7023586F7}"/>
+            </a:ext>
+          </a:extLst>
+        </p:cNvPr>
         <p:cNvGrpSpPr/>
         <p:nvPr/>
       </p:nvGrpSpPr>
-      <p:grpSpPr/>
+      <p:grpSpPr>
+        <a:xfrm>
+          <a:off x="0" y="0"/>
+          <a:ext cx="0" cy="0"/>
+          <a:chOff x="0" y="0"/>
+          <a:chExt cx="0" cy="0"/>
+        </a:xfrm>
+      </p:grpSpPr>
       <p:sp>
         <p:nvSpPr>
           <p:cNvPr id="2" name="Rectangle 1"/>
@@ -17242,6 +17746,11 @@
         </p:txBody>
       </p:sp>
     </p:spTree>
+    <p:extLst>
+      <p:ext uri="{BB962C8B-B14F-4D97-AF65-F5344CB8AC3E}">
+        <p14:creationId xmlns:p14="http://schemas.microsoft.com/office/powerpoint/2010/main" val="2687779138"/>
+      </p:ext>
+    </p:extLst>
   </p:cSld>
   <p:clrMapOvr>
     <a:masterClrMapping/>
@@ -17250,7 +17759,295 @@
 </file>
 
 <file path=ppt/theme/theme1.xml><?xml version="1.0" encoding="utf-8"?>
-<a:theme xmlns:a="http://schemas.openxmlformats.org/drawingml/2006/main" name="Office Theme">
+<a:theme xmlns:a="http://schemas.openxmlformats.org/drawingml/2006/main" name="テーマ1">
+  <a:themeElements>
+    <a:clrScheme name="Office">
+      <a:dk1>
+        <a:sysClr val="windowText" lastClr="000000"/>
+      </a:dk1>
+      <a:lt1>
+        <a:sysClr val="window" lastClr="FFFFFF"/>
+      </a:lt1>
+      <a:dk2>
+        <a:srgbClr val="1F497D"/>
+      </a:dk2>
+      <a:lt2>
+        <a:srgbClr val="EEECE1"/>
+      </a:lt2>
+      <a:accent1>
+        <a:srgbClr val="4F81BD"/>
+      </a:accent1>
+      <a:accent2>
+        <a:srgbClr val="C0504D"/>
+      </a:accent2>
+      <a:accent3>
+        <a:srgbClr val="9BBB59"/>
+      </a:accent3>
+      <a:accent4>
+        <a:srgbClr val="8064A2"/>
+      </a:accent4>
+      <a:accent5>
+        <a:srgbClr val="4BACC6"/>
+      </a:accent5>
+      <a:accent6>
+        <a:srgbClr val="F79646"/>
+      </a:accent6>
+      <a:hlink>
+        <a:srgbClr val="0000FF"/>
+      </a:hlink>
+      <a:folHlink>
+        <a:srgbClr val="800080"/>
+      </a:folHlink>
+    </a:clrScheme>
+    <a:fontScheme name="Office">
+      <a:majorFont>
+        <a:latin typeface="Calibri"/>
+        <a:ea typeface=""/>
+        <a:cs typeface=""/>
+        <a:font script="Jpan" typeface="ＭＳ Ｐゴシック"/>
+        <a:font script="Hang" typeface="맑은 고딕"/>
+        <a:font script="Hans" typeface="宋体"/>
+        <a:font script="Hant" typeface="新細明體"/>
+        <a:font script="Arab" typeface="Times New Roman"/>
+        <a:font script="Hebr" typeface="Times New Roman"/>
+        <a:font script="Thai" typeface="Angsana New"/>
+        <a:font script="Ethi" typeface="Nyala"/>
+        <a:font script="Beng" typeface="Vrinda"/>
+        <a:font script="Gujr" typeface="Shruti"/>
+        <a:font script="Khmr" typeface="MoolBoran"/>
+        <a:font script="Knda" typeface="Tunga"/>
+        <a:font script="Guru" typeface="Raavi"/>
+        <a:font script="Cans" typeface="Euphemia"/>
+        <a:font script="Cher" typeface="Plantagenet Cherokee"/>
+        <a:font script="Yiii" typeface="Microsoft Yi Baiti"/>
+        <a:font script="Tibt" typeface="Microsoft Himalaya"/>
+        <a:font script="Thaa" typeface="MV Boli"/>
+        <a:font script="Deva" typeface="Mangal"/>
+        <a:font script="Telu" typeface="Gautami"/>
+        <a:font script="Taml" typeface="Latha"/>
+        <a:font script="Syrc" typeface="Estrangelo Edessa"/>
+        <a:font script="Orya" typeface="Kalinga"/>
+        <a:font script="Mlym" typeface="Kartika"/>
+        <a:font script="Laoo" typeface="DokChampa"/>
+        <a:font script="Sinh" typeface="Iskoola Pota"/>
+        <a:font script="Mong" typeface="Mongolian Baiti"/>
+        <a:font script="Viet" typeface="Times New Roman"/>
+        <a:font script="Uigh" typeface="Microsoft Uighur"/>
+      </a:majorFont>
+      <a:minorFont>
+        <a:latin typeface="Calibri"/>
+        <a:ea typeface=""/>
+        <a:cs typeface=""/>
+        <a:font script="Jpan" typeface="ＭＳ Ｐゴシック"/>
+        <a:font script="Hang" typeface="맑은 고딕"/>
+        <a:font script="Hans" typeface="宋体"/>
+        <a:font script="Hant" typeface="新細明體"/>
+        <a:font script="Arab" typeface="Arial"/>
+        <a:font script="Hebr" typeface="Arial"/>
+        <a:font script="Thai" typeface="Cordia New"/>
+        <a:font script="Ethi" typeface="Nyala"/>
+        <a:font script="Beng" typeface="Vrinda"/>
+        <a:font script="Gujr" typeface="Shruti"/>
+        <a:font script="Khmr" typeface="DaunPenh"/>
+        <a:font script="Knda" typeface="Tunga"/>
+        <a:font script="Guru" typeface="Raavi"/>
+        <a:font script="Cans" typeface="Euphemia"/>
+        <a:font script="Cher" typeface="Plantagenet Cherokee"/>
+        <a:font script="Yiii" typeface="Microsoft Yi Baiti"/>
+        <a:font script="Tibt" typeface="Microsoft Himalaya"/>
+        <a:font script="Thaa" typeface="MV Boli"/>
+        <a:font script="Deva" typeface="Mangal"/>
+        <a:font script="Telu" typeface="Gautami"/>
+        <a:font script="Taml" typeface="Latha"/>
+        <a:font script="Syrc" typeface="Estrangelo Edessa"/>
+        <a:font script="Orya" typeface="Kalinga"/>
+        <a:font script="Mlym" typeface="Kartika"/>
+        <a:font script="Laoo" typeface="DokChampa"/>
+        <a:font script="Sinh" typeface="Iskoola Pota"/>
+        <a:font script="Mong" typeface="Mongolian Baiti"/>
+        <a:font script="Viet" typeface="Arial"/>
+        <a:font script="Uigh" typeface="Microsoft Uighur"/>
+      </a:minorFont>
+    </a:fontScheme>
+    <a:fmtScheme name="Office">
+      <a:fillStyleLst>
+        <a:solidFill>
+          <a:schemeClr val="phClr"/>
+        </a:solidFill>
+        <a:gradFill rotWithShape="1">
+          <a:gsLst>
+            <a:gs pos="0">
+              <a:schemeClr val="phClr">
+                <a:tint val="50000"/>
+                <a:satMod val="300000"/>
+              </a:schemeClr>
+            </a:gs>
+            <a:gs pos="35000">
+              <a:schemeClr val="phClr">
+                <a:tint val="37000"/>
+                <a:satMod val="300000"/>
+              </a:schemeClr>
+            </a:gs>
+            <a:gs pos="100000">
+              <a:schemeClr val="phClr">
+                <a:tint val="15000"/>
+                <a:satMod val="350000"/>
+              </a:schemeClr>
+            </a:gs>
+          </a:gsLst>
+          <a:lin ang="16200000" scaled="1"/>
+        </a:gradFill>
+        <a:gradFill rotWithShape="1">
+          <a:gsLst>
+            <a:gs pos="0">
+              <a:schemeClr val="phClr">
+                <a:shade val="51000"/>
+                <a:satMod val="130000"/>
+              </a:schemeClr>
+            </a:gs>
+            <a:gs pos="80000">
+              <a:schemeClr val="phClr">
+                <a:shade val="93000"/>
+                <a:satMod val="130000"/>
+              </a:schemeClr>
+            </a:gs>
+            <a:gs pos="100000">
+              <a:schemeClr val="phClr">
+                <a:shade val="94000"/>
+                <a:satMod val="135000"/>
+              </a:schemeClr>
+            </a:gs>
+          </a:gsLst>
+          <a:lin ang="16200000" scaled="0"/>
+        </a:gradFill>
+      </a:fillStyleLst>
+      <a:lnStyleLst>
+        <a:ln w="9525" cap="flat" cmpd="sng" algn="ctr">
+          <a:solidFill>
+            <a:schemeClr val="phClr">
+              <a:shade val="95000"/>
+              <a:satMod val="105000"/>
+            </a:schemeClr>
+          </a:solidFill>
+          <a:prstDash val="solid"/>
+        </a:ln>
+        <a:ln w="25400" cap="flat" cmpd="sng" algn="ctr">
+          <a:solidFill>
+            <a:schemeClr val="phClr"/>
+          </a:solidFill>
+          <a:prstDash val="solid"/>
+        </a:ln>
+        <a:ln w="38100" cap="flat" cmpd="sng" algn="ctr">
+          <a:solidFill>
+            <a:schemeClr val="phClr"/>
+          </a:solidFill>
+          <a:prstDash val="solid"/>
+        </a:ln>
+      </a:lnStyleLst>
+      <a:effectStyleLst>
+        <a:effectStyle>
+          <a:effectLst>
+            <a:outerShdw blurRad="40000" dist="20000" dir="5400000" rotWithShape="0">
+              <a:srgbClr val="000000">
+                <a:alpha val="38000"/>
+              </a:srgbClr>
+            </a:outerShdw>
+          </a:effectLst>
+        </a:effectStyle>
+        <a:effectStyle>
+          <a:effectLst>
+            <a:outerShdw blurRad="40000" dist="23000" dir="5400000" rotWithShape="0">
+              <a:srgbClr val="000000">
+                <a:alpha val="35000"/>
+              </a:srgbClr>
+            </a:outerShdw>
+          </a:effectLst>
+        </a:effectStyle>
+        <a:effectStyle>
+          <a:effectLst>
+            <a:outerShdw blurRad="40000" dist="23000" dir="5400000" rotWithShape="0">
+              <a:srgbClr val="000000">
+                <a:alpha val="35000"/>
+              </a:srgbClr>
+            </a:outerShdw>
+          </a:effectLst>
+          <a:scene3d>
+            <a:camera prst="orthographicFront">
+              <a:rot lat="0" lon="0" rev="0"/>
+            </a:camera>
+            <a:lightRig rig="threePt" dir="t">
+              <a:rot lat="0" lon="0" rev="1200000"/>
+            </a:lightRig>
+          </a:scene3d>
+          <a:sp3d>
+            <a:bevelT w="63500" h="25400"/>
+          </a:sp3d>
+        </a:effectStyle>
+      </a:effectStyleLst>
+      <a:bgFillStyleLst>
+        <a:solidFill>
+          <a:schemeClr val="phClr"/>
+        </a:solidFill>
+        <a:gradFill rotWithShape="1">
+          <a:gsLst>
+            <a:gs pos="0">
+              <a:schemeClr val="phClr">
+                <a:tint val="40000"/>
+                <a:satMod val="350000"/>
+              </a:schemeClr>
+            </a:gs>
+            <a:gs pos="40000">
+              <a:schemeClr val="phClr">
+                <a:tint val="45000"/>
+                <a:shade val="99000"/>
+                <a:satMod val="350000"/>
+              </a:schemeClr>
+            </a:gs>
+            <a:gs pos="100000">
+              <a:schemeClr val="phClr">
+                <a:shade val="20000"/>
+                <a:satMod val="255000"/>
+              </a:schemeClr>
+            </a:gs>
+          </a:gsLst>
+          <a:path path="circle">
+            <a:fillToRect l="50000" t="-80000" r="50000" b="180000"/>
+          </a:path>
+        </a:gradFill>
+        <a:gradFill rotWithShape="1">
+          <a:gsLst>
+            <a:gs pos="0">
+              <a:schemeClr val="phClr">
+                <a:tint val="80000"/>
+                <a:satMod val="300000"/>
+              </a:schemeClr>
+            </a:gs>
+            <a:gs pos="100000">
+              <a:schemeClr val="phClr">
+                <a:shade val="30000"/>
+                <a:satMod val="200000"/>
+              </a:schemeClr>
+            </a:gs>
+          </a:gsLst>
+          <a:path path="circle">
+            <a:fillToRect l="50000" t="50000" r="50000" b="50000"/>
+          </a:path>
+        </a:gradFill>
+      </a:bgFillStyleLst>
+    </a:fmtScheme>
+  </a:themeElements>
+  <a:objectDefaults/>
+  <a:extraClrSchemeLst/>
+  <a:extLst>
+    <a:ext uri="{05A4C25C-085E-4340-85A3-A5531E510DB2}">
+      <thm15:themeFamily xmlns:thm15="http://schemas.microsoft.com/office/thememl/2012/main" name="テーマ1" id="{8EA1701B-0E00-4167-9612-575199E01EDB}" vid="{8EF6575E-BB77-44AE-AF00-801DE4CAFB82}"/>
+    </a:ext>
+  </a:extLst>
+</a:theme>
+</file>
+
+<file path=ppt/theme/theme2.xml><?xml version="1.0" encoding="utf-8"?>
+<a:theme xmlns:a="http://schemas.openxmlformats.org/drawingml/2006/main" name="DYMJAPAN">
   <a:themeElements>
     <a:clrScheme name="Office">
       <a:dk1>
@@ -17567,4 +18364,526 @@
   </a:objectDefaults>
   <a:extraClrSchemeLst/>
 </a:theme>
+</file>
+
+<file path=ppt/theme/theme3.xml><?xml version="1.0" encoding="utf-8"?>
+<a:theme xmlns:a="http://schemas.openxmlformats.org/drawingml/2006/main" name="Office テーマ">
+  <a:themeElements>
+    <a:clrScheme name="Office">
+      <a:dk1>
+        <a:sysClr val="windowText" lastClr="000000"/>
+      </a:dk1>
+      <a:lt1>
+        <a:sysClr val="window" lastClr="FFFFFF"/>
+      </a:lt1>
+      <a:dk2>
+        <a:srgbClr val="44546A"/>
+      </a:dk2>
+      <a:lt2>
+        <a:srgbClr val="E7E6E6"/>
+      </a:lt2>
+      <a:accent1>
+        <a:srgbClr val="5B9BD5"/>
+      </a:accent1>
+      <a:accent2>
+        <a:srgbClr val="ED7D31"/>
+      </a:accent2>
+      <a:accent3>
+        <a:srgbClr val="A5A5A5"/>
+      </a:accent3>
+      <a:accent4>
+        <a:srgbClr val="FFC000"/>
+      </a:accent4>
+      <a:accent5>
+        <a:srgbClr val="4472C4"/>
+      </a:accent5>
+      <a:accent6>
+        <a:srgbClr val="70AD47"/>
+      </a:accent6>
+      <a:hlink>
+        <a:srgbClr val="0563C1"/>
+      </a:hlink>
+      <a:folHlink>
+        <a:srgbClr val="954F72"/>
+      </a:folHlink>
+    </a:clrScheme>
+    <a:fontScheme name="Office">
+      <a:majorFont>
+        <a:latin typeface="Calibri Light" panose="020F0302020204030204"/>
+        <a:ea typeface=""/>
+        <a:cs typeface=""/>
+        <a:font script="Jpan" typeface="ＭＳ Ｐゴシック"/>
+        <a:font script="Hang" typeface="맑은 고딕"/>
+        <a:font script="Hans" typeface="宋体"/>
+        <a:font script="Hant" typeface="新細明體"/>
+        <a:font script="Arab" typeface="Times New Roman"/>
+        <a:font script="Hebr" typeface="Times New Roman"/>
+        <a:font script="Thai" typeface="Angsana New"/>
+        <a:font script="Ethi" typeface="Nyala"/>
+        <a:font script="Beng" typeface="Vrinda"/>
+        <a:font script="Gujr" typeface="Shruti"/>
+        <a:font script="Khmr" typeface="MoolBoran"/>
+        <a:font script="Knda" typeface="Tunga"/>
+        <a:font script="Guru" typeface="Raavi"/>
+        <a:font script="Cans" typeface="Euphemia"/>
+        <a:font script="Cher" typeface="Plantagenet Cherokee"/>
+        <a:font script="Yiii" typeface="Microsoft Yi Baiti"/>
+        <a:font script="Tibt" typeface="Microsoft Himalaya"/>
+        <a:font script="Thaa" typeface="MV Boli"/>
+        <a:font script="Deva" typeface="Mangal"/>
+        <a:font script="Telu" typeface="Gautami"/>
+        <a:font script="Taml" typeface="Latha"/>
+        <a:font script="Syrc" typeface="Estrangelo Edessa"/>
+        <a:font script="Orya" typeface="Kalinga"/>
+        <a:font script="Mlym" typeface="Kartika"/>
+        <a:font script="Laoo" typeface="DokChampa"/>
+        <a:font script="Sinh" typeface="Iskoola Pota"/>
+        <a:font script="Mong" typeface="Mongolian Baiti"/>
+        <a:font script="Viet" typeface="Times New Roman"/>
+        <a:font script="Uigh" typeface="Microsoft Uighur"/>
+        <a:font script="Geor" typeface="Sylfaen"/>
+      </a:majorFont>
+      <a:minorFont>
+        <a:latin typeface="Calibri" panose="020F0502020204030204"/>
+        <a:ea typeface=""/>
+        <a:cs typeface=""/>
+        <a:font script="Jpan" typeface="ＭＳ Ｐゴシック"/>
+        <a:font script="Hang" typeface="맑은 고딕"/>
+        <a:font script="Hans" typeface="宋体"/>
+        <a:font script="Hant" typeface="新細明體"/>
+        <a:font script="Arab" typeface="Arial"/>
+        <a:font script="Hebr" typeface="Arial"/>
+        <a:font script="Thai" typeface="Cordia New"/>
+        <a:font script="Ethi" typeface="Nyala"/>
+        <a:font script="Beng" typeface="Vrinda"/>
+        <a:font script="Gujr" typeface="Shruti"/>
+        <a:font script="Khmr" typeface="DaunPenh"/>
+        <a:font script="Knda" typeface="Tunga"/>
+        <a:font script="Guru" typeface="Raavi"/>
+        <a:font script="Cans" typeface="Euphemia"/>
+        <a:font script="Cher" typeface="Plantagenet Cherokee"/>
+        <a:font script="Yiii" typeface="Microsoft Yi Baiti"/>
+        <a:font script="Tibt" typeface="Microsoft Himalaya"/>
+        <a:font script="Thaa" typeface="MV Boli"/>
+        <a:font script="Deva" typeface="Mangal"/>
+        <a:font script="Telu" typeface="Gautami"/>
+        <a:font script="Taml" typeface="Latha"/>
+        <a:font script="Syrc" typeface="Estrangelo Edessa"/>
+        <a:font script="Orya" typeface="Kalinga"/>
+        <a:font script="Mlym" typeface="Kartika"/>
+        <a:font script="Laoo" typeface="DokChampa"/>
+        <a:font script="Sinh" typeface="Iskoola Pota"/>
+        <a:font script="Mong" typeface="Mongolian Baiti"/>
+        <a:font script="Viet" typeface="Arial"/>
+        <a:font script="Uigh" typeface="Microsoft Uighur"/>
+        <a:font script="Geor" typeface="Sylfaen"/>
+      </a:minorFont>
+    </a:fontScheme>
+    <a:fmtScheme name="Office">
+      <a:fillStyleLst>
+        <a:solidFill>
+          <a:schemeClr val="phClr"/>
+        </a:solidFill>
+        <a:gradFill rotWithShape="1">
+          <a:gsLst>
+            <a:gs pos="0">
+              <a:schemeClr val="phClr">
+                <a:lumMod val="110000"/>
+                <a:satMod val="105000"/>
+                <a:tint val="67000"/>
+              </a:schemeClr>
+            </a:gs>
+            <a:gs pos="50000">
+              <a:schemeClr val="phClr">
+                <a:lumMod val="105000"/>
+                <a:satMod val="103000"/>
+                <a:tint val="73000"/>
+              </a:schemeClr>
+            </a:gs>
+            <a:gs pos="100000">
+              <a:schemeClr val="phClr">
+                <a:lumMod val="105000"/>
+                <a:satMod val="109000"/>
+                <a:tint val="81000"/>
+              </a:schemeClr>
+            </a:gs>
+          </a:gsLst>
+          <a:lin ang="5400000" scaled="0"/>
+        </a:gradFill>
+        <a:gradFill rotWithShape="1">
+          <a:gsLst>
+            <a:gs pos="0">
+              <a:schemeClr val="phClr">
+                <a:satMod val="103000"/>
+                <a:lumMod val="102000"/>
+                <a:tint val="94000"/>
+              </a:schemeClr>
+            </a:gs>
+            <a:gs pos="50000">
+              <a:schemeClr val="phClr">
+                <a:satMod val="110000"/>
+                <a:lumMod val="100000"/>
+                <a:shade val="100000"/>
+              </a:schemeClr>
+            </a:gs>
+            <a:gs pos="100000">
+              <a:schemeClr val="phClr">
+                <a:lumMod val="99000"/>
+                <a:satMod val="120000"/>
+                <a:shade val="78000"/>
+              </a:schemeClr>
+            </a:gs>
+          </a:gsLst>
+          <a:lin ang="5400000" scaled="0"/>
+        </a:gradFill>
+      </a:fillStyleLst>
+      <a:lnStyleLst>
+        <a:ln w="6350" cap="flat" cmpd="sng" algn="ctr">
+          <a:solidFill>
+            <a:schemeClr val="phClr"/>
+          </a:solidFill>
+          <a:prstDash val="solid"/>
+          <a:miter lim="800000"/>
+        </a:ln>
+        <a:ln w="12700" cap="flat" cmpd="sng" algn="ctr">
+          <a:solidFill>
+            <a:schemeClr val="phClr"/>
+          </a:solidFill>
+          <a:prstDash val="solid"/>
+          <a:miter lim="800000"/>
+        </a:ln>
+        <a:ln w="19050" cap="flat" cmpd="sng" algn="ctr">
+          <a:solidFill>
+            <a:schemeClr val="phClr"/>
+          </a:solidFill>
+          <a:prstDash val="solid"/>
+          <a:miter lim="800000"/>
+        </a:ln>
+      </a:lnStyleLst>
+      <a:effectStyleLst>
+        <a:effectStyle>
+          <a:effectLst/>
+        </a:effectStyle>
+        <a:effectStyle>
+          <a:effectLst/>
+        </a:effectStyle>
+        <a:effectStyle>
+          <a:effectLst>
+            <a:outerShdw blurRad="57150" dist="19050" dir="5400000" algn="ctr" rotWithShape="0">
+              <a:srgbClr val="000000">
+                <a:alpha val="63000"/>
+              </a:srgbClr>
+            </a:outerShdw>
+          </a:effectLst>
+        </a:effectStyle>
+      </a:effectStyleLst>
+      <a:bgFillStyleLst>
+        <a:solidFill>
+          <a:schemeClr val="phClr"/>
+        </a:solidFill>
+        <a:solidFill>
+          <a:schemeClr val="phClr">
+            <a:tint val="95000"/>
+            <a:satMod val="170000"/>
+          </a:schemeClr>
+        </a:solidFill>
+        <a:gradFill rotWithShape="1">
+          <a:gsLst>
+            <a:gs pos="0">
+              <a:schemeClr val="phClr">
+                <a:tint val="93000"/>
+                <a:satMod val="150000"/>
+                <a:shade val="98000"/>
+                <a:lumMod val="102000"/>
+              </a:schemeClr>
+            </a:gs>
+            <a:gs pos="50000">
+              <a:schemeClr val="phClr">
+                <a:tint val="98000"/>
+                <a:satMod val="130000"/>
+                <a:shade val="90000"/>
+                <a:lumMod val="103000"/>
+              </a:schemeClr>
+            </a:gs>
+            <a:gs pos="100000">
+              <a:schemeClr val="phClr">
+                <a:shade val="63000"/>
+                <a:satMod val="120000"/>
+              </a:schemeClr>
+            </a:gs>
+          </a:gsLst>
+          <a:lin ang="5400000" scaled="0"/>
+        </a:gradFill>
+      </a:bgFillStyleLst>
+    </a:fmtScheme>
+  </a:themeElements>
+  <a:objectDefaults/>
+  <a:extraClrSchemeLst/>
+  <a:extLst>
+    <a:ext uri="{05A4C25C-085E-4340-85A3-A5531E510DB2}">
+      <thm15:themeFamily xmlns:thm15="http://schemas.microsoft.com/office/thememl/2012/main" name="Office Theme" id="{62F939B6-93AF-4DB8-9C6B-D6C7DFDC589F}" vid="{4A3C46E8-61CC-4603-A589-7422A47A8E4A}"/>
+    </a:ext>
+  </a:extLst>
+</a:theme>
+</file>
+
+<file path=ppt/theme/theme4.xml><?xml version="1.0" encoding="utf-8"?>
+<a:theme xmlns:a="http://schemas.openxmlformats.org/drawingml/2006/main" name="Office テーマ">
+  <a:themeElements>
+    <a:clrScheme name="Office">
+      <a:dk1>
+        <a:sysClr val="windowText" lastClr="000000"/>
+      </a:dk1>
+      <a:lt1>
+        <a:sysClr val="window" lastClr="FFFFFF"/>
+      </a:lt1>
+      <a:dk2>
+        <a:srgbClr val="44546A"/>
+      </a:dk2>
+      <a:lt2>
+        <a:srgbClr val="E7E6E6"/>
+      </a:lt2>
+      <a:accent1>
+        <a:srgbClr val="5B9BD5"/>
+      </a:accent1>
+      <a:accent2>
+        <a:srgbClr val="ED7D31"/>
+      </a:accent2>
+      <a:accent3>
+        <a:srgbClr val="A5A5A5"/>
+      </a:accent3>
+      <a:accent4>
+        <a:srgbClr val="FFC000"/>
+      </a:accent4>
+      <a:accent5>
+        <a:srgbClr val="4472C4"/>
+      </a:accent5>
+      <a:accent6>
+        <a:srgbClr val="70AD47"/>
+      </a:accent6>
+      <a:hlink>
+        <a:srgbClr val="0563C1"/>
+      </a:hlink>
+      <a:folHlink>
+        <a:srgbClr val="954F72"/>
+      </a:folHlink>
+    </a:clrScheme>
+    <a:fontScheme name="Office">
+      <a:majorFont>
+        <a:latin typeface="Calibri Light" panose="020F0302020204030204"/>
+        <a:ea typeface=""/>
+        <a:cs typeface=""/>
+        <a:font script="Jpan" typeface="ＭＳ Ｐゴシック"/>
+        <a:font script="Hang" typeface="맑은 고딕"/>
+        <a:font script="Hans" typeface="宋体"/>
+        <a:font script="Hant" typeface="新細明體"/>
+        <a:font script="Arab" typeface="Times New Roman"/>
+        <a:font script="Hebr" typeface="Times New Roman"/>
+        <a:font script="Thai" typeface="Angsana New"/>
+        <a:font script="Ethi" typeface="Nyala"/>
+        <a:font script="Beng" typeface="Vrinda"/>
+        <a:font script="Gujr" typeface="Shruti"/>
+        <a:font script="Khmr" typeface="MoolBoran"/>
+        <a:font script="Knda" typeface="Tunga"/>
+        <a:font script="Guru" typeface="Raavi"/>
+        <a:font script="Cans" typeface="Euphemia"/>
+        <a:font script="Cher" typeface="Plantagenet Cherokee"/>
+        <a:font script="Yiii" typeface="Microsoft Yi Baiti"/>
+        <a:font script="Tibt" typeface="Microsoft Himalaya"/>
+        <a:font script="Thaa" typeface="MV Boli"/>
+        <a:font script="Deva" typeface="Mangal"/>
+        <a:font script="Telu" typeface="Gautami"/>
+        <a:font script="Taml" typeface="Latha"/>
+        <a:font script="Syrc" typeface="Estrangelo Edessa"/>
+        <a:font script="Orya" typeface="Kalinga"/>
+        <a:font script="Mlym" typeface="Kartika"/>
+        <a:font script="Laoo" typeface="DokChampa"/>
+        <a:font script="Sinh" typeface="Iskoola Pota"/>
+        <a:font script="Mong" typeface="Mongolian Baiti"/>
+        <a:font script="Viet" typeface="Times New Roman"/>
+        <a:font script="Uigh" typeface="Microsoft Uighur"/>
+        <a:font script="Geor" typeface="Sylfaen"/>
+      </a:majorFont>
+      <a:minorFont>
+        <a:latin typeface="Calibri" panose="020F0502020204030204"/>
+        <a:ea typeface=""/>
+        <a:cs typeface=""/>
+        <a:font script="Jpan" typeface="ＭＳ Ｐゴシック"/>
+        <a:font script="Hang" typeface="맑은 고딕"/>
+        <a:font script="Hans" typeface="宋体"/>
+        <a:font script="Hant" typeface="新細明體"/>
+        <a:font script="Arab" typeface="Arial"/>
+        <a:font script="Hebr" typeface="Arial"/>
+        <a:font script="Thai" typeface="Cordia New"/>
+        <a:font script="Ethi" typeface="Nyala"/>
+        <a:font script="Beng" typeface="Vrinda"/>
+        <a:font script="Gujr" typeface="Shruti"/>
+        <a:font script="Khmr" typeface="DaunPenh"/>
+        <a:font script="Knda" typeface="Tunga"/>
+        <a:font script="Guru" typeface="Raavi"/>
+        <a:font script="Cans" typeface="Euphemia"/>
+        <a:font script="Cher" typeface="Plantagenet Cherokee"/>
+        <a:font script="Yiii" typeface="Microsoft Yi Baiti"/>
+        <a:font script="Tibt" typeface="Microsoft Himalaya"/>
+        <a:font script="Thaa" typeface="MV Boli"/>
+        <a:font script="Deva" typeface="Mangal"/>
+        <a:font script="Telu" typeface="Gautami"/>
+        <a:font script="Taml" typeface="Latha"/>
+        <a:font script="Syrc" typeface="Estrangelo Edessa"/>
+        <a:font script="Orya" typeface="Kalinga"/>
+        <a:font script="Mlym" typeface="Kartika"/>
+        <a:font script="Laoo" typeface="DokChampa"/>
+        <a:font script="Sinh" typeface="Iskoola Pota"/>
+        <a:font script="Mong" typeface="Mongolian Baiti"/>
+        <a:font script="Viet" typeface="Arial"/>
+        <a:font script="Uigh" typeface="Microsoft Uighur"/>
+        <a:font script="Geor" typeface="Sylfaen"/>
+      </a:minorFont>
+    </a:fontScheme>
+    <a:fmtScheme name="Office">
+      <a:fillStyleLst>
+        <a:solidFill>
+          <a:schemeClr val="phClr"/>
+        </a:solidFill>
+        <a:gradFill rotWithShape="1">
+          <a:gsLst>
+            <a:gs pos="0">
+              <a:schemeClr val="phClr">
+                <a:lumMod val="110000"/>
+                <a:satMod val="105000"/>
+                <a:tint val="67000"/>
+              </a:schemeClr>
+            </a:gs>
+            <a:gs pos="50000">
+              <a:schemeClr val="phClr">
+                <a:lumMod val="105000"/>
+                <a:satMod val="103000"/>
+                <a:tint val="73000"/>
+              </a:schemeClr>
+            </a:gs>
+            <a:gs pos="100000">
+              <a:schemeClr val="phClr">
+                <a:lumMod val="105000"/>
+                <a:satMod val="109000"/>
+                <a:tint val="81000"/>
+              </a:schemeClr>
+            </a:gs>
+          </a:gsLst>
+          <a:lin ang="5400000" scaled="0"/>
+        </a:gradFill>
+        <a:gradFill rotWithShape="1">
+          <a:gsLst>
+            <a:gs pos="0">
+              <a:schemeClr val="phClr">
+                <a:satMod val="103000"/>
+                <a:lumMod val="102000"/>
+                <a:tint val="94000"/>
+              </a:schemeClr>
+            </a:gs>
+            <a:gs pos="50000">
+              <a:schemeClr val="phClr">
+                <a:satMod val="110000"/>
+                <a:lumMod val="100000"/>
+                <a:shade val="100000"/>
+              </a:schemeClr>
+            </a:gs>
+            <a:gs pos="100000">
+              <a:schemeClr val="phClr">
+                <a:lumMod val="99000"/>
+                <a:satMod val="120000"/>
+                <a:shade val="78000"/>
+              </a:schemeClr>
+            </a:gs>
+          </a:gsLst>
+          <a:lin ang="5400000" scaled="0"/>
+        </a:gradFill>
+      </a:fillStyleLst>
+      <a:lnStyleLst>
+        <a:ln w="6350" cap="flat" cmpd="sng" algn="ctr">
+          <a:solidFill>
+            <a:schemeClr val="phClr"/>
+          </a:solidFill>
+          <a:prstDash val="solid"/>
+          <a:miter lim="800000"/>
+        </a:ln>
+        <a:ln w="12700" cap="flat" cmpd="sng" algn="ctr">
+          <a:solidFill>
+            <a:schemeClr val="phClr"/>
+          </a:solidFill>
+          <a:prstDash val="solid"/>
+          <a:miter lim="800000"/>
+        </a:ln>
+        <a:ln w="19050" cap="flat" cmpd="sng" algn="ctr">
+          <a:solidFill>
+            <a:schemeClr val="phClr"/>
+          </a:solidFill>
+          <a:prstDash val="solid"/>
+          <a:miter lim="800000"/>
+        </a:ln>
+      </a:lnStyleLst>
+      <a:effectStyleLst>
+        <a:effectStyle>
+          <a:effectLst/>
+        </a:effectStyle>
+        <a:effectStyle>
+          <a:effectLst/>
+        </a:effectStyle>
+        <a:effectStyle>
+          <a:effectLst>
+            <a:outerShdw blurRad="57150" dist="19050" dir="5400000" algn="ctr" rotWithShape="0">
+              <a:srgbClr val="000000">
+                <a:alpha val="63000"/>
+              </a:srgbClr>
+            </a:outerShdw>
+          </a:effectLst>
+        </a:effectStyle>
+      </a:effectStyleLst>
+      <a:bgFillStyleLst>
+        <a:solidFill>
+          <a:schemeClr val="phClr"/>
+        </a:solidFill>
+        <a:solidFill>
+          <a:schemeClr val="phClr">
+            <a:tint val="95000"/>
+            <a:satMod val="170000"/>
+          </a:schemeClr>
+        </a:solidFill>
+        <a:gradFill rotWithShape="1">
+          <a:gsLst>
+            <a:gs pos="0">
+              <a:schemeClr val="phClr">
+                <a:tint val="93000"/>
+                <a:satMod val="150000"/>
+                <a:shade val="98000"/>
+                <a:lumMod val="102000"/>
+              </a:schemeClr>
+            </a:gs>
+            <a:gs pos="50000">
+              <a:schemeClr val="phClr">
+                <a:tint val="98000"/>
+                <a:satMod val="130000"/>
+                <a:shade val="90000"/>
+                <a:lumMod val="103000"/>
+              </a:schemeClr>
+            </a:gs>
+            <a:gs pos="100000">
+              <a:schemeClr val="phClr">
+                <a:shade val="63000"/>
+                <a:satMod val="120000"/>
+              </a:schemeClr>
+            </a:gs>
+          </a:gsLst>
+          <a:lin ang="5400000" scaled="0"/>
+        </a:gradFill>
+      </a:bgFillStyleLst>
+    </a:fmtScheme>
+  </a:themeElements>
+  <a:objectDefaults/>
+  <a:extraClrSchemeLst/>
+  <a:extLst>
+    <a:ext uri="{05A4C25C-085E-4340-85A3-A5531E510DB2}">
+      <thm15:themeFamily xmlns:thm15="http://schemas.microsoft.com/office/thememl/2012/main" name="Office Theme" id="{62F939B6-93AF-4DB8-9C6B-D6C7DFDC589F}" vid="{4A3C46E8-61CC-4603-A589-7422A47A8E4A}"/>
+    </a:ext>
+  </a:extLst>
+</a:theme>
 </file>
--- a/LINEOA媒体最新情報_2026年9月トレンドレポート.pptx
+++ b/LINEOA媒体最新情報_2026年9月トレンドレポート.pptx
@@ -3710,7 +3710,7 @@
                 <a:ea typeface="メイリオ"/>
                 <a:cs typeface="メイリオ"/>
               </a:rPr>
-              <a:t>3. LINE公式アカウント「分析」データ参照期間 過去36カ月に変更（告知延期中）</a:t>
+              <a:t>3. LINE公式アカウント「分析」データ参照期間 過去36カ月に変更</a:t>
             </a:r>
           </a:p>
         </p:txBody>
@@ -3828,7 +3828,7 @@
                 <a:ea typeface="メイリオ"/>
                 <a:cs typeface="メイリオ"/>
               </a:rPr>
-              <a:t>4. プロモーションスタンプ 効果改善アップデート（サジェスト面 無料スタンプ表示条件緩和）</a:t>
+              <a:t>4. プロモーションスタンプ 効果改善アップデート</a:t>
             </a:r>
           </a:p>
         </p:txBody>
@@ -4064,7 +4064,7 @@
                 <a:ea typeface="メイリオ"/>
                 <a:cs typeface="メイリオ"/>
               </a:rPr>
-              <a:t>6. LINEオープンキャンペーン（アンケート型）26年10-12月 期間限定キャンペーン</a:t>
+              <a:t>6. LINEオープンキャンペーン 26年10-12月 期間限定キャンペーン</a:t>
             </a:r>
           </a:p>
         </p:txBody>
@@ -7387,7 +7387,7 @@
                 <a:ea typeface="メイリオ"/>
                 <a:cs typeface="メイリオ"/>
               </a:rPr>
-              <a:t>プロモーションスタンプ 効果改善アップデート（サジェスト面 無料スタンプ表示条件緩和）</a:t>
+              <a:t>プロモーションスタンプ 効果改善アップデート</a:t>
             </a:r>
           </a:p>
         </p:txBody>
@@ -9432,7 +9432,7 @@
                 <a:ea typeface="メイリオ"/>
                 <a:cs typeface="メイリオ"/>
               </a:rPr>
-              <a:t>LINEオープンキャンペーン（アンケート型）26年10-12月 期間限定キャンペーン</a:t>
+              <a:t>LINEオープンキャンペーン 26年10-12月 期間限定キャンペーン</a:t>
             </a:r>
           </a:p>
         </p:txBody>

--- a/LINEOA媒体最新情報_2026年9月トレンドレポート.pptx
+++ b/LINEOA媒体最新情報_2026年9月トレンドレポート.pptx
@@ -4268,14 +4268,14 @@
         </p:nvSpPr>
         <p:spPr>
           <a:xfrm>
-            <a:off x="566928" y="640080"/>
-            <a:ext cx="777240" cy="256032"/>
-          </a:xfrm>
-          <a:prstGeom prst="rect">
-            <a:avLst/>
-          </a:prstGeom>
-          <a:solidFill>
-            <a:srgbClr val="10253F"/>
+            <a:off x="566928" y="685800"/>
+            <a:ext cx="8878824" cy="502920"/>
+          </a:xfrm>
+          <a:prstGeom prst="rect">
+            <a:avLst/>
+          </a:prstGeom>
+          <a:solidFill>
+            <a:srgbClr val="F2F2F2"/>
           </a:solidFill>
           <a:ln>
             <a:noFill/>
@@ -4312,126 +4312,8 @@
         </p:nvSpPr>
         <p:spPr>
           <a:xfrm>
-            <a:off x="566928" y="640080"/>
-            <a:ext cx="777240" cy="256032"/>
-          </a:xfrm>
-          <a:prstGeom prst="rect">
-            <a:avLst/>
-          </a:prstGeom>
-          <a:noFill/>
-        </p:spPr>
-        <p:txBody>
-          <a:bodyPr wrap="square" anchor="ctr" lIns="0" rIns="0" tIns="0" bIns="0">
-            <a:spAutoFit/>
-          </a:bodyPr>
-          <a:lstStyle/>
-          <a:p>
-            <a:pPr algn="ctr"/>
-            <a:r>
-              <a:rPr sz="900" b="1">
-                <a:solidFill>
-                  <a:srgbClr val="FFFFFF"/>
-                </a:solidFill>
-                <a:latin typeface="メイリオ"/>
-                <a:ea typeface="メイリオ"/>
-                <a:cs typeface="メイリオ"/>
-              </a:rPr>
-              <a:t>9月号</a:t>
-            </a:r>
-          </a:p>
-        </p:txBody>
-      </p:sp>
-      <p:sp>
-        <p:nvSpPr>
-          <p:cNvPr id="5" name="TextBox 4"/>
-          <p:cNvSpPr txBox="1"/>
-          <p:nvPr/>
-        </p:nvSpPr>
-        <p:spPr>
-          <a:xfrm>
-            <a:off x="1481328" y="640080"/>
-            <a:ext cx="8046720" cy="256032"/>
-          </a:xfrm>
-          <a:prstGeom prst="rect">
-            <a:avLst/>
-          </a:prstGeom>
-          <a:noFill/>
-        </p:spPr>
-        <p:txBody>
-          <a:bodyPr wrap="square" anchor="ctr" lIns="0" rIns="0" tIns="0" bIns="0">
-            <a:spAutoFit/>
-          </a:bodyPr>
-          <a:lstStyle/>
-          <a:p>
-            <a:pPr algn="l"/>
-            <a:r>
-              <a:rPr sz="950" b="0">
-                <a:solidFill>
-                  <a:srgbClr val="494848"/>
-                </a:solidFill>
-                <a:latin typeface="メイリオ"/>
-                <a:ea typeface="メイリオ"/>
-                <a:cs typeface="メイリオ"/>
-              </a:rPr>
-              <a:t>対象業界：－　　フェーズ：－　　代理店限定：－　　展開禁止：－</a:t>
-            </a:r>
-          </a:p>
-        </p:txBody>
-      </p:sp>
-      <p:sp>
-        <p:nvSpPr>
-          <p:cNvPr id="6" name="Rectangle 5"/>
-          <p:cNvSpPr/>
-          <p:nvPr/>
-        </p:nvSpPr>
-        <p:spPr>
-          <a:xfrm>
-            <a:off x="566928" y="1005840"/>
-            <a:ext cx="8878824" cy="566928"/>
-          </a:xfrm>
-          <a:prstGeom prst="rect">
-            <a:avLst/>
-          </a:prstGeom>
-          <a:solidFill>
-            <a:srgbClr val="F2F2F2"/>
-          </a:solidFill>
-          <a:ln>
-            <a:noFill/>
-          </a:ln>
-          <a:effectLst/>
-        </p:spPr>
-        <p:style>
-          <a:lnRef idx="1">
-            <a:schemeClr val="accent1"/>
-          </a:lnRef>
-          <a:fillRef idx="3">
-            <a:schemeClr val="accent1"/>
-          </a:fillRef>
-          <a:effectRef idx="2">
-            <a:schemeClr val="accent1"/>
-          </a:effectRef>
-          <a:fontRef idx="minor">
-            <a:schemeClr val="lt1"/>
-          </a:fontRef>
-        </p:style>
-        <p:txBody>
-          <a:bodyPr rtlCol="0" anchor="ctr"/>
-          <a:lstStyle/>
-          <a:p>
-            <a:pPr algn="ctr"/>
-          </a:p>
-        </p:txBody>
-      </p:sp>
-      <p:sp>
-        <p:nvSpPr>
-          <p:cNvPr id="7" name="TextBox 6"/>
-          <p:cNvSpPr txBox="1"/>
-          <p:nvPr/>
-        </p:nvSpPr>
-        <p:spPr>
-          <a:xfrm>
-            <a:off x="749808" y="1005840"/>
-            <a:ext cx="8513064" cy="566928"/>
+            <a:off x="749808" y="685800"/>
+            <a:ext cx="8513064" cy="502920"/>
           </a:xfrm>
           <a:prstGeom prst="rect">
             <a:avLst/>
@@ -4465,14 +4347,14 @@
       </p:sp>
       <p:sp>
         <p:nvSpPr>
-          <p:cNvPr id="8" name="Rectangle 7"/>
+          <p:cNvPr id="5" name="Rectangle 4"/>
           <p:cNvSpPr/>
           <p:nvPr/>
         </p:nvSpPr>
         <p:spPr>
           <a:xfrm>
-            <a:off x="566928" y="1737360"/>
-            <a:ext cx="4347972" cy="2194560"/>
+            <a:off x="566928" y="1325880"/>
+            <a:ext cx="4347972" cy="2331720"/>
           </a:xfrm>
           <a:prstGeom prst="rect">
             <a:avLst/>
@@ -4511,13 +4393,13 @@
       </p:sp>
       <p:sp>
         <p:nvSpPr>
-          <p:cNvPr id="9" name="Rectangle 8"/>
+          <p:cNvPr id="6" name="Rectangle 5"/>
           <p:cNvSpPr/>
           <p:nvPr/>
         </p:nvSpPr>
         <p:spPr>
           <a:xfrm>
-            <a:off x="566928" y="1737360"/>
+            <a:off x="566928" y="1325880"/>
             <a:ext cx="4347972" cy="310896"/>
           </a:xfrm>
           <a:prstGeom prst="rect">
@@ -4555,13 +4437,13 @@
       </p:sp>
       <p:sp>
         <p:nvSpPr>
-          <p:cNvPr id="10" name="TextBox 9"/>
+          <p:cNvPr id="7" name="TextBox 6"/>
           <p:cNvSpPr txBox="1"/>
           <p:nvPr/>
         </p:nvSpPr>
         <p:spPr>
           <a:xfrm>
-            <a:off x="566928" y="1737360"/>
+            <a:off x="566928" y="1325880"/>
             <a:ext cx="4347972" cy="310896"/>
           </a:xfrm>
           <a:prstGeom prst="rect">
@@ -4592,14 +4474,14 @@
       </p:sp>
       <p:sp>
         <p:nvSpPr>
-          <p:cNvPr id="11" name="TextBox 10"/>
+          <p:cNvPr id="8" name="TextBox 7"/>
           <p:cNvSpPr txBox="1"/>
           <p:nvPr/>
         </p:nvSpPr>
         <p:spPr>
           <a:xfrm>
-            <a:off x="731520" y="2139696"/>
-            <a:ext cx="4018788" cy="1700784"/>
+            <a:off x="731520" y="1728216"/>
+            <a:ext cx="4018788" cy="1837944"/>
           </a:xfrm>
           <a:prstGeom prst="rect">
             <a:avLst/>
@@ -4678,14 +4560,14 @@
       </p:sp>
       <p:sp>
         <p:nvSpPr>
-          <p:cNvPr id="12" name="Rectangle 11"/>
+          <p:cNvPr id="9" name="Rectangle 8"/>
           <p:cNvSpPr/>
           <p:nvPr/>
         </p:nvSpPr>
         <p:spPr>
           <a:xfrm>
-            <a:off x="5097780" y="1737360"/>
-            <a:ext cx="4347972" cy="2194560"/>
+            <a:off x="5097780" y="1325880"/>
+            <a:ext cx="4347972" cy="2331720"/>
           </a:xfrm>
           <a:prstGeom prst="rect">
             <a:avLst/>
@@ -4724,13 +4606,13 @@
       </p:sp>
       <p:sp>
         <p:nvSpPr>
-          <p:cNvPr id="13" name="Rectangle 12"/>
+          <p:cNvPr id="10" name="Rectangle 9"/>
           <p:cNvSpPr/>
           <p:nvPr/>
         </p:nvSpPr>
         <p:spPr>
           <a:xfrm>
-            <a:off x="5097780" y="1737360"/>
+            <a:off x="5097780" y="1325880"/>
             <a:ext cx="4347972" cy="310896"/>
           </a:xfrm>
           <a:prstGeom prst="rect">
@@ -4768,13 +4650,13 @@
       </p:sp>
       <p:sp>
         <p:nvSpPr>
-          <p:cNvPr id="14" name="TextBox 13"/>
+          <p:cNvPr id="11" name="TextBox 10"/>
           <p:cNvSpPr txBox="1"/>
           <p:nvPr/>
         </p:nvSpPr>
         <p:spPr>
           <a:xfrm>
-            <a:off x="5097780" y="1737360"/>
+            <a:off x="5097780" y="1325880"/>
             <a:ext cx="4347972" cy="310896"/>
           </a:xfrm>
           <a:prstGeom prst="rect">
@@ -4805,14 +4687,14 @@
       </p:sp>
       <p:sp>
         <p:nvSpPr>
-          <p:cNvPr id="15" name="TextBox 14"/>
+          <p:cNvPr id="12" name="TextBox 11"/>
           <p:cNvSpPr txBox="1"/>
           <p:nvPr/>
         </p:nvSpPr>
         <p:spPr>
           <a:xfrm>
-            <a:off x="5262372" y="2139696"/>
-            <a:ext cx="4018788" cy="1700784"/>
+            <a:off x="5262372" y="1728216"/>
+            <a:ext cx="4018788" cy="1837944"/>
           </a:xfrm>
           <a:prstGeom prst="rect">
             <a:avLst/>
@@ -4849,14 +4731,14 @@
       </p:sp>
       <p:sp>
         <p:nvSpPr>
-          <p:cNvPr id="16" name="Rectangle 15"/>
+          <p:cNvPr id="13" name="Rectangle 12"/>
           <p:cNvSpPr/>
           <p:nvPr/>
         </p:nvSpPr>
         <p:spPr>
           <a:xfrm>
-            <a:off x="566928" y="4069080"/>
-            <a:ext cx="4347972" cy="2194560"/>
+            <a:off x="566928" y="3794760"/>
+            <a:ext cx="4347972" cy="2331720"/>
           </a:xfrm>
           <a:prstGeom prst="rect">
             <a:avLst/>
@@ -4895,13 +4777,13 @@
       </p:sp>
       <p:sp>
         <p:nvSpPr>
-          <p:cNvPr id="17" name="Rectangle 16"/>
+          <p:cNvPr id="14" name="Rectangle 13"/>
           <p:cNvSpPr/>
           <p:nvPr/>
         </p:nvSpPr>
         <p:spPr>
           <a:xfrm>
-            <a:off x="566928" y="4069080"/>
+            <a:off x="566928" y="3794760"/>
             <a:ext cx="4347972" cy="310896"/>
           </a:xfrm>
           <a:prstGeom prst="rect">
@@ -4939,13 +4821,13 @@
       </p:sp>
       <p:sp>
         <p:nvSpPr>
-          <p:cNvPr id="18" name="TextBox 17"/>
+          <p:cNvPr id="15" name="TextBox 14"/>
           <p:cNvSpPr txBox="1"/>
           <p:nvPr/>
         </p:nvSpPr>
         <p:spPr>
           <a:xfrm>
-            <a:off x="566928" y="4069080"/>
+            <a:off x="566928" y="3794760"/>
             <a:ext cx="4347972" cy="310896"/>
           </a:xfrm>
           <a:prstGeom prst="rect">
@@ -4976,14 +4858,14 @@
       </p:sp>
       <p:sp>
         <p:nvSpPr>
-          <p:cNvPr id="19" name="TextBox 18"/>
+          <p:cNvPr id="16" name="TextBox 15"/>
           <p:cNvSpPr txBox="1"/>
           <p:nvPr/>
         </p:nvSpPr>
         <p:spPr>
           <a:xfrm>
-            <a:off x="731520" y="4471416"/>
-            <a:ext cx="4018788" cy="1700784"/>
+            <a:off x="731520" y="4197096"/>
+            <a:ext cx="4018788" cy="1837944"/>
           </a:xfrm>
           <a:prstGeom prst="rect">
             <a:avLst/>
@@ -5020,14 +4902,14 @@
       </p:sp>
       <p:sp>
         <p:nvSpPr>
-          <p:cNvPr id="20" name="Rectangle 19"/>
+          <p:cNvPr id="17" name="Rectangle 16"/>
           <p:cNvSpPr/>
           <p:nvPr/>
         </p:nvSpPr>
         <p:spPr>
           <a:xfrm>
-            <a:off x="5097780" y="4069080"/>
-            <a:ext cx="4347972" cy="2194560"/>
+            <a:off x="5097780" y="3794760"/>
+            <a:ext cx="4347972" cy="2331720"/>
           </a:xfrm>
           <a:prstGeom prst="rect">
             <a:avLst/>
@@ -5066,13 +4948,13 @@
       </p:sp>
       <p:sp>
         <p:nvSpPr>
-          <p:cNvPr id="21" name="Rectangle 20"/>
+          <p:cNvPr id="18" name="Rectangle 17"/>
           <p:cNvSpPr/>
           <p:nvPr/>
         </p:nvSpPr>
         <p:spPr>
           <a:xfrm>
-            <a:off x="5097780" y="4069080"/>
+            <a:off x="5097780" y="3794760"/>
             <a:ext cx="4347972" cy="310896"/>
           </a:xfrm>
           <a:prstGeom prst="rect">
@@ -5110,13 +4992,13 @@
       </p:sp>
       <p:sp>
         <p:nvSpPr>
-          <p:cNvPr id="22" name="TextBox 21"/>
+          <p:cNvPr id="19" name="TextBox 18"/>
           <p:cNvSpPr txBox="1"/>
           <p:nvPr/>
         </p:nvSpPr>
         <p:spPr>
           <a:xfrm>
-            <a:off x="5097780" y="4069080"/>
+            <a:off x="5097780" y="3794760"/>
             <a:ext cx="4347972" cy="310896"/>
           </a:xfrm>
           <a:prstGeom prst="rect">
@@ -5147,14 +5029,14 @@
       </p:sp>
       <p:sp>
         <p:nvSpPr>
-          <p:cNvPr id="23" name="TextBox 22"/>
+          <p:cNvPr id="20" name="TextBox 19"/>
           <p:cNvSpPr txBox="1"/>
           <p:nvPr/>
         </p:nvSpPr>
         <p:spPr>
           <a:xfrm>
-            <a:off x="5262372" y="4471416"/>
-            <a:ext cx="4018788" cy="1700784"/>
+            <a:off x="5262372" y="4197096"/>
+            <a:ext cx="4018788" cy="1837944"/>
           </a:xfrm>
           <a:prstGeom prst="rect">
             <a:avLst/>
@@ -5191,14 +5073,14 @@
       </p:sp>
       <p:sp>
         <p:nvSpPr>
-          <p:cNvPr id="24" name="TextBox 23"/>
+          <p:cNvPr id="21" name="TextBox 20"/>
           <p:cNvSpPr txBox="1"/>
           <p:nvPr/>
         </p:nvSpPr>
         <p:spPr>
           <a:xfrm>
-            <a:off x="566928" y="6272784"/>
-            <a:ext cx="8686800" cy="219456"/>
+            <a:off x="566928" y="6217920"/>
+            <a:ext cx="8686800" cy="201168"/>
           </a:xfrm>
           <a:prstGeom prst="rect">
             <a:avLst/>
@@ -5301,14 +5183,14 @@
         </p:nvSpPr>
         <p:spPr>
           <a:xfrm>
-            <a:off x="566928" y="640080"/>
-            <a:ext cx="777240" cy="256032"/>
-          </a:xfrm>
-          <a:prstGeom prst="rect">
-            <a:avLst/>
-          </a:prstGeom>
-          <a:solidFill>
-            <a:srgbClr val="10253F"/>
+            <a:off x="566928" y="685800"/>
+            <a:ext cx="8878824" cy="502920"/>
+          </a:xfrm>
+          <a:prstGeom prst="rect">
+            <a:avLst/>
+          </a:prstGeom>
+          <a:solidFill>
+            <a:srgbClr val="F2F2F2"/>
           </a:solidFill>
           <a:ln>
             <a:noFill/>
@@ -5345,126 +5227,8 @@
         </p:nvSpPr>
         <p:spPr>
           <a:xfrm>
-            <a:off x="566928" y="640080"/>
-            <a:ext cx="777240" cy="256032"/>
-          </a:xfrm>
-          <a:prstGeom prst="rect">
-            <a:avLst/>
-          </a:prstGeom>
-          <a:noFill/>
-        </p:spPr>
-        <p:txBody>
-          <a:bodyPr wrap="square" anchor="ctr" lIns="0" rIns="0" tIns="0" bIns="0">
-            <a:spAutoFit/>
-          </a:bodyPr>
-          <a:lstStyle/>
-          <a:p>
-            <a:pPr algn="ctr"/>
-            <a:r>
-              <a:rPr sz="900" b="1">
-                <a:solidFill>
-                  <a:srgbClr val="FFFFFF"/>
-                </a:solidFill>
-                <a:latin typeface="メイリオ"/>
-                <a:ea typeface="メイリオ"/>
-                <a:cs typeface="メイリオ"/>
-              </a:rPr>
-              <a:t>9月号</a:t>
-            </a:r>
-          </a:p>
-        </p:txBody>
-      </p:sp>
-      <p:sp>
-        <p:nvSpPr>
-          <p:cNvPr id="5" name="TextBox 4"/>
-          <p:cNvSpPr txBox="1"/>
-          <p:nvPr/>
-        </p:nvSpPr>
-        <p:spPr>
-          <a:xfrm>
-            <a:off x="1481328" y="640080"/>
-            <a:ext cx="8046720" cy="256032"/>
-          </a:xfrm>
-          <a:prstGeom prst="rect">
-            <a:avLst/>
-          </a:prstGeom>
-          <a:noFill/>
-        </p:spPr>
-        <p:txBody>
-          <a:bodyPr wrap="square" anchor="ctr" lIns="0" rIns="0" tIns="0" bIns="0">
-            <a:spAutoFit/>
-          </a:bodyPr>
-          <a:lstStyle/>
-          <a:p>
-            <a:pPr algn="l"/>
-            <a:r>
-              <a:rPr sz="950" b="0">
-                <a:solidFill>
-                  <a:srgbClr val="494848"/>
-                </a:solidFill>
-                <a:latin typeface="メイリオ"/>
-                <a:ea typeface="メイリオ"/>
-                <a:cs typeface="メイリオ"/>
-              </a:rPr>
-              <a:t>対象業界：－　　フェーズ：－　　代理店限定：－　　展開禁止：－</a:t>
-            </a:r>
-          </a:p>
-        </p:txBody>
-      </p:sp>
-      <p:sp>
-        <p:nvSpPr>
-          <p:cNvPr id="6" name="Rectangle 5"/>
-          <p:cNvSpPr/>
-          <p:nvPr/>
-        </p:nvSpPr>
-        <p:spPr>
-          <a:xfrm>
-            <a:off x="566928" y="1005840"/>
-            <a:ext cx="8878824" cy="566928"/>
-          </a:xfrm>
-          <a:prstGeom prst="rect">
-            <a:avLst/>
-          </a:prstGeom>
-          <a:solidFill>
-            <a:srgbClr val="F2F2F2"/>
-          </a:solidFill>
-          <a:ln>
-            <a:noFill/>
-          </a:ln>
-          <a:effectLst/>
-        </p:spPr>
-        <p:style>
-          <a:lnRef idx="1">
-            <a:schemeClr val="accent1"/>
-          </a:lnRef>
-          <a:fillRef idx="3">
-            <a:schemeClr val="accent1"/>
-          </a:fillRef>
-          <a:effectRef idx="2">
-            <a:schemeClr val="accent1"/>
-          </a:effectRef>
-          <a:fontRef idx="minor">
-            <a:schemeClr val="lt1"/>
-          </a:fontRef>
-        </p:style>
-        <p:txBody>
-          <a:bodyPr rtlCol="0" anchor="ctr"/>
-          <a:lstStyle/>
-          <a:p>
-            <a:pPr algn="ctr"/>
-          </a:p>
-        </p:txBody>
-      </p:sp>
-      <p:sp>
-        <p:nvSpPr>
-          <p:cNvPr id="7" name="TextBox 6"/>
-          <p:cNvSpPr txBox="1"/>
-          <p:nvPr/>
-        </p:nvSpPr>
-        <p:spPr>
-          <a:xfrm>
-            <a:off x="749808" y="1005840"/>
-            <a:ext cx="8513064" cy="566928"/>
+            <a:off x="749808" y="685800"/>
+            <a:ext cx="8513064" cy="502920"/>
           </a:xfrm>
           <a:prstGeom prst="rect">
             <a:avLst/>
@@ -5498,14 +5262,14 @@
       </p:sp>
       <p:sp>
         <p:nvSpPr>
-          <p:cNvPr id="8" name="Rectangle 7"/>
+          <p:cNvPr id="5" name="Rectangle 4"/>
           <p:cNvSpPr/>
           <p:nvPr/>
         </p:nvSpPr>
         <p:spPr>
           <a:xfrm>
-            <a:off x="566928" y="1737360"/>
-            <a:ext cx="4347972" cy="2194560"/>
+            <a:off x="566928" y="1325880"/>
+            <a:ext cx="4347972" cy="2331720"/>
           </a:xfrm>
           <a:prstGeom prst="rect">
             <a:avLst/>
@@ -5544,13 +5308,13 @@
       </p:sp>
       <p:sp>
         <p:nvSpPr>
-          <p:cNvPr id="9" name="Rectangle 8"/>
+          <p:cNvPr id="6" name="Rectangle 5"/>
           <p:cNvSpPr/>
           <p:nvPr/>
         </p:nvSpPr>
         <p:spPr>
           <a:xfrm>
-            <a:off x="566928" y="1737360"/>
+            <a:off x="566928" y="1325880"/>
             <a:ext cx="4347972" cy="310896"/>
           </a:xfrm>
           <a:prstGeom prst="rect">
@@ -5588,13 +5352,13 @@
       </p:sp>
       <p:sp>
         <p:nvSpPr>
-          <p:cNvPr id="10" name="TextBox 9"/>
+          <p:cNvPr id="7" name="TextBox 6"/>
           <p:cNvSpPr txBox="1"/>
           <p:nvPr/>
         </p:nvSpPr>
         <p:spPr>
           <a:xfrm>
-            <a:off x="566928" y="1737360"/>
+            <a:off x="566928" y="1325880"/>
             <a:ext cx="4347972" cy="310896"/>
           </a:xfrm>
           <a:prstGeom prst="rect">
@@ -5625,14 +5389,14 @@
       </p:sp>
       <p:sp>
         <p:nvSpPr>
-          <p:cNvPr id="11" name="TextBox 10"/>
+          <p:cNvPr id="8" name="TextBox 7"/>
           <p:cNvSpPr txBox="1"/>
           <p:nvPr/>
         </p:nvSpPr>
         <p:spPr>
           <a:xfrm>
-            <a:off x="731520" y="2139696"/>
-            <a:ext cx="4018788" cy="1700784"/>
+            <a:off x="731520" y="1728216"/>
+            <a:ext cx="4018788" cy="1837944"/>
           </a:xfrm>
           <a:prstGeom prst="rect">
             <a:avLst/>
@@ -5690,14 +5454,14 @@
       </p:sp>
       <p:sp>
         <p:nvSpPr>
-          <p:cNvPr id="12" name="Rectangle 11"/>
+          <p:cNvPr id="9" name="Rectangle 8"/>
           <p:cNvSpPr/>
           <p:nvPr/>
         </p:nvSpPr>
         <p:spPr>
           <a:xfrm>
-            <a:off x="5097780" y="1737360"/>
-            <a:ext cx="4347972" cy="2194560"/>
+            <a:off x="5097780" y="1325880"/>
+            <a:ext cx="4347972" cy="2331720"/>
           </a:xfrm>
           <a:prstGeom prst="rect">
             <a:avLst/>
@@ -5736,13 +5500,13 @@
       </p:sp>
       <p:sp>
         <p:nvSpPr>
-          <p:cNvPr id="13" name="Rectangle 12"/>
+          <p:cNvPr id="10" name="Rectangle 9"/>
           <p:cNvSpPr/>
           <p:nvPr/>
         </p:nvSpPr>
         <p:spPr>
           <a:xfrm>
-            <a:off x="5097780" y="1737360"/>
+            <a:off x="5097780" y="1325880"/>
             <a:ext cx="4347972" cy="310896"/>
           </a:xfrm>
           <a:prstGeom prst="rect">
@@ -5780,13 +5544,13 @@
       </p:sp>
       <p:sp>
         <p:nvSpPr>
-          <p:cNvPr id="14" name="TextBox 13"/>
+          <p:cNvPr id="11" name="TextBox 10"/>
           <p:cNvSpPr txBox="1"/>
           <p:nvPr/>
         </p:nvSpPr>
         <p:spPr>
           <a:xfrm>
-            <a:off x="5097780" y="1737360"/>
+            <a:off x="5097780" y="1325880"/>
             <a:ext cx="4347972" cy="310896"/>
           </a:xfrm>
           <a:prstGeom prst="rect">
@@ -5817,14 +5581,14 @@
       </p:sp>
       <p:sp>
         <p:nvSpPr>
-          <p:cNvPr id="15" name="TextBox 14"/>
+          <p:cNvPr id="12" name="TextBox 11"/>
           <p:cNvSpPr txBox="1"/>
           <p:nvPr/>
         </p:nvSpPr>
         <p:spPr>
           <a:xfrm>
-            <a:off x="5262372" y="2139696"/>
-            <a:ext cx="4018788" cy="1700784"/>
+            <a:off x="5262372" y="1728216"/>
+            <a:ext cx="4018788" cy="1837944"/>
           </a:xfrm>
           <a:prstGeom prst="rect">
             <a:avLst/>
@@ -5861,14 +5625,14 @@
       </p:sp>
       <p:sp>
         <p:nvSpPr>
-          <p:cNvPr id="16" name="Rectangle 15"/>
+          <p:cNvPr id="13" name="Rectangle 12"/>
           <p:cNvSpPr/>
           <p:nvPr/>
         </p:nvSpPr>
         <p:spPr>
           <a:xfrm>
-            <a:off x="566928" y="4069080"/>
-            <a:ext cx="4347972" cy="2194560"/>
+            <a:off x="566928" y="3794760"/>
+            <a:ext cx="4347972" cy="2331720"/>
           </a:xfrm>
           <a:prstGeom prst="rect">
             <a:avLst/>
@@ -5907,13 +5671,13 @@
       </p:sp>
       <p:sp>
         <p:nvSpPr>
-          <p:cNvPr id="17" name="Rectangle 16"/>
+          <p:cNvPr id="14" name="Rectangle 13"/>
           <p:cNvSpPr/>
           <p:nvPr/>
         </p:nvSpPr>
         <p:spPr>
           <a:xfrm>
-            <a:off x="566928" y="4069080"/>
+            <a:off x="566928" y="3794760"/>
             <a:ext cx="4347972" cy="310896"/>
           </a:xfrm>
           <a:prstGeom prst="rect">
@@ -5951,13 +5715,13 @@
       </p:sp>
       <p:sp>
         <p:nvSpPr>
-          <p:cNvPr id="18" name="TextBox 17"/>
+          <p:cNvPr id="15" name="TextBox 14"/>
           <p:cNvSpPr txBox="1"/>
           <p:nvPr/>
         </p:nvSpPr>
         <p:spPr>
           <a:xfrm>
-            <a:off x="566928" y="4069080"/>
+            <a:off x="566928" y="3794760"/>
             <a:ext cx="4347972" cy="310896"/>
           </a:xfrm>
           <a:prstGeom prst="rect">
@@ -5988,14 +5752,14 @@
       </p:sp>
       <p:sp>
         <p:nvSpPr>
-          <p:cNvPr id="19" name="TextBox 18"/>
+          <p:cNvPr id="16" name="TextBox 15"/>
           <p:cNvSpPr txBox="1"/>
           <p:nvPr/>
         </p:nvSpPr>
         <p:spPr>
           <a:xfrm>
-            <a:off x="731520" y="4471416"/>
-            <a:ext cx="4018788" cy="1700784"/>
+            <a:off x="731520" y="4197096"/>
+            <a:ext cx="4018788" cy="1837944"/>
           </a:xfrm>
           <a:prstGeom prst="rect">
             <a:avLst/>
@@ -6053,14 +5817,14 @@
       </p:sp>
       <p:sp>
         <p:nvSpPr>
-          <p:cNvPr id="20" name="Rectangle 19"/>
+          <p:cNvPr id="17" name="Rectangle 16"/>
           <p:cNvSpPr/>
           <p:nvPr/>
         </p:nvSpPr>
         <p:spPr>
           <a:xfrm>
-            <a:off x="5097780" y="4069080"/>
-            <a:ext cx="4347972" cy="2194560"/>
+            <a:off x="5097780" y="3794760"/>
+            <a:ext cx="4347972" cy="2331720"/>
           </a:xfrm>
           <a:prstGeom prst="rect">
             <a:avLst/>
@@ -6099,13 +5863,13 @@
       </p:sp>
       <p:sp>
         <p:nvSpPr>
-          <p:cNvPr id="21" name="Rectangle 20"/>
+          <p:cNvPr id="18" name="Rectangle 17"/>
           <p:cNvSpPr/>
           <p:nvPr/>
         </p:nvSpPr>
         <p:spPr>
           <a:xfrm>
-            <a:off x="5097780" y="4069080"/>
+            <a:off x="5097780" y="3794760"/>
             <a:ext cx="4347972" cy="310896"/>
           </a:xfrm>
           <a:prstGeom prst="rect">
@@ -6143,13 +5907,13 @@
       </p:sp>
       <p:sp>
         <p:nvSpPr>
-          <p:cNvPr id="22" name="TextBox 21"/>
+          <p:cNvPr id="19" name="TextBox 18"/>
           <p:cNvSpPr txBox="1"/>
           <p:nvPr/>
         </p:nvSpPr>
         <p:spPr>
           <a:xfrm>
-            <a:off x="5097780" y="4069080"/>
+            <a:off x="5097780" y="3794760"/>
             <a:ext cx="4347972" cy="310896"/>
           </a:xfrm>
           <a:prstGeom prst="rect">
@@ -6180,14 +5944,14 @@
       </p:sp>
       <p:sp>
         <p:nvSpPr>
-          <p:cNvPr id="23" name="TextBox 22"/>
+          <p:cNvPr id="20" name="TextBox 19"/>
           <p:cNvSpPr txBox="1"/>
           <p:nvPr/>
         </p:nvSpPr>
         <p:spPr>
           <a:xfrm>
-            <a:off x="5262372" y="4471416"/>
-            <a:ext cx="4018788" cy="1700784"/>
+            <a:off x="5262372" y="4197096"/>
+            <a:ext cx="4018788" cy="1837944"/>
           </a:xfrm>
           <a:prstGeom prst="rect">
             <a:avLst/>
@@ -6245,14 +6009,14 @@
       </p:sp>
       <p:sp>
         <p:nvSpPr>
-          <p:cNvPr id="24" name="TextBox 23"/>
+          <p:cNvPr id="21" name="TextBox 20"/>
           <p:cNvSpPr txBox="1"/>
           <p:nvPr/>
         </p:nvSpPr>
         <p:spPr>
           <a:xfrm>
-            <a:off x="566928" y="6272784"/>
-            <a:ext cx="8686800" cy="219456"/>
+            <a:off x="566928" y="6217920"/>
+            <a:ext cx="8686800" cy="201168"/>
           </a:xfrm>
           <a:prstGeom prst="rect">
             <a:avLst/>
@@ -6361,14 +6125,14 @@
         </p:nvSpPr>
         <p:spPr>
           <a:xfrm>
-            <a:off x="566928" y="640080"/>
-            <a:ext cx="777240" cy="256032"/>
-          </a:xfrm>
-          <a:prstGeom prst="rect">
-            <a:avLst/>
-          </a:prstGeom>
-          <a:solidFill>
-            <a:srgbClr val="10253F"/>
+            <a:off x="566928" y="685800"/>
+            <a:ext cx="8878824" cy="502920"/>
+          </a:xfrm>
+          <a:prstGeom prst="rect">
+            <a:avLst/>
+          </a:prstGeom>
+          <a:solidFill>
+            <a:srgbClr val="F2F2F2"/>
           </a:solidFill>
           <a:ln>
             <a:noFill/>
@@ -6405,126 +6169,8 @@
         </p:nvSpPr>
         <p:spPr>
           <a:xfrm>
-            <a:off x="566928" y="640080"/>
-            <a:ext cx="777240" cy="256032"/>
-          </a:xfrm>
-          <a:prstGeom prst="rect">
-            <a:avLst/>
-          </a:prstGeom>
-          <a:noFill/>
-        </p:spPr>
-        <p:txBody>
-          <a:bodyPr wrap="square" anchor="ctr" lIns="0" rIns="0" tIns="0" bIns="0">
-            <a:spAutoFit/>
-          </a:bodyPr>
-          <a:lstStyle/>
-          <a:p>
-            <a:pPr algn="ctr"/>
-            <a:r>
-              <a:rPr sz="900" b="1">
-                <a:solidFill>
-                  <a:srgbClr val="FFFFFF"/>
-                </a:solidFill>
-                <a:latin typeface="メイリオ"/>
-                <a:ea typeface="メイリオ"/>
-                <a:cs typeface="メイリオ"/>
-              </a:rPr>
-              <a:t>9月号</a:t>
-            </a:r>
-          </a:p>
-        </p:txBody>
-      </p:sp>
-      <p:sp>
-        <p:nvSpPr>
-          <p:cNvPr id="5" name="TextBox 4"/>
-          <p:cNvSpPr txBox="1"/>
-          <p:nvPr/>
-        </p:nvSpPr>
-        <p:spPr>
-          <a:xfrm>
-            <a:off x="1481328" y="640080"/>
-            <a:ext cx="8046720" cy="256032"/>
-          </a:xfrm>
-          <a:prstGeom prst="rect">
-            <a:avLst/>
-          </a:prstGeom>
-          <a:noFill/>
-        </p:spPr>
-        <p:txBody>
-          <a:bodyPr wrap="square" anchor="ctr" lIns="0" rIns="0" tIns="0" bIns="0">
-            <a:spAutoFit/>
-          </a:bodyPr>
-          <a:lstStyle/>
-          <a:p>
-            <a:pPr algn="l"/>
-            <a:r>
-              <a:rPr sz="950" b="0">
-                <a:solidFill>
-                  <a:srgbClr val="494848"/>
-                </a:solidFill>
-                <a:latin typeface="メイリオ"/>
-                <a:ea typeface="メイリオ"/>
-                <a:cs typeface="メイリオ"/>
-              </a:rPr>
-              <a:t>対象業界：－　　フェーズ：－　　代理店限定：－　　展開禁止：－</a:t>
-            </a:r>
-          </a:p>
-        </p:txBody>
-      </p:sp>
-      <p:sp>
-        <p:nvSpPr>
-          <p:cNvPr id="6" name="Rectangle 5"/>
-          <p:cNvSpPr/>
-          <p:nvPr/>
-        </p:nvSpPr>
-        <p:spPr>
-          <a:xfrm>
-            <a:off x="566928" y="1005840"/>
-            <a:ext cx="8878824" cy="566928"/>
-          </a:xfrm>
-          <a:prstGeom prst="rect">
-            <a:avLst/>
-          </a:prstGeom>
-          <a:solidFill>
-            <a:srgbClr val="F2F2F2"/>
-          </a:solidFill>
-          <a:ln>
-            <a:noFill/>
-          </a:ln>
-          <a:effectLst/>
-        </p:spPr>
-        <p:style>
-          <a:lnRef idx="1">
-            <a:schemeClr val="accent1"/>
-          </a:lnRef>
-          <a:fillRef idx="3">
-            <a:schemeClr val="accent1"/>
-          </a:fillRef>
-          <a:effectRef idx="2">
-            <a:schemeClr val="accent1"/>
-          </a:effectRef>
-          <a:fontRef idx="minor">
-            <a:schemeClr val="lt1"/>
-          </a:fontRef>
-        </p:style>
-        <p:txBody>
-          <a:bodyPr rtlCol="0" anchor="ctr"/>
-          <a:lstStyle/>
-          <a:p>
-            <a:pPr algn="ctr"/>
-          </a:p>
-        </p:txBody>
-      </p:sp>
-      <p:sp>
-        <p:nvSpPr>
-          <p:cNvPr id="7" name="TextBox 6"/>
-          <p:cNvSpPr txBox="1"/>
-          <p:nvPr/>
-        </p:nvSpPr>
-        <p:spPr>
-          <a:xfrm>
-            <a:off x="749808" y="1005840"/>
-            <a:ext cx="8513064" cy="566928"/>
+            <a:off x="749808" y="685800"/>
+            <a:ext cx="8513064" cy="502920"/>
           </a:xfrm>
           <a:prstGeom prst="rect">
             <a:avLst/>
@@ -6558,14 +6204,14 @@
       </p:sp>
       <p:sp>
         <p:nvSpPr>
-          <p:cNvPr id="8" name="Rectangle 7"/>
+          <p:cNvPr id="5" name="Rectangle 4"/>
           <p:cNvSpPr/>
           <p:nvPr/>
         </p:nvSpPr>
         <p:spPr>
           <a:xfrm>
-            <a:off x="566928" y="1737360"/>
-            <a:ext cx="4347972" cy="2194560"/>
+            <a:off x="566928" y="1325880"/>
+            <a:ext cx="4347972" cy="2331720"/>
           </a:xfrm>
           <a:prstGeom prst="rect">
             <a:avLst/>
@@ -6604,13 +6250,13 @@
       </p:sp>
       <p:sp>
         <p:nvSpPr>
-          <p:cNvPr id="9" name="Rectangle 8"/>
+          <p:cNvPr id="6" name="Rectangle 5"/>
           <p:cNvSpPr/>
           <p:nvPr/>
         </p:nvSpPr>
         <p:spPr>
           <a:xfrm>
-            <a:off x="566928" y="1737360"/>
+            <a:off x="566928" y="1325880"/>
             <a:ext cx="4347972" cy="310896"/>
           </a:xfrm>
           <a:prstGeom prst="rect">
@@ -6648,13 +6294,13 @@
       </p:sp>
       <p:sp>
         <p:nvSpPr>
-          <p:cNvPr id="10" name="TextBox 9"/>
+          <p:cNvPr id="7" name="TextBox 6"/>
           <p:cNvSpPr txBox="1"/>
           <p:nvPr/>
         </p:nvSpPr>
         <p:spPr>
           <a:xfrm>
-            <a:off x="566928" y="1737360"/>
+            <a:off x="566928" y="1325880"/>
             <a:ext cx="4347972" cy="310896"/>
           </a:xfrm>
           <a:prstGeom prst="rect">
@@ -6685,14 +6331,14 @@
       </p:sp>
       <p:sp>
         <p:nvSpPr>
-          <p:cNvPr id="11" name="TextBox 10"/>
+          <p:cNvPr id="8" name="TextBox 7"/>
           <p:cNvSpPr txBox="1"/>
           <p:nvPr/>
         </p:nvSpPr>
         <p:spPr>
           <a:xfrm>
-            <a:off x="731520" y="2139696"/>
-            <a:ext cx="4018788" cy="1700784"/>
+            <a:off x="731520" y="1728216"/>
+            <a:ext cx="4018788" cy="1837944"/>
           </a:xfrm>
           <a:prstGeom prst="rect">
             <a:avLst/>
@@ -6729,14 +6375,14 @@
       </p:sp>
       <p:sp>
         <p:nvSpPr>
-          <p:cNvPr id="12" name="Rectangle 11"/>
+          <p:cNvPr id="9" name="Rectangle 8"/>
           <p:cNvSpPr/>
           <p:nvPr/>
         </p:nvSpPr>
         <p:spPr>
           <a:xfrm>
-            <a:off x="5097780" y="1737360"/>
-            <a:ext cx="4347972" cy="2194560"/>
+            <a:off x="5097780" y="1325880"/>
+            <a:ext cx="4347972" cy="2331720"/>
           </a:xfrm>
           <a:prstGeom prst="rect">
             <a:avLst/>
@@ -6775,13 +6421,13 @@
       </p:sp>
       <p:sp>
         <p:nvSpPr>
-          <p:cNvPr id="13" name="Rectangle 12"/>
+          <p:cNvPr id="10" name="Rectangle 9"/>
           <p:cNvSpPr/>
           <p:nvPr/>
         </p:nvSpPr>
         <p:spPr>
           <a:xfrm>
-            <a:off x="5097780" y="1737360"/>
+            <a:off x="5097780" y="1325880"/>
             <a:ext cx="4347972" cy="310896"/>
           </a:xfrm>
           <a:prstGeom prst="rect">
@@ -6819,13 +6465,13 @@
       </p:sp>
       <p:sp>
         <p:nvSpPr>
-          <p:cNvPr id="14" name="TextBox 13"/>
+          <p:cNvPr id="11" name="TextBox 10"/>
           <p:cNvSpPr txBox="1"/>
           <p:nvPr/>
         </p:nvSpPr>
         <p:spPr>
           <a:xfrm>
-            <a:off x="5097780" y="1737360"/>
+            <a:off x="5097780" y="1325880"/>
             <a:ext cx="4347972" cy="310896"/>
           </a:xfrm>
           <a:prstGeom prst="rect">
@@ -6856,14 +6502,14 @@
       </p:sp>
       <p:sp>
         <p:nvSpPr>
-          <p:cNvPr id="15" name="TextBox 14"/>
+          <p:cNvPr id="12" name="TextBox 11"/>
           <p:cNvSpPr txBox="1"/>
           <p:nvPr/>
         </p:nvSpPr>
         <p:spPr>
           <a:xfrm>
-            <a:off x="5262372" y="2139696"/>
-            <a:ext cx="4018788" cy="1700784"/>
+            <a:off x="5262372" y="1728216"/>
+            <a:ext cx="4018788" cy="1837944"/>
           </a:xfrm>
           <a:prstGeom prst="rect">
             <a:avLst/>
@@ -6900,14 +6546,14 @@
       </p:sp>
       <p:sp>
         <p:nvSpPr>
-          <p:cNvPr id="16" name="Rectangle 15"/>
+          <p:cNvPr id="13" name="Rectangle 12"/>
           <p:cNvSpPr/>
           <p:nvPr/>
         </p:nvSpPr>
         <p:spPr>
           <a:xfrm>
-            <a:off x="566928" y="4069080"/>
-            <a:ext cx="4347972" cy="2194560"/>
+            <a:off x="566928" y="3794760"/>
+            <a:ext cx="4347972" cy="2331720"/>
           </a:xfrm>
           <a:prstGeom prst="rect">
             <a:avLst/>
@@ -6946,13 +6592,13 @@
       </p:sp>
       <p:sp>
         <p:nvSpPr>
-          <p:cNvPr id="17" name="Rectangle 16"/>
+          <p:cNvPr id="14" name="Rectangle 13"/>
           <p:cNvSpPr/>
           <p:nvPr/>
         </p:nvSpPr>
         <p:spPr>
           <a:xfrm>
-            <a:off x="566928" y="4069080"/>
+            <a:off x="566928" y="3794760"/>
             <a:ext cx="4347972" cy="310896"/>
           </a:xfrm>
           <a:prstGeom prst="rect">
@@ -6990,13 +6636,13 @@
       </p:sp>
       <p:sp>
         <p:nvSpPr>
-          <p:cNvPr id="18" name="TextBox 17"/>
+          <p:cNvPr id="15" name="TextBox 14"/>
           <p:cNvSpPr txBox="1"/>
           <p:nvPr/>
         </p:nvSpPr>
         <p:spPr>
           <a:xfrm>
-            <a:off x="566928" y="4069080"/>
+            <a:off x="566928" y="3794760"/>
             <a:ext cx="4347972" cy="310896"/>
           </a:xfrm>
           <a:prstGeom prst="rect">
@@ -7027,14 +6673,14 @@
       </p:sp>
       <p:sp>
         <p:nvSpPr>
-          <p:cNvPr id="19" name="TextBox 18"/>
+          <p:cNvPr id="16" name="TextBox 15"/>
           <p:cNvSpPr txBox="1"/>
           <p:nvPr/>
         </p:nvSpPr>
         <p:spPr>
           <a:xfrm>
-            <a:off x="731520" y="4471416"/>
-            <a:ext cx="4018788" cy="1700784"/>
+            <a:off x="731520" y="4197096"/>
+            <a:ext cx="4018788" cy="1837944"/>
           </a:xfrm>
           <a:prstGeom prst="rect">
             <a:avLst/>
@@ -7092,14 +6738,14 @@
       </p:sp>
       <p:sp>
         <p:nvSpPr>
-          <p:cNvPr id="20" name="Rectangle 19"/>
+          <p:cNvPr id="17" name="Rectangle 16"/>
           <p:cNvSpPr/>
           <p:nvPr/>
         </p:nvSpPr>
         <p:spPr>
           <a:xfrm>
-            <a:off x="5097780" y="4069080"/>
-            <a:ext cx="4347972" cy="2194560"/>
+            <a:off x="5097780" y="3794760"/>
+            <a:ext cx="4347972" cy="2331720"/>
           </a:xfrm>
           <a:prstGeom prst="rect">
             <a:avLst/>
@@ -7138,13 +6784,13 @@
       </p:sp>
       <p:sp>
         <p:nvSpPr>
-          <p:cNvPr id="21" name="Rectangle 20"/>
+          <p:cNvPr id="18" name="Rectangle 17"/>
           <p:cNvSpPr/>
           <p:nvPr/>
         </p:nvSpPr>
         <p:spPr>
           <a:xfrm>
-            <a:off x="5097780" y="4069080"/>
+            <a:off x="5097780" y="3794760"/>
             <a:ext cx="4347972" cy="310896"/>
           </a:xfrm>
           <a:prstGeom prst="rect">
@@ -7182,13 +6828,13 @@
       </p:sp>
       <p:sp>
         <p:nvSpPr>
-          <p:cNvPr id="22" name="TextBox 21"/>
+          <p:cNvPr id="19" name="TextBox 18"/>
           <p:cNvSpPr txBox="1"/>
           <p:nvPr/>
         </p:nvSpPr>
         <p:spPr>
           <a:xfrm>
-            <a:off x="5097780" y="4069080"/>
+            <a:off x="5097780" y="3794760"/>
             <a:ext cx="4347972" cy="310896"/>
           </a:xfrm>
           <a:prstGeom prst="rect">
@@ -7219,14 +6865,14 @@
       </p:sp>
       <p:sp>
         <p:nvSpPr>
-          <p:cNvPr id="23" name="TextBox 22"/>
+          <p:cNvPr id="20" name="TextBox 19"/>
           <p:cNvSpPr txBox="1"/>
           <p:nvPr/>
         </p:nvSpPr>
         <p:spPr>
           <a:xfrm>
-            <a:off x="5262372" y="4471416"/>
-            <a:ext cx="4018788" cy="1700784"/>
+            <a:off x="5262372" y="4197096"/>
+            <a:ext cx="4018788" cy="1837944"/>
           </a:xfrm>
           <a:prstGeom prst="rect">
             <a:avLst/>
@@ -7284,14 +6930,14 @@
       </p:sp>
       <p:sp>
         <p:nvSpPr>
-          <p:cNvPr id="24" name="TextBox 23"/>
+          <p:cNvPr id="21" name="TextBox 20"/>
           <p:cNvSpPr txBox="1"/>
           <p:nvPr/>
         </p:nvSpPr>
         <p:spPr>
           <a:xfrm>
-            <a:off x="566928" y="6272784"/>
-            <a:ext cx="8686800" cy="219456"/>
+            <a:off x="566928" y="6217920"/>
+            <a:ext cx="8686800" cy="201168"/>
           </a:xfrm>
           <a:prstGeom prst="rect">
             <a:avLst/>
@@ -7400,14 +7046,14 @@
         </p:nvSpPr>
         <p:spPr>
           <a:xfrm>
-            <a:off x="566928" y="640080"/>
-            <a:ext cx="777240" cy="256032"/>
-          </a:xfrm>
-          <a:prstGeom prst="rect">
-            <a:avLst/>
-          </a:prstGeom>
-          <a:solidFill>
-            <a:srgbClr val="10253F"/>
+            <a:off x="566928" y="685800"/>
+            <a:ext cx="8878824" cy="502920"/>
+          </a:xfrm>
+          <a:prstGeom prst="rect">
+            <a:avLst/>
+          </a:prstGeom>
+          <a:solidFill>
+            <a:srgbClr val="F2F2F2"/>
           </a:solidFill>
           <a:ln>
             <a:noFill/>
@@ -7444,126 +7090,8 @@
         </p:nvSpPr>
         <p:spPr>
           <a:xfrm>
-            <a:off x="566928" y="640080"/>
-            <a:ext cx="777240" cy="256032"/>
-          </a:xfrm>
-          <a:prstGeom prst="rect">
-            <a:avLst/>
-          </a:prstGeom>
-          <a:noFill/>
-        </p:spPr>
-        <p:txBody>
-          <a:bodyPr wrap="square" anchor="ctr" lIns="0" rIns="0" tIns="0" bIns="0">
-            <a:spAutoFit/>
-          </a:bodyPr>
-          <a:lstStyle/>
-          <a:p>
-            <a:pPr algn="ctr"/>
-            <a:r>
-              <a:rPr sz="900" b="1">
-                <a:solidFill>
-                  <a:srgbClr val="FFFFFF"/>
-                </a:solidFill>
-                <a:latin typeface="メイリオ"/>
-                <a:ea typeface="メイリオ"/>
-                <a:cs typeface="メイリオ"/>
-              </a:rPr>
-              <a:t>9月号</a:t>
-            </a:r>
-          </a:p>
-        </p:txBody>
-      </p:sp>
-      <p:sp>
-        <p:nvSpPr>
-          <p:cNvPr id="5" name="TextBox 4"/>
-          <p:cNvSpPr txBox="1"/>
-          <p:nvPr/>
-        </p:nvSpPr>
-        <p:spPr>
-          <a:xfrm>
-            <a:off x="1481328" y="640080"/>
-            <a:ext cx="8046720" cy="256032"/>
-          </a:xfrm>
-          <a:prstGeom prst="rect">
-            <a:avLst/>
-          </a:prstGeom>
-          <a:noFill/>
-        </p:spPr>
-        <p:txBody>
-          <a:bodyPr wrap="square" anchor="ctr" lIns="0" rIns="0" tIns="0" bIns="0">
-            <a:spAutoFit/>
-          </a:bodyPr>
-          <a:lstStyle/>
-          <a:p>
-            <a:pPr algn="l"/>
-            <a:r>
-              <a:rPr sz="950" b="0">
-                <a:solidFill>
-                  <a:srgbClr val="494848"/>
-                </a:solidFill>
-                <a:latin typeface="メイリオ"/>
-                <a:ea typeface="メイリオ"/>
-                <a:cs typeface="メイリオ"/>
-              </a:rPr>
-              <a:t>対象業界：－　　フェーズ：－　　代理店限定：－　　展開禁止：－</a:t>
-            </a:r>
-          </a:p>
-        </p:txBody>
-      </p:sp>
-      <p:sp>
-        <p:nvSpPr>
-          <p:cNvPr id="6" name="Rectangle 5"/>
-          <p:cNvSpPr/>
-          <p:nvPr/>
-        </p:nvSpPr>
-        <p:spPr>
-          <a:xfrm>
-            <a:off x="566928" y="1005840"/>
-            <a:ext cx="8878824" cy="566928"/>
-          </a:xfrm>
-          <a:prstGeom prst="rect">
-            <a:avLst/>
-          </a:prstGeom>
-          <a:solidFill>
-            <a:srgbClr val="F2F2F2"/>
-          </a:solidFill>
-          <a:ln>
-            <a:noFill/>
-          </a:ln>
-          <a:effectLst/>
-        </p:spPr>
-        <p:style>
-          <a:lnRef idx="1">
-            <a:schemeClr val="accent1"/>
-          </a:lnRef>
-          <a:fillRef idx="3">
-            <a:schemeClr val="accent1"/>
-          </a:fillRef>
-          <a:effectRef idx="2">
-            <a:schemeClr val="accent1"/>
-          </a:effectRef>
-          <a:fontRef idx="minor">
-            <a:schemeClr val="lt1"/>
-          </a:fontRef>
-        </p:style>
-        <p:txBody>
-          <a:bodyPr rtlCol="0" anchor="ctr"/>
-          <a:lstStyle/>
-          <a:p>
-            <a:pPr algn="ctr"/>
-          </a:p>
-        </p:txBody>
-      </p:sp>
-      <p:sp>
-        <p:nvSpPr>
-          <p:cNvPr id="7" name="TextBox 6"/>
-          <p:cNvSpPr txBox="1"/>
-          <p:nvPr/>
-        </p:nvSpPr>
-        <p:spPr>
-          <a:xfrm>
-            <a:off x="749808" y="1005840"/>
-            <a:ext cx="8513064" cy="566928"/>
+            <a:off x="749808" y="685800"/>
+            <a:ext cx="8513064" cy="502920"/>
           </a:xfrm>
           <a:prstGeom prst="rect">
             <a:avLst/>
@@ -7597,14 +7125,14 @@
       </p:sp>
       <p:sp>
         <p:nvSpPr>
-          <p:cNvPr id="8" name="Rectangle 7"/>
+          <p:cNvPr id="5" name="Rectangle 4"/>
           <p:cNvSpPr/>
           <p:nvPr/>
         </p:nvSpPr>
         <p:spPr>
           <a:xfrm>
-            <a:off x="566928" y="1737360"/>
-            <a:ext cx="4347972" cy="2194560"/>
+            <a:off x="566928" y="1325880"/>
+            <a:ext cx="4347972" cy="2331720"/>
           </a:xfrm>
           <a:prstGeom prst="rect">
             <a:avLst/>
@@ -7643,13 +7171,13 @@
       </p:sp>
       <p:sp>
         <p:nvSpPr>
-          <p:cNvPr id="9" name="Rectangle 8"/>
+          <p:cNvPr id="6" name="Rectangle 5"/>
           <p:cNvSpPr/>
           <p:nvPr/>
         </p:nvSpPr>
         <p:spPr>
           <a:xfrm>
-            <a:off x="566928" y="1737360"/>
+            <a:off x="566928" y="1325880"/>
             <a:ext cx="4347972" cy="310896"/>
           </a:xfrm>
           <a:prstGeom prst="rect">
@@ -7687,13 +7215,13 @@
       </p:sp>
       <p:sp>
         <p:nvSpPr>
-          <p:cNvPr id="10" name="TextBox 9"/>
+          <p:cNvPr id="7" name="TextBox 6"/>
           <p:cNvSpPr txBox="1"/>
           <p:nvPr/>
         </p:nvSpPr>
         <p:spPr>
           <a:xfrm>
-            <a:off x="566928" y="1737360"/>
+            <a:off x="566928" y="1325880"/>
             <a:ext cx="4347972" cy="310896"/>
           </a:xfrm>
           <a:prstGeom prst="rect">
@@ -7724,14 +7252,14 @@
       </p:sp>
       <p:sp>
         <p:nvSpPr>
-          <p:cNvPr id="11" name="TextBox 10"/>
+          <p:cNvPr id="8" name="TextBox 7"/>
           <p:cNvSpPr txBox="1"/>
           <p:nvPr/>
         </p:nvSpPr>
         <p:spPr>
           <a:xfrm>
-            <a:off x="731520" y="2139696"/>
-            <a:ext cx="4018788" cy="1700784"/>
+            <a:off x="731520" y="1728216"/>
+            <a:ext cx="4018788" cy="1837944"/>
           </a:xfrm>
           <a:prstGeom prst="rect">
             <a:avLst/>
@@ -7789,14 +7317,14 @@
       </p:sp>
       <p:sp>
         <p:nvSpPr>
-          <p:cNvPr id="12" name="Rectangle 11"/>
+          <p:cNvPr id="9" name="Rectangle 8"/>
           <p:cNvSpPr/>
           <p:nvPr/>
         </p:nvSpPr>
         <p:spPr>
           <a:xfrm>
-            <a:off x="5097780" y="1737360"/>
-            <a:ext cx="4347972" cy="2194560"/>
+            <a:off x="5097780" y="1325880"/>
+            <a:ext cx="4347972" cy="2331720"/>
           </a:xfrm>
           <a:prstGeom prst="rect">
             <a:avLst/>
@@ -7835,13 +7363,13 @@
       </p:sp>
       <p:sp>
         <p:nvSpPr>
-          <p:cNvPr id="13" name="Rectangle 12"/>
+          <p:cNvPr id="10" name="Rectangle 9"/>
           <p:cNvSpPr/>
           <p:nvPr/>
         </p:nvSpPr>
         <p:spPr>
           <a:xfrm>
-            <a:off x="5097780" y="1737360"/>
+            <a:off x="5097780" y="1325880"/>
             <a:ext cx="4347972" cy="310896"/>
           </a:xfrm>
           <a:prstGeom prst="rect">
@@ -7879,13 +7407,13 @@
       </p:sp>
       <p:sp>
         <p:nvSpPr>
-          <p:cNvPr id="14" name="TextBox 13"/>
+          <p:cNvPr id="11" name="TextBox 10"/>
           <p:cNvSpPr txBox="1"/>
           <p:nvPr/>
         </p:nvSpPr>
         <p:spPr>
           <a:xfrm>
-            <a:off x="5097780" y="1737360"/>
+            <a:off x="5097780" y="1325880"/>
             <a:ext cx="4347972" cy="310896"/>
           </a:xfrm>
           <a:prstGeom prst="rect">
@@ -7916,14 +7444,14 @@
       </p:sp>
       <p:sp>
         <p:nvSpPr>
-          <p:cNvPr id="15" name="TextBox 14"/>
+          <p:cNvPr id="12" name="TextBox 11"/>
           <p:cNvSpPr txBox="1"/>
           <p:nvPr/>
         </p:nvSpPr>
         <p:spPr>
           <a:xfrm>
-            <a:off x="5262372" y="2139696"/>
-            <a:ext cx="4018788" cy="1700784"/>
+            <a:off x="5262372" y="1728216"/>
+            <a:ext cx="4018788" cy="1837944"/>
           </a:xfrm>
           <a:prstGeom prst="rect">
             <a:avLst/>
@@ -7960,14 +7488,14 @@
       </p:sp>
       <p:sp>
         <p:nvSpPr>
-          <p:cNvPr id="16" name="Rectangle 15"/>
+          <p:cNvPr id="13" name="Rectangle 12"/>
           <p:cNvSpPr/>
           <p:nvPr/>
         </p:nvSpPr>
         <p:spPr>
           <a:xfrm>
-            <a:off x="566928" y="4069080"/>
-            <a:ext cx="4347972" cy="2194560"/>
+            <a:off x="566928" y="3794760"/>
+            <a:ext cx="4347972" cy="2331720"/>
           </a:xfrm>
           <a:prstGeom prst="rect">
             <a:avLst/>
@@ -8006,13 +7534,13 @@
       </p:sp>
       <p:sp>
         <p:nvSpPr>
-          <p:cNvPr id="17" name="Rectangle 16"/>
+          <p:cNvPr id="14" name="Rectangle 13"/>
           <p:cNvSpPr/>
           <p:nvPr/>
         </p:nvSpPr>
         <p:spPr>
           <a:xfrm>
-            <a:off x="566928" y="4069080"/>
+            <a:off x="566928" y="3794760"/>
             <a:ext cx="4347972" cy="310896"/>
           </a:xfrm>
           <a:prstGeom prst="rect">
@@ -8050,13 +7578,13 @@
       </p:sp>
       <p:sp>
         <p:nvSpPr>
-          <p:cNvPr id="18" name="TextBox 17"/>
+          <p:cNvPr id="15" name="TextBox 14"/>
           <p:cNvSpPr txBox="1"/>
           <p:nvPr/>
         </p:nvSpPr>
         <p:spPr>
           <a:xfrm>
-            <a:off x="566928" y="4069080"/>
+            <a:off x="566928" y="3794760"/>
             <a:ext cx="4347972" cy="310896"/>
           </a:xfrm>
           <a:prstGeom prst="rect">
@@ -8087,14 +7615,14 @@
       </p:sp>
       <p:sp>
         <p:nvSpPr>
-          <p:cNvPr id="19" name="TextBox 18"/>
+          <p:cNvPr id="16" name="TextBox 15"/>
           <p:cNvSpPr txBox="1"/>
           <p:nvPr/>
         </p:nvSpPr>
         <p:spPr>
           <a:xfrm>
-            <a:off x="731520" y="4471416"/>
-            <a:ext cx="4018788" cy="1700784"/>
+            <a:off x="731520" y="4197096"/>
+            <a:ext cx="4018788" cy="1837944"/>
           </a:xfrm>
           <a:prstGeom prst="rect">
             <a:avLst/>
@@ -8131,14 +7659,14 @@
       </p:sp>
       <p:sp>
         <p:nvSpPr>
-          <p:cNvPr id="20" name="Rectangle 19"/>
+          <p:cNvPr id="17" name="Rectangle 16"/>
           <p:cNvSpPr/>
           <p:nvPr/>
         </p:nvSpPr>
         <p:spPr>
           <a:xfrm>
-            <a:off x="5097780" y="4069080"/>
-            <a:ext cx="4347972" cy="2194560"/>
+            <a:off x="5097780" y="3794760"/>
+            <a:ext cx="4347972" cy="2331720"/>
           </a:xfrm>
           <a:prstGeom prst="rect">
             <a:avLst/>
@@ -8177,13 +7705,13 @@
       </p:sp>
       <p:sp>
         <p:nvSpPr>
-          <p:cNvPr id="21" name="Rectangle 20"/>
+          <p:cNvPr id="18" name="Rectangle 17"/>
           <p:cNvSpPr/>
           <p:nvPr/>
         </p:nvSpPr>
         <p:spPr>
           <a:xfrm>
-            <a:off x="5097780" y="4069080"/>
+            <a:off x="5097780" y="3794760"/>
             <a:ext cx="4347972" cy="310896"/>
           </a:xfrm>
           <a:prstGeom prst="rect">
@@ -8221,13 +7749,13 @@
       </p:sp>
       <p:sp>
         <p:nvSpPr>
-          <p:cNvPr id="22" name="TextBox 21"/>
+          <p:cNvPr id="19" name="TextBox 18"/>
           <p:cNvSpPr txBox="1"/>
           <p:nvPr/>
         </p:nvSpPr>
         <p:spPr>
           <a:xfrm>
-            <a:off x="5097780" y="4069080"/>
+            <a:off x="5097780" y="3794760"/>
             <a:ext cx="4347972" cy="310896"/>
           </a:xfrm>
           <a:prstGeom prst="rect">
@@ -8258,14 +7786,14 @@
       </p:sp>
       <p:sp>
         <p:nvSpPr>
-          <p:cNvPr id="23" name="TextBox 22"/>
+          <p:cNvPr id="20" name="TextBox 19"/>
           <p:cNvSpPr txBox="1"/>
           <p:nvPr/>
         </p:nvSpPr>
         <p:spPr>
           <a:xfrm>
-            <a:off x="5262372" y="4471416"/>
-            <a:ext cx="4018788" cy="1700784"/>
+            <a:off x="5262372" y="4197096"/>
+            <a:ext cx="4018788" cy="1837944"/>
           </a:xfrm>
           <a:prstGeom prst="rect">
             <a:avLst/>
@@ -8344,14 +7872,14 @@
       </p:sp>
       <p:sp>
         <p:nvSpPr>
-          <p:cNvPr id="24" name="TextBox 23"/>
+          <p:cNvPr id="21" name="TextBox 20"/>
           <p:cNvSpPr txBox="1"/>
           <p:nvPr/>
         </p:nvSpPr>
         <p:spPr>
           <a:xfrm>
-            <a:off x="566928" y="6272784"/>
-            <a:ext cx="8686800" cy="219456"/>
+            <a:off x="566928" y="6217920"/>
+            <a:ext cx="8686800" cy="201168"/>
           </a:xfrm>
           <a:prstGeom prst="rect">
             <a:avLst/>
@@ -8454,14 +7982,14 @@
         </p:nvSpPr>
         <p:spPr>
           <a:xfrm>
-            <a:off x="566928" y="640080"/>
-            <a:ext cx="777240" cy="256032"/>
-          </a:xfrm>
-          <a:prstGeom prst="rect">
-            <a:avLst/>
-          </a:prstGeom>
-          <a:solidFill>
-            <a:srgbClr val="10253F"/>
+            <a:off x="566928" y="685800"/>
+            <a:ext cx="8878824" cy="502920"/>
+          </a:xfrm>
+          <a:prstGeom prst="rect">
+            <a:avLst/>
+          </a:prstGeom>
+          <a:solidFill>
+            <a:srgbClr val="F2F2F2"/>
           </a:solidFill>
           <a:ln>
             <a:noFill/>
@@ -8498,126 +8026,8 @@
         </p:nvSpPr>
         <p:spPr>
           <a:xfrm>
-            <a:off x="566928" y="640080"/>
-            <a:ext cx="777240" cy="256032"/>
-          </a:xfrm>
-          <a:prstGeom prst="rect">
-            <a:avLst/>
-          </a:prstGeom>
-          <a:noFill/>
-        </p:spPr>
-        <p:txBody>
-          <a:bodyPr wrap="square" anchor="ctr" lIns="0" rIns="0" tIns="0" bIns="0">
-            <a:spAutoFit/>
-          </a:bodyPr>
-          <a:lstStyle/>
-          <a:p>
-            <a:pPr algn="ctr"/>
-            <a:r>
-              <a:rPr sz="900" b="1">
-                <a:solidFill>
-                  <a:srgbClr val="FFFFFF"/>
-                </a:solidFill>
-                <a:latin typeface="メイリオ"/>
-                <a:ea typeface="メイリオ"/>
-                <a:cs typeface="メイリオ"/>
-              </a:rPr>
-              <a:t>9月号</a:t>
-            </a:r>
-          </a:p>
-        </p:txBody>
-      </p:sp>
-      <p:sp>
-        <p:nvSpPr>
-          <p:cNvPr id="5" name="TextBox 4"/>
-          <p:cNvSpPr txBox="1"/>
-          <p:nvPr/>
-        </p:nvSpPr>
-        <p:spPr>
-          <a:xfrm>
-            <a:off x="1481328" y="640080"/>
-            <a:ext cx="8046720" cy="256032"/>
-          </a:xfrm>
-          <a:prstGeom prst="rect">
-            <a:avLst/>
-          </a:prstGeom>
-          <a:noFill/>
-        </p:spPr>
-        <p:txBody>
-          <a:bodyPr wrap="square" anchor="ctr" lIns="0" rIns="0" tIns="0" bIns="0">
-            <a:spAutoFit/>
-          </a:bodyPr>
-          <a:lstStyle/>
-          <a:p>
-            <a:pPr algn="l"/>
-            <a:r>
-              <a:rPr sz="950" b="0">
-                <a:solidFill>
-                  <a:srgbClr val="494848"/>
-                </a:solidFill>
-                <a:latin typeface="メイリオ"/>
-                <a:ea typeface="メイリオ"/>
-                <a:cs typeface="メイリオ"/>
-              </a:rPr>
-              <a:t>対象業界：－　　フェーズ：－　　代理店限定：－　　展開禁止：－</a:t>
-            </a:r>
-          </a:p>
-        </p:txBody>
-      </p:sp>
-      <p:sp>
-        <p:nvSpPr>
-          <p:cNvPr id="6" name="Rectangle 5"/>
-          <p:cNvSpPr/>
-          <p:nvPr/>
-        </p:nvSpPr>
-        <p:spPr>
-          <a:xfrm>
-            <a:off x="566928" y="1005840"/>
-            <a:ext cx="8878824" cy="566928"/>
-          </a:xfrm>
-          <a:prstGeom prst="rect">
-            <a:avLst/>
-          </a:prstGeom>
-          <a:solidFill>
-            <a:srgbClr val="F2F2F2"/>
-          </a:solidFill>
-          <a:ln>
-            <a:noFill/>
-          </a:ln>
-          <a:effectLst/>
-        </p:spPr>
-        <p:style>
-          <a:lnRef idx="1">
-            <a:schemeClr val="accent1"/>
-          </a:lnRef>
-          <a:fillRef idx="3">
-            <a:schemeClr val="accent1"/>
-          </a:fillRef>
-          <a:effectRef idx="2">
-            <a:schemeClr val="accent1"/>
-          </a:effectRef>
-          <a:fontRef idx="minor">
-            <a:schemeClr val="lt1"/>
-          </a:fontRef>
-        </p:style>
-        <p:txBody>
-          <a:bodyPr rtlCol="0" anchor="ctr"/>
-          <a:lstStyle/>
-          <a:p>
-            <a:pPr algn="ctr"/>
-          </a:p>
-        </p:txBody>
-      </p:sp>
-      <p:sp>
-        <p:nvSpPr>
-          <p:cNvPr id="7" name="TextBox 6"/>
-          <p:cNvSpPr txBox="1"/>
-          <p:nvPr/>
-        </p:nvSpPr>
-        <p:spPr>
-          <a:xfrm>
-            <a:off x="749808" y="1005840"/>
-            <a:ext cx="8513064" cy="566928"/>
+            <a:off x="749808" y="685800"/>
+            <a:ext cx="8513064" cy="502920"/>
           </a:xfrm>
           <a:prstGeom prst="rect">
             <a:avLst/>
@@ -8651,14 +8061,14 @@
       </p:sp>
       <p:sp>
         <p:nvSpPr>
-          <p:cNvPr id="8" name="Rectangle 7"/>
+          <p:cNvPr id="5" name="Rectangle 4"/>
           <p:cNvSpPr/>
           <p:nvPr/>
         </p:nvSpPr>
         <p:spPr>
           <a:xfrm>
-            <a:off x="566928" y="1737360"/>
-            <a:ext cx="4347972" cy="2194560"/>
+            <a:off x="566928" y="1325880"/>
+            <a:ext cx="4347972" cy="2331720"/>
           </a:xfrm>
           <a:prstGeom prst="rect">
             <a:avLst/>
@@ -8697,13 +8107,13 @@
       </p:sp>
       <p:sp>
         <p:nvSpPr>
-          <p:cNvPr id="9" name="Rectangle 8"/>
+          <p:cNvPr id="6" name="Rectangle 5"/>
           <p:cNvSpPr/>
           <p:nvPr/>
         </p:nvSpPr>
         <p:spPr>
           <a:xfrm>
-            <a:off x="566928" y="1737360"/>
+            <a:off x="566928" y="1325880"/>
             <a:ext cx="4347972" cy="310896"/>
           </a:xfrm>
           <a:prstGeom prst="rect">
@@ -8741,13 +8151,13 @@
       </p:sp>
       <p:sp>
         <p:nvSpPr>
-          <p:cNvPr id="10" name="TextBox 9"/>
+          <p:cNvPr id="7" name="TextBox 6"/>
           <p:cNvSpPr txBox="1"/>
           <p:nvPr/>
         </p:nvSpPr>
         <p:spPr>
           <a:xfrm>
-            <a:off x="566928" y="1737360"/>
+            <a:off x="566928" y="1325880"/>
             <a:ext cx="4347972" cy="310896"/>
           </a:xfrm>
           <a:prstGeom prst="rect">
@@ -8778,14 +8188,14 @@
       </p:sp>
       <p:sp>
         <p:nvSpPr>
-          <p:cNvPr id="11" name="TextBox 10"/>
+          <p:cNvPr id="8" name="TextBox 7"/>
           <p:cNvSpPr txBox="1"/>
           <p:nvPr/>
         </p:nvSpPr>
         <p:spPr>
           <a:xfrm>
-            <a:off x="731520" y="2139696"/>
-            <a:ext cx="4018788" cy="1700784"/>
+            <a:off x="731520" y="1728216"/>
+            <a:ext cx="4018788" cy="1837944"/>
           </a:xfrm>
           <a:prstGeom prst="rect">
             <a:avLst/>
@@ -8822,14 +8232,14 @@
       </p:sp>
       <p:sp>
         <p:nvSpPr>
-          <p:cNvPr id="12" name="Rectangle 11"/>
+          <p:cNvPr id="9" name="Rectangle 8"/>
           <p:cNvSpPr/>
           <p:nvPr/>
         </p:nvSpPr>
         <p:spPr>
           <a:xfrm>
-            <a:off x="5097780" y="1737360"/>
-            <a:ext cx="4347972" cy="2194560"/>
+            <a:off x="5097780" y="1325880"/>
+            <a:ext cx="4347972" cy="2331720"/>
           </a:xfrm>
           <a:prstGeom prst="rect">
             <a:avLst/>
@@ -8868,13 +8278,13 @@
       </p:sp>
       <p:sp>
         <p:nvSpPr>
-          <p:cNvPr id="13" name="Rectangle 12"/>
+          <p:cNvPr id="10" name="Rectangle 9"/>
           <p:cNvSpPr/>
           <p:nvPr/>
         </p:nvSpPr>
         <p:spPr>
           <a:xfrm>
-            <a:off x="5097780" y="1737360"/>
+            <a:off x="5097780" y="1325880"/>
             <a:ext cx="4347972" cy="310896"/>
           </a:xfrm>
           <a:prstGeom prst="rect">
@@ -8912,13 +8322,13 @@
       </p:sp>
       <p:sp>
         <p:nvSpPr>
-          <p:cNvPr id="14" name="TextBox 13"/>
+          <p:cNvPr id="11" name="TextBox 10"/>
           <p:cNvSpPr txBox="1"/>
           <p:nvPr/>
         </p:nvSpPr>
         <p:spPr>
           <a:xfrm>
-            <a:off x="5097780" y="1737360"/>
+            <a:off x="5097780" y="1325880"/>
             <a:ext cx="4347972" cy="310896"/>
           </a:xfrm>
           <a:prstGeom prst="rect">
@@ -8949,14 +8359,14 @@
       </p:sp>
       <p:sp>
         <p:nvSpPr>
-          <p:cNvPr id="15" name="TextBox 14"/>
+          <p:cNvPr id="12" name="TextBox 11"/>
           <p:cNvSpPr txBox="1"/>
           <p:nvPr/>
         </p:nvSpPr>
         <p:spPr>
           <a:xfrm>
-            <a:off x="5262372" y="2139696"/>
-            <a:ext cx="4018788" cy="1700784"/>
+            <a:off x="5262372" y="1728216"/>
+            <a:ext cx="4018788" cy="1837944"/>
           </a:xfrm>
           <a:prstGeom prst="rect">
             <a:avLst/>
@@ -8993,14 +8403,14 @@
       </p:sp>
       <p:sp>
         <p:nvSpPr>
-          <p:cNvPr id="16" name="Rectangle 15"/>
+          <p:cNvPr id="13" name="Rectangle 12"/>
           <p:cNvSpPr/>
           <p:nvPr/>
         </p:nvSpPr>
         <p:spPr>
           <a:xfrm>
-            <a:off x="566928" y="4069080"/>
-            <a:ext cx="4347972" cy="2194560"/>
+            <a:off x="566928" y="3794760"/>
+            <a:ext cx="4347972" cy="2331720"/>
           </a:xfrm>
           <a:prstGeom prst="rect">
             <a:avLst/>
@@ -9039,13 +8449,13 @@
       </p:sp>
       <p:sp>
         <p:nvSpPr>
-          <p:cNvPr id="17" name="Rectangle 16"/>
+          <p:cNvPr id="14" name="Rectangle 13"/>
           <p:cNvSpPr/>
           <p:nvPr/>
         </p:nvSpPr>
         <p:spPr>
           <a:xfrm>
-            <a:off x="566928" y="4069080"/>
+            <a:off x="566928" y="3794760"/>
             <a:ext cx="4347972" cy="310896"/>
           </a:xfrm>
           <a:prstGeom prst="rect">
@@ -9083,13 +8493,13 @@
       </p:sp>
       <p:sp>
         <p:nvSpPr>
-          <p:cNvPr id="18" name="TextBox 17"/>
+          <p:cNvPr id="15" name="TextBox 14"/>
           <p:cNvSpPr txBox="1"/>
           <p:nvPr/>
         </p:nvSpPr>
         <p:spPr>
           <a:xfrm>
-            <a:off x="566928" y="4069080"/>
+            <a:off x="566928" y="3794760"/>
             <a:ext cx="4347972" cy="310896"/>
           </a:xfrm>
           <a:prstGeom prst="rect">
@@ -9120,14 +8530,14 @@
       </p:sp>
       <p:sp>
         <p:nvSpPr>
-          <p:cNvPr id="19" name="TextBox 18"/>
+          <p:cNvPr id="16" name="TextBox 15"/>
           <p:cNvSpPr txBox="1"/>
           <p:nvPr/>
         </p:nvSpPr>
         <p:spPr>
           <a:xfrm>
-            <a:off x="731520" y="4471416"/>
-            <a:ext cx="4018788" cy="1700784"/>
+            <a:off x="731520" y="4197096"/>
+            <a:ext cx="4018788" cy="1837944"/>
           </a:xfrm>
           <a:prstGeom prst="rect">
             <a:avLst/>
@@ -9164,14 +8574,14 @@
       </p:sp>
       <p:sp>
         <p:nvSpPr>
-          <p:cNvPr id="20" name="Rectangle 19"/>
+          <p:cNvPr id="17" name="Rectangle 16"/>
           <p:cNvSpPr/>
           <p:nvPr/>
         </p:nvSpPr>
         <p:spPr>
           <a:xfrm>
-            <a:off x="5097780" y="4069080"/>
-            <a:ext cx="4347972" cy="2194560"/>
+            <a:off x="5097780" y="3794760"/>
+            <a:ext cx="4347972" cy="2331720"/>
           </a:xfrm>
           <a:prstGeom prst="rect">
             <a:avLst/>
@@ -9210,13 +8620,13 @@
       </p:sp>
       <p:sp>
         <p:nvSpPr>
-          <p:cNvPr id="21" name="Rectangle 20"/>
+          <p:cNvPr id="18" name="Rectangle 17"/>
           <p:cNvSpPr/>
           <p:nvPr/>
         </p:nvSpPr>
         <p:spPr>
           <a:xfrm>
-            <a:off x="5097780" y="4069080"/>
+            <a:off x="5097780" y="3794760"/>
             <a:ext cx="4347972" cy="310896"/>
           </a:xfrm>
           <a:prstGeom prst="rect">
@@ -9254,13 +8664,13 @@
       </p:sp>
       <p:sp>
         <p:nvSpPr>
-          <p:cNvPr id="22" name="TextBox 21"/>
+          <p:cNvPr id="19" name="TextBox 18"/>
           <p:cNvSpPr txBox="1"/>
           <p:nvPr/>
         </p:nvSpPr>
         <p:spPr>
           <a:xfrm>
-            <a:off x="5097780" y="4069080"/>
+            <a:off x="5097780" y="3794760"/>
             <a:ext cx="4347972" cy="310896"/>
           </a:xfrm>
           <a:prstGeom prst="rect">
@@ -9291,14 +8701,14 @@
       </p:sp>
       <p:sp>
         <p:nvSpPr>
-          <p:cNvPr id="23" name="TextBox 22"/>
+          <p:cNvPr id="20" name="TextBox 19"/>
           <p:cNvSpPr txBox="1"/>
           <p:nvPr/>
         </p:nvSpPr>
         <p:spPr>
           <a:xfrm>
-            <a:off x="5262372" y="4471416"/>
-            <a:ext cx="4018788" cy="1700784"/>
+            <a:off x="5262372" y="4197096"/>
+            <a:ext cx="4018788" cy="1837944"/>
           </a:xfrm>
           <a:prstGeom prst="rect">
             <a:avLst/>
@@ -9335,14 +8745,14 @@
       </p:sp>
       <p:sp>
         <p:nvSpPr>
-          <p:cNvPr id="24" name="TextBox 23"/>
+          <p:cNvPr id="21" name="TextBox 20"/>
           <p:cNvSpPr txBox="1"/>
           <p:nvPr/>
         </p:nvSpPr>
         <p:spPr>
           <a:xfrm>
-            <a:off x="566928" y="6272784"/>
-            <a:ext cx="8686800" cy="219456"/>
+            <a:off x="566928" y="6217920"/>
+            <a:ext cx="8686800" cy="201168"/>
           </a:xfrm>
           <a:prstGeom prst="rect">
             <a:avLst/>
@@ -9445,14 +8855,14 @@
         </p:nvSpPr>
         <p:spPr>
           <a:xfrm>
-            <a:off x="566928" y="640080"/>
-            <a:ext cx="777240" cy="256032"/>
-          </a:xfrm>
-          <a:prstGeom prst="rect">
-            <a:avLst/>
-          </a:prstGeom>
-          <a:solidFill>
-            <a:srgbClr val="10253F"/>
+            <a:off x="566928" y="685800"/>
+            <a:ext cx="8878824" cy="502920"/>
+          </a:xfrm>
+          <a:prstGeom prst="rect">
+            <a:avLst/>
+          </a:prstGeom>
+          <a:solidFill>
+            <a:srgbClr val="F2F2F2"/>
           </a:solidFill>
           <a:ln>
             <a:noFill/>
@@ -9489,126 +8899,8 @@
         </p:nvSpPr>
         <p:spPr>
           <a:xfrm>
-            <a:off x="566928" y="640080"/>
-            <a:ext cx="777240" cy="256032"/>
-          </a:xfrm>
-          <a:prstGeom prst="rect">
-            <a:avLst/>
-          </a:prstGeom>
-          <a:noFill/>
-        </p:spPr>
-        <p:txBody>
-          <a:bodyPr wrap="square" anchor="ctr" lIns="0" rIns="0" tIns="0" bIns="0">
-            <a:spAutoFit/>
-          </a:bodyPr>
-          <a:lstStyle/>
-          <a:p>
-            <a:pPr algn="ctr"/>
-            <a:r>
-              <a:rPr sz="900" b="1">
-                <a:solidFill>
-                  <a:srgbClr val="FFFFFF"/>
-                </a:solidFill>
-                <a:latin typeface="メイリオ"/>
-                <a:ea typeface="メイリオ"/>
-                <a:cs typeface="メイリオ"/>
-              </a:rPr>
-              <a:t>9月号</a:t>
-            </a:r>
-          </a:p>
-        </p:txBody>
-      </p:sp>
-      <p:sp>
-        <p:nvSpPr>
-          <p:cNvPr id="5" name="TextBox 4"/>
-          <p:cNvSpPr txBox="1"/>
-          <p:nvPr/>
-        </p:nvSpPr>
-        <p:spPr>
-          <a:xfrm>
-            <a:off x="1481328" y="640080"/>
-            <a:ext cx="8046720" cy="256032"/>
-          </a:xfrm>
-          <a:prstGeom prst="rect">
-            <a:avLst/>
-          </a:prstGeom>
-          <a:noFill/>
-        </p:spPr>
-        <p:txBody>
-          <a:bodyPr wrap="square" anchor="ctr" lIns="0" rIns="0" tIns="0" bIns="0">
-            <a:spAutoFit/>
-          </a:bodyPr>
-          <a:lstStyle/>
-          <a:p>
-            <a:pPr algn="l"/>
-            <a:r>
-              <a:rPr sz="950" b="0">
-                <a:solidFill>
-                  <a:srgbClr val="494848"/>
-                </a:solidFill>
-                <a:latin typeface="メイリオ"/>
-                <a:ea typeface="メイリオ"/>
-                <a:cs typeface="メイリオ"/>
-              </a:rPr>
-              <a:t>対象業界：－　　フェーズ：－　　代理店限定：－　　展開禁止：－</a:t>
-            </a:r>
-          </a:p>
-        </p:txBody>
-      </p:sp>
-      <p:sp>
-        <p:nvSpPr>
-          <p:cNvPr id="6" name="Rectangle 5"/>
-          <p:cNvSpPr/>
-          <p:nvPr/>
-        </p:nvSpPr>
-        <p:spPr>
-          <a:xfrm>
-            <a:off x="566928" y="1005840"/>
-            <a:ext cx="8878824" cy="566928"/>
-          </a:xfrm>
-          <a:prstGeom prst="rect">
-            <a:avLst/>
-          </a:prstGeom>
-          <a:solidFill>
-            <a:srgbClr val="F2F2F2"/>
-          </a:solidFill>
-          <a:ln>
-            <a:noFill/>
-          </a:ln>
-          <a:effectLst/>
-        </p:spPr>
-        <p:style>
-          <a:lnRef idx="1">
-            <a:schemeClr val="accent1"/>
-          </a:lnRef>
-          <a:fillRef idx="3">
-            <a:schemeClr val="accent1"/>
-          </a:fillRef>
-          <a:effectRef idx="2">
-            <a:schemeClr val="accent1"/>
-          </a:effectRef>
-          <a:fontRef idx="minor">
-            <a:schemeClr val="lt1"/>
-          </a:fontRef>
-        </p:style>
-        <p:txBody>
-          <a:bodyPr rtlCol="0" anchor="ctr"/>
-          <a:lstStyle/>
-          <a:p>
-            <a:pPr algn="ctr"/>
-          </a:p>
-        </p:txBody>
-      </p:sp>
-      <p:sp>
-        <p:nvSpPr>
-          <p:cNvPr id="7" name="TextBox 6"/>
-          <p:cNvSpPr txBox="1"/>
-          <p:nvPr/>
-        </p:nvSpPr>
-        <p:spPr>
-          <a:xfrm>
-            <a:off x="749808" y="1005840"/>
-            <a:ext cx="8513064" cy="566928"/>
+            <a:off x="749808" y="685800"/>
+            <a:ext cx="8513064" cy="502920"/>
           </a:xfrm>
           <a:prstGeom prst="rect">
             <a:avLst/>
@@ -9642,14 +8934,14 @@
       </p:sp>
       <p:sp>
         <p:nvSpPr>
-          <p:cNvPr id="8" name="Rectangle 7"/>
+          <p:cNvPr id="5" name="Rectangle 4"/>
           <p:cNvSpPr/>
           <p:nvPr/>
         </p:nvSpPr>
         <p:spPr>
           <a:xfrm>
-            <a:off x="566928" y="1737360"/>
-            <a:ext cx="4347972" cy="2194560"/>
+            <a:off x="566928" y="1325880"/>
+            <a:ext cx="4347972" cy="2331720"/>
           </a:xfrm>
           <a:prstGeom prst="rect">
             <a:avLst/>
@@ -9688,13 +8980,13 @@
       </p:sp>
       <p:sp>
         <p:nvSpPr>
-          <p:cNvPr id="9" name="Rectangle 8"/>
+          <p:cNvPr id="6" name="Rectangle 5"/>
           <p:cNvSpPr/>
           <p:nvPr/>
         </p:nvSpPr>
         <p:spPr>
           <a:xfrm>
-            <a:off x="566928" y="1737360"/>
+            <a:off x="566928" y="1325880"/>
             <a:ext cx="4347972" cy="310896"/>
           </a:xfrm>
           <a:prstGeom prst="rect">
@@ -9732,13 +9024,13 @@
       </p:sp>
       <p:sp>
         <p:nvSpPr>
-          <p:cNvPr id="10" name="TextBox 9"/>
+          <p:cNvPr id="7" name="TextBox 6"/>
           <p:cNvSpPr txBox="1"/>
           <p:nvPr/>
         </p:nvSpPr>
         <p:spPr>
           <a:xfrm>
-            <a:off x="566928" y="1737360"/>
+            <a:off x="566928" y="1325880"/>
             <a:ext cx="4347972" cy="310896"/>
           </a:xfrm>
           <a:prstGeom prst="rect">
@@ -9769,14 +9061,14 @@
       </p:sp>
       <p:sp>
         <p:nvSpPr>
-          <p:cNvPr id="11" name="TextBox 10"/>
+          <p:cNvPr id="8" name="TextBox 7"/>
           <p:cNvSpPr txBox="1"/>
           <p:nvPr/>
         </p:nvSpPr>
         <p:spPr>
           <a:xfrm>
-            <a:off x="731520" y="2139696"/>
-            <a:ext cx="4018788" cy="1700784"/>
+            <a:off x="731520" y="1728216"/>
+            <a:ext cx="4018788" cy="1837944"/>
           </a:xfrm>
           <a:prstGeom prst="rect">
             <a:avLst/>
@@ -9834,14 +9126,14 @@
       </p:sp>
       <p:sp>
         <p:nvSpPr>
-          <p:cNvPr id="12" name="Rectangle 11"/>
+          <p:cNvPr id="9" name="Rectangle 8"/>
           <p:cNvSpPr/>
           <p:nvPr/>
         </p:nvSpPr>
         <p:spPr>
           <a:xfrm>
-            <a:off x="5097780" y="1737360"/>
-            <a:ext cx="4347972" cy="2194560"/>
+            <a:off x="5097780" y="1325880"/>
+            <a:ext cx="4347972" cy="2331720"/>
           </a:xfrm>
           <a:prstGeom prst="rect">
             <a:avLst/>
@@ -9880,13 +9172,13 @@
       </p:sp>
       <p:sp>
         <p:nvSpPr>
-          <p:cNvPr id="13" name="Rectangle 12"/>
+          <p:cNvPr id="10" name="Rectangle 9"/>
           <p:cNvSpPr/>
           <p:nvPr/>
         </p:nvSpPr>
         <p:spPr>
           <a:xfrm>
-            <a:off x="5097780" y="1737360"/>
+            <a:off x="5097780" y="1325880"/>
             <a:ext cx="4347972" cy="310896"/>
           </a:xfrm>
           <a:prstGeom prst="rect">
@@ -9924,13 +9216,13 @@
       </p:sp>
       <p:sp>
         <p:nvSpPr>
-          <p:cNvPr id="14" name="TextBox 13"/>
+          <p:cNvPr id="11" name="TextBox 10"/>
           <p:cNvSpPr txBox="1"/>
           <p:nvPr/>
         </p:nvSpPr>
         <p:spPr>
           <a:xfrm>
-            <a:off x="5097780" y="1737360"/>
+            <a:off x="5097780" y="1325880"/>
             <a:ext cx="4347972" cy="310896"/>
           </a:xfrm>
           <a:prstGeom prst="rect">
@@ -9961,14 +9253,14 @@
       </p:sp>
       <p:sp>
         <p:nvSpPr>
-          <p:cNvPr id="15" name="TextBox 14"/>
+          <p:cNvPr id="12" name="TextBox 11"/>
           <p:cNvSpPr txBox="1"/>
           <p:nvPr/>
         </p:nvSpPr>
         <p:spPr>
           <a:xfrm>
-            <a:off x="5262372" y="2139696"/>
-            <a:ext cx="4018788" cy="1700784"/>
+            <a:off x="5262372" y="1728216"/>
+            <a:ext cx="4018788" cy="1837944"/>
           </a:xfrm>
           <a:prstGeom prst="rect">
             <a:avLst/>
@@ -10047,14 +9339,14 @@
       </p:sp>
       <p:sp>
         <p:nvSpPr>
-          <p:cNvPr id="16" name="Rectangle 15"/>
+          <p:cNvPr id="13" name="Rectangle 12"/>
           <p:cNvSpPr/>
           <p:nvPr/>
         </p:nvSpPr>
         <p:spPr>
           <a:xfrm>
-            <a:off x="566928" y="4069080"/>
-            <a:ext cx="4347972" cy="2194560"/>
+            <a:off x="566928" y="3794760"/>
+            <a:ext cx="4347972" cy="2331720"/>
           </a:xfrm>
           <a:prstGeom prst="rect">
             <a:avLst/>
@@ -10093,13 +9385,13 @@
       </p:sp>
       <p:sp>
         <p:nvSpPr>
-          <p:cNvPr id="17" name="Rectangle 16"/>
+          <p:cNvPr id="14" name="Rectangle 13"/>
           <p:cNvSpPr/>
           <p:nvPr/>
         </p:nvSpPr>
         <p:spPr>
           <a:xfrm>
-            <a:off x="566928" y="4069080"/>
+            <a:off x="566928" y="3794760"/>
             <a:ext cx="4347972" cy="310896"/>
           </a:xfrm>
           <a:prstGeom prst="rect">
@@ -10137,13 +9429,13 @@
       </p:sp>
       <p:sp>
         <p:nvSpPr>
-          <p:cNvPr id="18" name="TextBox 17"/>
+          <p:cNvPr id="15" name="TextBox 14"/>
           <p:cNvSpPr txBox="1"/>
           <p:nvPr/>
         </p:nvSpPr>
         <p:spPr>
           <a:xfrm>
-            <a:off x="566928" y="4069080"/>
+            <a:off x="566928" y="3794760"/>
             <a:ext cx="4347972" cy="310896"/>
           </a:xfrm>
           <a:prstGeom prst="rect">
@@ -10174,14 +9466,14 @@
       </p:sp>
       <p:sp>
         <p:nvSpPr>
-          <p:cNvPr id="19" name="TextBox 18"/>
+          <p:cNvPr id="16" name="TextBox 15"/>
           <p:cNvSpPr txBox="1"/>
           <p:nvPr/>
         </p:nvSpPr>
         <p:spPr>
           <a:xfrm>
-            <a:off x="731520" y="4471416"/>
-            <a:ext cx="4018788" cy="1700784"/>
+            <a:off x="731520" y="4197096"/>
+            <a:ext cx="4018788" cy="1837944"/>
           </a:xfrm>
           <a:prstGeom prst="rect">
             <a:avLst/>
@@ -10218,14 +9510,14 @@
       </p:sp>
       <p:sp>
         <p:nvSpPr>
-          <p:cNvPr id="20" name="Rectangle 19"/>
+          <p:cNvPr id="17" name="Rectangle 16"/>
           <p:cNvSpPr/>
           <p:nvPr/>
         </p:nvSpPr>
         <p:spPr>
           <a:xfrm>
-            <a:off x="5097780" y="4069080"/>
-            <a:ext cx="4347972" cy="2194560"/>
+            <a:off x="5097780" y="3794760"/>
+            <a:ext cx="4347972" cy="2331720"/>
           </a:xfrm>
           <a:prstGeom prst="rect">
             <a:avLst/>
@@ -10264,13 +9556,13 @@
       </p:sp>
       <p:sp>
         <p:nvSpPr>
-          <p:cNvPr id="21" name="Rectangle 20"/>
+          <p:cNvPr id="18" name="Rectangle 17"/>
           <p:cNvSpPr/>
           <p:nvPr/>
         </p:nvSpPr>
         <p:spPr>
           <a:xfrm>
-            <a:off x="5097780" y="4069080"/>
+            <a:off x="5097780" y="3794760"/>
             <a:ext cx="4347972" cy="310896"/>
           </a:xfrm>
           <a:prstGeom prst="rect">
@@ -10308,13 +9600,13 @@
       </p:sp>
       <p:sp>
         <p:nvSpPr>
-          <p:cNvPr id="22" name="TextBox 21"/>
+          <p:cNvPr id="19" name="TextBox 18"/>
           <p:cNvSpPr txBox="1"/>
           <p:nvPr/>
         </p:nvSpPr>
         <p:spPr>
           <a:xfrm>
-            <a:off x="5097780" y="4069080"/>
+            <a:off x="5097780" y="3794760"/>
             <a:ext cx="4347972" cy="310896"/>
           </a:xfrm>
           <a:prstGeom prst="rect">
@@ -10345,14 +9637,14 @@
       </p:sp>
       <p:sp>
         <p:nvSpPr>
-          <p:cNvPr id="23" name="TextBox 22"/>
+          <p:cNvPr id="20" name="TextBox 19"/>
           <p:cNvSpPr txBox="1"/>
           <p:nvPr/>
         </p:nvSpPr>
         <p:spPr>
           <a:xfrm>
-            <a:off x="5262372" y="4471416"/>
-            <a:ext cx="4018788" cy="1700784"/>
+            <a:off x="5262372" y="4197096"/>
+            <a:ext cx="4018788" cy="1837944"/>
           </a:xfrm>
           <a:prstGeom prst="rect">
             <a:avLst/>
@@ -10389,14 +9681,14 @@
       </p:sp>
       <p:sp>
         <p:nvSpPr>
-          <p:cNvPr id="24" name="TextBox 23"/>
+          <p:cNvPr id="21" name="TextBox 20"/>
           <p:cNvSpPr txBox="1"/>
           <p:nvPr/>
         </p:nvSpPr>
         <p:spPr>
           <a:xfrm>
-            <a:off x="566928" y="6272784"/>
-            <a:ext cx="8686800" cy="219456"/>
+            <a:off x="566928" y="6217920"/>
+            <a:ext cx="8686800" cy="201168"/>
           </a:xfrm>
           <a:prstGeom prst="rect">
             <a:avLst/>
@@ -10505,14 +9797,14 @@
         </p:nvSpPr>
         <p:spPr>
           <a:xfrm>
-            <a:off x="566928" y="640080"/>
-            <a:ext cx="777240" cy="256032"/>
-          </a:xfrm>
-          <a:prstGeom prst="rect">
-            <a:avLst/>
-          </a:prstGeom>
-          <a:solidFill>
-            <a:srgbClr val="10253F"/>
+            <a:off x="566928" y="685800"/>
+            <a:ext cx="8878824" cy="502920"/>
+          </a:xfrm>
+          <a:prstGeom prst="rect">
+            <a:avLst/>
+          </a:prstGeom>
+          <a:solidFill>
+            <a:srgbClr val="F2F2F2"/>
           </a:solidFill>
           <a:ln>
             <a:noFill/>
@@ -10549,126 +9841,8 @@
         </p:nvSpPr>
         <p:spPr>
           <a:xfrm>
-            <a:off x="566928" y="640080"/>
-            <a:ext cx="777240" cy="256032"/>
-          </a:xfrm>
-          <a:prstGeom prst="rect">
-            <a:avLst/>
-          </a:prstGeom>
-          <a:noFill/>
-        </p:spPr>
-        <p:txBody>
-          <a:bodyPr wrap="square" anchor="ctr" lIns="0" rIns="0" tIns="0" bIns="0">
-            <a:spAutoFit/>
-          </a:bodyPr>
-          <a:lstStyle/>
-          <a:p>
-            <a:pPr algn="ctr"/>
-            <a:r>
-              <a:rPr sz="900" b="1">
-                <a:solidFill>
-                  <a:srgbClr val="FFFFFF"/>
-                </a:solidFill>
-                <a:latin typeface="メイリオ"/>
-                <a:ea typeface="メイリオ"/>
-                <a:cs typeface="メイリオ"/>
-              </a:rPr>
-              <a:t>9月号</a:t>
-            </a:r>
-          </a:p>
-        </p:txBody>
-      </p:sp>
-      <p:sp>
-        <p:nvSpPr>
-          <p:cNvPr id="5" name="TextBox 4"/>
-          <p:cNvSpPr txBox="1"/>
-          <p:nvPr/>
-        </p:nvSpPr>
-        <p:spPr>
-          <a:xfrm>
-            <a:off x="1481328" y="640080"/>
-            <a:ext cx="8046720" cy="256032"/>
-          </a:xfrm>
-          <a:prstGeom prst="rect">
-            <a:avLst/>
-          </a:prstGeom>
-          <a:noFill/>
-        </p:spPr>
-        <p:txBody>
-          <a:bodyPr wrap="square" anchor="ctr" lIns="0" rIns="0" tIns="0" bIns="0">
-            <a:spAutoFit/>
-          </a:bodyPr>
-          <a:lstStyle/>
-          <a:p>
-            <a:pPr algn="l"/>
-            <a:r>
-              <a:rPr sz="950" b="0">
-                <a:solidFill>
-                  <a:srgbClr val="494848"/>
-                </a:solidFill>
-                <a:latin typeface="メイリオ"/>
-                <a:ea typeface="メイリオ"/>
-                <a:cs typeface="メイリオ"/>
-              </a:rPr>
-              <a:t>対象業界：－　　フェーズ：－　　代理店限定：－　　展開禁止：－</a:t>
-            </a:r>
-          </a:p>
-        </p:txBody>
-      </p:sp>
-      <p:sp>
-        <p:nvSpPr>
-          <p:cNvPr id="6" name="Rectangle 5"/>
-          <p:cNvSpPr/>
-          <p:nvPr/>
-        </p:nvSpPr>
-        <p:spPr>
-          <a:xfrm>
-            <a:off x="566928" y="1005840"/>
-            <a:ext cx="8878824" cy="566928"/>
-          </a:xfrm>
-          <a:prstGeom prst="rect">
-            <a:avLst/>
-          </a:prstGeom>
-          <a:solidFill>
-            <a:srgbClr val="F2F2F2"/>
-          </a:solidFill>
-          <a:ln>
-            <a:noFill/>
-          </a:ln>
-          <a:effectLst/>
-        </p:spPr>
-        <p:style>
-          <a:lnRef idx="1">
-            <a:schemeClr val="accent1"/>
-          </a:lnRef>
-          <a:fillRef idx="3">
-            <a:schemeClr val="accent1"/>
-          </a:fillRef>
-          <a:effectRef idx="2">
-            <a:schemeClr val="accent1"/>
-          </a:effectRef>
-          <a:fontRef idx="minor">
-            <a:schemeClr val="lt1"/>
-          </a:fontRef>
-        </p:style>
-        <p:txBody>
-          <a:bodyPr rtlCol="0" anchor="ctr"/>
-          <a:lstStyle/>
-          <a:p>
-            <a:pPr algn="ctr"/>
-          </a:p>
-        </p:txBody>
-      </p:sp>
-      <p:sp>
-        <p:nvSpPr>
-          <p:cNvPr id="7" name="TextBox 6"/>
-          <p:cNvSpPr txBox="1"/>
-          <p:nvPr/>
-        </p:nvSpPr>
-        <p:spPr>
-          <a:xfrm>
-            <a:off x="749808" y="1005840"/>
-            <a:ext cx="8513064" cy="566928"/>
+            <a:off x="749808" y="685800"/>
+            <a:ext cx="8513064" cy="502920"/>
           </a:xfrm>
           <a:prstGeom prst="rect">
             <a:avLst/>
@@ -10702,14 +9876,14 @@
       </p:sp>
       <p:sp>
         <p:nvSpPr>
-          <p:cNvPr id="8" name="Rectangle 7"/>
+          <p:cNvPr id="5" name="Rectangle 4"/>
           <p:cNvSpPr/>
           <p:nvPr/>
         </p:nvSpPr>
         <p:spPr>
           <a:xfrm>
-            <a:off x="566928" y="1737360"/>
-            <a:ext cx="4347972" cy="2194560"/>
+            <a:off x="566928" y="1325880"/>
+            <a:ext cx="4347972" cy="2331720"/>
           </a:xfrm>
           <a:prstGeom prst="rect">
             <a:avLst/>
@@ -10748,13 +9922,13 @@
       </p:sp>
       <p:sp>
         <p:nvSpPr>
-          <p:cNvPr id="9" name="Rectangle 8"/>
+          <p:cNvPr id="6" name="Rectangle 5"/>
           <p:cNvSpPr/>
           <p:nvPr/>
         </p:nvSpPr>
         <p:spPr>
           <a:xfrm>
-            <a:off x="566928" y="1737360"/>
+            <a:off x="566928" y="1325880"/>
             <a:ext cx="4347972" cy="310896"/>
           </a:xfrm>
           <a:prstGeom prst="rect">
@@ -10792,13 +9966,13 @@
       </p:sp>
       <p:sp>
         <p:nvSpPr>
-          <p:cNvPr id="10" name="TextBox 9"/>
+          <p:cNvPr id="7" name="TextBox 6"/>
           <p:cNvSpPr txBox="1"/>
           <p:nvPr/>
         </p:nvSpPr>
         <p:spPr>
           <a:xfrm>
-            <a:off x="566928" y="1737360"/>
+            <a:off x="566928" y="1325880"/>
             <a:ext cx="4347972" cy="310896"/>
           </a:xfrm>
           <a:prstGeom prst="rect">
@@ -10829,14 +10003,14 @@
       </p:sp>
       <p:sp>
         <p:nvSpPr>
-          <p:cNvPr id="11" name="TextBox 10"/>
+          <p:cNvPr id="8" name="TextBox 7"/>
           <p:cNvSpPr txBox="1"/>
           <p:nvPr/>
         </p:nvSpPr>
         <p:spPr>
           <a:xfrm>
-            <a:off x="731520" y="2139696"/>
-            <a:ext cx="4018788" cy="1700784"/>
+            <a:off x="731520" y="1728216"/>
+            <a:ext cx="4018788" cy="1837944"/>
           </a:xfrm>
           <a:prstGeom prst="rect">
             <a:avLst/>
@@ -10873,14 +10047,14 @@
       </p:sp>
       <p:sp>
         <p:nvSpPr>
-          <p:cNvPr id="12" name="Rectangle 11"/>
+          <p:cNvPr id="9" name="Rectangle 8"/>
           <p:cNvSpPr/>
           <p:nvPr/>
         </p:nvSpPr>
         <p:spPr>
           <a:xfrm>
-            <a:off x="5097780" y="1737360"/>
-            <a:ext cx="4347972" cy="2194560"/>
+            <a:off x="5097780" y="1325880"/>
+            <a:ext cx="4347972" cy="2331720"/>
           </a:xfrm>
           <a:prstGeom prst="rect">
             <a:avLst/>
@@ -10919,13 +10093,13 @@
       </p:sp>
       <p:sp>
         <p:nvSpPr>
-          <p:cNvPr id="13" name="Rectangle 12"/>
+          <p:cNvPr id="10" name="Rectangle 9"/>
           <p:cNvSpPr/>
           <p:nvPr/>
         </p:nvSpPr>
         <p:spPr>
           <a:xfrm>
-            <a:off x="5097780" y="1737360"/>
+            <a:off x="5097780" y="1325880"/>
             <a:ext cx="4347972" cy="310896"/>
           </a:xfrm>
           <a:prstGeom prst="rect">
@@ -10963,13 +10137,13 @@
       </p:sp>
       <p:sp>
         <p:nvSpPr>
-          <p:cNvPr id="14" name="TextBox 13"/>
+          <p:cNvPr id="11" name="TextBox 10"/>
           <p:cNvSpPr txBox="1"/>
           <p:nvPr/>
         </p:nvSpPr>
         <p:spPr>
           <a:xfrm>
-            <a:off x="5097780" y="1737360"/>
+            <a:off x="5097780" y="1325880"/>
             <a:ext cx="4347972" cy="310896"/>
           </a:xfrm>
           <a:prstGeom prst="rect">
@@ -11000,14 +10174,14 @@
       </p:sp>
       <p:sp>
         <p:nvSpPr>
-          <p:cNvPr id="15" name="TextBox 14"/>
+          <p:cNvPr id="12" name="TextBox 11"/>
           <p:cNvSpPr txBox="1"/>
           <p:nvPr/>
         </p:nvSpPr>
         <p:spPr>
           <a:xfrm>
-            <a:off x="5262372" y="2139696"/>
-            <a:ext cx="4018788" cy="1700784"/>
+            <a:off x="5262372" y="1728216"/>
+            <a:ext cx="4018788" cy="1837944"/>
           </a:xfrm>
           <a:prstGeom prst="rect">
             <a:avLst/>
@@ -11044,14 +10218,14 @@
       </p:sp>
       <p:sp>
         <p:nvSpPr>
-          <p:cNvPr id="16" name="Rectangle 15"/>
+          <p:cNvPr id="13" name="Rectangle 12"/>
           <p:cNvSpPr/>
           <p:nvPr/>
         </p:nvSpPr>
         <p:spPr>
           <a:xfrm>
-            <a:off x="566928" y="4069080"/>
-            <a:ext cx="4347972" cy="2194560"/>
+            <a:off x="566928" y="3794760"/>
+            <a:ext cx="4347972" cy="2331720"/>
           </a:xfrm>
           <a:prstGeom prst="rect">
             <a:avLst/>
@@ -11090,13 +10264,13 @@
       </p:sp>
       <p:sp>
         <p:nvSpPr>
-          <p:cNvPr id="17" name="Rectangle 16"/>
+          <p:cNvPr id="14" name="Rectangle 13"/>
           <p:cNvSpPr/>
           <p:nvPr/>
         </p:nvSpPr>
         <p:spPr>
           <a:xfrm>
-            <a:off x="566928" y="4069080"/>
+            <a:off x="566928" y="3794760"/>
             <a:ext cx="4347972" cy="310896"/>
           </a:xfrm>
           <a:prstGeom prst="rect">
@@ -11134,13 +10308,13 @@
       </p:sp>
       <p:sp>
         <p:nvSpPr>
-          <p:cNvPr id="18" name="TextBox 17"/>
+          <p:cNvPr id="15" name="TextBox 14"/>
           <p:cNvSpPr txBox="1"/>
           <p:nvPr/>
         </p:nvSpPr>
         <p:spPr>
           <a:xfrm>
-            <a:off x="566928" y="4069080"/>
+            <a:off x="566928" y="3794760"/>
             <a:ext cx="4347972" cy="310896"/>
           </a:xfrm>
           <a:prstGeom prst="rect">
@@ -11171,14 +10345,14 @@
       </p:sp>
       <p:sp>
         <p:nvSpPr>
-          <p:cNvPr id="19" name="TextBox 18"/>
+          <p:cNvPr id="16" name="TextBox 15"/>
           <p:cNvSpPr txBox="1"/>
           <p:nvPr/>
         </p:nvSpPr>
         <p:spPr>
           <a:xfrm>
-            <a:off x="731520" y="4471416"/>
-            <a:ext cx="4018788" cy="1700784"/>
+            <a:off x="731520" y="4197096"/>
+            <a:ext cx="4018788" cy="1837944"/>
           </a:xfrm>
           <a:prstGeom prst="rect">
             <a:avLst/>
@@ -11236,14 +10410,14 @@
       </p:sp>
       <p:sp>
         <p:nvSpPr>
-          <p:cNvPr id="20" name="Rectangle 19"/>
+          <p:cNvPr id="17" name="Rectangle 16"/>
           <p:cNvSpPr/>
           <p:nvPr/>
         </p:nvSpPr>
         <p:spPr>
           <a:xfrm>
-            <a:off x="5097780" y="4069080"/>
-            <a:ext cx="4347972" cy="2194560"/>
+            <a:off x="5097780" y="3794760"/>
+            <a:ext cx="4347972" cy="2331720"/>
           </a:xfrm>
           <a:prstGeom prst="rect">
             <a:avLst/>
@@ -11282,13 +10456,13 @@
       </p:sp>
       <p:sp>
         <p:nvSpPr>
-          <p:cNvPr id="21" name="Rectangle 20"/>
+          <p:cNvPr id="18" name="Rectangle 17"/>
           <p:cNvSpPr/>
           <p:nvPr/>
         </p:nvSpPr>
         <p:spPr>
           <a:xfrm>
-            <a:off x="5097780" y="4069080"/>
+            <a:off x="5097780" y="3794760"/>
             <a:ext cx="4347972" cy="310896"/>
           </a:xfrm>
           <a:prstGeom prst="rect">
@@ -11326,13 +10500,13 @@
       </p:sp>
       <p:sp>
         <p:nvSpPr>
-          <p:cNvPr id="22" name="TextBox 21"/>
+          <p:cNvPr id="19" name="TextBox 18"/>
           <p:cNvSpPr txBox="1"/>
           <p:nvPr/>
         </p:nvSpPr>
         <p:spPr>
           <a:xfrm>
-            <a:off x="5097780" y="4069080"/>
+            <a:off x="5097780" y="3794760"/>
             <a:ext cx="4347972" cy="310896"/>
           </a:xfrm>
           <a:prstGeom prst="rect">
@@ -11363,14 +10537,14 @@
       </p:sp>
       <p:sp>
         <p:nvSpPr>
-          <p:cNvPr id="23" name="TextBox 22"/>
+          <p:cNvPr id="20" name="TextBox 19"/>
           <p:cNvSpPr txBox="1"/>
           <p:nvPr/>
         </p:nvSpPr>
         <p:spPr>
           <a:xfrm>
-            <a:off x="5262372" y="4471416"/>
-            <a:ext cx="4018788" cy="1700784"/>
+            <a:off x="5262372" y="4197096"/>
+            <a:ext cx="4018788" cy="1837944"/>
           </a:xfrm>
           <a:prstGeom prst="rect">
             <a:avLst/>
@@ -11428,14 +10602,14 @@
       </p:sp>
       <p:sp>
         <p:nvSpPr>
-          <p:cNvPr id="24" name="TextBox 23"/>
+          <p:cNvPr id="21" name="TextBox 20"/>
           <p:cNvSpPr txBox="1"/>
           <p:nvPr/>
         </p:nvSpPr>
         <p:spPr>
           <a:xfrm>
-            <a:off x="566928" y="6272784"/>
-            <a:ext cx="8686800" cy="219456"/>
+            <a:off x="566928" y="6217920"/>
+            <a:ext cx="8686800" cy="201168"/>
           </a:xfrm>
           <a:prstGeom prst="rect">
             <a:avLst/>

--- a/LINEOA媒体最新情報_2026年9月トレンドレポート.pptx
+++ b/LINEOA媒体最新情報_2026年9月トレンドレポート.pptx
@@ -4553,159 +4553,9 @@
                 <a:ea typeface="メイリオ"/>
                 <a:cs typeface="メイリオ"/>
               </a:rPr>
-              <a:t>・条件を満たすとお気に入り追加を促すポップアップが表示</a:t>
-            </a:r>
-          </a:p>
-        </p:txBody>
-      </p:sp>
-      <p:sp>
-        <p:nvSpPr>
-          <p:cNvPr id="9" name="Rectangle 8"/>
-          <p:cNvSpPr/>
-          <p:nvPr/>
-        </p:nvSpPr>
-        <p:spPr>
-          <a:xfrm>
-            <a:off x="5097780" y="1325880"/>
-            <a:ext cx="4347972" cy="2331720"/>
-          </a:xfrm>
-          <a:prstGeom prst="rect">
-            <a:avLst/>
-          </a:prstGeom>
-          <a:solidFill>
-            <a:srgbClr val="FFFFFF"/>
-          </a:solidFill>
-          <a:ln w="9525">
-            <a:solidFill>
-              <a:srgbClr val="D9D9D9"/>
-            </a:solidFill>
-          </a:ln>
-          <a:effectLst/>
-        </p:spPr>
-        <p:style>
-          <a:lnRef idx="1">
-            <a:schemeClr val="accent1"/>
-          </a:lnRef>
-          <a:fillRef idx="3">
-            <a:schemeClr val="accent1"/>
-          </a:fillRef>
-          <a:effectRef idx="2">
-            <a:schemeClr val="accent1"/>
-          </a:effectRef>
-          <a:fontRef idx="minor">
-            <a:schemeClr val="lt1"/>
-          </a:fontRef>
-        </p:style>
-        <p:txBody>
-          <a:bodyPr rtlCol="0" anchor="ctr"/>
-          <a:lstStyle/>
-          <a:p>
-            <a:pPr algn="ctr"/>
-          </a:p>
-        </p:txBody>
-      </p:sp>
-      <p:sp>
-        <p:nvSpPr>
-          <p:cNvPr id="10" name="Rectangle 9"/>
-          <p:cNvSpPr/>
-          <p:nvPr/>
-        </p:nvSpPr>
-        <p:spPr>
-          <a:xfrm>
-            <a:off x="5097780" y="1325880"/>
-            <a:ext cx="4347972" cy="310896"/>
-          </a:xfrm>
-          <a:prstGeom prst="rect">
-            <a:avLst/>
-          </a:prstGeom>
-          <a:solidFill>
-            <a:srgbClr val="10253F"/>
-          </a:solidFill>
-          <a:ln>
-            <a:noFill/>
-          </a:ln>
-          <a:effectLst/>
-        </p:spPr>
-        <p:style>
-          <a:lnRef idx="1">
-            <a:schemeClr val="accent1"/>
-          </a:lnRef>
-          <a:fillRef idx="3">
-            <a:schemeClr val="accent1"/>
-          </a:fillRef>
-          <a:effectRef idx="2">
-            <a:schemeClr val="accent1"/>
-          </a:effectRef>
-          <a:fontRef idx="minor">
-            <a:schemeClr val="lt1"/>
-          </a:fontRef>
-        </p:style>
-        <p:txBody>
-          <a:bodyPr rtlCol="0" anchor="ctr"/>
-          <a:lstStyle/>
-          <a:p>
-            <a:pPr algn="ctr"/>
-          </a:p>
-        </p:txBody>
-      </p:sp>
-      <p:sp>
-        <p:nvSpPr>
-          <p:cNvPr id="11" name="TextBox 10"/>
-          <p:cNvSpPr txBox="1"/>
-          <p:nvPr/>
-        </p:nvSpPr>
-        <p:spPr>
-          <a:xfrm>
-            <a:off x="5097780" y="1325880"/>
-            <a:ext cx="4347972" cy="310896"/>
-          </a:xfrm>
-          <a:prstGeom prst="rect">
-            <a:avLst/>
-          </a:prstGeom>
-          <a:noFill/>
-        </p:spPr>
-        <p:txBody>
-          <a:bodyPr wrap="square" anchor="ctr" lIns="0" rIns="0" tIns="0" bIns="0">
-            <a:spAutoFit/>
-          </a:bodyPr>
-          <a:lstStyle/>
-          <a:p>
-            <a:pPr algn="ctr"/>
-            <a:r>
-              <a:rPr sz="1050" b="1">
-                <a:solidFill>
-                  <a:srgbClr val="FFFFFF"/>
-                </a:solidFill>
-                <a:latin typeface="メイリオ"/>
-                <a:ea typeface="メイリオ"/>
-                <a:cs typeface="メイリオ"/>
-              </a:rPr>
-              <a:t>料金体系・出稿条件</a:t>
-            </a:r>
-          </a:p>
-        </p:txBody>
-      </p:sp>
-      <p:sp>
-        <p:nvSpPr>
-          <p:cNvPr id="12" name="TextBox 11"/>
-          <p:cNvSpPr txBox="1"/>
-          <p:nvPr/>
-        </p:nvSpPr>
-        <p:spPr>
-          <a:xfrm>
-            <a:off x="5262372" y="1728216"/>
-            <a:ext cx="4018788" cy="1837944"/>
-          </a:xfrm>
-          <a:prstGeom prst="rect">
-            <a:avLst/>
-          </a:prstGeom>
-          <a:noFill/>
-        </p:spPr>
-        <p:txBody>
-          <a:bodyPr wrap="square" lIns="0" rIns="0" tIns="0" bIns="0">
-            <a:spAutoFit/>
-          </a:bodyPr>
-          <a:lstStyle/>
+              <a:t>・条件を満たすとミニアプリを閉じたタイミングでポップアップが表示</a:t>
+            </a:r>
+          </a:p>
           <a:p>
             <a:pPr>
               <a:lnSpc>
@@ -4724,20 +4574,20 @@
                 <a:ea typeface="メイリオ"/>
                 <a:cs typeface="メイリオ"/>
               </a:rPr>
-              <a:t>・－</a:t>
-            </a:r>
-          </a:p>
-        </p:txBody>
-      </p:sp>
-      <p:sp>
-        <p:nvSpPr>
-          <p:cNvPr id="13" name="Rectangle 12"/>
+              <a:t>・「お気に入りに追加」を押すとアプリタブの「お気に入り」に追加され、同時にアプリタブへ自動遷移</a:t>
+            </a:r>
+          </a:p>
+        </p:txBody>
+      </p:sp>
+      <p:sp>
+        <p:nvSpPr>
+          <p:cNvPr id="9" name="Rectangle 8"/>
           <p:cNvSpPr/>
           <p:nvPr/>
         </p:nvSpPr>
         <p:spPr>
           <a:xfrm>
-            <a:off x="566928" y="3794760"/>
+            <a:off x="5097780" y="1325880"/>
             <a:ext cx="4347972" cy="2331720"/>
           </a:xfrm>
           <a:prstGeom prst="rect">
@@ -4777,13 +4627,13 @@
       </p:sp>
       <p:sp>
         <p:nvSpPr>
-          <p:cNvPr id="14" name="Rectangle 13"/>
+          <p:cNvPr id="10" name="Rectangle 9"/>
           <p:cNvSpPr/>
           <p:nvPr/>
         </p:nvSpPr>
         <p:spPr>
           <a:xfrm>
-            <a:off x="566928" y="3794760"/>
+            <a:off x="5097780" y="1325880"/>
             <a:ext cx="4347972" cy="310896"/>
           </a:xfrm>
           <a:prstGeom prst="rect">
@@ -4821,13 +4671,13 @@
       </p:sp>
       <p:sp>
         <p:nvSpPr>
-          <p:cNvPr id="15" name="TextBox 14"/>
+          <p:cNvPr id="11" name="TextBox 10"/>
           <p:cNvSpPr txBox="1"/>
           <p:nvPr/>
         </p:nvSpPr>
         <p:spPr>
           <a:xfrm>
-            <a:off x="566928" y="3794760"/>
+            <a:off x="5097780" y="1325880"/>
             <a:ext cx="4347972" cy="310896"/>
           </a:xfrm>
           <a:prstGeom prst="rect">
@@ -4851,20 +4701,20 @@
                 <a:ea typeface="メイリオ"/>
                 <a:cs typeface="メイリオ"/>
               </a:rPr>
-              <a:t>スケジュール・導入フロー</a:t>
-            </a:r>
-          </a:p>
-        </p:txBody>
-      </p:sp>
-      <p:sp>
-        <p:nvSpPr>
-          <p:cNvPr id="16" name="TextBox 15"/>
+              <a:t>料金体系・出稿条件</a:t>
+            </a:r>
+          </a:p>
+        </p:txBody>
+      </p:sp>
+      <p:sp>
+        <p:nvSpPr>
+          <p:cNvPr id="12" name="TextBox 11"/>
           <p:cNvSpPr txBox="1"/>
           <p:nvPr/>
         </p:nvSpPr>
         <p:spPr>
           <a:xfrm>
-            <a:off x="731520" y="4197096"/>
+            <a:off x="5262372" y="1728216"/>
             <a:ext cx="4018788" cy="1837944"/>
           </a:xfrm>
           <a:prstGeom prst="rect">
@@ -4895,20 +4745,20 @@
                 <a:ea typeface="メイリオ"/>
                 <a:cs typeface="メイリオ"/>
               </a:rPr>
-              <a:t>・－（リリース日は要確認）</a:t>
-            </a:r>
-          </a:p>
-        </p:txBody>
-      </p:sp>
-      <p:sp>
-        <p:nvSpPr>
-          <p:cNvPr id="17" name="Rectangle 16"/>
+              <a:t>・－</a:t>
+            </a:r>
+          </a:p>
+        </p:txBody>
+      </p:sp>
+      <p:sp>
+        <p:nvSpPr>
+          <p:cNvPr id="13" name="Rectangle 12"/>
           <p:cNvSpPr/>
           <p:nvPr/>
         </p:nvSpPr>
         <p:spPr>
           <a:xfrm>
-            <a:off x="5097780" y="3794760"/>
+            <a:off x="566928" y="3794760"/>
             <a:ext cx="4347972" cy="2331720"/>
           </a:xfrm>
           <a:prstGeom prst="rect">
@@ -4948,13 +4798,13 @@
       </p:sp>
       <p:sp>
         <p:nvSpPr>
-          <p:cNvPr id="18" name="Rectangle 17"/>
+          <p:cNvPr id="14" name="Rectangle 13"/>
           <p:cNvSpPr/>
           <p:nvPr/>
         </p:nvSpPr>
         <p:spPr>
           <a:xfrm>
-            <a:off x="5097780" y="3794760"/>
+            <a:off x="566928" y="3794760"/>
             <a:ext cx="4347972" cy="310896"/>
           </a:xfrm>
           <a:prstGeom prst="rect">
@@ -4992,13 +4842,13 @@
       </p:sp>
       <p:sp>
         <p:nvSpPr>
-          <p:cNvPr id="19" name="TextBox 18"/>
+          <p:cNvPr id="15" name="TextBox 14"/>
           <p:cNvSpPr txBox="1"/>
           <p:nvPr/>
         </p:nvSpPr>
         <p:spPr>
           <a:xfrm>
-            <a:off x="5097780" y="3794760"/>
+            <a:off x="566928" y="3794760"/>
             <a:ext cx="4347972" cy="310896"/>
           </a:xfrm>
           <a:prstGeom prst="rect">
@@ -5022,20 +4872,20 @@
                 <a:ea typeface="メイリオ"/>
                 <a:cs typeface="メイリオ"/>
               </a:rPr>
-              <a:t>注意点・影響</a:t>
-            </a:r>
-          </a:p>
-        </p:txBody>
-      </p:sp>
-      <p:sp>
-        <p:nvSpPr>
-          <p:cNvPr id="20" name="TextBox 19"/>
+              <a:t>スケジュール・導入フロー</a:t>
+            </a:r>
+          </a:p>
+        </p:txBody>
+      </p:sp>
+      <p:sp>
+        <p:nvSpPr>
+          <p:cNvPr id="16" name="TextBox 15"/>
           <p:cNvSpPr txBox="1"/>
           <p:nvPr/>
         </p:nvSpPr>
         <p:spPr>
           <a:xfrm>
-            <a:off x="5262372" y="4197096"/>
+            <a:off x="731520" y="4197096"/>
             <a:ext cx="4018788" cy="1837944"/>
           </a:xfrm>
           <a:prstGeom prst="rect">
@@ -5066,7 +4916,304 @@
                 <a:ea typeface="メイリオ"/>
                 <a:cs typeface="メイリオ"/>
               </a:rPr>
+              <a:t>・リリース予定日：8月31日（アプリのバージョンアップデートに伴って変更の可能性あり）</a:t>
+            </a:r>
+          </a:p>
+          <a:p>
+            <a:pPr>
+              <a:lnSpc>
+                <a:spcPct val="120000"/>
+              </a:lnSpc>
+              <a:spcAft>
+                <a:spcPts val="300"/>
+              </a:spcAft>
+            </a:pPr>
+            <a:r>
+              <a:rPr sz="1000">
+                <a:solidFill>
+                  <a:srgbClr val="343434"/>
+                </a:solidFill>
+                <a:latin typeface="メイリオ"/>
+                <a:ea typeface="メイリオ"/>
+                <a:cs typeface="メイリオ"/>
+              </a:rPr>
+              <a:t>・表示トリガーは数週間のABテストを経て、より効果の高い条件を100%反映予定（現状は暫定条件で運用中）</a:t>
+            </a:r>
+          </a:p>
+        </p:txBody>
+      </p:sp>
+      <p:sp>
+        <p:nvSpPr>
+          <p:cNvPr id="17" name="Rectangle 16"/>
+          <p:cNvSpPr/>
+          <p:nvPr/>
+        </p:nvSpPr>
+        <p:spPr>
+          <a:xfrm>
+            <a:off x="5097780" y="3794760"/>
+            <a:ext cx="4347972" cy="2331720"/>
+          </a:xfrm>
+          <a:prstGeom prst="rect">
+            <a:avLst/>
+          </a:prstGeom>
+          <a:solidFill>
+            <a:srgbClr val="FFFFFF"/>
+          </a:solidFill>
+          <a:ln w="9525">
+            <a:solidFill>
+              <a:srgbClr val="D9D9D9"/>
+            </a:solidFill>
+          </a:ln>
+          <a:effectLst/>
+        </p:spPr>
+        <p:style>
+          <a:lnRef idx="1">
+            <a:schemeClr val="accent1"/>
+          </a:lnRef>
+          <a:fillRef idx="3">
+            <a:schemeClr val="accent1"/>
+          </a:fillRef>
+          <a:effectRef idx="2">
+            <a:schemeClr val="accent1"/>
+          </a:effectRef>
+          <a:fontRef idx="minor">
+            <a:schemeClr val="lt1"/>
+          </a:fontRef>
+        </p:style>
+        <p:txBody>
+          <a:bodyPr rtlCol="0" anchor="ctr"/>
+          <a:lstStyle/>
+          <a:p>
+            <a:pPr algn="ctr"/>
+          </a:p>
+        </p:txBody>
+      </p:sp>
+      <p:sp>
+        <p:nvSpPr>
+          <p:cNvPr id="18" name="Rectangle 17"/>
+          <p:cNvSpPr/>
+          <p:nvPr/>
+        </p:nvSpPr>
+        <p:spPr>
+          <a:xfrm>
+            <a:off x="5097780" y="3794760"/>
+            <a:ext cx="4347972" cy="310896"/>
+          </a:xfrm>
+          <a:prstGeom prst="rect">
+            <a:avLst/>
+          </a:prstGeom>
+          <a:solidFill>
+            <a:srgbClr val="10253F"/>
+          </a:solidFill>
+          <a:ln>
+            <a:noFill/>
+          </a:ln>
+          <a:effectLst/>
+        </p:spPr>
+        <p:style>
+          <a:lnRef idx="1">
+            <a:schemeClr val="accent1"/>
+          </a:lnRef>
+          <a:fillRef idx="3">
+            <a:schemeClr val="accent1"/>
+          </a:fillRef>
+          <a:effectRef idx="2">
+            <a:schemeClr val="accent1"/>
+          </a:effectRef>
+          <a:fontRef idx="minor">
+            <a:schemeClr val="lt1"/>
+          </a:fontRef>
+        </p:style>
+        <p:txBody>
+          <a:bodyPr rtlCol="0" anchor="ctr"/>
+          <a:lstStyle/>
+          <a:p>
+            <a:pPr algn="ctr"/>
+          </a:p>
+        </p:txBody>
+      </p:sp>
+      <p:sp>
+        <p:nvSpPr>
+          <p:cNvPr id="19" name="TextBox 18"/>
+          <p:cNvSpPr txBox="1"/>
+          <p:nvPr/>
+        </p:nvSpPr>
+        <p:spPr>
+          <a:xfrm>
+            <a:off x="5097780" y="3794760"/>
+            <a:ext cx="4347972" cy="310896"/>
+          </a:xfrm>
+          <a:prstGeom prst="rect">
+            <a:avLst/>
+          </a:prstGeom>
+          <a:noFill/>
+        </p:spPr>
+        <p:txBody>
+          <a:bodyPr wrap="square" anchor="ctr" lIns="0" rIns="0" tIns="0" bIns="0">
+            <a:spAutoFit/>
+          </a:bodyPr>
+          <a:lstStyle/>
+          <a:p>
+            <a:pPr algn="ctr"/>
+            <a:r>
+              <a:rPr sz="1050" b="1">
+                <a:solidFill>
+                  <a:srgbClr val="FFFFFF"/>
+                </a:solidFill>
+                <a:latin typeface="メイリオ"/>
+                <a:ea typeface="メイリオ"/>
+                <a:cs typeface="メイリオ"/>
+              </a:rPr>
+              <a:t>注意点・影響</a:t>
+            </a:r>
+          </a:p>
+        </p:txBody>
+      </p:sp>
+      <p:sp>
+        <p:nvSpPr>
+          <p:cNvPr id="20" name="TextBox 19"/>
+          <p:cNvSpPr txBox="1"/>
+          <p:nvPr/>
+        </p:nvSpPr>
+        <p:spPr>
+          <a:xfrm>
+            <a:off x="5262372" y="4197096"/>
+            <a:ext cx="4018788" cy="1837944"/>
+          </a:xfrm>
+          <a:prstGeom prst="rect">
+            <a:avLst/>
+          </a:prstGeom>
+          <a:noFill/>
+        </p:spPr>
+        <p:txBody>
+          <a:bodyPr wrap="square" lIns="0" rIns="0" tIns="0" bIns="0">
+            <a:spAutoFit/>
+          </a:bodyPr>
+          <a:lstStyle/>
+          <a:p>
+            <a:pPr>
+              <a:lnSpc>
+                <a:spcPct val="110000"/>
+              </a:lnSpc>
+              <a:spcAft>
+                <a:spcPts val="300"/>
+              </a:spcAft>
+            </a:pPr>
+            <a:r>
+              <a:rPr sz="850">
+                <a:solidFill>
+                  <a:srgbClr val="343434"/>
+                </a:solidFill>
+                <a:latin typeface="メイリオ"/>
+                <a:ea typeface="メイリオ"/>
+                <a:cs typeface="メイリオ"/>
+              </a:rPr>
               <a:t>・リピート利用ユーザーの再訪導線が強化される。ミニアプリ運用中クライアントへの案内材料になる</a:t>
+            </a:r>
+          </a:p>
+          <a:p>
+            <a:pPr>
+              <a:lnSpc>
+                <a:spcPct val="110000"/>
+              </a:lnSpc>
+              <a:spcAft>
+                <a:spcPts val="300"/>
+              </a:spcAft>
+            </a:pPr>
+            <a:r>
+              <a:rPr sz="850">
+                <a:solidFill>
+                  <a:srgbClr val="343434"/>
+                </a:solidFill>
+                <a:latin typeface="メイリオ"/>
+                <a:ea typeface="メイリオ"/>
+                <a:cs typeface="メイリオ"/>
+              </a:rPr>
+              <a:t>・既にお気に入り登録済みのミニアプリにはポップアップは表示されない</a:t>
+            </a:r>
+          </a:p>
+          <a:p>
+            <a:pPr>
+              <a:lnSpc>
+                <a:spcPct val="110000"/>
+              </a:lnSpc>
+              <a:spcAft>
+                <a:spcPts val="300"/>
+              </a:spcAft>
+            </a:pPr>
+            <a:r>
+              <a:rPr sz="850">
+                <a:solidFill>
+                  <a:srgbClr val="343434"/>
+                </a:solidFill>
+                <a:latin typeface="メイリオ"/>
+                <a:ea typeface="メイリオ"/>
+                <a:cs typeface="メイリオ"/>
+              </a:rPr>
+              <a:t>・追加後に削除した場合、同じミニアプリのポップアップは720時間（30日間）再表示されない</a:t>
+            </a:r>
+          </a:p>
+          <a:p>
+            <a:pPr>
+              <a:lnSpc>
+                <a:spcPct val="110000"/>
+              </a:lnSpc>
+              <a:spcAft>
+                <a:spcPts val="300"/>
+              </a:spcAft>
+            </a:pPr>
+            <a:r>
+              <a:rPr sz="850">
+                <a:solidFill>
+                  <a:srgbClr val="343434"/>
+                </a:solidFill>
+                <a:latin typeface="メイリオ"/>
+                <a:ea typeface="メイリオ"/>
+                <a:cs typeface="メイリオ"/>
+              </a:rPr>
+              <a:t>・「Not now」で見送った場合は14日間再表示されない</a:t>
+            </a:r>
+          </a:p>
+          <a:p>
+            <a:pPr>
+              <a:lnSpc>
+                <a:spcPct val="110000"/>
+              </a:lnSpc>
+              <a:spcAft>
+                <a:spcPts val="300"/>
+              </a:spcAft>
+            </a:pPr>
+            <a:r>
+              <a:rPr sz="850">
+                <a:solidFill>
+                  <a:srgbClr val="343434"/>
+                </a:solidFill>
+                <a:latin typeface="メイリオ"/>
+                <a:ea typeface="メイリオ"/>
+                <a:cs typeface="メイリオ"/>
+              </a:rPr>
+              <a:t>・同一ミニアプリへの表示上限は2回。2回とも閉じると永久に対象外になる</a:t>
+            </a:r>
+          </a:p>
+          <a:p>
+            <a:pPr>
+              <a:lnSpc>
+                <a:spcPct val="110000"/>
+              </a:lnSpc>
+              <a:spcAft>
+                <a:spcPts val="300"/>
+              </a:spcAft>
+            </a:pPr>
+            <a:r>
+              <a:rPr sz="850">
+                <a:solidFill>
+                  <a:srgbClr val="343434"/>
+                </a:solidFill>
+                <a:latin typeface="メイリオ"/>
+                <a:ea typeface="メイリオ"/>
+                <a:cs typeface="メイリオ"/>
+              </a:rPr>
+              <a:t>・同一ユーザーへの表示は1日最大1回（直近表示から24時間以内は非表示）</a:t>
             </a:r>
           </a:p>
         </p:txBody>

--- a/LINEOA媒体最新情報_2026年9月トレンドレポート.pptx
+++ b/LINEOA媒体最新情報_2026年9月トレンドレポート.pptx
@@ -6518,156 +6518,6 @@
               <a:t>・Web版管理画面／管理アプリの「分析」タブで確認できる実績値の参照期間を過去36カ月までに変更</a:t>
             </a:r>
           </a:p>
-        </p:txBody>
-      </p:sp>
-      <p:sp>
-        <p:nvSpPr>
-          <p:cNvPr id="9" name="Rectangle 8"/>
-          <p:cNvSpPr/>
-          <p:nvPr/>
-        </p:nvSpPr>
-        <p:spPr>
-          <a:xfrm>
-            <a:off x="5097780" y="1325880"/>
-            <a:ext cx="4347972" cy="2331720"/>
-          </a:xfrm>
-          <a:prstGeom prst="rect">
-            <a:avLst/>
-          </a:prstGeom>
-          <a:solidFill>
-            <a:srgbClr val="FFFFFF"/>
-          </a:solidFill>
-          <a:ln w="9525">
-            <a:solidFill>
-              <a:srgbClr val="D9D9D9"/>
-            </a:solidFill>
-          </a:ln>
-          <a:effectLst/>
-        </p:spPr>
-        <p:style>
-          <a:lnRef idx="1">
-            <a:schemeClr val="accent1"/>
-          </a:lnRef>
-          <a:fillRef idx="3">
-            <a:schemeClr val="accent1"/>
-          </a:fillRef>
-          <a:effectRef idx="2">
-            <a:schemeClr val="accent1"/>
-          </a:effectRef>
-          <a:fontRef idx="minor">
-            <a:schemeClr val="lt1"/>
-          </a:fontRef>
-        </p:style>
-        <p:txBody>
-          <a:bodyPr rtlCol="0" anchor="ctr"/>
-          <a:lstStyle/>
-          <a:p>
-            <a:pPr algn="ctr"/>
-          </a:p>
-        </p:txBody>
-      </p:sp>
-      <p:sp>
-        <p:nvSpPr>
-          <p:cNvPr id="10" name="Rectangle 9"/>
-          <p:cNvSpPr/>
-          <p:nvPr/>
-        </p:nvSpPr>
-        <p:spPr>
-          <a:xfrm>
-            <a:off x="5097780" y="1325880"/>
-            <a:ext cx="4347972" cy="310896"/>
-          </a:xfrm>
-          <a:prstGeom prst="rect">
-            <a:avLst/>
-          </a:prstGeom>
-          <a:solidFill>
-            <a:srgbClr val="10253F"/>
-          </a:solidFill>
-          <a:ln>
-            <a:noFill/>
-          </a:ln>
-          <a:effectLst/>
-        </p:spPr>
-        <p:style>
-          <a:lnRef idx="1">
-            <a:schemeClr val="accent1"/>
-          </a:lnRef>
-          <a:fillRef idx="3">
-            <a:schemeClr val="accent1"/>
-          </a:fillRef>
-          <a:effectRef idx="2">
-            <a:schemeClr val="accent1"/>
-          </a:effectRef>
-          <a:fontRef idx="minor">
-            <a:schemeClr val="lt1"/>
-          </a:fontRef>
-        </p:style>
-        <p:txBody>
-          <a:bodyPr rtlCol="0" anchor="ctr"/>
-          <a:lstStyle/>
-          <a:p>
-            <a:pPr algn="ctr"/>
-          </a:p>
-        </p:txBody>
-      </p:sp>
-      <p:sp>
-        <p:nvSpPr>
-          <p:cNvPr id="11" name="TextBox 10"/>
-          <p:cNvSpPr txBox="1"/>
-          <p:nvPr/>
-        </p:nvSpPr>
-        <p:spPr>
-          <a:xfrm>
-            <a:off x="5097780" y="1325880"/>
-            <a:ext cx="4347972" cy="310896"/>
-          </a:xfrm>
-          <a:prstGeom prst="rect">
-            <a:avLst/>
-          </a:prstGeom>
-          <a:noFill/>
-        </p:spPr>
-        <p:txBody>
-          <a:bodyPr wrap="square" anchor="ctr" lIns="0" rIns="0" tIns="0" bIns="0">
-            <a:spAutoFit/>
-          </a:bodyPr>
-          <a:lstStyle/>
-          <a:p>
-            <a:pPr algn="ctr"/>
-            <a:r>
-              <a:rPr sz="1050" b="1">
-                <a:solidFill>
-                  <a:srgbClr val="FFFFFF"/>
-                </a:solidFill>
-                <a:latin typeface="メイリオ"/>
-                <a:ea typeface="メイリオ"/>
-                <a:cs typeface="メイリオ"/>
-              </a:rPr>
-              <a:t>料金体系・出稿条件</a:t>
-            </a:r>
-          </a:p>
-        </p:txBody>
-      </p:sp>
-      <p:sp>
-        <p:nvSpPr>
-          <p:cNvPr id="12" name="TextBox 11"/>
-          <p:cNvSpPr txBox="1"/>
-          <p:nvPr/>
-        </p:nvSpPr>
-        <p:spPr>
-          <a:xfrm>
-            <a:off x="5262372" y="1728216"/>
-            <a:ext cx="4018788" cy="1837944"/>
-          </a:xfrm>
-          <a:prstGeom prst="rect">
-            <a:avLst/>
-          </a:prstGeom>
-          <a:noFill/>
-        </p:spPr>
-        <p:txBody>
-          <a:bodyPr wrap="square" lIns="0" rIns="0" tIns="0" bIns="0">
-            <a:spAutoFit/>
-          </a:bodyPr>
-          <a:lstStyle/>
           <a:p>
             <a:pPr>
               <a:lnSpc>
@@ -6686,20 +6536,20 @@
                 <a:ea typeface="メイリオ"/>
                 <a:cs typeface="メイリオ"/>
               </a:rPr>
-              <a:t>・該当なし</a:t>
-            </a:r>
-          </a:p>
-        </p:txBody>
-      </p:sp>
-      <p:sp>
-        <p:nvSpPr>
-          <p:cNvPr id="13" name="Rectangle 12"/>
+              <a:t>・対象は「分析」タブの実績値のみ。それ以外のデータや作成済みメッセージには影響なし</a:t>
+            </a:r>
+          </a:p>
+        </p:txBody>
+      </p:sp>
+      <p:sp>
+        <p:nvSpPr>
+          <p:cNvPr id="9" name="Rectangle 8"/>
           <p:cNvSpPr/>
           <p:nvPr/>
         </p:nvSpPr>
         <p:spPr>
           <a:xfrm>
-            <a:off x="566928" y="3794760"/>
+            <a:off x="5097780" y="1325880"/>
             <a:ext cx="4347972" cy="2331720"/>
           </a:xfrm>
           <a:prstGeom prst="rect">
@@ -6739,13 +6589,13 @@
       </p:sp>
       <p:sp>
         <p:nvSpPr>
-          <p:cNvPr id="14" name="Rectangle 13"/>
+          <p:cNvPr id="10" name="Rectangle 9"/>
           <p:cNvSpPr/>
           <p:nvPr/>
         </p:nvSpPr>
         <p:spPr>
           <a:xfrm>
-            <a:off x="566928" y="3794760"/>
+            <a:off x="5097780" y="1325880"/>
             <a:ext cx="4347972" cy="310896"/>
           </a:xfrm>
           <a:prstGeom prst="rect">
@@ -6783,13 +6633,13 @@
       </p:sp>
       <p:sp>
         <p:nvSpPr>
-          <p:cNvPr id="15" name="TextBox 14"/>
+          <p:cNvPr id="11" name="TextBox 10"/>
           <p:cNvSpPr txBox="1"/>
           <p:nvPr/>
         </p:nvSpPr>
         <p:spPr>
           <a:xfrm>
-            <a:off x="566928" y="3794760"/>
+            <a:off x="5097780" y="1325880"/>
             <a:ext cx="4347972" cy="310896"/>
           </a:xfrm>
           <a:prstGeom prst="rect">
@@ -6813,20 +6663,20 @@
                 <a:ea typeface="メイリオ"/>
                 <a:cs typeface="メイリオ"/>
               </a:rPr>
-              <a:t>スケジュール・導入フロー</a:t>
-            </a:r>
-          </a:p>
-        </p:txBody>
-      </p:sp>
-      <p:sp>
-        <p:nvSpPr>
-          <p:cNvPr id="16" name="TextBox 15"/>
+              <a:t>料金体系・出稿条件</a:t>
+            </a:r>
+          </a:p>
+        </p:txBody>
+      </p:sp>
+      <p:sp>
+        <p:nvSpPr>
+          <p:cNvPr id="12" name="TextBox 11"/>
           <p:cNvSpPr txBox="1"/>
           <p:nvPr/>
         </p:nvSpPr>
         <p:spPr>
           <a:xfrm>
-            <a:off x="731520" y="4197096"/>
+            <a:off x="5262372" y="1728216"/>
             <a:ext cx="4018788" cy="1837944"/>
           </a:xfrm>
           <a:prstGeom prst="rect">
@@ -6857,9 +6707,159 @@
                 <a:ea typeface="メイリオ"/>
                 <a:cs typeface="メイリオ"/>
               </a:rPr>
-              <a:t>・リリース日：2026年11月頃（予定）</a:t>
-            </a:r>
-          </a:p>
+              <a:t>・該当なし</a:t>
+            </a:r>
+          </a:p>
+        </p:txBody>
+      </p:sp>
+      <p:sp>
+        <p:nvSpPr>
+          <p:cNvPr id="13" name="Rectangle 12"/>
+          <p:cNvSpPr/>
+          <p:nvPr/>
+        </p:nvSpPr>
+        <p:spPr>
+          <a:xfrm>
+            <a:off x="566928" y="3794760"/>
+            <a:ext cx="4347972" cy="2331720"/>
+          </a:xfrm>
+          <a:prstGeom prst="rect">
+            <a:avLst/>
+          </a:prstGeom>
+          <a:solidFill>
+            <a:srgbClr val="FFFFFF"/>
+          </a:solidFill>
+          <a:ln w="9525">
+            <a:solidFill>
+              <a:srgbClr val="D9D9D9"/>
+            </a:solidFill>
+          </a:ln>
+          <a:effectLst/>
+        </p:spPr>
+        <p:style>
+          <a:lnRef idx="1">
+            <a:schemeClr val="accent1"/>
+          </a:lnRef>
+          <a:fillRef idx="3">
+            <a:schemeClr val="accent1"/>
+          </a:fillRef>
+          <a:effectRef idx="2">
+            <a:schemeClr val="accent1"/>
+          </a:effectRef>
+          <a:fontRef idx="minor">
+            <a:schemeClr val="lt1"/>
+          </a:fontRef>
+        </p:style>
+        <p:txBody>
+          <a:bodyPr rtlCol="0" anchor="ctr"/>
+          <a:lstStyle/>
+          <a:p>
+            <a:pPr algn="ctr"/>
+          </a:p>
+        </p:txBody>
+      </p:sp>
+      <p:sp>
+        <p:nvSpPr>
+          <p:cNvPr id="14" name="Rectangle 13"/>
+          <p:cNvSpPr/>
+          <p:nvPr/>
+        </p:nvSpPr>
+        <p:spPr>
+          <a:xfrm>
+            <a:off x="566928" y="3794760"/>
+            <a:ext cx="4347972" cy="310896"/>
+          </a:xfrm>
+          <a:prstGeom prst="rect">
+            <a:avLst/>
+          </a:prstGeom>
+          <a:solidFill>
+            <a:srgbClr val="10253F"/>
+          </a:solidFill>
+          <a:ln>
+            <a:noFill/>
+          </a:ln>
+          <a:effectLst/>
+        </p:spPr>
+        <p:style>
+          <a:lnRef idx="1">
+            <a:schemeClr val="accent1"/>
+          </a:lnRef>
+          <a:fillRef idx="3">
+            <a:schemeClr val="accent1"/>
+          </a:fillRef>
+          <a:effectRef idx="2">
+            <a:schemeClr val="accent1"/>
+          </a:effectRef>
+          <a:fontRef idx="minor">
+            <a:schemeClr val="lt1"/>
+          </a:fontRef>
+        </p:style>
+        <p:txBody>
+          <a:bodyPr rtlCol="0" anchor="ctr"/>
+          <a:lstStyle/>
+          <a:p>
+            <a:pPr algn="ctr"/>
+          </a:p>
+        </p:txBody>
+      </p:sp>
+      <p:sp>
+        <p:nvSpPr>
+          <p:cNvPr id="15" name="TextBox 14"/>
+          <p:cNvSpPr txBox="1"/>
+          <p:nvPr/>
+        </p:nvSpPr>
+        <p:spPr>
+          <a:xfrm>
+            <a:off x="566928" y="3794760"/>
+            <a:ext cx="4347972" cy="310896"/>
+          </a:xfrm>
+          <a:prstGeom prst="rect">
+            <a:avLst/>
+          </a:prstGeom>
+          <a:noFill/>
+        </p:spPr>
+        <p:txBody>
+          <a:bodyPr wrap="square" anchor="ctr" lIns="0" rIns="0" tIns="0" bIns="0">
+            <a:spAutoFit/>
+          </a:bodyPr>
+          <a:lstStyle/>
+          <a:p>
+            <a:pPr algn="ctr"/>
+            <a:r>
+              <a:rPr sz="1050" b="1">
+                <a:solidFill>
+                  <a:srgbClr val="FFFFFF"/>
+                </a:solidFill>
+                <a:latin typeface="メイリオ"/>
+                <a:ea typeface="メイリオ"/>
+                <a:cs typeface="メイリオ"/>
+              </a:rPr>
+              <a:t>スケジュール・導入フロー</a:t>
+            </a:r>
+          </a:p>
+        </p:txBody>
+      </p:sp>
+      <p:sp>
+        <p:nvSpPr>
+          <p:cNvPr id="16" name="TextBox 15"/>
+          <p:cNvSpPr txBox="1"/>
+          <p:nvPr/>
+        </p:nvSpPr>
+        <p:spPr>
+          <a:xfrm>
+            <a:off x="731520" y="4197096"/>
+            <a:ext cx="4018788" cy="1837944"/>
+          </a:xfrm>
+          <a:prstGeom prst="rect">
+            <a:avLst/>
+          </a:prstGeom>
+          <a:noFill/>
+        </p:spPr>
+        <p:txBody>
+          <a:bodyPr wrap="square" lIns="0" rIns="0" tIns="0" bIns="0">
+            <a:spAutoFit/>
+          </a:bodyPr>
+          <a:lstStyle/>
           <a:p>
             <a:pPr>
               <a:lnSpc>
@@ -6878,159 +6878,9 @@
                 <a:ea typeface="メイリオ"/>
                 <a:cs typeface="メイリオ"/>
               </a:rPr>
-              <a:t>・社外告知：当初9/2予定だったが内容変更の可能性ありいったん延期。改めて案内予定</a:t>
-            </a:r>
-          </a:p>
-        </p:txBody>
-      </p:sp>
-      <p:sp>
-        <p:nvSpPr>
-          <p:cNvPr id="17" name="Rectangle 16"/>
-          <p:cNvSpPr/>
-          <p:nvPr/>
-        </p:nvSpPr>
-        <p:spPr>
-          <a:xfrm>
-            <a:off x="5097780" y="3794760"/>
-            <a:ext cx="4347972" cy="2331720"/>
-          </a:xfrm>
-          <a:prstGeom prst="rect">
-            <a:avLst/>
-          </a:prstGeom>
-          <a:solidFill>
-            <a:srgbClr val="FFFFFF"/>
-          </a:solidFill>
-          <a:ln w="9525">
-            <a:solidFill>
-              <a:srgbClr val="D9D9D9"/>
-            </a:solidFill>
-          </a:ln>
-          <a:effectLst/>
-        </p:spPr>
-        <p:style>
-          <a:lnRef idx="1">
-            <a:schemeClr val="accent1"/>
-          </a:lnRef>
-          <a:fillRef idx="3">
-            <a:schemeClr val="accent1"/>
-          </a:fillRef>
-          <a:effectRef idx="2">
-            <a:schemeClr val="accent1"/>
-          </a:effectRef>
-          <a:fontRef idx="minor">
-            <a:schemeClr val="lt1"/>
-          </a:fontRef>
-        </p:style>
-        <p:txBody>
-          <a:bodyPr rtlCol="0" anchor="ctr"/>
-          <a:lstStyle/>
-          <a:p>
-            <a:pPr algn="ctr"/>
-          </a:p>
-        </p:txBody>
-      </p:sp>
-      <p:sp>
-        <p:nvSpPr>
-          <p:cNvPr id="18" name="Rectangle 17"/>
-          <p:cNvSpPr/>
-          <p:nvPr/>
-        </p:nvSpPr>
-        <p:spPr>
-          <a:xfrm>
-            <a:off x="5097780" y="3794760"/>
-            <a:ext cx="4347972" cy="310896"/>
-          </a:xfrm>
-          <a:prstGeom prst="rect">
-            <a:avLst/>
-          </a:prstGeom>
-          <a:solidFill>
-            <a:srgbClr val="10253F"/>
-          </a:solidFill>
-          <a:ln>
-            <a:noFill/>
-          </a:ln>
-          <a:effectLst/>
-        </p:spPr>
-        <p:style>
-          <a:lnRef idx="1">
-            <a:schemeClr val="accent1"/>
-          </a:lnRef>
-          <a:fillRef idx="3">
-            <a:schemeClr val="accent1"/>
-          </a:fillRef>
-          <a:effectRef idx="2">
-            <a:schemeClr val="accent1"/>
-          </a:effectRef>
-          <a:fontRef idx="minor">
-            <a:schemeClr val="lt1"/>
-          </a:fontRef>
-        </p:style>
-        <p:txBody>
-          <a:bodyPr rtlCol="0" anchor="ctr"/>
-          <a:lstStyle/>
-          <a:p>
-            <a:pPr algn="ctr"/>
-          </a:p>
-        </p:txBody>
-      </p:sp>
-      <p:sp>
-        <p:nvSpPr>
-          <p:cNvPr id="19" name="TextBox 18"/>
-          <p:cNvSpPr txBox="1"/>
-          <p:nvPr/>
-        </p:nvSpPr>
-        <p:spPr>
-          <a:xfrm>
-            <a:off x="5097780" y="3794760"/>
-            <a:ext cx="4347972" cy="310896"/>
-          </a:xfrm>
-          <a:prstGeom prst="rect">
-            <a:avLst/>
-          </a:prstGeom>
-          <a:noFill/>
-        </p:spPr>
-        <p:txBody>
-          <a:bodyPr wrap="square" anchor="ctr" lIns="0" rIns="0" tIns="0" bIns="0">
-            <a:spAutoFit/>
-          </a:bodyPr>
-          <a:lstStyle/>
-          <a:p>
-            <a:pPr algn="ctr"/>
-            <a:r>
-              <a:rPr sz="1050" b="1">
-                <a:solidFill>
-                  <a:srgbClr val="FFFFFF"/>
-                </a:solidFill>
-                <a:latin typeface="メイリオ"/>
-                <a:ea typeface="メイリオ"/>
-                <a:cs typeface="メイリオ"/>
-              </a:rPr>
-              <a:t>注意点・影響</a:t>
-            </a:r>
-          </a:p>
-        </p:txBody>
-      </p:sp>
-      <p:sp>
-        <p:nvSpPr>
-          <p:cNvPr id="20" name="TextBox 19"/>
-          <p:cNvSpPr txBox="1"/>
-          <p:nvPr/>
-        </p:nvSpPr>
-        <p:spPr>
-          <a:xfrm>
-            <a:off x="5262372" y="4197096"/>
-            <a:ext cx="4018788" cy="1837944"/>
-          </a:xfrm>
-          <a:prstGeom prst="rect">
-            <a:avLst/>
-          </a:prstGeom>
-          <a:noFill/>
-        </p:spPr>
-        <p:txBody>
-          <a:bodyPr wrap="square" lIns="0" rIns="0" tIns="0" bIns="0">
-            <a:spAutoFit/>
-          </a:bodyPr>
-          <a:lstStyle/>
+              <a:t>・リリース日：2026年11月頃（予定・日程は決まり次第、管理画面のお知らせで案内）</a:t>
+            </a:r>
+          </a:p>
           <a:p>
             <a:pPr>
               <a:lnSpc>
@@ -7049,7 +6899,199 @@
                 <a:ea typeface="メイリオ"/>
                 <a:cs typeface="メイリオ"/>
               </a:rPr>
+              <a:t>・社外告知：当初9/2予定だったが内容変更の可能性ありいったん延期。改めて案内予定</a:t>
+            </a:r>
+          </a:p>
+        </p:txBody>
+      </p:sp>
+      <p:sp>
+        <p:nvSpPr>
+          <p:cNvPr id="17" name="Rectangle 16"/>
+          <p:cNvSpPr/>
+          <p:nvPr/>
+        </p:nvSpPr>
+        <p:spPr>
+          <a:xfrm>
+            <a:off x="5097780" y="3794760"/>
+            <a:ext cx="4347972" cy="2331720"/>
+          </a:xfrm>
+          <a:prstGeom prst="rect">
+            <a:avLst/>
+          </a:prstGeom>
+          <a:solidFill>
+            <a:srgbClr val="FFFFFF"/>
+          </a:solidFill>
+          <a:ln w="9525">
+            <a:solidFill>
+              <a:srgbClr val="D9D9D9"/>
+            </a:solidFill>
+          </a:ln>
+          <a:effectLst/>
+        </p:spPr>
+        <p:style>
+          <a:lnRef idx="1">
+            <a:schemeClr val="accent1"/>
+          </a:lnRef>
+          <a:fillRef idx="3">
+            <a:schemeClr val="accent1"/>
+          </a:fillRef>
+          <a:effectRef idx="2">
+            <a:schemeClr val="accent1"/>
+          </a:effectRef>
+          <a:fontRef idx="minor">
+            <a:schemeClr val="lt1"/>
+          </a:fontRef>
+        </p:style>
+        <p:txBody>
+          <a:bodyPr rtlCol="0" anchor="ctr"/>
+          <a:lstStyle/>
+          <a:p>
+            <a:pPr algn="ctr"/>
+          </a:p>
+        </p:txBody>
+      </p:sp>
+      <p:sp>
+        <p:nvSpPr>
+          <p:cNvPr id="18" name="Rectangle 17"/>
+          <p:cNvSpPr/>
+          <p:nvPr/>
+        </p:nvSpPr>
+        <p:spPr>
+          <a:xfrm>
+            <a:off x="5097780" y="3794760"/>
+            <a:ext cx="4347972" cy="310896"/>
+          </a:xfrm>
+          <a:prstGeom prst="rect">
+            <a:avLst/>
+          </a:prstGeom>
+          <a:solidFill>
+            <a:srgbClr val="10253F"/>
+          </a:solidFill>
+          <a:ln>
+            <a:noFill/>
+          </a:ln>
+          <a:effectLst/>
+        </p:spPr>
+        <p:style>
+          <a:lnRef idx="1">
+            <a:schemeClr val="accent1"/>
+          </a:lnRef>
+          <a:fillRef idx="3">
+            <a:schemeClr val="accent1"/>
+          </a:fillRef>
+          <a:effectRef idx="2">
+            <a:schemeClr val="accent1"/>
+          </a:effectRef>
+          <a:fontRef idx="minor">
+            <a:schemeClr val="lt1"/>
+          </a:fontRef>
+        </p:style>
+        <p:txBody>
+          <a:bodyPr rtlCol="0" anchor="ctr"/>
+          <a:lstStyle/>
+          <a:p>
+            <a:pPr algn="ctr"/>
+          </a:p>
+        </p:txBody>
+      </p:sp>
+      <p:sp>
+        <p:nvSpPr>
+          <p:cNvPr id="19" name="TextBox 18"/>
+          <p:cNvSpPr txBox="1"/>
+          <p:nvPr/>
+        </p:nvSpPr>
+        <p:spPr>
+          <a:xfrm>
+            <a:off x="5097780" y="3794760"/>
+            <a:ext cx="4347972" cy="310896"/>
+          </a:xfrm>
+          <a:prstGeom prst="rect">
+            <a:avLst/>
+          </a:prstGeom>
+          <a:noFill/>
+        </p:spPr>
+        <p:txBody>
+          <a:bodyPr wrap="square" anchor="ctr" lIns="0" rIns="0" tIns="0" bIns="0">
+            <a:spAutoFit/>
+          </a:bodyPr>
+          <a:lstStyle/>
+          <a:p>
+            <a:pPr algn="ctr"/>
+            <a:r>
+              <a:rPr sz="1050" b="1">
+                <a:solidFill>
+                  <a:srgbClr val="FFFFFF"/>
+                </a:solidFill>
+                <a:latin typeface="メイリオ"/>
+                <a:ea typeface="メイリオ"/>
+                <a:cs typeface="メイリオ"/>
+              </a:rPr>
+              <a:t>注意点・影響</a:t>
+            </a:r>
+          </a:p>
+        </p:txBody>
+      </p:sp>
+      <p:sp>
+        <p:nvSpPr>
+          <p:cNvPr id="20" name="TextBox 19"/>
+          <p:cNvSpPr txBox="1"/>
+          <p:nvPr/>
+        </p:nvSpPr>
+        <p:spPr>
+          <a:xfrm>
+            <a:off x="5262372" y="4197096"/>
+            <a:ext cx="4018788" cy="1837944"/>
+          </a:xfrm>
+          <a:prstGeom prst="rect">
+            <a:avLst/>
+          </a:prstGeom>
+          <a:noFill/>
+        </p:spPr>
+        <p:txBody>
+          <a:bodyPr wrap="square" lIns="0" rIns="0" tIns="0" bIns="0">
+            <a:spAutoFit/>
+          </a:bodyPr>
+          <a:lstStyle/>
+          <a:p>
+            <a:pPr>
+              <a:lnSpc>
+                <a:spcPct val="120000"/>
+              </a:lnSpc>
+              <a:spcAft>
+                <a:spcPts val="300"/>
+              </a:spcAft>
+            </a:pPr>
+            <a:r>
+              <a:rPr sz="1000">
+                <a:solidFill>
+                  <a:srgbClr val="343434"/>
+                </a:solidFill>
+                <a:latin typeface="メイリオ"/>
+                <a:ea typeface="メイリオ"/>
+                <a:cs typeface="メイリオ"/>
+              </a:rPr>
               <a:t>・36カ月より前の実績データが必要なクライアントには変更前の確認・保存を案内</a:t>
+            </a:r>
+          </a:p>
+          <a:p>
+            <a:pPr>
+              <a:lnSpc>
+                <a:spcPct val="120000"/>
+              </a:lnSpc>
+              <a:spcAft>
+                <a:spcPts val="300"/>
+              </a:spcAft>
+            </a:pPr>
+            <a:r>
+              <a:rPr sz="1000">
+                <a:solidFill>
+                  <a:srgbClr val="343434"/>
+                </a:solidFill>
+                <a:latin typeface="メイリオ"/>
+                <a:ea typeface="メイリオ"/>
+                <a:cs typeface="メイリオ"/>
+              </a:rPr>
+              <a:t>・「分析」タブの一部データはダウンロード可能（詳細は分析マニュアル参照）</a:t>
             </a:r>
           </a:p>
           <a:p>
@@ -8372,159 +8414,9 @@
                 <a:ea typeface="メイリオ"/>
                 <a:cs typeface="メイリオ"/>
               </a:rPr>
-              <a:t>・LINEミニアプリと連携するLINE公式アカウントを複数設定可能に</a:t>
-            </a:r>
-          </a:p>
-        </p:txBody>
-      </p:sp>
-      <p:sp>
-        <p:nvSpPr>
-          <p:cNvPr id="9" name="Rectangle 8"/>
-          <p:cNvSpPr/>
-          <p:nvPr/>
-        </p:nvSpPr>
-        <p:spPr>
-          <a:xfrm>
-            <a:off x="5097780" y="1325880"/>
-            <a:ext cx="4347972" cy="2331720"/>
-          </a:xfrm>
-          <a:prstGeom prst="rect">
-            <a:avLst/>
-          </a:prstGeom>
-          <a:solidFill>
-            <a:srgbClr val="FFFFFF"/>
-          </a:solidFill>
-          <a:ln w="9525">
-            <a:solidFill>
-              <a:srgbClr val="D9D9D9"/>
-            </a:solidFill>
-          </a:ln>
-          <a:effectLst/>
-        </p:spPr>
-        <p:style>
-          <a:lnRef idx="1">
-            <a:schemeClr val="accent1"/>
-          </a:lnRef>
-          <a:fillRef idx="3">
-            <a:schemeClr val="accent1"/>
-          </a:fillRef>
-          <a:effectRef idx="2">
-            <a:schemeClr val="accent1"/>
-          </a:effectRef>
-          <a:fontRef idx="minor">
-            <a:schemeClr val="lt1"/>
-          </a:fontRef>
-        </p:style>
-        <p:txBody>
-          <a:bodyPr rtlCol="0" anchor="ctr"/>
-          <a:lstStyle/>
-          <a:p>
-            <a:pPr algn="ctr"/>
-          </a:p>
-        </p:txBody>
-      </p:sp>
-      <p:sp>
-        <p:nvSpPr>
-          <p:cNvPr id="10" name="Rectangle 9"/>
-          <p:cNvSpPr/>
-          <p:nvPr/>
-        </p:nvSpPr>
-        <p:spPr>
-          <a:xfrm>
-            <a:off x="5097780" y="1325880"/>
-            <a:ext cx="4347972" cy="310896"/>
-          </a:xfrm>
-          <a:prstGeom prst="rect">
-            <a:avLst/>
-          </a:prstGeom>
-          <a:solidFill>
-            <a:srgbClr val="10253F"/>
-          </a:solidFill>
-          <a:ln>
-            <a:noFill/>
-          </a:ln>
-          <a:effectLst/>
-        </p:spPr>
-        <p:style>
-          <a:lnRef idx="1">
-            <a:schemeClr val="accent1"/>
-          </a:lnRef>
-          <a:fillRef idx="3">
-            <a:schemeClr val="accent1"/>
-          </a:fillRef>
-          <a:effectRef idx="2">
-            <a:schemeClr val="accent1"/>
-          </a:effectRef>
-          <a:fontRef idx="minor">
-            <a:schemeClr val="lt1"/>
-          </a:fontRef>
-        </p:style>
-        <p:txBody>
-          <a:bodyPr rtlCol="0" anchor="ctr"/>
-          <a:lstStyle/>
-          <a:p>
-            <a:pPr algn="ctr"/>
-          </a:p>
-        </p:txBody>
-      </p:sp>
-      <p:sp>
-        <p:nvSpPr>
-          <p:cNvPr id="11" name="TextBox 10"/>
-          <p:cNvSpPr txBox="1"/>
-          <p:nvPr/>
-        </p:nvSpPr>
-        <p:spPr>
-          <a:xfrm>
-            <a:off x="5097780" y="1325880"/>
-            <a:ext cx="4347972" cy="310896"/>
-          </a:xfrm>
-          <a:prstGeom prst="rect">
-            <a:avLst/>
-          </a:prstGeom>
-          <a:noFill/>
-        </p:spPr>
-        <p:txBody>
-          <a:bodyPr wrap="square" anchor="ctr" lIns="0" rIns="0" tIns="0" bIns="0">
-            <a:spAutoFit/>
-          </a:bodyPr>
-          <a:lstStyle/>
-          <a:p>
-            <a:pPr algn="ctr"/>
-            <a:r>
-              <a:rPr sz="1050" b="1">
-                <a:solidFill>
-                  <a:srgbClr val="FFFFFF"/>
-                </a:solidFill>
-                <a:latin typeface="メイリオ"/>
-                <a:ea typeface="メイリオ"/>
-                <a:cs typeface="メイリオ"/>
-              </a:rPr>
-              <a:t>料金体系・出稿条件</a:t>
-            </a:r>
-          </a:p>
-        </p:txBody>
-      </p:sp>
-      <p:sp>
-        <p:nvSpPr>
-          <p:cNvPr id="12" name="TextBox 11"/>
-          <p:cNvSpPr txBox="1"/>
-          <p:nvPr/>
-        </p:nvSpPr>
-        <p:spPr>
-          <a:xfrm>
-            <a:off x="5262372" y="1728216"/>
-            <a:ext cx="4018788" cy="1837944"/>
-          </a:xfrm>
-          <a:prstGeom prst="rect">
-            <a:avLst/>
-          </a:prstGeom>
-          <a:noFill/>
-        </p:spPr>
-        <p:txBody>
-          <a:bodyPr wrap="square" lIns="0" rIns="0" tIns="0" bIns="0">
-            <a:spAutoFit/>
-          </a:bodyPr>
-          <a:lstStyle/>
+              <a:t>・従来は1つのミニアプリに連携できる公式アカウントは1つのみだったが、複数設定可能に</a:t>
+            </a:r>
+          </a:p>
           <a:p>
             <a:pPr>
               <a:lnSpc>
@@ -8543,20 +8435,20 @@
                 <a:ea typeface="メイリオ"/>
                 <a:cs typeface="メイリオ"/>
               </a:rPr>
-              <a:t>・－</a:t>
-            </a:r>
-          </a:p>
-        </p:txBody>
-      </p:sp>
-      <p:sp>
-        <p:nvSpPr>
-          <p:cNvPr id="13" name="Rectangle 12"/>
+              <a:t>・流入経路（店舗・ブランド等）ごとに異なるLINE公式アカウントへ友だち追加を誘導できる</a:t>
+            </a:r>
+          </a:p>
+        </p:txBody>
+      </p:sp>
+      <p:sp>
+        <p:nvSpPr>
+          <p:cNvPr id="9" name="Rectangle 8"/>
           <p:cNvSpPr/>
           <p:nvPr/>
         </p:nvSpPr>
         <p:spPr>
           <a:xfrm>
-            <a:off x="566928" y="3794760"/>
+            <a:off x="5097780" y="1325880"/>
             <a:ext cx="4347972" cy="2331720"/>
           </a:xfrm>
           <a:prstGeom prst="rect">
@@ -8596,13 +8488,13 @@
       </p:sp>
       <p:sp>
         <p:nvSpPr>
-          <p:cNvPr id="14" name="Rectangle 13"/>
+          <p:cNvPr id="10" name="Rectangle 9"/>
           <p:cNvSpPr/>
           <p:nvPr/>
         </p:nvSpPr>
         <p:spPr>
           <a:xfrm>
-            <a:off x="566928" y="3794760"/>
+            <a:off x="5097780" y="1325880"/>
             <a:ext cx="4347972" cy="310896"/>
           </a:xfrm>
           <a:prstGeom prst="rect">
@@ -8640,13 +8532,13 @@
       </p:sp>
       <p:sp>
         <p:nvSpPr>
-          <p:cNvPr id="15" name="TextBox 14"/>
+          <p:cNvPr id="11" name="TextBox 10"/>
           <p:cNvSpPr txBox="1"/>
           <p:nvPr/>
         </p:nvSpPr>
         <p:spPr>
           <a:xfrm>
-            <a:off x="566928" y="3794760"/>
+            <a:off x="5097780" y="1325880"/>
             <a:ext cx="4347972" cy="310896"/>
           </a:xfrm>
           <a:prstGeom prst="rect">
@@ -8670,20 +8562,20 @@
                 <a:ea typeface="メイリオ"/>
                 <a:cs typeface="メイリオ"/>
               </a:rPr>
-              <a:t>スケジュール・導入フロー</a:t>
-            </a:r>
-          </a:p>
-        </p:txBody>
-      </p:sp>
-      <p:sp>
-        <p:nvSpPr>
-          <p:cNvPr id="16" name="TextBox 15"/>
+              <a:t>料金体系・出稿条件</a:t>
+            </a:r>
+          </a:p>
+        </p:txBody>
+      </p:sp>
+      <p:sp>
+        <p:nvSpPr>
+          <p:cNvPr id="12" name="TextBox 11"/>
           <p:cNvSpPr txBox="1"/>
           <p:nvPr/>
         </p:nvSpPr>
         <p:spPr>
           <a:xfrm>
-            <a:off x="731520" y="4197096"/>
+            <a:off x="5262372" y="1728216"/>
             <a:ext cx="4018788" cy="1837944"/>
           </a:xfrm>
           <a:prstGeom prst="rect">
@@ -8714,20 +8606,20 @@
                 <a:ea typeface="メイリオ"/>
                 <a:cs typeface="メイリオ"/>
               </a:rPr>
-              <a:t>・リリース予定日：9月2日</a:t>
-            </a:r>
-          </a:p>
-        </p:txBody>
-      </p:sp>
-      <p:sp>
-        <p:nvSpPr>
-          <p:cNvPr id="17" name="Rectangle 16"/>
+              <a:t>・－</a:t>
+            </a:r>
+          </a:p>
+        </p:txBody>
+      </p:sp>
+      <p:sp>
+        <p:nvSpPr>
+          <p:cNvPr id="13" name="Rectangle 12"/>
           <p:cNvSpPr/>
           <p:nvPr/>
         </p:nvSpPr>
         <p:spPr>
           <a:xfrm>
-            <a:off x="5097780" y="3794760"/>
+            <a:off x="566928" y="3794760"/>
             <a:ext cx="4347972" cy="2331720"/>
           </a:xfrm>
           <a:prstGeom prst="rect">
@@ -8767,13 +8659,13 @@
       </p:sp>
       <p:sp>
         <p:nvSpPr>
-          <p:cNvPr id="18" name="Rectangle 17"/>
+          <p:cNvPr id="14" name="Rectangle 13"/>
           <p:cNvSpPr/>
           <p:nvPr/>
         </p:nvSpPr>
         <p:spPr>
           <a:xfrm>
-            <a:off x="5097780" y="3794760"/>
+            <a:off x="566928" y="3794760"/>
             <a:ext cx="4347972" cy="310896"/>
           </a:xfrm>
           <a:prstGeom prst="rect">
@@ -8811,13 +8703,13 @@
       </p:sp>
       <p:sp>
         <p:nvSpPr>
-          <p:cNvPr id="19" name="TextBox 18"/>
+          <p:cNvPr id="15" name="TextBox 14"/>
           <p:cNvSpPr txBox="1"/>
           <p:nvPr/>
         </p:nvSpPr>
         <p:spPr>
           <a:xfrm>
-            <a:off x="5097780" y="3794760"/>
+            <a:off x="566928" y="3794760"/>
             <a:ext cx="4347972" cy="310896"/>
           </a:xfrm>
           <a:prstGeom prst="rect">
@@ -8841,20 +8733,20 @@
                 <a:ea typeface="メイリオ"/>
                 <a:cs typeface="メイリオ"/>
               </a:rPr>
-              <a:t>注意点・影響</a:t>
-            </a:r>
-          </a:p>
-        </p:txBody>
-      </p:sp>
-      <p:sp>
-        <p:nvSpPr>
-          <p:cNvPr id="20" name="TextBox 19"/>
+              <a:t>スケジュール・導入フロー</a:t>
+            </a:r>
+          </a:p>
+        </p:txBody>
+      </p:sp>
+      <p:sp>
+        <p:nvSpPr>
+          <p:cNvPr id="16" name="TextBox 15"/>
           <p:cNvSpPr txBox="1"/>
           <p:nvPr/>
         </p:nvSpPr>
         <p:spPr>
           <a:xfrm>
-            <a:off x="5262372" y="4197096"/>
+            <a:off x="731520" y="4197096"/>
             <a:ext cx="4018788" cy="1837944"/>
           </a:xfrm>
           <a:prstGeom prst="rect">
@@ -8885,7 +8777,220 @@
                 <a:ea typeface="メイリオ"/>
                 <a:cs typeface="メイリオ"/>
               </a:rPr>
-              <a:t>・複数ブランド・複数拠点アカウントを運用するクライアントの友だち獲得導線が広がる</a:t>
+              <a:t>・リリース予定日：9月2日</a:t>
+            </a:r>
+          </a:p>
+        </p:txBody>
+      </p:sp>
+      <p:sp>
+        <p:nvSpPr>
+          <p:cNvPr id="17" name="Rectangle 16"/>
+          <p:cNvSpPr/>
+          <p:nvPr/>
+        </p:nvSpPr>
+        <p:spPr>
+          <a:xfrm>
+            <a:off x="5097780" y="3794760"/>
+            <a:ext cx="4347972" cy="2331720"/>
+          </a:xfrm>
+          <a:prstGeom prst="rect">
+            <a:avLst/>
+          </a:prstGeom>
+          <a:solidFill>
+            <a:srgbClr val="FFFFFF"/>
+          </a:solidFill>
+          <a:ln w="9525">
+            <a:solidFill>
+              <a:srgbClr val="D9D9D9"/>
+            </a:solidFill>
+          </a:ln>
+          <a:effectLst/>
+        </p:spPr>
+        <p:style>
+          <a:lnRef idx="1">
+            <a:schemeClr val="accent1"/>
+          </a:lnRef>
+          <a:fillRef idx="3">
+            <a:schemeClr val="accent1"/>
+          </a:fillRef>
+          <a:effectRef idx="2">
+            <a:schemeClr val="accent1"/>
+          </a:effectRef>
+          <a:fontRef idx="minor">
+            <a:schemeClr val="lt1"/>
+          </a:fontRef>
+        </p:style>
+        <p:txBody>
+          <a:bodyPr rtlCol="0" anchor="ctr"/>
+          <a:lstStyle/>
+          <a:p>
+            <a:pPr algn="ctr"/>
+          </a:p>
+        </p:txBody>
+      </p:sp>
+      <p:sp>
+        <p:nvSpPr>
+          <p:cNvPr id="18" name="Rectangle 17"/>
+          <p:cNvSpPr/>
+          <p:nvPr/>
+        </p:nvSpPr>
+        <p:spPr>
+          <a:xfrm>
+            <a:off x="5097780" y="3794760"/>
+            <a:ext cx="4347972" cy="310896"/>
+          </a:xfrm>
+          <a:prstGeom prst="rect">
+            <a:avLst/>
+          </a:prstGeom>
+          <a:solidFill>
+            <a:srgbClr val="10253F"/>
+          </a:solidFill>
+          <a:ln>
+            <a:noFill/>
+          </a:ln>
+          <a:effectLst/>
+        </p:spPr>
+        <p:style>
+          <a:lnRef idx="1">
+            <a:schemeClr val="accent1"/>
+          </a:lnRef>
+          <a:fillRef idx="3">
+            <a:schemeClr val="accent1"/>
+          </a:fillRef>
+          <a:effectRef idx="2">
+            <a:schemeClr val="accent1"/>
+          </a:effectRef>
+          <a:fontRef idx="minor">
+            <a:schemeClr val="lt1"/>
+          </a:fontRef>
+        </p:style>
+        <p:txBody>
+          <a:bodyPr rtlCol="0" anchor="ctr"/>
+          <a:lstStyle/>
+          <a:p>
+            <a:pPr algn="ctr"/>
+          </a:p>
+        </p:txBody>
+      </p:sp>
+      <p:sp>
+        <p:nvSpPr>
+          <p:cNvPr id="19" name="TextBox 18"/>
+          <p:cNvSpPr txBox="1"/>
+          <p:nvPr/>
+        </p:nvSpPr>
+        <p:spPr>
+          <a:xfrm>
+            <a:off x="5097780" y="3794760"/>
+            <a:ext cx="4347972" cy="310896"/>
+          </a:xfrm>
+          <a:prstGeom prst="rect">
+            <a:avLst/>
+          </a:prstGeom>
+          <a:noFill/>
+        </p:spPr>
+        <p:txBody>
+          <a:bodyPr wrap="square" anchor="ctr" lIns="0" rIns="0" tIns="0" bIns="0">
+            <a:spAutoFit/>
+          </a:bodyPr>
+          <a:lstStyle/>
+          <a:p>
+            <a:pPr algn="ctr"/>
+            <a:r>
+              <a:rPr sz="1050" b="1">
+                <a:solidFill>
+                  <a:srgbClr val="FFFFFF"/>
+                </a:solidFill>
+                <a:latin typeface="メイリオ"/>
+                <a:ea typeface="メイリオ"/>
+                <a:cs typeface="メイリオ"/>
+              </a:rPr>
+              <a:t>注意点・影響</a:t>
+            </a:r>
+          </a:p>
+        </p:txBody>
+      </p:sp>
+      <p:sp>
+        <p:nvSpPr>
+          <p:cNvPr id="20" name="TextBox 19"/>
+          <p:cNvSpPr txBox="1"/>
+          <p:nvPr/>
+        </p:nvSpPr>
+        <p:spPr>
+          <a:xfrm>
+            <a:off x="5262372" y="4197096"/>
+            <a:ext cx="4018788" cy="1837944"/>
+          </a:xfrm>
+          <a:prstGeom prst="rect">
+            <a:avLst/>
+          </a:prstGeom>
+          <a:noFill/>
+        </p:spPr>
+        <p:txBody>
+          <a:bodyPr wrap="square" lIns="0" rIns="0" tIns="0" bIns="0">
+            <a:spAutoFit/>
+          </a:bodyPr>
+          <a:lstStyle/>
+          <a:p>
+            <a:pPr>
+              <a:lnSpc>
+                <a:spcPct val="120000"/>
+              </a:lnSpc>
+              <a:spcAft>
+                <a:spcPts val="300"/>
+              </a:spcAft>
+            </a:pPr>
+            <a:r>
+              <a:rPr sz="1000">
+                <a:solidFill>
+                  <a:srgbClr val="343434"/>
+                </a:solidFill>
+                <a:latin typeface="メイリオ"/>
+                <a:ea typeface="メイリオ"/>
+                <a:cs typeface="メイリオ"/>
+              </a:rPr>
+              <a:t>・全店舗共通の一斉配信から、店舗ごとのセグメント配信に切り替えられる</a:t>
+            </a:r>
+          </a:p>
+          <a:p>
+            <a:pPr>
+              <a:lnSpc>
+                <a:spcPct val="120000"/>
+              </a:lnSpc>
+              <a:spcAft>
+                <a:spcPts val="300"/>
+              </a:spcAft>
+            </a:pPr>
+            <a:r>
+              <a:rPr sz="1000">
+                <a:solidFill>
+                  <a:srgbClr val="343434"/>
+                </a:solidFill>
+                <a:latin typeface="メイリオ"/>
+                <a:ea typeface="メイリオ"/>
+                <a:cs typeface="メイリオ"/>
+              </a:rPr>
+              <a:t>・設定はLINE Developersの「友だち追加オプション」から。デフォルト設定／許可リスト設定の組み合わせで3パターン運用可能</a:t>
+            </a:r>
+          </a:p>
+          <a:p>
+            <a:pPr>
+              <a:lnSpc>
+                <a:spcPct val="120000"/>
+              </a:lnSpc>
+              <a:spcAft>
+                <a:spcPts val="300"/>
+              </a:spcAft>
+            </a:pPr>
+            <a:r>
+              <a:rPr sz="1000">
+                <a:solidFill>
+                  <a:srgbClr val="343434"/>
+                </a:solidFill>
+                <a:latin typeface="メイリオ"/>
+                <a:ea typeface="メイリオ"/>
+                <a:cs typeface="メイリオ"/>
+              </a:rPr>
+              <a:t>・紐づけ条件：ミニアプリと同一プロバイダーの公式アカウントであること／操作者がMessaging APIのadmin権限を保有していること。最大1,000件まで紐づけ可</a:t>
             </a:r>
           </a:p>
         </p:txBody>
@@ -9266,159 +9371,9 @@
                 <a:ea typeface="メイリオ"/>
                 <a:cs typeface="メイリオ"/>
               </a:rPr>
-              <a:t>・景品はLINEポイント</a:t>
-            </a:r>
-          </a:p>
-        </p:txBody>
-      </p:sp>
-      <p:sp>
-        <p:nvSpPr>
-          <p:cNvPr id="9" name="Rectangle 8"/>
-          <p:cNvSpPr/>
-          <p:nvPr/>
-        </p:nvSpPr>
-        <p:spPr>
-          <a:xfrm>
-            <a:off x="5097780" y="1325880"/>
-            <a:ext cx="4347972" cy="2331720"/>
-          </a:xfrm>
-          <a:prstGeom prst="rect">
-            <a:avLst/>
-          </a:prstGeom>
-          <a:solidFill>
-            <a:srgbClr val="FFFFFF"/>
-          </a:solidFill>
-          <a:ln w="9525">
-            <a:solidFill>
-              <a:srgbClr val="D9D9D9"/>
-            </a:solidFill>
-          </a:ln>
-          <a:effectLst/>
-        </p:spPr>
-        <p:style>
-          <a:lnRef idx="1">
-            <a:schemeClr val="accent1"/>
-          </a:lnRef>
-          <a:fillRef idx="3">
-            <a:schemeClr val="accent1"/>
-          </a:fillRef>
-          <a:effectRef idx="2">
-            <a:schemeClr val="accent1"/>
-          </a:effectRef>
-          <a:fontRef idx="minor">
-            <a:schemeClr val="lt1"/>
-          </a:fontRef>
-        </p:style>
-        <p:txBody>
-          <a:bodyPr rtlCol="0" anchor="ctr"/>
-          <a:lstStyle/>
-          <a:p>
-            <a:pPr algn="ctr"/>
-          </a:p>
-        </p:txBody>
-      </p:sp>
-      <p:sp>
-        <p:nvSpPr>
-          <p:cNvPr id="10" name="Rectangle 9"/>
-          <p:cNvSpPr/>
-          <p:nvPr/>
-        </p:nvSpPr>
-        <p:spPr>
-          <a:xfrm>
-            <a:off x="5097780" y="1325880"/>
-            <a:ext cx="4347972" cy="310896"/>
-          </a:xfrm>
-          <a:prstGeom prst="rect">
-            <a:avLst/>
-          </a:prstGeom>
-          <a:solidFill>
-            <a:srgbClr val="10253F"/>
-          </a:solidFill>
-          <a:ln>
-            <a:noFill/>
-          </a:ln>
-          <a:effectLst/>
-        </p:spPr>
-        <p:style>
-          <a:lnRef idx="1">
-            <a:schemeClr val="accent1"/>
-          </a:lnRef>
-          <a:fillRef idx="3">
-            <a:schemeClr val="accent1"/>
-          </a:fillRef>
-          <a:effectRef idx="2">
-            <a:schemeClr val="accent1"/>
-          </a:effectRef>
-          <a:fontRef idx="minor">
-            <a:schemeClr val="lt1"/>
-          </a:fontRef>
-        </p:style>
-        <p:txBody>
-          <a:bodyPr rtlCol="0" anchor="ctr"/>
-          <a:lstStyle/>
-          <a:p>
-            <a:pPr algn="ctr"/>
-          </a:p>
-        </p:txBody>
-      </p:sp>
-      <p:sp>
-        <p:nvSpPr>
-          <p:cNvPr id="11" name="TextBox 10"/>
-          <p:cNvSpPr txBox="1"/>
-          <p:nvPr/>
-        </p:nvSpPr>
-        <p:spPr>
-          <a:xfrm>
-            <a:off x="5097780" y="1325880"/>
-            <a:ext cx="4347972" cy="310896"/>
-          </a:xfrm>
-          <a:prstGeom prst="rect">
-            <a:avLst/>
-          </a:prstGeom>
-          <a:noFill/>
-        </p:spPr>
-        <p:txBody>
-          <a:bodyPr wrap="square" anchor="ctr" lIns="0" rIns="0" tIns="0" bIns="0">
-            <a:spAutoFit/>
-          </a:bodyPr>
-          <a:lstStyle/>
-          <a:p>
-            <a:pPr algn="ctr"/>
-            <a:r>
-              <a:rPr sz="1050" b="1">
-                <a:solidFill>
-                  <a:srgbClr val="FFFFFF"/>
-                </a:solidFill>
-                <a:latin typeface="メイリオ"/>
-                <a:ea typeface="メイリオ"/>
-                <a:cs typeface="メイリオ"/>
-              </a:rPr>
-              <a:t>料金体系・出稿条件</a:t>
-            </a:r>
-          </a:p>
-        </p:txBody>
-      </p:sp>
-      <p:sp>
-        <p:nvSpPr>
-          <p:cNvPr id="12" name="TextBox 11"/>
-          <p:cNvSpPr txBox="1"/>
-          <p:nvPr/>
-        </p:nvSpPr>
-        <p:spPr>
-          <a:xfrm>
-            <a:off x="5262372" y="1728216"/>
-            <a:ext cx="4018788" cy="1837944"/>
-          </a:xfrm>
-          <a:prstGeom prst="rect">
-            <a:avLst/>
-          </a:prstGeom>
-          <a:noFill/>
-        </p:spPr>
-        <p:txBody>
-          <a:bodyPr wrap="square" lIns="0" rIns="0" tIns="0" bIns="0">
-            <a:spAutoFit/>
-          </a:bodyPr>
-          <a:lstStyle/>
+              <a:t>・景品はLINEポイント（2ポイント固定・応募者全員に総付）</a:t>
+            </a:r>
+          </a:p>
           <a:p>
             <a:pPr>
               <a:lnSpc>
@@ -9437,9 +9392,669 @@
                 <a:ea typeface="メイリオ"/>
                 <a:cs typeface="メイリオ"/>
               </a:rPr>
-              <a:t>・特典①特別価格：基本費用（キャンペーン価格）1,500万円</a:t>
-            </a:r>
-          </a:p>
+              <a:t>・対象アカウント条件：LINE公式アカウントかつMessaging API対応／認証プロバイダーであることが必須</a:t>
+            </a:r>
+          </a:p>
+        </p:txBody>
+      </p:sp>
+      <p:sp>
+        <p:nvSpPr>
+          <p:cNvPr id="9" name="Rectangle 8"/>
+          <p:cNvSpPr/>
+          <p:nvPr/>
+        </p:nvSpPr>
+        <p:spPr>
+          <a:xfrm>
+            <a:off x="5097780" y="1325880"/>
+            <a:ext cx="4347972" cy="2331720"/>
+          </a:xfrm>
+          <a:prstGeom prst="rect">
+            <a:avLst/>
+          </a:prstGeom>
+          <a:solidFill>
+            <a:srgbClr val="FFFFFF"/>
+          </a:solidFill>
+          <a:ln w="9525">
+            <a:solidFill>
+              <a:srgbClr val="D9D9D9"/>
+            </a:solidFill>
+          </a:ln>
+          <a:effectLst/>
+        </p:spPr>
+        <p:style>
+          <a:lnRef idx="1">
+            <a:schemeClr val="accent1"/>
+          </a:lnRef>
+          <a:fillRef idx="3">
+            <a:schemeClr val="accent1"/>
+          </a:fillRef>
+          <a:effectRef idx="2">
+            <a:schemeClr val="accent1"/>
+          </a:effectRef>
+          <a:fontRef idx="minor">
+            <a:schemeClr val="lt1"/>
+          </a:fontRef>
+        </p:style>
+        <p:txBody>
+          <a:bodyPr rtlCol="0" anchor="ctr"/>
+          <a:lstStyle/>
+          <a:p>
+            <a:pPr algn="ctr"/>
+          </a:p>
+        </p:txBody>
+      </p:sp>
+      <p:sp>
+        <p:nvSpPr>
+          <p:cNvPr id="10" name="Rectangle 9"/>
+          <p:cNvSpPr/>
+          <p:nvPr/>
+        </p:nvSpPr>
+        <p:spPr>
+          <a:xfrm>
+            <a:off x="5097780" y="1325880"/>
+            <a:ext cx="4347972" cy="310896"/>
+          </a:xfrm>
+          <a:prstGeom prst="rect">
+            <a:avLst/>
+          </a:prstGeom>
+          <a:solidFill>
+            <a:srgbClr val="10253F"/>
+          </a:solidFill>
+          <a:ln>
+            <a:noFill/>
+          </a:ln>
+          <a:effectLst/>
+        </p:spPr>
+        <p:style>
+          <a:lnRef idx="1">
+            <a:schemeClr val="accent1"/>
+          </a:lnRef>
+          <a:fillRef idx="3">
+            <a:schemeClr val="accent1"/>
+          </a:fillRef>
+          <a:effectRef idx="2">
+            <a:schemeClr val="accent1"/>
+          </a:effectRef>
+          <a:fontRef idx="minor">
+            <a:schemeClr val="lt1"/>
+          </a:fontRef>
+        </p:style>
+        <p:txBody>
+          <a:bodyPr rtlCol="0" anchor="ctr"/>
+          <a:lstStyle/>
+          <a:p>
+            <a:pPr algn="ctr"/>
+          </a:p>
+        </p:txBody>
+      </p:sp>
+      <p:sp>
+        <p:nvSpPr>
+          <p:cNvPr id="11" name="TextBox 10"/>
+          <p:cNvSpPr txBox="1"/>
+          <p:nvPr/>
+        </p:nvSpPr>
+        <p:spPr>
+          <a:xfrm>
+            <a:off x="5097780" y="1325880"/>
+            <a:ext cx="4347972" cy="310896"/>
+          </a:xfrm>
+          <a:prstGeom prst="rect">
+            <a:avLst/>
+          </a:prstGeom>
+          <a:noFill/>
+        </p:spPr>
+        <p:txBody>
+          <a:bodyPr wrap="square" anchor="ctr" lIns="0" rIns="0" tIns="0" bIns="0">
+            <a:spAutoFit/>
+          </a:bodyPr>
+          <a:lstStyle/>
+          <a:p>
+            <a:pPr algn="ctr"/>
+            <a:r>
+              <a:rPr sz="1050" b="1">
+                <a:solidFill>
+                  <a:srgbClr val="FFFFFF"/>
+                </a:solidFill>
+                <a:latin typeface="メイリオ"/>
+                <a:ea typeface="メイリオ"/>
+                <a:cs typeface="メイリオ"/>
+              </a:rPr>
+              <a:t>料金体系・出稿条件</a:t>
+            </a:r>
+          </a:p>
+        </p:txBody>
+      </p:sp>
+      <p:sp>
+        <p:nvSpPr>
+          <p:cNvPr id="12" name="TextBox 11"/>
+          <p:cNvSpPr txBox="1"/>
+          <p:nvPr/>
+        </p:nvSpPr>
+        <p:spPr>
+          <a:xfrm>
+            <a:off x="5262372" y="1728216"/>
+            <a:ext cx="4018788" cy="1837944"/>
+          </a:xfrm>
+          <a:prstGeom prst="rect">
+            <a:avLst/>
+          </a:prstGeom>
+          <a:noFill/>
+        </p:spPr>
+        <p:txBody>
+          <a:bodyPr wrap="square" lIns="0" rIns="0" tIns="0" bIns="0">
+            <a:spAutoFit/>
+          </a:bodyPr>
+          <a:lstStyle/>
+          <a:p>
+            <a:pPr>
+              <a:lnSpc>
+                <a:spcPct val="115000"/>
+              </a:lnSpc>
+              <a:spcAft>
+                <a:spcPts val="300"/>
+              </a:spcAft>
+            </a:pPr>
+            <a:r>
+              <a:rPr sz="900">
+                <a:solidFill>
+                  <a:srgbClr val="343434"/>
+                </a:solidFill>
+                <a:latin typeface="メイリオ"/>
+                <a:ea typeface="メイリオ"/>
+                <a:cs typeface="メイリオ"/>
+              </a:rPr>
+              <a:t>・基本費用：通常1,800万円→キャンペーン価格1,500万円</a:t>
+            </a:r>
+          </a:p>
+          <a:p>
+            <a:pPr>
+              <a:lnSpc>
+                <a:spcPct val="115000"/>
+              </a:lnSpc>
+              <a:spcAft>
+                <a:spcPts val="300"/>
+              </a:spcAft>
+            </a:pPr>
+            <a:r>
+              <a:rPr sz="900">
+                <a:solidFill>
+                  <a:srgbClr val="343434"/>
+                </a:solidFill>
+                <a:latin typeface="メイリオ"/>
+                <a:ea typeface="メイリオ"/>
+                <a:cs typeface="メイリオ"/>
+              </a:rPr>
+              <a:t>・掲載期間：通常7日間→15日間</a:t>
+            </a:r>
+          </a:p>
+          <a:p>
+            <a:pPr>
+              <a:lnSpc>
+                <a:spcPct val="115000"/>
+              </a:lnSpc>
+              <a:spcAft>
+                <a:spcPts val="300"/>
+              </a:spcAft>
+            </a:pPr>
+            <a:r>
+              <a:rPr sz="900">
+                <a:solidFill>
+                  <a:srgbClr val="343434"/>
+                </a:solidFill>
+                <a:latin typeface="メイリオ"/>
+                <a:ea typeface="メイリオ"/>
+                <a:cs typeface="メイリオ"/>
+              </a:rPr>
+              <a:t>・通数：通常最大900万通→最大1,050万通（150万通増量・ノンセグメント1配信のみ、セグメント／オーディエンス配信は不可）</a:t>
+            </a:r>
+          </a:p>
+          <a:p>
+            <a:pPr>
+              <a:lnSpc>
+                <a:spcPct val="115000"/>
+              </a:lnSpc>
+              <a:spcAft>
+                <a:spcPts val="300"/>
+              </a:spcAft>
+            </a:pPr>
+            <a:r>
+              <a:rPr sz="900">
+                <a:solidFill>
+                  <a:srgbClr val="343434"/>
+                </a:solidFill>
+                <a:latin typeface="メイリオ"/>
+                <a:ea typeface="メイリオ"/>
+                <a:cs typeface="メイリオ"/>
+              </a:rPr>
+              <a:t>・基本費用に友だち追加・uid提供・アンケート・景品・メッセージ配信1回分を含む</a:t>
+            </a:r>
+          </a:p>
+          <a:p>
+            <a:pPr>
+              <a:lnSpc>
+                <a:spcPct val="115000"/>
+              </a:lnSpc>
+              <a:spcAft>
+                <a:spcPts val="300"/>
+              </a:spcAft>
+            </a:pPr>
+            <a:r>
+              <a:rPr sz="900">
+                <a:solidFill>
+                  <a:srgbClr val="343434"/>
+                </a:solidFill>
+                <a:latin typeface="メイリオ"/>
+                <a:ea typeface="メイリオ"/>
+                <a:cs typeface="メイリオ"/>
+              </a:rPr>
+              <a:t>・オプション：応募後の強制視聴ビデオ300万円（トライアル価格・変更の可能性あり）</a:t>
+            </a:r>
+          </a:p>
+        </p:txBody>
+      </p:sp>
+      <p:sp>
+        <p:nvSpPr>
+          <p:cNvPr id="13" name="Rectangle 12"/>
+          <p:cNvSpPr/>
+          <p:nvPr/>
+        </p:nvSpPr>
+        <p:spPr>
+          <a:xfrm>
+            <a:off x="566928" y="3794760"/>
+            <a:ext cx="4347972" cy="2331720"/>
+          </a:xfrm>
+          <a:prstGeom prst="rect">
+            <a:avLst/>
+          </a:prstGeom>
+          <a:solidFill>
+            <a:srgbClr val="FFFFFF"/>
+          </a:solidFill>
+          <a:ln w="9525">
+            <a:solidFill>
+              <a:srgbClr val="D9D9D9"/>
+            </a:solidFill>
+          </a:ln>
+          <a:effectLst/>
+        </p:spPr>
+        <p:style>
+          <a:lnRef idx="1">
+            <a:schemeClr val="accent1"/>
+          </a:lnRef>
+          <a:fillRef idx="3">
+            <a:schemeClr val="accent1"/>
+          </a:fillRef>
+          <a:effectRef idx="2">
+            <a:schemeClr val="accent1"/>
+          </a:effectRef>
+          <a:fontRef idx="minor">
+            <a:schemeClr val="lt1"/>
+          </a:fontRef>
+        </p:style>
+        <p:txBody>
+          <a:bodyPr rtlCol="0" anchor="ctr"/>
+          <a:lstStyle/>
+          <a:p>
+            <a:pPr algn="ctr"/>
+          </a:p>
+        </p:txBody>
+      </p:sp>
+      <p:sp>
+        <p:nvSpPr>
+          <p:cNvPr id="14" name="Rectangle 13"/>
+          <p:cNvSpPr/>
+          <p:nvPr/>
+        </p:nvSpPr>
+        <p:spPr>
+          <a:xfrm>
+            <a:off x="566928" y="3794760"/>
+            <a:ext cx="4347972" cy="310896"/>
+          </a:xfrm>
+          <a:prstGeom prst="rect">
+            <a:avLst/>
+          </a:prstGeom>
+          <a:solidFill>
+            <a:srgbClr val="10253F"/>
+          </a:solidFill>
+          <a:ln>
+            <a:noFill/>
+          </a:ln>
+          <a:effectLst/>
+        </p:spPr>
+        <p:style>
+          <a:lnRef idx="1">
+            <a:schemeClr val="accent1"/>
+          </a:lnRef>
+          <a:fillRef idx="3">
+            <a:schemeClr val="accent1"/>
+          </a:fillRef>
+          <a:effectRef idx="2">
+            <a:schemeClr val="accent1"/>
+          </a:effectRef>
+          <a:fontRef idx="minor">
+            <a:schemeClr val="lt1"/>
+          </a:fontRef>
+        </p:style>
+        <p:txBody>
+          <a:bodyPr rtlCol="0" anchor="ctr"/>
+          <a:lstStyle/>
+          <a:p>
+            <a:pPr algn="ctr"/>
+          </a:p>
+        </p:txBody>
+      </p:sp>
+      <p:sp>
+        <p:nvSpPr>
+          <p:cNvPr id="15" name="TextBox 14"/>
+          <p:cNvSpPr txBox="1"/>
+          <p:nvPr/>
+        </p:nvSpPr>
+        <p:spPr>
+          <a:xfrm>
+            <a:off x="566928" y="3794760"/>
+            <a:ext cx="4347972" cy="310896"/>
+          </a:xfrm>
+          <a:prstGeom prst="rect">
+            <a:avLst/>
+          </a:prstGeom>
+          <a:noFill/>
+        </p:spPr>
+        <p:txBody>
+          <a:bodyPr wrap="square" anchor="ctr" lIns="0" rIns="0" tIns="0" bIns="0">
+            <a:spAutoFit/>
+          </a:bodyPr>
+          <a:lstStyle/>
+          <a:p>
+            <a:pPr algn="ctr"/>
+            <a:r>
+              <a:rPr sz="1050" b="1">
+                <a:solidFill>
+                  <a:srgbClr val="FFFFFF"/>
+                </a:solidFill>
+                <a:latin typeface="メイリオ"/>
+                <a:ea typeface="メイリオ"/>
+                <a:cs typeface="メイリオ"/>
+              </a:rPr>
+              <a:t>スケジュール・導入フロー</a:t>
+            </a:r>
+          </a:p>
+        </p:txBody>
+      </p:sp>
+      <p:sp>
+        <p:nvSpPr>
+          <p:cNvPr id="16" name="TextBox 15"/>
+          <p:cNvSpPr txBox="1"/>
+          <p:nvPr/>
+        </p:nvSpPr>
+        <p:spPr>
+          <a:xfrm>
+            <a:off x="731520" y="4197096"/>
+            <a:ext cx="4018788" cy="1837944"/>
+          </a:xfrm>
+          <a:prstGeom prst="rect">
+            <a:avLst/>
+          </a:prstGeom>
+          <a:noFill/>
+        </p:spPr>
+        <p:txBody>
+          <a:bodyPr wrap="square" lIns="0" rIns="0" tIns="0" bIns="0">
+            <a:spAutoFit/>
+          </a:bodyPr>
+          <a:lstStyle/>
+          <a:p>
+            <a:pPr>
+              <a:lnSpc>
+                <a:spcPct val="115000"/>
+              </a:lnSpc>
+              <a:spcAft>
+                <a:spcPts val="300"/>
+              </a:spcAft>
+            </a:pPr>
+            <a:r>
+              <a:rPr sz="900">
+                <a:solidFill>
+                  <a:srgbClr val="343434"/>
+                </a:solidFill>
+                <a:latin typeface="メイリオ"/>
+                <a:ea typeface="メイリオ"/>
+                <a:cs typeface="メイリオ"/>
+              </a:rPr>
+              <a:t>・①開始30営業日前：企業・商材審査／企画審査</a:t>
+            </a:r>
+          </a:p>
+          <a:p>
+            <a:pPr>
+              <a:lnSpc>
+                <a:spcPct val="115000"/>
+              </a:lnSpc>
+              <a:spcAft>
+                <a:spcPts val="300"/>
+              </a:spcAft>
+            </a:pPr>
+            <a:r>
+              <a:rPr sz="900">
+                <a:solidFill>
+                  <a:srgbClr val="343434"/>
+                </a:solidFill>
+                <a:latin typeface="メイリオ"/>
+                <a:ea typeface="メイリオ"/>
+                <a:cs typeface="メイリオ"/>
+              </a:rPr>
+              <a:t>・②開始25営業日前17時：メッセージ配信枠おさえ・キャンペーン申込み</a:t>
+            </a:r>
+          </a:p>
+          <a:p>
+            <a:pPr>
+              <a:lnSpc>
+                <a:spcPct val="115000"/>
+              </a:lnSpc>
+              <a:spcAft>
+                <a:spcPts val="300"/>
+              </a:spcAft>
+            </a:pPr>
+            <a:r>
+              <a:rPr sz="900">
+                <a:solidFill>
+                  <a:srgbClr val="343434"/>
+                </a:solidFill>
+                <a:latin typeface="メイリオ"/>
+                <a:ea typeface="メイリオ"/>
+                <a:cs typeface="メイリオ"/>
+              </a:rPr>
+              <a:t>・③開始20営業日前17時：各種入稿物の提出</a:t>
+            </a:r>
+          </a:p>
+          <a:p>
+            <a:pPr>
+              <a:lnSpc>
+                <a:spcPct val="115000"/>
+              </a:lnSpc>
+              <a:spcAft>
+                <a:spcPts val="300"/>
+              </a:spcAft>
+            </a:pPr>
+            <a:r>
+              <a:rPr sz="900">
+                <a:solidFill>
+                  <a:srgbClr val="343434"/>
+                </a:solidFill>
+                <a:latin typeface="メイリオ"/>
+                <a:ea typeface="メイリオ"/>
+                <a:cs typeface="メイリオ"/>
+              </a:rPr>
+              <a:t>・④開始日当日：キャンペーン掲載開始</a:t>
+            </a:r>
+          </a:p>
+          <a:p>
+            <a:pPr>
+              <a:lnSpc>
+                <a:spcPct val="115000"/>
+              </a:lnSpc>
+              <a:spcAft>
+                <a:spcPts val="300"/>
+              </a:spcAft>
+            </a:pPr>
+            <a:r>
+              <a:rPr sz="900">
+                <a:solidFill>
+                  <a:srgbClr val="343434"/>
+                </a:solidFill>
+                <a:latin typeface="メイリオ"/>
+                <a:ea typeface="メイリオ"/>
+                <a:cs typeface="メイリオ"/>
+              </a:rPr>
+              <a:t>・掲載開始は平日（LINEヤフー社営業日）のみ、土日祝日不可</a:t>
+            </a:r>
+          </a:p>
+        </p:txBody>
+      </p:sp>
+      <p:sp>
+        <p:nvSpPr>
+          <p:cNvPr id="17" name="Rectangle 16"/>
+          <p:cNvSpPr/>
+          <p:nvPr/>
+        </p:nvSpPr>
+        <p:spPr>
+          <a:xfrm>
+            <a:off x="5097780" y="3794760"/>
+            <a:ext cx="4347972" cy="2331720"/>
+          </a:xfrm>
+          <a:prstGeom prst="rect">
+            <a:avLst/>
+          </a:prstGeom>
+          <a:solidFill>
+            <a:srgbClr val="FFFFFF"/>
+          </a:solidFill>
+          <a:ln w="9525">
+            <a:solidFill>
+              <a:srgbClr val="D9D9D9"/>
+            </a:solidFill>
+          </a:ln>
+          <a:effectLst/>
+        </p:spPr>
+        <p:style>
+          <a:lnRef idx="1">
+            <a:schemeClr val="accent1"/>
+          </a:lnRef>
+          <a:fillRef idx="3">
+            <a:schemeClr val="accent1"/>
+          </a:fillRef>
+          <a:effectRef idx="2">
+            <a:schemeClr val="accent1"/>
+          </a:effectRef>
+          <a:fontRef idx="minor">
+            <a:schemeClr val="lt1"/>
+          </a:fontRef>
+        </p:style>
+        <p:txBody>
+          <a:bodyPr rtlCol="0" anchor="ctr"/>
+          <a:lstStyle/>
+          <a:p>
+            <a:pPr algn="ctr"/>
+          </a:p>
+        </p:txBody>
+      </p:sp>
+      <p:sp>
+        <p:nvSpPr>
+          <p:cNvPr id="18" name="Rectangle 17"/>
+          <p:cNvSpPr/>
+          <p:nvPr/>
+        </p:nvSpPr>
+        <p:spPr>
+          <a:xfrm>
+            <a:off x="5097780" y="3794760"/>
+            <a:ext cx="4347972" cy="310896"/>
+          </a:xfrm>
+          <a:prstGeom prst="rect">
+            <a:avLst/>
+          </a:prstGeom>
+          <a:solidFill>
+            <a:srgbClr val="10253F"/>
+          </a:solidFill>
+          <a:ln>
+            <a:noFill/>
+          </a:ln>
+          <a:effectLst/>
+        </p:spPr>
+        <p:style>
+          <a:lnRef idx="1">
+            <a:schemeClr val="accent1"/>
+          </a:lnRef>
+          <a:fillRef idx="3">
+            <a:schemeClr val="accent1"/>
+          </a:fillRef>
+          <a:effectRef idx="2">
+            <a:schemeClr val="accent1"/>
+          </a:effectRef>
+          <a:fontRef idx="minor">
+            <a:schemeClr val="lt1"/>
+          </a:fontRef>
+        </p:style>
+        <p:txBody>
+          <a:bodyPr rtlCol="0" anchor="ctr"/>
+          <a:lstStyle/>
+          <a:p>
+            <a:pPr algn="ctr"/>
+          </a:p>
+        </p:txBody>
+      </p:sp>
+      <p:sp>
+        <p:nvSpPr>
+          <p:cNvPr id="19" name="TextBox 18"/>
+          <p:cNvSpPr txBox="1"/>
+          <p:nvPr/>
+        </p:nvSpPr>
+        <p:spPr>
+          <a:xfrm>
+            <a:off x="5097780" y="3794760"/>
+            <a:ext cx="4347972" cy="310896"/>
+          </a:xfrm>
+          <a:prstGeom prst="rect">
+            <a:avLst/>
+          </a:prstGeom>
+          <a:noFill/>
+        </p:spPr>
+        <p:txBody>
+          <a:bodyPr wrap="square" anchor="ctr" lIns="0" rIns="0" tIns="0" bIns="0">
+            <a:spAutoFit/>
+          </a:bodyPr>
+          <a:lstStyle/>
+          <a:p>
+            <a:pPr algn="ctr"/>
+            <a:r>
+              <a:rPr sz="1050" b="1">
+                <a:solidFill>
+                  <a:srgbClr val="FFFFFF"/>
+                </a:solidFill>
+                <a:latin typeface="メイリオ"/>
+                <a:ea typeface="メイリオ"/>
+                <a:cs typeface="メイリオ"/>
+              </a:rPr>
+              <a:t>注意点・影響</a:t>
+            </a:r>
+          </a:p>
+        </p:txBody>
+      </p:sp>
+      <p:sp>
+        <p:nvSpPr>
+          <p:cNvPr id="20" name="TextBox 19"/>
+          <p:cNvSpPr txBox="1"/>
+          <p:nvPr/>
+        </p:nvSpPr>
+        <p:spPr>
+          <a:xfrm>
+            <a:off x="5262372" y="4197096"/>
+            <a:ext cx="4018788" cy="1837944"/>
+          </a:xfrm>
+          <a:prstGeom prst="rect">
+            <a:avLst/>
+          </a:prstGeom>
+          <a:noFill/>
+        </p:spPr>
+        <p:txBody>
+          <a:bodyPr wrap="square" lIns="0" rIns="0" tIns="0" bIns="0">
+            <a:spAutoFit/>
+          </a:bodyPr>
+          <a:lstStyle/>
           <a:p>
             <a:pPr>
               <a:lnSpc>
@@ -9458,7 +10073,7 @@
                 <a:ea typeface="メイリオ"/>
                 <a:cs typeface="メイリオ"/>
               </a:rPr>
-              <a:t>・特典②特別掲載期間：キャンペーン掲載期間15日間</a:t>
+              <a:t>・期間限定・条件限定のため、対象クライアントへは早めの提案・申込誘導が必要</a:t>
             </a:r>
           </a:p>
           <a:p>
@@ -9479,159 +10094,9 @@
                 <a:ea typeface="メイリオ"/>
                 <a:cs typeface="メイリオ"/>
               </a:rPr>
-              <a:t>・特典③特別通数：告知メッセージ（1通）の通数150万通増量（最大1,050万通）</a:t>
-            </a:r>
-          </a:p>
-        </p:txBody>
-      </p:sp>
-      <p:sp>
-        <p:nvSpPr>
-          <p:cNvPr id="13" name="Rectangle 12"/>
-          <p:cNvSpPr/>
-          <p:nvPr/>
-        </p:nvSpPr>
-        <p:spPr>
-          <a:xfrm>
-            <a:off x="566928" y="3794760"/>
-            <a:ext cx="4347972" cy="2331720"/>
-          </a:xfrm>
-          <a:prstGeom prst="rect">
-            <a:avLst/>
-          </a:prstGeom>
-          <a:solidFill>
-            <a:srgbClr val="FFFFFF"/>
-          </a:solidFill>
-          <a:ln w="9525">
-            <a:solidFill>
-              <a:srgbClr val="D9D9D9"/>
-            </a:solidFill>
-          </a:ln>
-          <a:effectLst/>
-        </p:spPr>
-        <p:style>
-          <a:lnRef idx="1">
-            <a:schemeClr val="accent1"/>
-          </a:lnRef>
-          <a:fillRef idx="3">
-            <a:schemeClr val="accent1"/>
-          </a:fillRef>
-          <a:effectRef idx="2">
-            <a:schemeClr val="accent1"/>
-          </a:effectRef>
-          <a:fontRef idx="minor">
-            <a:schemeClr val="lt1"/>
-          </a:fontRef>
-        </p:style>
-        <p:txBody>
-          <a:bodyPr rtlCol="0" anchor="ctr"/>
-          <a:lstStyle/>
-          <a:p>
-            <a:pPr algn="ctr"/>
-          </a:p>
-        </p:txBody>
-      </p:sp>
-      <p:sp>
-        <p:nvSpPr>
-          <p:cNvPr id="14" name="Rectangle 13"/>
-          <p:cNvSpPr/>
-          <p:nvPr/>
-        </p:nvSpPr>
-        <p:spPr>
-          <a:xfrm>
-            <a:off x="566928" y="3794760"/>
-            <a:ext cx="4347972" cy="310896"/>
-          </a:xfrm>
-          <a:prstGeom prst="rect">
-            <a:avLst/>
-          </a:prstGeom>
-          <a:solidFill>
-            <a:srgbClr val="10253F"/>
-          </a:solidFill>
-          <a:ln>
-            <a:noFill/>
-          </a:ln>
-          <a:effectLst/>
-        </p:spPr>
-        <p:style>
-          <a:lnRef idx="1">
-            <a:schemeClr val="accent1"/>
-          </a:lnRef>
-          <a:fillRef idx="3">
-            <a:schemeClr val="accent1"/>
-          </a:fillRef>
-          <a:effectRef idx="2">
-            <a:schemeClr val="accent1"/>
-          </a:effectRef>
-          <a:fontRef idx="minor">
-            <a:schemeClr val="lt1"/>
-          </a:fontRef>
-        </p:style>
-        <p:txBody>
-          <a:bodyPr rtlCol="0" anchor="ctr"/>
-          <a:lstStyle/>
-          <a:p>
-            <a:pPr algn="ctr"/>
-          </a:p>
-        </p:txBody>
-      </p:sp>
-      <p:sp>
-        <p:nvSpPr>
-          <p:cNvPr id="15" name="TextBox 14"/>
-          <p:cNvSpPr txBox="1"/>
-          <p:nvPr/>
-        </p:nvSpPr>
-        <p:spPr>
-          <a:xfrm>
-            <a:off x="566928" y="3794760"/>
-            <a:ext cx="4347972" cy="310896"/>
-          </a:xfrm>
-          <a:prstGeom prst="rect">
-            <a:avLst/>
-          </a:prstGeom>
-          <a:noFill/>
-        </p:spPr>
-        <p:txBody>
-          <a:bodyPr wrap="square" anchor="ctr" lIns="0" rIns="0" tIns="0" bIns="0">
-            <a:spAutoFit/>
-          </a:bodyPr>
-          <a:lstStyle/>
-          <a:p>
-            <a:pPr algn="ctr"/>
-            <a:r>
-              <a:rPr sz="1050" b="1">
-                <a:solidFill>
-                  <a:srgbClr val="FFFFFF"/>
-                </a:solidFill>
-                <a:latin typeface="メイリオ"/>
-                <a:ea typeface="メイリオ"/>
-                <a:cs typeface="メイリオ"/>
-              </a:rPr>
-              <a:t>スケジュール・導入フロー</a:t>
-            </a:r>
-          </a:p>
-        </p:txBody>
-      </p:sp>
-      <p:sp>
-        <p:nvSpPr>
-          <p:cNvPr id="16" name="TextBox 15"/>
-          <p:cNvSpPr txBox="1"/>
-          <p:nvPr/>
-        </p:nvSpPr>
-        <p:spPr>
-          <a:xfrm>
-            <a:off x="731520" y="4197096"/>
-            <a:ext cx="4018788" cy="1837944"/>
-          </a:xfrm>
-          <a:prstGeom prst="rect">
-            <a:avLst/>
-          </a:prstGeom>
-          <a:noFill/>
-        </p:spPr>
-        <p:txBody>
-          <a:bodyPr wrap="square" lIns="0" rIns="0" tIns="0" bIns="0">
-            <a:spAutoFit/>
-          </a:bodyPr>
-          <a:lstStyle/>
+              <a:t>・キャンセル規定：発注受領後、または発注期日（開始25営業日前）超過後のキャンセルは最低発注金額1,500万円を請求</a:t>
+            </a:r>
+          </a:p>
           <a:p>
             <a:pPr>
               <a:lnSpc>
@@ -9650,178 +10115,7 @@
                 <a:ea typeface="メイリオ"/>
                 <a:cs typeface="メイリオ"/>
               </a:rPr>
-              <a:t>・キャンペーン期間：2026年10月20日〜12月25日終了の案件が対象</a:t>
-            </a:r>
-          </a:p>
-        </p:txBody>
-      </p:sp>
-      <p:sp>
-        <p:nvSpPr>
-          <p:cNvPr id="17" name="Rectangle 16"/>
-          <p:cNvSpPr/>
-          <p:nvPr/>
-        </p:nvSpPr>
-        <p:spPr>
-          <a:xfrm>
-            <a:off x="5097780" y="3794760"/>
-            <a:ext cx="4347972" cy="2331720"/>
-          </a:xfrm>
-          <a:prstGeom prst="rect">
-            <a:avLst/>
-          </a:prstGeom>
-          <a:solidFill>
-            <a:srgbClr val="FFFFFF"/>
-          </a:solidFill>
-          <a:ln w="9525">
-            <a:solidFill>
-              <a:srgbClr val="D9D9D9"/>
-            </a:solidFill>
-          </a:ln>
-          <a:effectLst/>
-        </p:spPr>
-        <p:style>
-          <a:lnRef idx="1">
-            <a:schemeClr val="accent1"/>
-          </a:lnRef>
-          <a:fillRef idx="3">
-            <a:schemeClr val="accent1"/>
-          </a:fillRef>
-          <a:effectRef idx="2">
-            <a:schemeClr val="accent1"/>
-          </a:effectRef>
-          <a:fontRef idx="minor">
-            <a:schemeClr val="lt1"/>
-          </a:fontRef>
-        </p:style>
-        <p:txBody>
-          <a:bodyPr rtlCol="0" anchor="ctr"/>
-          <a:lstStyle/>
-          <a:p>
-            <a:pPr algn="ctr"/>
-          </a:p>
-        </p:txBody>
-      </p:sp>
-      <p:sp>
-        <p:nvSpPr>
-          <p:cNvPr id="18" name="Rectangle 17"/>
-          <p:cNvSpPr/>
-          <p:nvPr/>
-        </p:nvSpPr>
-        <p:spPr>
-          <a:xfrm>
-            <a:off x="5097780" y="3794760"/>
-            <a:ext cx="4347972" cy="310896"/>
-          </a:xfrm>
-          <a:prstGeom prst="rect">
-            <a:avLst/>
-          </a:prstGeom>
-          <a:solidFill>
-            <a:srgbClr val="10253F"/>
-          </a:solidFill>
-          <a:ln>
-            <a:noFill/>
-          </a:ln>
-          <a:effectLst/>
-        </p:spPr>
-        <p:style>
-          <a:lnRef idx="1">
-            <a:schemeClr val="accent1"/>
-          </a:lnRef>
-          <a:fillRef idx="3">
-            <a:schemeClr val="accent1"/>
-          </a:fillRef>
-          <a:effectRef idx="2">
-            <a:schemeClr val="accent1"/>
-          </a:effectRef>
-          <a:fontRef idx="minor">
-            <a:schemeClr val="lt1"/>
-          </a:fontRef>
-        </p:style>
-        <p:txBody>
-          <a:bodyPr rtlCol="0" anchor="ctr"/>
-          <a:lstStyle/>
-          <a:p>
-            <a:pPr algn="ctr"/>
-          </a:p>
-        </p:txBody>
-      </p:sp>
-      <p:sp>
-        <p:nvSpPr>
-          <p:cNvPr id="19" name="TextBox 18"/>
-          <p:cNvSpPr txBox="1"/>
-          <p:nvPr/>
-        </p:nvSpPr>
-        <p:spPr>
-          <a:xfrm>
-            <a:off x="5097780" y="3794760"/>
-            <a:ext cx="4347972" cy="310896"/>
-          </a:xfrm>
-          <a:prstGeom prst="rect">
-            <a:avLst/>
-          </a:prstGeom>
-          <a:noFill/>
-        </p:spPr>
-        <p:txBody>
-          <a:bodyPr wrap="square" anchor="ctr" lIns="0" rIns="0" tIns="0" bIns="0">
-            <a:spAutoFit/>
-          </a:bodyPr>
-          <a:lstStyle/>
-          <a:p>
-            <a:pPr algn="ctr"/>
-            <a:r>
-              <a:rPr sz="1050" b="1">
-                <a:solidFill>
-                  <a:srgbClr val="FFFFFF"/>
-                </a:solidFill>
-                <a:latin typeface="メイリオ"/>
-                <a:ea typeface="メイリオ"/>
-                <a:cs typeface="メイリオ"/>
-              </a:rPr>
-              <a:t>注意点・影響</a:t>
-            </a:r>
-          </a:p>
-        </p:txBody>
-      </p:sp>
-      <p:sp>
-        <p:nvSpPr>
-          <p:cNvPr id="20" name="TextBox 19"/>
-          <p:cNvSpPr txBox="1"/>
-          <p:nvPr/>
-        </p:nvSpPr>
-        <p:spPr>
-          <a:xfrm>
-            <a:off x="5262372" y="4197096"/>
-            <a:ext cx="4018788" cy="1837944"/>
-          </a:xfrm>
-          <a:prstGeom prst="rect">
-            <a:avLst/>
-          </a:prstGeom>
-          <a:noFill/>
-        </p:spPr>
-        <p:txBody>
-          <a:bodyPr wrap="square" lIns="0" rIns="0" tIns="0" bIns="0">
-            <a:spAutoFit/>
-          </a:bodyPr>
-          <a:lstStyle/>
-          <a:p>
-            <a:pPr>
-              <a:lnSpc>
-                <a:spcPct val="120000"/>
-              </a:lnSpc>
-              <a:spcAft>
-                <a:spcPts val="300"/>
-              </a:spcAft>
-            </a:pPr>
-            <a:r>
-              <a:rPr sz="1000">
-                <a:solidFill>
-                  <a:srgbClr val="343434"/>
-                </a:solidFill>
-                <a:latin typeface="メイリオ"/>
-                <a:ea typeface="メイリオ"/>
-                <a:cs typeface="メイリオ"/>
-              </a:rPr>
-              <a:t>・期間限定・条件限定のため、対象クライアントへは早めの提案・申込誘導が必要</a:t>
+              <a:t>・他割引との併用不可。景品がLINEポイントから変更になる可能性あり（変更不可の申し出は受付不可）</a:t>
             </a:r>
           </a:p>
         </p:txBody>
@@ -10190,156 +10484,6 @@
               <a:t>・データベース管理システムのスケール最適化実施のため対象期間中は管理画面が利用停止</a:t>
             </a:r>
           </a:p>
-        </p:txBody>
-      </p:sp>
-      <p:sp>
-        <p:nvSpPr>
-          <p:cNvPr id="9" name="Rectangle 8"/>
-          <p:cNvSpPr/>
-          <p:nvPr/>
-        </p:nvSpPr>
-        <p:spPr>
-          <a:xfrm>
-            <a:off x="5097780" y="1325880"/>
-            <a:ext cx="4347972" cy="2331720"/>
-          </a:xfrm>
-          <a:prstGeom prst="rect">
-            <a:avLst/>
-          </a:prstGeom>
-          <a:solidFill>
-            <a:srgbClr val="FFFFFF"/>
-          </a:solidFill>
-          <a:ln w="9525">
-            <a:solidFill>
-              <a:srgbClr val="D9D9D9"/>
-            </a:solidFill>
-          </a:ln>
-          <a:effectLst/>
-        </p:spPr>
-        <p:style>
-          <a:lnRef idx="1">
-            <a:schemeClr val="accent1"/>
-          </a:lnRef>
-          <a:fillRef idx="3">
-            <a:schemeClr val="accent1"/>
-          </a:fillRef>
-          <a:effectRef idx="2">
-            <a:schemeClr val="accent1"/>
-          </a:effectRef>
-          <a:fontRef idx="minor">
-            <a:schemeClr val="lt1"/>
-          </a:fontRef>
-        </p:style>
-        <p:txBody>
-          <a:bodyPr rtlCol="0" anchor="ctr"/>
-          <a:lstStyle/>
-          <a:p>
-            <a:pPr algn="ctr"/>
-          </a:p>
-        </p:txBody>
-      </p:sp>
-      <p:sp>
-        <p:nvSpPr>
-          <p:cNvPr id="10" name="Rectangle 9"/>
-          <p:cNvSpPr/>
-          <p:nvPr/>
-        </p:nvSpPr>
-        <p:spPr>
-          <a:xfrm>
-            <a:off x="5097780" y="1325880"/>
-            <a:ext cx="4347972" cy="310896"/>
-          </a:xfrm>
-          <a:prstGeom prst="rect">
-            <a:avLst/>
-          </a:prstGeom>
-          <a:solidFill>
-            <a:srgbClr val="10253F"/>
-          </a:solidFill>
-          <a:ln>
-            <a:noFill/>
-          </a:ln>
-          <a:effectLst/>
-        </p:spPr>
-        <p:style>
-          <a:lnRef idx="1">
-            <a:schemeClr val="accent1"/>
-          </a:lnRef>
-          <a:fillRef idx="3">
-            <a:schemeClr val="accent1"/>
-          </a:fillRef>
-          <a:effectRef idx="2">
-            <a:schemeClr val="accent1"/>
-          </a:effectRef>
-          <a:fontRef idx="minor">
-            <a:schemeClr val="lt1"/>
-          </a:fontRef>
-        </p:style>
-        <p:txBody>
-          <a:bodyPr rtlCol="0" anchor="ctr"/>
-          <a:lstStyle/>
-          <a:p>
-            <a:pPr algn="ctr"/>
-          </a:p>
-        </p:txBody>
-      </p:sp>
-      <p:sp>
-        <p:nvSpPr>
-          <p:cNvPr id="11" name="TextBox 10"/>
-          <p:cNvSpPr txBox="1"/>
-          <p:nvPr/>
-        </p:nvSpPr>
-        <p:spPr>
-          <a:xfrm>
-            <a:off x="5097780" y="1325880"/>
-            <a:ext cx="4347972" cy="310896"/>
-          </a:xfrm>
-          <a:prstGeom prst="rect">
-            <a:avLst/>
-          </a:prstGeom>
-          <a:noFill/>
-        </p:spPr>
-        <p:txBody>
-          <a:bodyPr wrap="square" anchor="ctr" lIns="0" rIns="0" tIns="0" bIns="0">
-            <a:spAutoFit/>
-          </a:bodyPr>
-          <a:lstStyle/>
-          <a:p>
-            <a:pPr algn="ctr"/>
-            <a:r>
-              <a:rPr sz="1050" b="1">
-                <a:solidFill>
-                  <a:srgbClr val="FFFFFF"/>
-                </a:solidFill>
-                <a:latin typeface="メイリオ"/>
-                <a:ea typeface="メイリオ"/>
-                <a:cs typeface="メイリオ"/>
-              </a:rPr>
-              <a:t>料金体系・出稿条件</a:t>
-            </a:r>
-          </a:p>
-        </p:txBody>
-      </p:sp>
-      <p:sp>
-        <p:nvSpPr>
-          <p:cNvPr id="12" name="TextBox 11"/>
-          <p:cNvSpPr txBox="1"/>
-          <p:nvPr/>
-        </p:nvSpPr>
-        <p:spPr>
-          <a:xfrm>
-            <a:off x="5262372" y="1728216"/>
-            <a:ext cx="4018788" cy="1837944"/>
-          </a:xfrm>
-          <a:prstGeom prst="rect">
-            <a:avLst/>
-          </a:prstGeom>
-          <a:noFill/>
-        </p:spPr>
-        <p:txBody>
-          <a:bodyPr wrap="square" lIns="0" rIns="0" tIns="0" bIns="0">
-            <a:spAutoFit/>
-          </a:bodyPr>
-          <a:lstStyle/>
           <a:p>
             <a:pPr>
               <a:lnSpc>
@@ -10358,20 +10502,20 @@
                 <a:ea typeface="メイリオ"/>
                 <a:cs typeface="メイリオ"/>
               </a:rPr>
-              <a:t>・該当なし</a:t>
-            </a:r>
-          </a:p>
-        </p:txBody>
-      </p:sp>
-      <p:sp>
-        <p:nvSpPr>
-          <p:cNvPr id="13" name="Rectangle 12"/>
+              <a:t>・対象メニュー：LINEオープンキャンペーン（抽選型）。アンケート型・季節商品の過去案件も対象</a:t>
+            </a:r>
+          </a:p>
+        </p:txBody>
+      </p:sp>
+      <p:sp>
+        <p:nvSpPr>
+          <p:cNvPr id="9" name="Rectangle 8"/>
           <p:cNvSpPr/>
           <p:nvPr/>
         </p:nvSpPr>
         <p:spPr>
           <a:xfrm>
-            <a:off x="566928" y="3794760"/>
+            <a:off x="5097780" y="1325880"/>
             <a:ext cx="4347972" cy="2331720"/>
           </a:xfrm>
           <a:prstGeom prst="rect">
@@ -10411,13 +10555,13 @@
       </p:sp>
       <p:sp>
         <p:nvSpPr>
-          <p:cNvPr id="14" name="Rectangle 13"/>
+          <p:cNvPr id="10" name="Rectangle 9"/>
           <p:cNvSpPr/>
           <p:nvPr/>
         </p:nvSpPr>
         <p:spPr>
           <a:xfrm>
-            <a:off x="566928" y="3794760"/>
+            <a:off x="5097780" y="1325880"/>
             <a:ext cx="4347972" cy="310896"/>
           </a:xfrm>
           <a:prstGeom prst="rect">
@@ -10455,13 +10599,13 @@
       </p:sp>
       <p:sp>
         <p:nvSpPr>
-          <p:cNvPr id="15" name="TextBox 14"/>
+          <p:cNvPr id="11" name="TextBox 10"/>
           <p:cNvSpPr txBox="1"/>
           <p:nvPr/>
         </p:nvSpPr>
         <p:spPr>
           <a:xfrm>
-            <a:off x="566928" y="3794760"/>
+            <a:off x="5097780" y="1325880"/>
             <a:ext cx="4347972" cy="310896"/>
           </a:xfrm>
           <a:prstGeom prst="rect">
@@ -10485,20 +10629,20 @@
                 <a:ea typeface="メイリオ"/>
                 <a:cs typeface="メイリオ"/>
               </a:rPr>
-              <a:t>スケジュール・導入フロー</a:t>
-            </a:r>
-          </a:p>
-        </p:txBody>
-      </p:sp>
-      <p:sp>
-        <p:nvSpPr>
-          <p:cNvPr id="16" name="TextBox 15"/>
+              <a:t>料金体系・出稿条件</a:t>
+            </a:r>
+          </a:p>
+        </p:txBody>
+      </p:sp>
+      <p:sp>
+        <p:nvSpPr>
+          <p:cNvPr id="12" name="TextBox 11"/>
           <p:cNvSpPr txBox="1"/>
           <p:nvPr/>
         </p:nvSpPr>
         <p:spPr>
           <a:xfrm>
-            <a:off x="731520" y="4197096"/>
+            <a:off x="5262372" y="1728216"/>
             <a:ext cx="4018788" cy="1837944"/>
           </a:xfrm>
           <a:prstGeom prst="rect">
@@ -10529,9 +10673,159 @@
                 <a:ea typeface="メイリオ"/>
                 <a:cs typeface="メイリオ"/>
               </a:rPr>
-              <a:t>・社外への案内開始日・リリース日：2026年9月2日</a:t>
-            </a:r>
-          </a:p>
+              <a:t>・該当なし</a:t>
+            </a:r>
+          </a:p>
+        </p:txBody>
+      </p:sp>
+      <p:sp>
+        <p:nvSpPr>
+          <p:cNvPr id="13" name="Rectangle 12"/>
+          <p:cNvSpPr/>
+          <p:nvPr/>
+        </p:nvSpPr>
+        <p:spPr>
+          <a:xfrm>
+            <a:off x="566928" y="3794760"/>
+            <a:ext cx="4347972" cy="2331720"/>
+          </a:xfrm>
+          <a:prstGeom prst="rect">
+            <a:avLst/>
+          </a:prstGeom>
+          <a:solidFill>
+            <a:srgbClr val="FFFFFF"/>
+          </a:solidFill>
+          <a:ln w="9525">
+            <a:solidFill>
+              <a:srgbClr val="D9D9D9"/>
+            </a:solidFill>
+          </a:ln>
+          <a:effectLst/>
+        </p:spPr>
+        <p:style>
+          <a:lnRef idx="1">
+            <a:schemeClr val="accent1"/>
+          </a:lnRef>
+          <a:fillRef idx="3">
+            <a:schemeClr val="accent1"/>
+          </a:fillRef>
+          <a:effectRef idx="2">
+            <a:schemeClr val="accent1"/>
+          </a:effectRef>
+          <a:fontRef idx="minor">
+            <a:schemeClr val="lt1"/>
+          </a:fontRef>
+        </p:style>
+        <p:txBody>
+          <a:bodyPr rtlCol="0" anchor="ctr"/>
+          <a:lstStyle/>
+          <a:p>
+            <a:pPr algn="ctr"/>
+          </a:p>
+        </p:txBody>
+      </p:sp>
+      <p:sp>
+        <p:nvSpPr>
+          <p:cNvPr id="14" name="Rectangle 13"/>
+          <p:cNvSpPr/>
+          <p:nvPr/>
+        </p:nvSpPr>
+        <p:spPr>
+          <a:xfrm>
+            <a:off x="566928" y="3794760"/>
+            <a:ext cx="4347972" cy="310896"/>
+          </a:xfrm>
+          <a:prstGeom prst="rect">
+            <a:avLst/>
+          </a:prstGeom>
+          <a:solidFill>
+            <a:srgbClr val="10253F"/>
+          </a:solidFill>
+          <a:ln>
+            <a:noFill/>
+          </a:ln>
+          <a:effectLst/>
+        </p:spPr>
+        <p:style>
+          <a:lnRef idx="1">
+            <a:schemeClr val="accent1"/>
+          </a:lnRef>
+          <a:fillRef idx="3">
+            <a:schemeClr val="accent1"/>
+          </a:fillRef>
+          <a:effectRef idx="2">
+            <a:schemeClr val="accent1"/>
+          </a:effectRef>
+          <a:fontRef idx="minor">
+            <a:schemeClr val="lt1"/>
+          </a:fontRef>
+        </p:style>
+        <p:txBody>
+          <a:bodyPr rtlCol="0" anchor="ctr"/>
+          <a:lstStyle/>
+          <a:p>
+            <a:pPr algn="ctr"/>
+          </a:p>
+        </p:txBody>
+      </p:sp>
+      <p:sp>
+        <p:nvSpPr>
+          <p:cNvPr id="15" name="TextBox 14"/>
+          <p:cNvSpPr txBox="1"/>
+          <p:nvPr/>
+        </p:nvSpPr>
+        <p:spPr>
+          <a:xfrm>
+            <a:off x="566928" y="3794760"/>
+            <a:ext cx="4347972" cy="310896"/>
+          </a:xfrm>
+          <a:prstGeom prst="rect">
+            <a:avLst/>
+          </a:prstGeom>
+          <a:noFill/>
+        </p:spPr>
+        <p:txBody>
+          <a:bodyPr wrap="square" anchor="ctr" lIns="0" rIns="0" tIns="0" bIns="0">
+            <a:spAutoFit/>
+          </a:bodyPr>
+          <a:lstStyle/>
+          <a:p>
+            <a:pPr algn="ctr"/>
+            <a:r>
+              <a:rPr sz="1050" b="1">
+                <a:solidFill>
+                  <a:srgbClr val="FFFFFF"/>
+                </a:solidFill>
+                <a:latin typeface="メイリオ"/>
+                <a:ea typeface="メイリオ"/>
+                <a:cs typeface="メイリオ"/>
+              </a:rPr>
+              <a:t>スケジュール・導入フロー</a:t>
+            </a:r>
+          </a:p>
+        </p:txBody>
+      </p:sp>
+      <p:sp>
+        <p:nvSpPr>
+          <p:cNvPr id="16" name="TextBox 15"/>
+          <p:cNvSpPr txBox="1"/>
+          <p:nvPr/>
+        </p:nvSpPr>
+        <p:spPr>
+          <a:xfrm>
+            <a:off x="731520" y="4197096"/>
+            <a:ext cx="4018788" cy="1837944"/>
+          </a:xfrm>
+          <a:prstGeom prst="rect">
+            <a:avLst/>
+          </a:prstGeom>
+          <a:noFill/>
+        </p:spPr>
+        <p:txBody>
+          <a:bodyPr wrap="square" lIns="0" rIns="0" tIns="0" bIns="0">
+            <a:spAutoFit/>
+          </a:bodyPr>
+          <a:lstStyle/>
           <a:p>
             <a:pPr>
               <a:lnSpc>
@@ -10550,159 +10844,9 @@
                 <a:ea typeface="メイリオ"/>
                 <a:cs typeface="メイリオ"/>
               </a:rPr>
-              <a:t>・－（停止期間の具体的な日時は要確認）</a:t>
-            </a:r>
-          </a:p>
-        </p:txBody>
-      </p:sp>
-      <p:sp>
-        <p:nvSpPr>
-          <p:cNvPr id="17" name="Rectangle 16"/>
-          <p:cNvSpPr/>
-          <p:nvPr/>
-        </p:nvSpPr>
-        <p:spPr>
-          <a:xfrm>
-            <a:off x="5097780" y="3794760"/>
-            <a:ext cx="4347972" cy="2331720"/>
-          </a:xfrm>
-          <a:prstGeom prst="rect">
-            <a:avLst/>
-          </a:prstGeom>
-          <a:solidFill>
-            <a:srgbClr val="FFFFFF"/>
-          </a:solidFill>
-          <a:ln w="9525">
-            <a:solidFill>
-              <a:srgbClr val="D9D9D9"/>
-            </a:solidFill>
-          </a:ln>
-          <a:effectLst/>
-        </p:spPr>
-        <p:style>
-          <a:lnRef idx="1">
-            <a:schemeClr val="accent1"/>
-          </a:lnRef>
-          <a:fillRef idx="3">
-            <a:schemeClr val="accent1"/>
-          </a:fillRef>
-          <a:effectRef idx="2">
-            <a:schemeClr val="accent1"/>
-          </a:effectRef>
-          <a:fontRef idx="minor">
-            <a:schemeClr val="lt1"/>
-          </a:fontRef>
-        </p:style>
-        <p:txBody>
-          <a:bodyPr rtlCol="0" anchor="ctr"/>
-          <a:lstStyle/>
-          <a:p>
-            <a:pPr algn="ctr"/>
-          </a:p>
-        </p:txBody>
-      </p:sp>
-      <p:sp>
-        <p:nvSpPr>
-          <p:cNvPr id="18" name="Rectangle 17"/>
-          <p:cNvSpPr/>
-          <p:nvPr/>
-        </p:nvSpPr>
-        <p:spPr>
-          <a:xfrm>
-            <a:off x="5097780" y="3794760"/>
-            <a:ext cx="4347972" cy="310896"/>
-          </a:xfrm>
-          <a:prstGeom prst="rect">
-            <a:avLst/>
-          </a:prstGeom>
-          <a:solidFill>
-            <a:srgbClr val="10253F"/>
-          </a:solidFill>
-          <a:ln>
-            <a:noFill/>
-          </a:ln>
-          <a:effectLst/>
-        </p:spPr>
-        <p:style>
-          <a:lnRef idx="1">
-            <a:schemeClr val="accent1"/>
-          </a:lnRef>
-          <a:fillRef idx="3">
-            <a:schemeClr val="accent1"/>
-          </a:fillRef>
-          <a:effectRef idx="2">
-            <a:schemeClr val="accent1"/>
-          </a:effectRef>
-          <a:fontRef idx="minor">
-            <a:schemeClr val="lt1"/>
-          </a:fontRef>
-        </p:style>
-        <p:txBody>
-          <a:bodyPr rtlCol="0" anchor="ctr"/>
-          <a:lstStyle/>
-          <a:p>
-            <a:pPr algn="ctr"/>
-          </a:p>
-        </p:txBody>
-      </p:sp>
-      <p:sp>
-        <p:nvSpPr>
-          <p:cNvPr id="19" name="TextBox 18"/>
-          <p:cNvSpPr txBox="1"/>
-          <p:nvPr/>
-        </p:nvSpPr>
-        <p:spPr>
-          <a:xfrm>
-            <a:off x="5097780" y="3794760"/>
-            <a:ext cx="4347972" cy="310896"/>
-          </a:xfrm>
-          <a:prstGeom prst="rect">
-            <a:avLst/>
-          </a:prstGeom>
-          <a:noFill/>
-        </p:spPr>
-        <p:txBody>
-          <a:bodyPr wrap="square" anchor="ctr" lIns="0" rIns="0" tIns="0" bIns="0">
-            <a:spAutoFit/>
-          </a:bodyPr>
-          <a:lstStyle/>
-          <a:p>
-            <a:pPr algn="ctr"/>
-            <a:r>
-              <a:rPr sz="1050" b="1">
-                <a:solidFill>
-                  <a:srgbClr val="FFFFFF"/>
-                </a:solidFill>
-                <a:latin typeface="メイリオ"/>
-                <a:ea typeface="メイリオ"/>
-                <a:cs typeface="メイリオ"/>
-              </a:rPr>
-              <a:t>注意点・影響</a:t>
-            </a:r>
-          </a:p>
-        </p:txBody>
-      </p:sp>
-      <p:sp>
-        <p:nvSpPr>
-          <p:cNvPr id="20" name="TextBox 19"/>
-          <p:cNvSpPr txBox="1"/>
-          <p:nvPr/>
-        </p:nvSpPr>
-        <p:spPr>
-          <a:xfrm>
-            <a:off x="5262372" y="4197096"/>
-            <a:ext cx="4018788" cy="1837944"/>
-          </a:xfrm>
-          <a:prstGeom prst="rect">
-            <a:avLst/>
-          </a:prstGeom>
-          <a:noFill/>
-        </p:spPr>
-        <p:txBody>
-          <a:bodyPr wrap="square" lIns="0" rIns="0" tIns="0" bIns="0">
-            <a:spAutoFit/>
-          </a:bodyPr>
-          <a:lstStyle/>
+              <a:t>・社外への案内開始日・リリース日：2026年9月2日</a:t>
+            </a:r>
+          </a:p>
           <a:p>
             <a:pPr>
               <a:lnSpc>
@@ -10721,7 +10865,199 @@
                 <a:ea typeface="メイリオ"/>
                 <a:cs typeface="メイリオ"/>
               </a:rPr>
-              <a:t>・停止期間中は応募管理・当選者確認等の作業ができない</a:t>
+              <a:t>・対象期間：9月8日（火）〜9月10日（木） 10:00〜14:30の間</a:t>
+            </a:r>
+          </a:p>
+        </p:txBody>
+      </p:sp>
+      <p:sp>
+        <p:nvSpPr>
+          <p:cNvPr id="17" name="Rectangle 16"/>
+          <p:cNvSpPr/>
+          <p:nvPr/>
+        </p:nvSpPr>
+        <p:spPr>
+          <a:xfrm>
+            <a:off x="5097780" y="3794760"/>
+            <a:ext cx="4347972" cy="2331720"/>
+          </a:xfrm>
+          <a:prstGeom prst="rect">
+            <a:avLst/>
+          </a:prstGeom>
+          <a:solidFill>
+            <a:srgbClr val="FFFFFF"/>
+          </a:solidFill>
+          <a:ln w="9525">
+            <a:solidFill>
+              <a:srgbClr val="D9D9D9"/>
+            </a:solidFill>
+          </a:ln>
+          <a:effectLst/>
+        </p:spPr>
+        <p:style>
+          <a:lnRef idx="1">
+            <a:schemeClr val="accent1"/>
+          </a:lnRef>
+          <a:fillRef idx="3">
+            <a:schemeClr val="accent1"/>
+          </a:fillRef>
+          <a:effectRef idx="2">
+            <a:schemeClr val="accent1"/>
+          </a:effectRef>
+          <a:fontRef idx="minor">
+            <a:schemeClr val="lt1"/>
+          </a:fontRef>
+        </p:style>
+        <p:txBody>
+          <a:bodyPr rtlCol="0" anchor="ctr"/>
+          <a:lstStyle/>
+          <a:p>
+            <a:pPr algn="ctr"/>
+          </a:p>
+        </p:txBody>
+      </p:sp>
+      <p:sp>
+        <p:nvSpPr>
+          <p:cNvPr id="18" name="Rectangle 17"/>
+          <p:cNvSpPr/>
+          <p:nvPr/>
+        </p:nvSpPr>
+        <p:spPr>
+          <a:xfrm>
+            <a:off x="5097780" y="3794760"/>
+            <a:ext cx="4347972" cy="310896"/>
+          </a:xfrm>
+          <a:prstGeom prst="rect">
+            <a:avLst/>
+          </a:prstGeom>
+          <a:solidFill>
+            <a:srgbClr val="10253F"/>
+          </a:solidFill>
+          <a:ln>
+            <a:noFill/>
+          </a:ln>
+          <a:effectLst/>
+        </p:spPr>
+        <p:style>
+          <a:lnRef idx="1">
+            <a:schemeClr val="accent1"/>
+          </a:lnRef>
+          <a:fillRef idx="3">
+            <a:schemeClr val="accent1"/>
+          </a:fillRef>
+          <a:effectRef idx="2">
+            <a:schemeClr val="accent1"/>
+          </a:effectRef>
+          <a:fontRef idx="minor">
+            <a:schemeClr val="lt1"/>
+          </a:fontRef>
+        </p:style>
+        <p:txBody>
+          <a:bodyPr rtlCol="0" anchor="ctr"/>
+          <a:lstStyle/>
+          <a:p>
+            <a:pPr algn="ctr"/>
+          </a:p>
+        </p:txBody>
+      </p:sp>
+      <p:sp>
+        <p:nvSpPr>
+          <p:cNvPr id="19" name="TextBox 18"/>
+          <p:cNvSpPr txBox="1"/>
+          <p:nvPr/>
+        </p:nvSpPr>
+        <p:spPr>
+          <a:xfrm>
+            <a:off x="5097780" y="3794760"/>
+            <a:ext cx="4347972" cy="310896"/>
+          </a:xfrm>
+          <a:prstGeom prst="rect">
+            <a:avLst/>
+          </a:prstGeom>
+          <a:noFill/>
+        </p:spPr>
+        <p:txBody>
+          <a:bodyPr wrap="square" anchor="ctr" lIns="0" rIns="0" tIns="0" bIns="0">
+            <a:spAutoFit/>
+          </a:bodyPr>
+          <a:lstStyle/>
+          <a:p>
+            <a:pPr algn="ctr"/>
+            <a:r>
+              <a:rPr sz="1050" b="1">
+                <a:solidFill>
+                  <a:srgbClr val="FFFFFF"/>
+                </a:solidFill>
+                <a:latin typeface="メイリオ"/>
+                <a:ea typeface="メイリオ"/>
+                <a:cs typeface="メイリオ"/>
+              </a:rPr>
+              <a:t>注意点・影響</a:t>
+            </a:r>
+          </a:p>
+        </p:txBody>
+      </p:sp>
+      <p:sp>
+        <p:nvSpPr>
+          <p:cNvPr id="20" name="TextBox 19"/>
+          <p:cNvSpPr txBox="1"/>
+          <p:nvPr/>
+        </p:nvSpPr>
+        <p:spPr>
+          <a:xfrm>
+            <a:off x="5262372" y="4197096"/>
+            <a:ext cx="4018788" cy="1837944"/>
+          </a:xfrm>
+          <a:prstGeom prst="rect">
+            <a:avLst/>
+          </a:prstGeom>
+          <a:noFill/>
+        </p:spPr>
+        <p:txBody>
+          <a:bodyPr wrap="square" lIns="0" rIns="0" tIns="0" bIns="0">
+            <a:spAutoFit/>
+          </a:bodyPr>
+          <a:lstStyle/>
+          <a:p>
+            <a:pPr>
+              <a:lnSpc>
+                <a:spcPct val="120000"/>
+              </a:lnSpc>
+              <a:spcAft>
+                <a:spcPts val="300"/>
+              </a:spcAft>
+            </a:pPr>
+            <a:r>
+              <a:rPr sz="1000">
+                <a:solidFill>
+                  <a:srgbClr val="343434"/>
+                </a:solidFill>
+                <a:latin typeface="メイリオ"/>
+                <a:ea typeface="メイリオ"/>
+                <a:cs typeface="メイリオ"/>
+              </a:rPr>
+              <a:t>・影響範囲：サマリーレポートの作成・ダウンロードが利用不可</a:t>
+            </a:r>
+          </a:p>
+          <a:p>
+            <a:pPr>
+              <a:lnSpc>
+                <a:spcPct val="120000"/>
+              </a:lnSpc>
+              <a:spcAft>
+                <a:spcPts val="300"/>
+              </a:spcAft>
+            </a:pPr>
+            <a:r>
+              <a:rPr sz="1000">
+                <a:solidFill>
+                  <a:srgbClr val="343434"/>
+                </a:solidFill>
+                <a:latin typeface="メイリオ"/>
+                <a:ea typeface="メイリオ"/>
+                <a:cs typeface="メイリオ"/>
+              </a:rPr>
+              <a:t>・LBPMでの案件申請・入稿など、上記以外の機能は通常どおり利用可能</a:t>
             </a:r>
           </a:p>
           <a:p>

--- a/LINEOA媒体最新情報_2026年9月トレンドレポート.pptx
+++ b/LINEOA媒体最新情報_2026年9月トレンドレポート.pptx
@@ -20,7 +20,6 @@
     <p:sldId id="2935" r:id="rId8"/>
     <p:sldId id="2919" r:id="rId9"/>
     <p:sldId id="2519" r:id="rId10"/>
-    <p:sldId id="2931" r:id="rId11"/>
   </p:sldIdLst>
   <p:sldSz cx="9906000" cy="6858000" type="A4"/>
   <p:notesSz cx="6807200" cy="9939338"/>
@@ -897,114 +896,6 @@
 </p:notes>
 </file>
 
-<file path=ppt/notesSlides/notesSlide4.xml><?xml version="1.0" encoding="utf-8"?>
-<p:notes xmlns:a="http://schemas.openxmlformats.org/drawingml/2006/main" xmlns:r="http://schemas.openxmlformats.org/officeDocument/2006/relationships" xmlns:p="http://schemas.openxmlformats.org/presentationml/2006/main">
-  <p:cSld>
-    <p:spTree>
-      <p:nvGrpSpPr>
-        <p:cNvPr id="1" name="">
-          <a:extLst>
-            <a:ext uri="{FF2B5EF4-FFF2-40B4-BE49-F238E27FC236}">
-              <a16:creationId xmlns:a16="http://schemas.microsoft.com/office/drawing/2014/main" id="{58BED428-D571-14FF-D396-D7175DA0FB54}"/>
-            </a:ext>
-          </a:extLst>
-        </p:cNvPr>
-        <p:cNvGrpSpPr/>
-        <p:nvPr/>
-      </p:nvGrpSpPr>
-      <p:grpSpPr>
-        <a:xfrm>
-          <a:off x="0" y="0"/>
-          <a:ext cx="0" cy="0"/>
-          <a:chOff x="0" y="0"/>
-          <a:chExt cx="0" cy="0"/>
-        </a:xfrm>
-      </p:grpSpPr>
-      <p:sp>
-        <p:nvSpPr>
-          <p:cNvPr id="2" name="スライド イメージ プレースホルダー 1">
-            <a:extLst>
-              <a:ext uri="{FF2B5EF4-FFF2-40B4-BE49-F238E27FC236}">
-                <a16:creationId xmlns:a16="http://schemas.microsoft.com/office/drawing/2014/main" id="{D271AB2A-80AE-D1AA-E70B-86CDF9350544}"/>
-              </a:ext>
-            </a:extLst>
-          </p:cNvPr>
-          <p:cNvSpPr>
-            <a:spLocks noGrp="1" noRot="1" noChangeAspect="1"/>
-          </p:cNvSpPr>
-          <p:nvPr>
-            <p:ph type="sldImg"/>
-          </p:nvPr>
-        </p:nvSpPr>
-        <p:spPr/>
-      </p:sp>
-      <p:sp>
-        <p:nvSpPr>
-          <p:cNvPr id="3" name="ノート プレースホルダー 2">
-            <a:extLst>
-              <a:ext uri="{FF2B5EF4-FFF2-40B4-BE49-F238E27FC236}">
-                <a16:creationId xmlns:a16="http://schemas.microsoft.com/office/drawing/2014/main" id="{6C0C2926-5D95-6624-6AD9-E45C5528979C}"/>
-              </a:ext>
-            </a:extLst>
-          </p:cNvPr>
-          <p:cNvSpPr>
-            <a:spLocks noGrp="1"/>
-          </p:cNvSpPr>
-          <p:nvPr>
-            <p:ph type="body" idx="1"/>
-          </p:nvPr>
-        </p:nvSpPr>
-        <p:spPr/>
-        <p:txBody>
-          <a:bodyPr/>
-          <a:lstStyle/>
-          <a:p>
-            <a:endParaRPr kumimoji="1" lang="ja-JP" altLang="en-US" dirty="0"/>
-          </a:p>
-        </p:txBody>
-      </p:sp>
-      <p:sp>
-        <p:nvSpPr>
-          <p:cNvPr id="4" name="スライド番号プレースホルダー 3">
-            <a:extLst>
-              <a:ext uri="{FF2B5EF4-FFF2-40B4-BE49-F238E27FC236}">
-                <a16:creationId xmlns:a16="http://schemas.microsoft.com/office/drawing/2014/main" id="{0B6DFD87-0439-882A-B65E-9CEE51F20332}"/>
-              </a:ext>
-            </a:extLst>
-          </p:cNvPr>
-          <p:cNvSpPr>
-            <a:spLocks noGrp="1"/>
-          </p:cNvSpPr>
-          <p:nvPr>
-            <p:ph type="sldNum" sz="quarter" idx="10"/>
-          </p:nvPr>
-        </p:nvSpPr>
-        <p:spPr/>
-        <p:txBody>
-          <a:bodyPr/>
-          <a:lstStyle/>
-          <a:p>
-            <a:fld id="{022E43C0-6795-4B13-B37C-259C826D4B6A}" type="slidenum">
-              <a:rPr kumimoji="1" lang="ja-JP" altLang="en-US" smtClean="0"/>
-              <a:t>9</a:t>
-            </a:fld>
-            <a:endParaRPr kumimoji="1" lang="ja-JP" altLang="en-US"/>
-          </a:p>
-        </p:txBody>
-      </p:sp>
-    </p:spTree>
-    <p:extLst>
-      <p:ext uri="{BB962C8B-B14F-4D97-AF65-F5344CB8AC3E}">
-        <p14:creationId xmlns:p14="http://schemas.microsoft.com/office/powerpoint/2010/main" val="4252022966"/>
-      </p:ext>
-    </p:extLst>
-  </p:cSld>
-  <p:clrMapOvr>
-    <a:masterClrMapping/>
-  </p:clrMapOvr>
-</p:notes>
-</file>
-
 <file path=ppt/slideLayouts/slideLayout1.xml><?xml version="1.0" encoding="utf-8"?>
 <p:sldLayout xmlns:a="http://schemas.openxmlformats.org/drawingml/2006/main" xmlns:r="http://schemas.openxmlformats.org/officeDocument/2006/relationships" xmlns:p="http://schemas.openxmlformats.org/presentationml/2006/main" preserve="1">
   <p:cSld name="2_タイトルとコンテンツ">
@@ -3592,7 +3483,7 @@
                 <a:ea typeface="メイリオ"/>
                 <a:cs typeface="メイリオ"/>
               </a:rPr>
-              <a:t>2. 既読API 一般提供開始のお知らせ</a:t>
+              <a:t>2. LINE公式アカウント「分析」データ参照期間 過去36カ月に変更</a:t>
             </a:r>
           </a:p>
         </p:txBody>
@@ -3710,7 +3601,7 @@
                 <a:ea typeface="メイリオ"/>
                 <a:cs typeface="メイリオ"/>
               </a:rPr>
-              <a:t>3. LINE公式アカウント「分析」データ参照期間 過去36カ月に変更</a:t>
+              <a:t>3. プロモーションスタンプ 効果改善アップデート</a:t>
             </a:r>
           </a:p>
         </p:txBody>
@@ -3828,7 +3719,7 @@
                 <a:ea typeface="メイリオ"/>
                 <a:cs typeface="メイリオ"/>
               </a:rPr>
-              <a:t>4. プロモーションスタンプ 効果改善アップデート</a:t>
+              <a:t>4. 友だち追加オプション 複数アカウント対応</a:t>
             </a:r>
           </a:p>
         </p:txBody>
@@ -3946,7 +3837,7 @@
                 <a:ea typeface="メイリオ"/>
                 <a:cs typeface="メイリオ"/>
               </a:rPr>
-              <a:t>5. 友だち追加オプション 複数アカウント対応</a:t>
+              <a:t>5. LINE Sales Promotion Manager 利用停止期間</a:t>
             </a:r>
           </a:p>
         </p:txBody>
@@ -4065,124 +3956,6 @@
                 <a:cs typeface="メイリオ"/>
               </a:rPr>
               <a:t>6. LINEオープンキャンペーン 26年10-12月 期間限定キャンペーン</a:t>
-            </a:r>
-          </a:p>
-        </p:txBody>
-      </p:sp>
-      <p:sp>
-        <p:nvSpPr>
-          <p:cNvPr id="21" name="Rectangle 20"/>
-          <p:cNvSpPr/>
-          <p:nvPr/>
-        </p:nvSpPr>
-        <p:spPr>
-          <a:xfrm>
-            <a:off x="566928" y="4315968"/>
-            <a:ext cx="402336" cy="384048"/>
-          </a:xfrm>
-          <a:prstGeom prst="rect">
-            <a:avLst/>
-          </a:prstGeom>
-          <a:solidFill>
-            <a:srgbClr val="10253F"/>
-          </a:solidFill>
-          <a:ln>
-            <a:noFill/>
-          </a:ln>
-          <a:effectLst/>
-        </p:spPr>
-        <p:style>
-          <a:lnRef idx="1">
-            <a:schemeClr val="accent1"/>
-          </a:lnRef>
-          <a:fillRef idx="3">
-            <a:schemeClr val="accent1"/>
-          </a:fillRef>
-          <a:effectRef idx="2">
-            <a:schemeClr val="accent1"/>
-          </a:effectRef>
-          <a:fontRef idx="minor">
-            <a:schemeClr val="lt1"/>
-          </a:fontRef>
-        </p:style>
-        <p:txBody>
-          <a:bodyPr rtlCol="0" anchor="ctr"/>
-          <a:lstStyle/>
-          <a:p>
-            <a:pPr algn="ctr"/>
-          </a:p>
-        </p:txBody>
-      </p:sp>
-      <p:sp>
-        <p:nvSpPr>
-          <p:cNvPr id="22" name="TextBox 21"/>
-          <p:cNvSpPr txBox="1"/>
-          <p:nvPr/>
-        </p:nvSpPr>
-        <p:spPr>
-          <a:xfrm>
-            <a:off x="566928" y="4315968"/>
-            <a:ext cx="402336" cy="384048"/>
-          </a:xfrm>
-          <a:prstGeom prst="rect">
-            <a:avLst/>
-          </a:prstGeom>
-          <a:noFill/>
-        </p:spPr>
-        <p:txBody>
-          <a:bodyPr wrap="square" anchor="ctr" lIns="0" rIns="0" tIns="0" bIns="0">
-            <a:spAutoFit/>
-          </a:bodyPr>
-          <a:lstStyle/>
-          <a:p>
-            <a:pPr algn="ctr"/>
-            <a:r>
-              <a:rPr sz="1200" b="1">
-                <a:solidFill>
-                  <a:srgbClr val="FFFFFF"/>
-                </a:solidFill>
-                <a:latin typeface="メイリオ"/>
-                <a:ea typeface="メイリオ"/>
-                <a:cs typeface="メイリオ"/>
-              </a:rPr>
-              <a:t>7</a:t>
-            </a:r>
-          </a:p>
-        </p:txBody>
-      </p:sp>
-      <p:sp>
-        <p:nvSpPr>
-          <p:cNvPr id="23" name="TextBox 22"/>
-          <p:cNvSpPr txBox="1"/>
-          <p:nvPr/>
-        </p:nvSpPr>
-        <p:spPr>
-          <a:xfrm>
-            <a:off x="1133856" y="4315968"/>
-            <a:ext cx="8229600" cy="384048"/>
-          </a:xfrm>
-          <a:prstGeom prst="rect">
-            <a:avLst/>
-          </a:prstGeom>
-          <a:noFill/>
-        </p:spPr>
-        <p:txBody>
-          <a:bodyPr wrap="square" anchor="ctr" lIns="0" rIns="0" tIns="0" bIns="0">
-            <a:spAutoFit/>
-          </a:bodyPr>
-          <a:lstStyle/>
-          <a:p>
-            <a:pPr algn="l"/>
-            <a:r>
-              <a:rPr sz="1300" b="0">
-                <a:solidFill>
-                  <a:srgbClr val="343434"/>
-                </a:solidFill>
-                <a:latin typeface="メイリオ"/>
-                <a:ea typeface="メイリオ"/>
-                <a:cs typeface="メイリオ"/>
-              </a:rPr>
-              <a:t>7. LINE Sales Promotion Manager 利用停止期間</a:t>
             </a:r>
           </a:p>
         </p:txBody>
@@ -5317,7 +5090,7 @@
                 <a:ea typeface="メイリオ"/>
                 <a:cs typeface="メイリオ"/>
               </a:rPr>
-              <a:t>既読API「一般提供開始」のお知らせ</a:t>
+              <a:t>LINE公式アカウント「分析」データ参照期間 過去36カ月に変更</a:t>
             </a:r>
           </a:p>
         </p:txBody>
@@ -5402,7 +5175,7 @@
                 <a:ea typeface="メイリオ"/>
                 <a:cs typeface="メイリオ"/>
               </a:rPr>
-              <a:t>事前申請不要の新しい既読API（Messaging API）が一般提供開始。トークの既読管理をAPI側から自動化できる。</a:t>
+              <a:t>「分析」タブの参照期間が過去36カ月までに変更予定。※社外告知は延期中、日程未確定につき最新情報を要確認。</a:t>
             </a:r>
           </a:p>
         </p:txBody>
@@ -5573,7 +5346,7 @@
                 <a:ea typeface="メイリオ"/>
                 <a:cs typeface="メイリオ"/>
               </a:rPr>
-              <a:t>・新しい既読API（Messaging API「mark as read」）が一般提供開始</a:t>
+              <a:t>・Web版管理画面／管理アプリの「分析」タブで確認できる実績値の参照期間を過去36カ月までに変更</a:t>
             </a:r>
           </a:p>
           <a:p>
@@ -5594,7 +5367,7 @@
                 <a:ea typeface="メイリオ"/>
                 <a:cs typeface="メイリオ"/>
               </a:rPr>
-              <a:t>・事前の利用申請が不要になり、通常のMessaging API開発フローの中でそのまま利用可能に</a:t>
+              <a:t>・対象は「分析」タブの実績値のみ。それ以外のデータや作成済みメッセージには影響なし</a:t>
             </a:r>
           </a:p>
         </p:txBody>
@@ -5765,7 +5538,7 @@
                 <a:ea typeface="メイリオ"/>
                 <a:cs typeface="メイリオ"/>
               </a:rPr>
-              <a:t>・該当なし（Messaging APIの利用範囲内）</a:t>
+              <a:t>・該当なし</a:t>
             </a:r>
           </a:p>
         </p:txBody>
@@ -5936,7 +5709,7 @@
                 <a:ea typeface="メイリオ"/>
                 <a:cs typeface="メイリオ"/>
               </a:rPr>
-              <a:t>・一般提供開始済み</a:t>
+              <a:t>・リリース日：2026年11月頃（予定・日程は決まり次第、管理画面のお知らせで案内）</a:t>
             </a:r>
           </a:p>
           <a:p>
@@ -5957,7 +5730,7 @@
                 <a:ea typeface="メイリオ"/>
                 <a:cs typeface="メイリオ"/>
               </a:rPr>
-              <a:t>・仕様：developers.line.biz/ja/docs/messaging-api/mark-as-read/</a:t>
+              <a:t>・社外告知：当初9/2予定だったが内容変更の可能性ありいったん延期。改めて案内予定</a:t>
             </a:r>
           </a:p>
         </p:txBody>
@@ -6128,7 +5901,7 @@
                 <a:ea typeface="メイリオ"/>
                 <a:cs typeface="メイリオ"/>
               </a:rPr>
-              <a:t>・CS・チャットツールと連携した運用で、既読管理の自動化に活用できる</a:t>
+              <a:t>・36カ月より前の実績データが必要なクライアントには変更前の確認・保存を案内</a:t>
             </a:r>
           </a:p>
           <a:p>
@@ -6149,7 +5922,28 @@
                 <a:ea typeface="メイリオ"/>
                 <a:cs typeface="メイリオ"/>
               </a:rPr>
-              <a:t>・旧既読API（LBPM経由の申請制）を使っていた案件は新APIへの移行を検討</a:t>
+              <a:t>・「分析」タブの一部データはダウンロード可能（詳細は分析マニュアル参照）</a:t>
+            </a:r>
+          </a:p>
+          <a:p>
+            <a:pPr>
+              <a:lnSpc>
+                <a:spcPct val="120000"/>
+              </a:lnSpc>
+              <a:spcAft>
+                <a:spcPts val="300"/>
+              </a:spcAft>
+            </a:pPr>
+            <a:r>
+              <a:rPr sz="1000">
+                <a:solidFill>
+                  <a:srgbClr val="343434"/>
+                </a:solidFill>
+                <a:latin typeface="メイリオ"/>
+                <a:ea typeface="メイリオ"/>
+                <a:cs typeface="メイリオ"/>
+              </a:rPr>
+              <a:t>・告知日程が流動的なため最新情報を要確認</a:t>
             </a:r>
           </a:p>
         </p:txBody>
@@ -6186,7 +5980,7 @@
                 <a:ea typeface="メイリオ"/>
                 <a:cs typeface="メイリオ"/>
               </a:rPr>
-              <a:t>出典：https://workers-hub.box.com/s/nxgvv2ejax65j6cadz7gdsdalxd8zioa</a:t>
+              <a:t>出典：https://workers-hub.box.com/s/ms8iztyci2dn5z2qna88rklxwxp7o5ja</a:t>
             </a:r>
           </a:p>
         </p:txBody>
@@ -6259,7 +6053,7 @@
                 <a:ea typeface="メイリオ"/>
                 <a:cs typeface="メイリオ"/>
               </a:rPr>
-              <a:t>LINE公式アカウント「分析」データ参照期間 過去36カ月に変更</a:t>
+              <a:t>プロモーションスタンプ 効果改善アップデート</a:t>
             </a:r>
           </a:p>
         </p:txBody>
@@ -6344,7 +6138,7 @@
                 <a:ea typeface="メイリオ"/>
                 <a:cs typeface="メイリオ"/>
               </a:rPr>
-              <a:t>「分析」タブの参照期間が過去36カ月までに変更予定。※社外告知は延期中、日程未確定につき最新情報を要確認。</a:t>
+              <a:t>LINEキーボードのサジェスト機能で無料スタンプが表示される条件が緩和され、全ユーザーに表示可能に。DL数は平均+5.63%増加。</a:t>
             </a:r>
           </a:p>
         </p:txBody>
@@ -6515,7 +6309,7 @@
                 <a:ea typeface="メイリオ"/>
                 <a:cs typeface="メイリオ"/>
               </a:rPr>
-              <a:t>・Web版管理画面／管理アプリの「分析」タブで確認できる実績値の参照期間を過去36カ月までに変更</a:t>
+              <a:t>・サジェスト面での無料スタンプ表示ユーザー条件を緩和し全ユーザーに表示されるよう変更</a:t>
             </a:r>
           </a:p>
           <a:p>
@@ -6536,7 +6330,7 @@
                 <a:ea typeface="メイリオ"/>
                 <a:cs typeface="メイリオ"/>
               </a:rPr>
-              <a:t>・対象は「分析」タブの実績値のみ。それ以外のデータや作成済みメッセージには影響なし</a:t>
+              <a:t>・配信中の案件を含む全案件に自動適用（広告主・案件側の対応は不要）</a:t>
             </a:r>
           </a:p>
         </p:txBody>
@@ -6707,7 +6501,7 @@
                 <a:ea typeface="メイリオ"/>
                 <a:cs typeface="メイリオ"/>
               </a:rPr>
-              <a:t>・該当なし</a:t>
+              <a:t>・追加費用なし（自動適用）</a:t>
             </a:r>
           </a:p>
         </p:txBody>
@@ -6878,9 +6672,159 @@
                 <a:ea typeface="メイリオ"/>
                 <a:cs typeface="メイリオ"/>
               </a:rPr>
-              <a:t>・リリース日：2026年11月頃（予定・日程は決まり次第、管理画面のお知らせで案内）</a:t>
-            </a:r>
-          </a:p>
+              <a:t>・リリース日：2026年8月28日（金）</a:t>
+            </a:r>
+          </a:p>
+        </p:txBody>
+      </p:sp>
+      <p:sp>
+        <p:nvSpPr>
+          <p:cNvPr id="17" name="Rectangle 16"/>
+          <p:cNvSpPr/>
+          <p:nvPr/>
+        </p:nvSpPr>
+        <p:spPr>
+          <a:xfrm>
+            <a:off x="5097780" y="3794760"/>
+            <a:ext cx="4347972" cy="2331720"/>
+          </a:xfrm>
+          <a:prstGeom prst="rect">
+            <a:avLst/>
+          </a:prstGeom>
+          <a:solidFill>
+            <a:srgbClr val="FFFFFF"/>
+          </a:solidFill>
+          <a:ln w="9525">
+            <a:solidFill>
+              <a:srgbClr val="D9D9D9"/>
+            </a:solidFill>
+          </a:ln>
+          <a:effectLst/>
+        </p:spPr>
+        <p:style>
+          <a:lnRef idx="1">
+            <a:schemeClr val="accent1"/>
+          </a:lnRef>
+          <a:fillRef idx="3">
+            <a:schemeClr val="accent1"/>
+          </a:fillRef>
+          <a:effectRef idx="2">
+            <a:schemeClr val="accent1"/>
+          </a:effectRef>
+          <a:fontRef idx="minor">
+            <a:schemeClr val="lt1"/>
+          </a:fontRef>
+        </p:style>
+        <p:txBody>
+          <a:bodyPr rtlCol="0" anchor="ctr"/>
+          <a:lstStyle/>
+          <a:p>
+            <a:pPr algn="ctr"/>
+          </a:p>
+        </p:txBody>
+      </p:sp>
+      <p:sp>
+        <p:nvSpPr>
+          <p:cNvPr id="18" name="Rectangle 17"/>
+          <p:cNvSpPr/>
+          <p:nvPr/>
+        </p:nvSpPr>
+        <p:spPr>
+          <a:xfrm>
+            <a:off x="5097780" y="3794760"/>
+            <a:ext cx="4347972" cy="310896"/>
+          </a:xfrm>
+          <a:prstGeom prst="rect">
+            <a:avLst/>
+          </a:prstGeom>
+          <a:solidFill>
+            <a:srgbClr val="10253F"/>
+          </a:solidFill>
+          <a:ln>
+            <a:noFill/>
+          </a:ln>
+          <a:effectLst/>
+        </p:spPr>
+        <p:style>
+          <a:lnRef idx="1">
+            <a:schemeClr val="accent1"/>
+          </a:lnRef>
+          <a:fillRef idx="3">
+            <a:schemeClr val="accent1"/>
+          </a:fillRef>
+          <a:effectRef idx="2">
+            <a:schemeClr val="accent1"/>
+          </a:effectRef>
+          <a:fontRef idx="minor">
+            <a:schemeClr val="lt1"/>
+          </a:fontRef>
+        </p:style>
+        <p:txBody>
+          <a:bodyPr rtlCol="0" anchor="ctr"/>
+          <a:lstStyle/>
+          <a:p>
+            <a:pPr algn="ctr"/>
+          </a:p>
+        </p:txBody>
+      </p:sp>
+      <p:sp>
+        <p:nvSpPr>
+          <p:cNvPr id="19" name="TextBox 18"/>
+          <p:cNvSpPr txBox="1"/>
+          <p:nvPr/>
+        </p:nvSpPr>
+        <p:spPr>
+          <a:xfrm>
+            <a:off x="5097780" y="3794760"/>
+            <a:ext cx="4347972" cy="310896"/>
+          </a:xfrm>
+          <a:prstGeom prst="rect">
+            <a:avLst/>
+          </a:prstGeom>
+          <a:noFill/>
+        </p:spPr>
+        <p:txBody>
+          <a:bodyPr wrap="square" anchor="ctr" lIns="0" rIns="0" tIns="0" bIns="0">
+            <a:spAutoFit/>
+          </a:bodyPr>
+          <a:lstStyle/>
+          <a:p>
+            <a:pPr algn="ctr"/>
+            <a:r>
+              <a:rPr sz="1050" b="1">
+                <a:solidFill>
+                  <a:srgbClr val="FFFFFF"/>
+                </a:solidFill>
+                <a:latin typeface="メイリオ"/>
+                <a:ea typeface="メイリオ"/>
+                <a:cs typeface="メイリオ"/>
+              </a:rPr>
+              <a:t>注意点・影響</a:t>
+            </a:r>
+          </a:p>
+        </p:txBody>
+      </p:sp>
+      <p:sp>
+        <p:nvSpPr>
+          <p:cNvPr id="20" name="TextBox 19"/>
+          <p:cNvSpPr txBox="1"/>
+          <p:nvPr/>
+        </p:nvSpPr>
+        <p:spPr>
+          <a:xfrm>
+            <a:off x="5262372" y="4197096"/>
+            <a:ext cx="4018788" cy="1837944"/>
+          </a:xfrm>
+          <a:prstGeom prst="rect">
+            <a:avLst/>
+          </a:prstGeom>
+          <a:noFill/>
+        </p:spPr>
+        <p:txBody>
+          <a:bodyPr wrap="square" lIns="0" rIns="0" tIns="0" bIns="0">
+            <a:spAutoFit/>
+          </a:bodyPr>
+          <a:lstStyle/>
           <a:p>
             <a:pPr>
               <a:lnSpc>
@@ -6899,159 +6843,9 @@
                 <a:ea typeface="メイリオ"/>
                 <a:cs typeface="メイリオ"/>
               </a:rPr>
-              <a:t>・社外告知：当初9/2予定だったが内容変更の可能性ありいったん延期。改めて案内予定</a:t>
-            </a:r>
-          </a:p>
-        </p:txBody>
-      </p:sp>
-      <p:sp>
-        <p:nvSpPr>
-          <p:cNvPr id="17" name="Rectangle 16"/>
-          <p:cNvSpPr/>
-          <p:nvPr/>
-        </p:nvSpPr>
-        <p:spPr>
-          <a:xfrm>
-            <a:off x="5097780" y="3794760"/>
-            <a:ext cx="4347972" cy="2331720"/>
-          </a:xfrm>
-          <a:prstGeom prst="rect">
-            <a:avLst/>
-          </a:prstGeom>
-          <a:solidFill>
-            <a:srgbClr val="FFFFFF"/>
-          </a:solidFill>
-          <a:ln w="9525">
-            <a:solidFill>
-              <a:srgbClr val="D9D9D9"/>
-            </a:solidFill>
-          </a:ln>
-          <a:effectLst/>
-        </p:spPr>
-        <p:style>
-          <a:lnRef idx="1">
-            <a:schemeClr val="accent1"/>
-          </a:lnRef>
-          <a:fillRef idx="3">
-            <a:schemeClr val="accent1"/>
-          </a:fillRef>
-          <a:effectRef idx="2">
-            <a:schemeClr val="accent1"/>
-          </a:effectRef>
-          <a:fontRef idx="minor">
-            <a:schemeClr val="lt1"/>
-          </a:fontRef>
-        </p:style>
-        <p:txBody>
-          <a:bodyPr rtlCol="0" anchor="ctr"/>
-          <a:lstStyle/>
-          <a:p>
-            <a:pPr algn="ctr"/>
-          </a:p>
-        </p:txBody>
-      </p:sp>
-      <p:sp>
-        <p:nvSpPr>
-          <p:cNvPr id="18" name="Rectangle 17"/>
-          <p:cNvSpPr/>
-          <p:nvPr/>
-        </p:nvSpPr>
-        <p:spPr>
-          <a:xfrm>
-            <a:off x="5097780" y="3794760"/>
-            <a:ext cx="4347972" cy="310896"/>
-          </a:xfrm>
-          <a:prstGeom prst="rect">
-            <a:avLst/>
-          </a:prstGeom>
-          <a:solidFill>
-            <a:srgbClr val="10253F"/>
-          </a:solidFill>
-          <a:ln>
-            <a:noFill/>
-          </a:ln>
-          <a:effectLst/>
-        </p:spPr>
-        <p:style>
-          <a:lnRef idx="1">
-            <a:schemeClr val="accent1"/>
-          </a:lnRef>
-          <a:fillRef idx="3">
-            <a:schemeClr val="accent1"/>
-          </a:fillRef>
-          <a:effectRef idx="2">
-            <a:schemeClr val="accent1"/>
-          </a:effectRef>
-          <a:fontRef idx="minor">
-            <a:schemeClr val="lt1"/>
-          </a:fontRef>
-        </p:style>
-        <p:txBody>
-          <a:bodyPr rtlCol="0" anchor="ctr"/>
-          <a:lstStyle/>
-          <a:p>
-            <a:pPr algn="ctr"/>
-          </a:p>
-        </p:txBody>
-      </p:sp>
-      <p:sp>
-        <p:nvSpPr>
-          <p:cNvPr id="19" name="TextBox 18"/>
-          <p:cNvSpPr txBox="1"/>
-          <p:nvPr/>
-        </p:nvSpPr>
-        <p:spPr>
-          <a:xfrm>
-            <a:off x="5097780" y="3794760"/>
-            <a:ext cx="4347972" cy="310896"/>
-          </a:xfrm>
-          <a:prstGeom prst="rect">
-            <a:avLst/>
-          </a:prstGeom>
-          <a:noFill/>
-        </p:spPr>
-        <p:txBody>
-          <a:bodyPr wrap="square" anchor="ctr" lIns="0" rIns="0" tIns="0" bIns="0">
-            <a:spAutoFit/>
-          </a:bodyPr>
-          <a:lstStyle/>
-          <a:p>
-            <a:pPr algn="ctr"/>
-            <a:r>
-              <a:rPr sz="1050" b="1">
-                <a:solidFill>
-                  <a:srgbClr val="FFFFFF"/>
-                </a:solidFill>
-                <a:latin typeface="メイリオ"/>
-                <a:ea typeface="メイリオ"/>
-                <a:cs typeface="メイリオ"/>
-              </a:rPr>
-              <a:t>注意点・影響</a:t>
-            </a:r>
-          </a:p>
-        </p:txBody>
-      </p:sp>
-      <p:sp>
-        <p:nvSpPr>
-          <p:cNvPr id="20" name="TextBox 19"/>
-          <p:cNvSpPr txBox="1"/>
-          <p:nvPr/>
-        </p:nvSpPr>
-        <p:spPr>
-          <a:xfrm>
-            <a:off x="5262372" y="4197096"/>
-            <a:ext cx="4018788" cy="1837944"/>
-          </a:xfrm>
-          <a:prstGeom prst="rect">
-            <a:avLst/>
-          </a:prstGeom>
-          <a:noFill/>
-        </p:spPr>
-        <p:txBody>
-          <a:bodyPr wrap="square" lIns="0" rIns="0" tIns="0" bIns="0">
-            <a:spAutoFit/>
-          </a:bodyPr>
-          <a:lstStyle/>
+              <a:t>・A/Bテスト結果：1案件あたり平均DL数+5.63%増</a:t>
+            </a:r>
+          </a:p>
           <a:p>
             <a:pPr>
               <a:lnSpc>
@@ -7070,7 +6864,7 @@
                 <a:ea typeface="メイリオ"/>
                 <a:cs typeface="メイリオ"/>
               </a:rPr>
-              <a:t>・36カ月より前の実績データが必要なクライアントには変更前の確認・保存を案内</a:t>
+              <a:t>・直近18ヶ月DL履歴のないユーザーでも約2倍のDL、普段DLしない層への到達も改善</a:t>
             </a:r>
           </a:p>
           <a:p>
@@ -7091,28 +6885,7 @@
                 <a:ea typeface="メイリオ"/>
                 <a:cs typeface="メイリオ"/>
               </a:rPr>
-              <a:t>・「分析」タブの一部データはダウンロード可能（詳細は分析マニュアル参照）</a:t>
-            </a:r>
-          </a:p>
-          <a:p>
-            <a:pPr>
-              <a:lnSpc>
-                <a:spcPct val="120000"/>
-              </a:lnSpc>
-              <a:spcAft>
-                <a:spcPts val="300"/>
-              </a:spcAft>
-            </a:pPr>
-            <a:r>
-              <a:rPr sz="1000">
-                <a:solidFill>
-                  <a:srgbClr val="343434"/>
-                </a:solidFill>
-                <a:latin typeface="メイリオ"/>
-                <a:ea typeface="メイリオ"/>
-                <a:cs typeface="メイリオ"/>
-              </a:rPr>
-              <a:t>・告知日程が流動的なため最新情報を要確認</a:t>
+              <a:t>・運用中クライアントへの実績報告・追加提案の材料に使える</a:t>
             </a:r>
           </a:p>
         </p:txBody>
@@ -7149,7 +6922,7 @@
                 <a:ea typeface="メイリオ"/>
                 <a:cs typeface="メイリオ"/>
               </a:rPr>
-              <a:t>出典：https://workers-hub.box.com/s/ms8iztyci2dn5z2qna88rklxwxp7o5ja</a:t>
+              <a:t>出典：https://workers-hub.box.com/s/rgfhp6hxyusj7domi1irjx68jld23k9r</a:t>
             </a:r>
           </a:p>
         </p:txBody>
@@ -7222,7 +6995,7 @@
                 <a:ea typeface="メイリオ"/>
                 <a:cs typeface="メイリオ"/>
               </a:rPr>
-              <a:t>プロモーションスタンプ 効果改善アップデート</a:t>
+              <a:t>友だち追加オプション 複数アカウント対応</a:t>
             </a:r>
           </a:p>
         </p:txBody>
@@ -7307,7 +7080,7 @@
                 <a:ea typeface="メイリオ"/>
                 <a:cs typeface="メイリオ"/>
               </a:rPr>
-              <a:t>LINEキーボードのサジェスト機能で無料スタンプが表示される条件が緩和され、全ユーザーに表示可能に。DL数は平均+5.63%増加。</a:t>
+              <a:t>1つのLINEミニアプリに連携するLINE公式アカウントを複数設定できるようになる。</a:t>
             </a:r>
           </a:p>
         </p:txBody>
@@ -7478,7 +7251,7 @@
                 <a:ea typeface="メイリオ"/>
                 <a:cs typeface="メイリオ"/>
               </a:rPr>
-              <a:t>・サジェスト面での無料スタンプ表示ユーザー条件を緩和し全ユーザーに表示されるよう変更</a:t>
+              <a:t>・従来は1つのミニアプリに連携できる公式アカウントは1つのみだったが、複数設定可能に</a:t>
             </a:r>
           </a:p>
           <a:p>
@@ -7499,7 +7272,7 @@
                 <a:ea typeface="メイリオ"/>
                 <a:cs typeface="メイリオ"/>
               </a:rPr>
-              <a:t>・配信中の案件を含む全案件に自動適用（広告主・案件側の対応は不要）</a:t>
+              <a:t>・流入経路（店舗・ブランド等）ごとに異なるLINE公式アカウントへ友だち追加を誘導できる</a:t>
             </a:r>
           </a:p>
         </p:txBody>
@@ -7670,7 +7443,7 @@
                 <a:ea typeface="メイリオ"/>
                 <a:cs typeface="メイリオ"/>
               </a:rPr>
-              <a:t>・追加費用なし（自動適用）</a:t>
+              <a:t>・－</a:t>
             </a:r>
           </a:p>
         </p:txBody>
@@ -7841,7 +7614,7 @@
                 <a:ea typeface="メイリオ"/>
                 <a:cs typeface="メイリオ"/>
               </a:rPr>
-              <a:t>・リリース日：2026年8月28日（金）</a:t>
+              <a:t>・リリース予定日：9月2日</a:t>
             </a:r>
           </a:p>
         </p:txBody>
@@ -8012,7 +7785,7 @@
                 <a:ea typeface="メイリオ"/>
                 <a:cs typeface="メイリオ"/>
               </a:rPr>
-              <a:t>・A/Bテスト結果：1案件あたり平均DL数+5.63%増</a:t>
+              <a:t>・全店舗共通の一斉配信から、店舗ごとのセグメント配信に切り替えられる</a:t>
             </a:r>
           </a:p>
           <a:p>
@@ -8033,7 +7806,7 @@
                 <a:ea typeface="メイリオ"/>
                 <a:cs typeface="メイリオ"/>
               </a:rPr>
-              <a:t>・直近18ヶ月DL履歴のないユーザーでも約2倍のDL、普段DLしない層への到達も改善</a:t>
+              <a:t>・設定はLINE Developersの「友だち追加オプション」から。デフォルト設定／許可リスト設定の組み合わせで3パターン運用可能</a:t>
             </a:r>
           </a:p>
           <a:p>
@@ -8054,7 +7827,7 @@
                 <a:ea typeface="メイリオ"/>
                 <a:cs typeface="メイリオ"/>
               </a:rPr>
-              <a:t>・運用中クライアントへの実績報告・追加提案の材料に使える</a:t>
+              <a:t>・紐づけ条件：ミニアプリと同一プロバイダーの公式アカウントであること／操作者がMessaging APIのadmin権限を保有していること。最大1,000件まで紐づけ可</a:t>
             </a:r>
           </a:p>
         </p:txBody>
@@ -8091,7 +7864,7 @@
                 <a:ea typeface="メイリオ"/>
                 <a:cs typeface="メイリオ"/>
               </a:rPr>
-              <a:t>出典：https://workers-hub.box.com/s/rgfhp6hxyusj7domi1irjx68jld23k9r</a:t>
+              <a:t>出典：https://workers-hub.box.com/s/ko2jjwgxk5fs18ejrs97fvfqv3bm3089</a:t>
             </a:r>
           </a:p>
         </p:txBody>
@@ -8158,7 +7931,7 @@
                 <a:ea typeface="メイリオ"/>
                 <a:cs typeface="メイリオ"/>
               </a:rPr>
-              <a:t>友だち追加オプション 複数アカウント対応</a:t>
+              <a:t>LINE Sales Promotion Manager 利用停止期間</a:t>
             </a:r>
           </a:p>
         </p:txBody>
@@ -8243,7 +8016,7 @@
                 <a:ea typeface="メイリオ"/>
                 <a:cs typeface="メイリオ"/>
               </a:rPr>
-              <a:t>1つのLINEミニアプリに連携するLINE公式アカウントを複数設定できるようになる。</a:t>
+              <a:t>データベース管理システムのスケール最適化のため、LINEで応募の管理画面が一時利用停止となる。</a:t>
             </a:r>
           </a:p>
         </p:txBody>
@@ -8414,7 +8187,7 @@
                 <a:ea typeface="メイリオ"/>
                 <a:cs typeface="メイリオ"/>
               </a:rPr>
-              <a:t>・従来は1つのミニアプリに連携できる公式アカウントは1つのみだったが、複数設定可能に</a:t>
+              <a:t>・データベース管理システムのスケール最適化実施のため対象期間中は管理画面が利用停止</a:t>
             </a:r>
           </a:p>
           <a:p>
@@ -8435,7 +8208,7 @@
                 <a:ea typeface="メイリオ"/>
                 <a:cs typeface="メイリオ"/>
               </a:rPr>
-              <a:t>・流入経路（店舗・ブランド等）ごとに異なるLINE公式アカウントへ友だち追加を誘導できる</a:t>
+              <a:t>・対象メニュー：LINEオープンキャンペーン（抽選型）。アンケート型・季節商品の過去案件も対象</a:t>
             </a:r>
           </a:p>
         </p:txBody>
@@ -8606,7 +8379,7 @@
                 <a:ea typeface="メイリオ"/>
                 <a:cs typeface="メイリオ"/>
               </a:rPr>
-              <a:t>・－</a:t>
+              <a:t>・該当なし</a:t>
             </a:r>
           </a:p>
         </p:txBody>
@@ -8777,159 +8550,9 @@
                 <a:ea typeface="メイリオ"/>
                 <a:cs typeface="メイリオ"/>
               </a:rPr>
-              <a:t>・リリース予定日：9月2日</a:t>
-            </a:r>
-          </a:p>
-        </p:txBody>
-      </p:sp>
-      <p:sp>
-        <p:nvSpPr>
-          <p:cNvPr id="17" name="Rectangle 16"/>
-          <p:cNvSpPr/>
-          <p:nvPr/>
-        </p:nvSpPr>
-        <p:spPr>
-          <a:xfrm>
-            <a:off x="5097780" y="3794760"/>
-            <a:ext cx="4347972" cy="2331720"/>
-          </a:xfrm>
-          <a:prstGeom prst="rect">
-            <a:avLst/>
-          </a:prstGeom>
-          <a:solidFill>
-            <a:srgbClr val="FFFFFF"/>
-          </a:solidFill>
-          <a:ln w="9525">
-            <a:solidFill>
-              <a:srgbClr val="D9D9D9"/>
-            </a:solidFill>
-          </a:ln>
-          <a:effectLst/>
-        </p:spPr>
-        <p:style>
-          <a:lnRef idx="1">
-            <a:schemeClr val="accent1"/>
-          </a:lnRef>
-          <a:fillRef idx="3">
-            <a:schemeClr val="accent1"/>
-          </a:fillRef>
-          <a:effectRef idx="2">
-            <a:schemeClr val="accent1"/>
-          </a:effectRef>
-          <a:fontRef idx="minor">
-            <a:schemeClr val="lt1"/>
-          </a:fontRef>
-        </p:style>
-        <p:txBody>
-          <a:bodyPr rtlCol="0" anchor="ctr"/>
-          <a:lstStyle/>
-          <a:p>
-            <a:pPr algn="ctr"/>
-          </a:p>
-        </p:txBody>
-      </p:sp>
-      <p:sp>
-        <p:nvSpPr>
-          <p:cNvPr id="18" name="Rectangle 17"/>
-          <p:cNvSpPr/>
-          <p:nvPr/>
-        </p:nvSpPr>
-        <p:spPr>
-          <a:xfrm>
-            <a:off x="5097780" y="3794760"/>
-            <a:ext cx="4347972" cy="310896"/>
-          </a:xfrm>
-          <a:prstGeom prst="rect">
-            <a:avLst/>
-          </a:prstGeom>
-          <a:solidFill>
-            <a:srgbClr val="10253F"/>
-          </a:solidFill>
-          <a:ln>
-            <a:noFill/>
-          </a:ln>
-          <a:effectLst/>
-        </p:spPr>
-        <p:style>
-          <a:lnRef idx="1">
-            <a:schemeClr val="accent1"/>
-          </a:lnRef>
-          <a:fillRef idx="3">
-            <a:schemeClr val="accent1"/>
-          </a:fillRef>
-          <a:effectRef idx="2">
-            <a:schemeClr val="accent1"/>
-          </a:effectRef>
-          <a:fontRef idx="minor">
-            <a:schemeClr val="lt1"/>
-          </a:fontRef>
-        </p:style>
-        <p:txBody>
-          <a:bodyPr rtlCol="0" anchor="ctr"/>
-          <a:lstStyle/>
-          <a:p>
-            <a:pPr algn="ctr"/>
-          </a:p>
-        </p:txBody>
-      </p:sp>
-      <p:sp>
-        <p:nvSpPr>
-          <p:cNvPr id="19" name="TextBox 18"/>
-          <p:cNvSpPr txBox="1"/>
-          <p:nvPr/>
-        </p:nvSpPr>
-        <p:spPr>
-          <a:xfrm>
-            <a:off x="5097780" y="3794760"/>
-            <a:ext cx="4347972" cy="310896"/>
-          </a:xfrm>
-          <a:prstGeom prst="rect">
-            <a:avLst/>
-          </a:prstGeom>
-          <a:noFill/>
-        </p:spPr>
-        <p:txBody>
-          <a:bodyPr wrap="square" anchor="ctr" lIns="0" rIns="0" tIns="0" bIns="0">
-            <a:spAutoFit/>
-          </a:bodyPr>
-          <a:lstStyle/>
-          <a:p>
-            <a:pPr algn="ctr"/>
-            <a:r>
-              <a:rPr sz="1050" b="1">
-                <a:solidFill>
-                  <a:srgbClr val="FFFFFF"/>
-                </a:solidFill>
-                <a:latin typeface="メイリオ"/>
-                <a:ea typeface="メイリオ"/>
-                <a:cs typeface="メイリオ"/>
-              </a:rPr>
-              <a:t>注意点・影響</a:t>
-            </a:r>
-          </a:p>
-        </p:txBody>
-      </p:sp>
-      <p:sp>
-        <p:nvSpPr>
-          <p:cNvPr id="20" name="TextBox 19"/>
-          <p:cNvSpPr txBox="1"/>
-          <p:nvPr/>
-        </p:nvSpPr>
-        <p:spPr>
-          <a:xfrm>
-            <a:off x="5262372" y="4197096"/>
-            <a:ext cx="4018788" cy="1837944"/>
-          </a:xfrm>
-          <a:prstGeom prst="rect">
-            <a:avLst/>
-          </a:prstGeom>
-          <a:noFill/>
-        </p:spPr>
-        <p:txBody>
-          <a:bodyPr wrap="square" lIns="0" rIns="0" tIns="0" bIns="0">
-            <a:spAutoFit/>
-          </a:bodyPr>
-          <a:lstStyle/>
+              <a:t>・社外への案内開始日・リリース日：2026年9月2日</a:t>
+            </a:r>
+          </a:p>
           <a:p>
             <a:pPr>
               <a:lnSpc>
@@ -8948,9 +8571,159 @@
                 <a:ea typeface="メイリオ"/>
                 <a:cs typeface="メイリオ"/>
               </a:rPr>
-              <a:t>・全店舗共通の一斉配信から、店舗ごとのセグメント配信に切り替えられる</a:t>
-            </a:r>
-          </a:p>
+              <a:t>・対象期間：9月8日（火）〜9月10日（木） 10:00〜14:30の間</a:t>
+            </a:r>
+          </a:p>
+        </p:txBody>
+      </p:sp>
+      <p:sp>
+        <p:nvSpPr>
+          <p:cNvPr id="17" name="Rectangle 16"/>
+          <p:cNvSpPr/>
+          <p:nvPr/>
+        </p:nvSpPr>
+        <p:spPr>
+          <a:xfrm>
+            <a:off x="5097780" y="3794760"/>
+            <a:ext cx="4347972" cy="2331720"/>
+          </a:xfrm>
+          <a:prstGeom prst="rect">
+            <a:avLst/>
+          </a:prstGeom>
+          <a:solidFill>
+            <a:srgbClr val="FFFFFF"/>
+          </a:solidFill>
+          <a:ln w="9525">
+            <a:solidFill>
+              <a:srgbClr val="D9D9D9"/>
+            </a:solidFill>
+          </a:ln>
+          <a:effectLst/>
+        </p:spPr>
+        <p:style>
+          <a:lnRef idx="1">
+            <a:schemeClr val="accent1"/>
+          </a:lnRef>
+          <a:fillRef idx="3">
+            <a:schemeClr val="accent1"/>
+          </a:fillRef>
+          <a:effectRef idx="2">
+            <a:schemeClr val="accent1"/>
+          </a:effectRef>
+          <a:fontRef idx="minor">
+            <a:schemeClr val="lt1"/>
+          </a:fontRef>
+        </p:style>
+        <p:txBody>
+          <a:bodyPr rtlCol="0" anchor="ctr"/>
+          <a:lstStyle/>
+          <a:p>
+            <a:pPr algn="ctr"/>
+          </a:p>
+        </p:txBody>
+      </p:sp>
+      <p:sp>
+        <p:nvSpPr>
+          <p:cNvPr id="18" name="Rectangle 17"/>
+          <p:cNvSpPr/>
+          <p:nvPr/>
+        </p:nvSpPr>
+        <p:spPr>
+          <a:xfrm>
+            <a:off x="5097780" y="3794760"/>
+            <a:ext cx="4347972" cy="310896"/>
+          </a:xfrm>
+          <a:prstGeom prst="rect">
+            <a:avLst/>
+          </a:prstGeom>
+          <a:solidFill>
+            <a:srgbClr val="10253F"/>
+          </a:solidFill>
+          <a:ln>
+            <a:noFill/>
+          </a:ln>
+          <a:effectLst/>
+        </p:spPr>
+        <p:style>
+          <a:lnRef idx="1">
+            <a:schemeClr val="accent1"/>
+          </a:lnRef>
+          <a:fillRef idx="3">
+            <a:schemeClr val="accent1"/>
+          </a:fillRef>
+          <a:effectRef idx="2">
+            <a:schemeClr val="accent1"/>
+          </a:effectRef>
+          <a:fontRef idx="minor">
+            <a:schemeClr val="lt1"/>
+          </a:fontRef>
+        </p:style>
+        <p:txBody>
+          <a:bodyPr rtlCol="0" anchor="ctr"/>
+          <a:lstStyle/>
+          <a:p>
+            <a:pPr algn="ctr"/>
+          </a:p>
+        </p:txBody>
+      </p:sp>
+      <p:sp>
+        <p:nvSpPr>
+          <p:cNvPr id="19" name="TextBox 18"/>
+          <p:cNvSpPr txBox="1"/>
+          <p:nvPr/>
+        </p:nvSpPr>
+        <p:spPr>
+          <a:xfrm>
+            <a:off x="5097780" y="3794760"/>
+            <a:ext cx="4347972" cy="310896"/>
+          </a:xfrm>
+          <a:prstGeom prst="rect">
+            <a:avLst/>
+          </a:prstGeom>
+          <a:noFill/>
+        </p:spPr>
+        <p:txBody>
+          <a:bodyPr wrap="square" anchor="ctr" lIns="0" rIns="0" tIns="0" bIns="0">
+            <a:spAutoFit/>
+          </a:bodyPr>
+          <a:lstStyle/>
+          <a:p>
+            <a:pPr algn="ctr"/>
+            <a:r>
+              <a:rPr sz="1050" b="1">
+                <a:solidFill>
+                  <a:srgbClr val="FFFFFF"/>
+                </a:solidFill>
+                <a:latin typeface="メイリオ"/>
+                <a:ea typeface="メイリオ"/>
+                <a:cs typeface="メイリオ"/>
+              </a:rPr>
+              <a:t>注意点・影響</a:t>
+            </a:r>
+          </a:p>
+        </p:txBody>
+      </p:sp>
+      <p:sp>
+        <p:nvSpPr>
+          <p:cNvPr id="20" name="TextBox 19"/>
+          <p:cNvSpPr txBox="1"/>
+          <p:nvPr/>
+        </p:nvSpPr>
+        <p:spPr>
+          <a:xfrm>
+            <a:off x="5262372" y="4197096"/>
+            <a:ext cx="4018788" cy="1837944"/>
+          </a:xfrm>
+          <a:prstGeom prst="rect">
+            <a:avLst/>
+          </a:prstGeom>
+          <a:noFill/>
+        </p:spPr>
+        <p:txBody>
+          <a:bodyPr wrap="square" lIns="0" rIns="0" tIns="0" bIns="0">
+            <a:spAutoFit/>
+          </a:bodyPr>
+          <a:lstStyle/>
           <a:p>
             <a:pPr>
               <a:lnSpc>
@@ -8969,7 +8742,7 @@
                 <a:ea typeface="メイリオ"/>
                 <a:cs typeface="メイリオ"/>
               </a:rPr>
-              <a:t>・設定はLINE Developersの「友だち追加オプション」から。デフォルト設定／許可リスト設定の組み合わせで3パターン運用可能</a:t>
+              <a:t>・影響範囲：サマリーレポートの作成・ダウンロードが利用不可</a:t>
             </a:r>
           </a:p>
           <a:p>
@@ -8990,7 +8763,28 @@
                 <a:ea typeface="メイリオ"/>
                 <a:cs typeface="メイリオ"/>
               </a:rPr>
-              <a:t>・紐づけ条件：ミニアプリと同一プロバイダーの公式アカウントであること／操作者がMessaging APIのadmin権限を保有していること。最大1,000件まで紐づけ可</a:t>
+              <a:t>・LBPMでの案件申請・入稿など、上記以外の機能は通常どおり利用可能</a:t>
+            </a:r>
+          </a:p>
+          <a:p>
+            <a:pPr>
+              <a:lnSpc>
+                <a:spcPct val="120000"/>
+              </a:lnSpc>
+              <a:spcAft>
+                <a:spcPts val="300"/>
+              </a:spcAft>
+            </a:pPr>
+            <a:r>
+              <a:rPr sz="1000">
+                <a:solidFill>
+                  <a:srgbClr val="343434"/>
+                </a:solidFill>
+                <a:latin typeface="メイリオ"/>
+                <a:ea typeface="メイリオ"/>
+                <a:cs typeface="メイリオ"/>
+              </a:rPr>
+              <a:t>・稼働中キャンペーンがあるクライアントには事前周知が必要</a:t>
             </a:r>
           </a:p>
         </p:txBody>
@@ -9027,7 +8821,7 @@
                 <a:ea typeface="メイリオ"/>
                 <a:cs typeface="メイリオ"/>
               </a:rPr>
-              <a:t>出典：https://workers-hub.box.com/s/ko2jjwgxk5fs18ejrs97fvfqv3bm3089</a:t>
+              <a:t>出典：https://workers-hub.box.com/s/mo3y54qld9vj4kung0c4040z41mfhoip</a:t>
             </a:r>
           </a:p>
         </p:txBody>
@@ -10161,969 +9955,6 @@
     <p:extLst>
       <p:ext uri="{BB962C8B-B14F-4D97-AF65-F5344CB8AC3E}">
         <p14:creationId xmlns:p14="http://schemas.microsoft.com/office/powerpoint/2010/main" val="2447681854"/>
-      </p:ext>
-    </p:extLst>
-  </p:cSld>
-  <p:clrMapOvr>
-    <a:masterClrMapping/>
-  </p:clrMapOvr>
-</p:sld>
-</file>
-
-<file path=ppt/slides/slide9.xml><?xml version="1.0" encoding="utf-8"?>
-<p:sld xmlns:a="http://schemas.openxmlformats.org/drawingml/2006/main" xmlns:r="http://schemas.openxmlformats.org/officeDocument/2006/relationships" xmlns:p="http://schemas.openxmlformats.org/presentationml/2006/main">
-  <p:cSld>
-    <p:spTree>
-      <p:nvGrpSpPr>
-        <p:cNvPr id="1" name="">
-          <a:extLst>
-            <a:ext uri="{FF2B5EF4-FFF2-40B4-BE49-F238E27FC236}">
-              <a16:creationId xmlns:a16="http://schemas.microsoft.com/office/drawing/2014/main" id="{5CBD88C4-8CFA-2C0E-C230-F47FCA10FFC5}"/>
-            </a:ext>
-          </a:extLst>
-        </p:cNvPr>
-        <p:cNvGrpSpPr/>
-        <p:nvPr/>
-      </p:nvGrpSpPr>
-      <p:grpSpPr>
-        <a:xfrm>
-          <a:off x="0" y="0"/>
-          <a:ext cx="0" cy="0"/>
-          <a:chOff x="0" y="0"/>
-          <a:chExt cx="0" cy="0"/>
-        </a:xfrm>
-      </p:grpSpPr>
-      <p:sp>
-        <p:nvSpPr>
-          <p:cNvPr id="2" name="TextBox 1"/>
-          <p:cNvSpPr txBox="1"/>
-          <p:nvPr/>
-        </p:nvSpPr>
-        <p:spPr>
-          <a:xfrm>
-            <a:off x="566928" y="91440"/>
-            <a:ext cx="7406640" cy="384048"/>
-          </a:xfrm>
-          <a:prstGeom prst="rect">
-            <a:avLst/>
-          </a:prstGeom>
-          <a:noFill/>
-        </p:spPr>
-        <p:txBody>
-          <a:bodyPr wrap="square" anchor="ctr" lIns="0" rIns="0" tIns="0" bIns="0">
-            <a:spAutoFit/>
-          </a:bodyPr>
-          <a:lstStyle/>
-          <a:p>
-            <a:pPr algn="l"/>
-            <a:r>
-              <a:rPr sz="1700" b="1">
-                <a:solidFill>
-                  <a:srgbClr val="002060"/>
-                </a:solidFill>
-                <a:latin typeface="メイリオ"/>
-                <a:ea typeface="メイリオ"/>
-                <a:cs typeface="メイリオ"/>
-              </a:rPr>
-              <a:t>LINE Sales Promotion Manager 利用停止期間</a:t>
-            </a:r>
-          </a:p>
-        </p:txBody>
-      </p:sp>
-      <p:sp>
-        <p:nvSpPr>
-          <p:cNvPr id="3" name="Rectangle 2"/>
-          <p:cNvSpPr/>
-          <p:nvPr/>
-        </p:nvSpPr>
-        <p:spPr>
-          <a:xfrm>
-            <a:off x="566928" y="685800"/>
-            <a:ext cx="8878824" cy="502920"/>
-          </a:xfrm>
-          <a:prstGeom prst="rect">
-            <a:avLst/>
-          </a:prstGeom>
-          <a:solidFill>
-            <a:srgbClr val="F2F2F2"/>
-          </a:solidFill>
-          <a:ln>
-            <a:noFill/>
-          </a:ln>
-          <a:effectLst/>
-        </p:spPr>
-        <p:style>
-          <a:lnRef idx="1">
-            <a:schemeClr val="accent1"/>
-          </a:lnRef>
-          <a:fillRef idx="3">
-            <a:schemeClr val="accent1"/>
-          </a:fillRef>
-          <a:effectRef idx="2">
-            <a:schemeClr val="accent1"/>
-          </a:effectRef>
-          <a:fontRef idx="minor">
-            <a:schemeClr val="lt1"/>
-          </a:fontRef>
-        </p:style>
-        <p:txBody>
-          <a:bodyPr rtlCol="0" anchor="ctr"/>
-          <a:lstStyle/>
-          <a:p>
-            <a:pPr algn="ctr"/>
-          </a:p>
-        </p:txBody>
-      </p:sp>
-      <p:sp>
-        <p:nvSpPr>
-          <p:cNvPr id="4" name="TextBox 3"/>
-          <p:cNvSpPr txBox="1"/>
-          <p:nvPr/>
-        </p:nvSpPr>
-        <p:spPr>
-          <a:xfrm>
-            <a:off x="749808" y="685800"/>
-            <a:ext cx="8513064" cy="502920"/>
-          </a:xfrm>
-          <a:prstGeom prst="rect">
-            <a:avLst/>
-          </a:prstGeom>
-          <a:noFill/>
-        </p:spPr>
-        <p:txBody>
-          <a:bodyPr wrap="square" anchor="ctr" lIns="0" rIns="0" tIns="0" bIns="0">
-            <a:spAutoFit/>
-          </a:bodyPr>
-          <a:lstStyle/>
-          <a:p>
-            <a:pPr algn="l">
-              <a:lnSpc>
-                <a:spcPct val="110000"/>
-              </a:lnSpc>
-            </a:pPr>
-            <a:r>
-              <a:rPr sz="1200" b="1">
-                <a:solidFill>
-                  <a:srgbClr val="002060"/>
-                </a:solidFill>
-                <a:latin typeface="メイリオ"/>
-                <a:ea typeface="メイリオ"/>
-                <a:cs typeface="メイリオ"/>
-              </a:rPr>
-              <a:t>データベース管理システムのスケール最適化のため、LINEで応募の管理画面が一時利用停止となる。</a:t>
-            </a:r>
-          </a:p>
-        </p:txBody>
-      </p:sp>
-      <p:sp>
-        <p:nvSpPr>
-          <p:cNvPr id="5" name="Rectangle 4"/>
-          <p:cNvSpPr/>
-          <p:nvPr/>
-        </p:nvSpPr>
-        <p:spPr>
-          <a:xfrm>
-            <a:off x="566928" y="1325880"/>
-            <a:ext cx="4347972" cy="2331720"/>
-          </a:xfrm>
-          <a:prstGeom prst="rect">
-            <a:avLst/>
-          </a:prstGeom>
-          <a:solidFill>
-            <a:srgbClr val="FFFFFF"/>
-          </a:solidFill>
-          <a:ln w="9525">
-            <a:solidFill>
-              <a:srgbClr val="D9D9D9"/>
-            </a:solidFill>
-          </a:ln>
-          <a:effectLst/>
-        </p:spPr>
-        <p:style>
-          <a:lnRef idx="1">
-            <a:schemeClr val="accent1"/>
-          </a:lnRef>
-          <a:fillRef idx="3">
-            <a:schemeClr val="accent1"/>
-          </a:fillRef>
-          <a:effectRef idx="2">
-            <a:schemeClr val="accent1"/>
-          </a:effectRef>
-          <a:fontRef idx="minor">
-            <a:schemeClr val="lt1"/>
-          </a:fontRef>
-        </p:style>
-        <p:txBody>
-          <a:bodyPr rtlCol="0" anchor="ctr"/>
-          <a:lstStyle/>
-          <a:p>
-            <a:pPr algn="ctr"/>
-          </a:p>
-        </p:txBody>
-      </p:sp>
-      <p:sp>
-        <p:nvSpPr>
-          <p:cNvPr id="6" name="Rectangle 5"/>
-          <p:cNvSpPr/>
-          <p:nvPr/>
-        </p:nvSpPr>
-        <p:spPr>
-          <a:xfrm>
-            <a:off x="566928" y="1325880"/>
-            <a:ext cx="4347972" cy="310896"/>
-          </a:xfrm>
-          <a:prstGeom prst="rect">
-            <a:avLst/>
-          </a:prstGeom>
-          <a:solidFill>
-            <a:srgbClr val="10253F"/>
-          </a:solidFill>
-          <a:ln>
-            <a:noFill/>
-          </a:ln>
-          <a:effectLst/>
-        </p:spPr>
-        <p:style>
-          <a:lnRef idx="1">
-            <a:schemeClr val="accent1"/>
-          </a:lnRef>
-          <a:fillRef idx="3">
-            <a:schemeClr val="accent1"/>
-          </a:fillRef>
-          <a:effectRef idx="2">
-            <a:schemeClr val="accent1"/>
-          </a:effectRef>
-          <a:fontRef idx="minor">
-            <a:schemeClr val="lt1"/>
-          </a:fontRef>
-        </p:style>
-        <p:txBody>
-          <a:bodyPr rtlCol="0" anchor="ctr"/>
-          <a:lstStyle/>
-          <a:p>
-            <a:pPr algn="ctr"/>
-          </a:p>
-        </p:txBody>
-      </p:sp>
-      <p:sp>
-        <p:nvSpPr>
-          <p:cNvPr id="7" name="TextBox 6"/>
-          <p:cNvSpPr txBox="1"/>
-          <p:nvPr/>
-        </p:nvSpPr>
-        <p:spPr>
-          <a:xfrm>
-            <a:off x="566928" y="1325880"/>
-            <a:ext cx="4347972" cy="310896"/>
-          </a:xfrm>
-          <a:prstGeom prst="rect">
-            <a:avLst/>
-          </a:prstGeom>
-          <a:noFill/>
-        </p:spPr>
-        <p:txBody>
-          <a:bodyPr wrap="square" anchor="ctr" lIns="0" rIns="0" tIns="0" bIns="0">
-            <a:spAutoFit/>
-          </a:bodyPr>
-          <a:lstStyle/>
-          <a:p>
-            <a:pPr algn="ctr"/>
-            <a:r>
-              <a:rPr sz="1050" b="1">
-                <a:solidFill>
-                  <a:srgbClr val="FFFFFF"/>
-                </a:solidFill>
-                <a:latin typeface="メイリオ"/>
-                <a:ea typeface="メイリオ"/>
-                <a:cs typeface="メイリオ"/>
-              </a:rPr>
-              <a:t>概要・変更点</a:t>
-            </a:r>
-          </a:p>
-        </p:txBody>
-      </p:sp>
-      <p:sp>
-        <p:nvSpPr>
-          <p:cNvPr id="8" name="TextBox 7"/>
-          <p:cNvSpPr txBox="1"/>
-          <p:nvPr/>
-        </p:nvSpPr>
-        <p:spPr>
-          <a:xfrm>
-            <a:off x="731520" y="1728216"/>
-            <a:ext cx="4018788" cy="1837944"/>
-          </a:xfrm>
-          <a:prstGeom prst="rect">
-            <a:avLst/>
-          </a:prstGeom>
-          <a:noFill/>
-        </p:spPr>
-        <p:txBody>
-          <a:bodyPr wrap="square" lIns="0" rIns="0" tIns="0" bIns="0">
-            <a:spAutoFit/>
-          </a:bodyPr>
-          <a:lstStyle/>
-          <a:p>
-            <a:pPr>
-              <a:lnSpc>
-                <a:spcPct val="120000"/>
-              </a:lnSpc>
-              <a:spcAft>
-                <a:spcPts val="300"/>
-              </a:spcAft>
-            </a:pPr>
-            <a:r>
-              <a:rPr sz="1000">
-                <a:solidFill>
-                  <a:srgbClr val="343434"/>
-                </a:solidFill>
-                <a:latin typeface="メイリオ"/>
-                <a:ea typeface="メイリオ"/>
-                <a:cs typeface="メイリオ"/>
-              </a:rPr>
-              <a:t>・データベース管理システムのスケール最適化実施のため対象期間中は管理画面が利用停止</a:t>
-            </a:r>
-          </a:p>
-          <a:p>
-            <a:pPr>
-              <a:lnSpc>
-                <a:spcPct val="120000"/>
-              </a:lnSpc>
-              <a:spcAft>
-                <a:spcPts val="300"/>
-              </a:spcAft>
-            </a:pPr>
-            <a:r>
-              <a:rPr sz="1000">
-                <a:solidFill>
-                  <a:srgbClr val="343434"/>
-                </a:solidFill>
-                <a:latin typeface="メイリオ"/>
-                <a:ea typeface="メイリオ"/>
-                <a:cs typeface="メイリオ"/>
-              </a:rPr>
-              <a:t>・対象メニュー：LINEオープンキャンペーン（抽選型）。アンケート型・季節商品の過去案件も対象</a:t>
-            </a:r>
-          </a:p>
-        </p:txBody>
-      </p:sp>
-      <p:sp>
-        <p:nvSpPr>
-          <p:cNvPr id="9" name="Rectangle 8"/>
-          <p:cNvSpPr/>
-          <p:nvPr/>
-        </p:nvSpPr>
-        <p:spPr>
-          <a:xfrm>
-            <a:off x="5097780" y="1325880"/>
-            <a:ext cx="4347972" cy="2331720"/>
-          </a:xfrm>
-          <a:prstGeom prst="rect">
-            <a:avLst/>
-          </a:prstGeom>
-          <a:solidFill>
-            <a:srgbClr val="FFFFFF"/>
-          </a:solidFill>
-          <a:ln w="9525">
-            <a:solidFill>
-              <a:srgbClr val="D9D9D9"/>
-            </a:solidFill>
-          </a:ln>
-          <a:effectLst/>
-        </p:spPr>
-        <p:style>
-          <a:lnRef idx="1">
-            <a:schemeClr val="accent1"/>
-          </a:lnRef>
-          <a:fillRef idx="3">
-            <a:schemeClr val="accent1"/>
-          </a:fillRef>
-          <a:effectRef idx="2">
-            <a:schemeClr val="accent1"/>
-          </a:effectRef>
-          <a:fontRef idx="minor">
-            <a:schemeClr val="lt1"/>
-          </a:fontRef>
-        </p:style>
-        <p:txBody>
-          <a:bodyPr rtlCol="0" anchor="ctr"/>
-          <a:lstStyle/>
-          <a:p>
-            <a:pPr algn="ctr"/>
-          </a:p>
-        </p:txBody>
-      </p:sp>
-      <p:sp>
-        <p:nvSpPr>
-          <p:cNvPr id="10" name="Rectangle 9"/>
-          <p:cNvSpPr/>
-          <p:nvPr/>
-        </p:nvSpPr>
-        <p:spPr>
-          <a:xfrm>
-            <a:off x="5097780" y="1325880"/>
-            <a:ext cx="4347972" cy="310896"/>
-          </a:xfrm>
-          <a:prstGeom prst="rect">
-            <a:avLst/>
-          </a:prstGeom>
-          <a:solidFill>
-            <a:srgbClr val="10253F"/>
-          </a:solidFill>
-          <a:ln>
-            <a:noFill/>
-          </a:ln>
-          <a:effectLst/>
-        </p:spPr>
-        <p:style>
-          <a:lnRef idx="1">
-            <a:schemeClr val="accent1"/>
-          </a:lnRef>
-          <a:fillRef idx="3">
-            <a:schemeClr val="accent1"/>
-          </a:fillRef>
-          <a:effectRef idx="2">
-            <a:schemeClr val="accent1"/>
-          </a:effectRef>
-          <a:fontRef idx="minor">
-            <a:schemeClr val="lt1"/>
-          </a:fontRef>
-        </p:style>
-        <p:txBody>
-          <a:bodyPr rtlCol="0" anchor="ctr"/>
-          <a:lstStyle/>
-          <a:p>
-            <a:pPr algn="ctr"/>
-          </a:p>
-        </p:txBody>
-      </p:sp>
-      <p:sp>
-        <p:nvSpPr>
-          <p:cNvPr id="11" name="TextBox 10"/>
-          <p:cNvSpPr txBox="1"/>
-          <p:nvPr/>
-        </p:nvSpPr>
-        <p:spPr>
-          <a:xfrm>
-            <a:off x="5097780" y="1325880"/>
-            <a:ext cx="4347972" cy="310896"/>
-          </a:xfrm>
-          <a:prstGeom prst="rect">
-            <a:avLst/>
-          </a:prstGeom>
-          <a:noFill/>
-        </p:spPr>
-        <p:txBody>
-          <a:bodyPr wrap="square" anchor="ctr" lIns="0" rIns="0" tIns="0" bIns="0">
-            <a:spAutoFit/>
-          </a:bodyPr>
-          <a:lstStyle/>
-          <a:p>
-            <a:pPr algn="ctr"/>
-            <a:r>
-              <a:rPr sz="1050" b="1">
-                <a:solidFill>
-                  <a:srgbClr val="FFFFFF"/>
-                </a:solidFill>
-                <a:latin typeface="メイリオ"/>
-                <a:ea typeface="メイリオ"/>
-                <a:cs typeface="メイリオ"/>
-              </a:rPr>
-              <a:t>料金体系・出稿条件</a:t>
-            </a:r>
-          </a:p>
-        </p:txBody>
-      </p:sp>
-      <p:sp>
-        <p:nvSpPr>
-          <p:cNvPr id="12" name="TextBox 11"/>
-          <p:cNvSpPr txBox="1"/>
-          <p:nvPr/>
-        </p:nvSpPr>
-        <p:spPr>
-          <a:xfrm>
-            <a:off x="5262372" y="1728216"/>
-            <a:ext cx="4018788" cy="1837944"/>
-          </a:xfrm>
-          <a:prstGeom prst="rect">
-            <a:avLst/>
-          </a:prstGeom>
-          <a:noFill/>
-        </p:spPr>
-        <p:txBody>
-          <a:bodyPr wrap="square" lIns="0" rIns="0" tIns="0" bIns="0">
-            <a:spAutoFit/>
-          </a:bodyPr>
-          <a:lstStyle/>
-          <a:p>
-            <a:pPr>
-              <a:lnSpc>
-                <a:spcPct val="120000"/>
-              </a:lnSpc>
-              <a:spcAft>
-                <a:spcPts val="300"/>
-              </a:spcAft>
-            </a:pPr>
-            <a:r>
-              <a:rPr sz="1000">
-                <a:solidFill>
-                  <a:srgbClr val="343434"/>
-                </a:solidFill>
-                <a:latin typeface="メイリオ"/>
-                <a:ea typeface="メイリオ"/>
-                <a:cs typeface="メイリオ"/>
-              </a:rPr>
-              <a:t>・該当なし</a:t>
-            </a:r>
-          </a:p>
-        </p:txBody>
-      </p:sp>
-      <p:sp>
-        <p:nvSpPr>
-          <p:cNvPr id="13" name="Rectangle 12"/>
-          <p:cNvSpPr/>
-          <p:nvPr/>
-        </p:nvSpPr>
-        <p:spPr>
-          <a:xfrm>
-            <a:off x="566928" y="3794760"/>
-            <a:ext cx="4347972" cy="2331720"/>
-          </a:xfrm>
-          <a:prstGeom prst="rect">
-            <a:avLst/>
-          </a:prstGeom>
-          <a:solidFill>
-            <a:srgbClr val="FFFFFF"/>
-          </a:solidFill>
-          <a:ln w="9525">
-            <a:solidFill>
-              <a:srgbClr val="D9D9D9"/>
-            </a:solidFill>
-          </a:ln>
-          <a:effectLst/>
-        </p:spPr>
-        <p:style>
-          <a:lnRef idx="1">
-            <a:schemeClr val="accent1"/>
-          </a:lnRef>
-          <a:fillRef idx="3">
-            <a:schemeClr val="accent1"/>
-          </a:fillRef>
-          <a:effectRef idx="2">
-            <a:schemeClr val="accent1"/>
-          </a:effectRef>
-          <a:fontRef idx="minor">
-            <a:schemeClr val="lt1"/>
-          </a:fontRef>
-        </p:style>
-        <p:txBody>
-          <a:bodyPr rtlCol="0" anchor="ctr"/>
-          <a:lstStyle/>
-          <a:p>
-            <a:pPr algn="ctr"/>
-          </a:p>
-        </p:txBody>
-      </p:sp>
-      <p:sp>
-        <p:nvSpPr>
-          <p:cNvPr id="14" name="Rectangle 13"/>
-          <p:cNvSpPr/>
-          <p:nvPr/>
-        </p:nvSpPr>
-        <p:spPr>
-          <a:xfrm>
-            <a:off x="566928" y="3794760"/>
-            <a:ext cx="4347972" cy="310896"/>
-          </a:xfrm>
-          <a:prstGeom prst="rect">
-            <a:avLst/>
-          </a:prstGeom>
-          <a:solidFill>
-            <a:srgbClr val="10253F"/>
-          </a:solidFill>
-          <a:ln>
-            <a:noFill/>
-          </a:ln>
-          <a:effectLst/>
-        </p:spPr>
-        <p:style>
-          <a:lnRef idx="1">
-            <a:schemeClr val="accent1"/>
-          </a:lnRef>
-          <a:fillRef idx="3">
-            <a:schemeClr val="accent1"/>
-          </a:fillRef>
-          <a:effectRef idx="2">
-            <a:schemeClr val="accent1"/>
-          </a:effectRef>
-          <a:fontRef idx="minor">
-            <a:schemeClr val="lt1"/>
-          </a:fontRef>
-        </p:style>
-        <p:txBody>
-          <a:bodyPr rtlCol="0" anchor="ctr"/>
-          <a:lstStyle/>
-          <a:p>
-            <a:pPr algn="ctr"/>
-          </a:p>
-        </p:txBody>
-      </p:sp>
-      <p:sp>
-        <p:nvSpPr>
-          <p:cNvPr id="15" name="TextBox 14"/>
-          <p:cNvSpPr txBox="1"/>
-          <p:nvPr/>
-        </p:nvSpPr>
-        <p:spPr>
-          <a:xfrm>
-            <a:off x="566928" y="3794760"/>
-            <a:ext cx="4347972" cy="310896"/>
-          </a:xfrm>
-          <a:prstGeom prst="rect">
-            <a:avLst/>
-          </a:prstGeom>
-          <a:noFill/>
-        </p:spPr>
-        <p:txBody>
-          <a:bodyPr wrap="square" anchor="ctr" lIns="0" rIns="0" tIns="0" bIns="0">
-            <a:spAutoFit/>
-          </a:bodyPr>
-          <a:lstStyle/>
-          <a:p>
-            <a:pPr algn="ctr"/>
-            <a:r>
-              <a:rPr sz="1050" b="1">
-                <a:solidFill>
-                  <a:srgbClr val="FFFFFF"/>
-                </a:solidFill>
-                <a:latin typeface="メイリオ"/>
-                <a:ea typeface="メイリオ"/>
-                <a:cs typeface="メイリオ"/>
-              </a:rPr>
-              <a:t>スケジュール・導入フロー</a:t>
-            </a:r>
-          </a:p>
-        </p:txBody>
-      </p:sp>
-      <p:sp>
-        <p:nvSpPr>
-          <p:cNvPr id="16" name="TextBox 15"/>
-          <p:cNvSpPr txBox="1"/>
-          <p:nvPr/>
-        </p:nvSpPr>
-        <p:spPr>
-          <a:xfrm>
-            <a:off x="731520" y="4197096"/>
-            <a:ext cx="4018788" cy="1837944"/>
-          </a:xfrm>
-          <a:prstGeom prst="rect">
-            <a:avLst/>
-          </a:prstGeom>
-          <a:noFill/>
-        </p:spPr>
-        <p:txBody>
-          <a:bodyPr wrap="square" lIns="0" rIns="0" tIns="0" bIns="0">
-            <a:spAutoFit/>
-          </a:bodyPr>
-          <a:lstStyle/>
-          <a:p>
-            <a:pPr>
-              <a:lnSpc>
-                <a:spcPct val="120000"/>
-              </a:lnSpc>
-              <a:spcAft>
-                <a:spcPts val="300"/>
-              </a:spcAft>
-            </a:pPr>
-            <a:r>
-              <a:rPr sz="1000">
-                <a:solidFill>
-                  <a:srgbClr val="343434"/>
-                </a:solidFill>
-                <a:latin typeface="メイリオ"/>
-                <a:ea typeface="メイリオ"/>
-                <a:cs typeface="メイリオ"/>
-              </a:rPr>
-              <a:t>・社外への案内開始日・リリース日：2026年9月2日</a:t>
-            </a:r>
-          </a:p>
-          <a:p>
-            <a:pPr>
-              <a:lnSpc>
-                <a:spcPct val="120000"/>
-              </a:lnSpc>
-              <a:spcAft>
-                <a:spcPts val="300"/>
-              </a:spcAft>
-            </a:pPr>
-            <a:r>
-              <a:rPr sz="1000">
-                <a:solidFill>
-                  <a:srgbClr val="343434"/>
-                </a:solidFill>
-                <a:latin typeface="メイリオ"/>
-                <a:ea typeface="メイリオ"/>
-                <a:cs typeface="メイリオ"/>
-              </a:rPr>
-              <a:t>・対象期間：9月8日（火）〜9月10日（木） 10:00〜14:30の間</a:t>
-            </a:r>
-          </a:p>
-        </p:txBody>
-      </p:sp>
-      <p:sp>
-        <p:nvSpPr>
-          <p:cNvPr id="17" name="Rectangle 16"/>
-          <p:cNvSpPr/>
-          <p:nvPr/>
-        </p:nvSpPr>
-        <p:spPr>
-          <a:xfrm>
-            <a:off x="5097780" y="3794760"/>
-            <a:ext cx="4347972" cy="2331720"/>
-          </a:xfrm>
-          <a:prstGeom prst="rect">
-            <a:avLst/>
-          </a:prstGeom>
-          <a:solidFill>
-            <a:srgbClr val="FFFFFF"/>
-          </a:solidFill>
-          <a:ln w="9525">
-            <a:solidFill>
-              <a:srgbClr val="D9D9D9"/>
-            </a:solidFill>
-          </a:ln>
-          <a:effectLst/>
-        </p:spPr>
-        <p:style>
-          <a:lnRef idx="1">
-            <a:schemeClr val="accent1"/>
-          </a:lnRef>
-          <a:fillRef idx="3">
-            <a:schemeClr val="accent1"/>
-          </a:fillRef>
-          <a:effectRef idx="2">
-            <a:schemeClr val="accent1"/>
-          </a:effectRef>
-          <a:fontRef idx="minor">
-            <a:schemeClr val="lt1"/>
-          </a:fontRef>
-        </p:style>
-        <p:txBody>
-          <a:bodyPr rtlCol="0" anchor="ctr"/>
-          <a:lstStyle/>
-          <a:p>
-            <a:pPr algn="ctr"/>
-          </a:p>
-        </p:txBody>
-      </p:sp>
-      <p:sp>
-        <p:nvSpPr>
-          <p:cNvPr id="18" name="Rectangle 17"/>
-          <p:cNvSpPr/>
-          <p:nvPr/>
-        </p:nvSpPr>
-        <p:spPr>
-          <a:xfrm>
-            <a:off x="5097780" y="3794760"/>
-            <a:ext cx="4347972" cy="310896"/>
-          </a:xfrm>
-          <a:prstGeom prst="rect">
-            <a:avLst/>
-          </a:prstGeom>
-          <a:solidFill>
-            <a:srgbClr val="10253F"/>
-          </a:solidFill>
-          <a:ln>
-            <a:noFill/>
-          </a:ln>
-          <a:effectLst/>
-        </p:spPr>
-        <p:style>
-          <a:lnRef idx="1">
-            <a:schemeClr val="accent1"/>
-          </a:lnRef>
-          <a:fillRef idx="3">
-            <a:schemeClr val="accent1"/>
-          </a:fillRef>
-          <a:effectRef idx="2">
-            <a:schemeClr val="accent1"/>
-          </a:effectRef>
-          <a:fontRef idx="minor">
-            <a:schemeClr val="lt1"/>
-          </a:fontRef>
-        </p:style>
-        <p:txBody>
-          <a:bodyPr rtlCol="0" anchor="ctr"/>
-          <a:lstStyle/>
-          <a:p>
-            <a:pPr algn="ctr"/>
-          </a:p>
-        </p:txBody>
-      </p:sp>
-      <p:sp>
-        <p:nvSpPr>
-          <p:cNvPr id="19" name="TextBox 18"/>
-          <p:cNvSpPr txBox="1"/>
-          <p:nvPr/>
-        </p:nvSpPr>
-        <p:spPr>
-          <a:xfrm>
-            <a:off x="5097780" y="3794760"/>
-            <a:ext cx="4347972" cy="310896"/>
-          </a:xfrm>
-          <a:prstGeom prst="rect">
-            <a:avLst/>
-          </a:prstGeom>
-          <a:noFill/>
-        </p:spPr>
-        <p:txBody>
-          <a:bodyPr wrap="square" anchor="ctr" lIns="0" rIns="0" tIns="0" bIns="0">
-            <a:spAutoFit/>
-          </a:bodyPr>
-          <a:lstStyle/>
-          <a:p>
-            <a:pPr algn="ctr"/>
-            <a:r>
-              <a:rPr sz="1050" b="1">
-                <a:solidFill>
-                  <a:srgbClr val="FFFFFF"/>
-                </a:solidFill>
-                <a:latin typeface="メイリオ"/>
-                <a:ea typeface="メイリオ"/>
-                <a:cs typeface="メイリオ"/>
-              </a:rPr>
-              <a:t>注意点・影響</a:t>
-            </a:r>
-          </a:p>
-        </p:txBody>
-      </p:sp>
-      <p:sp>
-        <p:nvSpPr>
-          <p:cNvPr id="20" name="TextBox 19"/>
-          <p:cNvSpPr txBox="1"/>
-          <p:nvPr/>
-        </p:nvSpPr>
-        <p:spPr>
-          <a:xfrm>
-            <a:off x="5262372" y="4197096"/>
-            <a:ext cx="4018788" cy="1837944"/>
-          </a:xfrm>
-          <a:prstGeom prst="rect">
-            <a:avLst/>
-          </a:prstGeom>
-          <a:noFill/>
-        </p:spPr>
-        <p:txBody>
-          <a:bodyPr wrap="square" lIns="0" rIns="0" tIns="0" bIns="0">
-            <a:spAutoFit/>
-          </a:bodyPr>
-          <a:lstStyle/>
-          <a:p>
-            <a:pPr>
-              <a:lnSpc>
-                <a:spcPct val="120000"/>
-              </a:lnSpc>
-              <a:spcAft>
-                <a:spcPts val="300"/>
-              </a:spcAft>
-            </a:pPr>
-            <a:r>
-              <a:rPr sz="1000">
-                <a:solidFill>
-                  <a:srgbClr val="343434"/>
-                </a:solidFill>
-                <a:latin typeface="メイリオ"/>
-                <a:ea typeface="メイリオ"/>
-                <a:cs typeface="メイリオ"/>
-              </a:rPr>
-              <a:t>・影響範囲：サマリーレポートの作成・ダウンロードが利用不可</a:t>
-            </a:r>
-          </a:p>
-          <a:p>
-            <a:pPr>
-              <a:lnSpc>
-                <a:spcPct val="120000"/>
-              </a:lnSpc>
-              <a:spcAft>
-                <a:spcPts val="300"/>
-              </a:spcAft>
-            </a:pPr>
-            <a:r>
-              <a:rPr sz="1000">
-                <a:solidFill>
-                  <a:srgbClr val="343434"/>
-                </a:solidFill>
-                <a:latin typeface="メイリオ"/>
-                <a:ea typeface="メイリオ"/>
-                <a:cs typeface="メイリオ"/>
-              </a:rPr>
-              <a:t>・LBPMでの案件申請・入稿など、上記以外の機能は通常どおり利用可能</a:t>
-            </a:r>
-          </a:p>
-          <a:p>
-            <a:pPr>
-              <a:lnSpc>
-                <a:spcPct val="120000"/>
-              </a:lnSpc>
-              <a:spcAft>
-                <a:spcPts val="300"/>
-              </a:spcAft>
-            </a:pPr>
-            <a:r>
-              <a:rPr sz="1000">
-                <a:solidFill>
-                  <a:srgbClr val="343434"/>
-                </a:solidFill>
-                <a:latin typeface="メイリオ"/>
-                <a:ea typeface="メイリオ"/>
-                <a:cs typeface="メイリオ"/>
-              </a:rPr>
-              <a:t>・稼働中キャンペーンがあるクライアントには事前周知が必要</a:t>
-            </a:r>
-          </a:p>
-        </p:txBody>
-      </p:sp>
-      <p:sp>
-        <p:nvSpPr>
-          <p:cNvPr id="21" name="TextBox 20"/>
-          <p:cNvSpPr txBox="1"/>
-          <p:nvPr/>
-        </p:nvSpPr>
-        <p:spPr>
-          <a:xfrm>
-            <a:off x="566928" y="6217920"/>
-            <a:ext cx="8686800" cy="201168"/>
-          </a:xfrm>
-          <a:prstGeom prst="rect">
-            <a:avLst/>
-          </a:prstGeom>
-          <a:noFill/>
-        </p:spPr>
-        <p:txBody>
-          <a:bodyPr wrap="square" anchor="ctr" lIns="0" rIns="0" tIns="0" bIns="0">
-            <a:spAutoFit/>
-          </a:bodyPr>
-          <a:lstStyle/>
-          <a:p>
-            <a:pPr algn="l"/>
-            <a:r>
-              <a:rPr sz="750" b="0">
-                <a:solidFill>
-                  <a:srgbClr val="808080"/>
-                </a:solidFill>
-                <a:latin typeface="メイリオ"/>
-                <a:ea typeface="メイリオ"/>
-                <a:cs typeface="メイリオ"/>
-              </a:rPr>
-              <a:t>出典：https://workers-hub.box.com/s/mo3y54qld9vj4kung0c4040z41mfhoip</a:t>
-            </a:r>
-          </a:p>
-        </p:txBody>
-      </p:sp>
-    </p:spTree>
-    <p:extLst>
-      <p:ext uri="{BB962C8B-B14F-4D97-AF65-F5344CB8AC3E}">
-        <p14:creationId xmlns:p14="http://schemas.microsoft.com/office/powerpoint/2010/main" val="2634601906"/>
       </p:ext>
     </p:extLst>
   </p:cSld>

--- a/LINEOA媒体最新情報_2026年9月トレンドレポート.pptx
+++ b/LINEOA媒体最新情報_2026年9月トレンドレポート.pptx
@@ -6309,7 +6309,7 @@
                 <a:ea typeface="メイリオ"/>
                 <a:cs typeface="メイリオ"/>
               </a:rPr>
-              <a:t>・サジェスト面での無料スタンプ表示ユーザー条件を緩和し全ユーザーに表示されるよう変更</a:t>
+              <a:t>・サジェスト面（ユーザーの入力内容に応じてスタンプを提案する機能）での無料スタンプ表示ユーザー条件を緩和</a:t>
             </a:r>
           </a:p>
           <a:p>
@@ -6330,159 +6330,9 @@
                 <a:ea typeface="メイリオ"/>
                 <a:cs typeface="メイリオ"/>
               </a:rPr>
-              <a:t>・配信中の案件を含む全案件に自動適用（広告主・案件側の対応は不要）</a:t>
-            </a:r>
-          </a:p>
-        </p:txBody>
-      </p:sp>
-      <p:sp>
-        <p:nvSpPr>
-          <p:cNvPr id="9" name="Rectangle 8"/>
-          <p:cNvSpPr/>
-          <p:nvPr/>
-        </p:nvSpPr>
-        <p:spPr>
-          <a:xfrm>
-            <a:off x="5097780" y="1325880"/>
-            <a:ext cx="4347972" cy="2331720"/>
-          </a:xfrm>
-          <a:prstGeom prst="rect">
-            <a:avLst/>
-          </a:prstGeom>
-          <a:solidFill>
-            <a:srgbClr val="FFFFFF"/>
-          </a:solidFill>
-          <a:ln w="9525">
-            <a:solidFill>
-              <a:srgbClr val="D9D9D9"/>
-            </a:solidFill>
-          </a:ln>
-          <a:effectLst/>
-        </p:spPr>
-        <p:style>
-          <a:lnRef idx="1">
-            <a:schemeClr val="accent1"/>
-          </a:lnRef>
-          <a:fillRef idx="3">
-            <a:schemeClr val="accent1"/>
-          </a:fillRef>
-          <a:effectRef idx="2">
-            <a:schemeClr val="accent1"/>
-          </a:effectRef>
-          <a:fontRef idx="minor">
-            <a:schemeClr val="lt1"/>
-          </a:fontRef>
-        </p:style>
-        <p:txBody>
-          <a:bodyPr rtlCol="0" anchor="ctr"/>
-          <a:lstStyle/>
-          <a:p>
-            <a:pPr algn="ctr"/>
-          </a:p>
-        </p:txBody>
-      </p:sp>
-      <p:sp>
-        <p:nvSpPr>
-          <p:cNvPr id="10" name="Rectangle 9"/>
-          <p:cNvSpPr/>
-          <p:nvPr/>
-        </p:nvSpPr>
-        <p:spPr>
-          <a:xfrm>
-            <a:off x="5097780" y="1325880"/>
-            <a:ext cx="4347972" cy="310896"/>
-          </a:xfrm>
-          <a:prstGeom prst="rect">
-            <a:avLst/>
-          </a:prstGeom>
-          <a:solidFill>
-            <a:srgbClr val="10253F"/>
-          </a:solidFill>
-          <a:ln>
-            <a:noFill/>
-          </a:ln>
-          <a:effectLst/>
-        </p:spPr>
-        <p:style>
-          <a:lnRef idx="1">
-            <a:schemeClr val="accent1"/>
-          </a:lnRef>
-          <a:fillRef idx="3">
-            <a:schemeClr val="accent1"/>
-          </a:fillRef>
-          <a:effectRef idx="2">
-            <a:schemeClr val="accent1"/>
-          </a:effectRef>
-          <a:fontRef idx="minor">
-            <a:schemeClr val="lt1"/>
-          </a:fontRef>
-        </p:style>
-        <p:txBody>
-          <a:bodyPr rtlCol="0" anchor="ctr"/>
-          <a:lstStyle/>
-          <a:p>
-            <a:pPr algn="ctr"/>
-          </a:p>
-        </p:txBody>
-      </p:sp>
-      <p:sp>
-        <p:nvSpPr>
-          <p:cNvPr id="11" name="TextBox 10"/>
-          <p:cNvSpPr txBox="1"/>
-          <p:nvPr/>
-        </p:nvSpPr>
-        <p:spPr>
-          <a:xfrm>
-            <a:off x="5097780" y="1325880"/>
-            <a:ext cx="4347972" cy="310896"/>
-          </a:xfrm>
-          <a:prstGeom prst="rect">
-            <a:avLst/>
-          </a:prstGeom>
-          <a:noFill/>
-        </p:spPr>
-        <p:txBody>
-          <a:bodyPr wrap="square" anchor="ctr" lIns="0" rIns="0" tIns="0" bIns="0">
-            <a:spAutoFit/>
-          </a:bodyPr>
-          <a:lstStyle/>
-          <a:p>
-            <a:pPr algn="ctr"/>
-            <a:r>
-              <a:rPr sz="1050" b="1">
-                <a:solidFill>
-                  <a:srgbClr val="FFFFFF"/>
-                </a:solidFill>
-                <a:latin typeface="メイリオ"/>
-                <a:ea typeface="メイリオ"/>
-                <a:cs typeface="メイリオ"/>
-              </a:rPr>
-              <a:t>料金体系・出稿条件</a:t>
-            </a:r>
-          </a:p>
-        </p:txBody>
-      </p:sp>
-      <p:sp>
-        <p:nvSpPr>
-          <p:cNvPr id="12" name="TextBox 11"/>
-          <p:cNvSpPr txBox="1"/>
-          <p:nvPr/>
-        </p:nvSpPr>
-        <p:spPr>
-          <a:xfrm>
-            <a:off x="5262372" y="1728216"/>
-            <a:ext cx="4018788" cy="1837944"/>
-          </a:xfrm>
-          <a:prstGeom prst="rect">
-            <a:avLst/>
-          </a:prstGeom>
-          <a:noFill/>
-        </p:spPr>
-        <p:txBody>
-          <a:bodyPr wrap="square" lIns="0" rIns="0" tIns="0" bIns="0">
-            <a:spAutoFit/>
-          </a:bodyPr>
-          <a:lstStyle/>
+              <a:t>・AS-IS：一部のユーザーにのみ表示 → TO-BE：すべてのユーザーに表示（これまで対象外だった層にもリーチ可能）</a:t>
+            </a:r>
+          </a:p>
           <a:p>
             <a:pPr>
               <a:lnSpc>
@@ -6501,20 +6351,20 @@
                 <a:ea typeface="メイリオ"/>
                 <a:cs typeface="メイリオ"/>
               </a:rPr>
-              <a:t>・追加費用なし（自動適用）</a:t>
-            </a:r>
-          </a:p>
-        </p:txBody>
-      </p:sp>
-      <p:sp>
-        <p:nvSpPr>
-          <p:cNvPr id="13" name="Rectangle 12"/>
+              <a:t>・配信中の案件を含む全案件に自動適用（広告主・案件側の対応は不要）</a:t>
+            </a:r>
+          </a:p>
+        </p:txBody>
+      </p:sp>
+      <p:sp>
+        <p:nvSpPr>
+          <p:cNvPr id="9" name="Rectangle 8"/>
           <p:cNvSpPr/>
           <p:nvPr/>
         </p:nvSpPr>
         <p:spPr>
           <a:xfrm>
-            <a:off x="566928" y="3794760"/>
+            <a:off x="5097780" y="1325880"/>
             <a:ext cx="4347972" cy="2331720"/>
           </a:xfrm>
           <a:prstGeom prst="rect">
@@ -6554,13 +6404,13 @@
       </p:sp>
       <p:sp>
         <p:nvSpPr>
-          <p:cNvPr id="14" name="Rectangle 13"/>
+          <p:cNvPr id="10" name="Rectangle 9"/>
           <p:cNvSpPr/>
           <p:nvPr/>
         </p:nvSpPr>
         <p:spPr>
           <a:xfrm>
-            <a:off x="566928" y="3794760"/>
+            <a:off x="5097780" y="1325880"/>
             <a:ext cx="4347972" cy="310896"/>
           </a:xfrm>
           <a:prstGeom prst="rect">
@@ -6598,13 +6448,13 @@
       </p:sp>
       <p:sp>
         <p:nvSpPr>
-          <p:cNvPr id="15" name="TextBox 14"/>
+          <p:cNvPr id="11" name="TextBox 10"/>
           <p:cNvSpPr txBox="1"/>
           <p:nvPr/>
         </p:nvSpPr>
         <p:spPr>
           <a:xfrm>
-            <a:off x="566928" y="3794760"/>
+            <a:off x="5097780" y="1325880"/>
             <a:ext cx="4347972" cy="310896"/>
           </a:xfrm>
           <a:prstGeom prst="rect">
@@ -6628,20 +6478,20 @@
                 <a:ea typeface="メイリオ"/>
                 <a:cs typeface="メイリオ"/>
               </a:rPr>
-              <a:t>スケジュール・導入フロー</a:t>
-            </a:r>
-          </a:p>
-        </p:txBody>
-      </p:sp>
-      <p:sp>
-        <p:nvSpPr>
-          <p:cNvPr id="16" name="TextBox 15"/>
+              <a:t>料金体系・出稿条件</a:t>
+            </a:r>
+          </a:p>
+        </p:txBody>
+      </p:sp>
+      <p:sp>
+        <p:nvSpPr>
+          <p:cNvPr id="12" name="TextBox 11"/>
           <p:cNvSpPr txBox="1"/>
           <p:nvPr/>
         </p:nvSpPr>
         <p:spPr>
           <a:xfrm>
-            <a:off x="731520" y="4197096"/>
+            <a:off x="5262372" y="1728216"/>
             <a:ext cx="4018788" cy="1837944"/>
           </a:xfrm>
           <a:prstGeom prst="rect">
@@ -6672,20 +6522,20 @@
                 <a:ea typeface="メイリオ"/>
                 <a:cs typeface="メイリオ"/>
               </a:rPr>
-              <a:t>・リリース日：2026年8月28日（金）</a:t>
-            </a:r>
-          </a:p>
-        </p:txBody>
-      </p:sp>
-      <p:sp>
-        <p:nvSpPr>
-          <p:cNvPr id="17" name="Rectangle 16"/>
+              <a:t>・追加費用なし（自動適用）</a:t>
+            </a:r>
+          </a:p>
+        </p:txBody>
+      </p:sp>
+      <p:sp>
+        <p:nvSpPr>
+          <p:cNvPr id="13" name="Rectangle 12"/>
           <p:cNvSpPr/>
           <p:nvPr/>
         </p:nvSpPr>
         <p:spPr>
           <a:xfrm>
-            <a:off x="5097780" y="3794760"/>
+            <a:off x="566928" y="3794760"/>
             <a:ext cx="4347972" cy="2331720"/>
           </a:xfrm>
           <a:prstGeom prst="rect">
@@ -6725,13 +6575,13 @@
       </p:sp>
       <p:sp>
         <p:nvSpPr>
-          <p:cNvPr id="18" name="Rectangle 17"/>
+          <p:cNvPr id="14" name="Rectangle 13"/>
           <p:cNvSpPr/>
           <p:nvPr/>
         </p:nvSpPr>
         <p:spPr>
           <a:xfrm>
-            <a:off x="5097780" y="3794760"/>
+            <a:off x="566928" y="3794760"/>
             <a:ext cx="4347972" cy="310896"/>
           </a:xfrm>
           <a:prstGeom prst="rect">
@@ -6769,13 +6619,13 @@
       </p:sp>
       <p:sp>
         <p:nvSpPr>
-          <p:cNvPr id="19" name="TextBox 18"/>
+          <p:cNvPr id="15" name="TextBox 14"/>
           <p:cNvSpPr txBox="1"/>
           <p:nvPr/>
         </p:nvSpPr>
         <p:spPr>
           <a:xfrm>
-            <a:off x="5097780" y="3794760"/>
+            <a:off x="566928" y="3794760"/>
             <a:ext cx="4347972" cy="310896"/>
           </a:xfrm>
           <a:prstGeom prst="rect">
@@ -6799,20 +6649,20 @@
                 <a:ea typeface="メイリオ"/>
                 <a:cs typeface="メイリオ"/>
               </a:rPr>
-              <a:t>注意点・影響</a:t>
-            </a:r>
-          </a:p>
-        </p:txBody>
-      </p:sp>
-      <p:sp>
-        <p:nvSpPr>
-          <p:cNvPr id="20" name="TextBox 19"/>
+              <a:t>スケジュール・導入フロー</a:t>
+            </a:r>
+          </a:p>
+        </p:txBody>
+      </p:sp>
+      <p:sp>
+        <p:nvSpPr>
+          <p:cNvPr id="16" name="TextBox 15"/>
           <p:cNvSpPr txBox="1"/>
           <p:nvPr/>
         </p:nvSpPr>
         <p:spPr>
           <a:xfrm>
-            <a:off x="5262372" y="4197096"/>
+            <a:off x="731520" y="4197096"/>
             <a:ext cx="4018788" cy="1837944"/>
           </a:xfrm>
           <a:prstGeom prst="rect">
@@ -6843,20 +6693,170 @@
                 <a:ea typeface="メイリオ"/>
                 <a:cs typeface="メイリオ"/>
               </a:rPr>
-              <a:t>・A/Bテスト結果：1案件あたり平均DL数+5.63%増</a:t>
-            </a:r>
-          </a:p>
+              <a:t>・適用開始日：2026年8月28日（金）</a:t>
+            </a:r>
+          </a:p>
+        </p:txBody>
+      </p:sp>
+      <p:sp>
+        <p:nvSpPr>
+          <p:cNvPr id="17" name="Rectangle 16"/>
+          <p:cNvSpPr/>
+          <p:nvPr/>
+        </p:nvSpPr>
+        <p:spPr>
+          <a:xfrm>
+            <a:off x="5097780" y="3794760"/>
+            <a:ext cx="4347972" cy="2331720"/>
+          </a:xfrm>
+          <a:prstGeom prst="rect">
+            <a:avLst/>
+          </a:prstGeom>
+          <a:solidFill>
+            <a:srgbClr val="FFFFFF"/>
+          </a:solidFill>
+          <a:ln w="9525">
+            <a:solidFill>
+              <a:srgbClr val="D9D9D9"/>
+            </a:solidFill>
+          </a:ln>
+          <a:effectLst/>
+        </p:spPr>
+        <p:style>
+          <a:lnRef idx="1">
+            <a:schemeClr val="accent1"/>
+          </a:lnRef>
+          <a:fillRef idx="3">
+            <a:schemeClr val="accent1"/>
+          </a:fillRef>
+          <a:effectRef idx="2">
+            <a:schemeClr val="accent1"/>
+          </a:effectRef>
+          <a:fontRef idx="minor">
+            <a:schemeClr val="lt1"/>
+          </a:fontRef>
+        </p:style>
+        <p:txBody>
+          <a:bodyPr rtlCol="0" anchor="ctr"/>
+          <a:lstStyle/>
+          <a:p>
+            <a:pPr algn="ctr"/>
+          </a:p>
+        </p:txBody>
+      </p:sp>
+      <p:sp>
+        <p:nvSpPr>
+          <p:cNvPr id="18" name="Rectangle 17"/>
+          <p:cNvSpPr/>
+          <p:nvPr/>
+        </p:nvSpPr>
+        <p:spPr>
+          <a:xfrm>
+            <a:off x="5097780" y="3794760"/>
+            <a:ext cx="4347972" cy="310896"/>
+          </a:xfrm>
+          <a:prstGeom prst="rect">
+            <a:avLst/>
+          </a:prstGeom>
+          <a:solidFill>
+            <a:srgbClr val="10253F"/>
+          </a:solidFill>
+          <a:ln>
+            <a:noFill/>
+          </a:ln>
+          <a:effectLst/>
+        </p:spPr>
+        <p:style>
+          <a:lnRef idx="1">
+            <a:schemeClr val="accent1"/>
+          </a:lnRef>
+          <a:fillRef idx="3">
+            <a:schemeClr val="accent1"/>
+          </a:fillRef>
+          <a:effectRef idx="2">
+            <a:schemeClr val="accent1"/>
+          </a:effectRef>
+          <a:fontRef idx="minor">
+            <a:schemeClr val="lt1"/>
+          </a:fontRef>
+        </p:style>
+        <p:txBody>
+          <a:bodyPr rtlCol="0" anchor="ctr"/>
+          <a:lstStyle/>
+          <a:p>
+            <a:pPr algn="ctr"/>
+          </a:p>
+        </p:txBody>
+      </p:sp>
+      <p:sp>
+        <p:nvSpPr>
+          <p:cNvPr id="19" name="TextBox 18"/>
+          <p:cNvSpPr txBox="1"/>
+          <p:nvPr/>
+        </p:nvSpPr>
+        <p:spPr>
+          <a:xfrm>
+            <a:off x="5097780" y="3794760"/>
+            <a:ext cx="4347972" cy="310896"/>
+          </a:xfrm>
+          <a:prstGeom prst="rect">
+            <a:avLst/>
+          </a:prstGeom>
+          <a:noFill/>
+        </p:spPr>
+        <p:txBody>
+          <a:bodyPr wrap="square" anchor="ctr" lIns="0" rIns="0" tIns="0" bIns="0">
+            <a:spAutoFit/>
+          </a:bodyPr>
+          <a:lstStyle/>
+          <a:p>
+            <a:pPr algn="ctr"/>
+            <a:r>
+              <a:rPr sz="1050" b="1">
+                <a:solidFill>
+                  <a:srgbClr val="FFFFFF"/>
+                </a:solidFill>
+                <a:latin typeface="メイリオ"/>
+                <a:ea typeface="メイリオ"/>
+                <a:cs typeface="メイリオ"/>
+              </a:rPr>
+              <a:t>注意点・影響</a:t>
+            </a:r>
+          </a:p>
+        </p:txBody>
+      </p:sp>
+      <p:sp>
+        <p:nvSpPr>
+          <p:cNvPr id="20" name="TextBox 19"/>
+          <p:cNvSpPr txBox="1"/>
+          <p:nvPr/>
+        </p:nvSpPr>
+        <p:spPr>
+          <a:xfrm>
+            <a:off x="5262372" y="4197096"/>
+            <a:ext cx="4018788" cy="1837944"/>
+          </a:xfrm>
+          <a:prstGeom prst="rect">
+            <a:avLst/>
+          </a:prstGeom>
+          <a:noFill/>
+        </p:spPr>
+        <p:txBody>
+          <a:bodyPr wrap="square" lIns="0" rIns="0" tIns="0" bIns="0">
+            <a:spAutoFit/>
+          </a:bodyPr>
+          <a:lstStyle/>
           <a:p>
             <a:pPr>
               <a:lnSpc>
-                <a:spcPct val="120000"/>
+                <a:spcPct val="115000"/>
               </a:lnSpc>
               <a:spcAft>
                 <a:spcPts val="300"/>
               </a:spcAft>
             </a:pPr>
             <a:r>
-              <a:rPr sz="1000">
+              <a:rPr sz="900">
                 <a:solidFill>
                   <a:srgbClr val="343434"/>
                 </a:solidFill>
@@ -6864,20 +6864,83 @@
                 <a:ea typeface="メイリオ"/>
                 <a:cs typeface="メイリオ"/>
               </a:rPr>
-              <a:t>・直近18ヶ月DL履歴のないユーザーでも約2倍のDL、普段DLしない層への到達も改善</a:t>
+              <a:t>・DL数+5.63%増（全ダウンロード経路合計、現行条件比較）。利用頻度によらず全セグメントで増加</a:t>
             </a:r>
           </a:p>
           <a:p>
             <a:pPr>
               <a:lnSpc>
-                <a:spcPct val="120000"/>
+                <a:spcPct val="115000"/>
               </a:lnSpc>
               <a:spcAft>
                 <a:spcPts val="300"/>
               </a:spcAft>
             </a:pPr>
             <a:r>
-              <a:rPr sz="1000">
+              <a:rPr sz="900">
+                <a:solidFill>
+                  <a:srgbClr val="343434"/>
+                </a:solidFill>
+                <a:latin typeface="メイリオ"/>
+                <a:ea typeface="メイリオ"/>
+                <a:cs typeface="メイリオ"/>
+              </a:rPr>
+              <a:t>・サジェスト経由の友だち追加率74.6%（プロモーションスタンプ平均約60%を上回る）</a:t>
+            </a:r>
+          </a:p>
+          <a:p>
+            <a:pPr>
+              <a:lnSpc>
+                <a:spcPct val="115000"/>
+              </a:lnSpc>
+              <a:spcAft>
+                <a:spcPts val="300"/>
+              </a:spcAft>
+            </a:pPr>
+            <a:r>
+              <a:rPr sz="900">
+                <a:solidFill>
+                  <a:srgbClr val="343434"/>
+                </a:solidFill>
+                <a:latin typeface="メイリオ"/>
+                <a:ea typeface="メイリオ"/>
+                <a:cs typeface="メイリオ"/>
+              </a:rPr>
+              <a:t>・サジェスト経由の当日ブロック率9.53%（プロモーションスタンプ平均約22%の半分以下）</a:t>
+            </a:r>
+          </a:p>
+          <a:p>
+            <a:pPr>
+              <a:lnSpc>
+                <a:spcPct val="115000"/>
+              </a:lnSpc>
+              <a:spcAft>
+                <a:spcPts val="300"/>
+              </a:spcAft>
+            </a:pPr>
+            <a:r>
+              <a:rPr sz="900">
+                <a:solidFill>
+                  <a:srgbClr val="343434"/>
+                </a:solidFill>
+                <a:latin typeface="メイリオ"/>
+                <a:ea typeface="メイリオ"/>
+                <a:cs typeface="メイリオ"/>
+              </a:rPr>
+              <a:t>・改善倍率は無料スタンプの最新DL日が古い層ほど高く、過去6〜18ヶ月DLなし層で約3.0倍</a:t>
+            </a:r>
+          </a:p>
+          <a:p>
+            <a:pPr>
+              <a:lnSpc>
+                <a:spcPct val="115000"/>
+              </a:lnSpc>
+              <a:spcAft>
+                <a:spcPts val="300"/>
+              </a:spcAft>
+            </a:pPr>
+            <a:r>
+              <a:rPr sz="900">
                 <a:solidFill>
                   <a:srgbClr val="343434"/>
                 </a:solidFill>
@@ -7828,6 +7891,27 @@
                 <a:cs typeface="メイリオ"/>
               </a:rPr>
               <a:t>・紐づけ条件：ミニアプリと同一プロバイダーの公式アカウントであること／操作者がMessaging APIのadmin権限を保有していること。最大1,000件まで紐づけ可</a:t>
+            </a:r>
+          </a:p>
+          <a:p>
+            <a:pPr>
+              <a:lnSpc>
+                <a:spcPct val="120000"/>
+              </a:lnSpc>
+              <a:spcAft>
+                <a:spcPts val="300"/>
+              </a:spcAft>
+            </a:pPr>
+            <a:r>
+              <a:rPr sz="1000">
+                <a:solidFill>
+                  <a:srgbClr val="343434"/>
+                </a:solidFill>
+                <a:latin typeface="メイリオ"/>
+                <a:ea typeface="メイリオ"/>
+                <a:cs typeface="メイリオ"/>
+              </a:rPr>
+              <a:t>・1回の友だち追加誘導で選べるのは1アカウントのみ（同時に複数アカウントへは登録不可）。流入経路ごとにどのアカウントを出すかを判別する</a:t>
             </a:r>
           </a:p>
         </p:txBody>

--- a/LINEOA媒体最新情報_2026年9月トレンドレポート.pptx
+++ b/LINEOA媒体最新情報_2026年9月トレンドレポート.pptx
@@ -4269,14 +4269,14 @@
           <a:p>
             <a:pPr>
               <a:lnSpc>
-                <a:spcPct val="120000"/>
+                <a:spcPct val="115000"/>
               </a:lnSpc>
               <a:spcAft>
                 <a:spcPts val="300"/>
               </a:spcAft>
             </a:pPr>
             <a:r>
-              <a:rPr sz="1000">
+              <a:rPr sz="1100">
                 <a:solidFill>
                   <a:srgbClr val="343434"/>
                 </a:solidFill>
@@ -4290,14 +4290,14 @@
           <a:p>
             <a:pPr>
               <a:lnSpc>
-                <a:spcPct val="120000"/>
+                <a:spcPct val="115000"/>
               </a:lnSpc>
               <a:spcAft>
                 <a:spcPts val="300"/>
               </a:spcAft>
             </a:pPr>
             <a:r>
-              <a:rPr sz="1000">
+              <a:rPr sz="1100">
                 <a:solidFill>
                   <a:srgbClr val="343434"/>
                 </a:solidFill>
@@ -4311,14 +4311,14 @@
           <a:p>
             <a:pPr>
               <a:lnSpc>
-                <a:spcPct val="120000"/>
+                <a:spcPct val="115000"/>
               </a:lnSpc>
               <a:spcAft>
                 <a:spcPts val="300"/>
               </a:spcAft>
             </a:pPr>
             <a:r>
-              <a:rPr sz="1000">
+              <a:rPr sz="1100">
                 <a:solidFill>
                   <a:srgbClr val="343434"/>
                 </a:solidFill>
@@ -4332,14 +4332,14 @@
           <a:p>
             <a:pPr>
               <a:lnSpc>
-                <a:spcPct val="120000"/>
+                <a:spcPct val="115000"/>
               </a:lnSpc>
               <a:spcAft>
                 <a:spcPts val="300"/>
               </a:spcAft>
             </a:pPr>
             <a:r>
-              <a:rPr sz="1000">
+              <a:rPr sz="1100">
                 <a:solidFill>
                   <a:srgbClr val="343434"/>
                 </a:solidFill>
@@ -4503,14 +4503,14 @@
           <a:p>
             <a:pPr>
               <a:lnSpc>
-                <a:spcPct val="120000"/>
+                <a:spcPct val="115000"/>
               </a:lnSpc>
               <a:spcAft>
                 <a:spcPts val="300"/>
               </a:spcAft>
             </a:pPr>
             <a:r>
-              <a:rPr sz="1000">
+              <a:rPr sz="1100">
                 <a:solidFill>
                   <a:srgbClr val="343434"/>
                 </a:solidFill>
@@ -4674,14 +4674,14 @@
           <a:p>
             <a:pPr>
               <a:lnSpc>
-                <a:spcPct val="120000"/>
+                <a:spcPct val="115000"/>
               </a:lnSpc>
               <a:spcAft>
                 <a:spcPts val="300"/>
               </a:spcAft>
             </a:pPr>
             <a:r>
-              <a:rPr sz="1000">
+              <a:rPr sz="1100">
                 <a:solidFill>
                   <a:srgbClr val="343434"/>
                 </a:solidFill>
@@ -4695,14 +4695,14 @@
           <a:p>
             <a:pPr>
               <a:lnSpc>
-                <a:spcPct val="120000"/>
+                <a:spcPct val="115000"/>
               </a:lnSpc>
               <a:spcAft>
                 <a:spcPts val="300"/>
               </a:spcAft>
             </a:pPr>
             <a:r>
-              <a:rPr sz="1000">
+              <a:rPr sz="1100">
                 <a:solidFill>
                   <a:srgbClr val="343434"/>
                 </a:solidFill>
@@ -4866,14 +4866,14 @@
           <a:p>
             <a:pPr>
               <a:lnSpc>
-                <a:spcPct val="110000"/>
+                <a:spcPct val="105000"/>
               </a:lnSpc>
               <a:spcAft>
                 <a:spcPts val="300"/>
               </a:spcAft>
             </a:pPr>
             <a:r>
-              <a:rPr sz="850">
+              <a:rPr sz="1000">
                 <a:solidFill>
                   <a:srgbClr val="343434"/>
                 </a:solidFill>
@@ -4887,14 +4887,14 @@
           <a:p>
             <a:pPr>
               <a:lnSpc>
-                <a:spcPct val="110000"/>
+                <a:spcPct val="105000"/>
               </a:lnSpc>
               <a:spcAft>
                 <a:spcPts val="300"/>
               </a:spcAft>
             </a:pPr>
             <a:r>
-              <a:rPr sz="850">
+              <a:rPr sz="1000">
                 <a:solidFill>
                   <a:srgbClr val="343434"/>
                 </a:solidFill>
@@ -4908,14 +4908,14 @@
           <a:p>
             <a:pPr>
               <a:lnSpc>
-                <a:spcPct val="110000"/>
+                <a:spcPct val="105000"/>
               </a:lnSpc>
               <a:spcAft>
                 <a:spcPts val="300"/>
               </a:spcAft>
             </a:pPr>
             <a:r>
-              <a:rPr sz="850">
+              <a:rPr sz="1000">
                 <a:solidFill>
                   <a:srgbClr val="343434"/>
                 </a:solidFill>
@@ -4929,14 +4929,14 @@
           <a:p>
             <a:pPr>
               <a:lnSpc>
-                <a:spcPct val="110000"/>
+                <a:spcPct val="105000"/>
               </a:lnSpc>
               <a:spcAft>
                 <a:spcPts val="300"/>
               </a:spcAft>
             </a:pPr>
             <a:r>
-              <a:rPr sz="850">
+              <a:rPr sz="1000">
                 <a:solidFill>
                   <a:srgbClr val="343434"/>
                 </a:solidFill>
@@ -4950,14 +4950,14 @@
           <a:p>
             <a:pPr>
               <a:lnSpc>
-                <a:spcPct val="110000"/>
+                <a:spcPct val="105000"/>
               </a:lnSpc>
               <a:spcAft>
                 <a:spcPts val="300"/>
               </a:spcAft>
             </a:pPr>
             <a:r>
-              <a:rPr sz="850">
+              <a:rPr sz="1000">
                 <a:solidFill>
                   <a:srgbClr val="343434"/>
                 </a:solidFill>
@@ -4971,14 +4971,14 @@
           <a:p>
             <a:pPr>
               <a:lnSpc>
-                <a:spcPct val="110000"/>
+                <a:spcPct val="105000"/>
               </a:lnSpc>
               <a:spcAft>
                 <a:spcPts val="300"/>
               </a:spcAft>
             </a:pPr>
             <a:r>
-              <a:rPr sz="850">
+              <a:rPr sz="1000">
                 <a:solidFill>
                   <a:srgbClr val="343434"/>
                 </a:solidFill>
@@ -5331,14 +5331,14 @@
           <a:p>
             <a:pPr>
               <a:lnSpc>
-                <a:spcPct val="120000"/>
+                <a:spcPct val="115000"/>
               </a:lnSpc>
               <a:spcAft>
                 <a:spcPts val="300"/>
               </a:spcAft>
             </a:pPr>
             <a:r>
-              <a:rPr sz="1000">
+              <a:rPr sz="1100">
                 <a:solidFill>
                   <a:srgbClr val="343434"/>
                 </a:solidFill>
@@ -5352,14 +5352,14 @@
           <a:p>
             <a:pPr>
               <a:lnSpc>
-                <a:spcPct val="120000"/>
+                <a:spcPct val="115000"/>
               </a:lnSpc>
               <a:spcAft>
                 <a:spcPts val="300"/>
               </a:spcAft>
             </a:pPr>
             <a:r>
-              <a:rPr sz="1000">
+              <a:rPr sz="1100">
                 <a:solidFill>
                   <a:srgbClr val="343434"/>
                 </a:solidFill>
@@ -5523,14 +5523,14 @@
           <a:p>
             <a:pPr>
               <a:lnSpc>
-                <a:spcPct val="120000"/>
+                <a:spcPct val="115000"/>
               </a:lnSpc>
               <a:spcAft>
                 <a:spcPts val="300"/>
               </a:spcAft>
             </a:pPr>
             <a:r>
-              <a:rPr sz="1000">
+              <a:rPr sz="1100">
                 <a:solidFill>
                   <a:srgbClr val="343434"/>
                 </a:solidFill>
@@ -5694,14 +5694,14 @@
           <a:p>
             <a:pPr>
               <a:lnSpc>
-                <a:spcPct val="120000"/>
+                <a:spcPct val="115000"/>
               </a:lnSpc>
               <a:spcAft>
                 <a:spcPts val="300"/>
               </a:spcAft>
             </a:pPr>
             <a:r>
-              <a:rPr sz="1000">
+              <a:rPr sz="1100">
                 <a:solidFill>
                   <a:srgbClr val="343434"/>
                 </a:solidFill>
@@ -5715,14 +5715,14 @@
           <a:p>
             <a:pPr>
               <a:lnSpc>
-                <a:spcPct val="120000"/>
+                <a:spcPct val="115000"/>
               </a:lnSpc>
               <a:spcAft>
                 <a:spcPts val="300"/>
               </a:spcAft>
             </a:pPr>
             <a:r>
-              <a:rPr sz="1000">
+              <a:rPr sz="1100">
                 <a:solidFill>
                   <a:srgbClr val="343434"/>
                 </a:solidFill>
@@ -5886,14 +5886,14 @@
           <a:p>
             <a:pPr>
               <a:lnSpc>
-                <a:spcPct val="120000"/>
+                <a:spcPct val="115000"/>
               </a:lnSpc>
               <a:spcAft>
                 <a:spcPts val="300"/>
               </a:spcAft>
             </a:pPr>
             <a:r>
-              <a:rPr sz="1000">
+              <a:rPr sz="1100">
                 <a:solidFill>
                   <a:srgbClr val="343434"/>
                 </a:solidFill>
@@ -5907,14 +5907,14 @@
           <a:p>
             <a:pPr>
               <a:lnSpc>
-                <a:spcPct val="120000"/>
+                <a:spcPct val="115000"/>
               </a:lnSpc>
               <a:spcAft>
                 <a:spcPts val="300"/>
               </a:spcAft>
             </a:pPr>
             <a:r>
-              <a:rPr sz="1000">
+              <a:rPr sz="1100">
                 <a:solidFill>
                   <a:srgbClr val="343434"/>
                 </a:solidFill>
@@ -5928,14 +5928,14 @@
           <a:p>
             <a:pPr>
               <a:lnSpc>
-                <a:spcPct val="120000"/>
+                <a:spcPct val="115000"/>
               </a:lnSpc>
               <a:spcAft>
                 <a:spcPts val="300"/>
               </a:spcAft>
             </a:pPr>
             <a:r>
-              <a:rPr sz="1000">
+              <a:rPr sz="1100">
                 <a:solidFill>
                   <a:srgbClr val="343434"/>
                 </a:solidFill>
@@ -6294,14 +6294,14 @@
           <a:p>
             <a:pPr>
               <a:lnSpc>
-                <a:spcPct val="120000"/>
+                <a:spcPct val="115000"/>
               </a:lnSpc>
               <a:spcAft>
                 <a:spcPts val="300"/>
               </a:spcAft>
             </a:pPr>
             <a:r>
-              <a:rPr sz="1000">
+              <a:rPr sz="1100">
                 <a:solidFill>
                   <a:srgbClr val="343434"/>
                 </a:solidFill>
@@ -6312,540 +6312,6 @@
               <a:t>・サジェスト面（ユーザーの入力内容に応じてスタンプを提案する機能）での無料スタンプ表示ユーザー条件を緩和</a:t>
             </a:r>
           </a:p>
-          <a:p>
-            <a:pPr>
-              <a:lnSpc>
-                <a:spcPct val="120000"/>
-              </a:lnSpc>
-              <a:spcAft>
-                <a:spcPts val="300"/>
-              </a:spcAft>
-            </a:pPr>
-            <a:r>
-              <a:rPr sz="1000">
-                <a:solidFill>
-                  <a:srgbClr val="343434"/>
-                </a:solidFill>
-                <a:latin typeface="メイリオ"/>
-                <a:ea typeface="メイリオ"/>
-                <a:cs typeface="メイリオ"/>
-              </a:rPr>
-              <a:t>・AS-IS：一部のユーザーにのみ表示 → TO-BE：すべてのユーザーに表示（これまで対象外だった層にもリーチ可能）</a:t>
-            </a:r>
-          </a:p>
-          <a:p>
-            <a:pPr>
-              <a:lnSpc>
-                <a:spcPct val="120000"/>
-              </a:lnSpc>
-              <a:spcAft>
-                <a:spcPts val="300"/>
-              </a:spcAft>
-            </a:pPr>
-            <a:r>
-              <a:rPr sz="1000">
-                <a:solidFill>
-                  <a:srgbClr val="343434"/>
-                </a:solidFill>
-                <a:latin typeface="メイリオ"/>
-                <a:ea typeface="メイリオ"/>
-                <a:cs typeface="メイリオ"/>
-              </a:rPr>
-              <a:t>・配信中の案件を含む全案件に自動適用（広告主・案件側の対応は不要）</a:t>
-            </a:r>
-          </a:p>
-        </p:txBody>
-      </p:sp>
-      <p:sp>
-        <p:nvSpPr>
-          <p:cNvPr id="9" name="Rectangle 8"/>
-          <p:cNvSpPr/>
-          <p:nvPr/>
-        </p:nvSpPr>
-        <p:spPr>
-          <a:xfrm>
-            <a:off x="5097780" y="1325880"/>
-            <a:ext cx="4347972" cy="2331720"/>
-          </a:xfrm>
-          <a:prstGeom prst="rect">
-            <a:avLst/>
-          </a:prstGeom>
-          <a:solidFill>
-            <a:srgbClr val="FFFFFF"/>
-          </a:solidFill>
-          <a:ln w="9525">
-            <a:solidFill>
-              <a:srgbClr val="D9D9D9"/>
-            </a:solidFill>
-          </a:ln>
-          <a:effectLst/>
-        </p:spPr>
-        <p:style>
-          <a:lnRef idx="1">
-            <a:schemeClr val="accent1"/>
-          </a:lnRef>
-          <a:fillRef idx="3">
-            <a:schemeClr val="accent1"/>
-          </a:fillRef>
-          <a:effectRef idx="2">
-            <a:schemeClr val="accent1"/>
-          </a:effectRef>
-          <a:fontRef idx="minor">
-            <a:schemeClr val="lt1"/>
-          </a:fontRef>
-        </p:style>
-        <p:txBody>
-          <a:bodyPr rtlCol="0" anchor="ctr"/>
-          <a:lstStyle/>
-          <a:p>
-            <a:pPr algn="ctr"/>
-          </a:p>
-        </p:txBody>
-      </p:sp>
-      <p:sp>
-        <p:nvSpPr>
-          <p:cNvPr id="10" name="Rectangle 9"/>
-          <p:cNvSpPr/>
-          <p:nvPr/>
-        </p:nvSpPr>
-        <p:spPr>
-          <a:xfrm>
-            <a:off x="5097780" y="1325880"/>
-            <a:ext cx="4347972" cy="310896"/>
-          </a:xfrm>
-          <a:prstGeom prst="rect">
-            <a:avLst/>
-          </a:prstGeom>
-          <a:solidFill>
-            <a:srgbClr val="10253F"/>
-          </a:solidFill>
-          <a:ln>
-            <a:noFill/>
-          </a:ln>
-          <a:effectLst/>
-        </p:spPr>
-        <p:style>
-          <a:lnRef idx="1">
-            <a:schemeClr val="accent1"/>
-          </a:lnRef>
-          <a:fillRef idx="3">
-            <a:schemeClr val="accent1"/>
-          </a:fillRef>
-          <a:effectRef idx="2">
-            <a:schemeClr val="accent1"/>
-          </a:effectRef>
-          <a:fontRef idx="minor">
-            <a:schemeClr val="lt1"/>
-          </a:fontRef>
-        </p:style>
-        <p:txBody>
-          <a:bodyPr rtlCol="0" anchor="ctr"/>
-          <a:lstStyle/>
-          <a:p>
-            <a:pPr algn="ctr"/>
-          </a:p>
-        </p:txBody>
-      </p:sp>
-      <p:sp>
-        <p:nvSpPr>
-          <p:cNvPr id="11" name="TextBox 10"/>
-          <p:cNvSpPr txBox="1"/>
-          <p:nvPr/>
-        </p:nvSpPr>
-        <p:spPr>
-          <a:xfrm>
-            <a:off x="5097780" y="1325880"/>
-            <a:ext cx="4347972" cy="310896"/>
-          </a:xfrm>
-          <a:prstGeom prst="rect">
-            <a:avLst/>
-          </a:prstGeom>
-          <a:noFill/>
-        </p:spPr>
-        <p:txBody>
-          <a:bodyPr wrap="square" anchor="ctr" lIns="0" rIns="0" tIns="0" bIns="0">
-            <a:spAutoFit/>
-          </a:bodyPr>
-          <a:lstStyle/>
-          <a:p>
-            <a:pPr algn="ctr"/>
-            <a:r>
-              <a:rPr sz="1050" b="1">
-                <a:solidFill>
-                  <a:srgbClr val="FFFFFF"/>
-                </a:solidFill>
-                <a:latin typeface="メイリオ"/>
-                <a:ea typeface="メイリオ"/>
-                <a:cs typeface="メイリオ"/>
-              </a:rPr>
-              <a:t>料金体系・出稿条件</a:t>
-            </a:r>
-          </a:p>
-        </p:txBody>
-      </p:sp>
-      <p:sp>
-        <p:nvSpPr>
-          <p:cNvPr id="12" name="TextBox 11"/>
-          <p:cNvSpPr txBox="1"/>
-          <p:nvPr/>
-        </p:nvSpPr>
-        <p:spPr>
-          <a:xfrm>
-            <a:off x="5262372" y="1728216"/>
-            <a:ext cx="4018788" cy="1837944"/>
-          </a:xfrm>
-          <a:prstGeom prst="rect">
-            <a:avLst/>
-          </a:prstGeom>
-          <a:noFill/>
-        </p:spPr>
-        <p:txBody>
-          <a:bodyPr wrap="square" lIns="0" rIns="0" tIns="0" bIns="0">
-            <a:spAutoFit/>
-          </a:bodyPr>
-          <a:lstStyle/>
-          <a:p>
-            <a:pPr>
-              <a:lnSpc>
-                <a:spcPct val="120000"/>
-              </a:lnSpc>
-              <a:spcAft>
-                <a:spcPts val="300"/>
-              </a:spcAft>
-            </a:pPr>
-            <a:r>
-              <a:rPr sz="1000">
-                <a:solidFill>
-                  <a:srgbClr val="343434"/>
-                </a:solidFill>
-                <a:latin typeface="メイリオ"/>
-                <a:ea typeface="メイリオ"/>
-                <a:cs typeface="メイリオ"/>
-              </a:rPr>
-              <a:t>・追加費用なし（自動適用）</a:t>
-            </a:r>
-          </a:p>
-        </p:txBody>
-      </p:sp>
-      <p:sp>
-        <p:nvSpPr>
-          <p:cNvPr id="13" name="Rectangle 12"/>
-          <p:cNvSpPr/>
-          <p:nvPr/>
-        </p:nvSpPr>
-        <p:spPr>
-          <a:xfrm>
-            <a:off x="566928" y="3794760"/>
-            <a:ext cx="4347972" cy="2331720"/>
-          </a:xfrm>
-          <a:prstGeom prst="rect">
-            <a:avLst/>
-          </a:prstGeom>
-          <a:solidFill>
-            <a:srgbClr val="FFFFFF"/>
-          </a:solidFill>
-          <a:ln w="9525">
-            <a:solidFill>
-              <a:srgbClr val="D9D9D9"/>
-            </a:solidFill>
-          </a:ln>
-          <a:effectLst/>
-        </p:spPr>
-        <p:style>
-          <a:lnRef idx="1">
-            <a:schemeClr val="accent1"/>
-          </a:lnRef>
-          <a:fillRef idx="3">
-            <a:schemeClr val="accent1"/>
-          </a:fillRef>
-          <a:effectRef idx="2">
-            <a:schemeClr val="accent1"/>
-          </a:effectRef>
-          <a:fontRef idx="minor">
-            <a:schemeClr val="lt1"/>
-          </a:fontRef>
-        </p:style>
-        <p:txBody>
-          <a:bodyPr rtlCol="0" anchor="ctr"/>
-          <a:lstStyle/>
-          <a:p>
-            <a:pPr algn="ctr"/>
-          </a:p>
-        </p:txBody>
-      </p:sp>
-      <p:sp>
-        <p:nvSpPr>
-          <p:cNvPr id="14" name="Rectangle 13"/>
-          <p:cNvSpPr/>
-          <p:nvPr/>
-        </p:nvSpPr>
-        <p:spPr>
-          <a:xfrm>
-            <a:off x="566928" y="3794760"/>
-            <a:ext cx="4347972" cy="310896"/>
-          </a:xfrm>
-          <a:prstGeom prst="rect">
-            <a:avLst/>
-          </a:prstGeom>
-          <a:solidFill>
-            <a:srgbClr val="10253F"/>
-          </a:solidFill>
-          <a:ln>
-            <a:noFill/>
-          </a:ln>
-          <a:effectLst/>
-        </p:spPr>
-        <p:style>
-          <a:lnRef idx="1">
-            <a:schemeClr val="accent1"/>
-          </a:lnRef>
-          <a:fillRef idx="3">
-            <a:schemeClr val="accent1"/>
-          </a:fillRef>
-          <a:effectRef idx="2">
-            <a:schemeClr val="accent1"/>
-          </a:effectRef>
-          <a:fontRef idx="minor">
-            <a:schemeClr val="lt1"/>
-          </a:fontRef>
-        </p:style>
-        <p:txBody>
-          <a:bodyPr rtlCol="0" anchor="ctr"/>
-          <a:lstStyle/>
-          <a:p>
-            <a:pPr algn="ctr"/>
-          </a:p>
-        </p:txBody>
-      </p:sp>
-      <p:sp>
-        <p:nvSpPr>
-          <p:cNvPr id="15" name="TextBox 14"/>
-          <p:cNvSpPr txBox="1"/>
-          <p:nvPr/>
-        </p:nvSpPr>
-        <p:spPr>
-          <a:xfrm>
-            <a:off x="566928" y="3794760"/>
-            <a:ext cx="4347972" cy="310896"/>
-          </a:xfrm>
-          <a:prstGeom prst="rect">
-            <a:avLst/>
-          </a:prstGeom>
-          <a:noFill/>
-        </p:spPr>
-        <p:txBody>
-          <a:bodyPr wrap="square" anchor="ctr" lIns="0" rIns="0" tIns="0" bIns="0">
-            <a:spAutoFit/>
-          </a:bodyPr>
-          <a:lstStyle/>
-          <a:p>
-            <a:pPr algn="ctr"/>
-            <a:r>
-              <a:rPr sz="1050" b="1">
-                <a:solidFill>
-                  <a:srgbClr val="FFFFFF"/>
-                </a:solidFill>
-                <a:latin typeface="メイリオ"/>
-                <a:ea typeface="メイリオ"/>
-                <a:cs typeface="メイリオ"/>
-              </a:rPr>
-              <a:t>スケジュール・導入フロー</a:t>
-            </a:r>
-          </a:p>
-        </p:txBody>
-      </p:sp>
-      <p:sp>
-        <p:nvSpPr>
-          <p:cNvPr id="16" name="TextBox 15"/>
-          <p:cNvSpPr txBox="1"/>
-          <p:nvPr/>
-        </p:nvSpPr>
-        <p:spPr>
-          <a:xfrm>
-            <a:off x="731520" y="4197096"/>
-            <a:ext cx="4018788" cy="1837944"/>
-          </a:xfrm>
-          <a:prstGeom prst="rect">
-            <a:avLst/>
-          </a:prstGeom>
-          <a:noFill/>
-        </p:spPr>
-        <p:txBody>
-          <a:bodyPr wrap="square" lIns="0" rIns="0" tIns="0" bIns="0">
-            <a:spAutoFit/>
-          </a:bodyPr>
-          <a:lstStyle/>
-          <a:p>
-            <a:pPr>
-              <a:lnSpc>
-                <a:spcPct val="120000"/>
-              </a:lnSpc>
-              <a:spcAft>
-                <a:spcPts val="300"/>
-              </a:spcAft>
-            </a:pPr>
-            <a:r>
-              <a:rPr sz="1000">
-                <a:solidFill>
-                  <a:srgbClr val="343434"/>
-                </a:solidFill>
-                <a:latin typeface="メイリオ"/>
-                <a:ea typeface="メイリオ"/>
-                <a:cs typeface="メイリオ"/>
-              </a:rPr>
-              <a:t>・適用開始日：2026年8月28日（金）</a:t>
-            </a:r>
-          </a:p>
-        </p:txBody>
-      </p:sp>
-      <p:sp>
-        <p:nvSpPr>
-          <p:cNvPr id="17" name="Rectangle 16"/>
-          <p:cNvSpPr/>
-          <p:nvPr/>
-        </p:nvSpPr>
-        <p:spPr>
-          <a:xfrm>
-            <a:off x="5097780" y="3794760"/>
-            <a:ext cx="4347972" cy="2331720"/>
-          </a:xfrm>
-          <a:prstGeom prst="rect">
-            <a:avLst/>
-          </a:prstGeom>
-          <a:solidFill>
-            <a:srgbClr val="FFFFFF"/>
-          </a:solidFill>
-          <a:ln w="9525">
-            <a:solidFill>
-              <a:srgbClr val="D9D9D9"/>
-            </a:solidFill>
-          </a:ln>
-          <a:effectLst/>
-        </p:spPr>
-        <p:style>
-          <a:lnRef idx="1">
-            <a:schemeClr val="accent1"/>
-          </a:lnRef>
-          <a:fillRef idx="3">
-            <a:schemeClr val="accent1"/>
-          </a:fillRef>
-          <a:effectRef idx="2">
-            <a:schemeClr val="accent1"/>
-          </a:effectRef>
-          <a:fontRef idx="minor">
-            <a:schemeClr val="lt1"/>
-          </a:fontRef>
-        </p:style>
-        <p:txBody>
-          <a:bodyPr rtlCol="0" anchor="ctr"/>
-          <a:lstStyle/>
-          <a:p>
-            <a:pPr algn="ctr"/>
-          </a:p>
-        </p:txBody>
-      </p:sp>
-      <p:sp>
-        <p:nvSpPr>
-          <p:cNvPr id="18" name="Rectangle 17"/>
-          <p:cNvSpPr/>
-          <p:nvPr/>
-        </p:nvSpPr>
-        <p:spPr>
-          <a:xfrm>
-            <a:off x="5097780" y="3794760"/>
-            <a:ext cx="4347972" cy="310896"/>
-          </a:xfrm>
-          <a:prstGeom prst="rect">
-            <a:avLst/>
-          </a:prstGeom>
-          <a:solidFill>
-            <a:srgbClr val="10253F"/>
-          </a:solidFill>
-          <a:ln>
-            <a:noFill/>
-          </a:ln>
-          <a:effectLst/>
-        </p:spPr>
-        <p:style>
-          <a:lnRef idx="1">
-            <a:schemeClr val="accent1"/>
-          </a:lnRef>
-          <a:fillRef idx="3">
-            <a:schemeClr val="accent1"/>
-          </a:fillRef>
-          <a:effectRef idx="2">
-            <a:schemeClr val="accent1"/>
-          </a:effectRef>
-          <a:fontRef idx="minor">
-            <a:schemeClr val="lt1"/>
-          </a:fontRef>
-        </p:style>
-        <p:txBody>
-          <a:bodyPr rtlCol="0" anchor="ctr"/>
-          <a:lstStyle/>
-          <a:p>
-            <a:pPr algn="ctr"/>
-          </a:p>
-        </p:txBody>
-      </p:sp>
-      <p:sp>
-        <p:nvSpPr>
-          <p:cNvPr id="19" name="TextBox 18"/>
-          <p:cNvSpPr txBox="1"/>
-          <p:nvPr/>
-        </p:nvSpPr>
-        <p:spPr>
-          <a:xfrm>
-            <a:off x="5097780" y="3794760"/>
-            <a:ext cx="4347972" cy="310896"/>
-          </a:xfrm>
-          <a:prstGeom prst="rect">
-            <a:avLst/>
-          </a:prstGeom>
-          <a:noFill/>
-        </p:spPr>
-        <p:txBody>
-          <a:bodyPr wrap="square" anchor="ctr" lIns="0" rIns="0" tIns="0" bIns="0">
-            <a:spAutoFit/>
-          </a:bodyPr>
-          <a:lstStyle/>
-          <a:p>
-            <a:pPr algn="ctr"/>
-            <a:r>
-              <a:rPr sz="1050" b="1">
-                <a:solidFill>
-                  <a:srgbClr val="FFFFFF"/>
-                </a:solidFill>
-                <a:latin typeface="メイリオ"/>
-                <a:ea typeface="メイリオ"/>
-                <a:cs typeface="メイリオ"/>
-              </a:rPr>
-              <a:t>注意点・影響</a:t>
-            </a:r>
-          </a:p>
-        </p:txBody>
-      </p:sp>
-      <p:sp>
-        <p:nvSpPr>
-          <p:cNvPr id="20" name="TextBox 19"/>
-          <p:cNvSpPr txBox="1"/>
-          <p:nvPr/>
-        </p:nvSpPr>
-        <p:spPr>
-          <a:xfrm>
-            <a:off x="5262372" y="4197096"/>
-            <a:ext cx="4018788" cy="1837944"/>
-          </a:xfrm>
-          <a:prstGeom prst="rect">
-            <a:avLst/>
-          </a:prstGeom>
-          <a:noFill/>
-        </p:spPr>
-        <p:txBody>
-          <a:bodyPr wrap="square" lIns="0" rIns="0" tIns="0" bIns="0">
-            <a:spAutoFit/>
-          </a:bodyPr>
-          <a:lstStyle/>
           <a:p>
             <a:pPr>
               <a:lnSpc>
@@ -6856,7 +6322,7 @@
               </a:spcAft>
             </a:pPr>
             <a:r>
-              <a:rPr sz="900">
+              <a:rPr sz="1100">
                 <a:solidFill>
                   <a:srgbClr val="343434"/>
                 </a:solidFill>
@@ -6864,7 +6330,7 @@
                 <a:ea typeface="メイリオ"/>
                 <a:cs typeface="メイリオ"/>
               </a:rPr>
-              <a:t>・DL数+5.63%増（全ダウンロード経路合計、現行条件比較）。利用頻度によらず全セグメントで増加</a:t>
+              <a:t>・AS-IS：一部のユーザーにのみ表示 → TO-BE：すべてのユーザーに表示（これまで対象外だった層にもリーチ可能）</a:t>
             </a:r>
           </a:p>
           <a:p>
@@ -6877,7 +6343,7 @@
               </a:spcAft>
             </a:pPr>
             <a:r>
-              <a:rPr sz="900">
+              <a:rPr sz="1100">
                 <a:solidFill>
                   <a:srgbClr val="343434"/>
                 </a:solidFill>
@@ -6885,9 +6351,159 @@
                 <a:ea typeface="メイリオ"/>
                 <a:cs typeface="メイリオ"/>
               </a:rPr>
-              <a:t>・サジェスト経由の友だち追加率74.6%（プロモーションスタンプ平均約60%を上回る）</a:t>
-            </a:r>
-          </a:p>
+              <a:t>・配信中の案件を含む全案件に自動適用（広告主・案件側の対応は不要）</a:t>
+            </a:r>
+          </a:p>
+        </p:txBody>
+      </p:sp>
+      <p:sp>
+        <p:nvSpPr>
+          <p:cNvPr id="9" name="Rectangle 8"/>
+          <p:cNvSpPr/>
+          <p:nvPr/>
+        </p:nvSpPr>
+        <p:spPr>
+          <a:xfrm>
+            <a:off x="5097780" y="1325880"/>
+            <a:ext cx="4347972" cy="2331720"/>
+          </a:xfrm>
+          <a:prstGeom prst="rect">
+            <a:avLst/>
+          </a:prstGeom>
+          <a:solidFill>
+            <a:srgbClr val="FFFFFF"/>
+          </a:solidFill>
+          <a:ln w="9525">
+            <a:solidFill>
+              <a:srgbClr val="D9D9D9"/>
+            </a:solidFill>
+          </a:ln>
+          <a:effectLst/>
+        </p:spPr>
+        <p:style>
+          <a:lnRef idx="1">
+            <a:schemeClr val="accent1"/>
+          </a:lnRef>
+          <a:fillRef idx="3">
+            <a:schemeClr val="accent1"/>
+          </a:fillRef>
+          <a:effectRef idx="2">
+            <a:schemeClr val="accent1"/>
+          </a:effectRef>
+          <a:fontRef idx="minor">
+            <a:schemeClr val="lt1"/>
+          </a:fontRef>
+        </p:style>
+        <p:txBody>
+          <a:bodyPr rtlCol="0" anchor="ctr"/>
+          <a:lstStyle/>
+          <a:p>
+            <a:pPr algn="ctr"/>
+          </a:p>
+        </p:txBody>
+      </p:sp>
+      <p:sp>
+        <p:nvSpPr>
+          <p:cNvPr id="10" name="Rectangle 9"/>
+          <p:cNvSpPr/>
+          <p:nvPr/>
+        </p:nvSpPr>
+        <p:spPr>
+          <a:xfrm>
+            <a:off x="5097780" y="1325880"/>
+            <a:ext cx="4347972" cy="310896"/>
+          </a:xfrm>
+          <a:prstGeom prst="rect">
+            <a:avLst/>
+          </a:prstGeom>
+          <a:solidFill>
+            <a:srgbClr val="10253F"/>
+          </a:solidFill>
+          <a:ln>
+            <a:noFill/>
+          </a:ln>
+          <a:effectLst/>
+        </p:spPr>
+        <p:style>
+          <a:lnRef idx="1">
+            <a:schemeClr val="accent1"/>
+          </a:lnRef>
+          <a:fillRef idx="3">
+            <a:schemeClr val="accent1"/>
+          </a:fillRef>
+          <a:effectRef idx="2">
+            <a:schemeClr val="accent1"/>
+          </a:effectRef>
+          <a:fontRef idx="minor">
+            <a:schemeClr val="lt1"/>
+          </a:fontRef>
+        </p:style>
+        <p:txBody>
+          <a:bodyPr rtlCol="0" anchor="ctr"/>
+          <a:lstStyle/>
+          <a:p>
+            <a:pPr algn="ctr"/>
+          </a:p>
+        </p:txBody>
+      </p:sp>
+      <p:sp>
+        <p:nvSpPr>
+          <p:cNvPr id="11" name="TextBox 10"/>
+          <p:cNvSpPr txBox="1"/>
+          <p:nvPr/>
+        </p:nvSpPr>
+        <p:spPr>
+          <a:xfrm>
+            <a:off x="5097780" y="1325880"/>
+            <a:ext cx="4347972" cy="310896"/>
+          </a:xfrm>
+          <a:prstGeom prst="rect">
+            <a:avLst/>
+          </a:prstGeom>
+          <a:noFill/>
+        </p:spPr>
+        <p:txBody>
+          <a:bodyPr wrap="square" anchor="ctr" lIns="0" rIns="0" tIns="0" bIns="0">
+            <a:spAutoFit/>
+          </a:bodyPr>
+          <a:lstStyle/>
+          <a:p>
+            <a:pPr algn="ctr"/>
+            <a:r>
+              <a:rPr sz="1050" b="1">
+                <a:solidFill>
+                  <a:srgbClr val="FFFFFF"/>
+                </a:solidFill>
+                <a:latin typeface="メイリオ"/>
+                <a:ea typeface="メイリオ"/>
+                <a:cs typeface="メイリオ"/>
+              </a:rPr>
+              <a:t>料金体系・出稿条件</a:t>
+            </a:r>
+          </a:p>
+        </p:txBody>
+      </p:sp>
+      <p:sp>
+        <p:nvSpPr>
+          <p:cNvPr id="12" name="TextBox 11"/>
+          <p:cNvSpPr txBox="1"/>
+          <p:nvPr/>
+        </p:nvSpPr>
+        <p:spPr>
+          <a:xfrm>
+            <a:off x="5262372" y="1728216"/>
+            <a:ext cx="4018788" cy="1837944"/>
+          </a:xfrm>
+          <a:prstGeom prst="rect">
+            <a:avLst/>
+          </a:prstGeom>
+          <a:noFill/>
+        </p:spPr>
+        <p:txBody>
+          <a:bodyPr wrap="square" lIns="0" rIns="0" tIns="0" bIns="0">
+            <a:spAutoFit/>
+          </a:bodyPr>
+          <a:lstStyle/>
           <a:p>
             <a:pPr>
               <a:lnSpc>
@@ -6898,7 +6514,7 @@
               </a:spcAft>
             </a:pPr>
             <a:r>
-              <a:rPr sz="900">
+              <a:rPr sz="1100">
                 <a:solidFill>
                   <a:srgbClr val="343434"/>
                 </a:solidFill>
@@ -6906,9 +6522,159 @@
                 <a:ea typeface="メイリオ"/>
                 <a:cs typeface="メイリオ"/>
               </a:rPr>
-              <a:t>・サジェスト経由の当日ブロック率9.53%（プロモーションスタンプ平均約22%の半分以下）</a:t>
-            </a:r>
-          </a:p>
+              <a:t>・追加費用なし（自動適用）</a:t>
+            </a:r>
+          </a:p>
+        </p:txBody>
+      </p:sp>
+      <p:sp>
+        <p:nvSpPr>
+          <p:cNvPr id="13" name="Rectangle 12"/>
+          <p:cNvSpPr/>
+          <p:nvPr/>
+        </p:nvSpPr>
+        <p:spPr>
+          <a:xfrm>
+            <a:off x="566928" y="3794760"/>
+            <a:ext cx="4347972" cy="2331720"/>
+          </a:xfrm>
+          <a:prstGeom prst="rect">
+            <a:avLst/>
+          </a:prstGeom>
+          <a:solidFill>
+            <a:srgbClr val="FFFFFF"/>
+          </a:solidFill>
+          <a:ln w="9525">
+            <a:solidFill>
+              <a:srgbClr val="D9D9D9"/>
+            </a:solidFill>
+          </a:ln>
+          <a:effectLst/>
+        </p:spPr>
+        <p:style>
+          <a:lnRef idx="1">
+            <a:schemeClr val="accent1"/>
+          </a:lnRef>
+          <a:fillRef idx="3">
+            <a:schemeClr val="accent1"/>
+          </a:fillRef>
+          <a:effectRef idx="2">
+            <a:schemeClr val="accent1"/>
+          </a:effectRef>
+          <a:fontRef idx="minor">
+            <a:schemeClr val="lt1"/>
+          </a:fontRef>
+        </p:style>
+        <p:txBody>
+          <a:bodyPr rtlCol="0" anchor="ctr"/>
+          <a:lstStyle/>
+          <a:p>
+            <a:pPr algn="ctr"/>
+          </a:p>
+        </p:txBody>
+      </p:sp>
+      <p:sp>
+        <p:nvSpPr>
+          <p:cNvPr id="14" name="Rectangle 13"/>
+          <p:cNvSpPr/>
+          <p:nvPr/>
+        </p:nvSpPr>
+        <p:spPr>
+          <a:xfrm>
+            <a:off x="566928" y="3794760"/>
+            <a:ext cx="4347972" cy="310896"/>
+          </a:xfrm>
+          <a:prstGeom prst="rect">
+            <a:avLst/>
+          </a:prstGeom>
+          <a:solidFill>
+            <a:srgbClr val="10253F"/>
+          </a:solidFill>
+          <a:ln>
+            <a:noFill/>
+          </a:ln>
+          <a:effectLst/>
+        </p:spPr>
+        <p:style>
+          <a:lnRef idx="1">
+            <a:schemeClr val="accent1"/>
+          </a:lnRef>
+          <a:fillRef idx="3">
+            <a:schemeClr val="accent1"/>
+          </a:fillRef>
+          <a:effectRef idx="2">
+            <a:schemeClr val="accent1"/>
+          </a:effectRef>
+          <a:fontRef idx="minor">
+            <a:schemeClr val="lt1"/>
+          </a:fontRef>
+        </p:style>
+        <p:txBody>
+          <a:bodyPr rtlCol="0" anchor="ctr"/>
+          <a:lstStyle/>
+          <a:p>
+            <a:pPr algn="ctr"/>
+          </a:p>
+        </p:txBody>
+      </p:sp>
+      <p:sp>
+        <p:nvSpPr>
+          <p:cNvPr id="15" name="TextBox 14"/>
+          <p:cNvSpPr txBox="1"/>
+          <p:nvPr/>
+        </p:nvSpPr>
+        <p:spPr>
+          <a:xfrm>
+            <a:off x="566928" y="3794760"/>
+            <a:ext cx="4347972" cy="310896"/>
+          </a:xfrm>
+          <a:prstGeom prst="rect">
+            <a:avLst/>
+          </a:prstGeom>
+          <a:noFill/>
+        </p:spPr>
+        <p:txBody>
+          <a:bodyPr wrap="square" anchor="ctr" lIns="0" rIns="0" tIns="0" bIns="0">
+            <a:spAutoFit/>
+          </a:bodyPr>
+          <a:lstStyle/>
+          <a:p>
+            <a:pPr algn="ctr"/>
+            <a:r>
+              <a:rPr sz="1050" b="1">
+                <a:solidFill>
+                  <a:srgbClr val="FFFFFF"/>
+                </a:solidFill>
+                <a:latin typeface="メイリオ"/>
+                <a:ea typeface="メイリオ"/>
+                <a:cs typeface="メイリオ"/>
+              </a:rPr>
+              <a:t>スケジュール・導入フロー</a:t>
+            </a:r>
+          </a:p>
+        </p:txBody>
+      </p:sp>
+      <p:sp>
+        <p:nvSpPr>
+          <p:cNvPr id="16" name="TextBox 15"/>
+          <p:cNvSpPr txBox="1"/>
+          <p:nvPr/>
+        </p:nvSpPr>
+        <p:spPr>
+          <a:xfrm>
+            <a:off x="731520" y="4197096"/>
+            <a:ext cx="4018788" cy="1837944"/>
+          </a:xfrm>
+          <a:prstGeom prst="rect">
+            <a:avLst/>
+          </a:prstGeom>
+          <a:noFill/>
+        </p:spPr>
+        <p:txBody>
+          <a:bodyPr wrap="square" lIns="0" rIns="0" tIns="0" bIns="0">
+            <a:spAutoFit/>
+          </a:bodyPr>
+          <a:lstStyle/>
           <a:p>
             <a:pPr>
               <a:lnSpc>
@@ -6919,7 +6685,7 @@
               </a:spcAft>
             </a:pPr>
             <a:r>
-              <a:rPr sz="900">
+              <a:rPr sz="1100">
                 <a:solidFill>
                   <a:srgbClr val="343434"/>
                 </a:solidFill>
@@ -6927,9 +6693,159 @@
                 <a:ea typeface="メイリオ"/>
                 <a:cs typeface="メイリオ"/>
               </a:rPr>
-              <a:t>・改善倍率は無料スタンプの最新DL日が古い層ほど高く、過去6〜18ヶ月DLなし層で約3.0倍</a:t>
-            </a:r>
-          </a:p>
+              <a:t>・適用開始日：2026年8月28日（金）</a:t>
+            </a:r>
+          </a:p>
+        </p:txBody>
+      </p:sp>
+      <p:sp>
+        <p:nvSpPr>
+          <p:cNvPr id="17" name="Rectangle 16"/>
+          <p:cNvSpPr/>
+          <p:nvPr/>
+        </p:nvSpPr>
+        <p:spPr>
+          <a:xfrm>
+            <a:off x="5097780" y="3794760"/>
+            <a:ext cx="4347972" cy="2331720"/>
+          </a:xfrm>
+          <a:prstGeom prst="rect">
+            <a:avLst/>
+          </a:prstGeom>
+          <a:solidFill>
+            <a:srgbClr val="FFFFFF"/>
+          </a:solidFill>
+          <a:ln w="9525">
+            <a:solidFill>
+              <a:srgbClr val="D9D9D9"/>
+            </a:solidFill>
+          </a:ln>
+          <a:effectLst/>
+        </p:spPr>
+        <p:style>
+          <a:lnRef idx="1">
+            <a:schemeClr val="accent1"/>
+          </a:lnRef>
+          <a:fillRef idx="3">
+            <a:schemeClr val="accent1"/>
+          </a:fillRef>
+          <a:effectRef idx="2">
+            <a:schemeClr val="accent1"/>
+          </a:effectRef>
+          <a:fontRef idx="minor">
+            <a:schemeClr val="lt1"/>
+          </a:fontRef>
+        </p:style>
+        <p:txBody>
+          <a:bodyPr rtlCol="0" anchor="ctr"/>
+          <a:lstStyle/>
+          <a:p>
+            <a:pPr algn="ctr"/>
+          </a:p>
+        </p:txBody>
+      </p:sp>
+      <p:sp>
+        <p:nvSpPr>
+          <p:cNvPr id="18" name="Rectangle 17"/>
+          <p:cNvSpPr/>
+          <p:nvPr/>
+        </p:nvSpPr>
+        <p:spPr>
+          <a:xfrm>
+            <a:off x="5097780" y="3794760"/>
+            <a:ext cx="4347972" cy="310896"/>
+          </a:xfrm>
+          <a:prstGeom prst="rect">
+            <a:avLst/>
+          </a:prstGeom>
+          <a:solidFill>
+            <a:srgbClr val="10253F"/>
+          </a:solidFill>
+          <a:ln>
+            <a:noFill/>
+          </a:ln>
+          <a:effectLst/>
+        </p:spPr>
+        <p:style>
+          <a:lnRef idx="1">
+            <a:schemeClr val="accent1"/>
+          </a:lnRef>
+          <a:fillRef idx="3">
+            <a:schemeClr val="accent1"/>
+          </a:fillRef>
+          <a:effectRef idx="2">
+            <a:schemeClr val="accent1"/>
+          </a:effectRef>
+          <a:fontRef idx="minor">
+            <a:schemeClr val="lt1"/>
+          </a:fontRef>
+        </p:style>
+        <p:txBody>
+          <a:bodyPr rtlCol="0" anchor="ctr"/>
+          <a:lstStyle/>
+          <a:p>
+            <a:pPr algn="ctr"/>
+          </a:p>
+        </p:txBody>
+      </p:sp>
+      <p:sp>
+        <p:nvSpPr>
+          <p:cNvPr id="19" name="TextBox 18"/>
+          <p:cNvSpPr txBox="1"/>
+          <p:nvPr/>
+        </p:nvSpPr>
+        <p:spPr>
+          <a:xfrm>
+            <a:off x="5097780" y="3794760"/>
+            <a:ext cx="4347972" cy="310896"/>
+          </a:xfrm>
+          <a:prstGeom prst="rect">
+            <a:avLst/>
+          </a:prstGeom>
+          <a:noFill/>
+        </p:spPr>
+        <p:txBody>
+          <a:bodyPr wrap="square" anchor="ctr" lIns="0" rIns="0" tIns="0" bIns="0">
+            <a:spAutoFit/>
+          </a:bodyPr>
+          <a:lstStyle/>
+          <a:p>
+            <a:pPr algn="ctr"/>
+            <a:r>
+              <a:rPr sz="1050" b="1">
+                <a:solidFill>
+                  <a:srgbClr val="FFFFFF"/>
+                </a:solidFill>
+                <a:latin typeface="メイリオ"/>
+                <a:ea typeface="メイリオ"/>
+                <a:cs typeface="メイリオ"/>
+              </a:rPr>
+              <a:t>注意点・影響</a:t>
+            </a:r>
+          </a:p>
+        </p:txBody>
+      </p:sp>
+      <p:sp>
+        <p:nvSpPr>
+          <p:cNvPr id="20" name="TextBox 19"/>
+          <p:cNvSpPr txBox="1"/>
+          <p:nvPr/>
+        </p:nvSpPr>
+        <p:spPr>
+          <a:xfrm>
+            <a:off x="5262372" y="4197096"/>
+            <a:ext cx="4018788" cy="1837944"/>
+          </a:xfrm>
+          <a:prstGeom prst="rect">
+            <a:avLst/>
+          </a:prstGeom>
+          <a:noFill/>
+        </p:spPr>
+        <p:txBody>
+          <a:bodyPr wrap="square" lIns="0" rIns="0" tIns="0" bIns="0">
+            <a:spAutoFit/>
+          </a:bodyPr>
+          <a:lstStyle/>
           <a:p>
             <a:pPr>
               <a:lnSpc>
@@ -6940,7 +6856,91 @@
               </a:spcAft>
             </a:pPr>
             <a:r>
-              <a:rPr sz="900">
+              <a:rPr sz="1100">
+                <a:solidFill>
+                  <a:srgbClr val="343434"/>
+                </a:solidFill>
+                <a:latin typeface="メイリオ"/>
+                <a:ea typeface="メイリオ"/>
+                <a:cs typeface="メイリオ"/>
+              </a:rPr>
+              <a:t>・DL数+5.63%増（全ダウンロード経路合計、現行条件比較）。利用頻度によらず全セグメントで増加</a:t>
+            </a:r>
+          </a:p>
+          <a:p>
+            <a:pPr>
+              <a:lnSpc>
+                <a:spcPct val="115000"/>
+              </a:lnSpc>
+              <a:spcAft>
+                <a:spcPts val="300"/>
+              </a:spcAft>
+            </a:pPr>
+            <a:r>
+              <a:rPr sz="1100">
+                <a:solidFill>
+                  <a:srgbClr val="343434"/>
+                </a:solidFill>
+                <a:latin typeface="メイリオ"/>
+                <a:ea typeface="メイリオ"/>
+                <a:cs typeface="メイリオ"/>
+              </a:rPr>
+              <a:t>・サジェスト経由の友だち追加率74.6%（プロモーションスタンプ平均約60%を上回る）</a:t>
+            </a:r>
+          </a:p>
+          <a:p>
+            <a:pPr>
+              <a:lnSpc>
+                <a:spcPct val="115000"/>
+              </a:lnSpc>
+              <a:spcAft>
+                <a:spcPts val="300"/>
+              </a:spcAft>
+            </a:pPr>
+            <a:r>
+              <a:rPr sz="1100">
+                <a:solidFill>
+                  <a:srgbClr val="343434"/>
+                </a:solidFill>
+                <a:latin typeface="メイリオ"/>
+                <a:ea typeface="メイリオ"/>
+                <a:cs typeface="メイリオ"/>
+              </a:rPr>
+              <a:t>・サジェスト経由の当日ブロック率9.53%（プロモーションスタンプ平均約22%の半分以下）</a:t>
+            </a:r>
+          </a:p>
+          <a:p>
+            <a:pPr>
+              <a:lnSpc>
+                <a:spcPct val="115000"/>
+              </a:lnSpc>
+              <a:spcAft>
+                <a:spcPts val="300"/>
+              </a:spcAft>
+            </a:pPr>
+            <a:r>
+              <a:rPr sz="1100">
+                <a:solidFill>
+                  <a:srgbClr val="343434"/>
+                </a:solidFill>
+                <a:latin typeface="メイリオ"/>
+                <a:ea typeface="メイリオ"/>
+                <a:cs typeface="メイリオ"/>
+              </a:rPr>
+              <a:t>・改善倍率は無料スタンプの最新DL日が古い層ほど高く、過去6〜18ヶ月DLなし層で約3.0倍</a:t>
+            </a:r>
+          </a:p>
+          <a:p>
+            <a:pPr>
+              <a:lnSpc>
+                <a:spcPct val="115000"/>
+              </a:lnSpc>
+              <a:spcAft>
+                <a:spcPts val="300"/>
+              </a:spcAft>
+            </a:pPr>
+            <a:r>
+              <a:rPr sz="1100">
                 <a:solidFill>
                   <a:srgbClr val="343434"/>
                 </a:solidFill>
@@ -7299,14 +7299,14 @@
           <a:p>
             <a:pPr>
               <a:lnSpc>
-                <a:spcPct val="120000"/>
+                <a:spcPct val="115000"/>
               </a:lnSpc>
               <a:spcAft>
                 <a:spcPts val="300"/>
               </a:spcAft>
             </a:pPr>
             <a:r>
-              <a:rPr sz="1000">
+              <a:rPr sz="1100">
                 <a:solidFill>
                   <a:srgbClr val="343434"/>
                 </a:solidFill>
@@ -7320,14 +7320,14 @@
           <a:p>
             <a:pPr>
               <a:lnSpc>
-                <a:spcPct val="120000"/>
+                <a:spcPct val="115000"/>
               </a:lnSpc>
               <a:spcAft>
                 <a:spcPts val="300"/>
               </a:spcAft>
             </a:pPr>
             <a:r>
-              <a:rPr sz="1000">
+              <a:rPr sz="1100">
                 <a:solidFill>
                   <a:srgbClr val="343434"/>
                 </a:solidFill>
@@ -7491,14 +7491,14 @@
           <a:p>
             <a:pPr>
               <a:lnSpc>
-                <a:spcPct val="120000"/>
+                <a:spcPct val="115000"/>
               </a:lnSpc>
               <a:spcAft>
                 <a:spcPts val="300"/>
               </a:spcAft>
             </a:pPr>
             <a:r>
-              <a:rPr sz="1000">
+              <a:rPr sz="1100">
                 <a:solidFill>
                   <a:srgbClr val="343434"/>
                 </a:solidFill>
@@ -7662,14 +7662,14 @@
           <a:p>
             <a:pPr>
               <a:lnSpc>
-                <a:spcPct val="120000"/>
+                <a:spcPct val="115000"/>
               </a:lnSpc>
               <a:spcAft>
                 <a:spcPts val="300"/>
               </a:spcAft>
             </a:pPr>
             <a:r>
-              <a:rPr sz="1000">
+              <a:rPr sz="1100">
                 <a:solidFill>
                   <a:srgbClr val="343434"/>
                 </a:solidFill>
@@ -7833,14 +7833,14 @@
           <a:p>
             <a:pPr>
               <a:lnSpc>
-                <a:spcPct val="120000"/>
+                <a:spcPct val="115000"/>
               </a:lnSpc>
               <a:spcAft>
                 <a:spcPts val="300"/>
               </a:spcAft>
             </a:pPr>
             <a:r>
-              <a:rPr sz="1000">
+              <a:rPr sz="1100">
                 <a:solidFill>
                   <a:srgbClr val="343434"/>
                 </a:solidFill>
@@ -7854,14 +7854,14 @@
           <a:p>
             <a:pPr>
               <a:lnSpc>
-                <a:spcPct val="120000"/>
+                <a:spcPct val="115000"/>
               </a:lnSpc>
               <a:spcAft>
                 <a:spcPts val="300"/>
               </a:spcAft>
             </a:pPr>
             <a:r>
-              <a:rPr sz="1000">
+              <a:rPr sz="1100">
                 <a:solidFill>
                   <a:srgbClr val="343434"/>
                 </a:solidFill>
@@ -7875,14 +7875,14 @@
           <a:p>
             <a:pPr>
               <a:lnSpc>
-                <a:spcPct val="120000"/>
+                <a:spcPct val="115000"/>
               </a:lnSpc>
               <a:spcAft>
                 <a:spcPts val="300"/>
               </a:spcAft>
             </a:pPr>
             <a:r>
-              <a:rPr sz="1000">
+              <a:rPr sz="1100">
                 <a:solidFill>
                   <a:srgbClr val="343434"/>
                 </a:solidFill>
@@ -7896,14 +7896,14 @@
           <a:p>
             <a:pPr>
               <a:lnSpc>
-                <a:spcPct val="120000"/>
+                <a:spcPct val="115000"/>
               </a:lnSpc>
               <a:spcAft>
                 <a:spcPts val="300"/>
               </a:spcAft>
             </a:pPr>
             <a:r>
-              <a:rPr sz="1000">
+              <a:rPr sz="1100">
                 <a:solidFill>
                   <a:srgbClr val="343434"/>
                 </a:solidFill>
@@ -8256,14 +8256,14 @@
           <a:p>
             <a:pPr>
               <a:lnSpc>
-                <a:spcPct val="120000"/>
+                <a:spcPct val="115000"/>
               </a:lnSpc>
               <a:spcAft>
                 <a:spcPts val="300"/>
               </a:spcAft>
             </a:pPr>
             <a:r>
-              <a:rPr sz="1000">
+              <a:rPr sz="1100">
                 <a:solidFill>
                   <a:srgbClr val="343434"/>
                 </a:solidFill>
@@ -8277,14 +8277,14 @@
           <a:p>
             <a:pPr>
               <a:lnSpc>
-                <a:spcPct val="120000"/>
+                <a:spcPct val="115000"/>
               </a:lnSpc>
               <a:spcAft>
                 <a:spcPts val="300"/>
               </a:spcAft>
             </a:pPr>
             <a:r>
-              <a:rPr sz="1000">
+              <a:rPr sz="1100">
                 <a:solidFill>
                   <a:srgbClr val="343434"/>
                 </a:solidFill>
@@ -8448,14 +8448,14 @@
           <a:p>
             <a:pPr>
               <a:lnSpc>
-                <a:spcPct val="120000"/>
+                <a:spcPct val="115000"/>
               </a:lnSpc>
               <a:spcAft>
                 <a:spcPts val="300"/>
               </a:spcAft>
             </a:pPr>
             <a:r>
-              <a:rPr sz="1000">
+              <a:rPr sz="1100">
                 <a:solidFill>
                   <a:srgbClr val="343434"/>
                 </a:solidFill>
@@ -8619,14 +8619,14 @@
           <a:p>
             <a:pPr>
               <a:lnSpc>
-                <a:spcPct val="120000"/>
+                <a:spcPct val="115000"/>
               </a:lnSpc>
               <a:spcAft>
                 <a:spcPts val="300"/>
               </a:spcAft>
             </a:pPr>
             <a:r>
-              <a:rPr sz="1000">
+              <a:rPr sz="1100">
                 <a:solidFill>
                   <a:srgbClr val="343434"/>
                 </a:solidFill>
@@ -8640,14 +8640,14 @@
           <a:p>
             <a:pPr>
               <a:lnSpc>
-                <a:spcPct val="120000"/>
+                <a:spcPct val="115000"/>
               </a:lnSpc>
               <a:spcAft>
                 <a:spcPts val="300"/>
               </a:spcAft>
             </a:pPr>
             <a:r>
-              <a:rPr sz="1000">
+              <a:rPr sz="1100">
                 <a:solidFill>
                   <a:srgbClr val="343434"/>
                 </a:solidFill>
@@ -8811,14 +8811,14 @@
           <a:p>
             <a:pPr>
               <a:lnSpc>
-                <a:spcPct val="120000"/>
+                <a:spcPct val="115000"/>
               </a:lnSpc>
               <a:spcAft>
                 <a:spcPts val="300"/>
               </a:spcAft>
             </a:pPr>
             <a:r>
-              <a:rPr sz="1000">
+              <a:rPr sz="1100">
                 <a:solidFill>
                   <a:srgbClr val="343434"/>
                 </a:solidFill>
@@ -8832,14 +8832,14 @@
           <a:p>
             <a:pPr>
               <a:lnSpc>
-                <a:spcPct val="120000"/>
+                <a:spcPct val="115000"/>
               </a:lnSpc>
               <a:spcAft>
                 <a:spcPts val="300"/>
               </a:spcAft>
             </a:pPr>
             <a:r>
-              <a:rPr sz="1000">
+              <a:rPr sz="1100">
                 <a:solidFill>
                   <a:srgbClr val="343434"/>
                 </a:solidFill>
@@ -8853,14 +8853,14 @@
           <a:p>
             <a:pPr>
               <a:lnSpc>
-                <a:spcPct val="120000"/>
+                <a:spcPct val="115000"/>
               </a:lnSpc>
               <a:spcAft>
                 <a:spcPts val="300"/>
               </a:spcAft>
             </a:pPr>
             <a:r>
-              <a:rPr sz="1000">
+              <a:rPr sz="1100">
                 <a:solidFill>
                   <a:srgbClr val="343434"/>
                 </a:solidFill>
@@ -9213,14 +9213,14 @@
           <a:p>
             <a:pPr>
               <a:lnSpc>
-                <a:spcPct val="120000"/>
+                <a:spcPct val="115000"/>
               </a:lnSpc>
               <a:spcAft>
                 <a:spcPts val="300"/>
               </a:spcAft>
             </a:pPr>
             <a:r>
-              <a:rPr sz="1000">
+              <a:rPr sz="1100">
                 <a:solidFill>
                   <a:srgbClr val="343434"/>
                 </a:solidFill>
@@ -9231,198 +9231,6 @@
               <a:t>・対象：2026年10月20日開始〜12月25日までに終了する案件限定</a:t>
             </a:r>
           </a:p>
-          <a:p>
-            <a:pPr>
-              <a:lnSpc>
-                <a:spcPct val="120000"/>
-              </a:lnSpc>
-              <a:spcAft>
-                <a:spcPts val="300"/>
-              </a:spcAft>
-            </a:pPr>
-            <a:r>
-              <a:rPr sz="1000">
-                <a:solidFill>
-                  <a:srgbClr val="343434"/>
-                </a:solidFill>
-                <a:latin typeface="メイリオ"/>
-                <a:ea typeface="メイリオ"/>
-                <a:cs typeface="メイリオ"/>
-              </a:rPr>
-              <a:t>・景品はLINEポイント（2ポイント固定・応募者全員に総付）</a:t>
-            </a:r>
-          </a:p>
-          <a:p>
-            <a:pPr>
-              <a:lnSpc>
-                <a:spcPct val="120000"/>
-              </a:lnSpc>
-              <a:spcAft>
-                <a:spcPts val="300"/>
-              </a:spcAft>
-            </a:pPr>
-            <a:r>
-              <a:rPr sz="1000">
-                <a:solidFill>
-                  <a:srgbClr val="343434"/>
-                </a:solidFill>
-                <a:latin typeface="メイリオ"/>
-                <a:ea typeface="メイリオ"/>
-                <a:cs typeface="メイリオ"/>
-              </a:rPr>
-              <a:t>・対象アカウント条件：LINE公式アカウントかつMessaging API対応／認証プロバイダーであることが必須</a:t>
-            </a:r>
-          </a:p>
-        </p:txBody>
-      </p:sp>
-      <p:sp>
-        <p:nvSpPr>
-          <p:cNvPr id="9" name="Rectangle 8"/>
-          <p:cNvSpPr/>
-          <p:nvPr/>
-        </p:nvSpPr>
-        <p:spPr>
-          <a:xfrm>
-            <a:off x="5097780" y="1325880"/>
-            <a:ext cx="4347972" cy="2331720"/>
-          </a:xfrm>
-          <a:prstGeom prst="rect">
-            <a:avLst/>
-          </a:prstGeom>
-          <a:solidFill>
-            <a:srgbClr val="FFFFFF"/>
-          </a:solidFill>
-          <a:ln w="9525">
-            <a:solidFill>
-              <a:srgbClr val="D9D9D9"/>
-            </a:solidFill>
-          </a:ln>
-          <a:effectLst/>
-        </p:spPr>
-        <p:style>
-          <a:lnRef idx="1">
-            <a:schemeClr val="accent1"/>
-          </a:lnRef>
-          <a:fillRef idx="3">
-            <a:schemeClr val="accent1"/>
-          </a:fillRef>
-          <a:effectRef idx="2">
-            <a:schemeClr val="accent1"/>
-          </a:effectRef>
-          <a:fontRef idx="minor">
-            <a:schemeClr val="lt1"/>
-          </a:fontRef>
-        </p:style>
-        <p:txBody>
-          <a:bodyPr rtlCol="0" anchor="ctr"/>
-          <a:lstStyle/>
-          <a:p>
-            <a:pPr algn="ctr"/>
-          </a:p>
-        </p:txBody>
-      </p:sp>
-      <p:sp>
-        <p:nvSpPr>
-          <p:cNvPr id="10" name="Rectangle 9"/>
-          <p:cNvSpPr/>
-          <p:nvPr/>
-        </p:nvSpPr>
-        <p:spPr>
-          <a:xfrm>
-            <a:off x="5097780" y="1325880"/>
-            <a:ext cx="4347972" cy="310896"/>
-          </a:xfrm>
-          <a:prstGeom prst="rect">
-            <a:avLst/>
-          </a:prstGeom>
-          <a:solidFill>
-            <a:srgbClr val="10253F"/>
-          </a:solidFill>
-          <a:ln>
-            <a:noFill/>
-          </a:ln>
-          <a:effectLst/>
-        </p:spPr>
-        <p:style>
-          <a:lnRef idx="1">
-            <a:schemeClr val="accent1"/>
-          </a:lnRef>
-          <a:fillRef idx="3">
-            <a:schemeClr val="accent1"/>
-          </a:fillRef>
-          <a:effectRef idx="2">
-            <a:schemeClr val="accent1"/>
-          </a:effectRef>
-          <a:fontRef idx="minor">
-            <a:schemeClr val="lt1"/>
-          </a:fontRef>
-        </p:style>
-        <p:txBody>
-          <a:bodyPr rtlCol="0" anchor="ctr"/>
-          <a:lstStyle/>
-          <a:p>
-            <a:pPr algn="ctr"/>
-          </a:p>
-        </p:txBody>
-      </p:sp>
-      <p:sp>
-        <p:nvSpPr>
-          <p:cNvPr id="11" name="TextBox 10"/>
-          <p:cNvSpPr txBox="1"/>
-          <p:nvPr/>
-        </p:nvSpPr>
-        <p:spPr>
-          <a:xfrm>
-            <a:off x="5097780" y="1325880"/>
-            <a:ext cx="4347972" cy="310896"/>
-          </a:xfrm>
-          <a:prstGeom prst="rect">
-            <a:avLst/>
-          </a:prstGeom>
-          <a:noFill/>
-        </p:spPr>
-        <p:txBody>
-          <a:bodyPr wrap="square" anchor="ctr" lIns="0" rIns="0" tIns="0" bIns="0">
-            <a:spAutoFit/>
-          </a:bodyPr>
-          <a:lstStyle/>
-          <a:p>
-            <a:pPr algn="ctr"/>
-            <a:r>
-              <a:rPr sz="1050" b="1">
-                <a:solidFill>
-                  <a:srgbClr val="FFFFFF"/>
-                </a:solidFill>
-                <a:latin typeface="メイリオ"/>
-                <a:ea typeface="メイリオ"/>
-                <a:cs typeface="メイリオ"/>
-              </a:rPr>
-              <a:t>料金体系・出稿条件</a:t>
-            </a:r>
-          </a:p>
-        </p:txBody>
-      </p:sp>
-      <p:sp>
-        <p:nvSpPr>
-          <p:cNvPr id="12" name="TextBox 11"/>
-          <p:cNvSpPr txBox="1"/>
-          <p:nvPr/>
-        </p:nvSpPr>
-        <p:spPr>
-          <a:xfrm>
-            <a:off x="5262372" y="1728216"/>
-            <a:ext cx="4018788" cy="1837944"/>
-          </a:xfrm>
-          <a:prstGeom prst="rect">
-            <a:avLst/>
-          </a:prstGeom>
-          <a:noFill/>
-        </p:spPr>
-        <p:txBody>
-          <a:bodyPr wrap="square" lIns="0" rIns="0" tIns="0" bIns="0">
-            <a:spAutoFit/>
-          </a:bodyPr>
-          <a:lstStyle/>
           <a:p>
             <a:pPr>
               <a:lnSpc>
@@ -9433,7 +9241,7 @@
               </a:spcAft>
             </a:pPr>
             <a:r>
-              <a:rPr sz="900">
+              <a:rPr sz="1100">
                 <a:solidFill>
                   <a:srgbClr val="343434"/>
                 </a:solidFill>
@@ -9441,7 +9249,7 @@
                 <a:ea typeface="メイリオ"/>
                 <a:cs typeface="メイリオ"/>
               </a:rPr>
-              <a:t>・基本費用：通常1,800万円→キャンペーン価格1,500万円</a:t>
+              <a:t>・景品はLINEポイント（2ポイント固定・応募者全員に総付）</a:t>
             </a:r>
           </a:p>
           <a:p>
@@ -9454,7 +9262,7 @@
               </a:spcAft>
             </a:pPr>
             <a:r>
-              <a:rPr sz="900">
+              <a:rPr sz="1100">
                 <a:solidFill>
                   <a:srgbClr val="343434"/>
                 </a:solidFill>
@@ -9462,9 +9270,159 @@
                 <a:ea typeface="メイリオ"/>
                 <a:cs typeface="メイリオ"/>
               </a:rPr>
-              <a:t>・掲載期間：通常7日間→15日間</a:t>
-            </a:r>
-          </a:p>
+              <a:t>・対象アカウント条件：LINE公式アカウントかつMessaging API対応／認証プロバイダーであることが必須</a:t>
+            </a:r>
+          </a:p>
+        </p:txBody>
+      </p:sp>
+      <p:sp>
+        <p:nvSpPr>
+          <p:cNvPr id="9" name="Rectangle 8"/>
+          <p:cNvSpPr/>
+          <p:nvPr/>
+        </p:nvSpPr>
+        <p:spPr>
+          <a:xfrm>
+            <a:off x="5097780" y="1325880"/>
+            <a:ext cx="4347972" cy="2331720"/>
+          </a:xfrm>
+          <a:prstGeom prst="rect">
+            <a:avLst/>
+          </a:prstGeom>
+          <a:solidFill>
+            <a:srgbClr val="FFFFFF"/>
+          </a:solidFill>
+          <a:ln w="9525">
+            <a:solidFill>
+              <a:srgbClr val="D9D9D9"/>
+            </a:solidFill>
+          </a:ln>
+          <a:effectLst/>
+        </p:spPr>
+        <p:style>
+          <a:lnRef idx="1">
+            <a:schemeClr val="accent1"/>
+          </a:lnRef>
+          <a:fillRef idx="3">
+            <a:schemeClr val="accent1"/>
+          </a:fillRef>
+          <a:effectRef idx="2">
+            <a:schemeClr val="accent1"/>
+          </a:effectRef>
+          <a:fontRef idx="minor">
+            <a:schemeClr val="lt1"/>
+          </a:fontRef>
+        </p:style>
+        <p:txBody>
+          <a:bodyPr rtlCol="0" anchor="ctr"/>
+          <a:lstStyle/>
+          <a:p>
+            <a:pPr algn="ctr"/>
+          </a:p>
+        </p:txBody>
+      </p:sp>
+      <p:sp>
+        <p:nvSpPr>
+          <p:cNvPr id="10" name="Rectangle 9"/>
+          <p:cNvSpPr/>
+          <p:nvPr/>
+        </p:nvSpPr>
+        <p:spPr>
+          <a:xfrm>
+            <a:off x="5097780" y="1325880"/>
+            <a:ext cx="4347972" cy="310896"/>
+          </a:xfrm>
+          <a:prstGeom prst="rect">
+            <a:avLst/>
+          </a:prstGeom>
+          <a:solidFill>
+            <a:srgbClr val="10253F"/>
+          </a:solidFill>
+          <a:ln>
+            <a:noFill/>
+          </a:ln>
+          <a:effectLst/>
+        </p:spPr>
+        <p:style>
+          <a:lnRef idx="1">
+            <a:schemeClr val="accent1"/>
+          </a:lnRef>
+          <a:fillRef idx="3">
+            <a:schemeClr val="accent1"/>
+          </a:fillRef>
+          <a:effectRef idx="2">
+            <a:schemeClr val="accent1"/>
+          </a:effectRef>
+          <a:fontRef idx="minor">
+            <a:schemeClr val="lt1"/>
+          </a:fontRef>
+        </p:style>
+        <p:txBody>
+          <a:bodyPr rtlCol="0" anchor="ctr"/>
+          <a:lstStyle/>
+          <a:p>
+            <a:pPr algn="ctr"/>
+          </a:p>
+        </p:txBody>
+      </p:sp>
+      <p:sp>
+        <p:nvSpPr>
+          <p:cNvPr id="11" name="TextBox 10"/>
+          <p:cNvSpPr txBox="1"/>
+          <p:nvPr/>
+        </p:nvSpPr>
+        <p:spPr>
+          <a:xfrm>
+            <a:off x="5097780" y="1325880"/>
+            <a:ext cx="4347972" cy="310896"/>
+          </a:xfrm>
+          <a:prstGeom prst="rect">
+            <a:avLst/>
+          </a:prstGeom>
+          <a:noFill/>
+        </p:spPr>
+        <p:txBody>
+          <a:bodyPr wrap="square" anchor="ctr" lIns="0" rIns="0" tIns="0" bIns="0">
+            <a:spAutoFit/>
+          </a:bodyPr>
+          <a:lstStyle/>
+          <a:p>
+            <a:pPr algn="ctr"/>
+            <a:r>
+              <a:rPr sz="1050" b="1">
+                <a:solidFill>
+                  <a:srgbClr val="FFFFFF"/>
+                </a:solidFill>
+                <a:latin typeface="メイリオ"/>
+                <a:ea typeface="メイリオ"/>
+                <a:cs typeface="メイリオ"/>
+              </a:rPr>
+              <a:t>料金体系・出稿条件</a:t>
+            </a:r>
+          </a:p>
+        </p:txBody>
+      </p:sp>
+      <p:sp>
+        <p:nvSpPr>
+          <p:cNvPr id="12" name="TextBox 11"/>
+          <p:cNvSpPr txBox="1"/>
+          <p:nvPr/>
+        </p:nvSpPr>
+        <p:spPr>
+          <a:xfrm>
+            <a:off x="5262372" y="1728216"/>
+            <a:ext cx="4018788" cy="1837944"/>
+          </a:xfrm>
+          <a:prstGeom prst="rect">
+            <a:avLst/>
+          </a:prstGeom>
+          <a:noFill/>
+        </p:spPr>
+        <p:txBody>
+          <a:bodyPr wrap="square" lIns="0" rIns="0" tIns="0" bIns="0">
+            <a:spAutoFit/>
+          </a:bodyPr>
+          <a:lstStyle/>
           <a:p>
             <a:pPr>
               <a:lnSpc>
@@ -9475,7 +9433,7 @@
               </a:spcAft>
             </a:pPr>
             <a:r>
-              <a:rPr sz="900">
+              <a:rPr sz="1100">
                 <a:solidFill>
                   <a:srgbClr val="343434"/>
                 </a:solidFill>
@@ -9483,7 +9441,7 @@
                 <a:ea typeface="メイリオ"/>
                 <a:cs typeface="メイリオ"/>
               </a:rPr>
-              <a:t>・通数：通常最大900万通→最大1,050万通（150万通増量・ノンセグメント1配信のみ、セグメント／オーディエンス配信は不可）</a:t>
+              <a:t>・基本費用：通常1,800万円→キャンペーン価格1,500万円</a:t>
             </a:r>
           </a:p>
           <a:p>
@@ -9496,7 +9454,7 @@
               </a:spcAft>
             </a:pPr>
             <a:r>
-              <a:rPr sz="900">
+              <a:rPr sz="1100">
                 <a:solidFill>
                   <a:srgbClr val="343434"/>
                 </a:solidFill>
@@ -9504,7 +9462,7 @@
                 <a:ea typeface="メイリオ"/>
                 <a:cs typeface="メイリオ"/>
               </a:rPr>
-              <a:t>・基本費用に友だち追加・uid提供・アンケート・景品・メッセージ配信1回分を含む</a:t>
+              <a:t>・掲載期間：通常7日間→15日間</a:t>
             </a:r>
           </a:p>
           <a:p>
@@ -9517,7 +9475,7 @@
               </a:spcAft>
             </a:pPr>
             <a:r>
-              <a:rPr sz="900">
+              <a:rPr sz="1100">
                 <a:solidFill>
                   <a:srgbClr val="343434"/>
                 </a:solidFill>
@@ -9525,159 +9483,9 @@
                 <a:ea typeface="メイリオ"/>
                 <a:cs typeface="メイリオ"/>
               </a:rPr>
-              <a:t>・オプション：応募後の強制視聴ビデオ300万円（トライアル価格・変更の可能性あり）</a:t>
-            </a:r>
-          </a:p>
-        </p:txBody>
-      </p:sp>
-      <p:sp>
-        <p:nvSpPr>
-          <p:cNvPr id="13" name="Rectangle 12"/>
-          <p:cNvSpPr/>
-          <p:nvPr/>
-        </p:nvSpPr>
-        <p:spPr>
-          <a:xfrm>
-            <a:off x="566928" y="3794760"/>
-            <a:ext cx="4347972" cy="2331720"/>
-          </a:xfrm>
-          <a:prstGeom prst="rect">
-            <a:avLst/>
-          </a:prstGeom>
-          <a:solidFill>
-            <a:srgbClr val="FFFFFF"/>
-          </a:solidFill>
-          <a:ln w="9525">
-            <a:solidFill>
-              <a:srgbClr val="D9D9D9"/>
-            </a:solidFill>
-          </a:ln>
-          <a:effectLst/>
-        </p:spPr>
-        <p:style>
-          <a:lnRef idx="1">
-            <a:schemeClr val="accent1"/>
-          </a:lnRef>
-          <a:fillRef idx="3">
-            <a:schemeClr val="accent1"/>
-          </a:fillRef>
-          <a:effectRef idx="2">
-            <a:schemeClr val="accent1"/>
-          </a:effectRef>
-          <a:fontRef idx="minor">
-            <a:schemeClr val="lt1"/>
-          </a:fontRef>
-        </p:style>
-        <p:txBody>
-          <a:bodyPr rtlCol="0" anchor="ctr"/>
-          <a:lstStyle/>
-          <a:p>
-            <a:pPr algn="ctr"/>
-          </a:p>
-        </p:txBody>
-      </p:sp>
-      <p:sp>
-        <p:nvSpPr>
-          <p:cNvPr id="14" name="Rectangle 13"/>
-          <p:cNvSpPr/>
-          <p:nvPr/>
-        </p:nvSpPr>
-        <p:spPr>
-          <a:xfrm>
-            <a:off x="566928" y="3794760"/>
-            <a:ext cx="4347972" cy="310896"/>
-          </a:xfrm>
-          <a:prstGeom prst="rect">
-            <a:avLst/>
-          </a:prstGeom>
-          <a:solidFill>
-            <a:srgbClr val="10253F"/>
-          </a:solidFill>
-          <a:ln>
-            <a:noFill/>
-          </a:ln>
-          <a:effectLst/>
-        </p:spPr>
-        <p:style>
-          <a:lnRef idx="1">
-            <a:schemeClr val="accent1"/>
-          </a:lnRef>
-          <a:fillRef idx="3">
-            <a:schemeClr val="accent1"/>
-          </a:fillRef>
-          <a:effectRef idx="2">
-            <a:schemeClr val="accent1"/>
-          </a:effectRef>
-          <a:fontRef idx="minor">
-            <a:schemeClr val="lt1"/>
-          </a:fontRef>
-        </p:style>
-        <p:txBody>
-          <a:bodyPr rtlCol="0" anchor="ctr"/>
-          <a:lstStyle/>
-          <a:p>
-            <a:pPr algn="ctr"/>
-          </a:p>
-        </p:txBody>
-      </p:sp>
-      <p:sp>
-        <p:nvSpPr>
-          <p:cNvPr id="15" name="TextBox 14"/>
-          <p:cNvSpPr txBox="1"/>
-          <p:nvPr/>
-        </p:nvSpPr>
-        <p:spPr>
-          <a:xfrm>
-            <a:off x="566928" y="3794760"/>
-            <a:ext cx="4347972" cy="310896"/>
-          </a:xfrm>
-          <a:prstGeom prst="rect">
-            <a:avLst/>
-          </a:prstGeom>
-          <a:noFill/>
-        </p:spPr>
-        <p:txBody>
-          <a:bodyPr wrap="square" anchor="ctr" lIns="0" rIns="0" tIns="0" bIns="0">
-            <a:spAutoFit/>
-          </a:bodyPr>
-          <a:lstStyle/>
-          <a:p>
-            <a:pPr algn="ctr"/>
-            <a:r>
-              <a:rPr sz="1050" b="1">
-                <a:solidFill>
-                  <a:srgbClr val="FFFFFF"/>
-                </a:solidFill>
-                <a:latin typeface="メイリオ"/>
-                <a:ea typeface="メイリオ"/>
-                <a:cs typeface="メイリオ"/>
-              </a:rPr>
-              <a:t>スケジュール・導入フロー</a:t>
-            </a:r>
-          </a:p>
-        </p:txBody>
-      </p:sp>
-      <p:sp>
-        <p:nvSpPr>
-          <p:cNvPr id="16" name="TextBox 15"/>
-          <p:cNvSpPr txBox="1"/>
-          <p:nvPr/>
-        </p:nvSpPr>
-        <p:spPr>
-          <a:xfrm>
-            <a:off x="731520" y="4197096"/>
-            <a:ext cx="4018788" cy="1837944"/>
-          </a:xfrm>
-          <a:prstGeom prst="rect">
-            <a:avLst/>
-          </a:prstGeom>
-          <a:noFill/>
-        </p:spPr>
-        <p:txBody>
-          <a:bodyPr wrap="square" lIns="0" rIns="0" tIns="0" bIns="0">
-            <a:spAutoFit/>
-          </a:bodyPr>
-          <a:lstStyle/>
+              <a:t>・通数：通常最大900万通→最大1,050万通（150万通増量・ノンセグメント1配信のみ、セグメント／オーディエンス配信は不可）</a:t>
+            </a:r>
+          </a:p>
           <a:p>
             <a:pPr>
               <a:lnSpc>
@@ -9688,7 +9496,7 @@
               </a:spcAft>
             </a:pPr>
             <a:r>
-              <a:rPr sz="900">
+              <a:rPr sz="1100">
                 <a:solidFill>
                   <a:srgbClr val="343434"/>
                 </a:solidFill>
@@ -9696,7 +9504,7 @@
                 <a:ea typeface="メイリオ"/>
                 <a:cs typeface="メイリオ"/>
               </a:rPr>
-              <a:t>・①開始30営業日前：企業・商材審査／企画審査</a:t>
+              <a:t>・基本費用に友だち追加・uid提供・アンケート・景品・メッセージ配信1回分を含む</a:t>
             </a:r>
           </a:p>
           <a:p>
@@ -9709,7 +9517,7 @@
               </a:spcAft>
             </a:pPr>
             <a:r>
-              <a:rPr sz="900">
+              <a:rPr sz="1100">
                 <a:solidFill>
                   <a:srgbClr val="343434"/>
                 </a:solidFill>
@@ -9717,9 +9525,159 @@
                 <a:ea typeface="メイリオ"/>
                 <a:cs typeface="メイリオ"/>
               </a:rPr>
-              <a:t>・②開始25営業日前17時：メッセージ配信枠おさえ・キャンペーン申込み</a:t>
-            </a:r>
-          </a:p>
+              <a:t>・オプション：応募後の強制視聴ビデオ300万円（トライアル価格・変更の可能性あり）</a:t>
+            </a:r>
+          </a:p>
+        </p:txBody>
+      </p:sp>
+      <p:sp>
+        <p:nvSpPr>
+          <p:cNvPr id="13" name="Rectangle 12"/>
+          <p:cNvSpPr/>
+          <p:nvPr/>
+        </p:nvSpPr>
+        <p:spPr>
+          <a:xfrm>
+            <a:off x="566928" y="3794760"/>
+            <a:ext cx="4347972" cy="2331720"/>
+          </a:xfrm>
+          <a:prstGeom prst="rect">
+            <a:avLst/>
+          </a:prstGeom>
+          <a:solidFill>
+            <a:srgbClr val="FFFFFF"/>
+          </a:solidFill>
+          <a:ln w="9525">
+            <a:solidFill>
+              <a:srgbClr val="D9D9D9"/>
+            </a:solidFill>
+          </a:ln>
+          <a:effectLst/>
+        </p:spPr>
+        <p:style>
+          <a:lnRef idx="1">
+            <a:schemeClr val="accent1"/>
+          </a:lnRef>
+          <a:fillRef idx="3">
+            <a:schemeClr val="accent1"/>
+          </a:fillRef>
+          <a:effectRef idx="2">
+            <a:schemeClr val="accent1"/>
+          </a:effectRef>
+          <a:fontRef idx="minor">
+            <a:schemeClr val="lt1"/>
+          </a:fontRef>
+        </p:style>
+        <p:txBody>
+          <a:bodyPr rtlCol="0" anchor="ctr"/>
+          <a:lstStyle/>
+          <a:p>
+            <a:pPr algn="ctr"/>
+          </a:p>
+        </p:txBody>
+      </p:sp>
+      <p:sp>
+        <p:nvSpPr>
+          <p:cNvPr id="14" name="Rectangle 13"/>
+          <p:cNvSpPr/>
+          <p:nvPr/>
+        </p:nvSpPr>
+        <p:spPr>
+          <a:xfrm>
+            <a:off x="566928" y="3794760"/>
+            <a:ext cx="4347972" cy="310896"/>
+          </a:xfrm>
+          <a:prstGeom prst="rect">
+            <a:avLst/>
+          </a:prstGeom>
+          <a:solidFill>
+            <a:srgbClr val="10253F"/>
+          </a:solidFill>
+          <a:ln>
+            <a:noFill/>
+          </a:ln>
+          <a:effectLst/>
+        </p:spPr>
+        <p:style>
+          <a:lnRef idx="1">
+            <a:schemeClr val="accent1"/>
+          </a:lnRef>
+          <a:fillRef idx="3">
+            <a:schemeClr val="accent1"/>
+          </a:fillRef>
+          <a:effectRef idx="2">
+            <a:schemeClr val="accent1"/>
+          </a:effectRef>
+          <a:fontRef idx="minor">
+            <a:schemeClr val="lt1"/>
+          </a:fontRef>
+        </p:style>
+        <p:txBody>
+          <a:bodyPr rtlCol="0" anchor="ctr"/>
+          <a:lstStyle/>
+          <a:p>
+            <a:pPr algn="ctr"/>
+          </a:p>
+        </p:txBody>
+      </p:sp>
+      <p:sp>
+        <p:nvSpPr>
+          <p:cNvPr id="15" name="TextBox 14"/>
+          <p:cNvSpPr txBox="1"/>
+          <p:nvPr/>
+        </p:nvSpPr>
+        <p:spPr>
+          <a:xfrm>
+            <a:off x="566928" y="3794760"/>
+            <a:ext cx="4347972" cy="310896"/>
+          </a:xfrm>
+          <a:prstGeom prst="rect">
+            <a:avLst/>
+          </a:prstGeom>
+          <a:noFill/>
+        </p:spPr>
+        <p:txBody>
+          <a:bodyPr wrap="square" anchor="ctr" lIns="0" rIns="0" tIns="0" bIns="0">
+            <a:spAutoFit/>
+          </a:bodyPr>
+          <a:lstStyle/>
+          <a:p>
+            <a:pPr algn="ctr"/>
+            <a:r>
+              <a:rPr sz="1050" b="1">
+                <a:solidFill>
+                  <a:srgbClr val="FFFFFF"/>
+                </a:solidFill>
+                <a:latin typeface="メイリオ"/>
+                <a:ea typeface="メイリオ"/>
+                <a:cs typeface="メイリオ"/>
+              </a:rPr>
+              <a:t>スケジュール・導入フロー</a:t>
+            </a:r>
+          </a:p>
+        </p:txBody>
+      </p:sp>
+      <p:sp>
+        <p:nvSpPr>
+          <p:cNvPr id="16" name="TextBox 15"/>
+          <p:cNvSpPr txBox="1"/>
+          <p:nvPr/>
+        </p:nvSpPr>
+        <p:spPr>
+          <a:xfrm>
+            <a:off x="731520" y="4197096"/>
+            <a:ext cx="4018788" cy="1837944"/>
+          </a:xfrm>
+          <a:prstGeom prst="rect">
+            <a:avLst/>
+          </a:prstGeom>
+          <a:noFill/>
+        </p:spPr>
+        <p:txBody>
+          <a:bodyPr wrap="square" lIns="0" rIns="0" tIns="0" bIns="0">
+            <a:spAutoFit/>
+          </a:bodyPr>
+          <a:lstStyle/>
           <a:p>
             <a:pPr>
               <a:lnSpc>
@@ -9730,7 +9688,7 @@
               </a:spcAft>
             </a:pPr>
             <a:r>
-              <a:rPr sz="900">
+              <a:rPr sz="1100">
                 <a:solidFill>
                   <a:srgbClr val="343434"/>
                 </a:solidFill>
@@ -9738,7 +9696,7 @@
                 <a:ea typeface="メイリオ"/>
                 <a:cs typeface="メイリオ"/>
               </a:rPr>
-              <a:t>・③開始20営業日前17時：各種入稿物の提出</a:t>
+              <a:t>・①開始30営業日前：企業・商材審査／企画審査</a:t>
             </a:r>
           </a:p>
           <a:p>
@@ -9751,7 +9709,7 @@
               </a:spcAft>
             </a:pPr>
             <a:r>
-              <a:rPr sz="900">
+              <a:rPr sz="1100">
                 <a:solidFill>
                   <a:srgbClr val="343434"/>
                 </a:solidFill>
@@ -9759,7 +9717,7 @@
                 <a:ea typeface="メイリオ"/>
                 <a:cs typeface="メイリオ"/>
               </a:rPr>
-              <a:t>・④開始日当日：キャンペーン掲載開始</a:t>
+              <a:t>・②開始25営業日前17時：メッセージ配信枠おさえ・キャンペーン申込み</a:t>
             </a:r>
           </a:p>
           <a:p>
@@ -9772,7 +9730,49 @@
               </a:spcAft>
             </a:pPr>
             <a:r>
-              <a:rPr sz="900">
+              <a:rPr sz="1100">
+                <a:solidFill>
+                  <a:srgbClr val="343434"/>
+                </a:solidFill>
+                <a:latin typeface="メイリオ"/>
+                <a:ea typeface="メイリオ"/>
+                <a:cs typeface="メイリオ"/>
+              </a:rPr>
+              <a:t>・③開始20営業日前17時：各種入稿物の提出</a:t>
+            </a:r>
+          </a:p>
+          <a:p>
+            <a:pPr>
+              <a:lnSpc>
+                <a:spcPct val="115000"/>
+              </a:lnSpc>
+              <a:spcAft>
+                <a:spcPts val="300"/>
+              </a:spcAft>
+            </a:pPr>
+            <a:r>
+              <a:rPr sz="1100">
+                <a:solidFill>
+                  <a:srgbClr val="343434"/>
+                </a:solidFill>
+                <a:latin typeface="メイリオ"/>
+                <a:ea typeface="メイリオ"/>
+                <a:cs typeface="メイリオ"/>
+              </a:rPr>
+              <a:t>・④開始日当日：キャンペーン掲載開始</a:t>
+            </a:r>
+          </a:p>
+          <a:p>
+            <a:pPr>
+              <a:lnSpc>
+                <a:spcPct val="115000"/>
+              </a:lnSpc>
+              <a:spcAft>
+                <a:spcPts val="300"/>
+              </a:spcAft>
+            </a:pPr>
+            <a:r>
+              <a:rPr sz="1100">
                 <a:solidFill>
                   <a:srgbClr val="343434"/>
                 </a:solidFill>
@@ -9936,14 +9936,14 @@
           <a:p>
             <a:pPr>
               <a:lnSpc>
-                <a:spcPct val="120000"/>
+                <a:spcPct val="115000"/>
               </a:lnSpc>
               <a:spcAft>
                 <a:spcPts val="300"/>
               </a:spcAft>
             </a:pPr>
             <a:r>
-              <a:rPr sz="1000">
+              <a:rPr sz="1100">
                 <a:solidFill>
                   <a:srgbClr val="343434"/>
                 </a:solidFill>
@@ -9957,14 +9957,14 @@
           <a:p>
             <a:pPr>
               <a:lnSpc>
-                <a:spcPct val="120000"/>
+                <a:spcPct val="115000"/>
               </a:lnSpc>
               <a:spcAft>
                 <a:spcPts val="300"/>
               </a:spcAft>
             </a:pPr>
             <a:r>
-              <a:rPr sz="1000">
+              <a:rPr sz="1100">
                 <a:solidFill>
                   <a:srgbClr val="343434"/>
                 </a:solidFill>
@@ -9978,14 +9978,14 @@
           <a:p>
             <a:pPr>
               <a:lnSpc>
-                <a:spcPct val="120000"/>
+                <a:spcPct val="115000"/>
               </a:lnSpc>
               <a:spcAft>
                 <a:spcPts val="300"/>
               </a:spcAft>
             </a:pPr>
             <a:r>
-              <a:rPr sz="1000">
+              <a:rPr sz="1100">
                 <a:solidFill>
                   <a:srgbClr val="343434"/>
                 </a:solidFill>

--- a/LINEOA媒体最新情報_2026年9月トレンドレポート.pptx
+++ b/LINEOA媒体最新情報_2026年9月トレンドレポート.pptx
@@ -4936,7 +4936,7 @@
         </p:nvGraphicFramePr>
         <p:xfrm>
           <a:off x="544108" y="3068960"/>
-          <a:ext cx="9326880" cy="3108960"/>
+          <a:ext cx="9326880" cy="3200400"/>
         </p:xfrm>
         <a:graphic>
           <a:graphicData uri="http://schemas.openxmlformats.org/drawingml/2006/table">
@@ -4948,7 +4948,7 @@
                 <a:gridCol w="1965960"/>
                 <a:gridCol w="7360920"/>
               </a:tblGrid>
-              <a:tr h="777240">
+              <a:tr h="800100">
                 <a:tc>
                   <a:txBody>
                     <a:bodyPr wrap="square"/>
@@ -5052,14 +5052,14 @@
                       </a:r>
                     </a:p>
                   </a:txBody>
-                  <a:tcPr anchor="ctr" marL="91440" marR="91440">
+                  <a:tcPr anchor="ctr" marL="91440" marR="91440" marT="36576" marB="36576">
                     <a:solidFill>
                       <a:srgbClr val="FFFFFF"/>
                     </a:solidFill>
                   </a:tcPr>
                 </a:tc>
               </a:tr>
-              <a:tr h="777240">
+              <a:tr h="800100">
                 <a:tc>
                   <a:txBody>
                     <a:bodyPr wrap="square"/>
@@ -5106,14 +5106,14 @@
                       </a:r>
                     </a:p>
                   </a:txBody>
-                  <a:tcPr anchor="ctr" marL="91440" marR="91440">
+                  <a:tcPr anchor="ctr" marL="91440" marR="91440" marT="36576" marB="36576">
                     <a:solidFill>
                       <a:srgbClr val="FFFFFF"/>
                     </a:solidFill>
                   </a:tcPr>
                 </a:tc>
               </a:tr>
-              <a:tr h="777240">
+              <a:tr h="800100">
                 <a:tc>
                   <a:txBody>
                     <a:bodyPr wrap="square"/>
@@ -5179,14 +5179,14 @@
                       </a:r>
                     </a:p>
                   </a:txBody>
-                  <a:tcPr anchor="ctr" marL="91440" marR="91440">
+                  <a:tcPr anchor="ctr" marL="91440" marR="91440" marT="36576" marB="36576">
                     <a:solidFill>
                       <a:srgbClr val="FFFFFF"/>
                     </a:solidFill>
                   </a:tcPr>
                 </a:tc>
               </a:tr>
-              <a:tr h="777240">
+              <a:tr h="800100">
                 <a:tc>
                   <a:txBody>
                     <a:bodyPr wrap="square"/>
@@ -5216,14 +5216,14 @@
                     <a:p>
                       <a:pPr>
                         <a:lnSpc>
-                          <a:spcPct val="100000"/>
+                          <a:spcPct val="108000"/>
                         </a:lnSpc>
                         <a:spcAft>
-                          <a:spcPts val="100"/>
+                          <a:spcPts val="200"/>
                         </a:spcAft>
                       </a:pPr>
                       <a:r>
-                        <a:rPr sz="850">
+                        <a:rPr sz="1000">
                           <a:solidFill>
                             <a:srgbClr val="333333"/>
                           </a:solidFill>
@@ -5235,14 +5235,14 @@
                     <a:p>
                       <a:pPr>
                         <a:lnSpc>
-                          <a:spcPct val="100000"/>
+                          <a:spcPct val="108000"/>
                         </a:lnSpc>
                         <a:spcAft>
-                          <a:spcPts val="100"/>
+                          <a:spcPts val="200"/>
                         </a:spcAft>
                       </a:pPr>
                       <a:r>
-                        <a:rPr sz="850">
+                        <a:rPr sz="1000">
                           <a:solidFill>
                             <a:srgbClr val="333333"/>
                           </a:solidFill>
@@ -5254,81 +5254,43 @@
                     <a:p>
                       <a:pPr>
                         <a:lnSpc>
-                          <a:spcPct val="100000"/>
+                          <a:spcPct val="108000"/>
                         </a:lnSpc>
                         <a:spcAft>
-                          <a:spcPts val="100"/>
+                          <a:spcPts val="200"/>
                         </a:spcAft>
                       </a:pPr>
                       <a:r>
-                        <a:rPr sz="850">
+                        <a:rPr sz="1000">
                           <a:solidFill>
                             <a:srgbClr val="333333"/>
                           </a:solidFill>
                           <a:latin typeface="メイリオ"/>
                         </a:rPr>
-                        <a:t>・追加後に削除した場合、同じミニアプリのポップアップは720時間（30日間）再表示されない</a:t>
+                        <a:t>・再表示制御：追加後に削除すると720時間（30日間）、「Not now」で見送ると14日間は再表示なし</a:t>
                       </a:r>
                     </a:p>
                     <a:p>
                       <a:pPr>
                         <a:lnSpc>
-                          <a:spcPct val="100000"/>
+                          <a:spcPct val="108000"/>
                         </a:lnSpc>
                         <a:spcAft>
-                          <a:spcPts val="100"/>
+                          <a:spcPts val="200"/>
                         </a:spcAft>
                       </a:pPr>
                       <a:r>
-                        <a:rPr sz="850">
+                        <a:rPr sz="1000">
                           <a:solidFill>
                             <a:srgbClr val="333333"/>
                           </a:solidFill>
                           <a:latin typeface="メイリオ"/>
                         </a:rPr>
-                        <a:t>・「Not now」で見送った場合は14日間再表示されない</a:t>
-                      </a:r>
-                    </a:p>
-                    <a:p>
-                      <a:pPr>
-                        <a:lnSpc>
-                          <a:spcPct val="100000"/>
-                        </a:lnSpc>
-                        <a:spcAft>
-                          <a:spcPts val="100"/>
-                        </a:spcAft>
-                      </a:pPr>
-                      <a:r>
-                        <a:rPr sz="850">
-                          <a:solidFill>
-                            <a:srgbClr val="333333"/>
-                          </a:solidFill>
-                          <a:latin typeface="メイリオ"/>
-                        </a:rPr>
-                        <a:t>・同一ミニアプリへの表示上限は2回。2回とも閉じると永久に対象外になる</a:t>
-                      </a:r>
-                    </a:p>
-                    <a:p>
-                      <a:pPr>
-                        <a:lnSpc>
-                          <a:spcPct val="100000"/>
-                        </a:lnSpc>
-                        <a:spcAft>
-                          <a:spcPts val="100"/>
-                        </a:spcAft>
-                      </a:pPr>
-                      <a:r>
-                        <a:rPr sz="850">
-                          <a:solidFill>
-                            <a:srgbClr val="333333"/>
-                          </a:solidFill>
-                          <a:latin typeface="メイリオ"/>
-                        </a:rPr>
-                        <a:t>・同一ユーザーへの表示は1日最大1回（直近表示から24時間以内は非表示）</a:t>
+                        <a:t>・同一ミニアプリへの表示上限2回（閉じ切ると永久対象外）。同一ユーザーは1日最大1回まで</a:t>
                       </a:r>
                     </a:p>
                   </a:txBody>
-                  <a:tcPr anchor="ctr" marL="91440" marR="91440">
+                  <a:tcPr anchor="ctr" marL="91440" marR="91440" marT="36576" marB="36576">
                     <a:solidFill>
                       <a:srgbClr val="FFFFFF"/>
                     </a:solidFill>
@@ -6741,7 +6703,7 @@
         </p:nvGraphicFramePr>
         <p:xfrm>
           <a:off x="544108" y="3068960"/>
-          <a:ext cx="9326880" cy="3108960"/>
+          <a:ext cx="9326880" cy="3200400"/>
         </p:xfrm>
         <a:graphic>
           <a:graphicData uri="http://schemas.openxmlformats.org/drawingml/2006/table">
@@ -6753,7 +6715,7 @@
                 <a:gridCol w="1965960"/>
                 <a:gridCol w="7360920"/>
               </a:tblGrid>
-              <a:tr h="777240">
+              <a:tr h="800100">
                 <a:tc>
                   <a:txBody>
                     <a:bodyPr wrap="square"/>
@@ -6819,14 +6781,14 @@
                       </a:r>
                     </a:p>
                   </a:txBody>
-                  <a:tcPr anchor="ctr" marL="91440" marR="91440">
+                  <a:tcPr anchor="ctr" marL="91440" marR="91440" marT="36576" marB="36576">
                     <a:solidFill>
                       <a:srgbClr val="FFFFFF"/>
                     </a:solidFill>
                   </a:tcPr>
                 </a:tc>
               </a:tr>
-              <a:tr h="777240">
+              <a:tr h="800100">
                 <a:tc>
                   <a:txBody>
                     <a:bodyPr wrap="square"/>
@@ -6873,14 +6835,14 @@
                       </a:r>
                     </a:p>
                   </a:txBody>
-                  <a:tcPr anchor="ctr" marL="91440" marR="91440">
+                  <a:tcPr anchor="ctr" marL="91440" marR="91440" marT="36576" marB="36576">
                     <a:solidFill>
                       <a:srgbClr val="FFFFFF"/>
                     </a:solidFill>
                   </a:tcPr>
                 </a:tc>
               </a:tr>
-              <a:tr h="777240">
+              <a:tr h="800100">
                 <a:tc>
                   <a:txBody>
                     <a:bodyPr wrap="square"/>
@@ -6946,14 +6908,14 @@
                       </a:r>
                     </a:p>
                   </a:txBody>
-                  <a:tcPr anchor="ctr" marL="91440" marR="91440">
+                  <a:tcPr anchor="ctr" marL="91440" marR="91440" marT="36576" marB="36576">
                     <a:solidFill>
                       <a:srgbClr val="FFFFFF"/>
                     </a:solidFill>
                   </a:tcPr>
                 </a:tc>
               </a:tr>
-              <a:tr h="777240">
+              <a:tr h="800100">
                 <a:tc>
                   <a:txBody>
                     <a:bodyPr wrap="square"/>
@@ -7038,7 +7000,7 @@
                       </a:r>
                     </a:p>
                   </a:txBody>
-                  <a:tcPr anchor="ctr" marL="91440" marR="91440">
+                  <a:tcPr anchor="ctr" marL="91440" marR="91440" marT="36576" marB="36576">
                     <a:solidFill>
                       <a:srgbClr val="FFFFFF"/>
                     </a:solidFill>
@@ -8451,7 +8413,7 @@
         </p:nvGraphicFramePr>
         <p:xfrm>
           <a:off x="544108" y="3068960"/>
-          <a:ext cx="9326880" cy="3108960"/>
+          <a:ext cx="9326880" cy="3200400"/>
         </p:xfrm>
         <a:graphic>
           <a:graphicData uri="http://schemas.openxmlformats.org/drawingml/2006/table">
@@ -8463,7 +8425,7 @@
                 <a:gridCol w="1965960"/>
                 <a:gridCol w="7360920"/>
               </a:tblGrid>
-              <a:tr h="777240">
+              <a:tr h="800100">
                 <a:tc>
                   <a:txBody>
                     <a:bodyPr wrap="square"/>
@@ -8493,14 +8455,14 @@
                     <a:p>
                       <a:pPr>
                         <a:lnSpc>
-                          <a:spcPct val="105000"/>
+                          <a:spcPct val="108000"/>
                         </a:lnSpc>
                         <a:spcAft>
-                          <a:spcPts val="150"/>
+                          <a:spcPts val="200"/>
                         </a:spcAft>
                       </a:pPr>
                       <a:r>
-                        <a:rPr sz="950">
+                        <a:rPr sz="1000">
                           <a:solidFill>
                             <a:srgbClr val="333333"/>
                           </a:solidFill>
@@ -8512,14 +8474,14 @@
                     <a:p>
                       <a:pPr>
                         <a:lnSpc>
-                          <a:spcPct val="105000"/>
+                          <a:spcPct val="108000"/>
                         </a:lnSpc>
                         <a:spcAft>
-                          <a:spcPts val="150"/>
+                          <a:spcPts val="200"/>
                         </a:spcAft>
                       </a:pPr>
                       <a:r>
-                        <a:rPr sz="950">
+                        <a:rPr sz="1000">
                           <a:solidFill>
                             <a:srgbClr val="333333"/>
                           </a:solidFill>
@@ -8531,14 +8493,14 @@
                     <a:p>
                       <a:pPr>
                         <a:lnSpc>
-                          <a:spcPct val="105000"/>
+                          <a:spcPct val="108000"/>
                         </a:lnSpc>
                         <a:spcAft>
-                          <a:spcPts val="150"/>
+                          <a:spcPts val="200"/>
                         </a:spcAft>
                       </a:pPr>
                       <a:r>
-                        <a:rPr sz="950">
+                        <a:rPr sz="1000">
                           <a:solidFill>
                             <a:srgbClr val="333333"/>
                           </a:solidFill>
@@ -8548,14 +8510,14 @@
                       </a:r>
                     </a:p>
                   </a:txBody>
-                  <a:tcPr anchor="ctr" marL="91440" marR="91440">
+                  <a:tcPr anchor="ctr" marL="91440" marR="91440" marT="36576" marB="36576">
                     <a:solidFill>
                       <a:srgbClr val="FFFFFF"/>
                     </a:solidFill>
                   </a:tcPr>
                 </a:tc>
               </a:tr>
-              <a:tr h="777240">
+              <a:tr h="800100">
                 <a:tc>
                   <a:txBody>
                     <a:bodyPr wrap="square"/>
@@ -8602,14 +8564,14 @@
                       </a:r>
                     </a:p>
                   </a:txBody>
-                  <a:tcPr anchor="ctr" marL="91440" marR="91440">
+                  <a:tcPr anchor="ctr" marL="91440" marR="91440" marT="36576" marB="36576">
                     <a:solidFill>
                       <a:srgbClr val="FFFFFF"/>
                     </a:solidFill>
                   </a:tcPr>
                 </a:tc>
               </a:tr>
-              <a:tr h="777240">
+              <a:tr h="800100">
                 <a:tc>
                   <a:txBody>
                     <a:bodyPr wrap="square"/>
@@ -8656,14 +8618,14 @@
                       </a:r>
                     </a:p>
                   </a:txBody>
-                  <a:tcPr anchor="ctr" marL="91440" marR="91440">
+                  <a:tcPr anchor="ctr" marL="91440" marR="91440" marT="36576" marB="36576">
                     <a:solidFill>
                       <a:srgbClr val="FFFFFF"/>
                     </a:solidFill>
                   </a:tcPr>
                 </a:tc>
               </a:tr>
-              <a:tr h="777240">
+              <a:tr h="800100">
                 <a:tc>
                   <a:txBody>
                     <a:bodyPr wrap="square"/>
@@ -8693,14 +8655,14 @@
                     <a:p>
                       <a:pPr>
                         <a:lnSpc>
-                          <a:spcPct val="100000"/>
+                          <a:spcPct val="108000"/>
                         </a:lnSpc>
                         <a:spcAft>
-                          <a:spcPts val="100"/>
+                          <a:spcPts val="200"/>
                         </a:spcAft>
                       </a:pPr>
                       <a:r>
-                        <a:rPr sz="850">
+                        <a:rPr sz="1000">
                           <a:solidFill>
                             <a:srgbClr val="333333"/>
                           </a:solidFill>
@@ -8712,52 +8674,33 @@
                     <a:p>
                       <a:pPr>
                         <a:lnSpc>
-                          <a:spcPct val="100000"/>
+                          <a:spcPct val="108000"/>
                         </a:lnSpc>
                         <a:spcAft>
-                          <a:spcPts val="100"/>
+                          <a:spcPts val="200"/>
                         </a:spcAft>
                       </a:pPr>
                       <a:r>
-                        <a:rPr sz="850">
+                        <a:rPr sz="1000">
                           <a:solidFill>
                             <a:srgbClr val="333333"/>
                           </a:solidFill>
                           <a:latin typeface="メイリオ"/>
                         </a:rPr>
-                        <a:t>・サジェスト経由の友だち追加率74.6%（プロモーションスタンプ平均約60%を上回る）</a:t>
+                        <a:t>・サジェスト経由は友だち追加率74.6%・当日ブロック率9.53%（平均約60%・約22%より好水準）</a:t>
                       </a:r>
                     </a:p>
                     <a:p>
                       <a:pPr>
                         <a:lnSpc>
-                          <a:spcPct val="100000"/>
+                          <a:spcPct val="108000"/>
                         </a:lnSpc>
                         <a:spcAft>
-                          <a:spcPts val="100"/>
+                          <a:spcPts val="200"/>
                         </a:spcAft>
                       </a:pPr>
                       <a:r>
-                        <a:rPr sz="850">
-                          <a:solidFill>
-                            <a:srgbClr val="333333"/>
-                          </a:solidFill>
-                          <a:latin typeface="メイリオ"/>
-                        </a:rPr>
-                        <a:t>・サジェスト経由の当日ブロック率9.53%（プロモーションスタンプ平均約22%の半分以下）</a:t>
-                      </a:r>
-                    </a:p>
-                    <a:p>
-                      <a:pPr>
-                        <a:lnSpc>
-                          <a:spcPct val="100000"/>
-                        </a:lnSpc>
-                        <a:spcAft>
-                          <a:spcPts val="100"/>
-                        </a:spcAft>
-                      </a:pPr>
-                      <a:r>
-                        <a:rPr sz="850">
+                        <a:rPr sz="1000">
                           <a:solidFill>
                             <a:srgbClr val="333333"/>
                           </a:solidFill>
@@ -8769,14 +8712,14 @@
                     <a:p>
                       <a:pPr>
                         <a:lnSpc>
-                          <a:spcPct val="100000"/>
+                          <a:spcPct val="108000"/>
                         </a:lnSpc>
                         <a:spcAft>
-                          <a:spcPts val="100"/>
+                          <a:spcPts val="200"/>
                         </a:spcAft>
                       </a:pPr>
                       <a:r>
-                        <a:rPr sz="850">
+                        <a:rPr sz="1000">
                           <a:solidFill>
                             <a:srgbClr val="333333"/>
                           </a:solidFill>
@@ -8786,7 +8729,7 @@
                       </a:r>
                     </a:p>
                   </a:txBody>
-                  <a:tcPr anchor="ctr" marL="91440" marR="91440">
+                  <a:tcPr anchor="ctr" marL="91440" marR="91440" marT="36576" marB="36576">
                     <a:solidFill>
                       <a:srgbClr val="FFFFFF"/>
                     </a:solidFill>
@@ -10199,7 +10142,7 @@
         </p:nvGraphicFramePr>
         <p:xfrm>
           <a:off x="544108" y="3068960"/>
-          <a:ext cx="9326880" cy="3108960"/>
+          <a:ext cx="9326880" cy="3200400"/>
         </p:xfrm>
         <a:graphic>
           <a:graphicData uri="http://schemas.openxmlformats.org/drawingml/2006/table">
@@ -10211,7 +10154,7 @@
                 <a:gridCol w="1965960"/>
                 <a:gridCol w="7360920"/>
               </a:tblGrid>
-              <a:tr h="777240">
+              <a:tr h="800100">
                 <a:tc>
                   <a:txBody>
                     <a:bodyPr wrap="square"/>
@@ -10277,14 +10220,14 @@
                       </a:r>
                     </a:p>
                   </a:txBody>
-                  <a:tcPr anchor="ctr" marL="91440" marR="91440">
+                  <a:tcPr anchor="ctr" marL="91440" marR="91440" marT="36576" marB="36576">
                     <a:solidFill>
                       <a:srgbClr val="FFFFFF"/>
                     </a:solidFill>
                   </a:tcPr>
                 </a:tc>
               </a:tr>
-              <a:tr h="777240">
+              <a:tr h="800100">
                 <a:tc>
                   <a:txBody>
                     <a:bodyPr wrap="square"/>
@@ -10331,14 +10274,14 @@
                       </a:r>
                     </a:p>
                   </a:txBody>
-                  <a:tcPr anchor="ctr" marL="91440" marR="91440">
+                  <a:tcPr anchor="ctr" marL="91440" marR="91440" marT="36576" marB="36576">
                     <a:solidFill>
                       <a:srgbClr val="FFFFFF"/>
                     </a:solidFill>
                   </a:tcPr>
                 </a:tc>
               </a:tr>
-              <a:tr h="777240">
+              <a:tr h="800100">
                 <a:tc>
                   <a:txBody>
                     <a:bodyPr wrap="square"/>
@@ -10385,14 +10328,14 @@
                       </a:r>
                     </a:p>
                   </a:txBody>
-                  <a:tcPr anchor="ctr" marL="91440" marR="91440">
+                  <a:tcPr anchor="ctr" marL="91440" marR="91440" marT="36576" marB="36576">
                     <a:solidFill>
                       <a:srgbClr val="FFFFFF"/>
                     </a:solidFill>
                   </a:tcPr>
                 </a:tc>
               </a:tr>
-              <a:tr h="777240">
+              <a:tr h="800100">
                 <a:tc>
                   <a:txBody>
                     <a:bodyPr wrap="square"/>
@@ -10422,14 +10365,14 @@
                     <a:p>
                       <a:pPr>
                         <a:lnSpc>
-                          <a:spcPct val="100000"/>
+                          <a:spcPct val="108000"/>
                         </a:lnSpc>
                         <a:spcAft>
-                          <a:spcPts val="100"/>
+                          <a:spcPts val="200"/>
                         </a:spcAft>
                       </a:pPr>
                       <a:r>
-                        <a:rPr sz="850">
+                        <a:rPr sz="1000">
                           <a:solidFill>
                             <a:srgbClr val="333333"/>
                           </a:solidFill>
@@ -10441,62 +10384,62 @@
                     <a:p>
                       <a:pPr>
                         <a:lnSpc>
-                          <a:spcPct val="100000"/>
+                          <a:spcPct val="108000"/>
                         </a:lnSpc>
                         <a:spcAft>
-                          <a:spcPts val="100"/>
+                          <a:spcPts val="200"/>
                         </a:spcAft>
                       </a:pPr>
                       <a:r>
-                        <a:rPr sz="850">
+                        <a:rPr sz="1000">
                           <a:solidFill>
                             <a:srgbClr val="333333"/>
                           </a:solidFill>
                           <a:latin typeface="メイリオ"/>
                         </a:rPr>
-                        <a:t>・設定はLINE Developersの「友だち追加オプション」から。デフォルト設定／許可リスト設定の組み合わせで3パターン運用可能</a:t>
+                        <a:t>・設定はLINE Developersの「友だち追加オプション」から。デフォルト／許可リスト設定で3パターン運用可</a:t>
                       </a:r>
                     </a:p>
                     <a:p>
                       <a:pPr>
                         <a:lnSpc>
-                          <a:spcPct val="100000"/>
+                          <a:spcPct val="108000"/>
                         </a:lnSpc>
                         <a:spcAft>
-                          <a:spcPts val="100"/>
+                          <a:spcPts val="200"/>
                         </a:spcAft>
                       </a:pPr>
                       <a:r>
-                        <a:rPr sz="850">
+                        <a:rPr sz="1000">
                           <a:solidFill>
                             <a:srgbClr val="333333"/>
                           </a:solidFill>
                           <a:latin typeface="メイリオ"/>
                         </a:rPr>
-                        <a:t>・紐づけ条件：ミニアプリと同一プロバイダーの公式アカウントであること／操作者がMessaging APIのadmin権限を保有していること。最大1,000件まで紐づけ可</a:t>
+                        <a:t>・紐づけ条件：同一プロバイダーの公式アカウント／admin権限を持つ操作者。最大1,000件まで</a:t>
                       </a:r>
                     </a:p>
                     <a:p>
                       <a:pPr>
                         <a:lnSpc>
-                          <a:spcPct val="100000"/>
+                          <a:spcPct val="108000"/>
                         </a:lnSpc>
                         <a:spcAft>
-                          <a:spcPts val="100"/>
+                          <a:spcPts val="200"/>
                         </a:spcAft>
                       </a:pPr>
                       <a:r>
-                        <a:rPr sz="850">
+                        <a:rPr sz="1000">
                           <a:solidFill>
                             <a:srgbClr val="333333"/>
                           </a:solidFill>
                           <a:latin typeface="メイリオ"/>
                         </a:rPr>
-                        <a:t>・1回の友だち追加誘導で選べるのは1アカウントのみ（同時に複数アカウントへは登録不可）。流入経路ごとにどのアカウントを出すかを判別する</a:t>
+                        <a:t>・1回の誘導で選べるのは1アカウントのみ。流入経路ごとに出し分ける（同時に複数へは登録不可）</a:t>
                       </a:r>
                     </a:p>
                   </a:txBody>
-                  <a:tcPr anchor="ctr" marL="91440" marR="91440">
+                  <a:tcPr anchor="ctr" marL="91440" marR="91440" marT="36576" marB="36576">
                     <a:solidFill>
                       <a:srgbClr val="FFFFFF"/>
                     </a:solidFill>
@@ -11909,7 +11852,7 @@
         </p:nvGraphicFramePr>
         <p:xfrm>
           <a:off x="544108" y="3068960"/>
-          <a:ext cx="9326880" cy="3108960"/>
+          <a:ext cx="9326880" cy="3200400"/>
         </p:xfrm>
         <a:graphic>
           <a:graphicData uri="http://schemas.openxmlformats.org/drawingml/2006/table">
@@ -11921,7 +11864,7 @@
                 <a:gridCol w="1965960"/>
                 <a:gridCol w="7360920"/>
               </a:tblGrid>
-              <a:tr h="777240">
+              <a:tr h="800100">
                 <a:tc>
                   <a:txBody>
                     <a:bodyPr wrap="square"/>
@@ -11987,14 +11930,14 @@
                       </a:r>
                     </a:p>
                   </a:txBody>
-                  <a:tcPr anchor="ctr" marL="91440" marR="91440">
+                  <a:tcPr anchor="ctr" marL="91440" marR="91440" marT="36576" marB="36576">
                     <a:solidFill>
                       <a:srgbClr val="FFFFFF"/>
                     </a:solidFill>
                   </a:tcPr>
                 </a:tc>
               </a:tr>
-              <a:tr h="777240">
+              <a:tr h="800100">
                 <a:tc>
                   <a:txBody>
                     <a:bodyPr wrap="square"/>
@@ -12041,14 +11984,14 @@
                       </a:r>
                     </a:p>
                   </a:txBody>
-                  <a:tcPr anchor="ctr" marL="91440" marR="91440">
+                  <a:tcPr anchor="ctr" marL="91440" marR="91440" marT="36576" marB="36576">
                     <a:solidFill>
                       <a:srgbClr val="FFFFFF"/>
                     </a:solidFill>
                   </a:tcPr>
                 </a:tc>
               </a:tr>
-              <a:tr h="777240">
+              <a:tr h="800100">
                 <a:tc>
                   <a:txBody>
                     <a:bodyPr wrap="square"/>
@@ -12114,14 +12057,14 @@
                       </a:r>
                     </a:p>
                   </a:txBody>
-                  <a:tcPr anchor="ctr" marL="91440" marR="91440">
+                  <a:tcPr anchor="ctr" marL="91440" marR="91440" marT="36576" marB="36576">
                     <a:solidFill>
                       <a:srgbClr val="FFFFFF"/>
                     </a:solidFill>
                   </a:tcPr>
                 </a:tc>
               </a:tr>
-              <a:tr h="777240">
+              <a:tr h="800100">
                 <a:tc>
                   <a:txBody>
                     <a:bodyPr wrap="square"/>
@@ -12206,7 +12149,7 @@
                       </a:r>
                     </a:p>
                   </a:txBody>
-                  <a:tcPr anchor="ctr" marL="91440" marR="91440">
+                  <a:tcPr anchor="ctr" marL="91440" marR="91440" marT="36576" marB="36576">
                     <a:solidFill>
                       <a:srgbClr val="FFFFFF"/>
                     </a:solidFill>
@@ -13619,7 +13562,7 @@
         </p:nvGraphicFramePr>
         <p:xfrm>
           <a:off x="544108" y="3068960"/>
-          <a:ext cx="9326880" cy="3108960"/>
+          <a:ext cx="9326880" cy="3200400"/>
         </p:xfrm>
         <a:graphic>
           <a:graphicData uri="http://schemas.openxmlformats.org/drawingml/2006/table">
@@ -13631,7 +13574,7 @@
                 <a:gridCol w="1965960"/>
                 <a:gridCol w="7360920"/>
               </a:tblGrid>
-              <a:tr h="777240">
+              <a:tr h="800100">
                 <a:tc>
                   <a:txBody>
                     <a:bodyPr wrap="square"/>
@@ -13661,14 +13604,14 @@
                     <a:p>
                       <a:pPr>
                         <a:lnSpc>
-                          <a:spcPct val="105000"/>
+                          <a:spcPct val="108000"/>
                         </a:lnSpc>
                         <a:spcAft>
-                          <a:spcPts val="150"/>
+                          <a:spcPts val="200"/>
                         </a:spcAft>
                       </a:pPr>
                       <a:r>
-                        <a:rPr sz="950">
+                        <a:rPr sz="1000">
                           <a:solidFill>
                             <a:srgbClr val="333333"/>
                           </a:solidFill>
@@ -13680,14 +13623,14 @@
                     <a:p>
                       <a:pPr>
                         <a:lnSpc>
-                          <a:spcPct val="105000"/>
+                          <a:spcPct val="108000"/>
                         </a:lnSpc>
                         <a:spcAft>
-                          <a:spcPts val="150"/>
+                          <a:spcPts val="200"/>
                         </a:spcAft>
                       </a:pPr>
                       <a:r>
-                        <a:rPr sz="950">
+                        <a:rPr sz="1000">
                           <a:solidFill>
                             <a:srgbClr val="333333"/>
                           </a:solidFill>
@@ -13699,14 +13642,14 @@
                     <a:p>
                       <a:pPr>
                         <a:lnSpc>
-                          <a:spcPct val="105000"/>
+                          <a:spcPct val="108000"/>
                         </a:lnSpc>
                         <a:spcAft>
-                          <a:spcPts val="150"/>
+                          <a:spcPts val="200"/>
                         </a:spcAft>
                       </a:pPr>
                       <a:r>
-                        <a:rPr sz="950">
+                        <a:rPr sz="1000">
                           <a:solidFill>
                             <a:srgbClr val="333333"/>
                           </a:solidFill>
@@ -13718,14 +13661,14 @@
                     <a:p>
                       <a:pPr>
                         <a:lnSpc>
-                          <a:spcPct val="105000"/>
+                          <a:spcPct val="108000"/>
                         </a:lnSpc>
                         <a:spcAft>
-                          <a:spcPts val="150"/>
+                          <a:spcPts val="200"/>
                         </a:spcAft>
                       </a:pPr>
                       <a:r>
-                        <a:rPr sz="950">
+                        <a:rPr sz="1000">
                           <a:solidFill>
                             <a:srgbClr val="333333"/>
                           </a:solidFill>
@@ -13735,14 +13678,14 @@
                       </a:r>
                     </a:p>
                   </a:txBody>
-                  <a:tcPr anchor="ctr" marL="91440" marR="91440">
+                  <a:tcPr anchor="ctr" marL="91440" marR="91440" marT="36576" marB="36576">
                     <a:solidFill>
                       <a:srgbClr val="FFFFFF"/>
                     </a:solidFill>
                   </a:tcPr>
                 </a:tc>
               </a:tr>
-              <a:tr h="777240">
+              <a:tr h="800100">
                 <a:tc>
                   <a:txBody>
                     <a:bodyPr wrap="square"/>
@@ -13772,14 +13715,14 @@
                     <a:p>
                       <a:pPr>
                         <a:lnSpc>
-                          <a:spcPct val="105000"/>
+                          <a:spcPct val="108000"/>
                         </a:lnSpc>
                         <a:spcAft>
-                          <a:spcPts val="150"/>
+                          <a:spcPts val="200"/>
                         </a:spcAft>
                       </a:pPr>
                       <a:r>
-                        <a:rPr sz="950">
+                        <a:rPr sz="1000">
                           <a:solidFill>
                             <a:srgbClr val="333333"/>
                           </a:solidFill>
@@ -13791,14 +13734,14 @@
                     <a:p>
                       <a:pPr>
                         <a:lnSpc>
-                          <a:spcPct val="105000"/>
+                          <a:spcPct val="108000"/>
                         </a:lnSpc>
                         <a:spcAft>
-                          <a:spcPts val="150"/>
+                          <a:spcPts val="200"/>
                         </a:spcAft>
                       </a:pPr>
                       <a:r>
-                        <a:rPr sz="950">
+                        <a:rPr sz="1000">
                           <a:solidFill>
                             <a:srgbClr val="333333"/>
                           </a:solidFill>
@@ -13810,14 +13753,14 @@
                     <a:p>
                       <a:pPr>
                         <a:lnSpc>
-                          <a:spcPct val="105000"/>
+                          <a:spcPct val="108000"/>
                         </a:lnSpc>
                         <a:spcAft>
-                          <a:spcPts val="150"/>
+                          <a:spcPts val="200"/>
                         </a:spcAft>
                       </a:pPr>
                       <a:r>
-                        <a:rPr sz="950">
+                        <a:rPr sz="1000">
                           <a:solidFill>
                             <a:srgbClr val="333333"/>
                           </a:solidFill>
@@ -13829,14 +13772,14 @@
                     <a:p>
                       <a:pPr>
                         <a:lnSpc>
-                          <a:spcPct val="105000"/>
+                          <a:spcPct val="108000"/>
                         </a:lnSpc>
                         <a:spcAft>
-                          <a:spcPts val="150"/>
+                          <a:spcPts val="200"/>
                         </a:spcAft>
                       </a:pPr>
                       <a:r>
-                        <a:rPr sz="950">
+                        <a:rPr sz="1000">
                           <a:solidFill>
                             <a:srgbClr val="333333"/>
                           </a:solidFill>
@@ -13846,14 +13789,14 @@
                       </a:r>
                     </a:p>
                   </a:txBody>
-                  <a:tcPr anchor="ctr" marL="91440" marR="91440">
+                  <a:tcPr anchor="ctr" marL="91440" marR="91440" marT="36576" marB="36576">
                     <a:solidFill>
                       <a:srgbClr val="FFFFFF"/>
                     </a:solidFill>
                   </a:tcPr>
                 </a:tc>
               </a:tr>
-              <a:tr h="777240">
+              <a:tr h="800100">
                 <a:tc>
                   <a:txBody>
                     <a:bodyPr wrap="square"/>
@@ -13938,14 +13881,14 @@
                       </a:r>
                     </a:p>
                   </a:txBody>
-                  <a:tcPr anchor="ctr" marL="91440" marR="91440">
+                  <a:tcPr anchor="ctr" marL="91440" marR="91440" marT="36576" marB="36576">
                     <a:solidFill>
                       <a:srgbClr val="FFFFFF"/>
                     </a:solidFill>
                   </a:tcPr>
                 </a:tc>
               </a:tr>
-              <a:tr h="777240">
+              <a:tr h="800100">
                 <a:tc>
                   <a:txBody>
                     <a:bodyPr wrap="square"/>
@@ -13975,14 +13918,14 @@
                     <a:p>
                       <a:pPr>
                         <a:lnSpc>
-                          <a:spcPct val="105000"/>
+                          <a:spcPct val="108000"/>
                         </a:lnSpc>
                         <a:spcAft>
-                          <a:spcPts val="150"/>
+                          <a:spcPts val="200"/>
                         </a:spcAft>
                       </a:pPr>
                       <a:r>
-                        <a:rPr sz="950">
+                        <a:rPr sz="1000">
                           <a:solidFill>
                             <a:srgbClr val="333333"/>
                           </a:solidFill>
@@ -13994,14 +13937,14 @@
                     <a:p>
                       <a:pPr>
                         <a:lnSpc>
-                          <a:spcPct val="105000"/>
+                          <a:spcPct val="108000"/>
                         </a:lnSpc>
                         <a:spcAft>
-                          <a:spcPts val="150"/>
+                          <a:spcPts val="200"/>
                         </a:spcAft>
                       </a:pPr>
                       <a:r>
-                        <a:rPr sz="950">
+                        <a:rPr sz="1000">
                           <a:solidFill>
                             <a:srgbClr val="333333"/>
                           </a:solidFill>
@@ -14013,14 +13956,14 @@
                     <a:p>
                       <a:pPr>
                         <a:lnSpc>
-                          <a:spcPct val="105000"/>
+                          <a:spcPct val="108000"/>
                         </a:lnSpc>
                         <a:spcAft>
-                          <a:spcPts val="150"/>
+                          <a:spcPts val="200"/>
                         </a:spcAft>
                       </a:pPr>
                       <a:r>
-                        <a:rPr sz="950">
+                        <a:rPr sz="1000">
                           <a:solidFill>
                             <a:srgbClr val="333333"/>
                           </a:solidFill>
@@ -14030,7 +13973,7 @@
                       </a:r>
                     </a:p>
                   </a:txBody>
-                  <a:tcPr anchor="ctr" marL="91440" marR="91440">
+                  <a:tcPr anchor="ctr" marL="91440" marR="91440" marT="36576" marB="36576">
                     <a:solidFill>
                       <a:srgbClr val="FFFFFF"/>
                     </a:solidFill>

--- a/LINEOA媒体最新情報_2026年9月トレンドレポート.pptx
+++ b/LINEOA媒体最新情報_2026年9月トレンドレポート.pptx
@@ -3295,28 +3295,6 @@
               </a:rPr>
               <a:t>P.4　　【LINE公式アカウント】「分析」データ参照期間 過去36カ月への変更</a:t>
             </a:r>
-            <a:br>
-              <a:rPr b="1" i="0" lang="ja-JP" sz="1500" u="none" cap="none" strike="noStrike">
-                <a:solidFill>
-                  <a:schemeClr val="dk1"/>
-                </a:solidFill>
-                <a:latin typeface="Meiryo"/>
-                <a:ea typeface="Meiryo"/>
-                <a:cs typeface="Meiryo"/>
-                <a:sym typeface="Meiryo"/>
-              </a:rPr>
-            </a:br>
-            <a:br>
-              <a:rPr b="1" i="0" lang="ja-JP" sz="1500" u="none" cap="none" strike="noStrike">
-                <a:solidFill>
-                  <a:schemeClr val="dk1"/>
-                </a:solidFill>
-                <a:latin typeface="Meiryo"/>
-                <a:ea typeface="Meiryo"/>
-                <a:cs typeface="Meiryo"/>
-                <a:sym typeface="Meiryo"/>
-              </a:rPr>
-            </a:br>
             <a:endParaRPr/>
           </a:p>
           <a:p>

--- a/LINEOA媒体最新情報_2026年9月トレンドレポート.pptx
+++ b/LINEOA媒体最新情報_2026年9月トレンドレポート.pptx
@@ -3984,7 +3984,7 @@
         </p:nvSpPr>
         <p:spPr>
           <a:xfrm>
-            <a:off x="0" y="88175"/>
+            <a:off x="182880" y="88175"/>
             <a:ext cx="7512385" cy="365091"/>
           </a:xfrm>
           <a:prstGeom prst="rect">
@@ -5751,7 +5751,7 @@
         </p:nvSpPr>
         <p:spPr>
           <a:xfrm>
-            <a:off x="0" y="88175"/>
+            <a:off x="182880" y="88175"/>
             <a:ext cx="7512385" cy="365091"/>
           </a:xfrm>
           <a:prstGeom prst="rect">
@@ -7461,7 +7461,7 @@
         </p:nvSpPr>
         <p:spPr>
           <a:xfrm>
-            <a:off x="0" y="88175"/>
+            <a:off x="182880" y="88175"/>
             <a:ext cx="7512385" cy="365091"/>
           </a:xfrm>
           <a:prstGeom prst="rect">
@@ -9190,7 +9190,7 @@
         </p:nvSpPr>
         <p:spPr>
           <a:xfrm>
-            <a:off x="0" y="88175"/>
+            <a:off x="182880" y="88175"/>
             <a:ext cx="7512385" cy="365091"/>
           </a:xfrm>
           <a:prstGeom prst="rect">
@@ -10900,7 +10900,7 @@
         </p:nvSpPr>
         <p:spPr>
           <a:xfrm>
-            <a:off x="0" y="88175"/>
+            <a:off x="182880" y="88175"/>
             <a:ext cx="7512385" cy="365091"/>
           </a:xfrm>
           <a:prstGeom prst="rect">
@@ -12610,7 +12610,7 @@
         </p:nvSpPr>
         <p:spPr>
           <a:xfrm>
-            <a:off x="0" y="88175"/>
+            <a:off x="182880" y="88175"/>
             <a:ext cx="7512385" cy="365091"/>
           </a:xfrm>
           <a:prstGeom prst="rect">

--- a/LINEOA媒体最新情報_2026年9月トレンドレポート.pptx
+++ b/LINEOA媒体最新情報_2026年9月トレンドレポート.pptx
@@ -4926,7 +4926,7 @@
                 <a:gridCol w="1965960"/>
                 <a:gridCol w="7360920"/>
               </a:tblGrid>
-              <a:tr h="800100">
+              <a:tr h="862885">
                 <a:tc>
                   <a:txBody>
                     <a:bodyPr wrap="square"/>
@@ -5037,7 +5037,7 @@
                   </a:tcPr>
                 </a:tc>
               </a:tr>
-              <a:tr h="800100">
+              <a:tr h="457200">
                 <a:tc>
                   <a:txBody>
                     <a:bodyPr wrap="square"/>
@@ -5091,7 +5091,7 @@
                   </a:tcPr>
                 </a:tc>
               </a:tr>
-              <a:tr h="800100">
+              <a:tr h="689019">
                 <a:tc>
                   <a:txBody>
                     <a:bodyPr wrap="square"/>
@@ -5164,7 +5164,7 @@
                   </a:tcPr>
                 </a:tc>
               </a:tr>
-              <a:tr h="800100">
+              <a:tr h="1191296">
                 <a:tc>
                   <a:txBody>
                     <a:bodyPr wrap="square"/>
@@ -6132,6 +6132,1716 @@
                 <a:sym typeface="Meiryo"/>
               </a:rPr>
               <a:t>※社外告知は延期中のため、日程が決まり次第あらためて案内される。</a:t>
+            </a:r>
+            <a:endParaRPr b="1" sz="1400">
+              <a:solidFill>
+                <a:schemeClr val="dk1"/>
+              </a:solidFill>
+              <a:latin typeface="Meiryo"/>
+              <a:ea typeface="Meiryo"/>
+              <a:cs typeface="Meiryo"/>
+              <a:sym typeface="Meiryo"/>
+            </a:endParaRPr>
+          </a:p>
+        </p:txBody>
+      </p:sp>
+      <p:sp>
+        <p:nvSpPr>
+          <p:cNvPr id="52" name="Google Shape;52;p3"/>
+          <p:cNvSpPr/>
+          <p:nvPr/>
+        </p:nvSpPr>
+        <p:spPr>
+          <a:xfrm>
+            <a:off x="351381" y="2714173"/>
+            <a:ext cx="5200000" cy="338554"/>
+          </a:xfrm>
+          <a:prstGeom prst="rect">
+            <a:avLst/>
+          </a:prstGeom>
+          <a:noFill/>
+          <a:ln>
+            <a:noFill/>
+          </a:ln>
+        </p:spPr>
+        <p:txBody>
+          <a:bodyPr anchorCtr="0" anchor="t" bIns="45700" lIns="91425" spcFirstLastPara="1" rIns="91425" wrap="square" tIns="45700">
+            <a:noAutofit/>
+          </a:bodyPr>
+          <a:lstStyle/>
+          <a:p>
+            <a:pPr indent="0" lvl="0" marL="0" marR="0" rtl="0" algn="l">
+              <a:spcBef>
+                <a:spcPts val="0"/>
+              </a:spcBef>
+              <a:spcAft>
+                <a:spcPts val="0"/>
+              </a:spcAft>
+              <a:buNone/>
+            </a:pPr>
+            <a:r>
+              <a:rPr b="1" lang="ja-JP" sz="1400">
+                <a:solidFill>
+                  <a:srgbClr val="15133D"/>
+                </a:solidFill>
+                <a:latin typeface="Meiryo"/>
+                <a:ea typeface="Meiryo"/>
+                <a:cs typeface="Meiryo"/>
+                <a:sym typeface="Meiryo"/>
+              </a:rPr>
+              <a:t>■ 詳細</a:t>
+            </a:r>
+            <a:endParaRPr/>
+          </a:p>
+        </p:txBody>
+      </p:sp>
+      <p:grpSp>
+        <p:nvGrpSpPr>
+          <p:cNvPr id="53" name="Google Shape;53;p3"/>
+          <p:cNvGrpSpPr/>
+          <p:nvPr/>
+        </p:nvGrpSpPr>
+        <p:grpSpPr>
+          <a:xfrm>
+            <a:off x="8473303" y="730955"/>
+            <a:ext cx="1376241" cy="1131930"/>
+            <a:chOff x="0" y="0"/>
+            <a:chExt cx="1376241" cy="1131930"/>
+          </a:xfrm>
+        </p:grpSpPr>
+        <p:sp>
+          <p:nvSpPr>
+            <p:cNvPr id="54" name="Google Shape;54;p3"/>
+            <p:cNvSpPr/>
+            <p:nvPr/>
+          </p:nvSpPr>
+          <p:spPr>
+            <a:xfrm rot="10800000">
+              <a:off x="0" y="0"/>
+              <a:ext cx="1376241" cy="282982"/>
+            </a:xfrm>
+            <a:prstGeom prst="trapezoid">
+              <a:avLst>
+                <a:gd fmla="val 60792" name="adj"/>
+              </a:avLst>
+            </a:prstGeom>
+            <a:solidFill>
+              <a:srgbClr val="EAEDF5"/>
+            </a:solidFill>
+            <a:ln cap="flat" cmpd="sng" w="25400">
+              <a:solidFill>
+                <a:schemeClr val="dk2"/>
+              </a:solidFill>
+              <a:prstDash val="solid"/>
+              <a:round/>
+              <a:headEnd len="sm" w="sm" type="none"/>
+              <a:tailEnd len="sm" w="sm" type="none"/>
+            </a:ln>
+          </p:spPr>
+          <p:txBody>
+            <a:bodyPr anchorCtr="0" anchor="ctr" bIns="91425" lIns="91425" spcFirstLastPara="1" rIns="91425" wrap="square" tIns="91425">
+              <a:noAutofit/>
+            </a:bodyPr>
+            <a:lstStyle/>
+            <a:p>
+              <a:pPr indent="0" lvl="0" marL="0" rtl="0" algn="l">
+                <a:spcBef>
+                  <a:spcPts val="0"/>
+                </a:spcBef>
+                <a:spcAft>
+                  <a:spcPts val="0"/>
+                </a:spcAft>
+                <a:buNone/>
+              </a:pPr>
+              <a:r>
+                <a:t/>
+              </a:r>
+              <a:endParaRPr/>
+            </a:p>
+          </p:txBody>
+        </p:sp>
+        <p:sp>
+          <p:nvSpPr>
+            <p:cNvPr id="55" name="Google Shape;55;p3"/>
+            <p:cNvSpPr txBox="1"/>
+            <p:nvPr/>
+          </p:nvSpPr>
+          <p:spPr>
+            <a:xfrm>
+              <a:off x="240842" y="0"/>
+              <a:ext cx="894556" cy="282982"/>
+            </a:xfrm>
+            <a:prstGeom prst="rect">
+              <a:avLst/>
+            </a:prstGeom>
+            <a:noFill/>
+            <a:ln>
+              <a:noFill/>
+            </a:ln>
+          </p:spPr>
+          <p:txBody>
+            <a:bodyPr anchorCtr="0" anchor="ctr" bIns="10150" lIns="10150" spcFirstLastPara="1" rIns="10150" wrap="square" tIns="10150">
+              <a:noAutofit/>
+            </a:bodyPr>
+            <a:lstStyle/>
+            <a:p>
+              <a:pPr indent="0" lvl="0" marL="0" marR="0" rtl="0" algn="ctr">
+                <a:lnSpc>
+                  <a:spcPct val="90000"/>
+                </a:lnSpc>
+                <a:spcBef>
+                  <a:spcPts val="0"/>
+                </a:spcBef>
+                <a:spcAft>
+                  <a:spcPts val="0"/>
+                </a:spcAft>
+                <a:buClr>
+                  <a:srgbClr val="262626"/>
+                </a:buClr>
+                <a:buSzPts val="800"/>
+                <a:buFont typeface="Arial"/>
+                <a:buNone/>
+              </a:pPr>
+              <a:r>
+                <a:rPr b="1" lang="ja-JP" sz="800">
+                  <a:solidFill>
+                    <a:srgbClr val="262626"/>
+                  </a:solidFill>
+                  <a:latin typeface="Arial"/>
+                  <a:ea typeface="Arial"/>
+                  <a:cs typeface="Arial"/>
+                  <a:sym typeface="Arial"/>
+                </a:rPr>
+                <a:t>認知</a:t>
+              </a:r>
+              <a:endParaRPr/>
+            </a:p>
+          </p:txBody>
+        </p:sp>
+        <p:sp>
+          <p:nvSpPr>
+            <p:cNvPr id="56" name="Google Shape;56;p3"/>
+            <p:cNvSpPr/>
+            <p:nvPr/>
+          </p:nvSpPr>
+          <p:spPr>
+            <a:xfrm rot="10800000">
+              <a:off x="172030" y="282982"/>
+              <a:ext cx="1032180" cy="282982"/>
+            </a:xfrm>
+            <a:prstGeom prst="trapezoid">
+              <a:avLst>
+                <a:gd fmla="val 60792" name="adj"/>
+              </a:avLst>
+            </a:prstGeom>
+            <a:solidFill>
+              <a:schemeClr val="lt1"/>
+            </a:solidFill>
+            <a:ln cap="flat" cmpd="sng" w="25400">
+              <a:solidFill>
+                <a:schemeClr val="dk2"/>
+              </a:solidFill>
+              <a:prstDash val="solid"/>
+              <a:round/>
+              <a:headEnd len="sm" w="sm" type="none"/>
+              <a:tailEnd len="sm" w="sm" type="none"/>
+            </a:ln>
+          </p:spPr>
+          <p:txBody>
+            <a:bodyPr anchorCtr="0" anchor="ctr" bIns="91425" lIns="91425" spcFirstLastPara="1" rIns="91425" wrap="square" tIns="91425">
+              <a:noAutofit/>
+            </a:bodyPr>
+            <a:lstStyle/>
+            <a:p>
+              <a:pPr indent="0" lvl="0" marL="0" rtl="0" algn="l">
+                <a:spcBef>
+                  <a:spcPts val="0"/>
+                </a:spcBef>
+                <a:spcAft>
+                  <a:spcPts val="0"/>
+                </a:spcAft>
+                <a:buNone/>
+              </a:pPr>
+              <a:r>
+                <a:t/>
+              </a:r>
+              <a:endParaRPr/>
+            </a:p>
+          </p:txBody>
+        </p:sp>
+        <p:sp>
+          <p:nvSpPr>
+            <p:cNvPr id="57" name="Google Shape;57;p3"/>
+            <p:cNvSpPr txBox="1"/>
+            <p:nvPr/>
+          </p:nvSpPr>
+          <p:spPr>
+            <a:xfrm>
+              <a:off x="352661" y="282982"/>
+              <a:ext cx="670917" cy="282982"/>
+            </a:xfrm>
+            <a:prstGeom prst="rect">
+              <a:avLst/>
+            </a:prstGeom>
+            <a:noFill/>
+            <a:ln>
+              <a:noFill/>
+            </a:ln>
+          </p:spPr>
+          <p:txBody>
+            <a:bodyPr anchorCtr="0" anchor="ctr" bIns="10150" lIns="10150" spcFirstLastPara="1" rIns="10150" wrap="square" tIns="10150">
+              <a:noAutofit/>
+            </a:bodyPr>
+            <a:lstStyle/>
+            <a:p>
+              <a:pPr indent="0" lvl="0" marL="0" marR="0" rtl="0" algn="ctr">
+                <a:lnSpc>
+                  <a:spcPct val="90000"/>
+                </a:lnSpc>
+                <a:spcBef>
+                  <a:spcPts val="0"/>
+                </a:spcBef>
+                <a:spcAft>
+                  <a:spcPts val="0"/>
+                </a:spcAft>
+                <a:buClr>
+                  <a:srgbClr val="262626"/>
+                </a:buClr>
+                <a:buSzPts val="800"/>
+                <a:buFont typeface="Arial"/>
+                <a:buNone/>
+              </a:pPr>
+              <a:r>
+                <a:rPr b="1" lang="ja-JP" sz="800">
+                  <a:solidFill>
+                    <a:srgbClr val="262626"/>
+                  </a:solidFill>
+                  <a:latin typeface="Arial"/>
+                  <a:ea typeface="Arial"/>
+                  <a:cs typeface="Arial"/>
+                  <a:sym typeface="Arial"/>
+                </a:rPr>
+                <a:t>検討</a:t>
+              </a:r>
+              <a:endParaRPr/>
+            </a:p>
+          </p:txBody>
+        </p:sp>
+        <p:sp>
+          <p:nvSpPr>
+            <p:cNvPr id="58" name="Google Shape;58;p3"/>
+            <p:cNvSpPr/>
+            <p:nvPr/>
+          </p:nvSpPr>
+          <p:spPr>
+            <a:xfrm rot="10800000">
+              <a:off x="344060" y="565965"/>
+              <a:ext cx="688120" cy="282982"/>
+            </a:xfrm>
+            <a:prstGeom prst="trapezoid">
+              <a:avLst>
+                <a:gd fmla="val 60792" name="adj"/>
+              </a:avLst>
+            </a:prstGeom>
+            <a:solidFill>
+              <a:schemeClr val="lt1"/>
+            </a:solidFill>
+            <a:ln cap="flat" cmpd="sng" w="25400">
+              <a:solidFill>
+                <a:schemeClr val="dk2"/>
+              </a:solidFill>
+              <a:prstDash val="solid"/>
+              <a:round/>
+              <a:headEnd len="sm" w="sm" type="none"/>
+              <a:tailEnd len="sm" w="sm" type="none"/>
+            </a:ln>
+          </p:spPr>
+          <p:txBody>
+            <a:bodyPr anchorCtr="0" anchor="ctr" bIns="91425" lIns="91425" spcFirstLastPara="1" rIns="91425" wrap="square" tIns="91425">
+              <a:noAutofit/>
+            </a:bodyPr>
+            <a:lstStyle/>
+            <a:p>
+              <a:pPr indent="0" lvl="0" marL="0" rtl="0" algn="l">
+                <a:spcBef>
+                  <a:spcPts val="0"/>
+                </a:spcBef>
+                <a:spcAft>
+                  <a:spcPts val="0"/>
+                </a:spcAft>
+                <a:buNone/>
+              </a:pPr>
+              <a:r>
+                <a:t/>
+              </a:r>
+              <a:endParaRPr/>
+            </a:p>
+          </p:txBody>
+        </p:sp>
+        <p:sp>
+          <p:nvSpPr>
+            <p:cNvPr id="59" name="Google Shape;59;p3"/>
+            <p:cNvSpPr txBox="1"/>
+            <p:nvPr/>
+          </p:nvSpPr>
+          <p:spPr>
+            <a:xfrm>
+              <a:off x="464481" y="565965"/>
+              <a:ext cx="447278" cy="282982"/>
+            </a:xfrm>
+            <a:prstGeom prst="rect">
+              <a:avLst/>
+            </a:prstGeom>
+            <a:noFill/>
+            <a:ln>
+              <a:noFill/>
+            </a:ln>
+          </p:spPr>
+          <p:txBody>
+            <a:bodyPr anchorCtr="0" anchor="ctr" bIns="10150" lIns="10150" spcFirstLastPara="1" rIns="10150" wrap="square" tIns="10150">
+              <a:noAutofit/>
+            </a:bodyPr>
+            <a:lstStyle/>
+            <a:p>
+              <a:pPr indent="0" lvl="0" marL="0" marR="0" rtl="0" algn="ctr">
+                <a:lnSpc>
+                  <a:spcPct val="90000"/>
+                </a:lnSpc>
+                <a:spcBef>
+                  <a:spcPts val="0"/>
+                </a:spcBef>
+                <a:spcAft>
+                  <a:spcPts val="0"/>
+                </a:spcAft>
+                <a:buClr>
+                  <a:srgbClr val="262626"/>
+                </a:buClr>
+                <a:buSzPts val="800"/>
+                <a:buFont typeface="Arial"/>
+                <a:buNone/>
+              </a:pPr>
+              <a:r>
+                <a:rPr b="1" lang="ja-JP" sz="800">
+                  <a:solidFill>
+                    <a:srgbClr val="262626"/>
+                  </a:solidFill>
+                  <a:latin typeface="Arial"/>
+                  <a:ea typeface="Arial"/>
+                  <a:cs typeface="Arial"/>
+                  <a:sym typeface="Arial"/>
+                </a:rPr>
+                <a:t>獲得</a:t>
+              </a:r>
+              <a:endParaRPr/>
+            </a:p>
+          </p:txBody>
+        </p:sp>
+        <p:sp>
+          <p:nvSpPr>
+            <p:cNvPr id="60" name="Google Shape;60;p3"/>
+            <p:cNvSpPr/>
+            <p:nvPr/>
+          </p:nvSpPr>
+          <p:spPr>
+            <a:xfrm rot="10800000">
+              <a:off x="516090" y="848948"/>
+              <a:ext cx="344060" cy="282982"/>
+            </a:xfrm>
+            <a:prstGeom prst="trapezoid">
+              <a:avLst>
+                <a:gd fmla="val 60792" name="adj"/>
+              </a:avLst>
+            </a:prstGeom>
+            <a:noFill/>
+            <a:ln cap="flat" cmpd="sng" w="25400">
+              <a:solidFill>
+                <a:schemeClr val="dk2"/>
+              </a:solidFill>
+              <a:prstDash val="solid"/>
+              <a:round/>
+              <a:headEnd len="sm" w="sm" type="none"/>
+              <a:tailEnd len="sm" w="sm" type="none"/>
+            </a:ln>
+          </p:spPr>
+          <p:txBody>
+            <a:bodyPr anchorCtr="0" anchor="ctr" bIns="91425" lIns="91425" spcFirstLastPara="1" rIns="91425" wrap="square" tIns="91425">
+              <a:noAutofit/>
+            </a:bodyPr>
+            <a:lstStyle/>
+            <a:p>
+              <a:pPr indent="0" lvl="0" marL="0" rtl="0" algn="l">
+                <a:spcBef>
+                  <a:spcPts val="0"/>
+                </a:spcBef>
+                <a:spcAft>
+                  <a:spcPts val="0"/>
+                </a:spcAft>
+                <a:buNone/>
+              </a:pPr>
+              <a:r>
+                <a:t/>
+              </a:r>
+              <a:endParaRPr/>
+            </a:p>
+          </p:txBody>
+        </p:sp>
+        <p:sp>
+          <p:nvSpPr>
+            <p:cNvPr id="61" name="Google Shape;61;p3"/>
+            <p:cNvSpPr txBox="1"/>
+            <p:nvPr/>
+          </p:nvSpPr>
+          <p:spPr>
+            <a:xfrm>
+              <a:off x="516090" y="848948"/>
+              <a:ext cx="344060" cy="282982"/>
+            </a:xfrm>
+            <a:prstGeom prst="rect">
+              <a:avLst/>
+            </a:prstGeom>
+            <a:noFill/>
+            <a:ln>
+              <a:noFill/>
+            </a:ln>
+          </p:spPr>
+          <p:txBody>
+            <a:bodyPr anchorCtr="0" anchor="ctr" bIns="10150" lIns="10150" spcFirstLastPara="1" rIns="10150" wrap="square" tIns="10150">
+              <a:noAutofit/>
+            </a:bodyPr>
+            <a:lstStyle/>
+            <a:p>
+              <a:pPr indent="0" lvl="0" marL="0" marR="0" rtl="0" algn="ctr">
+                <a:lnSpc>
+                  <a:spcPct val="90000"/>
+                </a:lnSpc>
+                <a:spcBef>
+                  <a:spcPts val="0"/>
+                </a:spcBef>
+                <a:spcAft>
+                  <a:spcPts val="0"/>
+                </a:spcAft>
+                <a:buClr>
+                  <a:srgbClr val="262626"/>
+                </a:buClr>
+                <a:buSzPts val="800"/>
+                <a:buFont typeface="Arial"/>
+                <a:buNone/>
+              </a:pPr>
+              <a:r>
+                <a:rPr b="1" lang="ja-JP" sz="800">
+                  <a:solidFill>
+                    <a:srgbClr val="262626"/>
+                  </a:solidFill>
+                  <a:latin typeface="Arial"/>
+                  <a:ea typeface="Arial"/>
+                  <a:cs typeface="Arial"/>
+                  <a:sym typeface="Arial"/>
+                </a:rPr>
+                <a:t>伸長</a:t>
+              </a:r>
+              <a:endParaRPr/>
+            </a:p>
+          </p:txBody>
+        </p:sp>
+      </p:grpSp>
+      <p:pic>
+        <p:nvPicPr>
+          <p:cNvPr descr="LINE公式アカウントのロゴの使用方法とは？種類やダウンロード方法、利用時の注意点を紹介 | Mico（ミコ）" id="62" name="Google Shape;62;p3"/>
+          <p:cNvPicPr preferRelativeResize="0"/>
+          <p:nvPr/>
+        </p:nvPicPr>
+        <p:blipFill rotWithShape="1">
+          <a:blip r:embed="rId2">
+            <a:alphaModFix/>
+          </a:blip>
+          <a:srcRect b="0" l="0" r="0" t="0"/>
+          <a:stretch/>
+        </p:blipFill>
+        <p:spPr>
+          <a:xfrm>
+            <a:off x="351381" y="1234746"/>
+            <a:ext cx="656177" cy="655521"/>
+          </a:xfrm>
+          <a:prstGeom prst="rect">
+            <a:avLst/>
+          </a:prstGeom>
+          <a:noFill/>
+          <a:ln>
+            <a:noFill/>
+          </a:ln>
+        </p:spPr>
+      </p:pic>
+      <p:graphicFrame>
+        <p:nvGraphicFramePr>
+          <p:cNvPr id="63" name="Table 62"/>
+          <p:cNvGraphicFramePr>
+            <a:graphicFrameLocks noGrp="1"/>
+          </p:cNvGraphicFramePr>
+          <p:nvPr/>
+        </p:nvGraphicFramePr>
+        <p:xfrm>
+          <a:off x="544108" y="3068960"/>
+          <a:ext cx="9326880" cy="3200399"/>
+        </p:xfrm>
+        <a:graphic>
+          <a:graphicData uri="http://schemas.openxmlformats.org/drawingml/2006/table">
+            <a:tbl>
+              <a:tblPr firstRow="1" bandRow="1">
+                <a:tableStyleId>{5C22544A-7EE6-4342-B048-85BDC9FD1C3A}</a:tableStyleId>
+              </a:tblPr>
+              <a:tblGrid>
+                <a:gridCol w="1965960"/>
+                <a:gridCol w="7360920"/>
+              </a:tblGrid>
+              <a:tr h="920859">
+                <a:tc>
+                  <a:txBody>
+                    <a:bodyPr wrap="square"/>
+                    <a:lstStyle/>
+                    <a:p>
+                      <a:r>
+                        <a:rPr sz="1000" b="1">
+                          <a:solidFill>
+                            <a:srgbClr val="FFFFFF"/>
+                          </a:solidFill>
+                          <a:latin typeface="メイリオ"/>
+                        </a:rPr>
+                        <a:t>概要・変更点</a:t>
+                      </a:r>
+                    </a:p>
+                  </a:txBody>
+                  <a:tcPr anchor="ctr" marL="73152" marR="45720">
+                    <a:solidFill>
+                      <a:srgbClr val="15133D"/>
+                    </a:solidFill>
+                  </a:tcPr>
+                </a:tc>
+                <a:tc>
+                  <a:txBody>
+                    <a:bodyPr wrap="square"/>
+                    <a:lstStyle/>
+                    <a:p>
+                      <a:pPr>
+                        <a:lnSpc>
+                          <a:spcPct val="115000"/>
+                        </a:lnSpc>
+                        <a:spcAft>
+                          <a:spcPts val="300"/>
+                        </a:spcAft>
+                      </a:pPr>
+                      <a:r>
+                        <a:rPr sz="1100">
+                          <a:solidFill>
+                            <a:srgbClr val="333333"/>
+                          </a:solidFill>
+                          <a:latin typeface="メイリオ"/>
+                        </a:rPr>
+                        <a:t>・Web版管理画面／管理アプリの「分析」タブで確認できる実績値の参照期間を過去36カ月までに変更</a:t>
+                      </a:r>
+                    </a:p>
+                    <a:p>
+                      <a:pPr>
+                        <a:lnSpc>
+                          <a:spcPct val="115000"/>
+                        </a:lnSpc>
+                        <a:spcAft>
+                          <a:spcPts val="300"/>
+                        </a:spcAft>
+                      </a:pPr>
+                      <a:r>
+                        <a:rPr sz="1100">
+                          <a:solidFill>
+                            <a:srgbClr val="333333"/>
+                          </a:solidFill>
+                          <a:latin typeface="メイリオ"/>
+                        </a:rPr>
+                        <a:t>・対象は「分析」タブの実績値のみ。それ以外のデータや作成済みメッセージには影響なし</a:t>
+                      </a:r>
+                    </a:p>
+                  </a:txBody>
+                  <a:tcPr anchor="ctr" marL="91440" marR="91440" marT="36576" marB="36576">
+                    <a:solidFill>
+                      <a:srgbClr val="FFFFFF"/>
+                    </a:solidFill>
+                  </a:tcPr>
+                </a:tc>
+              </a:tr>
+              <a:tr h="457200">
+                <a:tc>
+                  <a:txBody>
+                    <a:bodyPr wrap="square"/>
+                    <a:lstStyle/>
+                    <a:p>
+                      <a:r>
+                        <a:rPr sz="1000" b="1">
+                          <a:solidFill>
+                            <a:srgbClr val="FFFFFF"/>
+                          </a:solidFill>
+                          <a:latin typeface="メイリオ"/>
+                        </a:rPr>
+                        <a:t>料金体系・出稿条件</a:t>
+                      </a:r>
+                    </a:p>
+                  </a:txBody>
+                  <a:tcPr anchor="ctr" marL="73152" marR="45720">
+                    <a:solidFill>
+                      <a:srgbClr val="15133D"/>
+                    </a:solidFill>
+                  </a:tcPr>
+                </a:tc>
+                <a:tc>
+                  <a:txBody>
+                    <a:bodyPr wrap="square"/>
+                    <a:lstStyle/>
+                    <a:p>
+                      <a:pPr>
+                        <a:lnSpc>
+                          <a:spcPct val="115000"/>
+                        </a:lnSpc>
+                        <a:spcAft>
+                          <a:spcPts val="300"/>
+                        </a:spcAft>
+                      </a:pPr>
+                      <a:r>
+                        <a:rPr sz="1100">
+                          <a:solidFill>
+                            <a:srgbClr val="333333"/>
+                          </a:solidFill>
+                          <a:latin typeface="メイリオ"/>
+                        </a:rPr>
+                        <a:t>・該当なし</a:t>
+                      </a:r>
+                    </a:p>
+                  </a:txBody>
+                  <a:tcPr anchor="ctr" marL="91440" marR="91440" marT="36576" marB="36576">
+                    <a:solidFill>
+                      <a:srgbClr val="FFFFFF"/>
+                    </a:solidFill>
+                  </a:tcPr>
+                </a:tc>
+              </a:tr>
+              <a:tr h="862728">
+                <a:tc>
+                  <a:txBody>
+                    <a:bodyPr wrap="square"/>
+                    <a:lstStyle/>
+                    <a:p>
+                      <a:r>
+                        <a:rPr sz="1000" b="1">
+                          <a:solidFill>
+                            <a:srgbClr val="FFFFFF"/>
+                          </a:solidFill>
+                          <a:latin typeface="メイリオ"/>
+                        </a:rPr>
+                        <a:t>スケジュール・導入フロー</a:t>
+                      </a:r>
+                    </a:p>
+                  </a:txBody>
+                  <a:tcPr anchor="ctr" marL="73152" marR="45720">
+                    <a:solidFill>
+                      <a:srgbClr val="15133D"/>
+                    </a:solidFill>
+                  </a:tcPr>
+                </a:tc>
+                <a:tc>
+                  <a:txBody>
+                    <a:bodyPr wrap="square"/>
+                    <a:lstStyle/>
+                    <a:p>
+                      <a:pPr>
+                        <a:lnSpc>
+                          <a:spcPct val="115000"/>
+                        </a:lnSpc>
+                        <a:spcAft>
+                          <a:spcPts val="300"/>
+                        </a:spcAft>
+                      </a:pPr>
+                      <a:r>
+                        <a:rPr sz="1100">
+                          <a:solidFill>
+                            <a:srgbClr val="333333"/>
+                          </a:solidFill>
+                          <a:latin typeface="メイリオ"/>
+                        </a:rPr>
+                        <a:t>・リリース日：2026年11月頃（予定・日程は決まり次第、管理画面のお知らせで案内）</a:t>
+                      </a:r>
+                    </a:p>
+                    <a:p>
+                      <a:pPr>
+                        <a:lnSpc>
+                          <a:spcPct val="115000"/>
+                        </a:lnSpc>
+                        <a:spcAft>
+                          <a:spcPts val="300"/>
+                        </a:spcAft>
+                      </a:pPr>
+                      <a:r>
+                        <a:rPr sz="1100">
+                          <a:solidFill>
+                            <a:srgbClr val="333333"/>
+                          </a:solidFill>
+                          <a:latin typeface="メイリオ"/>
+                        </a:rPr>
+                        <a:t>・社外告知：当初9/2予定だったが内容変更の可能性ありいったん延期。改めて案内予定</a:t>
+                      </a:r>
+                    </a:p>
+                  </a:txBody>
+                  <a:tcPr anchor="ctr" marL="91440" marR="91440" marT="36576" marB="36576">
+                    <a:solidFill>
+                      <a:srgbClr val="FFFFFF"/>
+                    </a:solidFill>
+                  </a:tcPr>
+                </a:tc>
+              </a:tr>
+              <a:tr h="959612">
+                <a:tc>
+                  <a:txBody>
+                    <a:bodyPr wrap="square"/>
+                    <a:lstStyle/>
+                    <a:p>
+                      <a:r>
+                        <a:rPr sz="1000" b="1">
+                          <a:solidFill>
+                            <a:srgbClr val="FFFFFF"/>
+                          </a:solidFill>
+                          <a:latin typeface="メイリオ"/>
+                        </a:rPr>
+                        <a:t>注意点・影響</a:t>
+                      </a:r>
+                    </a:p>
+                  </a:txBody>
+                  <a:tcPr anchor="ctr" marL="73152" marR="45720">
+                    <a:solidFill>
+                      <a:srgbClr val="15133D"/>
+                    </a:solidFill>
+                  </a:tcPr>
+                </a:tc>
+                <a:tc>
+                  <a:txBody>
+                    <a:bodyPr wrap="square"/>
+                    <a:lstStyle/>
+                    <a:p>
+                      <a:pPr>
+                        <a:lnSpc>
+                          <a:spcPct val="115000"/>
+                        </a:lnSpc>
+                        <a:spcAft>
+                          <a:spcPts val="300"/>
+                        </a:spcAft>
+                      </a:pPr>
+                      <a:r>
+                        <a:rPr sz="1100">
+                          <a:solidFill>
+                            <a:srgbClr val="333333"/>
+                          </a:solidFill>
+                          <a:latin typeface="メイリオ"/>
+                        </a:rPr>
+                        <a:t>・36カ月より前の実績データが必要なクライアントには変更前の確認・保存を案内</a:t>
+                      </a:r>
+                    </a:p>
+                    <a:p>
+                      <a:pPr>
+                        <a:lnSpc>
+                          <a:spcPct val="115000"/>
+                        </a:lnSpc>
+                        <a:spcAft>
+                          <a:spcPts val="300"/>
+                        </a:spcAft>
+                      </a:pPr>
+                      <a:r>
+                        <a:rPr sz="1100">
+                          <a:solidFill>
+                            <a:srgbClr val="333333"/>
+                          </a:solidFill>
+                          <a:latin typeface="メイリオ"/>
+                        </a:rPr>
+                        <a:t>・「分析」タブの一部データはダウンロード可能（詳細は分析マニュアル参照）</a:t>
+                      </a:r>
+                    </a:p>
+                    <a:p>
+                      <a:pPr>
+                        <a:lnSpc>
+                          <a:spcPct val="115000"/>
+                        </a:lnSpc>
+                        <a:spcAft>
+                          <a:spcPts val="300"/>
+                        </a:spcAft>
+                      </a:pPr>
+                      <a:r>
+                        <a:rPr sz="1100">
+                          <a:solidFill>
+                            <a:srgbClr val="333333"/>
+                          </a:solidFill>
+                          <a:latin typeface="メイリオ"/>
+                        </a:rPr>
+                        <a:t>・告知日程が流動的なため最新情報を要確認</a:t>
+                      </a:r>
+                    </a:p>
+                  </a:txBody>
+                  <a:tcPr anchor="ctr" marL="91440" marR="91440" marT="36576" marB="36576">
+                    <a:solidFill>
+                      <a:srgbClr val="FFFFFF"/>
+                    </a:solidFill>
+                  </a:tcPr>
+                </a:tc>
+              </a:tr>
+            </a:tbl>
+          </a:graphicData>
+        </a:graphic>
+      </p:graphicFrame>
+    </p:spTree>
+  </p:cSld>
+  <p:clrMapOvr>
+    <a:masterClrMapping/>
+  </p:clrMapOvr>
+</p:sld>
+</file>
+
+<file path=ppt/slides/slide5.xml><?xml version="1.0" encoding="utf-8"?>
+<p:sld xmlns:a="http://schemas.openxmlformats.org/drawingml/2006/main" xmlns:p="http://schemas.openxmlformats.org/presentationml/2006/main" xmlns:r="http://schemas.openxmlformats.org/officeDocument/2006/relationships">
+  <p:cSld>
+    <p:spTree>
+      <p:nvGrpSpPr>
+        <p:cNvPr id="1" name=""/>
+        <p:cNvGrpSpPr/>
+        <p:nvPr/>
+      </p:nvGrpSpPr>
+      <p:grpSpPr/>
+      <p:sp>
+        <p:nvSpPr>
+          <p:cNvPr id="40" name="Google Shape;40;p3"/>
+          <p:cNvSpPr/>
+          <p:nvPr/>
+        </p:nvSpPr>
+        <p:spPr>
+          <a:xfrm>
+            <a:off x="292801" y="730955"/>
+            <a:ext cx="1296144" cy="435690"/>
+          </a:xfrm>
+          <a:prstGeom prst="rect">
+            <a:avLst/>
+          </a:prstGeom>
+          <a:solidFill>
+            <a:schemeClr val="dk2"/>
+          </a:solidFill>
+          <a:ln cap="flat" cmpd="sng" w="9525">
+            <a:solidFill>
+              <a:srgbClr val="4A7DBA"/>
+            </a:solidFill>
+            <a:prstDash val="solid"/>
+            <a:round/>
+            <a:headEnd len="sm" w="sm" type="none"/>
+            <a:tailEnd len="sm" w="sm" type="none"/>
+          </a:ln>
+        </p:spPr>
+        <p:txBody>
+          <a:bodyPr anchorCtr="0" anchor="ctr" bIns="45700" lIns="91425" spcFirstLastPara="1" rIns="91425" wrap="square" tIns="45700">
+            <a:noAutofit/>
+          </a:bodyPr>
+          <a:lstStyle/>
+          <a:p>
+            <a:pPr indent="0" lvl="0" marL="0" marR="0" rtl="0" algn="ctr">
+              <a:spcBef>
+                <a:spcPts val="0"/>
+              </a:spcBef>
+              <a:spcAft>
+                <a:spcPts val="0"/>
+              </a:spcAft>
+              <a:buNone/>
+            </a:pPr>
+            <a:r>
+              <a:rPr b="0" i="0" lang="ja-JP" sz="1800" u="none" cap="none" strike="noStrike">
+                <a:solidFill>
+                  <a:schemeClr val="lt1"/>
+                </a:solidFill>
+                <a:latin typeface="Meiryo"/>
+                <a:ea typeface="Meiryo"/>
+                <a:cs typeface="Meiryo"/>
+                <a:sym typeface="Meiryo"/>
+              </a:rPr>
+              <a:t>対象業界</a:t>
+            </a:r>
+            <a:endParaRPr/>
+          </a:p>
+        </p:txBody>
+      </p:sp>
+      <p:sp>
+        <p:nvSpPr>
+          <p:cNvPr id="41" name="Google Shape;41;p3"/>
+          <p:cNvSpPr/>
+          <p:nvPr/>
+        </p:nvSpPr>
+        <p:spPr>
+          <a:xfrm>
+            <a:off x="7560840" y="730955"/>
+            <a:ext cx="829618" cy="435690"/>
+          </a:xfrm>
+          <a:prstGeom prst="rect">
+            <a:avLst/>
+          </a:prstGeom>
+          <a:solidFill>
+            <a:schemeClr val="bg1"/>
+          </a:solidFill>
+          <a:ln cap="flat" cmpd="sng" w="9525">
+            <a:solidFill>
+              <a:srgbClr val="4F81BD"/>
+            </a:solidFill>
+            <a:prstDash val="sysDash"/>
+            <a:round/>
+            <a:headEnd len="sm" w="sm" type="none"/>
+            <a:tailEnd len="sm" w="sm" type="none"/>
+          </a:ln>
+        </p:spPr>
+        <p:txBody>
+          <a:bodyPr anchorCtr="0" anchor="ctr" bIns="45700" lIns="91425" spcFirstLastPara="1" rIns="91425" wrap="square" tIns="45700">
+            <a:noAutofit/>
+          </a:bodyPr>
+          <a:lstStyle/>
+          <a:p>
+            <a:pPr indent="0" lvl="0" marL="0" marR="0" rtl="0" algn="ctr">
+              <a:spcBef>
+                <a:spcPts val="0"/>
+              </a:spcBef>
+              <a:spcAft>
+                <a:spcPts val="0"/>
+              </a:spcAft>
+              <a:buNone/>
+            </a:pPr>
+            <a:r>
+              <a:rPr b="0" i="0" lang="ja-JP" sz="1200" u="none" cap="none" strike="noStrike">
+                <a:solidFill>
+                  <a:schemeClr val="dk1"/>
+                </a:solidFill>
+                <a:latin typeface="Meiryo"/>
+                <a:ea typeface="Meiryo"/>
+                <a:cs typeface="Meiryo"/>
+                <a:sym typeface="Meiryo"/>
+              </a:rPr>
+              <a:t>その他</a:t>
+            </a:r>
+            <a:endParaRPr b="0" i="0" sz="1200" u="none" cap="none" strike="noStrike">
+              <a:solidFill>
+                <a:schemeClr val="dk1"/>
+              </a:solidFill>
+              <a:latin typeface="Meiryo"/>
+              <a:ea typeface="Meiryo"/>
+              <a:cs typeface="Meiryo"/>
+              <a:sym typeface="Meiryo"/>
+            </a:endParaRPr>
+          </a:p>
+        </p:txBody>
+      </p:sp>
+      <p:sp>
+        <p:nvSpPr>
+          <p:cNvPr id="42" name="Google Shape;42;p3"/>
+          <p:cNvSpPr/>
+          <p:nvPr/>
+        </p:nvSpPr>
+        <p:spPr>
+          <a:xfrm>
+            <a:off x="6679050" y="730955"/>
+            <a:ext cx="829618" cy="435690"/>
+          </a:xfrm>
+          <a:prstGeom prst="rect">
+            <a:avLst/>
+          </a:prstGeom>
+          <a:solidFill>
+            <a:schemeClr val="tx2"/>
+          </a:solidFill>
+          <a:ln cap="flat" cmpd="sng" w="9525">
+            <a:solidFill>
+              <a:srgbClr val="4F81BD"/>
+            </a:solidFill>
+            <a:prstDash val="solid"/>
+            <a:round/>
+            <a:headEnd len="sm" w="sm" type="none"/>
+            <a:tailEnd len="sm" w="sm" type="none"/>
+          </a:ln>
+        </p:spPr>
+        <p:txBody>
+          <a:bodyPr anchorCtr="0" anchor="ctr" bIns="45700" lIns="91425" spcFirstLastPara="1" rIns="91425" wrap="square" tIns="45700">
+            <a:noAutofit/>
+          </a:bodyPr>
+          <a:lstStyle/>
+          <a:p>
+            <a:pPr indent="0" lvl="0" marL="0" marR="0" rtl="0" algn="ctr">
+              <a:spcBef>
+                <a:spcPts val="0"/>
+              </a:spcBef>
+              <a:spcAft>
+                <a:spcPts val="0"/>
+              </a:spcAft>
+              <a:buNone/>
+            </a:pPr>
+            <a:r>
+              <a:rPr b="0" i="0" lang="ja-JP" sz="1000" u="none" cap="none" strike="noStrike">
+                <a:solidFill>
+                  <a:schemeClr val="dk1"/>
+                </a:solidFill>
+                <a:latin typeface="Meiryo"/>
+                <a:ea typeface="Meiryo"/>
+                <a:cs typeface="Meiryo"/>
+                <a:sym typeface="Meiryo"/>
+              </a:rPr>
+              <a:t>オプション</a:t>
+            </a:r>
+            <a:endParaRPr b="0" i="0" sz="1000" u="none" cap="none" strike="noStrike">
+              <a:solidFill>
+                <a:schemeClr val="dk1"/>
+              </a:solidFill>
+              <a:latin typeface="Meiryo"/>
+              <a:ea typeface="Meiryo"/>
+              <a:cs typeface="Meiryo"/>
+              <a:sym typeface="Meiryo"/>
+            </a:endParaRPr>
+          </a:p>
+          <a:p>
+            <a:pPr indent="0" lvl="0" marL="0" marR="0" rtl="0" algn="ctr">
+              <a:spcBef>
+                <a:spcPts val="0"/>
+              </a:spcBef>
+              <a:spcAft>
+                <a:spcPts val="0"/>
+              </a:spcAft>
+              <a:buNone/>
+            </a:pPr>
+            <a:r>
+              <a:rPr b="0" i="0" lang="ja-JP" sz="1000" u="none" cap="none" strike="noStrike">
+                <a:solidFill>
+                  <a:schemeClr val="dk1"/>
+                </a:solidFill>
+                <a:latin typeface="Meiryo"/>
+                <a:ea typeface="Meiryo"/>
+                <a:cs typeface="Meiryo"/>
+                <a:sym typeface="Meiryo"/>
+              </a:rPr>
+              <a:t>商材</a:t>
+            </a:r>
+            <a:endParaRPr/>
+          </a:p>
+        </p:txBody>
+      </p:sp>
+      <p:sp>
+        <p:nvSpPr>
+          <p:cNvPr id="43" name="Google Shape;43;p3"/>
+          <p:cNvSpPr/>
+          <p:nvPr/>
+        </p:nvSpPr>
+        <p:spPr>
+          <a:xfrm>
+            <a:off x="1594068" y="730955"/>
+            <a:ext cx="2926883" cy="435690"/>
+          </a:xfrm>
+          <a:prstGeom prst="rect">
+            <a:avLst/>
+          </a:prstGeom>
+          <a:noFill/>
+          <a:ln cap="flat" cmpd="sng" w="9525">
+            <a:solidFill>
+              <a:srgbClr val="4A7DBA"/>
+            </a:solidFill>
+            <a:prstDash val="solid"/>
+            <a:round/>
+            <a:headEnd len="sm" w="sm" type="none"/>
+            <a:tailEnd len="sm" w="sm" type="none"/>
+          </a:ln>
+        </p:spPr>
+        <p:txBody>
+          <a:bodyPr anchorCtr="0" anchor="ctr" bIns="45700" lIns="91425" spcFirstLastPara="1" rIns="91425" wrap="square" tIns="45700">
+            <a:noAutofit/>
+          </a:bodyPr>
+          <a:lstStyle/>
+          <a:p>
+            <a:pPr indent="0" lvl="0" marL="0" marR="0" rtl="0" algn="ctr">
+              <a:spcBef>
+                <a:spcPts val="0"/>
+              </a:spcBef>
+              <a:spcAft>
+                <a:spcPts val="0"/>
+              </a:spcAft>
+              <a:buNone/>
+            </a:pPr>
+            <a:r>
+              <a:rPr b="0" i="0" lang="ja-JP" sz="1300" u="none" cap="none" strike="noStrike">
+                <a:solidFill>
+                  <a:schemeClr val="dk1"/>
+                </a:solidFill>
+                <a:latin typeface="Meiryo"/>
+                <a:ea typeface="Meiryo"/>
+                <a:cs typeface="Meiryo"/>
+                <a:sym typeface="Meiryo"/>
+              </a:rPr>
+              <a:t>友だち獲得を強化したい全業種</a:t>
+            </a:r>
+            <a:endParaRPr/>
+          </a:p>
+        </p:txBody>
+      </p:sp>
+      <p:sp>
+        <p:nvSpPr>
+          <p:cNvPr id="44" name="Google Shape;44;p3"/>
+          <p:cNvSpPr txBox="1"/>
+          <p:nvPr/>
+        </p:nvSpPr>
+        <p:spPr>
+          <a:xfrm>
+            <a:off x="3296816" y="6597352"/>
+            <a:ext cx="6209091" cy="215444"/>
+          </a:xfrm>
+          <a:prstGeom prst="rect">
+            <a:avLst/>
+          </a:prstGeom>
+          <a:noFill/>
+          <a:ln>
+            <a:noFill/>
+          </a:ln>
+        </p:spPr>
+        <p:txBody>
+          <a:bodyPr anchorCtr="0" anchor="t" bIns="45700" lIns="91425" spcFirstLastPara="1" rIns="91425" wrap="square" tIns="45700">
+            <a:spAutoFit/>
+          </a:bodyPr>
+          <a:lstStyle/>
+          <a:p>
+            <a:pPr indent="0" lvl="0" marL="0" marR="0" rtl="0" algn="l">
+              <a:spcBef>
+                <a:spcPts val="0"/>
+              </a:spcBef>
+              <a:spcAft>
+                <a:spcPts val="0"/>
+              </a:spcAft>
+              <a:buNone/>
+            </a:pPr>
+            <a:r>
+              <a:rPr b="0" i="0" lang="ja-JP" sz="800" u="none" cap="none" strike="noStrike">
+                <a:solidFill>
+                  <a:schemeClr val="lt1"/>
+                </a:solidFill>
+                <a:latin typeface="Meiryo"/>
+                <a:ea typeface="Meiryo"/>
+                <a:cs typeface="Meiryo"/>
+                <a:sym typeface="Meiryo"/>
+              </a:rPr>
+              <a:t>出典：https://workers-hub.box.com/s/rgfhp6hxyusj7domi1irjx68jld23k9r</a:t>
+            </a:r>
+            <a:endParaRPr sz="800">
+              <a:solidFill>
+                <a:schemeClr val="lt1"/>
+              </a:solidFill>
+              <a:latin typeface="Meiryo"/>
+              <a:ea typeface="Meiryo"/>
+              <a:cs typeface="Meiryo"/>
+              <a:sym typeface="Meiryo"/>
+            </a:endParaRPr>
+          </a:p>
+        </p:txBody>
+      </p:sp>
+      <p:sp>
+        <p:nvSpPr>
+          <p:cNvPr id="45" name="Google Shape;45;p3"/>
+          <p:cNvSpPr/>
+          <p:nvPr/>
+        </p:nvSpPr>
+        <p:spPr>
+          <a:xfrm>
+            <a:off x="0" y="1234746"/>
+            <a:ext cx="9906000" cy="672259"/>
+          </a:xfrm>
+          <a:prstGeom prst="rect">
+            <a:avLst/>
+          </a:prstGeom>
+          <a:solidFill>
+            <a:srgbClr val="C5D8F1"/>
+          </a:solidFill>
+          <a:ln>
+            <a:noFill/>
+          </a:ln>
+        </p:spPr>
+        <p:txBody>
+          <a:bodyPr anchorCtr="0" anchor="ctr" bIns="45700" lIns="91425" spcFirstLastPara="1" rIns="91425" wrap="square" tIns="45700">
+            <a:noAutofit/>
+          </a:bodyPr>
+          <a:lstStyle/>
+          <a:p>
+            <a:pPr indent="0" lvl="0" marL="0" marR="0" rtl="0" algn="ctr">
+              <a:spcBef>
+                <a:spcPts val="0"/>
+              </a:spcBef>
+              <a:spcAft>
+                <a:spcPts val="0"/>
+              </a:spcAft>
+              <a:buNone/>
+            </a:pPr>
+            <a:r>
+              <a:rPr b="1" lang="ja-JP" sz="1600">
+                <a:solidFill>
+                  <a:srgbClr val="004DE6"/>
+                </a:solidFill>
+                <a:latin typeface="Meiryo"/>
+                <a:ea typeface="Meiryo"/>
+                <a:cs typeface="Meiryo"/>
+                <a:sym typeface="Meiryo"/>
+              </a:rPr>
+              <a:t>　　　　　　</a:t>
+            </a:r>
+            <a:endParaRPr b="1" sz="1800">
+              <a:solidFill>
+                <a:srgbClr val="004DE6"/>
+              </a:solidFill>
+              <a:latin typeface="Meiryo"/>
+              <a:ea typeface="Meiryo"/>
+              <a:cs typeface="Meiryo"/>
+              <a:sym typeface="Meiryo"/>
+            </a:endParaRPr>
+          </a:p>
+        </p:txBody>
+      </p:sp>
+      <p:sp>
+        <p:nvSpPr>
+          <p:cNvPr id="46" name="Google Shape;46;p3"/>
+          <p:cNvSpPr/>
+          <p:nvPr/>
+        </p:nvSpPr>
+        <p:spPr>
+          <a:xfrm>
+            <a:off x="1089832" y="1437370"/>
+            <a:ext cx="7031520" cy="338554"/>
+          </a:xfrm>
+          <a:prstGeom prst="rect">
+            <a:avLst/>
+          </a:prstGeom>
+          <a:noFill/>
+          <a:ln>
+            <a:noFill/>
+          </a:ln>
+        </p:spPr>
+        <p:txBody>
+          <a:bodyPr anchorCtr="0" anchor="t" bIns="45700" lIns="91425" spcFirstLastPara="1" rIns="91425" wrap="square" tIns="45700">
+            <a:spAutoFit/>
+          </a:bodyPr>
+          <a:lstStyle/>
+          <a:p>
+            <a:pPr indent="0" lvl="0" marL="0" marR="0" rtl="0" algn="l">
+              <a:spcBef>
+                <a:spcPts val="0"/>
+              </a:spcBef>
+              <a:spcAft>
+                <a:spcPts val="0"/>
+              </a:spcAft>
+              <a:buNone/>
+            </a:pPr>
+            <a:r>
+              <a:rPr b="1" lang="ja-JP" sz="1600">
+                <a:solidFill>
+                  <a:srgbClr val="004DE6"/>
+                </a:solidFill>
+                <a:latin typeface="Meiryo"/>
+                <a:ea typeface="Meiryo"/>
+                <a:cs typeface="Meiryo"/>
+                <a:sym typeface="Meiryo"/>
+              </a:rPr>
+              <a:t>【LINEプロモーションスタンプ】ダウンロード機会拡大のご案内</a:t>
+            </a:r>
+            <a:endParaRPr b="1" sz="1600">
+              <a:solidFill>
+                <a:srgbClr val="004DE6"/>
+              </a:solidFill>
+              <a:latin typeface="Meiryo"/>
+              <a:ea typeface="Meiryo"/>
+              <a:cs typeface="Meiryo"/>
+              <a:sym typeface="Meiryo"/>
+            </a:endParaRPr>
+          </a:p>
+        </p:txBody>
+      </p:sp>
+      <p:sp>
+        <p:nvSpPr>
+          <p:cNvPr id="47" name="Google Shape;47;p3"/>
+          <p:cNvSpPr txBox="1"/>
+          <p:nvPr/>
+        </p:nvSpPr>
+        <p:spPr>
+          <a:xfrm>
+            <a:off x="182880" y="88175"/>
+            <a:ext cx="7512385" cy="365091"/>
+          </a:xfrm>
+          <a:prstGeom prst="rect">
+            <a:avLst/>
+          </a:prstGeom>
+          <a:noFill/>
+          <a:ln>
+            <a:noFill/>
+          </a:ln>
+        </p:spPr>
+        <p:txBody>
+          <a:bodyPr anchorCtr="0" anchor="t" bIns="45700" lIns="91425" spcFirstLastPara="1" rIns="91425" wrap="square" tIns="72000">
+            <a:spAutoFit/>
+          </a:bodyPr>
+          <a:lstStyle/>
+          <a:p>
+            <a:pPr indent="0" lvl="0" marL="0" marR="0" rtl="0" algn="l">
+              <a:spcBef>
+                <a:spcPts val="0"/>
+              </a:spcBef>
+              <a:spcAft>
+                <a:spcPts val="0"/>
+              </a:spcAft>
+              <a:buClr>
+                <a:schemeClr val="dk1"/>
+              </a:buClr>
+              <a:buSzPts val="1600"/>
+              <a:buFont typeface="Arial"/>
+              <a:buNone/>
+            </a:pPr>
+            <a:r>
+              <a:rPr b="0" lang="ja-JP" sz="1600" u="none">
+                <a:solidFill>
+                  <a:schemeClr val="dk1"/>
+                </a:solidFill>
+                <a:latin typeface="Meiryo"/>
+                <a:ea typeface="Meiryo"/>
+                <a:cs typeface="Meiryo"/>
+                <a:sym typeface="Meiryo"/>
+              </a:rPr>
+              <a:t>    今後のアップデート情報</a:t>
+            </a:r>
+            <a:endParaRPr b="0" sz="1600" u="none">
+              <a:solidFill>
+                <a:schemeClr val="dk1"/>
+              </a:solidFill>
+              <a:latin typeface="Meiryo"/>
+              <a:ea typeface="Meiryo"/>
+              <a:cs typeface="Meiryo"/>
+              <a:sym typeface="Meiryo"/>
+            </a:endParaRPr>
+          </a:p>
+        </p:txBody>
+      </p:sp>
+      <p:sp>
+        <p:nvSpPr>
+          <p:cNvPr id="48" name="Google Shape;48;p3"/>
+          <p:cNvSpPr/>
+          <p:nvPr/>
+        </p:nvSpPr>
+        <p:spPr>
+          <a:xfrm>
+            <a:off x="5797260" y="730955"/>
+            <a:ext cx="829618" cy="435690"/>
+          </a:xfrm>
+          <a:prstGeom prst="rect">
+            <a:avLst/>
+          </a:prstGeom>
+          <a:solidFill>
+            <a:schemeClr val="bg1"/>
+          </a:solidFill>
+          <a:ln cap="flat" cmpd="sng" w="9525">
+            <a:solidFill>
+              <a:srgbClr val="4F81BD"/>
+            </a:solidFill>
+            <a:prstDash val="sysDash"/>
+            <a:round/>
+            <a:headEnd len="sm" w="sm" type="none"/>
+            <a:tailEnd len="sm" w="sm" type="none"/>
+          </a:ln>
+        </p:spPr>
+        <p:txBody>
+          <a:bodyPr anchorCtr="0" anchor="ctr" bIns="45700" lIns="91425" spcFirstLastPara="1" rIns="91425" wrap="square" tIns="45700">
+            <a:noAutofit/>
+          </a:bodyPr>
+          <a:lstStyle/>
+          <a:p>
+            <a:pPr indent="0" lvl="0" marL="0" marR="0" rtl="0" algn="ctr">
+              <a:spcBef>
+                <a:spcPts val="0"/>
+              </a:spcBef>
+              <a:spcAft>
+                <a:spcPts val="0"/>
+              </a:spcAft>
+              <a:buClr>
+                <a:schemeClr val="dk1"/>
+              </a:buClr>
+              <a:buSzPts val="1000"/>
+              <a:buFont typeface="Meiryo"/>
+              <a:buNone/>
+            </a:pPr>
+            <a:r>
+              <a:rPr lang="ja-JP" sz="1000">
+                <a:solidFill>
+                  <a:schemeClr val="dk1"/>
+                </a:solidFill>
+                <a:latin typeface="Meiryo"/>
+                <a:ea typeface="Meiryo"/>
+                <a:cs typeface="Meiryo"/>
+                <a:sym typeface="Meiryo"/>
+              </a:rPr>
+              <a:t>開発</a:t>
+            </a:r>
+            <a:endParaRPr sz="1000">
+              <a:solidFill>
+                <a:schemeClr val="dk1"/>
+              </a:solidFill>
+              <a:latin typeface="Meiryo"/>
+              <a:ea typeface="Meiryo"/>
+              <a:cs typeface="Meiryo"/>
+              <a:sym typeface="Meiryo"/>
+            </a:endParaRPr>
+          </a:p>
+          <a:p>
+            <a:pPr indent="0" lvl="0" marL="0" marR="0" rtl="0" algn="ctr">
+              <a:spcBef>
+                <a:spcPts val="0"/>
+              </a:spcBef>
+              <a:spcAft>
+                <a:spcPts val="0"/>
+              </a:spcAft>
+              <a:buClr>
+                <a:schemeClr val="dk1"/>
+              </a:buClr>
+              <a:buSzPts val="1000"/>
+              <a:buFont typeface="Meiryo"/>
+              <a:buNone/>
+            </a:pPr>
+            <a:r>
+              <a:rPr lang="ja-JP" sz="1000">
+                <a:solidFill>
+                  <a:schemeClr val="dk1"/>
+                </a:solidFill>
+                <a:latin typeface="Meiryo"/>
+                <a:ea typeface="Meiryo"/>
+                <a:cs typeface="Meiryo"/>
+                <a:sym typeface="Meiryo"/>
+              </a:rPr>
+              <a:t>LINE API</a:t>
+            </a:r>
+            <a:endParaRPr sz="1000">
+              <a:solidFill>
+                <a:schemeClr val="dk1"/>
+              </a:solidFill>
+              <a:latin typeface="Meiryo"/>
+              <a:ea typeface="Meiryo"/>
+              <a:cs typeface="Meiryo"/>
+              <a:sym typeface="Meiryo"/>
+            </a:endParaRPr>
+          </a:p>
+        </p:txBody>
+      </p:sp>
+      <p:sp>
+        <p:nvSpPr>
+          <p:cNvPr id="49" name="Google Shape;49;p3"/>
+          <p:cNvSpPr/>
+          <p:nvPr/>
+        </p:nvSpPr>
+        <p:spPr>
+          <a:xfrm>
+            <a:off x="4915470" y="730955"/>
+            <a:ext cx="829618" cy="435690"/>
+          </a:xfrm>
+          <a:prstGeom prst="rect">
+            <a:avLst/>
+          </a:prstGeom>
+          <a:solidFill>
+            <a:schemeClr val="bg1"/>
+          </a:solidFill>
+          <a:ln cap="flat" cmpd="sng" w="9525">
+            <a:solidFill>
+              <a:srgbClr val="4F81BD"/>
+            </a:solidFill>
+            <a:prstDash val="sysDash"/>
+            <a:round/>
+            <a:headEnd len="sm" w="sm" type="none"/>
+            <a:tailEnd len="sm" w="sm" type="none"/>
+          </a:ln>
+        </p:spPr>
+        <p:txBody>
+          <a:bodyPr anchorCtr="0" anchor="ctr" bIns="45700" lIns="91425" spcFirstLastPara="1" rIns="91425" wrap="square" tIns="45700">
+            <a:noAutofit/>
+          </a:bodyPr>
+          <a:lstStyle/>
+          <a:p>
+            <a:pPr indent="0" lvl="0" marL="0" marR="0" rtl="0" algn="ctr">
+              <a:spcBef>
+                <a:spcPts val="0"/>
+              </a:spcBef>
+              <a:spcAft>
+                <a:spcPts val="0"/>
+              </a:spcAft>
+              <a:buNone/>
+            </a:pPr>
+            <a:r>
+              <a:rPr lang="ja-JP" sz="1000">
+                <a:solidFill>
+                  <a:schemeClr val="dk1"/>
+                </a:solidFill>
+                <a:latin typeface="Meiryo"/>
+                <a:ea typeface="Meiryo"/>
+                <a:cs typeface="Meiryo"/>
+                <a:sym typeface="Meiryo"/>
+              </a:rPr>
+              <a:t>LINE公式アカウント</a:t>
+            </a:r>
+            <a:endParaRPr sz="1000">
+              <a:solidFill>
+                <a:schemeClr val="dk1"/>
+              </a:solidFill>
+              <a:latin typeface="Meiryo"/>
+              <a:ea typeface="Meiryo"/>
+              <a:cs typeface="Meiryo"/>
+              <a:sym typeface="Meiryo"/>
+            </a:endParaRPr>
+          </a:p>
+        </p:txBody>
+      </p:sp>
+      <p:sp>
+        <p:nvSpPr>
+          <p:cNvPr id="50" name="Google Shape;50;p3"/>
+          <p:cNvSpPr/>
+          <p:nvPr/>
+        </p:nvSpPr>
+        <p:spPr>
+          <a:xfrm>
+            <a:off x="0" y="1890267"/>
+            <a:ext cx="9906000" cy="733579"/>
+          </a:xfrm>
+          <a:prstGeom prst="rect">
+            <a:avLst/>
+          </a:prstGeom>
+          <a:solidFill>
+            <a:srgbClr val="F2F2F2"/>
+          </a:solidFill>
+          <a:ln>
+            <a:noFill/>
+          </a:ln>
+        </p:spPr>
+        <p:txBody>
+          <a:bodyPr anchorCtr="0" anchor="ctr" bIns="45700" lIns="91425" spcFirstLastPara="1" rIns="91425" wrap="square" tIns="45700">
+            <a:noAutofit/>
+          </a:bodyPr>
+          <a:lstStyle/>
+          <a:p>
+            <a:pPr indent="0" lvl="0" marL="0" marR="0" rtl="0" algn="ctr">
+              <a:spcBef>
+                <a:spcPts val="0"/>
+              </a:spcBef>
+              <a:spcAft>
+                <a:spcPts val="0"/>
+              </a:spcAft>
+              <a:buNone/>
+            </a:pPr>
+            <a:r>
+              <a:t/>
+            </a:r>
+            <a:endParaRPr sz="1200">
+              <a:solidFill>
+                <a:schemeClr val="dk1"/>
+              </a:solidFill>
+              <a:latin typeface="Meiryo"/>
+              <a:ea typeface="Meiryo"/>
+              <a:cs typeface="Meiryo"/>
+              <a:sym typeface="Meiryo"/>
+            </a:endParaRPr>
+          </a:p>
+        </p:txBody>
+      </p:sp>
+      <p:sp>
+        <p:nvSpPr>
+          <p:cNvPr id="51" name="Google Shape;51;p3"/>
+          <p:cNvSpPr/>
+          <p:nvPr/>
+        </p:nvSpPr>
+        <p:spPr>
+          <a:xfrm>
+            <a:off x="544108" y="1961282"/>
+            <a:ext cx="8817783" cy="646331"/>
+          </a:xfrm>
+          <a:prstGeom prst="rect">
+            <a:avLst/>
+          </a:prstGeom>
+          <a:noFill/>
+          <a:ln>
+            <a:noFill/>
+          </a:ln>
+        </p:spPr>
+        <p:txBody>
+          <a:bodyPr anchorCtr="0" anchor="t" bIns="45700" lIns="91425" spcFirstLastPara="1" rIns="91425" wrap="square" tIns="45700">
+            <a:spAutoFit/>
+          </a:bodyPr>
+          <a:lstStyle/>
+          <a:p>
+            <a:pPr indent="0" lvl="0" marL="0" marR="0" rtl="0" algn="ctr">
+              <a:spcBef>
+                <a:spcPts val="0"/>
+              </a:spcBef>
+              <a:spcAft>
+                <a:spcPts val="0"/>
+              </a:spcAft>
+              <a:buNone/>
+            </a:pPr>
+            <a:r>
+              <a:rPr b="1" lang="ja-JP" sz="1200">
+                <a:solidFill>
+                  <a:schemeClr val="dk1"/>
+                </a:solidFill>
+                <a:latin typeface="Meiryo"/>
+                <a:ea typeface="Meiryo"/>
+                <a:cs typeface="Meiryo"/>
+                <a:sym typeface="Meiryo"/>
+              </a:rPr>
+              <a:t>LINEキーボードのサジェスト機能で無料スタンプが表示される条件を緩和し、</a:t>
+            </a:r>
+            <a:endParaRPr b="1" sz="1200">
+              <a:solidFill>
+                <a:schemeClr val="dk1"/>
+              </a:solidFill>
+              <a:latin typeface="Meiryo"/>
+              <a:ea typeface="Meiryo"/>
+              <a:cs typeface="Meiryo"/>
+              <a:sym typeface="Meiryo"/>
+            </a:endParaRPr>
+          </a:p>
+          <a:p>
+            <a:pPr indent="0" lvl="0" marL="0" marR="0" rtl="0" algn="ctr">
+              <a:spcBef>
+                <a:spcPts val="0"/>
+              </a:spcBef>
+              <a:spcAft>
+                <a:spcPts val="0"/>
+              </a:spcAft>
+              <a:buNone/>
+            </a:pPr>
+            <a:r>
+              <a:rPr b="1" lang="ja-JP" sz="1200">
+                <a:solidFill>
+                  <a:schemeClr val="dk1"/>
+                </a:solidFill>
+                <a:latin typeface="Meiryo"/>
+                <a:ea typeface="Meiryo"/>
+                <a:cs typeface="Meiryo"/>
+                <a:sym typeface="Meiryo"/>
+              </a:rPr>
+              <a:t>これまで一部だったユーザー表示が全ユーザーに拡大された。</a:t>
+            </a:r>
+            <a:endParaRPr/>
+          </a:p>
+          <a:p>
+            <a:pPr indent="0" lvl="0" marL="0" marR="0" rtl="0" algn="ctr">
+              <a:spcBef>
+                <a:spcPts val="0"/>
+              </a:spcBef>
+              <a:spcAft>
+                <a:spcPts val="0"/>
+              </a:spcAft>
+              <a:buNone/>
+            </a:pPr>
+            <a:r>
+              <a:rPr b="1" lang="ja-JP" sz="1200">
+                <a:solidFill>
+                  <a:schemeClr val="dk1"/>
+                </a:solidFill>
+                <a:latin typeface="Meiryo"/>
+                <a:ea typeface="Meiryo"/>
+                <a:cs typeface="Meiryo"/>
+                <a:sym typeface="Meiryo"/>
+              </a:rPr>
+              <a:t>適用開始は2026年8月28日、DL数は平均+5.63%増加している。</a:t>
             </a:r>
             <a:endParaRPr b="1" sz="1400">
               <a:solidFill>
@@ -6693,7 +8403,7 @@
                 <a:gridCol w="1965960"/>
                 <a:gridCol w="7360920"/>
               </a:tblGrid>
-              <a:tr h="800100">
+              <a:tr h="1049377">
                 <a:tc>
                   <a:txBody>
                     <a:bodyPr wrap="square"/>
@@ -6723,39 +8433,58 @@
                     <a:p>
                       <a:pPr>
                         <a:lnSpc>
-                          <a:spcPct val="115000"/>
+                          <a:spcPct val="108000"/>
                         </a:lnSpc>
                         <a:spcAft>
-                          <a:spcPts val="300"/>
+                          <a:spcPts val="200"/>
                         </a:spcAft>
                       </a:pPr>
                       <a:r>
-                        <a:rPr sz="1100">
+                        <a:rPr sz="1000">
                           <a:solidFill>
                             <a:srgbClr val="333333"/>
                           </a:solidFill>
                           <a:latin typeface="メイリオ"/>
                         </a:rPr>
-                        <a:t>・Web版管理画面／管理アプリの「分析」タブで確認できる実績値の参照期間を過去36カ月までに変更</a:t>
+                        <a:t>・サジェスト面（ユーザーの入力内容に応じてスタンプを提案する機能）での無料スタンプ表示ユーザー条件を緩和</a:t>
                       </a:r>
                     </a:p>
                     <a:p>
                       <a:pPr>
                         <a:lnSpc>
-                          <a:spcPct val="115000"/>
+                          <a:spcPct val="108000"/>
                         </a:lnSpc>
                         <a:spcAft>
-                          <a:spcPts val="300"/>
+                          <a:spcPts val="200"/>
                         </a:spcAft>
                       </a:pPr>
                       <a:r>
-                        <a:rPr sz="1100">
+                        <a:rPr sz="1000">
                           <a:solidFill>
                             <a:srgbClr val="333333"/>
                           </a:solidFill>
                           <a:latin typeface="メイリオ"/>
                         </a:rPr>
-                        <a:t>・対象は「分析」タブの実績値のみ。それ以外のデータや作成済みメッセージには影響なし</a:t>
+                        <a:t>・AS-IS：一部のユーザーにのみ表示 → TO-BE：すべてのユーザーに表示（これまで対象外だった層にもリーチ可能）</a:t>
+                      </a:r>
+                    </a:p>
+                    <a:p>
+                      <a:pPr>
+                        <a:lnSpc>
+                          <a:spcPct val="108000"/>
+                        </a:lnSpc>
+                        <a:spcAft>
+                          <a:spcPts val="200"/>
+                        </a:spcAft>
+                      </a:pPr>
+                      <a:r>
+                        <a:rPr sz="1000">
+                          <a:solidFill>
+                            <a:srgbClr val="333333"/>
+                          </a:solidFill>
+                          <a:latin typeface="メイリオ"/>
+                        </a:rPr>
+                        <a:t>・配信中の案件を含む全案件に自動適用（広告主・案件側の対応は不要）</a:t>
                       </a:r>
                     </a:p>
                   </a:txBody>
@@ -6766,7 +8495,7 @@
                   </a:tcPr>
                 </a:tc>
               </a:tr>
-              <a:tr h="800100">
+              <a:tr h="457200">
                 <a:tc>
                   <a:txBody>
                     <a:bodyPr wrap="square"/>
@@ -6809,7 +8538,7 @@
                           </a:solidFill>
                           <a:latin typeface="メイリオ"/>
                         </a:rPr>
-                        <a:t>・該当なし</a:t>
+                        <a:t>・追加費用なし（自動適用）</a:t>
                       </a:r>
                     </a:p>
                   </a:txBody>
@@ -6820,7 +8549,7 @@
                   </a:tcPr>
                 </a:tc>
               </a:tr>
-              <a:tr h="800100">
+              <a:tr h="457200">
                 <a:tc>
                   <a:txBody>
                     <a:bodyPr wrap="square"/>
@@ -6863,26 +8592,7 @@
                           </a:solidFill>
                           <a:latin typeface="メイリオ"/>
                         </a:rPr>
-                        <a:t>・リリース日：2026年11月頃（予定・日程は決まり次第、管理画面のお知らせで案内）</a:t>
-                      </a:r>
-                    </a:p>
-                    <a:p>
-                      <a:pPr>
-                        <a:lnSpc>
-                          <a:spcPct val="115000"/>
-                        </a:lnSpc>
-                        <a:spcAft>
-                          <a:spcPts val="300"/>
-                        </a:spcAft>
-                      </a:pPr>
-                      <a:r>
-                        <a:rPr sz="1100">
-                          <a:solidFill>
-                            <a:srgbClr val="333333"/>
-                          </a:solidFill>
-                          <a:latin typeface="メイリオ"/>
-                        </a:rPr>
-                        <a:t>・社外告知：当初9/2予定だったが内容変更の可能性ありいったん延期。改めて案内予定</a:t>
+                        <a:t>・適用開始日：2026年8月28日（金）</a:t>
                       </a:r>
                     </a:p>
                   </a:txBody>
@@ -6893,7 +8603,7 @@
                   </a:tcPr>
                 </a:tc>
               </a:tr>
-              <a:tr h="800100">
+              <a:tr h="1236623">
                 <a:tc>
                   <a:txBody>
                     <a:bodyPr wrap="square"/>
@@ -6923,58 +8633,77 @@
                     <a:p>
                       <a:pPr>
                         <a:lnSpc>
-                          <a:spcPct val="115000"/>
+                          <a:spcPct val="108000"/>
                         </a:lnSpc>
                         <a:spcAft>
-                          <a:spcPts val="300"/>
+                          <a:spcPts val="200"/>
                         </a:spcAft>
                       </a:pPr>
                       <a:r>
-                        <a:rPr sz="1100">
+                        <a:rPr sz="1000">
                           <a:solidFill>
                             <a:srgbClr val="333333"/>
                           </a:solidFill>
                           <a:latin typeface="メイリオ"/>
                         </a:rPr>
-                        <a:t>・36カ月より前の実績データが必要なクライアントには変更前の確認・保存を案内</a:t>
+                        <a:t>・DL数+5.63%増（全ダウンロード経路合計、現行条件比較）。利用頻度によらず全セグメントで増加</a:t>
                       </a:r>
                     </a:p>
                     <a:p>
                       <a:pPr>
                         <a:lnSpc>
-                          <a:spcPct val="115000"/>
+                          <a:spcPct val="108000"/>
                         </a:lnSpc>
                         <a:spcAft>
-                          <a:spcPts val="300"/>
+                          <a:spcPts val="200"/>
                         </a:spcAft>
                       </a:pPr>
                       <a:r>
-                        <a:rPr sz="1100">
+                        <a:rPr sz="1000">
                           <a:solidFill>
                             <a:srgbClr val="333333"/>
                           </a:solidFill>
                           <a:latin typeface="メイリオ"/>
                         </a:rPr>
-                        <a:t>・「分析」タブの一部データはダウンロード可能（詳細は分析マニュアル参照）</a:t>
+                        <a:t>・サジェスト経由は友だち追加率74.6%・当日ブロック率9.53%（平均約60%・約22%より好水準）</a:t>
                       </a:r>
                     </a:p>
                     <a:p>
                       <a:pPr>
                         <a:lnSpc>
-                          <a:spcPct val="115000"/>
+                          <a:spcPct val="108000"/>
                         </a:lnSpc>
                         <a:spcAft>
-                          <a:spcPts val="300"/>
+                          <a:spcPts val="200"/>
                         </a:spcAft>
                       </a:pPr>
                       <a:r>
-                        <a:rPr sz="1100">
+                        <a:rPr sz="1000">
                           <a:solidFill>
                             <a:srgbClr val="333333"/>
                           </a:solidFill>
                           <a:latin typeface="メイリオ"/>
                         </a:rPr>
-                        <a:t>・告知日程が流動的なため最新情報を要確認</a:t>
+                        <a:t>・改善倍率は無料スタンプの最新DL日が古い層ほど高く、過去6〜18ヶ月DLなし層で約3.0倍</a:t>
+                      </a:r>
+                    </a:p>
+                    <a:p>
+                      <a:pPr>
+                        <a:lnSpc>
+                          <a:spcPct val="108000"/>
+                        </a:lnSpc>
+                        <a:spcAft>
+                          <a:spcPts val="200"/>
+                        </a:spcAft>
+                      </a:pPr>
+                      <a:r>
+                        <a:rPr sz="1000">
+                          <a:solidFill>
+                            <a:srgbClr val="333333"/>
+                          </a:solidFill>
+                          <a:latin typeface="メイリオ"/>
+                        </a:rPr>
+                        <a:t>・運用中クライアントへの実績報告・追加提案の材料に使える</a:t>
                       </a:r>
                     </a:p>
                   </a:txBody>
@@ -6997,7 +8726,7 @@
 </p:sld>
 </file>
 
-<file path=ppt/slides/slide5.xml><?xml version="1.0" encoding="utf-8"?>
+<file path=ppt/slides/slide6.xml><?xml version="1.0" encoding="utf-8"?>
 <p:sld xmlns:a="http://schemas.openxmlformats.org/drawingml/2006/main" xmlns:p="http://schemas.openxmlformats.org/presentationml/2006/main" xmlns:r="http://schemas.openxmlformats.org/officeDocument/2006/relationships">
   <p:cSld>
     <p:spTree>
@@ -7146,13 +8875,13 @@
             <a:avLst/>
           </a:prstGeom>
           <a:solidFill>
-            <a:schemeClr val="tx2"/>
+            <a:schemeClr val="bg1"/>
           </a:solidFill>
           <a:ln cap="flat" cmpd="sng" w="9525">
             <a:solidFill>
               <a:srgbClr val="4F81BD"/>
             </a:solidFill>
-            <a:prstDash val="solid"/>
+            <a:prstDash val="sysDash"/>
             <a:round/>
             <a:headEnd len="sm" w="sm" type="none"/>
             <a:tailEnd len="sm" w="sm" type="none"/>
@@ -7271,7 +9000,7 @@
                 <a:cs typeface="Meiryo"/>
                 <a:sym typeface="Meiryo"/>
               </a:rPr>
-              <a:t>友だち獲得を強化したい全業種</a:t>
+              <a:t>複数店舗・複数ブランドを運営する全業種</a:t>
             </a:r>
             <a:endParaRPr/>
           </a:p>
@@ -7321,7 +9050,7 @@
                 <a:cs typeface="Meiryo"/>
                 <a:sym typeface="Meiryo"/>
               </a:rPr>
-              <a:t>出典：https://workers-hub.box.com/s/rgfhp6hxyusj7domi1irjx68jld23k9r</a:t>
+              <a:t>出典：https://workers-hub.box.com/s/ko2jjwgxk5fs18ejrs97fvfqv3bm3089</a:t>
             </a:r>
             <a:endParaRPr sz="800">
               <a:solidFill>
@@ -7439,7 +9168,7 @@
                 <a:cs typeface="Meiryo"/>
                 <a:sym typeface="Meiryo"/>
               </a:rPr>
-              <a:t>【LINEプロモーションスタンプ】ダウンロード機会拡大のご案内</a:t>
+              <a:t>【LINEミニアプリ】友だち追加オプションの複数アカウント対応</a:t>
             </a:r>
             <a:endParaRPr b="1" sz="1600">
               <a:solidFill>
@@ -7639,13 +9368,13 @@
             <a:avLst/>
           </a:prstGeom>
           <a:solidFill>
-            <a:schemeClr val="bg1"/>
+            <a:schemeClr val="tx2"/>
           </a:solidFill>
           <a:ln cap="flat" cmpd="sng" w="9525">
             <a:solidFill>
               <a:srgbClr val="4F81BD"/>
             </a:solidFill>
-            <a:prstDash val="sysDash"/>
+            <a:prstDash val="solid"/>
             <a:round/>
             <a:headEnd len="sm" w="sm" type="none"/>
             <a:tailEnd len="sm" w="sm" type="none"/>
@@ -7785,7 +9514,7 @@
                 <a:cs typeface="Meiryo"/>
                 <a:sym typeface="Meiryo"/>
               </a:rPr>
-              <a:t>LINEキーボードのサジェスト機能で無料スタンプが表示される条件を緩和し、</a:t>
+              <a:t>1つのLINEミニアプリに連携するLINE公式アカウントが、これまでの1つ限定から</a:t>
             </a:r>
             <a:endParaRPr b="1" sz="1200">
               <a:solidFill>
@@ -7817,7 +9546,7 @@
                 <a:cs typeface="Meiryo"/>
                 <a:sym typeface="Meiryo"/>
               </a:rPr>
-              <a:t>これまで一部だったユーザー表示が全ユーザーに拡大された。</a:t>
+              <a:t>複数設定できるようになる。流入経路ごとに異なる公式アカウントへ友だち追加を誘導可能に。</a:t>
             </a:r>
             <a:endParaRPr/>
           </a:p>
@@ -7841,7 +9570,7 @@
                 <a:cs typeface="Meiryo"/>
                 <a:sym typeface="Meiryo"/>
               </a:rPr>
-              <a:t>適用開始は2026年8月28日、DL数は平均+5.63%増加している。</a:t>
+              <a:t>リリース予定日は2026年9月2日。</a:t>
             </a:r>
             <a:endParaRPr b="1" sz="1400">
               <a:solidFill>
@@ -8403,7 +10132,7 @@
                 <a:gridCol w="1965960"/>
                 <a:gridCol w="7360920"/>
               </a:tblGrid>
-              <a:tr h="800100">
+              <a:tr h="774891">
                 <a:tc>
                   <a:txBody>
                     <a:bodyPr wrap="square"/>
@@ -8433,58 +10162,39 @@
                     <a:p>
                       <a:pPr>
                         <a:lnSpc>
-                          <a:spcPct val="108000"/>
+                          <a:spcPct val="115000"/>
                         </a:lnSpc>
                         <a:spcAft>
-                          <a:spcPts val="200"/>
+                          <a:spcPts val="300"/>
                         </a:spcAft>
                       </a:pPr>
                       <a:r>
-                        <a:rPr sz="1000">
+                        <a:rPr sz="1100">
                           <a:solidFill>
                             <a:srgbClr val="333333"/>
                           </a:solidFill>
                           <a:latin typeface="メイリオ"/>
                         </a:rPr>
-                        <a:t>・サジェスト面（ユーザーの入力内容に応じてスタンプを提案する機能）での無料スタンプ表示ユーザー条件を緩和</a:t>
+                        <a:t>・従来は1つのミニアプリに連携できる公式アカウントは1つのみだったが、複数設定可能に</a:t>
                       </a:r>
                     </a:p>
                     <a:p>
                       <a:pPr>
                         <a:lnSpc>
-                          <a:spcPct val="108000"/>
+                          <a:spcPct val="115000"/>
                         </a:lnSpc>
                         <a:spcAft>
-                          <a:spcPts val="200"/>
+                          <a:spcPts val="300"/>
                         </a:spcAft>
                       </a:pPr>
                       <a:r>
-                        <a:rPr sz="1000">
+                        <a:rPr sz="1100">
                           <a:solidFill>
                             <a:srgbClr val="333333"/>
                           </a:solidFill>
                           <a:latin typeface="メイリオ"/>
                         </a:rPr>
-                        <a:t>・AS-IS：一部のユーザーにのみ表示 → TO-BE：すべてのユーザーに表示（これまで対象外だった層にもリーチ可能）</a:t>
-                      </a:r>
-                    </a:p>
-                    <a:p>
-                      <a:pPr>
-                        <a:lnSpc>
-                          <a:spcPct val="108000"/>
-                        </a:lnSpc>
-                        <a:spcAft>
-                          <a:spcPts val="200"/>
-                        </a:spcAft>
-                      </a:pPr>
-                      <a:r>
-                        <a:rPr sz="1000">
-                          <a:solidFill>
-                            <a:srgbClr val="333333"/>
-                          </a:solidFill>
-                          <a:latin typeface="メイリオ"/>
-                        </a:rPr>
-                        <a:t>・配信中の案件を含む全案件に自動適用（広告主・案件側の対応は不要）</a:t>
+                        <a:t>・流入経路（店舗・ブランド等）ごとに異なるLINE公式アカウントへ友だち追加を誘導できる</a:t>
                       </a:r>
                     </a:p>
                   </a:txBody>
@@ -8495,7 +10205,7 @@
                   </a:tcPr>
                 </a:tc>
               </a:tr>
-              <a:tr h="800100">
+              <a:tr h="457200">
                 <a:tc>
                   <a:txBody>
                     <a:bodyPr wrap="square"/>
@@ -8538,7 +10248,7 @@
                           </a:solidFill>
                           <a:latin typeface="メイリオ"/>
                         </a:rPr>
-                        <a:t>・追加費用なし（自動適用）</a:t>
+                        <a:t>・－</a:t>
                       </a:r>
                     </a:p>
                   </a:txBody>
@@ -8549,7 +10259,7 @@
                   </a:tcPr>
                 </a:tc>
               </a:tr>
-              <a:tr h="800100">
+              <a:tr h="457200">
                 <a:tc>
                   <a:txBody>
                     <a:bodyPr wrap="square"/>
@@ -8592,7 +10302,7 @@
                           </a:solidFill>
                           <a:latin typeface="メイリオ"/>
                         </a:rPr>
-                        <a:t>・適用開始日：2026年8月28日（金）</a:t>
+                        <a:t>・リリース予定日：9月2日</a:t>
                       </a:r>
                     </a:p>
                   </a:txBody>
@@ -8603,7 +10313,7 @@
                   </a:tcPr>
                 </a:tc>
               </a:tr>
-              <a:tr h="800100">
+              <a:tr h="1511109">
                 <a:tc>
                   <a:txBody>
                     <a:bodyPr wrap="square"/>
@@ -8646,7 +10356,7 @@
                           </a:solidFill>
                           <a:latin typeface="メイリオ"/>
                         </a:rPr>
-                        <a:t>・DL数+5.63%増（全ダウンロード経路合計、現行条件比較）。利用頻度によらず全セグメントで増加</a:t>
+                        <a:t>・全店舗共通の一斉配信から、店舗ごとのセグメント配信に切り替えられる</a:t>
                       </a:r>
                     </a:p>
                     <a:p>
@@ -8665,7 +10375,7 @@
                           </a:solidFill>
                           <a:latin typeface="メイリオ"/>
                         </a:rPr>
-                        <a:t>・サジェスト経由は友だち追加率74.6%・当日ブロック率9.53%（平均約60%・約22%より好水準）</a:t>
+                        <a:t>・設定はLINE Developersの「友だち追加オプション」から。デフォルト／許可リスト設定で3パターン運用可</a:t>
                       </a:r>
                     </a:p>
                     <a:p>
@@ -8684,7 +10394,7 @@
                           </a:solidFill>
                           <a:latin typeface="メイリオ"/>
                         </a:rPr>
-                        <a:t>・改善倍率は無料スタンプの最新DL日が古い層ほど高く、過去6〜18ヶ月DLなし層で約3.0倍</a:t>
+                        <a:t>・紐づけ条件：同一プロバイダーの公式アカウント／admin権限を持つ操作者。最大1,000件まで</a:t>
                       </a:r>
                     </a:p>
                     <a:p>
@@ -8703,7 +10413,7 @@
                           </a:solidFill>
                           <a:latin typeface="メイリオ"/>
                         </a:rPr>
-                        <a:t>・運用中クライアントへの実績報告・追加提案の材料に使える</a:t>
+                        <a:t>・1回の誘導で選べるのは1アカウントのみ。流入経路ごとに出し分ける（同時に複数へは登録不可）</a:t>
                       </a:r>
                     </a:p>
                   </a:txBody>
@@ -8726,7 +10436,7 @@
 </p:sld>
 </file>
 
-<file path=ppt/slides/slide6.xml><?xml version="1.0" encoding="utf-8"?>
+<file path=ppt/slides/slide7.xml><?xml version="1.0" encoding="utf-8"?>
 <p:sld xmlns:a="http://schemas.openxmlformats.org/drawingml/2006/main" xmlns:p="http://schemas.openxmlformats.org/presentationml/2006/main" xmlns:r="http://schemas.openxmlformats.org/officeDocument/2006/relationships">
   <p:cSld>
     <p:spTree>
@@ -8809,13 +10519,13 @@
             <a:avLst/>
           </a:prstGeom>
           <a:solidFill>
-            <a:schemeClr val="bg1"/>
+            <a:schemeClr val="tx2"/>
           </a:solidFill>
           <a:ln cap="flat" cmpd="sng" w="9525">
             <a:solidFill>
               <a:srgbClr val="4F81BD"/>
             </a:solidFill>
-            <a:prstDash val="sysDash"/>
+            <a:prstDash val="solid"/>
             <a:round/>
             <a:headEnd len="sm" w="sm" type="none"/>
             <a:tailEnd len="sm" w="sm" type="none"/>
@@ -9000,7 +10710,7 @@
                 <a:cs typeface="Meiryo"/>
                 <a:sym typeface="Meiryo"/>
               </a:rPr>
-              <a:t>複数店舗・複数ブランドを運営する全業種</a:t>
+              <a:t>LINEオープンキャンペーンをご利用中の全業種</a:t>
             </a:r>
             <a:endParaRPr/>
           </a:p>
@@ -9050,7 +10760,7 @@
                 <a:cs typeface="Meiryo"/>
                 <a:sym typeface="Meiryo"/>
               </a:rPr>
-              <a:t>出典：https://workers-hub.box.com/s/ko2jjwgxk5fs18ejrs97fvfqv3bm3089</a:t>
+              <a:t>出典：https://workers-hub.box.com/s/mo3y54qld9vj4kung0c4040z41mfhoip</a:t>
             </a:r>
             <a:endParaRPr sz="800">
               <a:solidFill>
@@ -9168,7 +10878,7 @@
                 <a:cs typeface="Meiryo"/>
                 <a:sym typeface="Meiryo"/>
               </a:rPr>
-              <a:t>【LINEミニアプリ】友だち追加オプションの複数アカウント対応</a:t>
+              <a:t>【LINE Sales Promotion Manager】利用停止期間のお知らせ</a:t>
             </a:r>
             <a:endParaRPr b="1" sz="1600">
               <a:solidFill>
@@ -9368,13 +11078,13 @@
             <a:avLst/>
           </a:prstGeom>
           <a:solidFill>
-            <a:schemeClr val="tx2"/>
+            <a:schemeClr val="bg1"/>
           </a:solidFill>
           <a:ln cap="flat" cmpd="sng" w="9525">
             <a:solidFill>
               <a:srgbClr val="4F81BD"/>
             </a:solidFill>
-            <a:prstDash val="solid"/>
+            <a:prstDash val="sysDash"/>
             <a:round/>
             <a:headEnd len="sm" w="sm" type="none"/>
             <a:tailEnd len="sm" w="sm" type="none"/>
@@ -9514,7 +11224,7 @@
                 <a:cs typeface="Meiryo"/>
                 <a:sym typeface="Meiryo"/>
               </a:rPr>
-              <a:t>1つのLINEミニアプリに連携するLINE公式アカウントが、これまでの1つ限定から</a:t>
+              <a:t>データベース管理システムのスケール最適化を実施するため、</a:t>
             </a:r>
             <a:endParaRPr b="1" sz="1200">
               <a:solidFill>
@@ -9546,7 +11256,7 @@
                 <a:cs typeface="Meiryo"/>
                 <a:sym typeface="Meiryo"/>
               </a:rPr>
-              <a:t>複数設定できるようになる。流入経路ごとに異なる公式アカウントへ友だち追加を誘導可能に。</a:t>
+              <a:t>対象期間中はLINEで応募の管理画面（LINE Sales Promotion Manager）が利用停止となる。</a:t>
             </a:r>
             <a:endParaRPr/>
           </a:p>
@@ -9570,7 +11280,7 @@
                 <a:cs typeface="Meiryo"/>
                 <a:sym typeface="Meiryo"/>
               </a:rPr>
-              <a:t>リリース予定日は2026年9月2日。</a:t>
+              <a:t>対象期間は2026年9月8日（火）〜9月10日（木） 10:00〜14:30の間。</a:t>
             </a:r>
             <a:endParaRPr b="1" sz="1400">
               <a:solidFill>
@@ -10120,7 +11830,7 @@
         </p:nvGraphicFramePr>
         <p:xfrm>
           <a:off x="544108" y="3068960"/>
-          <a:ext cx="9326880" cy="3200400"/>
+          <a:ext cx="9326880" cy="3200401"/>
         </p:xfrm>
         <a:graphic>
           <a:graphicData uri="http://schemas.openxmlformats.org/drawingml/2006/table">
@@ -10132,7 +11842,7 @@
                 <a:gridCol w="1965960"/>
                 <a:gridCol w="7360920"/>
               </a:tblGrid>
-              <a:tr h="800100">
+              <a:tr h="1000607">
                 <a:tc>
                   <a:txBody>
                     <a:bodyPr wrap="square"/>
@@ -10175,7 +11885,7 @@
                           </a:solidFill>
                           <a:latin typeface="メイリオ"/>
                         </a:rPr>
-                        <a:t>・従来は1つのミニアプリに連携できる公式アカウントは1つのみだったが、複数設定可能に</a:t>
+                        <a:t>・データベース管理システムのスケール最適化実施のため対象期間中は管理画面が利用停止</a:t>
                       </a:r>
                     </a:p>
                     <a:p>
@@ -10194,7 +11904,7 @@
                           </a:solidFill>
                           <a:latin typeface="メイリオ"/>
                         </a:rPr>
-                        <a:t>・流入経路（店舗・ブランド等）ごとに異なるLINE公式アカウントへ友だち追加を誘導できる</a:t>
+                        <a:t>・対象メニュー：LINEオープンキャンペーン（抽選型）。アンケート型・季節商品の過去案件も対象</a:t>
                       </a:r>
                     </a:p>
                   </a:txBody>
@@ -10205,7 +11915,7 @@
                   </a:tcPr>
                 </a:tc>
               </a:tr>
-              <a:tr h="800100">
+              <a:tr h="457200">
                 <a:tc>
                   <a:txBody>
                     <a:bodyPr wrap="square"/>
@@ -10248,7 +11958,7 @@
                           </a:solidFill>
                           <a:latin typeface="メイリオ"/>
                         </a:rPr>
-                        <a:t>・－</a:t>
+                        <a:t>・該当なし</a:t>
                       </a:r>
                     </a:p>
                   </a:txBody>
@@ -10259,7 +11969,7 @@
                   </a:tcPr>
                 </a:tc>
               </a:tr>
-              <a:tr h="800100">
+              <a:tr h="720436">
                 <a:tc>
                   <a:txBody>
                     <a:bodyPr wrap="square"/>
@@ -10302,7 +12012,26 @@
                           </a:solidFill>
                           <a:latin typeface="メイリオ"/>
                         </a:rPr>
-                        <a:t>・リリース予定日：9月2日</a:t>
+                        <a:t>・社外への案内開始日・リリース日：2026年9月2日</a:t>
+                      </a:r>
+                    </a:p>
+                    <a:p>
+                      <a:pPr>
+                        <a:lnSpc>
+                          <a:spcPct val="115000"/>
+                        </a:lnSpc>
+                        <a:spcAft>
+                          <a:spcPts val="300"/>
+                        </a:spcAft>
+                      </a:pPr>
+                      <a:r>
+                        <a:rPr sz="1100">
+                          <a:solidFill>
+                            <a:srgbClr val="333333"/>
+                          </a:solidFill>
+                          <a:latin typeface="メイリオ"/>
+                        </a:rPr>
+                        <a:t>・対象期間：9月8日（火）〜9月10日（木） 10:00〜14:30の間</a:t>
                       </a:r>
                     </a:p>
                   </a:txBody>
@@ -10313,7 +12042,7 @@
                   </a:tcPr>
                 </a:tc>
               </a:tr>
-              <a:tr h="800100">
+              <a:tr h="1022158">
                 <a:tc>
                   <a:txBody>
                     <a:bodyPr wrap="square"/>
@@ -10343,77 +12072,58 @@
                     <a:p>
                       <a:pPr>
                         <a:lnSpc>
-                          <a:spcPct val="108000"/>
+                          <a:spcPct val="115000"/>
                         </a:lnSpc>
                         <a:spcAft>
-                          <a:spcPts val="200"/>
+                          <a:spcPts val="300"/>
                         </a:spcAft>
                       </a:pPr>
                       <a:r>
-                        <a:rPr sz="1000">
+                        <a:rPr sz="1100">
                           <a:solidFill>
                             <a:srgbClr val="333333"/>
                           </a:solidFill>
                           <a:latin typeface="メイリオ"/>
                         </a:rPr>
-                        <a:t>・全店舗共通の一斉配信から、店舗ごとのセグメント配信に切り替えられる</a:t>
+                        <a:t>・影響範囲：サマリーレポートの作成・ダウンロードが利用不可</a:t>
                       </a:r>
                     </a:p>
                     <a:p>
                       <a:pPr>
                         <a:lnSpc>
-                          <a:spcPct val="108000"/>
+                          <a:spcPct val="115000"/>
                         </a:lnSpc>
                         <a:spcAft>
-                          <a:spcPts val="200"/>
+                          <a:spcPts val="300"/>
                         </a:spcAft>
                       </a:pPr>
                       <a:r>
-                        <a:rPr sz="1000">
+                        <a:rPr sz="1100">
                           <a:solidFill>
                             <a:srgbClr val="333333"/>
                           </a:solidFill>
                           <a:latin typeface="メイリオ"/>
                         </a:rPr>
-                        <a:t>・設定はLINE Developersの「友だち追加オプション」から。デフォルト／許可リスト設定で3パターン運用可</a:t>
+                        <a:t>・LBPMでの案件申請・入稿など、上記以外の機能は通常どおり利用可能</a:t>
                       </a:r>
                     </a:p>
                     <a:p>
                       <a:pPr>
                         <a:lnSpc>
-                          <a:spcPct val="108000"/>
+                          <a:spcPct val="115000"/>
                         </a:lnSpc>
                         <a:spcAft>
-                          <a:spcPts val="200"/>
+                          <a:spcPts val="300"/>
                         </a:spcAft>
                       </a:pPr>
                       <a:r>
-                        <a:rPr sz="1000">
+                        <a:rPr sz="1100">
                           <a:solidFill>
                             <a:srgbClr val="333333"/>
                           </a:solidFill>
                           <a:latin typeface="メイリオ"/>
                         </a:rPr>
-                        <a:t>・紐づけ条件：同一プロバイダーの公式アカウント／admin権限を持つ操作者。最大1,000件まで</a:t>
-                      </a:r>
-                    </a:p>
-                    <a:p>
-                      <a:pPr>
-                        <a:lnSpc>
-                          <a:spcPct val="108000"/>
-                        </a:lnSpc>
-                        <a:spcAft>
-                          <a:spcPts val="200"/>
-                        </a:spcAft>
-                      </a:pPr>
-                      <a:r>
-                        <a:rPr sz="1000">
-                          <a:solidFill>
-                            <a:srgbClr val="333333"/>
-                          </a:solidFill>
-                          <a:latin typeface="メイリオ"/>
-                        </a:rPr>
-                        <a:t>・1回の誘導で選べるのは1アカウントのみ。流入経路ごとに出し分ける（同時に複数へは登録不可）</a:t>
+                        <a:t>・稼働中キャンペーンがあるクライアントには事前周知が必要</a:t>
                       </a:r>
                     </a:p>
                   </a:txBody>
@@ -10436,7 +12146,7 @@
 </p:sld>
 </file>
 
-<file path=ppt/slides/slide7.xml><?xml version="1.0" encoding="utf-8"?>
+<file path=ppt/slides/slide8.xml><?xml version="1.0" encoding="utf-8"?>
 <p:sld xmlns:a="http://schemas.openxmlformats.org/drawingml/2006/main" xmlns:p="http://schemas.openxmlformats.org/presentationml/2006/main" xmlns:r="http://schemas.openxmlformats.org/officeDocument/2006/relationships">
   <p:cSld>
     <p:spTree>
@@ -10519,13 +12229,13 @@
             <a:avLst/>
           </a:prstGeom>
           <a:solidFill>
-            <a:schemeClr val="tx2"/>
+            <a:schemeClr val="bg1"/>
           </a:solidFill>
           <a:ln cap="flat" cmpd="sng" w="9525">
             <a:solidFill>
               <a:srgbClr val="4F81BD"/>
             </a:solidFill>
-            <a:prstDash val="solid"/>
+            <a:prstDash val="sysDash"/>
             <a:round/>
             <a:headEnd len="sm" w="sm" type="none"/>
             <a:tailEnd len="sm" w="sm" type="none"/>
@@ -10585,13 +12295,13 @@
             <a:avLst/>
           </a:prstGeom>
           <a:solidFill>
-            <a:schemeClr val="bg1"/>
+            <a:schemeClr val="tx2"/>
           </a:solidFill>
           <a:ln cap="flat" cmpd="sng" w="9525">
             <a:solidFill>
               <a:srgbClr val="4F81BD"/>
             </a:solidFill>
-            <a:prstDash val="sysDash"/>
+            <a:prstDash val="solid"/>
             <a:round/>
             <a:headEnd len="sm" w="sm" type="none"/>
             <a:tailEnd len="sm" w="sm" type="none"/>
@@ -10710,7 +12420,7 @@
                 <a:cs typeface="Meiryo"/>
                 <a:sym typeface="Meiryo"/>
               </a:rPr>
-              <a:t>LINEオープンキャンペーンをご利用中の全業種</a:t>
+              <a:t>友だち獲得を強化したい全業種</a:t>
             </a:r>
             <a:endParaRPr/>
           </a:p>
@@ -10760,7 +12470,7 @@
                 <a:cs typeface="Meiryo"/>
                 <a:sym typeface="Meiryo"/>
               </a:rPr>
-              <a:t>出典：https://workers-hub.box.com/s/mo3y54qld9vj4kung0c4040z41mfhoip</a:t>
+              <a:t>出典：https://workers-hub.box.com/s/odilqpe44tp398zlfko148yggcgj68ny</a:t>
             </a:r>
             <a:endParaRPr sz="800">
               <a:solidFill>
@@ -10878,7 +12588,7 @@
                 <a:cs typeface="Meiryo"/>
                 <a:sym typeface="Meiryo"/>
               </a:rPr>
-              <a:t>【LINE Sales Promotion Manager】利用停止期間のお知らせ</a:t>
+              <a:t>【LINEオープンキャンペーン】26年10-12月 期間限定キャンペーン</a:t>
             </a:r>
             <a:endParaRPr b="1" sz="1600">
               <a:solidFill>
@@ -11224,7 +12934,7 @@
                 <a:cs typeface="Meiryo"/>
                 <a:sym typeface="Meiryo"/>
               </a:rPr>
-              <a:t>データベース管理システムのスケール最適化を実施するため、</a:t>
+              <a:t>2026年10月20日開始〜12月25日までに終了する案件限定で、</a:t>
             </a:r>
             <a:endParaRPr b="1" sz="1200">
               <a:solidFill>
@@ -11256,7 +12966,7 @@
                 <a:cs typeface="Meiryo"/>
                 <a:sym typeface="Meiryo"/>
               </a:rPr>
-              <a:t>対象期間中はLINEで応募の管理画面（LINE Sales Promotion Manager）が利用停止となる。</a:t>
+              <a:t>特別価格・特別掲載期間・特別通数の3特典が適用される期間限定キャンペーン。</a:t>
             </a:r>
             <a:endParaRPr/>
           </a:p>
@@ -11280,7 +12990,7 @@
                 <a:cs typeface="Meiryo"/>
                 <a:sym typeface="Meiryo"/>
               </a:rPr>
-              <a:t>対象期間は2026年9月8日（火）〜9月10日（木） 10:00〜14:30の間。</a:t>
+              <a:t>友だち獲得を一気に伸ばしたいクライアントへの提案材料になる。</a:t>
             </a:r>
             <a:endParaRPr b="1" sz="1400">
               <a:solidFill>
@@ -11830,7 +13540,7 @@
         </p:nvGraphicFramePr>
         <p:xfrm>
           <a:off x="544108" y="3068960"/>
-          <a:ext cx="9326880" cy="3200400"/>
+          <a:ext cx="9326880" cy="3200397"/>
         </p:xfrm>
         <a:graphic>
           <a:graphicData uri="http://schemas.openxmlformats.org/drawingml/2006/table">
@@ -11842,1717 +13552,7 @@
                 <a:gridCol w="1965960"/>
                 <a:gridCol w="7360920"/>
               </a:tblGrid>
-              <a:tr h="800100">
-                <a:tc>
-                  <a:txBody>
-                    <a:bodyPr wrap="square"/>
-                    <a:lstStyle/>
-                    <a:p>
-                      <a:r>
-                        <a:rPr sz="1000" b="1">
-                          <a:solidFill>
-                            <a:srgbClr val="FFFFFF"/>
-                          </a:solidFill>
-                          <a:latin typeface="メイリオ"/>
-                        </a:rPr>
-                        <a:t>概要・変更点</a:t>
-                      </a:r>
-                    </a:p>
-                  </a:txBody>
-                  <a:tcPr anchor="ctr" marL="73152" marR="45720">
-                    <a:solidFill>
-                      <a:srgbClr val="15133D"/>
-                    </a:solidFill>
-                  </a:tcPr>
-                </a:tc>
-                <a:tc>
-                  <a:txBody>
-                    <a:bodyPr wrap="square"/>
-                    <a:lstStyle/>
-                    <a:p>
-                      <a:pPr>
-                        <a:lnSpc>
-                          <a:spcPct val="115000"/>
-                        </a:lnSpc>
-                        <a:spcAft>
-                          <a:spcPts val="300"/>
-                        </a:spcAft>
-                      </a:pPr>
-                      <a:r>
-                        <a:rPr sz="1100">
-                          <a:solidFill>
-                            <a:srgbClr val="333333"/>
-                          </a:solidFill>
-                          <a:latin typeface="メイリオ"/>
-                        </a:rPr>
-                        <a:t>・データベース管理システムのスケール最適化実施のため対象期間中は管理画面が利用停止</a:t>
-                      </a:r>
-                    </a:p>
-                    <a:p>
-                      <a:pPr>
-                        <a:lnSpc>
-                          <a:spcPct val="115000"/>
-                        </a:lnSpc>
-                        <a:spcAft>
-                          <a:spcPts val="300"/>
-                        </a:spcAft>
-                      </a:pPr>
-                      <a:r>
-                        <a:rPr sz="1100">
-                          <a:solidFill>
-                            <a:srgbClr val="333333"/>
-                          </a:solidFill>
-                          <a:latin typeface="メイリオ"/>
-                        </a:rPr>
-                        <a:t>・対象メニュー：LINEオープンキャンペーン（抽選型）。アンケート型・季節商品の過去案件も対象</a:t>
-                      </a:r>
-                    </a:p>
-                  </a:txBody>
-                  <a:tcPr anchor="ctr" marL="91440" marR="91440" marT="36576" marB="36576">
-                    <a:solidFill>
-                      <a:srgbClr val="FFFFFF"/>
-                    </a:solidFill>
-                  </a:tcPr>
-                </a:tc>
-              </a:tr>
-              <a:tr h="800100">
-                <a:tc>
-                  <a:txBody>
-                    <a:bodyPr wrap="square"/>
-                    <a:lstStyle/>
-                    <a:p>
-                      <a:r>
-                        <a:rPr sz="1000" b="1">
-                          <a:solidFill>
-                            <a:srgbClr val="FFFFFF"/>
-                          </a:solidFill>
-                          <a:latin typeface="メイリオ"/>
-                        </a:rPr>
-                        <a:t>料金体系・出稿条件</a:t>
-                      </a:r>
-                    </a:p>
-                  </a:txBody>
-                  <a:tcPr anchor="ctr" marL="73152" marR="45720">
-                    <a:solidFill>
-                      <a:srgbClr val="15133D"/>
-                    </a:solidFill>
-                  </a:tcPr>
-                </a:tc>
-                <a:tc>
-                  <a:txBody>
-                    <a:bodyPr wrap="square"/>
-                    <a:lstStyle/>
-                    <a:p>
-                      <a:pPr>
-                        <a:lnSpc>
-                          <a:spcPct val="115000"/>
-                        </a:lnSpc>
-                        <a:spcAft>
-                          <a:spcPts val="300"/>
-                        </a:spcAft>
-                      </a:pPr>
-                      <a:r>
-                        <a:rPr sz="1100">
-                          <a:solidFill>
-                            <a:srgbClr val="333333"/>
-                          </a:solidFill>
-                          <a:latin typeface="メイリオ"/>
-                        </a:rPr>
-                        <a:t>・該当なし</a:t>
-                      </a:r>
-                    </a:p>
-                  </a:txBody>
-                  <a:tcPr anchor="ctr" marL="91440" marR="91440" marT="36576" marB="36576">
-                    <a:solidFill>
-                      <a:srgbClr val="FFFFFF"/>
-                    </a:solidFill>
-                  </a:tcPr>
-                </a:tc>
-              </a:tr>
-              <a:tr h="800100">
-                <a:tc>
-                  <a:txBody>
-                    <a:bodyPr wrap="square"/>
-                    <a:lstStyle/>
-                    <a:p>
-                      <a:r>
-                        <a:rPr sz="1000" b="1">
-                          <a:solidFill>
-                            <a:srgbClr val="FFFFFF"/>
-                          </a:solidFill>
-                          <a:latin typeface="メイリオ"/>
-                        </a:rPr>
-                        <a:t>スケジュール・導入フロー</a:t>
-                      </a:r>
-                    </a:p>
-                  </a:txBody>
-                  <a:tcPr anchor="ctr" marL="73152" marR="45720">
-                    <a:solidFill>
-                      <a:srgbClr val="15133D"/>
-                    </a:solidFill>
-                  </a:tcPr>
-                </a:tc>
-                <a:tc>
-                  <a:txBody>
-                    <a:bodyPr wrap="square"/>
-                    <a:lstStyle/>
-                    <a:p>
-                      <a:pPr>
-                        <a:lnSpc>
-                          <a:spcPct val="115000"/>
-                        </a:lnSpc>
-                        <a:spcAft>
-                          <a:spcPts val="300"/>
-                        </a:spcAft>
-                      </a:pPr>
-                      <a:r>
-                        <a:rPr sz="1100">
-                          <a:solidFill>
-                            <a:srgbClr val="333333"/>
-                          </a:solidFill>
-                          <a:latin typeface="メイリオ"/>
-                        </a:rPr>
-                        <a:t>・社外への案内開始日・リリース日：2026年9月2日</a:t>
-                      </a:r>
-                    </a:p>
-                    <a:p>
-                      <a:pPr>
-                        <a:lnSpc>
-                          <a:spcPct val="115000"/>
-                        </a:lnSpc>
-                        <a:spcAft>
-                          <a:spcPts val="300"/>
-                        </a:spcAft>
-                      </a:pPr>
-                      <a:r>
-                        <a:rPr sz="1100">
-                          <a:solidFill>
-                            <a:srgbClr val="333333"/>
-                          </a:solidFill>
-                          <a:latin typeface="メイリオ"/>
-                        </a:rPr>
-                        <a:t>・対象期間：9月8日（火）〜9月10日（木） 10:00〜14:30の間</a:t>
-                      </a:r>
-                    </a:p>
-                  </a:txBody>
-                  <a:tcPr anchor="ctr" marL="91440" marR="91440" marT="36576" marB="36576">
-                    <a:solidFill>
-                      <a:srgbClr val="FFFFFF"/>
-                    </a:solidFill>
-                  </a:tcPr>
-                </a:tc>
-              </a:tr>
-              <a:tr h="800100">
-                <a:tc>
-                  <a:txBody>
-                    <a:bodyPr wrap="square"/>
-                    <a:lstStyle/>
-                    <a:p>
-                      <a:r>
-                        <a:rPr sz="1000" b="1">
-                          <a:solidFill>
-                            <a:srgbClr val="FFFFFF"/>
-                          </a:solidFill>
-                          <a:latin typeface="メイリオ"/>
-                        </a:rPr>
-                        <a:t>注意点・影響</a:t>
-                      </a:r>
-                    </a:p>
-                  </a:txBody>
-                  <a:tcPr anchor="ctr" marL="73152" marR="45720">
-                    <a:solidFill>
-                      <a:srgbClr val="15133D"/>
-                    </a:solidFill>
-                  </a:tcPr>
-                </a:tc>
-                <a:tc>
-                  <a:txBody>
-                    <a:bodyPr wrap="square"/>
-                    <a:lstStyle/>
-                    <a:p>
-                      <a:pPr>
-                        <a:lnSpc>
-                          <a:spcPct val="115000"/>
-                        </a:lnSpc>
-                        <a:spcAft>
-                          <a:spcPts val="300"/>
-                        </a:spcAft>
-                      </a:pPr>
-                      <a:r>
-                        <a:rPr sz="1100">
-                          <a:solidFill>
-                            <a:srgbClr val="333333"/>
-                          </a:solidFill>
-                          <a:latin typeface="メイリオ"/>
-                        </a:rPr>
-                        <a:t>・影響範囲：サマリーレポートの作成・ダウンロードが利用不可</a:t>
-                      </a:r>
-                    </a:p>
-                    <a:p>
-                      <a:pPr>
-                        <a:lnSpc>
-                          <a:spcPct val="115000"/>
-                        </a:lnSpc>
-                        <a:spcAft>
-                          <a:spcPts val="300"/>
-                        </a:spcAft>
-                      </a:pPr>
-                      <a:r>
-                        <a:rPr sz="1100">
-                          <a:solidFill>
-                            <a:srgbClr val="333333"/>
-                          </a:solidFill>
-                          <a:latin typeface="メイリオ"/>
-                        </a:rPr>
-                        <a:t>・LBPMでの案件申請・入稿など、上記以外の機能は通常どおり利用可能</a:t>
-                      </a:r>
-                    </a:p>
-                    <a:p>
-                      <a:pPr>
-                        <a:lnSpc>
-                          <a:spcPct val="115000"/>
-                        </a:lnSpc>
-                        <a:spcAft>
-                          <a:spcPts val="300"/>
-                        </a:spcAft>
-                      </a:pPr>
-                      <a:r>
-                        <a:rPr sz="1100">
-                          <a:solidFill>
-                            <a:srgbClr val="333333"/>
-                          </a:solidFill>
-                          <a:latin typeface="メイリオ"/>
-                        </a:rPr>
-                        <a:t>・稼働中キャンペーンがあるクライアントには事前周知が必要</a:t>
-                      </a:r>
-                    </a:p>
-                  </a:txBody>
-                  <a:tcPr anchor="ctr" marL="91440" marR="91440" marT="36576" marB="36576">
-                    <a:solidFill>
-                      <a:srgbClr val="FFFFFF"/>
-                    </a:solidFill>
-                  </a:tcPr>
-                </a:tc>
-              </a:tr>
-            </a:tbl>
-          </a:graphicData>
-        </a:graphic>
-      </p:graphicFrame>
-    </p:spTree>
-  </p:cSld>
-  <p:clrMapOvr>
-    <a:masterClrMapping/>
-  </p:clrMapOvr>
-</p:sld>
-</file>
-
-<file path=ppt/slides/slide8.xml><?xml version="1.0" encoding="utf-8"?>
-<p:sld xmlns:a="http://schemas.openxmlformats.org/drawingml/2006/main" xmlns:p="http://schemas.openxmlformats.org/presentationml/2006/main" xmlns:r="http://schemas.openxmlformats.org/officeDocument/2006/relationships">
-  <p:cSld>
-    <p:spTree>
-      <p:nvGrpSpPr>
-        <p:cNvPr id="1" name=""/>
-        <p:cNvGrpSpPr/>
-        <p:nvPr/>
-      </p:nvGrpSpPr>
-      <p:grpSpPr/>
-      <p:sp>
-        <p:nvSpPr>
-          <p:cNvPr id="40" name="Google Shape;40;p3"/>
-          <p:cNvSpPr/>
-          <p:nvPr/>
-        </p:nvSpPr>
-        <p:spPr>
-          <a:xfrm>
-            <a:off x="292801" y="730955"/>
-            <a:ext cx="1296144" cy="435690"/>
-          </a:xfrm>
-          <a:prstGeom prst="rect">
-            <a:avLst/>
-          </a:prstGeom>
-          <a:solidFill>
-            <a:schemeClr val="dk2"/>
-          </a:solidFill>
-          <a:ln cap="flat" cmpd="sng" w="9525">
-            <a:solidFill>
-              <a:srgbClr val="4A7DBA"/>
-            </a:solidFill>
-            <a:prstDash val="solid"/>
-            <a:round/>
-            <a:headEnd len="sm" w="sm" type="none"/>
-            <a:tailEnd len="sm" w="sm" type="none"/>
-          </a:ln>
-        </p:spPr>
-        <p:txBody>
-          <a:bodyPr anchorCtr="0" anchor="ctr" bIns="45700" lIns="91425" spcFirstLastPara="1" rIns="91425" wrap="square" tIns="45700">
-            <a:noAutofit/>
-          </a:bodyPr>
-          <a:lstStyle/>
-          <a:p>
-            <a:pPr indent="0" lvl="0" marL="0" marR="0" rtl="0" algn="ctr">
-              <a:spcBef>
-                <a:spcPts val="0"/>
-              </a:spcBef>
-              <a:spcAft>
-                <a:spcPts val="0"/>
-              </a:spcAft>
-              <a:buNone/>
-            </a:pPr>
-            <a:r>
-              <a:rPr b="0" i="0" lang="ja-JP" sz="1800" u="none" cap="none" strike="noStrike">
-                <a:solidFill>
-                  <a:schemeClr val="lt1"/>
-                </a:solidFill>
-                <a:latin typeface="Meiryo"/>
-                <a:ea typeface="Meiryo"/>
-                <a:cs typeface="Meiryo"/>
-                <a:sym typeface="Meiryo"/>
-              </a:rPr>
-              <a:t>対象業界</a:t>
-            </a:r>
-            <a:endParaRPr/>
-          </a:p>
-        </p:txBody>
-      </p:sp>
-      <p:sp>
-        <p:nvSpPr>
-          <p:cNvPr id="41" name="Google Shape;41;p3"/>
-          <p:cNvSpPr/>
-          <p:nvPr/>
-        </p:nvSpPr>
-        <p:spPr>
-          <a:xfrm>
-            <a:off x="7560840" y="730955"/>
-            <a:ext cx="829618" cy="435690"/>
-          </a:xfrm>
-          <a:prstGeom prst="rect">
-            <a:avLst/>
-          </a:prstGeom>
-          <a:solidFill>
-            <a:schemeClr val="bg1"/>
-          </a:solidFill>
-          <a:ln cap="flat" cmpd="sng" w="9525">
-            <a:solidFill>
-              <a:srgbClr val="4F81BD"/>
-            </a:solidFill>
-            <a:prstDash val="sysDash"/>
-            <a:round/>
-            <a:headEnd len="sm" w="sm" type="none"/>
-            <a:tailEnd len="sm" w="sm" type="none"/>
-          </a:ln>
-        </p:spPr>
-        <p:txBody>
-          <a:bodyPr anchorCtr="0" anchor="ctr" bIns="45700" lIns="91425" spcFirstLastPara="1" rIns="91425" wrap="square" tIns="45700">
-            <a:noAutofit/>
-          </a:bodyPr>
-          <a:lstStyle/>
-          <a:p>
-            <a:pPr indent="0" lvl="0" marL="0" marR="0" rtl="0" algn="ctr">
-              <a:spcBef>
-                <a:spcPts val="0"/>
-              </a:spcBef>
-              <a:spcAft>
-                <a:spcPts val="0"/>
-              </a:spcAft>
-              <a:buNone/>
-            </a:pPr>
-            <a:r>
-              <a:rPr b="0" i="0" lang="ja-JP" sz="1200" u="none" cap="none" strike="noStrike">
-                <a:solidFill>
-                  <a:schemeClr val="dk1"/>
-                </a:solidFill>
-                <a:latin typeface="Meiryo"/>
-                <a:ea typeface="Meiryo"/>
-                <a:cs typeface="Meiryo"/>
-                <a:sym typeface="Meiryo"/>
-              </a:rPr>
-              <a:t>その他</a:t>
-            </a:r>
-            <a:endParaRPr b="0" i="0" sz="1200" u="none" cap="none" strike="noStrike">
-              <a:solidFill>
-                <a:schemeClr val="dk1"/>
-              </a:solidFill>
-              <a:latin typeface="Meiryo"/>
-              <a:ea typeface="Meiryo"/>
-              <a:cs typeface="Meiryo"/>
-              <a:sym typeface="Meiryo"/>
-            </a:endParaRPr>
-          </a:p>
-        </p:txBody>
-      </p:sp>
-      <p:sp>
-        <p:nvSpPr>
-          <p:cNvPr id="42" name="Google Shape;42;p3"/>
-          <p:cNvSpPr/>
-          <p:nvPr/>
-        </p:nvSpPr>
-        <p:spPr>
-          <a:xfrm>
-            <a:off x="6679050" y="730955"/>
-            <a:ext cx="829618" cy="435690"/>
-          </a:xfrm>
-          <a:prstGeom prst="rect">
-            <a:avLst/>
-          </a:prstGeom>
-          <a:solidFill>
-            <a:schemeClr val="tx2"/>
-          </a:solidFill>
-          <a:ln cap="flat" cmpd="sng" w="9525">
-            <a:solidFill>
-              <a:srgbClr val="4F81BD"/>
-            </a:solidFill>
-            <a:prstDash val="solid"/>
-            <a:round/>
-            <a:headEnd len="sm" w="sm" type="none"/>
-            <a:tailEnd len="sm" w="sm" type="none"/>
-          </a:ln>
-        </p:spPr>
-        <p:txBody>
-          <a:bodyPr anchorCtr="0" anchor="ctr" bIns="45700" lIns="91425" spcFirstLastPara="1" rIns="91425" wrap="square" tIns="45700">
-            <a:noAutofit/>
-          </a:bodyPr>
-          <a:lstStyle/>
-          <a:p>
-            <a:pPr indent="0" lvl="0" marL="0" marR="0" rtl="0" algn="ctr">
-              <a:spcBef>
-                <a:spcPts val="0"/>
-              </a:spcBef>
-              <a:spcAft>
-                <a:spcPts val="0"/>
-              </a:spcAft>
-              <a:buNone/>
-            </a:pPr>
-            <a:r>
-              <a:rPr b="0" i="0" lang="ja-JP" sz="1000" u="none" cap="none" strike="noStrike">
-                <a:solidFill>
-                  <a:schemeClr val="dk1"/>
-                </a:solidFill>
-                <a:latin typeface="Meiryo"/>
-                <a:ea typeface="Meiryo"/>
-                <a:cs typeface="Meiryo"/>
-                <a:sym typeface="Meiryo"/>
-              </a:rPr>
-              <a:t>オプション</a:t>
-            </a:r>
-            <a:endParaRPr b="0" i="0" sz="1000" u="none" cap="none" strike="noStrike">
-              <a:solidFill>
-                <a:schemeClr val="dk1"/>
-              </a:solidFill>
-              <a:latin typeface="Meiryo"/>
-              <a:ea typeface="Meiryo"/>
-              <a:cs typeface="Meiryo"/>
-              <a:sym typeface="Meiryo"/>
-            </a:endParaRPr>
-          </a:p>
-          <a:p>
-            <a:pPr indent="0" lvl="0" marL="0" marR="0" rtl="0" algn="ctr">
-              <a:spcBef>
-                <a:spcPts val="0"/>
-              </a:spcBef>
-              <a:spcAft>
-                <a:spcPts val="0"/>
-              </a:spcAft>
-              <a:buNone/>
-            </a:pPr>
-            <a:r>
-              <a:rPr b="0" i="0" lang="ja-JP" sz="1000" u="none" cap="none" strike="noStrike">
-                <a:solidFill>
-                  <a:schemeClr val="dk1"/>
-                </a:solidFill>
-                <a:latin typeface="Meiryo"/>
-                <a:ea typeface="Meiryo"/>
-                <a:cs typeface="Meiryo"/>
-                <a:sym typeface="Meiryo"/>
-              </a:rPr>
-              <a:t>商材</a:t>
-            </a:r>
-            <a:endParaRPr/>
-          </a:p>
-        </p:txBody>
-      </p:sp>
-      <p:sp>
-        <p:nvSpPr>
-          <p:cNvPr id="43" name="Google Shape;43;p3"/>
-          <p:cNvSpPr/>
-          <p:nvPr/>
-        </p:nvSpPr>
-        <p:spPr>
-          <a:xfrm>
-            <a:off x="1594068" y="730955"/>
-            <a:ext cx="2926883" cy="435690"/>
-          </a:xfrm>
-          <a:prstGeom prst="rect">
-            <a:avLst/>
-          </a:prstGeom>
-          <a:noFill/>
-          <a:ln cap="flat" cmpd="sng" w="9525">
-            <a:solidFill>
-              <a:srgbClr val="4A7DBA"/>
-            </a:solidFill>
-            <a:prstDash val="solid"/>
-            <a:round/>
-            <a:headEnd len="sm" w="sm" type="none"/>
-            <a:tailEnd len="sm" w="sm" type="none"/>
-          </a:ln>
-        </p:spPr>
-        <p:txBody>
-          <a:bodyPr anchorCtr="0" anchor="ctr" bIns="45700" lIns="91425" spcFirstLastPara="1" rIns="91425" wrap="square" tIns="45700">
-            <a:noAutofit/>
-          </a:bodyPr>
-          <a:lstStyle/>
-          <a:p>
-            <a:pPr indent="0" lvl="0" marL="0" marR="0" rtl="0" algn="ctr">
-              <a:spcBef>
-                <a:spcPts val="0"/>
-              </a:spcBef>
-              <a:spcAft>
-                <a:spcPts val="0"/>
-              </a:spcAft>
-              <a:buNone/>
-            </a:pPr>
-            <a:r>
-              <a:rPr b="0" i="0" lang="ja-JP" sz="1300" u="none" cap="none" strike="noStrike">
-                <a:solidFill>
-                  <a:schemeClr val="dk1"/>
-                </a:solidFill>
-                <a:latin typeface="Meiryo"/>
-                <a:ea typeface="Meiryo"/>
-                <a:cs typeface="Meiryo"/>
-                <a:sym typeface="Meiryo"/>
-              </a:rPr>
-              <a:t>友だち獲得を強化したい全業種</a:t>
-            </a:r>
-            <a:endParaRPr/>
-          </a:p>
-        </p:txBody>
-      </p:sp>
-      <p:sp>
-        <p:nvSpPr>
-          <p:cNvPr id="44" name="Google Shape;44;p3"/>
-          <p:cNvSpPr txBox="1"/>
-          <p:nvPr/>
-        </p:nvSpPr>
-        <p:spPr>
-          <a:xfrm>
-            <a:off x="3296816" y="6597352"/>
-            <a:ext cx="6209091" cy="215444"/>
-          </a:xfrm>
-          <a:prstGeom prst="rect">
-            <a:avLst/>
-          </a:prstGeom>
-          <a:noFill/>
-          <a:ln>
-            <a:noFill/>
-          </a:ln>
-        </p:spPr>
-        <p:txBody>
-          <a:bodyPr anchorCtr="0" anchor="t" bIns="45700" lIns="91425" spcFirstLastPara="1" rIns="91425" wrap="square" tIns="45700">
-            <a:spAutoFit/>
-          </a:bodyPr>
-          <a:lstStyle/>
-          <a:p>
-            <a:pPr indent="0" lvl="0" marL="0" marR="0" rtl="0" algn="l">
-              <a:spcBef>
-                <a:spcPts val="0"/>
-              </a:spcBef>
-              <a:spcAft>
-                <a:spcPts val="0"/>
-              </a:spcAft>
-              <a:buNone/>
-            </a:pPr>
-            <a:r>
-              <a:rPr b="0" i="0" lang="ja-JP" sz="800" u="none" cap="none" strike="noStrike">
-                <a:solidFill>
-                  <a:schemeClr val="lt1"/>
-                </a:solidFill>
-                <a:latin typeface="Meiryo"/>
-                <a:ea typeface="Meiryo"/>
-                <a:cs typeface="Meiryo"/>
-                <a:sym typeface="Meiryo"/>
-              </a:rPr>
-              <a:t>出典：https://workers-hub.box.com/s/odilqpe44tp398zlfko148yggcgj68ny</a:t>
-            </a:r>
-            <a:endParaRPr sz="800">
-              <a:solidFill>
-                <a:schemeClr val="lt1"/>
-              </a:solidFill>
-              <a:latin typeface="Meiryo"/>
-              <a:ea typeface="Meiryo"/>
-              <a:cs typeface="Meiryo"/>
-              <a:sym typeface="Meiryo"/>
-            </a:endParaRPr>
-          </a:p>
-        </p:txBody>
-      </p:sp>
-      <p:sp>
-        <p:nvSpPr>
-          <p:cNvPr id="45" name="Google Shape;45;p3"/>
-          <p:cNvSpPr/>
-          <p:nvPr/>
-        </p:nvSpPr>
-        <p:spPr>
-          <a:xfrm>
-            <a:off x="0" y="1234746"/>
-            <a:ext cx="9906000" cy="672259"/>
-          </a:xfrm>
-          <a:prstGeom prst="rect">
-            <a:avLst/>
-          </a:prstGeom>
-          <a:solidFill>
-            <a:srgbClr val="C5D8F1"/>
-          </a:solidFill>
-          <a:ln>
-            <a:noFill/>
-          </a:ln>
-        </p:spPr>
-        <p:txBody>
-          <a:bodyPr anchorCtr="0" anchor="ctr" bIns="45700" lIns="91425" spcFirstLastPara="1" rIns="91425" wrap="square" tIns="45700">
-            <a:noAutofit/>
-          </a:bodyPr>
-          <a:lstStyle/>
-          <a:p>
-            <a:pPr indent="0" lvl="0" marL="0" marR="0" rtl="0" algn="ctr">
-              <a:spcBef>
-                <a:spcPts val="0"/>
-              </a:spcBef>
-              <a:spcAft>
-                <a:spcPts val="0"/>
-              </a:spcAft>
-              <a:buNone/>
-            </a:pPr>
-            <a:r>
-              <a:rPr b="1" lang="ja-JP" sz="1600">
-                <a:solidFill>
-                  <a:srgbClr val="004DE6"/>
-                </a:solidFill>
-                <a:latin typeface="Meiryo"/>
-                <a:ea typeface="Meiryo"/>
-                <a:cs typeface="Meiryo"/>
-                <a:sym typeface="Meiryo"/>
-              </a:rPr>
-              <a:t>　　　　　　</a:t>
-            </a:r>
-            <a:endParaRPr b="1" sz="1800">
-              <a:solidFill>
-                <a:srgbClr val="004DE6"/>
-              </a:solidFill>
-              <a:latin typeface="Meiryo"/>
-              <a:ea typeface="Meiryo"/>
-              <a:cs typeface="Meiryo"/>
-              <a:sym typeface="Meiryo"/>
-            </a:endParaRPr>
-          </a:p>
-        </p:txBody>
-      </p:sp>
-      <p:sp>
-        <p:nvSpPr>
-          <p:cNvPr id="46" name="Google Shape;46;p3"/>
-          <p:cNvSpPr/>
-          <p:nvPr/>
-        </p:nvSpPr>
-        <p:spPr>
-          <a:xfrm>
-            <a:off x="1089832" y="1437370"/>
-            <a:ext cx="7031520" cy="338554"/>
-          </a:xfrm>
-          <a:prstGeom prst="rect">
-            <a:avLst/>
-          </a:prstGeom>
-          <a:noFill/>
-          <a:ln>
-            <a:noFill/>
-          </a:ln>
-        </p:spPr>
-        <p:txBody>
-          <a:bodyPr anchorCtr="0" anchor="t" bIns="45700" lIns="91425" spcFirstLastPara="1" rIns="91425" wrap="square" tIns="45700">
-            <a:spAutoFit/>
-          </a:bodyPr>
-          <a:lstStyle/>
-          <a:p>
-            <a:pPr indent="0" lvl="0" marL="0" marR="0" rtl="0" algn="l">
-              <a:spcBef>
-                <a:spcPts val="0"/>
-              </a:spcBef>
-              <a:spcAft>
-                <a:spcPts val="0"/>
-              </a:spcAft>
-              <a:buNone/>
-            </a:pPr>
-            <a:r>
-              <a:rPr b="1" lang="ja-JP" sz="1600">
-                <a:solidFill>
-                  <a:srgbClr val="004DE6"/>
-                </a:solidFill>
-                <a:latin typeface="Meiryo"/>
-                <a:ea typeface="Meiryo"/>
-                <a:cs typeface="Meiryo"/>
-                <a:sym typeface="Meiryo"/>
-              </a:rPr>
-              <a:t>【LINEオープンキャンペーン】26年10-12月 期間限定キャンペーン</a:t>
-            </a:r>
-            <a:endParaRPr b="1" sz="1600">
-              <a:solidFill>
-                <a:srgbClr val="004DE6"/>
-              </a:solidFill>
-              <a:latin typeface="Meiryo"/>
-              <a:ea typeface="Meiryo"/>
-              <a:cs typeface="Meiryo"/>
-              <a:sym typeface="Meiryo"/>
-            </a:endParaRPr>
-          </a:p>
-        </p:txBody>
-      </p:sp>
-      <p:sp>
-        <p:nvSpPr>
-          <p:cNvPr id="47" name="Google Shape;47;p3"/>
-          <p:cNvSpPr txBox="1"/>
-          <p:nvPr/>
-        </p:nvSpPr>
-        <p:spPr>
-          <a:xfrm>
-            <a:off x="182880" y="88175"/>
-            <a:ext cx="7512385" cy="365091"/>
-          </a:xfrm>
-          <a:prstGeom prst="rect">
-            <a:avLst/>
-          </a:prstGeom>
-          <a:noFill/>
-          <a:ln>
-            <a:noFill/>
-          </a:ln>
-        </p:spPr>
-        <p:txBody>
-          <a:bodyPr anchorCtr="0" anchor="t" bIns="45700" lIns="91425" spcFirstLastPara="1" rIns="91425" wrap="square" tIns="72000">
-            <a:spAutoFit/>
-          </a:bodyPr>
-          <a:lstStyle/>
-          <a:p>
-            <a:pPr indent="0" lvl="0" marL="0" marR="0" rtl="0" algn="l">
-              <a:spcBef>
-                <a:spcPts val="0"/>
-              </a:spcBef>
-              <a:spcAft>
-                <a:spcPts val="0"/>
-              </a:spcAft>
-              <a:buClr>
-                <a:schemeClr val="dk1"/>
-              </a:buClr>
-              <a:buSzPts val="1600"/>
-              <a:buFont typeface="Arial"/>
-              <a:buNone/>
-            </a:pPr>
-            <a:r>
-              <a:rPr b="0" lang="ja-JP" sz="1600" u="none">
-                <a:solidFill>
-                  <a:schemeClr val="dk1"/>
-                </a:solidFill>
-                <a:latin typeface="Meiryo"/>
-                <a:ea typeface="Meiryo"/>
-                <a:cs typeface="Meiryo"/>
-                <a:sym typeface="Meiryo"/>
-              </a:rPr>
-              <a:t>    今後のアップデート情報</a:t>
-            </a:r>
-            <a:endParaRPr b="0" sz="1600" u="none">
-              <a:solidFill>
-                <a:schemeClr val="dk1"/>
-              </a:solidFill>
-              <a:latin typeface="Meiryo"/>
-              <a:ea typeface="Meiryo"/>
-              <a:cs typeface="Meiryo"/>
-              <a:sym typeface="Meiryo"/>
-            </a:endParaRPr>
-          </a:p>
-        </p:txBody>
-      </p:sp>
-      <p:sp>
-        <p:nvSpPr>
-          <p:cNvPr id="48" name="Google Shape;48;p3"/>
-          <p:cNvSpPr/>
-          <p:nvPr/>
-        </p:nvSpPr>
-        <p:spPr>
-          <a:xfrm>
-            <a:off x="5797260" y="730955"/>
-            <a:ext cx="829618" cy="435690"/>
-          </a:xfrm>
-          <a:prstGeom prst="rect">
-            <a:avLst/>
-          </a:prstGeom>
-          <a:solidFill>
-            <a:schemeClr val="bg1"/>
-          </a:solidFill>
-          <a:ln cap="flat" cmpd="sng" w="9525">
-            <a:solidFill>
-              <a:srgbClr val="4F81BD"/>
-            </a:solidFill>
-            <a:prstDash val="sysDash"/>
-            <a:round/>
-            <a:headEnd len="sm" w="sm" type="none"/>
-            <a:tailEnd len="sm" w="sm" type="none"/>
-          </a:ln>
-        </p:spPr>
-        <p:txBody>
-          <a:bodyPr anchorCtr="0" anchor="ctr" bIns="45700" lIns="91425" spcFirstLastPara="1" rIns="91425" wrap="square" tIns="45700">
-            <a:noAutofit/>
-          </a:bodyPr>
-          <a:lstStyle/>
-          <a:p>
-            <a:pPr indent="0" lvl="0" marL="0" marR="0" rtl="0" algn="ctr">
-              <a:spcBef>
-                <a:spcPts val="0"/>
-              </a:spcBef>
-              <a:spcAft>
-                <a:spcPts val="0"/>
-              </a:spcAft>
-              <a:buClr>
-                <a:schemeClr val="dk1"/>
-              </a:buClr>
-              <a:buSzPts val="1000"/>
-              <a:buFont typeface="Meiryo"/>
-              <a:buNone/>
-            </a:pPr>
-            <a:r>
-              <a:rPr lang="ja-JP" sz="1000">
-                <a:solidFill>
-                  <a:schemeClr val="dk1"/>
-                </a:solidFill>
-                <a:latin typeface="Meiryo"/>
-                <a:ea typeface="Meiryo"/>
-                <a:cs typeface="Meiryo"/>
-                <a:sym typeface="Meiryo"/>
-              </a:rPr>
-              <a:t>開発</a:t>
-            </a:r>
-            <a:endParaRPr sz="1000">
-              <a:solidFill>
-                <a:schemeClr val="dk1"/>
-              </a:solidFill>
-              <a:latin typeface="Meiryo"/>
-              <a:ea typeface="Meiryo"/>
-              <a:cs typeface="Meiryo"/>
-              <a:sym typeface="Meiryo"/>
-            </a:endParaRPr>
-          </a:p>
-          <a:p>
-            <a:pPr indent="0" lvl="0" marL="0" marR="0" rtl="0" algn="ctr">
-              <a:spcBef>
-                <a:spcPts val="0"/>
-              </a:spcBef>
-              <a:spcAft>
-                <a:spcPts val="0"/>
-              </a:spcAft>
-              <a:buClr>
-                <a:schemeClr val="dk1"/>
-              </a:buClr>
-              <a:buSzPts val="1000"/>
-              <a:buFont typeface="Meiryo"/>
-              <a:buNone/>
-            </a:pPr>
-            <a:r>
-              <a:rPr lang="ja-JP" sz="1000">
-                <a:solidFill>
-                  <a:schemeClr val="dk1"/>
-                </a:solidFill>
-                <a:latin typeface="Meiryo"/>
-                <a:ea typeface="Meiryo"/>
-                <a:cs typeface="Meiryo"/>
-                <a:sym typeface="Meiryo"/>
-              </a:rPr>
-              <a:t>LINE API</a:t>
-            </a:r>
-            <a:endParaRPr sz="1000">
-              <a:solidFill>
-                <a:schemeClr val="dk1"/>
-              </a:solidFill>
-              <a:latin typeface="Meiryo"/>
-              <a:ea typeface="Meiryo"/>
-              <a:cs typeface="Meiryo"/>
-              <a:sym typeface="Meiryo"/>
-            </a:endParaRPr>
-          </a:p>
-        </p:txBody>
-      </p:sp>
-      <p:sp>
-        <p:nvSpPr>
-          <p:cNvPr id="49" name="Google Shape;49;p3"/>
-          <p:cNvSpPr/>
-          <p:nvPr/>
-        </p:nvSpPr>
-        <p:spPr>
-          <a:xfrm>
-            <a:off x="4915470" y="730955"/>
-            <a:ext cx="829618" cy="435690"/>
-          </a:xfrm>
-          <a:prstGeom prst="rect">
-            <a:avLst/>
-          </a:prstGeom>
-          <a:solidFill>
-            <a:schemeClr val="bg1"/>
-          </a:solidFill>
-          <a:ln cap="flat" cmpd="sng" w="9525">
-            <a:solidFill>
-              <a:srgbClr val="4F81BD"/>
-            </a:solidFill>
-            <a:prstDash val="sysDash"/>
-            <a:round/>
-            <a:headEnd len="sm" w="sm" type="none"/>
-            <a:tailEnd len="sm" w="sm" type="none"/>
-          </a:ln>
-        </p:spPr>
-        <p:txBody>
-          <a:bodyPr anchorCtr="0" anchor="ctr" bIns="45700" lIns="91425" spcFirstLastPara="1" rIns="91425" wrap="square" tIns="45700">
-            <a:noAutofit/>
-          </a:bodyPr>
-          <a:lstStyle/>
-          <a:p>
-            <a:pPr indent="0" lvl="0" marL="0" marR="0" rtl="0" algn="ctr">
-              <a:spcBef>
-                <a:spcPts val="0"/>
-              </a:spcBef>
-              <a:spcAft>
-                <a:spcPts val="0"/>
-              </a:spcAft>
-              <a:buNone/>
-            </a:pPr>
-            <a:r>
-              <a:rPr lang="ja-JP" sz="1000">
-                <a:solidFill>
-                  <a:schemeClr val="dk1"/>
-                </a:solidFill>
-                <a:latin typeface="Meiryo"/>
-                <a:ea typeface="Meiryo"/>
-                <a:cs typeface="Meiryo"/>
-                <a:sym typeface="Meiryo"/>
-              </a:rPr>
-              <a:t>LINE公式アカウント</a:t>
-            </a:r>
-            <a:endParaRPr sz="1000">
-              <a:solidFill>
-                <a:schemeClr val="dk1"/>
-              </a:solidFill>
-              <a:latin typeface="Meiryo"/>
-              <a:ea typeface="Meiryo"/>
-              <a:cs typeface="Meiryo"/>
-              <a:sym typeface="Meiryo"/>
-            </a:endParaRPr>
-          </a:p>
-        </p:txBody>
-      </p:sp>
-      <p:sp>
-        <p:nvSpPr>
-          <p:cNvPr id="50" name="Google Shape;50;p3"/>
-          <p:cNvSpPr/>
-          <p:nvPr/>
-        </p:nvSpPr>
-        <p:spPr>
-          <a:xfrm>
-            <a:off x="0" y="1890267"/>
-            <a:ext cx="9906000" cy="733579"/>
-          </a:xfrm>
-          <a:prstGeom prst="rect">
-            <a:avLst/>
-          </a:prstGeom>
-          <a:solidFill>
-            <a:srgbClr val="F2F2F2"/>
-          </a:solidFill>
-          <a:ln>
-            <a:noFill/>
-          </a:ln>
-        </p:spPr>
-        <p:txBody>
-          <a:bodyPr anchorCtr="0" anchor="ctr" bIns="45700" lIns="91425" spcFirstLastPara="1" rIns="91425" wrap="square" tIns="45700">
-            <a:noAutofit/>
-          </a:bodyPr>
-          <a:lstStyle/>
-          <a:p>
-            <a:pPr indent="0" lvl="0" marL="0" marR="0" rtl="0" algn="ctr">
-              <a:spcBef>
-                <a:spcPts val="0"/>
-              </a:spcBef>
-              <a:spcAft>
-                <a:spcPts val="0"/>
-              </a:spcAft>
-              <a:buNone/>
-            </a:pPr>
-            <a:r>
-              <a:t/>
-            </a:r>
-            <a:endParaRPr sz="1200">
-              <a:solidFill>
-                <a:schemeClr val="dk1"/>
-              </a:solidFill>
-              <a:latin typeface="Meiryo"/>
-              <a:ea typeface="Meiryo"/>
-              <a:cs typeface="Meiryo"/>
-              <a:sym typeface="Meiryo"/>
-            </a:endParaRPr>
-          </a:p>
-        </p:txBody>
-      </p:sp>
-      <p:sp>
-        <p:nvSpPr>
-          <p:cNvPr id="51" name="Google Shape;51;p3"/>
-          <p:cNvSpPr/>
-          <p:nvPr/>
-        </p:nvSpPr>
-        <p:spPr>
-          <a:xfrm>
-            <a:off x="544108" y="1961282"/>
-            <a:ext cx="8817783" cy="646331"/>
-          </a:xfrm>
-          <a:prstGeom prst="rect">
-            <a:avLst/>
-          </a:prstGeom>
-          <a:noFill/>
-          <a:ln>
-            <a:noFill/>
-          </a:ln>
-        </p:spPr>
-        <p:txBody>
-          <a:bodyPr anchorCtr="0" anchor="t" bIns="45700" lIns="91425" spcFirstLastPara="1" rIns="91425" wrap="square" tIns="45700">
-            <a:spAutoFit/>
-          </a:bodyPr>
-          <a:lstStyle/>
-          <a:p>
-            <a:pPr indent="0" lvl="0" marL="0" marR="0" rtl="0" algn="ctr">
-              <a:spcBef>
-                <a:spcPts val="0"/>
-              </a:spcBef>
-              <a:spcAft>
-                <a:spcPts val="0"/>
-              </a:spcAft>
-              <a:buNone/>
-            </a:pPr>
-            <a:r>
-              <a:rPr b="1" lang="ja-JP" sz="1200">
-                <a:solidFill>
-                  <a:schemeClr val="dk1"/>
-                </a:solidFill>
-                <a:latin typeface="Meiryo"/>
-                <a:ea typeface="Meiryo"/>
-                <a:cs typeface="Meiryo"/>
-                <a:sym typeface="Meiryo"/>
-              </a:rPr>
-              <a:t>2026年10月20日開始〜12月25日までに終了する案件限定で、</a:t>
-            </a:r>
-            <a:endParaRPr b="1" sz="1200">
-              <a:solidFill>
-                <a:schemeClr val="dk1"/>
-              </a:solidFill>
-              <a:latin typeface="Meiryo"/>
-              <a:ea typeface="Meiryo"/>
-              <a:cs typeface="Meiryo"/>
-              <a:sym typeface="Meiryo"/>
-            </a:endParaRPr>
-          </a:p>
-          <a:p>
-            <a:pPr indent="0" lvl="0" marL="0" marR="0" rtl="0" algn="ctr">
-              <a:spcBef>
-                <a:spcPts val="0"/>
-              </a:spcBef>
-              <a:spcAft>
-                <a:spcPts val="0"/>
-              </a:spcAft>
-              <a:buNone/>
-            </a:pPr>
-            <a:r>
-              <a:rPr b="1" lang="ja-JP" sz="1200">
-                <a:solidFill>
-                  <a:schemeClr val="dk1"/>
-                </a:solidFill>
-                <a:latin typeface="Meiryo"/>
-                <a:ea typeface="Meiryo"/>
-                <a:cs typeface="Meiryo"/>
-                <a:sym typeface="Meiryo"/>
-              </a:rPr>
-              <a:t>特別価格・特別掲載期間・特別通数の3特典が適用される期間限定キャンペーン。</a:t>
-            </a:r>
-            <a:endParaRPr/>
-          </a:p>
-          <a:p>
-            <a:pPr indent="0" lvl="0" marL="0" marR="0" rtl="0" algn="ctr">
-              <a:spcBef>
-                <a:spcPts val="0"/>
-              </a:spcBef>
-              <a:spcAft>
-                <a:spcPts val="0"/>
-              </a:spcAft>
-              <a:buNone/>
-            </a:pPr>
-            <a:r>
-              <a:rPr b="1" lang="ja-JP" sz="1200">
-                <a:solidFill>
-                  <a:schemeClr val="dk1"/>
-                </a:solidFill>
-                <a:latin typeface="Meiryo"/>
-                <a:ea typeface="Meiryo"/>
-                <a:cs typeface="Meiryo"/>
-                <a:sym typeface="Meiryo"/>
-              </a:rPr>
-              <a:t>友だち獲得を一気に伸ばしたいクライアントへの提案材料になる。</a:t>
-            </a:r>
-            <a:endParaRPr b="1" sz="1400">
-              <a:solidFill>
-                <a:schemeClr val="dk1"/>
-              </a:solidFill>
-              <a:latin typeface="Meiryo"/>
-              <a:ea typeface="Meiryo"/>
-              <a:cs typeface="Meiryo"/>
-              <a:sym typeface="Meiryo"/>
-            </a:endParaRPr>
-          </a:p>
-        </p:txBody>
-      </p:sp>
-      <p:sp>
-        <p:nvSpPr>
-          <p:cNvPr id="52" name="Google Shape;52;p3"/>
-          <p:cNvSpPr/>
-          <p:nvPr/>
-        </p:nvSpPr>
-        <p:spPr>
-          <a:xfrm>
-            <a:off x="351381" y="2714173"/>
-            <a:ext cx="5200000" cy="338554"/>
-          </a:xfrm>
-          <a:prstGeom prst="rect">
-            <a:avLst/>
-          </a:prstGeom>
-          <a:noFill/>
-          <a:ln>
-            <a:noFill/>
-          </a:ln>
-        </p:spPr>
-        <p:txBody>
-          <a:bodyPr anchorCtr="0" anchor="t" bIns="45700" lIns="91425" spcFirstLastPara="1" rIns="91425" wrap="square" tIns="45700">
-            <a:noAutofit/>
-          </a:bodyPr>
-          <a:lstStyle/>
-          <a:p>
-            <a:pPr indent="0" lvl="0" marL="0" marR="0" rtl="0" algn="l">
-              <a:spcBef>
-                <a:spcPts val="0"/>
-              </a:spcBef>
-              <a:spcAft>
-                <a:spcPts val="0"/>
-              </a:spcAft>
-              <a:buNone/>
-            </a:pPr>
-            <a:r>
-              <a:rPr b="1" lang="ja-JP" sz="1400">
-                <a:solidFill>
-                  <a:srgbClr val="15133D"/>
-                </a:solidFill>
-                <a:latin typeface="Meiryo"/>
-                <a:ea typeface="Meiryo"/>
-                <a:cs typeface="Meiryo"/>
-                <a:sym typeface="Meiryo"/>
-              </a:rPr>
-              <a:t>■ 詳細</a:t>
-            </a:r>
-            <a:endParaRPr/>
-          </a:p>
-        </p:txBody>
-      </p:sp>
-      <p:grpSp>
-        <p:nvGrpSpPr>
-          <p:cNvPr id="53" name="Google Shape;53;p3"/>
-          <p:cNvGrpSpPr/>
-          <p:nvPr/>
-        </p:nvGrpSpPr>
-        <p:grpSpPr>
-          <a:xfrm>
-            <a:off x="8473303" y="730955"/>
-            <a:ext cx="1376241" cy="1131930"/>
-            <a:chOff x="0" y="0"/>
-            <a:chExt cx="1376241" cy="1131930"/>
-          </a:xfrm>
-        </p:grpSpPr>
-        <p:sp>
-          <p:nvSpPr>
-            <p:cNvPr id="54" name="Google Shape;54;p3"/>
-            <p:cNvSpPr/>
-            <p:nvPr/>
-          </p:nvSpPr>
-          <p:spPr>
-            <a:xfrm rot="10800000">
-              <a:off x="0" y="0"/>
-              <a:ext cx="1376241" cy="282982"/>
-            </a:xfrm>
-            <a:prstGeom prst="trapezoid">
-              <a:avLst>
-                <a:gd fmla="val 60792" name="adj"/>
-              </a:avLst>
-            </a:prstGeom>
-            <a:solidFill>
-              <a:srgbClr val="EAEDF5"/>
-            </a:solidFill>
-            <a:ln cap="flat" cmpd="sng" w="25400">
-              <a:solidFill>
-                <a:schemeClr val="dk2"/>
-              </a:solidFill>
-              <a:prstDash val="solid"/>
-              <a:round/>
-              <a:headEnd len="sm" w="sm" type="none"/>
-              <a:tailEnd len="sm" w="sm" type="none"/>
-            </a:ln>
-          </p:spPr>
-          <p:txBody>
-            <a:bodyPr anchorCtr="0" anchor="ctr" bIns="91425" lIns="91425" spcFirstLastPara="1" rIns="91425" wrap="square" tIns="91425">
-              <a:noAutofit/>
-            </a:bodyPr>
-            <a:lstStyle/>
-            <a:p>
-              <a:pPr indent="0" lvl="0" marL="0" rtl="0" algn="l">
-                <a:spcBef>
-                  <a:spcPts val="0"/>
-                </a:spcBef>
-                <a:spcAft>
-                  <a:spcPts val="0"/>
-                </a:spcAft>
-                <a:buNone/>
-              </a:pPr>
-              <a:r>
-                <a:t/>
-              </a:r>
-              <a:endParaRPr/>
-            </a:p>
-          </p:txBody>
-        </p:sp>
-        <p:sp>
-          <p:nvSpPr>
-            <p:cNvPr id="55" name="Google Shape;55;p3"/>
-            <p:cNvSpPr txBox="1"/>
-            <p:nvPr/>
-          </p:nvSpPr>
-          <p:spPr>
-            <a:xfrm>
-              <a:off x="240842" y="0"/>
-              <a:ext cx="894556" cy="282982"/>
-            </a:xfrm>
-            <a:prstGeom prst="rect">
-              <a:avLst/>
-            </a:prstGeom>
-            <a:noFill/>
-            <a:ln>
-              <a:noFill/>
-            </a:ln>
-          </p:spPr>
-          <p:txBody>
-            <a:bodyPr anchorCtr="0" anchor="ctr" bIns="10150" lIns="10150" spcFirstLastPara="1" rIns="10150" wrap="square" tIns="10150">
-              <a:noAutofit/>
-            </a:bodyPr>
-            <a:lstStyle/>
-            <a:p>
-              <a:pPr indent="0" lvl="0" marL="0" marR="0" rtl="0" algn="ctr">
-                <a:lnSpc>
-                  <a:spcPct val="90000"/>
-                </a:lnSpc>
-                <a:spcBef>
-                  <a:spcPts val="0"/>
-                </a:spcBef>
-                <a:spcAft>
-                  <a:spcPts val="0"/>
-                </a:spcAft>
-                <a:buClr>
-                  <a:srgbClr val="262626"/>
-                </a:buClr>
-                <a:buSzPts val="800"/>
-                <a:buFont typeface="Arial"/>
-                <a:buNone/>
-              </a:pPr>
-              <a:r>
-                <a:rPr b="1" lang="ja-JP" sz="800">
-                  <a:solidFill>
-                    <a:srgbClr val="262626"/>
-                  </a:solidFill>
-                  <a:latin typeface="Arial"/>
-                  <a:ea typeface="Arial"/>
-                  <a:cs typeface="Arial"/>
-                  <a:sym typeface="Arial"/>
-                </a:rPr>
-                <a:t>認知</a:t>
-              </a:r>
-              <a:endParaRPr/>
-            </a:p>
-          </p:txBody>
-        </p:sp>
-        <p:sp>
-          <p:nvSpPr>
-            <p:cNvPr id="56" name="Google Shape;56;p3"/>
-            <p:cNvSpPr/>
-            <p:nvPr/>
-          </p:nvSpPr>
-          <p:spPr>
-            <a:xfrm rot="10800000">
-              <a:off x="172030" y="282982"/>
-              <a:ext cx="1032180" cy="282982"/>
-            </a:xfrm>
-            <a:prstGeom prst="trapezoid">
-              <a:avLst>
-                <a:gd fmla="val 60792" name="adj"/>
-              </a:avLst>
-            </a:prstGeom>
-            <a:solidFill>
-              <a:schemeClr val="lt1"/>
-            </a:solidFill>
-            <a:ln cap="flat" cmpd="sng" w="25400">
-              <a:solidFill>
-                <a:schemeClr val="dk2"/>
-              </a:solidFill>
-              <a:prstDash val="solid"/>
-              <a:round/>
-              <a:headEnd len="sm" w="sm" type="none"/>
-              <a:tailEnd len="sm" w="sm" type="none"/>
-            </a:ln>
-          </p:spPr>
-          <p:txBody>
-            <a:bodyPr anchorCtr="0" anchor="ctr" bIns="91425" lIns="91425" spcFirstLastPara="1" rIns="91425" wrap="square" tIns="91425">
-              <a:noAutofit/>
-            </a:bodyPr>
-            <a:lstStyle/>
-            <a:p>
-              <a:pPr indent="0" lvl="0" marL="0" rtl="0" algn="l">
-                <a:spcBef>
-                  <a:spcPts val="0"/>
-                </a:spcBef>
-                <a:spcAft>
-                  <a:spcPts val="0"/>
-                </a:spcAft>
-                <a:buNone/>
-              </a:pPr>
-              <a:r>
-                <a:t/>
-              </a:r>
-              <a:endParaRPr/>
-            </a:p>
-          </p:txBody>
-        </p:sp>
-        <p:sp>
-          <p:nvSpPr>
-            <p:cNvPr id="57" name="Google Shape;57;p3"/>
-            <p:cNvSpPr txBox="1"/>
-            <p:nvPr/>
-          </p:nvSpPr>
-          <p:spPr>
-            <a:xfrm>
-              <a:off x="352661" y="282982"/>
-              <a:ext cx="670917" cy="282982"/>
-            </a:xfrm>
-            <a:prstGeom prst="rect">
-              <a:avLst/>
-            </a:prstGeom>
-            <a:noFill/>
-            <a:ln>
-              <a:noFill/>
-            </a:ln>
-          </p:spPr>
-          <p:txBody>
-            <a:bodyPr anchorCtr="0" anchor="ctr" bIns="10150" lIns="10150" spcFirstLastPara="1" rIns="10150" wrap="square" tIns="10150">
-              <a:noAutofit/>
-            </a:bodyPr>
-            <a:lstStyle/>
-            <a:p>
-              <a:pPr indent="0" lvl="0" marL="0" marR="0" rtl="0" algn="ctr">
-                <a:lnSpc>
-                  <a:spcPct val="90000"/>
-                </a:lnSpc>
-                <a:spcBef>
-                  <a:spcPts val="0"/>
-                </a:spcBef>
-                <a:spcAft>
-                  <a:spcPts val="0"/>
-                </a:spcAft>
-                <a:buClr>
-                  <a:srgbClr val="262626"/>
-                </a:buClr>
-                <a:buSzPts val="800"/>
-                <a:buFont typeface="Arial"/>
-                <a:buNone/>
-              </a:pPr>
-              <a:r>
-                <a:rPr b="1" lang="ja-JP" sz="800">
-                  <a:solidFill>
-                    <a:srgbClr val="262626"/>
-                  </a:solidFill>
-                  <a:latin typeface="Arial"/>
-                  <a:ea typeface="Arial"/>
-                  <a:cs typeface="Arial"/>
-                  <a:sym typeface="Arial"/>
-                </a:rPr>
-                <a:t>検討</a:t>
-              </a:r>
-              <a:endParaRPr/>
-            </a:p>
-          </p:txBody>
-        </p:sp>
-        <p:sp>
-          <p:nvSpPr>
-            <p:cNvPr id="58" name="Google Shape;58;p3"/>
-            <p:cNvSpPr/>
-            <p:nvPr/>
-          </p:nvSpPr>
-          <p:spPr>
-            <a:xfrm rot="10800000">
-              <a:off x="344060" y="565965"/>
-              <a:ext cx="688120" cy="282982"/>
-            </a:xfrm>
-            <a:prstGeom prst="trapezoid">
-              <a:avLst>
-                <a:gd fmla="val 60792" name="adj"/>
-              </a:avLst>
-            </a:prstGeom>
-            <a:solidFill>
-              <a:schemeClr val="lt1"/>
-            </a:solidFill>
-            <a:ln cap="flat" cmpd="sng" w="25400">
-              <a:solidFill>
-                <a:schemeClr val="dk2"/>
-              </a:solidFill>
-              <a:prstDash val="solid"/>
-              <a:round/>
-              <a:headEnd len="sm" w="sm" type="none"/>
-              <a:tailEnd len="sm" w="sm" type="none"/>
-            </a:ln>
-          </p:spPr>
-          <p:txBody>
-            <a:bodyPr anchorCtr="0" anchor="ctr" bIns="91425" lIns="91425" spcFirstLastPara="1" rIns="91425" wrap="square" tIns="91425">
-              <a:noAutofit/>
-            </a:bodyPr>
-            <a:lstStyle/>
-            <a:p>
-              <a:pPr indent="0" lvl="0" marL="0" rtl="0" algn="l">
-                <a:spcBef>
-                  <a:spcPts val="0"/>
-                </a:spcBef>
-                <a:spcAft>
-                  <a:spcPts val="0"/>
-                </a:spcAft>
-                <a:buNone/>
-              </a:pPr>
-              <a:r>
-                <a:t/>
-              </a:r>
-              <a:endParaRPr/>
-            </a:p>
-          </p:txBody>
-        </p:sp>
-        <p:sp>
-          <p:nvSpPr>
-            <p:cNvPr id="59" name="Google Shape;59;p3"/>
-            <p:cNvSpPr txBox="1"/>
-            <p:nvPr/>
-          </p:nvSpPr>
-          <p:spPr>
-            <a:xfrm>
-              <a:off x="464481" y="565965"/>
-              <a:ext cx="447278" cy="282982"/>
-            </a:xfrm>
-            <a:prstGeom prst="rect">
-              <a:avLst/>
-            </a:prstGeom>
-            <a:noFill/>
-            <a:ln>
-              <a:noFill/>
-            </a:ln>
-          </p:spPr>
-          <p:txBody>
-            <a:bodyPr anchorCtr="0" anchor="ctr" bIns="10150" lIns="10150" spcFirstLastPara="1" rIns="10150" wrap="square" tIns="10150">
-              <a:noAutofit/>
-            </a:bodyPr>
-            <a:lstStyle/>
-            <a:p>
-              <a:pPr indent="0" lvl="0" marL="0" marR="0" rtl="0" algn="ctr">
-                <a:lnSpc>
-                  <a:spcPct val="90000"/>
-                </a:lnSpc>
-                <a:spcBef>
-                  <a:spcPts val="0"/>
-                </a:spcBef>
-                <a:spcAft>
-                  <a:spcPts val="0"/>
-                </a:spcAft>
-                <a:buClr>
-                  <a:srgbClr val="262626"/>
-                </a:buClr>
-                <a:buSzPts val="800"/>
-                <a:buFont typeface="Arial"/>
-                <a:buNone/>
-              </a:pPr>
-              <a:r>
-                <a:rPr b="1" lang="ja-JP" sz="800">
-                  <a:solidFill>
-                    <a:srgbClr val="262626"/>
-                  </a:solidFill>
-                  <a:latin typeface="Arial"/>
-                  <a:ea typeface="Arial"/>
-                  <a:cs typeface="Arial"/>
-                  <a:sym typeface="Arial"/>
-                </a:rPr>
-                <a:t>獲得</a:t>
-              </a:r>
-              <a:endParaRPr/>
-            </a:p>
-          </p:txBody>
-        </p:sp>
-        <p:sp>
-          <p:nvSpPr>
-            <p:cNvPr id="60" name="Google Shape;60;p3"/>
-            <p:cNvSpPr/>
-            <p:nvPr/>
-          </p:nvSpPr>
-          <p:spPr>
-            <a:xfrm rot="10800000">
-              <a:off x="516090" y="848948"/>
-              <a:ext cx="344060" cy="282982"/>
-            </a:xfrm>
-            <a:prstGeom prst="trapezoid">
-              <a:avLst>
-                <a:gd fmla="val 60792" name="adj"/>
-              </a:avLst>
-            </a:prstGeom>
-            <a:noFill/>
-            <a:ln cap="flat" cmpd="sng" w="25400">
-              <a:solidFill>
-                <a:schemeClr val="dk2"/>
-              </a:solidFill>
-              <a:prstDash val="solid"/>
-              <a:round/>
-              <a:headEnd len="sm" w="sm" type="none"/>
-              <a:tailEnd len="sm" w="sm" type="none"/>
-            </a:ln>
-          </p:spPr>
-          <p:txBody>
-            <a:bodyPr anchorCtr="0" anchor="ctr" bIns="91425" lIns="91425" spcFirstLastPara="1" rIns="91425" wrap="square" tIns="91425">
-              <a:noAutofit/>
-            </a:bodyPr>
-            <a:lstStyle/>
-            <a:p>
-              <a:pPr indent="0" lvl="0" marL="0" rtl="0" algn="l">
-                <a:spcBef>
-                  <a:spcPts val="0"/>
-                </a:spcBef>
-                <a:spcAft>
-                  <a:spcPts val="0"/>
-                </a:spcAft>
-                <a:buNone/>
-              </a:pPr>
-              <a:r>
-                <a:t/>
-              </a:r>
-              <a:endParaRPr/>
-            </a:p>
-          </p:txBody>
-        </p:sp>
-        <p:sp>
-          <p:nvSpPr>
-            <p:cNvPr id="61" name="Google Shape;61;p3"/>
-            <p:cNvSpPr txBox="1"/>
-            <p:nvPr/>
-          </p:nvSpPr>
-          <p:spPr>
-            <a:xfrm>
-              <a:off x="516090" y="848948"/>
-              <a:ext cx="344060" cy="282982"/>
-            </a:xfrm>
-            <a:prstGeom prst="rect">
-              <a:avLst/>
-            </a:prstGeom>
-            <a:noFill/>
-            <a:ln>
-              <a:noFill/>
-            </a:ln>
-          </p:spPr>
-          <p:txBody>
-            <a:bodyPr anchorCtr="0" anchor="ctr" bIns="10150" lIns="10150" spcFirstLastPara="1" rIns="10150" wrap="square" tIns="10150">
-              <a:noAutofit/>
-            </a:bodyPr>
-            <a:lstStyle/>
-            <a:p>
-              <a:pPr indent="0" lvl="0" marL="0" marR="0" rtl="0" algn="ctr">
-                <a:lnSpc>
-                  <a:spcPct val="90000"/>
-                </a:lnSpc>
-                <a:spcBef>
-                  <a:spcPts val="0"/>
-                </a:spcBef>
-                <a:spcAft>
-                  <a:spcPts val="0"/>
-                </a:spcAft>
-                <a:buClr>
-                  <a:srgbClr val="262626"/>
-                </a:buClr>
-                <a:buSzPts val="800"/>
-                <a:buFont typeface="Arial"/>
-                <a:buNone/>
-              </a:pPr>
-              <a:r>
-                <a:rPr b="1" lang="ja-JP" sz="800">
-                  <a:solidFill>
-                    <a:srgbClr val="262626"/>
-                  </a:solidFill>
-                  <a:latin typeface="Arial"/>
-                  <a:ea typeface="Arial"/>
-                  <a:cs typeface="Arial"/>
-                  <a:sym typeface="Arial"/>
-                </a:rPr>
-                <a:t>伸長</a:t>
-              </a:r>
-              <a:endParaRPr/>
-            </a:p>
-          </p:txBody>
-        </p:sp>
-      </p:grpSp>
-      <p:pic>
-        <p:nvPicPr>
-          <p:cNvPr descr="LINE公式アカウントのロゴの使用方法とは？種類やダウンロード方法、利用時の注意点を紹介 | Mico（ミコ）" id="62" name="Google Shape;62;p3"/>
-          <p:cNvPicPr preferRelativeResize="0"/>
-          <p:nvPr/>
-        </p:nvPicPr>
-        <p:blipFill rotWithShape="1">
-          <a:blip r:embed="rId2">
-            <a:alphaModFix/>
-          </a:blip>
-          <a:srcRect b="0" l="0" r="0" t="0"/>
-          <a:stretch/>
-        </p:blipFill>
-        <p:spPr>
-          <a:xfrm>
-            <a:off x="351381" y="1234746"/>
-            <a:ext cx="656177" cy="655521"/>
-          </a:xfrm>
-          <a:prstGeom prst="rect">
-            <a:avLst/>
-          </a:prstGeom>
-          <a:noFill/>
-          <a:ln>
-            <a:noFill/>
-          </a:ln>
-        </p:spPr>
-      </p:pic>
-      <p:graphicFrame>
-        <p:nvGraphicFramePr>
-          <p:cNvPr id="63" name="Table 62"/>
-          <p:cNvGraphicFramePr>
-            <a:graphicFrameLocks noGrp="1"/>
-          </p:cNvGraphicFramePr>
-          <p:nvPr/>
-        </p:nvGraphicFramePr>
-        <p:xfrm>
-          <a:off x="544108" y="3068960"/>
-          <a:ext cx="9326880" cy="3200400"/>
-        </p:xfrm>
-        <a:graphic>
-          <a:graphicData uri="http://schemas.openxmlformats.org/drawingml/2006/table">
-            <a:tbl>
-              <a:tblPr firstRow="1" bandRow="1">
-                <a:tableStyleId>{5C22544A-7EE6-4342-B048-85BDC9FD1C3A}</a:tableStyleId>
-              </a:tblPr>
-              <a:tblGrid>
-                <a:gridCol w="1965960"/>
-                <a:gridCol w="7360920"/>
-              </a:tblGrid>
-              <a:tr h="800100">
+              <a:tr h="864813">
                 <a:tc>
                   <a:txBody>
                     <a:bodyPr wrap="square"/>
@@ -13663,7 +13663,7 @@
                   </a:tcPr>
                 </a:tc>
               </a:tr>
-              <a:tr h="800100">
+              <a:tr h="847164">
                 <a:tc>
                   <a:txBody>
                     <a:bodyPr wrap="square"/>
@@ -13774,7 +13774,7 @@
                   </a:tcPr>
                 </a:tc>
               </a:tr>
-              <a:tr h="800100">
+              <a:tr h="658905">
                 <a:tc>
                   <a:txBody>
                     <a:bodyPr wrap="square"/>
@@ -13866,7 +13866,7 @@
                   </a:tcPr>
                 </a:tc>
               </a:tr>
-              <a:tr h="800100">
+              <a:tr h="829515">
                 <a:tc>
                   <a:txBody>
                     <a:bodyPr wrap="square"/>

--- a/LINEOA媒体最新情報_2026年9月トレンドレポート.pptx
+++ b/LINEOA媒体最新情報_2026年9月トレンドレポート.pptx
@@ -4914,7 +4914,7 @@
         </p:nvGraphicFramePr>
         <p:xfrm>
           <a:off x="544108" y="3068960"/>
-          <a:ext cx="9326880" cy="3200400"/>
+          <a:ext cx="6720840" cy="3200400"/>
         </p:xfrm>
         <a:graphic>
           <a:graphicData uri="http://schemas.openxmlformats.org/drawingml/2006/table">
@@ -4923,8 +4923,8 @@
                 <a:tableStyleId>{5C22544A-7EE6-4342-B048-85BDC9FD1C3A}</a:tableStyleId>
               </a:tblPr>
               <a:tblGrid>
-                <a:gridCol w="1965960"/>
-                <a:gridCol w="7360920"/>
+                <a:gridCol w="1737360"/>
+                <a:gridCol w="4983480"/>
               </a:tblGrid>
               <a:tr h="862885">
                 <a:tc>
@@ -4956,14 +4956,14 @@
                     <a:p>
                       <a:pPr>
                         <a:lnSpc>
-                          <a:spcPct val="115000"/>
+                          <a:spcPct val="105000"/>
                         </a:lnSpc>
                         <a:spcAft>
-                          <a:spcPts val="300"/>
+                          <a:spcPts val="150"/>
                         </a:spcAft>
                       </a:pPr>
                       <a:r>
-                        <a:rPr sz="1100">
+                        <a:rPr sz="950">
                           <a:solidFill>
                             <a:srgbClr val="333333"/>
                           </a:solidFill>
@@ -4975,14 +4975,14 @@
                     <a:p>
                       <a:pPr>
                         <a:lnSpc>
-                          <a:spcPct val="115000"/>
+                          <a:spcPct val="105000"/>
                         </a:lnSpc>
                         <a:spcAft>
-                          <a:spcPts val="300"/>
+                          <a:spcPts val="150"/>
                         </a:spcAft>
                       </a:pPr>
                       <a:r>
-                        <a:rPr sz="1100">
+                        <a:rPr sz="950">
                           <a:solidFill>
                             <a:srgbClr val="333333"/>
                           </a:solidFill>
@@ -4994,14 +4994,14 @@
                     <a:p>
                       <a:pPr>
                         <a:lnSpc>
-                          <a:spcPct val="115000"/>
+                          <a:spcPct val="105000"/>
                         </a:lnSpc>
                         <a:spcAft>
-                          <a:spcPts val="300"/>
+                          <a:spcPts val="150"/>
                         </a:spcAft>
                       </a:pPr>
                       <a:r>
-                        <a:rPr sz="1100">
+                        <a:rPr sz="950">
                           <a:solidFill>
                             <a:srgbClr val="333333"/>
                           </a:solidFill>
@@ -5013,14 +5013,14 @@
                     <a:p>
                       <a:pPr>
                         <a:lnSpc>
-                          <a:spcPct val="115000"/>
+                          <a:spcPct val="105000"/>
                         </a:lnSpc>
                         <a:spcAft>
-                          <a:spcPts val="300"/>
+                          <a:spcPts val="150"/>
                         </a:spcAft>
                       </a:pPr>
                       <a:r>
-                        <a:rPr sz="1100">
+                        <a:rPr sz="950">
                           <a:solidFill>
                             <a:srgbClr val="333333"/>
                           </a:solidFill>
@@ -5067,14 +5067,14 @@
                     <a:p>
                       <a:pPr>
                         <a:lnSpc>
-                          <a:spcPct val="115000"/>
+                          <a:spcPct val="110000"/>
                         </a:lnSpc>
                         <a:spcAft>
-                          <a:spcPts val="300"/>
+                          <a:spcPts val="200"/>
                         </a:spcAft>
                       </a:pPr>
                       <a:r>
-                        <a:rPr sz="1100">
+                        <a:rPr sz="1050">
                           <a:solidFill>
                             <a:srgbClr val="333333"/>
                           </a:solidFill>
@@ -5121,14 +5121,14 @@
                     <a:p>
                       <a:pPr>
                         <a:lnSpc>
-                          <a:spcPct val="115000"/>
+                          <a:spcPct val="105000"/>
                         </a:lnSpc>
                         <a:spcAft>
-                          <a:spcPts val="300"/>
+                          <a:spcPts val="150"/>
                         </a:spcAft>
                       </a:pPr>
                       <a:r>
-                        <a:rPr sz="1100">
+                        <a:rPr sz="950">
                           <a:solidFill>
                             <a:srgbClr val="333333"/>
                           </a:solidFill>
@@ -5140,14 +5140,14 @@
                     <a:p>
                       <a:pPr>
                         <a:lnSpc>
-                          <a:spcPct val="115000"/>
+                          <a:spcPct val="105000"/>
                         </a:lnSpc>
                         <a:spcAft>
-                          <a:spcPts val="300"/>
+                          <a:spcPts val="150"/>
                         </a:spcAft>
                       </a:pPr>
                       <a:r>
-                        <a:rPr sz="1100">
+                        <a:rPr sz="950">
                           <a:solidFill>
                             <a:srgbClr val="333333"/>
                           </a:solidFill>
@@ -5194,14 +5194,14 @@
                     <a:p>
                       <a:pPr>
                         <a:lnSpc>
-                          <a:spcPct val="108000"/>
+                          <a:spcPct val="100000"/>
                         </a:lnSpc>
                         <a:spcAft>
-                          <a:spcPts val="200"/>
+                          <a:spcPts val="100"/>
                         </a:spcAft>
                       </a:pPr>
                       <a:r>
-                        <a:rPr sz="1000">
+                        <a:rPr sz="850">
                           <a:solidFill>
                             <a:srgbClr val="333333"/>
                           </a:solidFill>
@@ -5213,14 +5213,14 @@
                     <a:p>
                       <a:pPr>
                         <a:lnSpc>
-                          <a:spcPct val="108000"/>
+                          <a:spcPct val="100000"/>
                         </a:lnSpc>
                         <a:spcAft>
-                          <a:spcPts val="200"/>
+                          <a:spcPts val="100"/>
                         </a:spcAft>
                       </a:pPr>
                       <a:r>
-                        <a:rPr sz="1000">
+                        <a:rPr sz="850">
                           <a:solidFill>
                             <a:srgbClr val="333333"/>
                           </a:solidFill>
@@ -5232,14 +5232,14 @@
                     <a:p>
                       <a:pPr>
                         <a:lnSpc>
-                          <a:spcPct val="108000"/>
+                          <a:spcPct val="100000"/>
                         </a:lnSpc>
                         <a:spcAft>
-                          <a:spcPts val="200"/>
+                          <a:spcPts val="100"/>
                         </a:spcAft>
                       </a:pPr>
                       <a:r>
-                        <a:rPr sz="1000">
+                        <a:rPr sz="850">
                           <a:solidFill>
                             <a:srgbClr val="333333"/>
                           </a:solidFill>
@@ -5251,14 +5251,14 @@
                     <a:p>
                       <a:pPr>
                         <a:lnSpc>
-                          <a:spcPct val="108000"/>
+                          <a:spcPct val="100000"/>
                         </a:lnSpc>
                         <a:spcAft>
-                          <a:spcPts val="200"/>
+                          <a:spcPts val="100"/>
                         </a:spcAft>
                       </a:pPr>
                       <a:r>
-                        <a:rPr sz="1000">
+                        <a:rPr sz="850">
                           <a:solidFill>
                             <a:srgbClr val="333333"/>
                           </a:solidFill>
@@ -5279,6 +5279,78 @@
           </a:graphicData>
         </a:graphic>
       </p:graphicFrame>
+      <p:sp>
+        <p:nvSpPr>
+          <p:cNvPr id="64" name="Rectangle 63"/>
+          <p:cNvSpPr/>
+          <p:nvPr/>
+        </p:nvSpPr>
+        <p:spPr>
+          <a:xfrm>
+            <a:off x="7402108" y="3068960"/>
+            <a:ext cx="2468880" cy="3200400"/>
+          </a:xfrm>
+          <a:prstGeom prst="rect">
+            <a:avLst/>
+          </a:prstGeom>
+          <a:solidFill>
+            <a:srgbClr val="F2F2F2"/>
+          </a:solidFill>
+          <a:ln w="15875">
+            <a:solidFill>
+              <a:srgbClr val="A6A6A6"/>
+            </a:solidFill>
+            <a:prstDash val="dash"/>
+          </a:ln>
+          <a:effectLst/>
+        </p:spPr>
+        <p:style>
+          <a:lnRef idx="1">
+            <a:schemeClr val="accent1"/>
+          </a:lnRef>
+          <a:fillRef idx="3">
+            <a:schemeClr val="accent1"/>
+          </a:fillRef>
+          <a:effectRef idx="2">
+            <a:schemeClr val="accent1"/>
+          </a:effectRef>
+          <a:fontRef idx="minor">
+            <a:schemeClr val="lt1"/>
+          </a:fontRef>
+        </p:style>
+        <p:txBody>
+          <a:bodyPr rtlCol="0" anchor="ctr" wrap="square"/>
+          <a:lstStyle/>
+          <a:p>
+            <a:pPr algn="ctr"/>
+            <a:r>
+              <a:rPr sz="1100" b="1">
+                <a:solidFill>
+                  <a:srgbClr val="595959"/>
+                </a:solidFill>
+                <a:latin typeface="メイリオ"/>
+              </a:rPr>
+              <a:t>画像挿入予定</a:t>
+            </a:r>
+          </a:p>
+          <a:p>
+            <a:pPr algn="ctr">
+              <a:spcBef>
+                <a:spcPts val="600"/>
+              </a:spcBef>
+            </a:pPr>
+            <a:r>
+              <a:rPr sz="900">
+                <a:solidFill>
+                  <a:srgbClr val="808080"/>
+                </a:solidFill>
+                <a:latin typeface="メイリオ"/>
+              </a:rPr>
+              <a:t>トリガー→ポップアップ表示→アプリタブ追加の3ステップ図</a:t>
+            </a:r>
+          </a:p>
+        </p:txBody>
+      </p:sp>
     </p:spTree>
   </p:cSld>
   <p:clrMapOvr>
@@ -6681,7 +6753,7 @@
         </p:nvGraphicFramePr>
         <p:xfrm>
           <a:off x="544108" y="3068960"/>
-          <a:ext cx="9326880" cy="3200399"/>
+          <a:ext cx="6720840" cy="3200399"/>
         </p:xfrm>
         <a:graphic>
           <a:graphicData uri="http://schemas.openxmlformats.org/drawingml/2006/table">
@@ -6690,8 +6762,8 @@
                 <a:tableStyleId>{5C22544A-7EE6-4342-B048-85BDC9FD1C3A}</a:tableStyleId>
               </a:tblPr>
               <a:tblGrid>
-                <a:gridCol w="1965960"/>
-                <a:gridCol w="7360920"/>
+                <a:gridCol w="1737360"/>
+                <a:gridCol w="4983480"/>
               </a:tblGrid>
               <a:tr h="920859">
                 <a:tc>
@@ -6723,14 +6795,14 @@
                     <a:p>
                       <a:pPr>
                         <a:lnSpc>
-                          <a:spcPct val="115000"/>
+                          <a:spcPct val="110000"/>
                         </a:lnSpc>
                         <a:spcAft>
-                          <a:spcPts val="300"/>
+                          <a:spcPts val="200"/>
                         </a:spcAft>
                       </a:pPr>
                       <a:r>
-                        <a:rPr sz="1100">
+                        <a:rPr sz="1050">
                           <a:solidFill>
                             <a:srgbClr val="333333"/>
                           </a:solidFill>
@@ -6742,14 +6814,14 @@
                     <a:p>
                       <a:pPr>
                         <a:lnSpc>
-                          <a:spcPct val="115000"/>
+                          <a:spcPct val="110000"/>
                         </a:lnSpc>
                         <a:spcAft>
-                          <a:spcPts val="300"/>
+                          <a:spcPts val="200"/>
                         </a:spcAft>
                       </a:pPr>
                       <a:r>
-                        <a:rPr sz="1100">
+                        <a:rPr sz="1050">
                           <a:solidFill>
                             <a:srgbClr val="333333"/>
                           </a:solidFill>
@@ -6796,14 +6868,14 @@
                     <a:p>
                       <a:pPr>
                         <a:lnSpc>
-                          <a:spcPct val="115000"/>
+                          <a:spcPct val="110000"/>
                         </a:lnSpc>
                         <a:spcAft>
-                          <a:spcPts val="300"/>
+                          <a:spcPts val="200"/>
                         </a:spcAft>
                       </a:pPr>
                       <a:r>
-                        <a:rPr sz="1100">
+                        <a:rPr sz="1050">
                           <a:solidFill>
                             <a:srgbClr val="333333"/>
                           </a:solidFill>
@@ -6850,14 +6922,14 @@
                     <a:p>
                       <a:pPr>
                         <a:lnSpc>
-                          <a:spcPct val="115000"/>
+                          <a:spcPct val="110000"/>
                         </a:lnSpc>
                         <a:spcAft>
-                          <a:spcPts val="300"/>
+                          <a:spcPts val="200"/>
                         </a:spcAft>
                       </a:pPr>
                       <a:r>
-                        <a:rPr sz="1100">
+                        <a:rPr sz="1050">
                           <a:solidFill>
                             <a:srgbClr val="333333"/>
                           </a:solidFill>
@@ -6869,14 +6941,14 @@
                     <a:p>
                       <a:pPr>
                         <a:lnSpc>
-                          <a:spcPct val="115000"/>
+                          <a:spcPct val="110000"/>
                         </a:lnSpc>
                         <a:spcAft>
-                          <a:spcPts val="300"/>
+                          <a:spcPts val="200"/>
                         </a:spcAft>
                       </a:pPr>
                       <a:r>
-                        <a:rPr sz="1100">
+                        <a:rPr sz="1050">
                           <a:solidFill>
                             <a:srgbClr val="333333"/>
                           </a:solidFill>
@@ -6923,14 +6995,14 @@
                     <a:p>
                       <a:pPr>
                         <a:lnSpc>
-                          <a:spcPct val="115000"/>
+                          <a:spcPct val="105000"/>
                         </a:lnSpc>
                         <a:spcAft>
-                          <a:spcPts val="300"/>
+                          <a:spcPts val="150"/>
                         </a:spcAft>
                       </a:pPr>
                       <a:r>
-                        <a:rPr sz="1100">
+                        <a:rPr sz="950">
                           <a:solidFill>
                             <a:srgbClr val="333333"/>
                           </a:solidFill>
@@ -6942,14 +7014,14 @@
                     <a:p>
                       <a:pPr>
                         <a:lnSpc>
-                          <a:spcPct val="115000"/>
+                          <a:spcPct val="105000"/>
                         </a:lnSpc>
                         <a:spcAft>
-                          <a:spcPts val="300"/>
+                          <a:spcPts val="150"/>
                         </a:spcAft>
                       </a:pPr>
                       <a:r>
-                        <a:rPr sz="1100">
+                        <a:rPr sz="950">
                           <a:solidFill>
                             <a:srgbClr val="333333"/>
                           </a:solidFill>
@@ -6961,14 +7033,14 @@
                     <a:p>
                       <a:pPr>
                         <a:lnSpc>
-                          <a:spcPct val="115000"/>
+                          <a:spcPct val="105000"/>
                         </a:lnSpc>
                         <a:spcAft>
-                          <a:spcPts val="300"/>
+                          <a:spcPts val="150"/>
                         </a:spcAft>
                       </a:pPr>
                       <a:r>
-                        <a:rPr sz="1100">
+                        <a:rPr sz="950">
                           <a:solidFill>
                             <a:srgbClr val="333333"/>
                           </a:solidFill>
@@ -6989,6 +7061,78 @@
           </a:graphicData>
         </a:graphic>
       </p:graphicFrame>
+      <p:sp>
+        <p:nvSpPr>
+          <p:cNvPr id="64" name="Rectangle 63"/>
+          <p:cNvSpPr/>
+          <p:nvPr/>
+        </p:nvSpPr>
+        <p:spPr>
+          <a:xfrm>
+            <a:off x="7402108" y="3068960"/>
+            <a:ext cx="2468880" cy="3200400"/>
+          </a:xfrm>
+          <a:prstGeom prst="rect">
+            <a:avLst/>
+          </a:prstGeom>
+          <a:solidFill>
+            <a:srgbClr val="F2F2F2"/>
+          </a:solidFill>
+          <a:ln w="15875">
+            <a:solidFill>
+              <a:srgbClr val="A6A6A6"/>
+            </a:solidFill>
+            <a:prstDash val="dash"/>
+          </a:ln>
+          <a:effectLst/>
+        </p:spPr>
+        <p:style>
+          <a:lnRef idx="1">
+            <a:schemeClr val="accent1"/>
+          </a:lnRef>
+          <a:fillRef idx="3">
+            <a:schemeClr val="accent1"/>
+          </a:fillRef>
+          <a:effectRef idx="2">
+            <a:schemeClr val="accent1"/>
+          </a:effectRef>
+          <a:fontRef idx="minor">
+            <a:schemeClr val="lt1"/>
+          </a:fontRef>
+        </p:style>
+        <p:txBody>
+          <a:bodyPr rtlCol="0" anchor="ctr" wrap="square"/>
+          <a:lstStyle/>
+          <a:p>
+            <a:pPr algn="ctr"/>
+            <a:r>
+              <a:rPr sz="1100" b="1">
+                <a:solidFill>
+                  <a:srgbClr val="595959"/>
+                </a:solidFill>
+                <a:latin typeface="メイリオ"/>
+              </a:rPr>
+              <a:t>画像挿入予定</a:t>
+            </a:r>
+          </a:p>
+          <a:p>
+            <a:pPr algn="ctr">
+              <a:spcBef>
+                <a:spcPts val="600"/>
+              </a:spcBef>
+            </a:pPr>
+            <a:r>
+              <a:rPr sz="900">
+                <a:solidFill>
+                  <a:srgbClr val="808080"/>
+                </a:solidFill>
+                <a:latin typeface="メイリオ"/>
+              </a:rPr>
+              <a:t>参照期間のBefore/Afterタイムライン図</a:t>
+            </a:r>
+          </a:p>
+        </p:txBody>
+      </p:sp>
     </p:spTree>
   </p:cSld>
   <p:clrMapOvr>
@@ -8391,7 +8535,7 @@
         </p:nvGraphicFramePr>
         <p:xfrm>
           <a:off x="544108" y="3068960"/>
-          <a:ext cx="9326880" cy="3200400"/>
+          <a:ext cx="6720840" cy="3200400"/>
         </p:xfrm>
         <a:graphic>
           <a:graphicData uri="http://schemas.openxmlformats.org/drawingml/2006/table">
@@ -8400,8 +8544,8 @@
                 <a:tableStyleId>{5C22544A-7EE6-4342-B048-85BDC9FD1C3A}</a:tableStyleId>
               </a:tblPr>
               <a:tblGrid>
-                <a:gridCol w="1965960"/>
-                <a:gridCol w="7360920"/>
+                <a:gridCol w="1737360"/>
+                <a:gridCol w="4983480"/>
               </a:tblGrid>
               <a:tr h="1049377">
                 <a:tc>
@@ -8433,14 +8577,14 @@
                     <a:p>
                       <a:pPr>
                         <a:lnSpc>
-                          <a:spcPct val="108000"/>
+                          <a:spcPct val="105000"/>
                         </a:lnSpc>
                         <a:spcAft>
-                          <a:spcPts val="200"/>
+                          <a:spcPts val="150"/>
                         </a:spcAft>
                       </a:pPr>
                       <a:r>
-                        <a:rPr sz="1000">
+                        <a:rPr sz="950">
                           <a:solidFill>
                             <a:srgbClr val="333333"/>
                           </a:solidFill>
@@ -8452,14 +8596,14 @@
                     <a:p>
                       <a:pPr>
                         <a:lnSpc>
-                          <a:spcPct val="108000"/>
+                          <a:spcPct val="105000"/>
                         </a:lnSpc>
                         <a:spcAft>
-                          <a:spcPts val="200"/>
+                          <a:spcPts val="150"/>
                         </a:spcAft>
                       </a:pPr>
                       <a:r>
-                        <a:rPr sz="1000">
+                        <a:rPr sz="950">
                           <a:solidFill>
                             <a:srgbClr val="333333"/>
                           </a:solidFill>
@@ -8471,14 +8615,14 @@
                     <a:p>
                       <a:pPr>
                         <a:lnSpc>
-                          <a:spcPct val="108000"/>
+                          <a:spcPct val="105000"/>
                         </a:lnSpc>
                         <a:spcAft>
-                          <a:spcPts val="200"/>
+                          <a:spcPts val="150"/>
                         </a:spcAft>
                       </a:pPr>
                       <a:r>
-                        <a:rPr sz="1000">
+                        <a:rPr sz="950">
                           <a:solidFill>
                             <a:srgbClr val="333333"/>
                           </a:solidFill>
@@ -8525,14 +8669,14 @@
                     <a:p>
                       <a:pPr>
                         <a:lnSpc>
-                          <a:spcPct val="115000"/>
+                          <a:spcPct val="110000"/>
                         </a:lnSpc>
                         <a:spcAft>
-                          <a:spcPts val="300"/>
+                          <a:spcPts val="200"/>
                         </a:spcAft>
                       </a:pPr>
                       <a:r>
-                        <a:rPr sz="1100">
+                        <a:rPr sz="1050">
                           <a:solidFill>
                             <a:srgbClr val="333333"/>
                           </a:solidFill>
@@ -8579,14 +8723,14 @@
                     <a:p>
                       <a:pPr>
                         <a:lnSpc>
-                          <a:spcPct val="115000"/>
+                          <a:spcPct val="110000"/>
                         </a:lnSpc>
                         <a:spcAft>
-                          <a:spcPts val="300"/>
+                          <a:spcPts val="200"/>
                         </a:spcAft>
                       </a:pPr>
                       <a:r>
-                        <a:rPr sz="1100">
+                        <a:rPr sz="1050">
                           <a:solidFill>
                             <a:srgbClr val="333333"/>
                           </a:solidFill>
@@ -8633,14 +8777,14 @@
                     <a:p>
                       <a:pPr>
                         <a:lnSpc>
-                          <a:spcPct val="108000"/>
+                          <a:spcPct val="100000"/>
                         </a:lnSpc>
                         <a:spcAft>
-                          <a:spcPts val="200"/>
+                          <a:spcPts val="100"/>
                         </a:spcAft>
                       </a:pPr>
                       <a:r>
-                        <a:rPr sz="1000">
+                        <a:rPr sz="850">
                           <a:solidFill>
                             <a:srgbClr val="333333"/>
                           </a:solidFill>
@@ -8652,14 +8796,14 @@
                     <a:p>
                       <a:pPr>
                         <a:lnSpc>
-                          <a:spcPct val="108000"/>
+                          <a:spcPct val="100000"/>
                         </a:lnSpc>
                         <a:spcAft>
-                          <a:spcPts val="200"/>
+                          <a:spcPts val="100"/>
                         </a:spcAft>
                       </a:pPr>
                       <a:r>
-                        <a:rPr sz="1000">
+                        <a:rPr sz="850">
                           <a:solidFill>
                             <a:srgbClr val="333333"/>
                           </a:solidFill>
@@ -8671,14 +8815,14 @@
                     <a:p>
                       <a:pPr>
                         <a:lnSpc>
-                          <a:spcPct val="108000"/>
+                          <a:spcPct val="100000"/>
                         </a:lnSpc>
                         <a:spcAft>
-                          <a:spcPts val="200"/>
+                          <a:spcPts val="100"/>
                         </a:spcAft>
                       </a:pPr>
                       <a:r>
-                        <a:rPr sz="1000">
+                        <a:rPr sz="850">
                           <a:solidFill>
                             <a:srgbClr val="333333"/>
                           </a:solidFill>
@@ -8690,14 +8834,14 @@
                     <a:p>
                       <a:pPr>
                         <a:lnSpc>
-                          <a:spcPct val="108000"/>
+                          <a:spcPct val="100000"/>
                         </a:lnSpc>
                         <a:spcAft>
-                          <a:spcPts val="200"/>
+                          <a:spcPts val="100"/>
                         </a:spcAft>
                       </a:pPr>
                       <a:r>
-                        <a:rPr sz="1000">
+                        <a:rPr sz="850">
                           <a:solidFill>
                             <a:srgbClr val="333333"/>
                           </a:solidFill>
@@ -8718,6 +8862,78 @@
           </a:graphicData>
         </a:graphic>
       </p:graphicFrame>
+      <p:sp>
+        <p:nvSpPr>
+          <p:cNvPr id="64" name="Rectangle 63"/>
+          <p:cNvSpPr/>
+          <p:nvPr/>
+        </p:nvSpPr>
+        <p:spPr>
+          <a:xfrm>
+            <a:off x="7402108" y="3068960"/>
+            <a:ext cx="2468880" cy="3200400"/>
+          </a:xfrm>
+          <a:prstGeom prst="rect">
+            <a:avLst/>
+          </a:prstGeom>
+          <a:solidFill>
+            <a:srgbClr val="F2F2F2"/>
+          </a:solidFill>
+          <a:ln w="15875">
+            <a:solidFill>
+              <a:srgbClr val="A6A6A6"/>
+            </a:solidFill>
+            <a:prstDash val="dash"/>
+          </a:ln>
+          <a:effectLst/>
+        </p:spPr>
+        <p:style>
+          <a:lnRef idx="1">
+            <a:schemeClr val="accent1"/>
+          </a:lnRef>
+          <a:fillRef idx="3">
+            <a:schemeClr val="accent1"/>
+          </a:fillRef>
+          <a:effectRef idx="2">
+            <a:schemeClr val="accent1"/>
+          </a:effectRef>
+          <a:fontRef idx="minor">
+            <a:schemeClr val="lt1"/>
+          </a:fontRef>
+        </p:style>
+        <p:txBody>
+          <a:bodyPr rtlCol="0" anchor="ctr" wrap="square"/>
+          <a:lstStyle/>
+          <a:p>
+            <a:pPr algn="ctr"/>
+            <a:r>
+              <a:rPr sz="1100" b="1">
+                <a:solidFill>
+                  <a:srgbClr val="595959"/>
+                </a:solidFill>
+                <a:latin typeface="メイリオ"/>
+              </a:rPr>
+              <a:t>画像挿入予定</a:t>
+            </a:r>
+          </a:p>
+          <a:p>
+            <a:pPr algn="ctr">
+              <a:spcBef>
+                <a:spcPts val="600"/>
+              </a:spcBef>
+            </a:pPr>
+            <a:r>
+              <a:rPr sz="900">
+                <a:solidFill>
+                  <a:srgbClr val="808080"/>
+                </a:solidFill>
+                <a:latin typeface="メイリオ"/>
+              </a:rPr>
+              <a:t>サジェスト面の導線イメージ（友だち追加）</a:t>
+            </a:r>
+          </a:p>
+        </p:txBody>
+      </p:sp>
     </p:spTree>
   </p:cSld>
   <p:clrMapOvr>
@@ -10120,7 +10336,7 @@
         </p:nvGraphicFramePr>
         <p:xfrm>
           <a:off x="544108" y="3068960"/>
-          <a:ext cx="9326880" cy="3200400"/>
+          <a:ext cx="6720840" cy="3200400"/>
         </p:xfrm>
         <a:graphic>
           <a:graphicData uri="http://schemas.openxmlformats.org/drawingml/2006/table">
@@ -10129,8 +10345,8 @@
                 <a:tableStyleId>{5C22544A-7EE6-4342-B048-85BDC9FD1C3A}</a:tableStyleId>
               </a:tblPr>
               <a:tblGrid>
-                <a:gridCol w="1965960"/>
-                <a:gridCol w="7360920"/>
+                <a:gridCol w="1737360"/>
+                <a:gridCol w="4983480"/>
               </a:tblGrid>
               <a:tr h="774891">
                 <a:tc>
@@ -10162,14 +10378,14 @@
                     <a:p>
                       <a:pPr>
                         <a:lnSpc>
-                          <a:spcPct val="115000"/>
+                          <a:spcPct val="110000"/>
                         </a:lnSpc>
                         <a:spcAft>
-                          <a:spcPts val="300"/>
+                          <a:spcPts val="200"/>
                         </a:spcAft>
                       </a:pPr>
                       <a:r>
-                        <a:rPr sz="1100">
+                        <a:rPr sz="1050">
                           <a:solidFill>
                             <a:srgbClr val="333333"/>
                           </a:solidFill>
@@ -10181,14 +10397,14 @@
                     <a:p>
                       <a:pPr>
                         <a:lnSpc>
-                          <a:spcPct val="115000"/>
+                          <a:spcPct val="110000"/>
                         </a:lnSpc>
                         <a:spcAft>
-                          <a:spcPts val="300"/>
+                          <a:spcPts val="200"/>
                         </a:spcAft>
                       </a:pPr>
                       <a:r>
-                        <a:rPr sz="1100">
+                        <a:rPr sz="1050">
                           <a:solidFill>
                             <a:srgbClr val="333333"/>
                           </a:solidFill>
@@ -10235,14 +10451,14 @@
                     <a:p>
                       <a:pPr>
                         <a:lnSpc>
-                          <a:spcPct val="115000"/>
+                          <a:spcPct val="110000"/>
                         </a:lnSpc>
                         <a:spcAft>
-                          <a:spcPts val="300"/>
+                          <a:spcPts val="200"/>
                         </a:spcAft>
                       </a:pPr>
                       <a:r>
-                        <a:rPr sz="1100">
+                        <a:rPr sz="1050">
                           <a:solidFill>
                             <a:srgbClr val="333333"/>
                           </a:solidFill>
@@ -10289,14 +10505,14 @@
                     <a:p>
                       <a:pPr>
                         <a:lnSpc>
-                          <a:spcPct val="115000"/>
+                          <a:spcPct val="110000"/>
                         </a:lnSpc>
                         <a:spcAft>
-                          <a:spcPts val="300"/>
+                          <a:spcPts val="200"/>
                         </a:spcAft>
                       </a:pPr>
                       <a:r>
-                        <a:rPr sz="1100">
+                        <a:rPr sz="1050">
                           <a:solidFill>
                             <a:srgbClr val="333333"/>
                           </a:solidFill>
@@ -10343,14 +10559,14 @@
                     <a:p>
                       <a:pPr>
                         <a:lnSpc>
-                          <a:spcPct val="108000"/>
+                          <a:spcPct val="100000"/>
                         </a:lnSpc>
                         <a:spcAft>
-                          <a:spcPts val="200"/>
+                          <a:spcPts val="100"/>
                         </a:spcAft>
                       </a:pPr>
                       <a:r>
-                        <a:rPr sz="1000">
+                        <a:rPr sz="850">
                           <a:solidFill>
                             <a:srgbClr val="333333"/>
                           </a:solidFill>
@@ -10362,14 +10578,14 @@
                     <a:p>
                       <a:pPr>
                         <a:lnSpc>
-                          <a:spcPct val="108000"/>
+                          <a:spcPct val="100000"/>
                         </a:lnSpc>
                         <a:spcAft>
-                          <a:spcPts val="200"/>
+                          <a:spcPts val="100"/>
                         </a:spcAft>
                       </a:pPr>
                       <a:r>
-                        <a:rPr sz="1000">
+                        <a:rPr sz="850">
                           <a:solidFill>
                             <a:srgbClr val="333333"/>
                           </a:solidFill>
@@ -10381,14 +10597,14 @@
                     <a:p>
                       <a:pPr>
                         <a:lnSpc>
-                          <a:spcPct val="108000"/>
+                          <a:spcPct val="100000"/>
                         </a:lnSpc>
                         <a:spcAft>
-                          <a:spcPts val="200"/>
+                          <a:spcPts val="100"/>
                         </a:spcAft>
                       </a:pPr>
                       <a:r>
-                        <a:rPr sz="1000">
+                        <a:rPr sz="850">
                           <a:solidFill>
                             <a:srgbClr val="333333"/>
                           </a:solidFill>
@@ -10400,14 +10616,14 @@
                     <a:p>
                       <a:pPr>
                         <a:lnSpc>
-                          <a:spcPct val="108000"/>
+                          <a:spcPct val="100000"/>
                         </a:lnSpc>
                         <a:spcAft>
-                          <a:spcPts val="200"/>
+                          <a:spcPts val="100"/>
                         </a:spcAft>
                       </a:pPr>
                       <a:r>
-                        <a:rPr sz="1000">
+                        <a:rPr sz="850">
                           <a:solidFill>
                             <a:srgbClr val="333333"/>
                           </a:solidFill>
@@ -10428,6 +10644,78 @@
           </a:graphicData>
         </a:graphic>
       </p:graphicFrame>
+      <p:sp>
+        <p:nvSpPr>
+          <p:cNvPr id="64" name="Rectangle 63"/>
+          <p:cNvSpPr/>
+          <p:nvPr/>
+        </p:nvSpPr>
+        <p:spPr>
+          <a:xfrm>
+            <a:off x="7402108" y="3068960"/>
+            <a:ext cx="2468880" cy="3200400"/>
+          </a:xfrm>
+          <a:prstGeom prst="rect">
+            <a:avLst/>
+          </a:prstGeom>
+          <a:solidFill>
+            <a:srgbClr val="F2F2F2"/>
+          </a:solidFill>
+          <a:ln w="15875">
+            <a:solidFill>
+              <a:srgbClr val="A6A6A6"/>
+            </a:solidFill>
+            <a:prstDash val="dash"/>
+          </a:ln>
+          <a:effectLst/>
+        </p:spPr>
+        <p:style>
+          <a:lnRef idx="1">
+            <a:schemeClr val="accent1"/>
+          </a:lnRef>
+          <a:fillRef idx="3">
+            <a:schemeClr val="accent1"/>
+          </a:fillRef>
+          <a:effectRef idx="2">
+            <a:schemeClr val="accent1"/>
+          </a:effectRef>
+          <a:fontRef idx="minor">
+            <a:schemeClr val="lt1"/>
+          </a:fontRef>
+        </p:style>
+        <p:txBody>
+          <a:bodyPr rtlCol="0" anchor="ctr" wrap="square"/>
+          <a:lstStyle/>
+          <a:p>
+            <a:pPr algn="ctr"/>
+            <a:r>
+              <a:rPr sz="1100" b="1">
+                <a:solidFill>
+                  <a:srgbClr val="595959"/>
+                </a:solidFill>
+                <a:latin typeface="メイリオ"/>
+              </a:rPr>
+              <a:t>画像挿入予定</a:t>
+            </a:r>
+          </a:p>
+          <a:p>
+            <a:pPr algn="ctr">
+              <a:spcBef>
+                <a:spcPts val="600"/>
+              </a:spcBef>
+            </a:pPr>
+            <a:r>
+              <a:rPr sz="900">
+                <a:solidFill>
+                  <a:srgbClr val="808080"/>
+                </a:solidFill>
+                <a:latin typeface="メイリオ"/>
+              </a:rPr>
+              <a:t>1ミニアプリ→複数公式アカウントへの分岐図</a:t>
+            </a:r>
+          </a:p>
+        </p:txBody>
+      </p:sp>
     </p:spTree>
   </p:cSld>
   <p:clrMapOvr>
@@ -11830,7 +12118,7 @@
         </p:nvGraphicFramePr>
         <p:xfrm>
           <a:off x="544108" y="3068960"/>
-          <a:ext cx="9326880" cy="3200401"/>
+          <a:ext cx="6720840" cy="3200401"/>
         </p:xfrm>
         <a:graphic>
           <a:graphicData uri="http://schemas.openxmlformats.org/drawingml/2006/table">
@@ -11839,8 +12127,8 @@
                 <a:tableStyleId>{5C22544A-7EE6-4342-B048-85BDC9FD1C3A}</a:tableStyleId>
               </a:tblPr>
               <a:tblGrid>
-                <a:gridCol w="1965960"/>
-                <a:gridCol w="7360920"/>
+                <a:gridCol w="1737360"/>
+                <a:gridCol w="4983480"/>
               </a:tblGrid>
               <a:tr h="1000607">
                 <a:tc>
@@ -11872,14 +12160,14 @@
                     <a:p>
                       <a:pPr>
                         <a:lnSpc>
-                          <a:spcPct val="115000"/>
+                          <a:spcPct val="110000"/>
                         </a:lnSpc>
                         <a:spcAft>
-                          <a:spcPts val="300"/>
+                          <a:spcPts val="200"/>
                         </a:spcAft>
                       </a:pPr>
                       <a:r>
-                        <a:rPr sz="1100">
+                        <a:rPr sz="1050">
                           <a:solidFill>
                             <a:srgbClr val="333333"/>
                           </a:solidFill>
@@ -11891,14 +12179,14 @@
                     <a:p>
                       <a:pPr>
                         <a:lnSpc>
-                          <a:spcPct val="115000"/>
+                          <a:spcPct val="110000"/>
                         </a:lnSpc>
                         <a:spcAft>
-                          <a:spcPts val="300"/>
+                          <a:spcPts val="200"/>
                         </a:spcAft>
                       </a:pPr>
                       <a:r>
-                        <a:rPr sz="1100">
+                        <a:rPr sz="1050">
                           <a:solidFill>
                             <a:srgbClr val="333333"/>
                           </a:solidFill>
@@ -11945,14 +12233,14 @@
                     <a:p>
                       <a:pPr>
                         <a:lnSpc>
-                          <a:spcPct val="115000"/>
+                          <a:spcPct val="110000"/>
                         </a:lnSpc>
                         <a:spcAft>
-                          <a:spcPts val="300"/>
+                          <a:spcPts val="200"/>
                         </a:spcAft>
                       </a:pPr>
                       <a:r>
-                        <a:rPr sz="1100">
+                        <a:rPr sz="1050">
                           <a:solidFill>
                             <a:srgbClr val="333333"/>
                           </a:solidFill>
@@ -11999,14 +12287,14 @@
                     <a:p>
                       <a:pPr>
                         <a:lnSpc>
-                          <a:spcPct val="115000"/>
+                          <a:spcPct val="110000"/>
                         </a:lnSpc>
                         <a:spcAft>
-                          <a:spcPts val="300"/>
+                          <a:spcPts val="200"/>
                         </a:spcAft>
                       </a:pPr>
                       <a:r>
-                        <a:rPr sz="1100">
+                        <a:rPr sz="1050">
                           <a:solidFill>
                             <a:srgbClr val="333333"/>
                           </a:solidFill>
@@ -12018,14 +12306,14 @@
                     <a:p>
                       <a:pPr>
                         <a:lnSpc>
-                          <a:spcPct val="115000"/>
+                          <a:spcPct val="110000"/>
                         </a:lnSpc>
                         <a:spcAft>
-                          <a:spcPts val="300"/>
+                          <a:spcPts val="200"/>
                         </a:spcAft>
                       </a:pPr>
                       <a:r>
-                        <a:rPr sz="1100">
+                        <a:rPr sz="1050">
                           <a:solidFill>
                             <a:srgbClr val="333333"/>
                           </a:solidFill>
@@ -12072,14 +12360,14 @@
                     <a:p>
                       <a:pPr>
                         <a:lnSpc>
-                          <a:spcPct val="115000"/>
+                          <a:spcPct val="110000"/>
                         </a:lnSpc>
                         <a:spcAft>
-                          <a:spcPts val="300"/>
+                          <a:spcPts val="200"/>
                         </a:spcAft>
                       </a:pPr>
                       <a:r>
-                        <a:rPr sz="1100">
+                        <a:rPr sz="1050">
                           <a:solidFill>
                             <a:srgbClr val="333333"/>
                           </a:solidFill>
@@ -12091,14 +12379,14 @@
                     <a:p>
                       <a:pPr>
                         <a:lnSpc>
-                          <a:spcPct val="115000"/>
+                          <a:spcPct val="110000"/>
                         </a:lnSpc>
                         <a:spcAft>
-                          <a:spcPts val="300"/>
+                          <a:spcPts val="200"/>
                         </a:spcAft>
                       </a:pPr>
                       <a:r>
-                        <a:rPr sz="1100">
+                        <a:rPr sz="1050">
                           <a:solidFill>
                             <a:srgbClr val="333333"/>
                           </a:solidFill>
@@ -12110,14 +12398,14 @@
                     <a:p>
                       <a:pPr>
                         <a:lnSpc>
-                          <a:spcPct val="115000"/>
+                          <a:spcPct val="110000"/>
                         </a:lnSpc>
                         <a:spcAft>
-                          <a:spcPts val="300"/>
+                          <a:spcPts val="200"/>
                         </a:spcAft>
                       </a:pPr>
                       <a:r>
-                        <a:rPr sz="1100">
+                        <a:rPr sz="1050">
                           <a:solidFill>
                             <a:srgbClr val="333333"/>
                           </a:solidFill>
@@ -12138,6 +12426,78 @@
           </a:graphicData>
         </a:graphic>
       </p:graphicFrame>
+      <p:sp>
+        <p:nvSpPr>
+          <p:cNvPr id="64" name="Rectangle 63"/>
+          <p:cNvSpPr/>
+          <p:nvPr/>
+        </p:nvSpPr>
+        <p:spPr>
+          <a:xfrm>
+            <a:off x="7402108" y="3068960"/>
+            <a:ext cx="2468880" cy="3200400"/>
+          </a:xfrm>
+          <a:prstGeom prst="rect">
+            <a:avLst/>
+          </a:prstGeom>
+          <a:solidFill>
+            <a:srgbClr val="F2F2F2"/>
+          </a:solidFill>
+          <a:ln w="15875">
+            <a:solidFill>
+              <a:srgbClr val="A6A6A6"/>
+            </a:solidFill>
+            <a:prstDash val="dash"/>
+          </a:ln>
+          <a:effectLst/>
+        </p:spPr>
+        <p:style>
+          <a:lnRef idx="1">
+            <a:schemeClr val="accent1"/>
+          </a:lnRef>
+          <a:fillRef idx="3">
+            <a:schemeClr val="accent1"/>
+          </a:fillRef>
+          <a:effectRef idx="2">
+            <a:schemeClr val="accent1"/>
+          </a:effectRef>
+          <a:fontRef idx="minor">
+            <a:schemeClr val="lt1"/>
+          </a:fontRef>
+        </p:style>
+        <p:txBody>
+          <a:bodyPr rtlCol="0" anchor="ctr" wrap="square"/>
+          <a:lstStyle/>
+          <a:p>
+            <a:pPr algn="ctr"/>
+            <a:r>
+              <a:rPr sz="1100" b="1">
+                <a:solidFill>
+                  <a:srgbClr val="595959"/>
+                </a:solidFill>
+                <a:latin typeface="メイリオ"/>
+              </a:rPr>
+              <a:t>画像挿入予定</a:t>
+            </a:r>
+          </a:p>
+          <a:p>
+            <a:pPr algn="ctr">
+              <a:spcBef>
+                <a:spcPts val="600"/>
+              </a:spcBef>
+            </a:pPr>
+            <a:r>
+              <a:rPr sz="900">
+                <a:solidFill>
+                  <a:srgbClr val="808080"/>
+                </a:solidFill>
+                <a:latin typeface="メイリオ"/>
+              </a:rPr>
+              <a:t>利用停止期間のカレンダー帯グラフ</a:t>
+            </a:r>
+          </a:p>
+        </p:txBody>
+      </p:sp>
     </p:spTree>
   </p:cSld>
   <p:clrMapOvr>
@@ -13540,7 +13900,7 @@
         </p:nvGraphicFramePr>
         <p:xfrm>
           <a:off x="544108" y="3068960"/>
-          <a:ext cx="9326880" cy="3200397"/>
+          <a:ext cx="6720840" cy="3200397"/>
         </p:xfrm>
         <a:graphic>
           <a:graphicData uri="http://schemas.openxmlformats.org/drawingml/2006/table">
@@ -13549,8 +13909,8 @@
                 <a:tableStyleId>{5C22544A-7EE6-4342-B048-85BDC9FD1C3A}</a:tableStyleId>
               </a:tblPr>
               <a:tblGrid>
-                <a:gridCol w="1965960"/>
-                <a:gridCol w="7360920"/>
+                <a:gridCol w="1737360"/>
+                <a:gridCol w="4983480"/>
               </a:tblGrid>
               <a:tr h="864813">
                 <a:tc>
@@ -13582,14 +13942,14 @@
                     <a:p>
                       <a:pPr>
                         <a:lnSpc>
-                          <a:spcPct val="108000"/>
+                          <a:spcPct val="105000"/>
                         </a:lnSpc>
                         <a:spcAft>
-                          <a:spcPts val="200"/>
+                          <a:spcPts val="150"/>
                         </a:spcAft>
                       </a:pPr>
                       <a:r>
-                        <a:rPr sz="1000">
+                        <a:rPr sz="950">
                           <a:solidFill>
                             <a:srgbClr val="333333"/>
                           </a:solidFill>
@@ -13601,14 +13961,14 @@
                     <a:p>
                       <a:pPr>
                         <a:lnSpc>
-                          <a:spcPct val="108000"/>
+                          <a:spcPct val="105000"/>
                         </a:lnSpc>
                         <a:spcAft>
-                          <a:spcPts val="200"/>
+                          <a:spcPts val="150"/>
                         </a:spcAft>
                       </a:pPr>
                       <a:r>
-                        <a:rPr sz="1000">
+                        <a:rPr sz="950">
                           <a:solidFill>
                             <a:srgbClr val="333333"/>
                           </a:solidFill>
@@ -13620,14 +13980,14 @@
                     <a:p>
                       <a:pPr>
                         <a:lnSpc>
-                          <a:spcPct val="108000"/>
+                          <a:spcPct val="105000"/>
                         </a:lnSpc>
                         <a:spcAft>
-                          <a:spcPts val="200"/>
+                          <a:spcPts val="150"/>
                         </a:spcAft>
                       </a:pPr>
                       <a:r>
-                        <a:rPr sz="1000">
+                        <a:rPr sz="950">
                           <a:solidFill>
                             <a:srgbClr val="333333"/>
                           </a:solidFill>
@@ -13639,14 +13999,14 @@
                     <a:p>
                       <a:pPr>
                         <a:lnSpc>
-                          <a:spcPct val="108000"/>
+                          <a:spcPct val="105000"/>
                         </a:lnSpc>
                         <a:spcAft>
-                          <a:spcPts val="200"/>
+                          <a:spcPts val="150"/>
                         </a:spcAft>
                       </a:pPr>
                       <a:r>
-                        <a:rPr sz="1000">
+                        <a:rPr sz="950">
                           <a:solidFill>
                             <a:srgbClr val="333333"/>
                           </a:solidFill>
@@ -13693,14 +14053,14 @@
                     <a:p>
                       <a:pPr>
                         <a:lnSpc>
-                          <a:spcPct val="108000"/>
+                          <a:spcPct val="105000"/>
                         </a:lnSpc>
                         <a:spcAft>
-                          <a:spcPts val="200"/>
+                          <a:spcPts val="150"/>
                         </a:spcAft>
                       </a:pPr>
                       <a:r>
-                        <a:rPr sz="1000">
+                        <a:rPr sz="950">
                           <a:solidFill>
                             <a:srgbClr val="333333"/>
                           </a:solidFill>
@@ -13712,14 +14072,14 @@
                     <a:p>
                       <a:pPr>
                         <a:lnSpc>
-                          <a:spcPct val="108000"/>
+                          <a:spcPct val="105000"/>
                         </a:lnSpc>
                         <a:spcAft>
-                          <a:spcPts val="200"/>
+                          <a:spcPts val="150"/>
                         </a:spcAft>
                       </a:pPr>
                       <a:r>
-                        <a:rPr sz="1000">
+                        <a:rPr sz="950">
                           <a:solidFill>
                             <a:srgbClr val="333333"/>
                           </a:solidFill>
@@ -13731,14 +14091,14 @@
                     <a:p>
                       <a:pPr>
                         <a:lnSpc>
-                          <a:spcPct val="108000"/>
+                          <a:spcPct val="105000"/>
                         </a:lnSpc>
                         <a:spcAft>
-                          <a:spcPts val="200"/>
+                          <a:spcPts val="150"/>
                         </a:spcAft>
                       </a:pPr>
                       <a:r>
-                        <a:rPr sz="1000">
+                        <a:rPr sz="950">
                           <a:solidFill>
                             <a:srgbClr val="333333"/>
                           </a:solidFill>
@@ -13750,14 +14110,14 @@
                     <a:p>
                       <a:pPr>
                         <a:lnSpc>
-                          <a:spcPct val="108000"/>
+                          <a:spcPct val="105000"/>
                         </a:lnSpc>
                         <a:spcAft>
-                          <a:spcPts val="200"/>
+                          <a:spcPts val="150"/>
                         </a:spcAft>
                       </a:pPr>
                       <a:r>
-                        <a:rPr sz="1000">
+                        <a:rPr sz="950">
                           <a:solidFill>
                             <a:srgbClr val="333333"/>
                           </a:solidFill>
@@ -13804,14 +14164,14 @@
                     <a:p>
                       <a:pPr>
                         <a:lnSpc>
-                          <a:spcPct val="115000"/>
+                          <a:spcPct val="105000"/>
                         </a:lnSpc>
                         <a:spcAft>
-                          <a:spcPts val="300"/>
+                          <a:spcPts val="150"/>
                         </a:spcAft>
                       </a:pPr>
                       <a:r>
-                        <a:rPr sz="1100">
+                        <a:rPr sz="950">
                           <a:solidFill>
                             <a:srgbClr val="333333"/>
                           </a:solidFill>
@@ -13823,14 +14183,14 @@
                     <a:p>
                       <a:pPr>
                         <a:lnSpc>
-                          <a:spcPct val="115000"/>
+                          <a:spcPct val="105000"/>
                         </a:lnSpc>
                         <a:spcAft>
-                          <a:spcPts val="300"/>
+                          <a:spcPts val="150"/>
                         </a:spcAft>
                       </a:pPr>
                       <a:r>
-                        <a:rPr sz="1100">
+                        <a:rPr sz="950">
                           <a:solidFill>
                             <a:srgbClr val="333333"/>
                           </a:solidFill>
@@ -13842,14 +14202,14 @@
                     <a:p>
                       <a:pPr>
                         <a:lnSpc>
-                          <a:spcPct val="115000"/>
+                          <a:spcPct val="105000"/>
                         </a:lnSpc>
                         <a:spcAft>
-                          <a:spcPts val="300"/>
+                          <a:spcPts val="150"/>
                         </a:spcAft>
                       </a:pPr>
                       <a:r>
-                        <a:rPr sz="1100">
+                        <a:rPr sz="950">
                           <a:solidFill>
                             <a:srgbClr val="333333"/>
                           </a:solidFill>
@@ -13896,14 +14256,14 @@
                     <a:p>
                       <a:pPr>
                         <a:lnSpc>
-                          <a:spcPct val="108000"/>
+                          <a:spcPct val="105000"/>
                         </a:lnSpc>
                         <a:spcAft>
-                          <a:spcPts val="200"/>
+                          <a:spcPts val="150"/>
                         </a:spcAft>
                       </a:pPr>
                       <a:r>
-                        <a:rPr sz="1000">
+                        <a:rPr sz="950">
                           <a:solidFill>
                             <a:srgbClr val="333333"/>
                           </a:solidFill>
@@ -13915,14 +14275,14 @@
                     <a:p>
                       <a:pPr>
                         <a:lnSpc>
-                          <a:spcPct val="108000"/>
+                          <a:spcPct val="105000"/>
                         </a:lnSpc>
                         <a:spcAft>
-                          <a:spcPts val="200"/>
+                          <a:spcPts val="150"/>
                         </a:spcAft>
                       </a:pPr>
                       <a:r>
-                        <a:rPr sz="1000">
+                        <a:rPr sz="950">
                           <a:solidFill>
                             <a:srgbClr val="333333"/>
                           </a:solidFill>
@@ -13934,14 +14294,14 @@
                     <a:p>
                       <a:pPr>
                         <a:lnSpc>
-                          <a:spcPct val="108000"/>
+                          <a:spcPct val="105000"/>
                         </a:lnSpc>
                         <a:spcAft>
-                          <a:spcPts val="200"/>
+                          <a:spcPts val="150"/>
                         </a:spcAft>
                       </a:pPr>
                       <a:r>
-                        <a:rPr sz="1000">
+                        <a:rPr sz="950">
                           <a:solidFill>
                             <a:srgbClr val="333333"/>
                           </a:solidFill>
@@ -13962,6 +14322,78 @@
           </a:graphicData>
         </a:graphic>
       </p:graphicFrame>
+      <p:sp>
+        <p:nvSpPr>
+          <p:cNvPr id="64" name="Rectangle 63"/>
+          <p:cNvSpPr/>
+          <p:nvPr/>
+        </p:nvSpPr>
+        <p:spPr>
+          <a:xfrm>
+            <a:off x="7402108" y="3068960"/>
+            <a:ext cx="2468880" cy="3200400"/>
+          </a:xfrm>
+          <a:prstGeom prst="rect">
+            <a:avLst/>
+          </a:prstGeom>
+          <a:solidFill>
+            <a:srgbClr val="F2F2F2"/>
+          </a:solidFill>
+          <a:ln w="15875">
+            <a:solidFill>
+              <a:srgbClr val="A6A6A6"/>
+            </a:solidFill>
+            <a:prstDash val="dash"/>
+          </a:ln>
+          <a:effectLst/>
+        </p:spPr>
+        <p:style>
+          <a:lnRef idx="1">
+            <a:schemeClr val="accent1"/>
+          </a:lnRef>
+          <a:fillRef idx="3">
+            <a:schemeClr val="accent1"/>
+          </a:fillRef>
+          <a:effectRef idx="2">
+            <a:schemeClr val="accent1"/>
+          </a:effectRef>
+          <a:fontRef idx="minor">
+            <a:schemeClr val="lt1"/>
+          </a:fontRef>
+        </p:style>
+        <p:txBody>
+          <a:bodyPr rtlCol="0" anchor="ctr" wrap="square"/>
+          <a:lstStyle/>
+          <a:p>
+            <a:pPr algn="ctr"/>
+            <a:r>
+              <a:rPr sz="1100" b="1">
+                <a:solidFill>
+                  <a:srgbClr val="595959"/>
+                </a:solidFill>
+                <a:latin typeface="メイリオ"/>
+              </a:rPr>
+              <a:t>画像挿入予定</a:t>
+            </a:r>
+          </a:p>
+          <a:p>
+            <a:pPr algn="ctr">
+              <a:spcBef>
+                <a:spcPts val="600"/>
+              </a:spcBef>
+            </a:pPr>
+            <a:r>
+              <a:rPr sz="900">
+                <a:solidFill>
+                  <a:srgbClr val="808080"/>
+                </a:solidFill>
+                <a:latin typeface="メイリオ"/>
+              </a:rPr>
+              <a:t>実施フロー図（告知→応募→景品進呈）</a:t>
+            </a:r>
+          </a:p>
+        </p:txBody>
+      </p:sp>
     </p:spTree>
   </p:cSld>
   <p:clrMapOvr>

--- a/LINEOA媒体最新情報_2026年9月トレンドレポート.pptx
+++ b/LINEOA媒体最新情報_2026年9月トレンドレポート.pptx
@@ -17,6 +17,8 @@
     <p:sldId id="262" r:id="rId13"/>
     <p:sldId id="263" r:id="rId12"/>
     <p:sldId id="264" r:id="rId11"/>
+    <p:sldId id="265" r:id="rId10"/>
+    <p:sldId id="266" r:id="rId9"/>
   </p:sldIdLst>
   <p:sldSz cy="6858000" cx="9906000"/>
   <p:notesSz cx="6799250" cy="9929800"/>
@@ -3209,6 +3211,3729 @@
 </p:sld>
 </file>
 
+<file path=ppt/slides/slide10.xml><?xml version="1.0" encoding="utf-8"?>
+<p:sld xmlns:a="http://schemas.openxmlformats.org/drawingml/2006/main" xmlns:p="http://schemas.openxmlformats.org/presentationml/2006/main" xmlns:r="http://schemas.openxmlformats.org/officeDocument/2006/relationships">
+  <p:cSld>
+    <p:spTree>
+      <p:nvGrpSpPr>
+        <p:cNvPr id="1" name=""/>
+        <p:cNvGrpSpPr/>
+        <p:nvPr/>
+      </p:nvGrpSpPr>
+      <p:grpSpPr/>
+      <p:sp>
+        <p:nvSpPr>
+          <p:cNvPr id="40" name="Google Shape;40;p3"/>
+          <p:cNvSpPr/>
+          <p:nvPr/>
+        </p:nvSpPr>
+        <p:spPr>
+          <a:xfrm>
+            <a:off x="292801" y="730955"/>
+            <a:ext cx="1296144" cy="435690"/>
+          </a:xfrm>
+          <a:prstGeom prst="rect">
+            <a:avLst/>
+          </a:prstGeom>
+          <a:solidFill>
+            <a:schemeClr val="dk2"/>
+          </a:solidFill>
+          <a:ln cap="flat" cmpd="sng" w="9525">
+            <a:solidFill>
+              <a:srgbClr val="4A7DBA"/>
+            </a:solidFill>
+            <a:prstDash val="solid"/>
+            <a:round/>
+            <a:headEnd len="sm" w="sm" type="none"/>
+            <a:tailEnd len="sm" w="sm" type="none"/>
+          </a:ln>
+        </p:spPr>
+        <p:txBody>
+          <a:bodyPr anchorCtr="0" anchor="ctr" bIns="45700" lIns="91425" spcFirstLastPara="1" rIns="91425" wrap="square" tIns="45700">
+            <a:noAutofit/>
+          </a:bodyPr>
+          <a:lstStyle/>
+          <a:p>
+            <a:pPr indent="0" lvl="0" marL="0" marR="0" rtl="0" algn="ctr">
+              <a:spcBef>
+                <a:spcPts val="0"/>
+              </a:spcBef>
+              <a:spcAft>
+                <a:spcPts val="0"/>
+              </a:spcAft>
+              <a:buNone/>
+            </a:pPr>
+            <a:r>
+              <a:rPr b="0" i="0" lang="ja-JP" sz="1800" u="none" cap="none" strike="noStrike">
+                <a:solidFill>
+                  <a:schemeClr val="lt1"/>
+                </a:solidFill>
+                <a:latin typeface="メイリオ"/>
+                <a:ea typeface="Meiryo"/>
+                <a:cs typeface="Meiryo"/>
+                <a:sym typeface="Meiryo"/>
+              </a:rPr>
+              <a:t>対象業界</a:t>
+            </a:r>
+            <a:endParaRPr/>
+          </a:p>
+        </p:txBody>
+      </p:sp>
+      <p:sp>
+        <p:nvSpPr>
+          <p:cNvPr id="41" name="Google Shape;41;p3"/>
+          <p:cNvSpPr/>
+          <p:nvPr/>
+        </p:nvSpPr>
+        <p:spPr>
+          <a:xfrm>
+            <a:off x="7560840" y="730955"/>
+            <a:ext cx="829618" cy="435690"/>
+          </a:xfrm>
+          <a:prstGeom prst="rect">
+            <a:avLst/>
+          </a:prstGeom>
+          <a:solidFill>
+            <a:schemeClr val="bg1"/>
+          </a:solidFill>
+          <a:ln cap="flat" cmpd="sng" w="9525">
+            <a:solidFill>
+              <a:srgbClr val="4F81BD"/>
+            </a:solidFill>
+            <a:prstDash val="sysDash"/>
+            <a:round/>
+            <a:headEnd len="sm" w="sm" type="none"/>
+            <a:tailEnd len="sm" w="sm" type="none"/>
+          </a:ln>
+        </p:spPr>
+        <p:txBody>
+          <a:bodyPr anchorCtr="0" anchor="ctr" bIns="45700" lIns="91425" spcFirstLastPara="1" rIns="91425" wrap="square" tIns="45700">
+            <a:noAutofit/>
+          </a:bodyPr>
+          <a:lstStyle/>
+          <a:p>
+            <a:pPr indent="0" lvl="0" marL="0" marR="0" rtl="0" algn="ctr">
+              <a:spcBef>
+                <a:spcPts val="0"/>
+              </a:spcBef>
+              <a:spcAft>
+                <a:spcPts val="0"/>
+              </a:spcAft>
+              <a:buNone/>
+            </a:pPr>
+            <a:r>
+              <a:rPr b="0" i="0" lang="ja-JP" sz="1200" u="none" cap="none" strike="noStrike">
+                <a:solidFill>
+                  <a:schemeClr val="dk1"/>
+                </a:solidFill>
+                <a:latin typeface="メイリオ"/>
+                <a:ea typeface="Meiryo"/>
+                <a:cs typeface="Meiryo"/>
+                <a:sym typeface="Meiryo"/>
+              </a:rPr>
+              <a:t>その他</a:t>
+            </a:r>
+            <a:endParaRPr b="0" i="0" sz="1200" u="none" cap="none" strike="noStrike">
+              <a:solidFill>
+                <a:schemeClr val="dk1"/>
+              </a:solidFill>
+              <a:latin typeface="Meiryo"/>
+              <a:ea typeface="Meiryo"/>
+              <a:cs typeface="Meiryo"/>
+              <a:sym typeface="Meiryo"/>
+            </a:endParaRPr>
+          </a:p>
+        </p:txBody>
+      </p:sp>
+      <p:sp>
+        <p:nvSpPr>
+          <p:cNvPr id="42" name="Google Shape;42;p3"/>
+          <p:cNvSpPr/>
+          <p:nvPr/>
+        </p:nvSpPr>
+        <p:spPr>
+          <a:xfrm>
+            <a:off x="6679050" y="730955"/>
+            <a:ext cx="829618" cy="435690"/>
+          </a:xfrm>
+          <a:prstGeom prst="rect">
+            <a:avLst/>
+          </a:prstGeom>
+          <a:solidFill>
+            <a:schemeClr val="tx2"/>
+          </a:solidFill>
+          <a:ln cap="flat" cmpd="sng" w="9525">
+            <a:solidFill>
+              <a:srgbClr val="4F81BD"/>
+            </a:solidFill>
+            <a:prstDash val="solid"/>
+            <a:round/>
+            <a:headEnd len="sm" w="sm" type="none"/>
+            <a:tailEnd len="sm" w="sm" type="none"/>
+          </a:ln>
+        </p:spPr>
+        <p:txBody>
+          <a:bodyPr anchorCtr="0" anchor="ctr" bIns="45700" lIns="91425" spcFirstLastPara="1" rIns="91425" wrap="square" tIns="45700">
+            <a:noAutofit/>
+          </a:bodyPr>
+          <a:lstStyle/>
+          <a:p>
+            <a:pPr indent="0" lvl="0" marL="0" marR="0" rtl="0" algn="ctr">
+              <a:spcBef>
+                <a:spcPts val="0"/>
+              </a:spcBef>
+              <a:spcAft>
+                <a:spcPts val="0"/>
+              </a:spcAft>
+              <a:buNone/>
+            </a:pPr>
+            <a:r>
+              <a:rPr b="0" i="0" lang="ja-JP" sz="1000" u="none" cap="none" strike="noStrike">
+                <a:solidFill>
+                  <a:schemeClr val="dk1"/>
+                </a:solidFill>
+                <a:latin typeface="メイリオ"/>
+                <a:ea typeface="Meiryo"/>
+                <a:cs typeface="Meiryo"/>
+                <a:sym typeface="Meiryo"/>
+              </a:rPr>
+              <a:t>オプション</a:t>
+            </a:r>
+            <a:endParaRPr b="0" i="0" sz="1000" u="none" cap="none" strike="noStrike">
+              <a:solidFill>
+                <a:schemeClr val="dk1"/>
+              </a:solidFill>
+              <a:latin typeface="Meiryo"/>
+              <a:ea typeface="Meiryo"/>
+              <a:cs typeface="Meiryo"/>
+              <a:sym typeface="Meiryo"/>
+            </a:endParaRPr>
+          </a:p>
+          <a:p>
+            <a:pPr indent="0" lvl="0" marL="0" marR="0" rtl="0" algn="ctr">
+              <a:spcBef>
+                <a:spcPts val="0"/>
+              </a:spcBef>
+              <a:spcAft>
+                <a:spcPts val="0"/>
+              </a:spcAft>
+              <a:buNone/>
+            </a:pPr>
+            <a:r>
+              <a:rPr b="0" i="0" lang="ja-JP" sz="1000" u="none" cap="none" strike="noStrike">
+                <a:solidFill>
+                  <a:schemeClr val="dk1"/>
+                </a:solidFill>
+                <a:latin typeface="メイリオ"/>
+                <a:ea typeface="Meiryo"/>
+                <a:cs typeface="Meiryo"/>
+                <a:sym typeface="Meiryo"/>
+              </a:rPr>
+              <a:t>商材</a:t>
+            </a:r>
+            <a:endParaRPr/>
+          </a:p>
+        </p:txBody>
+      </p:sp>
+      <p:sp>
+        <p:nvSpPr>
+          <p:cNvPr id="43" name="Google Shape;43;p3"/>
+          <p:cNvSpPr/>
+          <p:nvPr/>
+        </p:nvSpPr>
+        <p:spPr>
+          <a:xfrm>
+            <a:off x="1594068" y="730955"/>
+            <a:ext cx="2926883" cy="435690"/>
+          </a:xfrm>
+          <a:prstGeom prst="rect">
+            <a:avLst/>
+          </a:prstGeom>
+          <a:noFill/>
+          <a:ln cap="flat" cmpd="sng" w="9525">
+            <a:solidFill>
+              <a:srgbClr val="4A7DBA"/>
+            </a:solidFill>
+            <a:prstDash val="solid"/>
+            <a:round/>
+            <a:headEnd len="sm" w="sm" type="none"/>
+            <a:tailEnd len="sm" w="sm" type="none"/>
+          </a:ln>
+        </p:spPr>
+        <p:txBody>
+          <a:bodyPr anchorCtr="0" anchor="ctr" bIns="45700" lIns="91425" spcFirstLastPara="1" rIns="91425" wrap="square" tIns="45700">
+            <a:noAutofit/>
+          </a:bodyPr>
+          <a:lstStyle/>
+          <a:p>
+            <a:pPr indent="0" lvl="0" marL="0" marR="0" rtl="0" algn="ctr">
+              <a:spcBef>
+                <a:spcPts val="0"/>
+              </a:spcBef>
+              <a:spcAft>
+                <a:spcPts val="0"/>
+              </a:spcAft>
+              <a:buNone/>
+            </a:pPr>
+            <a:r>
+              <a:rPr b="0" i="0" lang="ja-JP" sz="1300" u="none" cap="none" strike="noStrike">
+                <a:solidFill>
+                  <a:schemeClr val="dk1"/>
+                </a:solidFill>
+                <a:latin typeface="メイリオ"/>
+                <a:ea typeface="Meiryo"/>
+                <a:cs typeface="Meiryo"/>
+                <a:sym typeface="Meiryo"/>
+              </a:rPr>
+              <a:t>友だち獲得を強化したい全業種</a:t>
+            </a:r>
+            <a:endParaRPr/>
+          </a:p>
+        </p:txBody>
+      </p:sp>
+      <p:sp>
+        <p:nvSpPr>
+          <p:cNvPr id="44" name="Google Shape;44;p3"/>
+          <p:cNvSpPr txBox="1"/>
+          <p:nvPr/>
+        </p:nvSpPr>
+        <p:spPr>
+          <a:xfrm>
+            <a:off x="3296816" y="6597352"/>
+            <a:ext cx="6209091" cy="215444"/>
+          </a:xfrm>
+          <a:prstGeom prst="rect">
+            <a:avLst/>
+          </a:prstGeom>
+          <a:noFill/>
+          <a:ln>
+            <a:noFill/>
+          </a:ln>
+        </p:spPr>
+        <p:txBody>
+          <a:bodyPr anchorCtr="0" anchor="t" bIns="45700" lIns="91425" spcFirstLastPara="1" rIns="91425" wrap="square" tIns="45700">
+            <a:spAutoFit/>
+          </a:bodyPr>
+          <a:lstStyle/>
+          <a:p>
+            <a:pPr indent="0" lvl="0" marL="0" marR="0" rtl="0" algn="l">
+              <a:spcBef>
+                <a:spcPts val="0"/>
+              </a:spcBef>
+              <a:spcAft>
+                <a:spcPts val="0"/>
+              </a:spcAft>
+              <a:buNone/>
+            </a:pPr>
+            <a:r>
+              <a:rPr b="0" i="0" lang="ja-JP" sz="800" u="none" cap="none" strike="noStrike">
+                <a:solidFill>
+                  <a:schemeClr val="lt1"/>
+                </a:solidFill>
+                <a:latin typeface="メイリオ"/>
+                <a:ea typeface="Meiryo"/>
+                <a:cs typeface="Meiryo"/>
+                <a:sym typeface="Meiryo"/>
+              </a:rPr>
+              <a:t>出典：https://workers-hub.box.com/s/odilqpe44tp398zlfko148yggcgj68ny</a:t>
+            </a:r>
+            <a:endParaRPr sz="800">
+              <a:solidFill>
+                <a:schemeClr val="lt1"/>
+              </a:solidFill>
+              <a:latin typeface="Meiryo"/>
+              <a:ea typeface="Meiryo"/>
+              <a:cs typeface="Meiryo"/>
+              <a:sym typeface="Meiryo"/>
+            </a:endParaRPr>
+          </a:p>
+        </p:txBody>
+      </p:sp>
+      <p:sp>
+        <p:nvSpPr>
+          <p:cNvPr id="45" name="Google Shape;45;p3"/>
+          <p:cNvSpPr/>
+          <p:nvPr/>
+        </p:nvSpPr>
+        <p:spPr>
+          <a:xfrm>
+            <a:off x="0" y="1234746"/>
+            <a:ext cx="9906000" cy="672259"/>
+          </a:xfrm>
+          <a:prstGeom prst="rect">
+            <a:avLst/>
+          </a:prstGeom>
+          <a:solidFill>
+            <a:srgbClr val="C5D8F1"/>
+          </a:solidFill>
+          <a:ln>
+            <a:noFill/>
+          </a:ln>
+        </p:spPr>
+        <p:txBody>
+          <a:bodyPr anchorCtr="0" anchor="ctr" bIns="45700" lIns="91425" spcFirstLastPara="1" rIns="91425" wrap="square" tIns="45700">
+            <a:noAutofit/>
+          </a:bodyPr>
+          <a:lstStyle/>
+          <a:p>
+            <a:pPr indent="0" lvl="0" marL="0" marR="0" rtl="0" algn="ctr">
+              <a:spcBef>
+                <a:spcPts val="0"/>
+              </a:spcBef>
+              <a:spcAft>
+                <a:spcPts val="0"/>
+              </a:spcAft>
+              <a:buNone/>
+            </a:pPr>
+            <a:r>
+              <a:rPr b="1" lang="ja-JP" sz="1600">
+                <a:solidFill>
+                  <a:srgbClr val="004DE6"/>
+                </a:solidFill>
+                <a:latin typeface="メイリオ"/>
+                <a:ea typeface="Meiryo"/>
+                <a:cs typeface="Meiryo"/>
+                <a:sym typeface="Meiryo"/>
+              </a:rPr>
+              <a:t>　　　　　　</a:t>
+            </a:r>
+            <a:endParaRPr b="1" sz="1800">
+              <a:solidFill>
+                <a:srgbClr val="004DE6"/>
+              </a:solidFill>
+              <a:latin typeface="Meiryo"/>
+              <a:ea typeface="Meiryo"/>
+              <a:cs typeface="Meiryo"/>
+              <a:sym typeface="Meiryo"/>
+            </a:endParaRPr>
+          </a:p>
+        </p:txBody>
+      </p:sp>
+      <p:sp>
+        <p:nvSpPr>
+          <p:cNvPr id="46" name="Google Shape;46;p3"/>
+          <p:cNvSpPr/>
+          <p:nvPr/>
+        </p:nvSpPr>
+        <p:spPr>
+          <a:xfrm>
+            <a:off x="1089832" y="1437370"/>
+            <a:ext cx="7031520" cy="338554"/>
+          </a:xfrm>
+          <a:prstGeom prst="rect">
+            <a:avLst/>
+          </a:prstGeom>
+          <a:noFill/>
+          <a:ln>
+            <a:noFill/>
+          </a:ln>
+        </p:spPr>
+        <p:txBody>
+          <a:bodyPr anchorCtr="0" anchor="t" bIns="45700" lIns="91425" spcFirstLastPara="1" rIns="91425" wrap="square" tIns="45700">
+            <a:spAutoFit/>
+          </a:bodyPr>
+          <a:lstStyle/>
+          <a:p>
+            <a:pPr indent="0" lvl="0" marL="0" marR="0" rtl="0" algn="l">
+              <a:spcBef>
+                <a:spcPts val="0"/>
+              </a:spcBef>
+              <a:spcAft>
+                <a:spcPts val="0"/>
+              </a:spcAft>
+              <a:buNone/>
+            </a:pPr>
+            <a:r>
+              <a:rPr b="1" lang="ja-JP" sz="1600">
+                <a:solidFill>
+                  <a:srgbClr val="004DE6"/>
+                </a:solidFill>
+                <a:latin typeface="メイリオ"/>
+                <a:ea typeface="Meiryo"/>
+                <a:cs typeface="Meiryo"/>
+                <a:sym typeface="Meiryo"/>
+              </a:rPr>
+              <a:t>【LINEオープンキャンペーン】実施スケジュール</a:t>
+            </a:r>
+            <a:endParaRPr b="1" sz="1600">
+              <a:solidFill>
+                <a:srgbClr val="004DE6"/>
+              </a:solidFill>
+              <a:latin typeface="Meiryo"/>
+              <a:ea typeface="Meiryo"/>
+              <a:cs typeface="Meiryo"/>
+              <a:sym typeface="Meiryo"/>
+            </a:endParaRPr>
+          </a:p>
+        </p:txBody>
+      </p:sp>
+      <p:sp>
+        <p:nvSpPr>
+          <p:cNvPr id="47" name="Google Shape;47;p3"/>
+          <p:cNvSpPr txBox="1"/>
+          <p:nvPr/>
+        </p:nvSpPr>
+        <p:spPr>
+          <a:xfrm>
+            <a:off x="182880" y="88175"/>
+            <a:ext cx="7512385" cy="365091"/>
+          </a:xfrm>
+          <a:prstGeom prst="rect">
+            <a:avLst/>
+          </a:prstGeom>
+          <a:noFill/>
+          <a:ln>
+            <a:noFill/>
+          </a:ln>
+        </p:spPr>
+        <p:txBody>
+          <a:bodyPr anchorCtr="0" anchor="t" bIns="45700" lIns="91425" spcFirstLastPara="1" rIns="91425" wrap="square" tIns="72000">
+            <a:spAutoFit/>
+          </a:bodyPr>
+          <a:lstStyle/>
+          <a:p>
+            <a:pPr indent="0" lvl="0" marL="0" marR="0" rtl="0" algn="l">
+              <a:spcBef>
+                <a:spcPts val="0"/>
+              </a:spcBef>
+              <a:spcAft>
+                <a:spcPts val="0"/>
+              </a:spcAft>
+              <a:buClr>
+                <a:schemeClr val="dk1"/>
+              </a:buClr>
+              <a:buSzPts val="1600"/>
+              <a:buFont typeface="Arial"/>
+              <a:buNone/>
+            </a:pPr>
+            <a:r>
+              <a:rPr b="0" lang="ja-JP" sz="1600" u="none">
+                <a:solidFill>
+                  <a:schemeClr val="dk1"/>
+                </a:solidFill>
+                <a:latin typeface="メイリオ"/>
+                <a:ea typeface="Meiryo"/>
+                <a:cs typeface="Meiryo"/>
+                <a:sym typeface="Meiryo"/>
+              </a:rPr>
+              <a:t>    今後のアップデート情報</a:t>
+            </a:r>
+            <a:endParaRPr b="0" sz="1600" u="none">
+              <a:solidFill>
+                <a:schemeClr val="dk1"/>
+              </a:solidFill>
+              <a:latin typeface="Meiryo"/>
+              <a:ea typeface="Meiryo"/>
+              <a:cs typeface="Meiryo"/>
+              <a:sym typeface="Meiryo"/>
+            </a:endParaRPr>
+          </a:p>
+        </p:txBody>
+      </p:sp>
+      <p:sp>
+        <p:nvSpPr>
+          <p:cNvPr id="48" name="Google Shape;48;p3"/>
+          <p:cNvSpPr/>
+          <p:nvPr/>
+        </p:nvSpPr>
+        <p:spPr>
+          <a:xfrm>
+            <a:off x="5797260" y="730955"/>
+            <a:ext cx="829618" cy="435690"/>
+          </a:xfrm>
+          <a:prstGeom prst="rect">
+            <a:avLst/>
+          </a:prstGeom>
+          <a:solidFill>
+            <a:schemeClr val="bg1"/>
+          </a:solidFill>
+          <a:ln cap="flat" cmpd="sng" w="9525">
+            <a:solidFill>
+              <a:srgbClr val="4F81BD"/>
+            </a:solidFill>
+            <a:prstDash val="sysDash"/>
+            <a:round/>
+            <a:headEnd len="sm" w="sm" type="none"/>
+            <a:tailEnd len="sm" w="sm" type="none"/>
+          </a:ln>
+        </p:spPr>
+        <p:txBody>
+          <a:bodyPr anchorCtr="0" anchor="ctr" bIns="45700" lIns="91425" spcFirstLastPara="1" rIns="91425" wrap="square" tIns="45700">
+            <a:noAutofit/>
+          </a:bodyPr>
+          <a:lstStyle/>
+          <a:p>
+            <a:pPr indent="0" lvl="0" marL="0" marR="0" rtl="0" algn="ctr">
+              <a:spcBef>
+                <a:spcPts val="0"/>
+              </a:spcBef>
+              <a:spcAft>
+                <a:spcPts val="0"/>
+              </a:spcAft>
+              <a:buClr>
+                <a:schemeClr val="dk1"/>
+              </a:buClr>
+              <a:buSzPts val="1000"/>
+              <a:buFont typeface="Meiryo"/>
+              <a:buNone/>
+            </a:pPr>
+            <a:r>
+              <a:rPr lang="ja-JP" sz="1000">
+                <a:solidFill>
+                  <a:schemeClr val="dk1"/>
+                </a:solidFill>
+                <a:latin typeface="メイリオ"/>
+                <a:ea typeface="Meiryo"/>
+                <a:cs typeface="Meiryo"/>
+                <a:sym typeface="Meiryo"/>
+              </a:rPr>
+              <a:t>開発</a:t>
+            </a:r>
+            <a:endParaRPr sz="1000">
+              <a:solidFill>
+                <a:schemeClr val="dk1"/>
+              </a:solidFill>
+              <a:latin typeface="Meiryo"/>
+              <a:ea typeface="Meiryo"/>
+              <a:cs typeface="Meiryo"/>
+              <a:sym typeface="Meiryo"/>
+            </a:endParaRPr>
+          </a:p>
+          <a:p>
+            <a:pPr indent="0" lvl="0" marL="0" marR="0" rtl="0" algn="ctr">
+              <a:spcBef>
+                <a:spcPts val="0"/>
+              </a:spcBef>
+              <a:spcAft>
+                <a:spcPts val="0"/>
+              </a:spcAft>
+              <a:buClr>
+                <a:schemeClr val="dk1"/>
+              </a:buClr>
+              <a:buSzPts val="1000"/>
+              <a:buFont typeface="Meiryo"/>
+              <a:buNone/>
+            </a:pPr>
+            <a:r>
+              <a:rPr lang="ja-JP" sz="1000">
+                <a:solidFill>
+                  <a:schemeClr val="dk1"/>
+                </a:solidFill>
+                <a:latin typeface="メイリオ"/>
+                <a:ea typeface="Meiryo"/>
+                <a:cs typeface="Meiryo"/>
+                <a:sym typeface="Meiryo"/>
+              </a:rPr>
+              <a:t>LINE API</a:t>
+            </a:r>
+            <a:endParaRPr sz="1000">
+              <a:solidFill>
+                <a:schemeClr val="dk1"/>
+              </a:solidFill>
+              <a:latin typeface="Meiryo"/>
+              <a:ea typeface="Meiryo"/>
+              <a:cs typeface="Meiryo"/>
+              <a:sym typeface="Meiryo"/>
+            </a:endParaRPr>
+          </a:p>
+        </p:txBody>
+      </p:sp>
+      <p:sp>
+        <p:nvSpPr>
+          <p:cNvPr id="49" name="Google Shape;49;p3"/>
+          <p:cNvSpPr/>
+          <p:nvPr/>
+        </p:nvSpPr>
+        <p:spPr>
+          <a:xfrm>
+            <a:off x="4915470" y="730955"/>
+            <a:ext cx="829618" cy="435690"/>
+          </a:xfrm>
+          <a:prstGeom prst="rect">
+            <a:avLst/>
+          </a:prstGeom>
+          <a:solidFill>
+            <a:schemeClr val="bg1"/>
+          </a:solidFill>
+          <a:ln cap="flat" cmpd="sng" w="9525">
+            <a:solidFill>
+              <a:srgbClr val="4F81BD"/>
+            </a:solidFill>
+            <a:prstDash val="sysDash"/>
+            <a:round/>
+            <a:headEnd len="sm" w="sm" type="none"/>
+            <a:tailEnd len="sm" w="sm" type="none"/>
+          </a:ln>
+        </p:spPr>
+        <p:txBody>
+          <a:bodyPr anchorCtr="0" anchor="ctr" bIns="45700" lIns="91425" spcFirstLastPara="1" rIns="91425" wrap="square" tIns="45700">
+            <a:noAutofit/>
+          </a:bodyPr>
+          <a:lstStyle/>
+          <a:p>
+            <a:pPr indent="0" lvl="0" marL="0" marR="0" rtl="0" algn="ctr">
+              <a:spcBef>
+                <a:spcPts val="0"/>
+              </a:spcBef>
+              <a:spcAft>
+                <a:spcPts val="0"/>
+              </a:spcAft>
+              <a:buNone/>
+            </a:pPr>
+            <a:r>
+              <a:rPr lang="ja-JP" sz="1000">
+                <a:solidFill>
+                  <a:schemeClr val="dk1"/>
+                </a:solidFill>
+                <a:latin typeface="メイリオ"/>
+                <a:ea typeface="Meiryo"/>
+                <a:cs typeface="Meiryo"/>
+                <a:sym typeface="Meiryo"/>
+              </a:rPr>
+              <a:t>LINE公式アカウント</a:t>
+            </a:r>
+            <a:endParaRPr sz="1000">
+              <a:solidFill>
+                <a:schemeClr val="dk1"/>
+              </a:solidFill>
+              <a:latin typeface="Meiryo"/>
+              <a:ea typeface="Meiryo"/>
+              <a:cs typeface="Meiryo"/>
+              <a:sym typeface="Meiryo"/>
+            </a:endParaRPr>
+          </a:p>
+        </p:txBody>
+      </p:sp>
+      <p:sp>
+        <p:nvSpPr>
+          <p:cNvPr id="50" name="Google Shape;50;p3"/>
+          <p:cNvSpPr/>
+          <p:nvPr/>
+        </p:nvSpPr>
+        <p:spPr>
+          <a:xfrm>
+            <a:off x="0" y="1890267"/>
+            <a:ext cx="9906000" cy="733579"/>
+          </a:xfrm>
+          <a:prstGeom prst="rect">
+            <a:avLst/>
+          </a:prstGeom>
+          <a:solidFill>
+            <a:srgbClr val="F2F2F2"/>
+          </a:solidFill>
+          <a:ln>
+            <a:noFill/>
+          </a:ln>
+        </p:spPr>
+        <p:txBody>
+          <a:bodyPr anchorCtr="0" anchor="ctr" bIns="45700" lIns="91425" spcFirstLastPara="1" rIns="91425" wrap="square" tIns="45700">
+            <a:noAutofit/>
+          </a:bodyPr>
+          <a:lstStyle/>
+          <a:p>
+            <a:pPr indent="0" lvl="0" marL="0" marR="0" rtl="0" algn="ctr">
+              <a:spcBef>
+                <a:spcPts val="0"/>
+              </a:spcBef>
+              <a:spcAft>
+                <a:spcPts val="0"/>
+              </a:spcAft>
+              <a:buNone/>
+            </a:pPr>
+            <a:r>
+              <a:rPr>
+                <a:latin typeface="メイリオ"/>
+              </a:rPr>
+              <a:t/>
+            </a:r>
+            <a:endParaRPr sz="1200">
+              <a:solidFill>
+                <a:schemeClr val="dk1"/>
+              </a:solidFill>
+              <a:latin typeface="Meiryo"/>
+              <a:ea typeface="Meiryo"/>
+              <a:cs typeface="Meiryo"/>
+              <a:sym typeface="Meiryo"/>
+            </a:endParaRPr>
+          </a:p>
+        </p:txBody>
+      </p:sp>
+      <p:sp>
+        <p:nvSpPr>
+          <p:cNvPr id="51" name="Google Shape;51;p3"/>
+          <p:cNvSpPr/>
+          <p:nvPr/>
+        </p:nvSpPr>
+        <p:spPr>
+          <a:xfrm>
+            <a:off x="544108" y="1961282"/>
+            <a:ext cx="8817783" cy="646331"/>
+          </a:xfrm>
+          <a:prstGeom prst="rect">
+            <a:avLst/>
+          </a:prstGeom>
+          <a:noFill/>
+          <a:ln>
+            <a:noFill/>
+          </a:ln>
+        </p:spPr>
+        <p:txBody>
+          <a:bodyPr anchorCtr="0" anchor="t" bIns="45700" lIns="91425" spcFirstLastPara="1" rIns="91425" wrap="square" tIns="45700">
+            <a:spAutoFit/>
+          </a:bodyPr>
+          <a:lstStyle/>
+          <a:p>
+            <a:pPr indent="0" lvl="0" marL="0" marR="0" rtl="0" algn="ctr">
+              <a:spcBef>
+                <a:spcPts val="0"/>
+              </a:spcBef>
+              <a:spcAft>
+                <a:spcPts val="0"/>
+              </a:spcAft>
+              <a:buNone/>
+            </a:pPr>
+            <a:r>
+              <a:rPr b="1" lang="ja-JP" sz="1200">
+                <a:solidFill>
+                  <a:schemeClr val="dk1"/>
+                </a:solidFill>
+                <a:latin typeface="メイリオ"/>
+                <a:ea typeface="Meiryo"/>
+                <a:cs typeface="Meiryo"/>
+                <a:sym typeface="Meiryo"/>
+              </a:rPr>
+              <a:t>申込みから掲載開始まで、審査・枠おさえ・入稿の3段階を経る。</a:t>
+            </a:r>
+            <a:endParaRPr b="1" sz="1200">
+              <a:solidFill>
+                <a:schemeClr val="dk1"/>
+              </a:solidFill>
+              <a:latin typeface="Meiryo"/>
+              <a:ea typeface="Meiryo"/>
+              <a:cs typeface="Meiryo"/>
+              <a:sym typeface="Meiryo"/>
+            </a:endParaRPr>
+          </a:p>
+          <a:p>
+            <a:pPr indent="0" lvl="0" marL="0" marR="0" rtl="0" algn="ctr">
+              <a:spcBef>
+                <a:spcPts val="0"/>
+              </a:spcBef>
+              <a:spcAft>
+                <a:spcPts val="0"/>
+              </a:spcAft>
+              <a:buNone/>
+            </a:pPr>
+            <a:r>
+              <a:rPr b="1" lang="ja-JP" sz="1200">
+                <a:solidFill>
+                  <a:schemeClr val="dk1"/>
+                </a:solidFill>
+                <a:latin typeface="メイリオ"/>
+                <a:ea typeface="Meiryo"/>
+                <a:cs typeface="Meiryo"/>
+                <a:sym typeface="Meiryo"/>
+              </a:rPr>
+              <a:t>配信枠は早い者勝ちのため、各締切の厳守が前提条件になる。</a:t>
+            </a:r>
+            <a:endParaRPr/>
+          </a:p>
+          <a:p>
+            <a:pPr indent="0" lvl="0" marL="0" marR="0" rtl="0" algn="ctr">
+              <a:spcBef>
+                <a:spcPts val="0"/>
+              </a:spcBef>
+              <a:spcAft>
+                <a:spcPts val="0"/>
+              </a:spcAft>
+              <a:buNone/>
+            </a:pPr>
+            <a:r>
+              <a:rPr b="1" lang="ja-JP" sz="1200">
+                <a:solidFill>
+                  <a:schemeClr val="dk1"/>
+                </a:solidFill>
+                <a:latin typeface="メイリオ"/>
+                <a:ea typeface="Meiryo"/>
+                <a:cs typeface="Meiryo"/>
+                <a:sym typeface="Meiryo"/>
+              </a:rPr>
+              <a:t>土日祝日の掲載開始は不可なので、平日での日程調整が必要。</a:t>
+            </a:r>
+            <a:endParaRPr b="1" sz="1400">
+              <a:solidFill>
+                <a:schemeClr val="dk1"/>
+              </a:solidFill>
+              <a:latin typeface="Meiryo"/>
+              <a:ea typeface="Meiryo"/>
+              <a:cs typeface="Meiryo"/>
+              <a:sym typeface="Meiryo"/>
+            </a:endParaRPr>
+          </a:p>
+        </p:txBody>
+      </p:sp>
+      <p:sp>
+        <p:nvSpPr>
+          <p:cNvPr id="52" name="Google Shape;52;p3"/>
+          <p:cNvSpPr/>
+          <p:nvPr/>
+        </p:nvSpPr>
+        <p:spPr>
+          <a:xfrm>
+            <a:off x="351381" y="2714173"/>
+            <a:ext cx="5200000" cy="338554"/>
+          </a:xfrm>
+          <a:prstGeom prst="rect">
+            <a:avLst/>
+          </a:prstGeom>
+          <a:noFill/>
+          <a:ln>
+            <a:noFill/>
+          </a:ln>
+        </p:spPr>
+        <p:txBody>
+          <a:bodyPr anchorCtr="0" anchor="t" bIns="45700" lIns="91425" spcFirstLastPara="1" rIns="91425" wrap="square" tIns="45700">
+            <a:noAutofit/>
+          </a:bodyPr>
+          <a:lstStyle/>
+          <a:p>
+            <a:pPr indent="0" lvl="0" marL="0" marR="0" rtl="0" algn="l">
+              <a:spcBef>
+                <a:spcPts val="0"/>
+              </a:spcBef>
+              <a:spcAft>
+                <a:spcPts val="0"/>
+              </a:spcAft>
+              <a:buNone/>
+            </a:pPr>
+            <a:r>
+              <a:rPr b="1" lang="ja-JP" sz="1400">
+                <a:solidFill>
+                  <a:srgbClr val="15133D"/>
+                </a:solidFill>
+                <a:latin typeface="メイリオ"/>
+                <a:ea typeface="Meiryo"/>
+                <a:cs typeface="Meiryo"/>
+                <a:sym typeface="Meiryo"/>
+              </a:rPr>
+              <a:t>■ 詳細</a:t>
+            </a:r>
+            <a:endParaRPr/>
+          </a:p>
+        </p:txBody>
+      </p:sp>
+      <p:grpSp>
+        <p:nvGrpSpPr>
+          <p:cNvPr id="53" name="Google Shape;53;p3"/>
+          <p:cNvGrpSpPr/>
+          <p:nvPr/>
+        </p:nvGrpSpPr>
+        <p:grpSpPr>
+          <a:xfrm>
+            <a:off x="8473303" y="730955"/>
+            <a:ext cx="1376241" cy="1131930"/>
+            <a:chOff x="0" y="0"/>
+            <a:chExt cx="1376241" cy="1131930"/>
+          </a:xfrm>
+        </p:grpSpPr>
+        <p:sp>
+          <p:nvSpPr>
+            <p:cNvPr id="54" name="Google Shape;54;p3"/>
+            <p:cNvSpPr/>
+            <p:nvPr/>
+          </p:nvSpPr>
+          <p:spPr>
+            <a:xfrm rot="10800000">
+              <a:off x="0" y="0"/>
+              <a:ext cx="1376241" cy="282982"/>
+            </a:xfrm>
+            <a:prstGeom prst="trapezoid">
+              <a:avLst>
+                <a:gd fmla="val 60792" name="adj"/>
+              </a:avLst>
+            </a:prstGeom>
+            <a:solidFill>
+              <a:srgbClr val="EAEDF5"/>
+            </a:solidFill>
+            <a:ln cap="flat" cmpd="sng" w="25400">
+              <a:solidFill>
+                <a:schemeClr val="dk2"/>
+              </a:solidFill>
+              <a:prstDash val="solid"/>
+              <a:round/>
+              <a:headEnd len="sm" w="sm" type="none"/>
+              <a:tailEnd len="sm" w="sm" type="none"/>
+            </a:ln>
+          </p:spPr>
+          <p:txBody>
+            <a:bodyPr anchorCtr="0" anchor="ctr" bIns="91425" lIns="91425" spcFirstLastPara="1" rIns="91425" wrap="square" tIns="91425">
+              <a:noAutofit/>
+            </a:bodyPr>
+            <a:lstStyle/>
+            <a:p>
+              <a:pPr indent="0" lvl="0" marL="0" rtl="0" algn="l">
+                <a:spcBef>
+                  <a:spcPts val="0"/>
+                </a:spcBef>
+                <a:spcAft>
+                  <a:spcPts val="0"/>
+                </a:spcAft>
+                <a:buNone/>
+              </a:pPr>
+              <a:r>
+                <a:t/>
+              </a:r>
+              <a:endParaRPr/>
+            </a:p>
+          </p:txBody>
+        </p:sp>
+        <p:sp>
+          <p:nvSpPr>
+            <p:cNvPr id="55" name="Google Shape;55;p3"/>
+            <p:cNvSpPr txBox="1"/>
+            <p:nvPr/>
+          </p:nvSpPr>
+          <p:spPr>
+            <a:xfrm>
+              <a:off x="240842" y="0"/>
+              <a:ext cx="894556" cy="282982"/>
+            </a:xfrm>
+            <a:prstGeom prst="rect">
+              <a:avLst/>
+            </a:prstGeom>
+            <a:noFill/>
+            <a:ln>
+              <a:noFill/>
+            </a:ln>
+          </p:spPr>
+          <p:txBody>
+            <a:bodyPr anchorCtr="0" anchor="ctr" bIns="10150" lIns="10150" spcFirstLastPara="1" rIns="10150" wrap="square" tIns="10150">
+              <a:noAutofit/>
+            </a:bodyPr>
+            <a:lstStyle/>
+            <a:p>
+              <a:pPr indent="0" lvl="0" marL="0" marR="0" rtl="0" algn="ctr">
+                <a:lnSpc>
+                  <a:spcPct val="90000"/>
+                </a:lnSpc>
+                <a:spcBef>
+                  <a:spcPts val="0"/>
+                </a:spcBef>
+                <a:spcAft>
+                  <a:spcPts val="0"/>
+                </a:spcAft>
+                <a:buClr>
+                  <a:srgbClr val="262626"/>
+                </a:buClr>
+                <a:buSzPts val="800"/>
+                <a:buFont typeface="Arial"/>
+                <a:buNone/>
+              </a:pPr>
+              <a:r>
+                <a:rPr b="1" lang="ja-JP" sz="800">
+                  <a:solidFill>
+                    <a:srgbClr val="262626"/>
+                  </a:solidFill>
+                  <a:latin typeface="Arial"/>
+                  <a:ea typeface="Arial"/>
+                  <a:cs typeface="Arial"/>
+                  <a:sym typeface="Arial"/>
+                </a:rPr>
+                <a:t>認知</a:t>
+              </a:r>
+              <a:endParaRPr/>
+            </a:p>
+          </p:txBody>
+        </p:sp>
+        <p:sp>
+          <p:nvSpPr>
+            <p:cNvPr id="56" name="Google Shape;56;p3"/>
+            <p:cNvSpPr/>
+            <p:nvPr/>
+          </p:nvSpPr>
+          <p:spPr>
+            <a:xfrm rot="10800000">
+              <a:off x="172030" y="282982"/>
+              <a:ext cx="1032180" cy="282982"/>
+            </a:xfrm>
+            <a:prstGeom prst="trapezoid">
+              <a:avLst>
+                <a:gd fmla="val 60792" name="adj"/>
+              </a:avLst>
+            </a:prstGeom>
+            <a:solidFill>
+              <a:schemeClr val="lt1"/>
+            </a:solidFill>
+            <a:ln cap="flat" cmpd="sng" w="25400">
+              <a:solidFill>
+                <a:schemeClr val="dk2"/>
+              </a:solidFill>
+              <a:prstDash val="solid"/>
+              <a:round/>
+              <a:headEnd len="sm" w="sm" type="none"/>
+              <a:tailEnd len="sm" w="sm" type="none"/>
+            </a:ln>
+          </p:spPr>
+          <p:txBody>
+            <a:bodyPr anchorCtr="0" anchor="ctr" bIns="91425" lIns="91425" spcFirstLastPara="1" rIns="91425" wrap="square" tIns="91425">
+              <a:noAutofit/>
+            </a:bodyPr>
+            <a:lstStyle/>
+            <a:p>
+              <a:pPr indent="0" lvl="0" marL="0" rtl="0" algn="l">
+                <a:spcBef>
+                  <a:spcPts val="0"/>
+                </a:spcBef>
+                <a:spcAft>
+                  <a:spcPts val="0"/>
+                </a:spcAft>
+                <a:buNone/>
+              </a:pPr>
+              <a:r>
+                <a:t/>
+              </a:r>
+              <a:endParaRPr/>
+            </a:p>
+          </p:txBody>
+        </p:sp>
+        <p:sp>
+          <p:nvSpPr>
+            <p:cNvPr id="57" name="Google Shape;57;p3"/>
+            <p:cNvSpPr txBox="1"/>
+            <p:nvPr/>
+          </p:nvSpPr>
+          <p:spPr>
+            <a:xfrm>
+              <a:off x="352661" y="282982"/>
+              <a:ext cx="670917" cy="282982"/>
+            </a:xfrm>
+            <a:prstGeom prst="rect">
+              <a:avLst/>
+            </a:prstGeom>
+            <a:noFill/>
+            <a:ln>
+              <a:noFill/>
+            </a:ln>
+          </p:spPr>
+          <p:txBody>
+            <a:bodyPr anchorCtr="0" anchor="ctr" bIns="10150" lIns="10150" spcFirstLastPara="1" rIns="10150" wrap="square" tIns="10150">
+              <a:noAutofit/>
+            </a:bodyPr>
+            <a:lstStyle/>
+            <a:p>
+              <a:pPr indent="0" lvl="0" marL="0" marR="0" rtl="0" algn="ctr">
+                <a:lnSpc>
+                  <a:spcPct val="90000"/>
+                </a:lnSpc>
+                <a:spcBef>
+                  <a:spcPts val="0"/>
+                </a:spcBef>
+                <a:spcAft>
+                  <a:spcPts val="0"/>
+                </a:spcAft>
+                <a:buClr>
+                  <a:srgbClr val="262626"/>
+                </a:buClr>
+                <a:buSzPts val="800"/>
+                <a:buFont typeface="Arial"/>
+                <a:buNone/>
+              </a:pPr>
+              <a:r>
+                <a:rPr b="1" lang="ja-JP" sz="800">
+                  <a:solidFill>
+                    <a:srgbClr val="262626"/>
+                  </a:solidFill>
+                  <a:latin typeface="Arial"/>
+                  <a:ea typeface="Arial"/>
+                  <a:cs typeface="Arial"/>
+                  <a:sym typeface="Arial"/>
+                </a:rPr>
+                <a:t>検討</a:t>
+              </a:r>
+              <a:endParaRPr/>
+            </a:p>
+          </p:txBody>
+        </p:sp>
+        <p:sp>
+          <p:nvSpPr>
+            <p:cNvPr id="58" name="Google Shape;58;p3"/>
+            <p:cNvSpPr/>
+            <p:nvPr/>
+          </p:nvSpPr>
+          <p:spPr>
+            <a:xfrm rot="10800000">
+              <a:off x="344060" y="565965"/>
+              <a:ext cx="688120" cy="282982"/>
+            </a:xfrm>
+            <a:prstGeom prst="trapezoid">
+              <a:avLst>
+                <a:gd fmla="val 60792" name="adj"/>
+              </a:avLst>
+            </a:prstGeom>
+            <a:solidFill>
+              <a:schemeClr val="lt1"/>
+            </a:solidFill>
+            <a:ln cap="flat" cmpd="sng" w="25400">
+              <a:solidFill>
+                <a:schemeClr val="dk2"/>
+              </a:solidFill>
+              <a:prstDash val="solid"/>
+              <a:round/>
+              <a:headEnd len="sm" w="sm" type="none"/>
+              <a:tailEnd len="sm" w="sm" type="none"/>
+            </a:ln>
+          </p:spPr>
+          <p:txBody>
+            <a:bodyPr anchorCtr="0" anchor="ctr" bIns="91425" lIns="91425" spcFirstLastPara="1" rIns="91425" wrap="square" tIns="91425">
+              <a:noAutofit/>
+            </a:bodyPr>
+            <a:lstStyle/>
+            <a:p>
+              <a:pPr indent="0" lvl="0" marL="0" rtl="0" algn="l">
+                <a:spcBef>
+                  <a:spcPts val="0"/>
+                </a:spcBef>
+                <a:spcAft>
+                  <a:spcPts val="0"/>
+                </a:spcAft>
+                <a:buNone/>
+              </a:pPr>
+              <a:r>
+                <a:t/>
+              </a:r>
+              <a:endParaRPr/>
+            </a:p>
+          </p:txBody>
+        </p:sp>
+        <p:sp>
+          <p:nvSpPr>
+            <p:cNvPr id="59" name="Google Shape;59;p3"/>
+            <p:cNvSpPr txBox="1"/>
+            <p:nvPr/>
+          </p:nvSpPr>
+          <p:spPr>
+            <a:xfrm>
+              <a:off x="464481" y="565965"/>
+              <a:ext cx="447278" cy="282982"/>
+            </a:xfrm>
+            <a:prstGeom prst="rect">
+              <a:avLst/>
+            </a:prstGeom>
+            <a:noFill/>
+            <a:ln>
+              <a:noFill/>
+            </a:ln>
+          </p:spPr>
+          <p:txBody>
+            <a:bodyPr anchorCtr="0" anchor="ctr" bIns="10150" lIns="10150" spcFirstLastPara="1" rIns="10150" wrap="square" tIns="10150">
+              <a:noAutofit/>
+            </a:bodyPr>
+            <a:lstStyle/>
+            <a:p>
+              <a:pPr indent="0" lvl="0" marL="0" marR="0" rtl="0" algn="ctr">
+                <a:lnSpc>
+                  <a:spcPct val="90000"/>
+                </a:lnSpc>
+                <a:spcBef>
+                  <a:spcPts val="0"/>
+                </a:spcBef>
+                <a:spcAft>
+                  <a:spcPts val="0"/>
+                </a:spcAft>
+                <a:buClr>
+                  <a:srgbClr val="262626"/>
+                </a:buClr>
+                <a:buSzPts val="800"/>
+                <a:buFont typeface="Arial"/>
+                <a:buNone/>
+              </a:pPr>
+              <a:r>
+                <a:rPr b="1" lang="ja-JP" sz="800">
+                  <a:solidFill>
+                    <a:srgbClr val="262626"/>
+                  </a:solidFill>
+                  <a:latin typeface="Arial"/>
+                  <a:ea typeface="Arial"/>
+                  <a:cs typeface="Arial"/>
+                  <a:sym typeface="Arial"/>
+                </a:rPr>
+                <a:t>獲得</a:t>
+              </a:r>
+              <a:endParaRPr/>
+            </a:p>
+          </p:txBody>
+        </p:sp>
+        <p:sp>
+          <p:nvSpPr>
+            <p:cNvPr id="60" name="Google Shape;60;p3"/>
+            <p:cNvSpPr/>
+            <p:nvPr/>
+          </p:nvSpPr>
+          <p:spPr>
+            <a:xfrm rot="10800000">
+              <a:off x="516090" y="848948"/>
+              <a:ext cx="344060" cy="282982"/>
+            </a:xfrm>
+            <a:prstGeom prst="trapezoid">
+              <a:avLst>
+                <a:gd fmla="val 60792" name="adj"/>
+              </a:avLst>
+            </a:prstGeom>
+            <a:noFill/>
+            <a:ln cap="flat" cmpd="sng" w="25400">
+              <a:solidFill>
+                <a:schemeClr val="dk2"/>
+              </a:solidFill>
+              <a:prstDash val="solid"/>
+              <a:round/>
+              <a:headEnd len="sm" w="sm" type="none"/>
+              <a:tailEnd len="sm" w="sm" type="none"/>
+            </a:ln>
+          </p:spPr>
+          <p:txBody>
+            <a:bodyPr anchorCtr="0" anchor="ctr" bIns="91425" lIns="91425" spcFirstLastPara="1" rIns="91425" wrap="square" tIns="91425">
+              <a:noAutofit/>
+            </a:bodyPr>
+            <a:lstStyle/>
+            <a:p>
+              <a:pPr indent="0" lvl="0" marL="0" rtl="0" algn="l">
+                <a:spcBef>
+                  <a:spcPts val="0"/>
+                </a:spcBef>
+                <a:spcAft>
+                  <a:spcPts val="0"/>
+                </a:spcAft>
+                <a:buNone/>
+              </a:pPr>
+              <a:r>
+                <a:t/>
+              </a:r>
+              <a:endParaRPr/>
+            </a:p>
+          </p:txBody>
+        </p:sp>
+        <p:sp>
+          <p:nvSpPr>
+            <p:cNvPr id="61" name="Google Shape;61;p3"/>
+            <p:cNvSpPr txBox="1"/>
+            <p:nvPr/>
+          </p:nvSpPr>
+          <p:spPr>
+            <a:xfrm>
+              <a:off x="516090" y="848948"/>
+              <a:ext cx="344060" cy="282982"/>
+            </a:xfrm>
+            <a:prstGeom prst="rect">
+              <a:avLst/>
+            </a:prstGeom>
+            <a:noFill/>
+            <a:ln>
+              <a:noFill/>
+            </a:ln>
+          </p:spPr>
+          <p:txBody>
+            <a:bodyPr anchorCtr="0" anchor="ctr" bIns="10150" lIns="10150" spcFirstLastPara="1" rIns="10150" wrap="square" tIns="10150">
+              <a:noAutofit/>
+            </a:bodyPr>
+            <a:lstStyle/>
+            <a:p>
+              <a:pPr indent="0" lvl="0" marL="0" marR="0" rtl="0" algn="ctr">
+                <a:lnSpc>
+                  <a:spcPct val="90000"/>
+                </a:lnSpc>
+                <a:spcBef>
+                  <a:spcPts val="0"/>
+                </a:spcBef>
+                <a:spcAft>
+                  <a:spcPts val="0"/>
+                </a:spcAft>
+                <a:buClr>
+                  <a:srgbClr val="262626"/>
+                </a:buClr>
+                <a:buSzPts val="800"/>
+                <a:buFont typeface="Arial"/>
+                <a:buNone/>
+              </a:pPr>
+              <a:r>
+                <a:rPr b="1" lang="ja-JP" sz="800">
+                  <a:solidFill>
+                    <a:srgbClr val="262626"/>
+                  </a:solidFill>
+                  <a:latin typeface="Arial"/>
+                  <a:ea typeface="Arial"/>
+                  <a:cs typeface="Arial"/>
+                  <a:sym typeface="Arial"/>
+                </a:rPr>
+                <a:t>伸長</a:t>
+              </a:r>
+              <a:endParaRPr/>
+            </a:p>
+          </p:txBody>
+        </p:sp>
+      </p:grpSp>
+      <p:pic>
+        <p:nvPicPr>
+          <p:cNvPr descr="LINE公式アカウントのロゴの使用方法とは？種類やダウンロード方法、利用時の注意点を紹介 | Mico（ミコ）" id="62" name="Google Shape;62;p3"/>
+          <p:cNvPicPr preferRelativeResize="0"/>
+          <p:nvPr/>
+        </p:nvPicPr>
+        <p:blipFill rotWithShape="1">
+          <a:blip r:embed="rId2">
+            <a:alphaModFix/>
+          </a:blip>
+          <a:srcRect b="0" l="0" r="0" t="0"/>
+          <a:stretch/>
+        </p:blipFill>
+        <p:spPr>
+          <a:xfrm>
+            <a:off x="351381" y="1234746"/>
+            <a:ext cx="656177" cy="655521"/>
+          </a:xfrm>
+          <a:prstGeom prst="rect">
+            <a:avLst/>
+          </a:prstGeom>
+          <a:noFill/>
+          <a:ln>
+            <a:noFill/>
+          </a:ln>
+        </p:spPr>
+      </p:pic>
+      <p:sp>
+        <p:nvSpPr>
+          <p:cNvPr id="63" name="Rectangle 62"/>
+          <p:cNvSpPr/>
+          <p:nvPr/>
+        </p:nvSpPr>
+        <p:spPr>
+          <a:xfrm>
+            <a:off x="544108" y="3068960"/>
+            <a:ext cx="2091690" cy="365760"/>
+          </a:xfrm>
+          <a:prstGeom prst="rect">
+            <a:avLst/>
+          </a:prstGeom>
+          <a:solidFill>
+            <a:srgbClr val="15133D"/>
+          </a:solidFill>
+          <a:ln>
+            <a:noFill/>
+          </a:ln>
+          <a:effectLst/>
+        </p:spPr>
+        <p:style>
+          <a:lnRef idx="1">
+            <a:schemeClr val="accent1"/>
+          </a:lnRef>
+          <a:fillRef idx="3">
+            <a:schemeClr val="accent1"/>
+          </a:fillRef>
+          <a:effectRef idx="2">
+            <a:schemeClr val="accent1"/>
+          </a:effectRef>
+          <a:fontRef idx="minor">
+            <a:schemeClr val="lt1"/>
+          </a:fontRef>
+        </p:style>
+        <p:txBody>
+          <a:bodyPr rtlCol="0" anchor="ctr" wrap="square" rIns="45720"/>
+          <a:lstStyle/>
+          <a:p>
+            <a:pPr algn="ctr"/>
+            <a:r>
+              <a:rPr sz="1300" b="1">
+                <a:solidFill>
+                  <a:srgbClr val="FFFFFF"/>
+                </a:solidFill>
+                <a:latin typeface="メイリオ"/>
+              </a:rPr>
+              <a:t>30営業日前</a:t>
+            </a:r>
+          </a:p>
+        </p:txBody>
+      </p:sp>
+      <p:sp>
+        <p:nvSpPr>
+          <p:cNvPr id="64" name="Rectangle 63"/>
+          <p:cNvSpPr/>
+          <p:nvPr/>
+        </p:nvSpPr>
+        <p:spPr>
+          <a:xfrm>
+            <a:off x="544108" y="3434720"/>
+            <a:ext cx="2091690" cy="1005840"/>
+          </a:xfrm>
+          <a:prstGeom prst="rect">
+            <a:avLst/>
+          </a:prstGeom>
+          <a:solidFill>
+            <a:srgbClr val="EAF0FA"/>
+          </a:solidFill>
+          <a:ln w="12700">
+            <a:solidFill>
+              <a:srgbClr val="3467B2"/>
+            </a:solidFill>
+          </a:ln>
+          <a:effectLst/>
+        </p:spPr>
+        <p:style>
+          <a:lnRef idx="1">
+            <a:schemeClr val="accent1"/>
+          </a:lnRef>
+          <a:fillRef idx="3">
+            <a:schemeClr val="accent1"/>
+          </a:fillRef>
+          <a:effectRef idx="2">
+            <a:schemeClr val="accent1"/>
+          </a:effectRef>
+          <a:fontRef idx="minor">
+            <a:schemeClr val="lt1"/>
+          </a:fontRef>
+        </p:style>
+        <p:txBody>
+          <a:bodyPr rtlCol="0" anchor="ctr" wrap="square" lIns="182880" rIns="137160" tIns="54864" bIns="54864"/>
+          <a:lstStyle/>
+          <a:p>
+            <a:pPr algn="ctr">
+              <a:lnSpc>
+                <a:spcPct val="110000"/>
+              </a:lnSpc>
+            </a:pPr>
+            <a:r>
+              <a:rPr sz="1050">
+                <a:solidFill>
+                  <a:srgbClr val="333333"/>
+                </a:solidFill>
+                <a:latin typeface="メイリオ"/>
+              </a:rPr>
+              <a:t>企業・商材審査／企画審査</a:t>
+            </a:r>
+          </a:p>
+        </p:txBody>
+      </p:sp>
+      <p:sp>
+        <p:nvSpPr>
+          <p:cNvPr id="65" name="TextBox 64"/>
+          <p:cNvSpPr txBox="1"/>
+          <p:nvPr/>
+        </p:nvSpPr>
+        <p:spPr>
+          <a:xfrm>
+            <a:off x="2635798" y="3068960"/>
+            <a:ext cx="320040" cy="1371600"/>
+          </a:xfrm>
+          <a:prstGeom prst="rect">
+            <a:avLst/>
+          </a:prstGeom>
+          <a:noFill/>
+        </p:spPr>
+        <p:txBody>
+          <a:bodyPr wrap="none" anchor="ctr">
+            <a:spAutoFit/>
+          </a:bodyPr>
+          <a:lstStyle/>
+          <a:p>
+            <a:pPr algn="ctr"/>
+            <a:r>
+              <a:rPr sz="1600" b="1">
+                <a:solidFill>
+                  <a:srgbClr val="3467B2"/>
+                </a:solidFill>
+                <a:latin typeface="メイリオ"/>
+              </a:rPr>
+              <a:t>▶</a:t>
+            </a:r>
+          </a:p>
+        </p:txBody>
+      </p:sp>
+      <p:sp>
+        <p:nvSpPr>
+          <p:cNvPr id="66" name="Rectangle 65"/>
+          <p:cNvSpPr/>
+          <p:nvPr/>
+        </p:nvSpPr>
+        <p:spPr>
+          <a:xfrm>
+            <a:off x="2955838" y="3068960"/>
+            <a:ext cx="2091690" cy="365760"/>
+          </a:xfrm>
+          <a:prstGeom prst="rect">
+            <a:avLst/>
+          </a:prstGeom>
+          <a:solidFill>
+            <a:srgbClr val="15133D"/>
+          </a:solidFill>
+          <a:ln>
+            <a:noFill/>
+          </a:ln>
+          <a:effectLst/>
+        </p:spPr>
+        <p:style>
+          <a:lnRef idx="1">
+            <a:schemeClr val="accent1"/>
+          </a:lnRef>
+          <a:fillRef idx="3">
+            <a:schemeClr val="accent1"/>
+          </a:fillRef>
+          <a:effectRef idx="2">
+            <a:schemeClr val="accent1"/>
+          </a:effectRef>
+          <a:fontRef idx="minor">
+            <a:schemeClr val="lt1"/>
+          </a:fontRef>
+        </p:style>
+        <p:txBody>
+          <a:bodyPr rtlCol="0" anchor="ctr" wrap="square" rIns="45720"/>
+          <a:lstStyle/>
+          <a:p>
+            <a:pPr algn="ctr"/>
+            <a:r>
+              <a:rPr sz="1300" b="1">
+                <a:solidFill>
+                  <a:srgbClr val="FFFFFF"/>
+                </a:solidFill>
+                <a:latin typeface="メイリオ"/>
+              </a:rPr>
+              <a:t>25営業日前 17時</a:t>
+            </a:r>
+          </a:p>
+        </p:txBody>
+      </p:sp>
+      <p:sp>
+        <p:nvSpPr>
+          <p:cNvPr id="67" name="Rectangle 66"/>
+          <p:cNvSpPr/>
+          <p:nvPr/>
+        </p:nvSpPr>
+        <p:spPr>
+          <a:xfrm>
+            <a:off x="2955838" y="3434720"/>
+            <a:ext cx="2091690" cy="1005840"/>
+          </a:xfrm>
+          <a:prstGeom prst="rect">
+            <a:avLst/>
+          </a:prstGeom>
+          <a:solidFill>
+            <a:srgbClr val="EAF0FA"/>
+          </a:solidFill>
+          <a:ln w="12700">
+            <a:solidFill>
+              <a:srgbClr val="3467B2"/>
+            </a:solidFill>
+          </a:ln>
+          <a:effectLst/>
+        </p:spPr>
+        <p:style>
+          <a:lnRef idx="1">
+            <a:schemeClr val="accent1"/>
+          </a:lnRef>
+          <a:fillRef idx="3">
+            <a:schemeClr val="accent1"/>
+          </a:fillRef>
+          <a:effectRef idx="2">
+            <a:schemeClr val="accent1"/>
+          </a:effectRef>
+          <a:fontRef idx="minor">
+            <a:schemeClr val="lt1"/>
+          </a:fontRef>
+        </p:style>
+        <p:txBody>
+          <a:bodyPr rtlCol="0" anchor="ctr" wrap="square" lIns="182880" rIns="137160" tIns="54864" bIns="54864"/>
+          <a:lstStyle/>
+          <a:p>
+            <a:pPr algn="ctr">
+              <a:lnSpc>
+                <a:spcPct val="110000"/>
+              </a:lnSpc>
+            </a:pPr>
+            <a:r>
+              <a:rPr sz="1050">
+                <a:solidFill>
+                  <a:srgbClr val="333333"/>
+                </a:solidFill>
+                <a:latin typeface="メイリオ"/>
+              </a:rPr>
+              <a:t>配信枠おさえ・申込み</a:t>
+            </a:r>
+          </a:p>
+        </p:txBody>
+      </p:sp>
+      <p:sp>
+        <p:nvSpPr>
+          <p:cNvPr id="68" name="TextBox 67"/>
+          <p:cNvSpPr txBox="1"/>
+          <p:nvPr/>
+        </p:nvSpPr>
+        <p:spPr>
+          <a:xfrm>
+            <a:off x="5047528" y="3068960"/>
+            <a:ext cx="320040" cy="1371600"/>
+          </a:xfrm>
+          <a:prstGeom prst="rect">
+            <a:avLst/>
+          </a:prstGeom>
+          <a:noFill/>
+        </p:spPr>
+        <p:txBody>
+          <a:bodyPr wrap="none" anchor="ctr">
+            <a:spAutoFit/>
+          </a:bodyPr>
+          <a:lstStyle/>
+          <a:p>
+            <a:pPr algn="ctr"/>
+            <a:r>
+              <a:rPr sz="1600" b="1">
+                <a:solidFill>
+                  <a:srgbClr val="3467B2"/>
+                </a:solidFill>
+                <a:latin typeface="メイリオ"/>
+              </a:rPr>
+              <a:t>▶</a:t>
+            </a:r>
+          </a:p>
+        </p:txBody>
+      </p:sp>
+      <p:sp>
+        <p:nvSpPr>
+          <p:cNvPr id="69" name="Rectangle 68"/>
+          <p:cNvSpPr/>
+          <p:nvPr/>
+        </p:nvSpPr>
+        <p:spPr>
+          <a:xfrm>
+            <a:off x="5367568" y="3068960"/>
+            <a:ext cx="2091690" cy="365760"/>
+          </a:xfrm>
+          <a:prstGeom prst="rect">
+            <a:avLst/>
+          </a:prstGeom>
+          <a:solidFill>
+            <a:srgbClr val="15133D"/>
+          </a:solidFill>
+          <a:ln>
+            <a:noFill/>
+          </a:ln>
+          <a:effectLst/>
+        </p:spPr>
+        <p:style>
+          <a:lnRef idx="1">
+            <a:schemeClr val="accent1"/>
+          </a:lnRef>
+          <a:fillRef idx="3">
+            <a:schemeClr val="accent1"/>
+          </a:fillRef>
+          <a:effectRef idx="2">
+            <a:schemeClr val="accent1"/>
+          </a:effectRef>
+          <a:fontRef idx="minor">
+            <a:schemeClr val="lt1"/>
+          </a:fontRef>
+        </p:style>
+        <p:txBody>
+          <a:bodyPr rtlCol="0" anchor="ctr" wrap="square" rIns="45720"/>
+          <a:lstStyle/>
+          <a:p>
+            <a:pPr algn="ctr"/>
+            <a:r>
+              <a:rPr sz="1300" b="1">
+                <a:solidFill>
+                  <a:srgbClr val="FFFFFF"/>
+                </a:solidFill>
+                <a:latin typeface="メイリオ"/>
+              </a:rPr>
+              <a:t>20営業日前 17時</a:t>
+            </a:r>
+          </a:p>
+        </p:txBody>
+      </p:sp>
+      <p:sp>
+        <p:nvSpPr>
+          <p:cNvPr id="70" name="Rectangle 69"/>
+          <p:cNvSpPr/>
+          <p:nvPr/>
+        </p:nvSpPr>
+        <p:spPr>
+          <a:xfrm>
+            <a:off x="5367568" y="3434720"/>
+            <a:ext cx="2091690" cy="1005840"/>
+          </a:xfrm>
+          <a:prstGeom prst="rect">
+            <a:avLst/>
+          </a:prstGeom>
+          <a:solidFill>
+            <a:srgbClr val="EAF0FA"/>
+          </a:solidFill>
+          <a:ln w="12700">
+            <a:solidFill>
+              <a:srgbClr val="3467B2"/>
+            </a:solidFill>
+          </a:ln>
+          <a:effectLst/>
+        </p:spPr>
+        <p:style>
+          <a:lnRef idx="1">
+            <a:schemeClr val="accent1"/>
+          </a:lnRef>
+          <a:fillRef idx="3">
+            <a:schemeClr val="accent1"/>
+          </a:fillRef>
+          <a:effectRef idx="2">
+            <a:schemeClr val="accent1"/>
+          </a:effectRef>
+          <a:fontRef idx="minor">
+            <a:schemeClr val="lt1"/>
+          </a:fontRef>
+        </p:style>
+        <p:txBody>
+          <a:bodyPr rtlCol="0" anchor="ctr" wrap="square" lIns="182880" rIns="137160" tIns="54864" bIns="54864"/>
+          <a:lstStyle/>
+          <a:p>
+            <a:pPr algn="ctr">
+              <a:lnSpc>
+                <a:spcPct val="110000"/>
+              </a:lnSpc>
+            </a:pPr>
+            <a:r>
+              <a:rPr sz="1050">
+                <a:solidFill>
+                  <a:srgbClr val="333333"/>
+                </a:solidFill>
+                <a:latin typeface="メイリオ"/>
+              </a:rPr>
+              <a:t>入稿物の提出</a:t>
+            </a:r>
+          </a:p>
+        </p:txBody>
+      </p:sp>
+      <p:sp>
+        <p:nvSpPr>
+          <p:cNvPr id="71" name="TextBox 70"/>
+          <p:cNvSpPr txBox="1"/>
+          <p:nvPr/>
+        </p:nvSpPr>
+        <p:spPr>
+          <a:xfrm>
+            <a:off x="7459258" y="3068960"/>
+            <a:ext cx="320040" cy="1371600"/>
+          </a:xfrm>
+          <a:prstGeom prst="rect">
+            <a:avLst/>
+          </a:prstGeom>
+          <a:noFill/>
+        </p:spPr>
+        <p:txBody>
+          <a:bodyPr wrap="none" anchor="ctr">
+            <a:spAutoFit/>
+          </a:bodyPr>
+          <a:lstStyle/>
+          <a:p>
+            <a:pPr algn="ctr"/>
+            <a:r>
+              <a:rPr sz="1600" b="1">
+                <a:solidFill>
+                  <a:srgbClr val="3467B2"/>
+                </a:solidFill>
+                <a:latin typeface="メイリオ"/>
+              </a:rPr>
+              <a:t>▶</a:t>
+            </a:r>
+          </a:p>
+        </p:txBody>
+      </p:sp>
+      <p:sp>
+        <p:nvSpPr>
+          <p:cNvPr id="72" name="Rectangle 71"/>
+          <p:cNvSpPr/>
+          <p:nvPr/>
+        </p:nvSpPr>
+        <p:spPr>
+          <a:xfrm>
+            <a:off x="7779298" y="3068960"/>
+            <a:ext cx="2091690" cy="365760"/>
+          </a:xfrm>
+          <a:prstGeom prst="rect">
+            <a:avLst/>
+          </a:prstGeom>
+          <a:solidFill>
+            <a:srgbClr val="15133D"/>
+          </a:solidFill>
+          <a:ln>
+            <a:noFill/>
+          </a:ln>
+          <a:effectLst/>
+        </p:spPr>
+        <p:style>
+          <a:lnRef idx="1">
+            <a:schemeClr val="accent1"/>
+          </a:lnRef>
+          <a:fillRef idx="3">
+            <a:schemeClr val="accent1"/>
+          </a:fillRef>
+          <a:effectRef idx="2">
+            <a:schemeClr val="accent1"/>
+          </a:effectRef>
+          <a:fontRef idx="minor">
+            <a:schemeClr val="lt1"/>
+          </a:fontRef>
+        </p:style>
+        <p:txBody>
+          <a:bodyPr rtlCol="0" anchor="ctr" wrap="square" rIns="45720"/>
+          <a:lstStyle/>
+          <a:p>
+            <a:pPr algn="ctr"/>
+            <a:r>
+              <a:rPr sz="1300" b="1">
+                <a:solidFill>
+                  <a:srgbClr val="FFFFFF"/>
+                </a:solidFill>
+                <a:latin typeface="メイリオ"/>
+              </a:rPr>
+              <a:t>開始日</a:t>
+            </a:r>
+          </a:p>
+        </p:txBody>
+      </p:sp>
+      <p:sp>
+        <p:nvSpPr>
+          <p:cNvPr id="73" name="Rectangle 72"/>
+          <p:cNvSpPr/>
+          <p:nvPr/>
+        </p:nvSpPr>
+        <p:spPr>
+          <a:xfrm>
+            <a:off x="7779298" y="3434720"/>
+            <a:ext cx="2091690" cy="1005840"/>
+          </a:xfrm>
+          <a:prstGeom prst="rect">
+            <a:avLst/>
+          </a:prstGeom>
+          <a:solidFill>
+            <a:srgbClr val="EAF0FA"/>
+          </a:solidFill>
+          <a:ln w="12700">
+            <a:solidFill>
+              <a:srgbClr val="3467B2"/>
+            </a:solidFill>
+          </a:ln>
+          <a:effectLst/>
+        </p:spPr>
+        <p:style>
+          <a:lnRef idx="1">
+            <a:schemeClr val="accent1"/>
+          </a:lnRef>
+          <a:fillRef idx="3">
+            <a:schemeClr val="accent1"/>
+          </a:fillRef>
+          <a:effectRef idx="2">
+            <a:schemeClr val="accent1"/>
+          </a:effectRef>
+          <a:fontRef idx="minor">
+            <a:schemeClr val="lt1"/>
+          </a:fontRef>
+        </p:style>
+        <p:txBody>
+          <a:bodyPr rtlCol="0" anchor="ctr" wrap="square" lIns="182880" rIns="137160" tIns="54864" bIns="54864"/>
+          <a:lstStyle/>
+          <a:p>
+            <a:pPr algn="ctr">
+              <a:lnSpc>
+                <a:spcPct val="110000"/>
+              </a:lnSpc>
+            </a:pPr>
+            <a:r>
+              <a:rPr sz="1050">
+                <a:solidFill>
+                  <a:srgbClr val="333333"/>
+                </a:solidFill>
+                <a:latin typeface="メイリオ"/>
+              </a:rPr>
+              <a:t>掲載開始（土日祝日不可）</a:t>
+            </a:r>
+          </a:p>
+        </p:txBody>
+      </p:sp>
+      <p:sp>
+        <p:nvSpPr>
+          <p:cNvPr id="74" name="Rounded Rectangle 73"/>
+          <p:cNvSpPr/>
+          <p:nvPr/>
+        </p:nvSpPr>
+        <p:spPr>
+          <a:xfrm>
+            <a:off x="544108" y="4669160"/>
+            <a:ext cx="9326880" cy="914400"/>
+          </a:xfrm>
+          <a:prstGeom prst="roundRect">
+            <a:avLst>
+              <a:gd name="adj" fmla="val 6000"/>
+            </a:avLst>
+          </a:prstGeom>
+          <a:solidFill>
+            <a:srgbClr val="EAF0FA"/>
+          </a:solidFill>
+          <a:ln w="12700">
+            <a:solidFill>
+              <a:srgbClr val="3467B2"/>
+            </a:solidFill>
+          </a:ln>
+          <a:effectLst/>
+        </p:spPr>
+        <p:style>
+          <a:lnRef idx="1">
+            <a:schemeClr val="accent1"/>
+          </a:lnRef>
+          <a:fillRef idx="3">
+            <a:schemeClr val="accent1"/>
+          </a:fillRef>
+          <a:effectRef idx="2">
+            <a:schemeClr val="accent1"/>
+          </a:effectRef>
+          <a:fontRef idx="minor">
+            <a:schemeClr val="lt1"/>
+          </a:fontRef>
+        </p:style>
+        <p:txBody>
+          <a:bodyPr rtlCol="0" anchor="ctr" wrap="square" lIns="228600" rIns="182880"/>
+          <a:lstStyle/>
+          <a:p>
+            <a:pPr algn="l"/>
+            <a:r>
+              <a:rPr sz="1700" b="1">
+                <a:solidFill>
+                  <a:srgbClr val="15133D"/>
+                </a:solidFill>
+                <a:latin typeface="メイリオ"/>
+              </a:rPr>
+              <a:t>早めの申込みが必須</a:t>
+            </a:r>
+          </a:p>
+          <a:p>
+            <a:pPr algn="l">
+              <a:lnSpc>
+                <a:spcPct val="115000"/>
+              </a:lnSpc>
+              <a:spcBef>
+                <a:spcPts val="600"/>
+              </a:spcBef>
+            </a:pPr>
+            <a:r>
+              <a:rPr sz="1100">
+                <a:solidFill>
+                  <a:srgbClr val="333333"/>
+                </a:solidFill>
+                <a:latin typeface="メイリオ"/>
+              </a:rPr>
+              <a:t>期間・条件限定のキャンペーンのため、早めの提案・申込み誘導がカギ。配信枠は先着で埋まるため、審査期間も見込んだ逆算スケジュールを組む。</a:t>
+            </a:r>
+          </a:p>
+        </p:txBody>
+      </p:sp>
+    </p:spTree>
+  </p:cSld>
+  <p:clrMapOvr>
+    <a:masterClrMapping/>
+  </p:clrMapOvr>
+</p:sld>
+</file>
+
+<file path=ppt/slides/slide11.xml><?xml version="1.0" encoding="utf-8"?>
+<p:sld xmlns:a="http://schemas.openxmlformats.org/drawingml/2006/main" xmlns:p="http://schemas.openxmlformats.org/presentationml/2006/main" xmlns:r="http://schemas.openxmlformats.org/officeDocument/2006/relationships">
+  <p:cSld>
+    <p:spTree>
+      <p:nvGrpSpPr>
+        <p:cNvPr id="1" name=""/>
+        <p:cNvGrpSpPr/>
+        <p:nvPr/>
+      </p:nvGrpSpPr>
+      <p:grpSpPr/>
+      <p:sp>
+        <p:nvSpPr>
+          <p:cNvPr id="40" name="Google Shape;40;p3"/>
+          <p:cNvSpPr/>
+          <p:nvPr/>
+        </p:nvSpPr>
+        <p:spPr>
+          <a:xfrm>
+            <a:off x="292801" y="730955"/>
+            <a:ext cx="1296144" cy="435690"/>
+          </a:xfrm>
+          <a:prstGeom prst="rect">
+            <a:avLst/>
+          </a:prstGeom>
+          <a:solidFill>
+            <a:schemeClr val="dk2"/>
+          </a:solidFill>
+          <a:ln cap="flat" cmpd="sng" w="9525">
+            <a:solidFill>
+              <a:srgbClr val="4A7DBA"/>
+            </a:solidFill>
+            <a:prstDash val="solid"/>
+            <a:round/>
+            <a:headEnd len="sm" w="sm" type="none"/>
+            <a:tailEnd len="sm" w="sm" type="none"/>
+          </a:ln>
+        </p:spPr>
+        <p:txBody>
+          <a:bodyPr anchorCtr="0" anchor="ctr" bIns="45700" lIns="91425" spcFirstLastPara="1" rIns="91425" wrap="square" tIns="45700">
+            <a:noAutofit/>
+          </a:bodyPr>
+          <a:lstStyle/>
+          <a:p>
+            <a:pPr indent="0" lvl="0" marL="0" marR="0" rtl="0" algn="ctr">
+              <a:spcBef>
+                <a:spcPts val="0"/>
+              </a:spcBef>
+              <a:spcAft>
+                <a:spcPts val="0"/>
+              </a:spcAft>
+              <a:buNone/>
+            </a:pPr>
+            <a:r>
+              <a:rPr b="0" i="0" lang="ja-JP" sz="1800" u="none" cap="none" strike="noStrike">
+                <a:solidFill>
+                  <a:schemeClr val="lt1"/>
+                </a:solidFill>
+                <a:latin typeface="メイリオ"/>
+                <a:ea typeface="Meiryo"/>
+                <a:cs typeface="Meiryo"/>
+                <a:sym typeface="Meiryo"/>
+              </a:rPr>
+              <a:t>対象業界</a:t>
+            </a:r>
+            <a:endParaRPr/>
+          </a:p>
+        </p:txBody>
+      </p:sp>
+      <p:sp>
+        <p:nvSpPr>
+          <p:cNvPr id="41" name="Google Shape;41;p3"/>
+          <p:cNvSpPr/>
+          <p:nvPr/>
+        </p:nvSpPr>
+        <p:spPr>
+          <a:xfrm>
+            <a:off x="7560840" y="730955"/>
+            <a:ext cx="829618" cy="435690"/>
+          </a:xfrm>
+          <a:prstGeom prst="rect">
+            <a:avLst/>
+          </a:prstGeom>
+          <a:solidFill>
+            <a:schemeClr val="bg1"/>
+          </a:solidFill>
+          <a:ln cap="flat" cmpd="sng" w="9525">
+            <a:solidFill>
+              <a:srgbClr val="4F81BD"/>
+            </a:solidFill>
+            <a:prstDash val="sysDash"/>
+            <a:round/>
+            <a:headEnd len="sm" w="sm" type="none"/>
+            <a:tailEnd len="sm" w="sm" type="none"/>
+          </a:ln>
+        </p:spPr>
+        <p:txBody>
+          <a:bodyPr anchorCtr="0" anchor="ctr" bIns="45700" lIns="91425" spcFirstLastPara="1" rIns="91425" wrap="square" tIns="45700">
+            <a:noAutofit/>
+          </a:bodyPr>
+          <a:lstStyle/>
+          <a:p>
+            <a:pPr indent="0" lvl="0" marL="0" marR="0" rtl="0" algn="ctr">
+              <a:spcBef>
+                <a:spcPts val="0"/>
+              </a:spcBef>
+              <a:spcAft>
+                <a:spcPts val="0"/>
+              </a:spcAft>
+              <a:buNone/>
+            </a:pPr>
+            <a:r>
+              <a:rPr b="0" i="0" lang="ja-JP" sz="1200" u="none" cap="none" strike="noStrike">
+                <a:solidFill>
+                  <a:schemeClr val="dk1"/>
+                </a:solidFill>
+                <a:latin typeface="メイリオ"/>
+                <a:ea typeface="Meiryo"/>
+                <a:cs typeface="Meiryo"/>
+                <a:sym typeface="Meiryo"/>
+              </a:rPr>
+              <a:t>その他</a:t>
+            </a:r>
+            <a:endParaRPr b="0" i="0" sz="1200" u="none" cap="none" strike="noStrike">
+              <a:solidFill>
+                <a:schemeClr val="dk1"/>
+              </a:solidFill>
+              <a:latin typeface="Meiryo"/>
+              <a:ea typeface="Meiryo"/>
+              <a:cs typeface="Meiryo"/>
+              <a:sym typeface="Meiryo"/>
+            </a:endParaRPr>
+          </a:p>
+        </p:txBody>
+      </p:sp>
+      <p:sp>
+        <p:nvSpPr>
+          <p:cNvPr id="42" name="Google Shape;42;p3"/>
+          <p:cNvSpPr/>
+          <p:nvPr/>
+        </p:nvSpPr>
+        <p:spPr>
+          <a:xfrm>
+            <a:off x="6679050" y="730955"/>
+            <a:ext cx="829618" cy="435690"/>
+          </a:xfrm>
+          <a:prstGeom prst="rect">
+            <a:avLst/>
+          </a:prstGeom>
+          <a:solidFill>
+            <a:schemeClr val="tx2"/>
+          </a:solidFill>
+          <a:ln cap="flat" cmpd="sng" w="9525">
+            <a:solidFill>
+              <a:srgbClr val="4F81BD"/>
+            </a:solidFill>
+            <a:prstDash val="solid"/>
+            <a:round/>
+            <a:headEnd len="sm" w="sm" type="none"/>
+            <a:tailEnd len="sm" w="sm" type="none"/>
+          </a:ln>
+        </p:spPr>
+        <p:txBody>
+          <a:bodyPr anchorCtr="0" anchor="ctr" bIns="45700" lIns="91425" spcFirstLastPara="1" rIns="91425" wrap="square" tIns="45700">
+            <a:noAutofit/>
+          </a:bodyPr>
+          <a:lstStyle/>
+          <a:p>
+            <a:pPr indent="0" lvl="0" marL="0" marR="0" rtl="0" algn="ctr">
+              <a:spcBef>
+                <a:spcPts val="0"/>
+              </a:spcBef>
+              <a:spcAft>
+                <a:spcPts val="0"/>
+              </a:spcAft>
+              <a:buNone/>
+            </a:pPr>
+            <a:r>
+              <a:rPr b="0" i="0" lang="ja-JP" sz="1000" u="none" cap="none" strike="noStrike">
+                <a:solidFill>
+                  <a:schemeClr val="dk1"/>
+                </a:solidFill>
+                <a:latin typeface="メイリオ"/>
+                <a:ea typeface="Meiryo"/>
+                <a:cs typeface="Meiryo"/>
+                <a:sym typeface="Meiryo"/>
+              </a:rPr>
+              <a:t>オプション</a:t>
+            </a:r>
+            <a:endParaRPr b="0" i="0" sz="1000" u="none" cap="none" strike="noStrike">
+              <a:solidFill>
+                <a:schemeClr val="dk1"/>
+              </a:solidFill>
+              <a:latin typeface="Meiryo"/>
+              <a:ea typeface="Meiryo"/>
+              <a:cs typeface="Meiryo"/>
+              <a:sym typeface="Meiryo"/>
+            </a:endParaRPr>
+          </a:p>
+          <a:p>
+            <a:pPr indent="0" lvl="0" marL="0" marR="0" rtl="0" algn="ctr">
+              <a:spcBef>
+                <a:spcPts val="0"/>
+              </a:spcBef>
+              <a:spcAft>
+                <a:spcPts val="0"/>
+              </a:spcAft>
+              <a:buNone/>
+            </a:pPr>
+            <a:r>
+              <a:rPr b="0" i="0" lang="ja-JP" sz="1000" u="none" cap="none" strike="noStrike">
+                <a:solidFill>
+                  <a:schemeClr val="dk1"/>
+                </a:solidFill>
+                <a:latin typeface="メイリオ"/>
+                <a:ea typeface="Meiryo"/>
+                <a:cs typeface="Meiryo"/>
+                <a:sym typeface="Meiryo"/>
+              </a:rPr>
+              <a:t>商材</a:t>
+            </a:r>
+            <a:endParaRPr/>
+          </a:p>
+        </p:txBody>
+      </p:sp>
+      <p:sp>
+        <p:nvSpPr>
+          <p:cNvPr id="43" name="Google Shape;43;p3"/>
+          <p:cNvSpPr/>
+          <p:nvPr/>
+        </p:nvSpPr>
+        <p:spPr>
+          <a:xfrm>
+            <a:off x="1594068" y="730955"/>
+            <a:ext cx="2926883" cy="435690"/>
+          </a:xfrm>
+          <a:prstGeom prst="rect">
+            <a:avLst/>
+          </a:prstGeom>
+          <a:noFill/>
+          <a:ln cap="flat" cmpd="sng" w="9525">
+            <a:solidFill>
+              <a:srgbClr val="4A7DBA"/>
+            </a:solidFill>
+            <a:prstDash val="solid"/>
+            <a:round/>
+            <a:headEnd len="sm" w="sm" type="none"/>
+            <a:tailEnd len="sm" w="sm" type="none"/>
+          </a:ln>
+        </p:spPr>
+        <p:txBody>
+          <a:bodyPr anchorCtr="0" anchor="ctr" bIns="45700" lIns="91425" spcFirstLastPara="1" rIns="91425" wrap="square" tIns="45700">
+            <a:noAutofit/>
+          </a:bodyPr>
+          <a:lstStyle/>
+          <a:p>
+            <a:pPr indent="0" lvl="0" marL="0" marR="0" rtl="0" algn="ctr">
+              <a:spcBef>
+                <a:spcPts val="0"/>
+              </a:spcBef>
+              <a:spcAft>
+                <a:spcPts val="0"/>
+              </a:spcAft>
+              <a:buNone/>
+            </a:pPr>
+            <a:r>
+              <a:rPr b="0" i="0" lang="ja-JP" sz="1300" u="none" cap="none" strike="noStrike">
+                <a:solidFill>
+                  <a:schemeClr val="dk1"/>
+                </a:solidFill>
+                <a:latin typeface="メイリオ"/>
+                <a:ea typeface="Meiryo"/>
+                <a:cs typeface="Meiryo"/>
+                <a:sym typeface="Meiryo"/>
+              </a:rPr>
+              <a:t>友だち獲得を強化したい全業種</a:t>
+            </a:r>
+            <a:endParaRPr/>
+          </a:p>
+        </p:txBody>
+      </p:sp>
+      <p:sp>
+        <p:nvSpPr>
+          <p:cNvPr id="44" name="Google Shape;44;p3"/>
+          <p:cNvSpPr txBox="1"/>
+          <p:nvPr/>
+        </p:nvSpPr>
+        <p:spPr>
+          <a:xfrm>
+            <a:off x="3296816" y="6597352"/>
+            <a:ext cx="6209091" cy="215444"/>
+          </a:xfrm>
+          <a:prstGeom prst="rect">
+            <a:avLst/>
+          </a:prstGeom>
+          <a:noFill/>
+          <a:ln>
+            <a:noFill/>
+          </a:ln>
+        </p:spPr>
+        <p:txBody>
+          <a:bodyPr anchorCtr="0" anchor="t" bIns="45700" lIns="91425" spcFirstLastPara="1" rIns="91425" wrap="square" tIns="45700">
+            <a:spAutoFit/>
+          </a:bodyPr>
+          <a:lstStyle/>
+          <a:p>
+            <a:pPr indent="0" lvl="0" marL="0" marR="0" rtl="0" algn="l">
+              <a:spcBef>
+                <a:spcPts val="0"/>
+              </a:spcBef>
+              <a:spcAft>
+                <a:spcPts val="0"/>
+              </a:spcAft>
+              <a:buNone/>
+            </a:pPr>
+            <a:r>
+              <a:rPr b="0" i="0" lang="ja-JP" sz="800" u="none" cap="none" strike="noStrike">
+                <a:solidFill>
+                  <a:schemeClr val="lt1"/>
+                </a:solidFill>
+                <a:latin typeface="メイリオ"/>
+                <a:ea typeface="Meiryo"/>
+                <a:cs typeface="Meiryo"/>
+                <a:sym typeface="Meiryo"/>
+              </a:rPr>
+              <a:t>出典：https://workers-hub.box.com/s/odilqpe44tp398zlfko148yggcgj68ny</a:t>
+            </a:r>
+            <a:endParaRPr sz="800">
+              <a:solidFill>
+                <a:schemeClr val="lt1"/>
+              </a:solidFill>
+              <a:latin typeface="Meiryo"/>
+              <a:ea typeface="Meiryo"/>
+              <a:cs typeface="Meiryo"/>
+              <a:sym typeface="Meiryo"/>
+            </a:endParaRPr>
+          </a:p>
+        </p:txBody>
+      </p:sp>
+      <p:sp>
+        <p:nvSpPr>
+          <p:cNvPr id="45" name="Google Shape;45;p3"/>
+          <p:cNvSpPr/>
+          <p:nvPr/>
+        </p:nvSpPr>
+        <p:spPr>
+          <a:xfrm>
+            <a:off x="0" y="1234746"/>
+            <a:ext cx="9906000" cy="672259"/>
+          </a:xfrm>
+          <a:prstGeom prst="rect">
+            <a:avLst/>
+          </a:prstGeom>
+          <a:solidFill>
+            <a:srgbClr val="C5D8F1"/>
+          </a:solidFill>
+          <a:ln>
+            <a:noFill/>
+          </a:ln>
+        </p:spPr>
+        <p:txBody>
+          <a:bodyPr anchorCtr="0" anchor="ctr" bIns="45700" lIns="91425" spcFirstLastPara="1" rIns="91425" wrap="square" tIns="45700">
+            <a:noAutofit/>
+          </a:bodyPr>
+          <a:lstStyle/>
+          <a:p>
+            <a:pPr indent="0" lvl="0" marL="0" marR="0" rtl="0" algn="ctr">
+              <a:spcBef>
+                <a:spcPts val="0"/>
+              </a:spcBef>
+              <a:spcAft>
+                <a:spcPts val="0"/>
+              </a:spcAft>
+              <a:buNone/>
+            </a:pPr>
+            <a:r>
+              <a:rPr b="1" lang="ja-JP" sz="1600">
+                <a:solidFill>
+                  <a:srgbClr val="004DE6"/>
+                </a:solidFill>
+                <a:latin typeface="メイリオ"/>
+                <a:ea typeface="Meiryo"/>
+                <a:cs typeface="Meiryo"/>
+                <a:sym typeface="Meiryo"/>
+              </a:rPr>
+              <a:t>　　　　　　</a:t>
+            </a:r>
+            <a:endParaRPr b="1" sz="1800">
+              <a:solidFill>
+                <a:srgbClr val="004DE6"/>
+              </a:solidFill>
+              <a:latin typeface="Meiryo"/>
+              <a:ea typeface="Meiryo"/>
+              <a:cs typeface="Meiryo"/>
+              <a:sym typeface="Meiryo"/>
+            </a:endParaRPr>
+          </a:p>
+        </p:txBody>
+      </p:sp>
+      <p:sp>
+        <p:nvSpPr>
+          <p:cNvPr id="46" name="Google Shape;46;p3"/>
+          <p:cNvSpPr/>
+          <p:nvPr/>
+        </p:nvSpPr>
+        <p:spPr>
+          <a:xfrm>
+            <a:off x="1089832" y="1437370"/>
+            <a:ext cx="7031520" cy="338554"/>
+          </a:xfrm>
+          <a:prstGeom prst="rect">
+            <a:avLst/>
+          </a:prstGeom>
+          <a:noFill/>
+          <a:ln>
+            <a:noFill/>
+          </a:ln>
+        </p:spPr>
+        <p:txBody>
+          <a:bodyPr anchorCtr="0" anchor="t" bIns="45700" lIns="91425" spcFirstLastPara="1" rIns="91425" wrap="square" tIns="45700">
+            <a:spAutoFit/>
+          </a:bodyPr>
+          <a:lstStyle/>
+          <a:p>
+            <a:pPr indent="0" lvl="0" marL="0" marR="0" rtl="0" algn="l">
+              <a:spcBef>
+                <a:spcPts val="0"/>
+              </a:spcBef>
+              <a:spcAft>
+                <a:spcPts val="0"/>
+              </a:spcAft>
+              <a:buNone/>
+            </a:pPr>
+            <a:r>
+              <a:rPr b="1" lang="ja-JP" sz="1600">
+                <a:solidFill>
+                  <a:srgbClr val="004DE6"/>
+                </a:solidFill>
+                <a:latin typeface="メイリオ"/>
+                <a:ea typeface="Meiryo"/>
+                <a:cs typeface="Meiryo"/>
+                <a:sym typeface="Meiryo"/>
+              </a:rPr>
+              <a:t>【LINEオープンキャンペーン】注意点・ご利用条件</a:t>
+            </a:r>
+            <a:endParaRPr b="1" sz="1600">
+              <a:solidFill>
+                <a:srgbClr val="004DE6"/>
+              </a:solidFill>
+              <a:latin typeface="Meiryo"/>
+              <a:ea typeface="Meiryo"/>
+              <a:cs typeface="Meiryo"/>
+              <a:sym typeface="Meiryo"/>
+            </a:endParaRPr>
+          </a:p>
+        </p:txBody>
+      </p:sp>
+      <p:sp>
+        <p:nvSpPr>
+          <p:cNvPr id="47" name="Google Shape;47;p3"/>
+          <p:cNvSpPr txBox="1"/>
+          <p:nvPr/>
+        </p:nvSpPr>
+        <p:spPr>
+          <a:xfrm>
+            <a:off x="182880" y="88175"/>
+            <a:ext cx="7512385" cy="365091"/>
+          </a:xfrm>
+          <a:prstGeom prst="rect">
+            <a:avLst/>
+          </a:prstGeom>
+          <a:noFill/>
+          <a:ln>
+            <a:noFill/>
+          </a:ln>
+        </p:spPr>
+        <p:txBody>
+          <a:bodyPr anchorCtr="0" anchor="t" bIns="45700" lIns="91425" spcFirstLastPara="1" rIns="91425" wrap="square" tIns="72000">
+            <a:spAutoFit/>
+          </a:bodyPr>
+          <a:lstStyle/>
+          <a:p>
+            <a:pPr indent="0" lvl="0" marL="0" marR="0" rtl="0" algn="l">
+              <a:spcBef>
+                <a:spcPts val="0"/>
+              </a:spcBef>
+              <a:spcAft>
+                <a:spcPts val="0"/>
+              </a:spcAft>
+              <a:buClr>
+                <a:schemeClr val="dk1"/>
+              </a:buClr>
+              <a:buSzPts val="1600"/>
+              <a:buFont typeface="Arial"/>
+              <a:buNone/>
+            </a:pPr>
+            <a:r>
+              <a:rPr b="0" lang="ja-JP" sz="1600" u="none">
+                <a:solidFill>
+                  <a:schemeClr val="dk1"/>
+                </a:solidFill>
+                <a:latin typeface="メイリオ"/>
+                <a:ea typeface="Meiryo"/>
+                <a:cs typeface="Meiryo"/>
+                <a:sym typeface="Meiryo"/>
+              </a:rPr>
+              <a:t>    今後のアップデート情報</a:t>
+            </a:r>
+            <a:endParaRPr b="0" sz="1600" u="none">
+              <a:solidFill>
+                <a:schemeClr val="dk1"/>
+              </a:solidFill>
+              <a:latin typeface="Meiryo"/>
+              <a:ea typeface="Meiryo"/>
+              <a:cs typeface="Meiryo"/>
+              <a:sym typeface="Meiryo"/>
+            </a:endParaRPr>
+          </a:p>
+        </p:txBody>
+      </p:sp>
+      <p:sp>
+        <p:nvSpPr>
+          <p:cNvPr id="48" name="Google Shape;48;p3"/>
+          <p:cNvSpPr/>
+          <p:nvPr/>
+        </p:nvSpPr>
+        <p:spPr>
+          <a:xfrm>
+            <a:off x="5797260" y="730955"/>
+            <a:ext cx="829618" cy="435690"/>
+          </a:xfrm>
+          <a:prstGeom prst="rect">
+            <a:avLst/>
+          </a:prstGeom>
+          <a:solidFill>
+            <a:schemeClr val="bg1"/>
+          </a:solidFill>
+          <a:ln cap="flat" cmpd="sng" w="9525">
+            <a:solidFill>
+              <a:srgbClr val="4F81BD"/>
+            </a:solidFill>
+            <a:prstDash val="sysDash"/>
+            <a:round/>
+            <a:headEnd len="sm" w="sm" type="none"/>
+            <a:tailEnd len="sm" w="sm" type="none"/>
+          </a:ln>
+        </p:spPr>
+        <p:txBody>
+          <a:bodyPr anchorCtr="0" anchor="ctr" bIns="45700" lIns="91425" spcFirstLastPara="1" rIns="91425" wrap="square" tIns="45700">
+            <a:noAutofit/>
+          </a:bodyPr>
+          <a:lstStyle/>
+          <a:p>
+            <a:pPr indent="0" lvl="0" marL="0" marR="0" rtl="0" algn="ctr">
+              <a:spcBef>
+                <a:spcPts val="0"/>
+              </a:spcBef>
+              <a:spcAft>
+                <a:spcPts val="0"/>
+              </a:spcAft>
+              <a:buClr>
+                <a:schemeClr val="dk1"/>
+              </a:buClr>
+              <a:buSzPts val="1000"/>
+              <a:buFont typeface="Meiryo"/>
+              <a:buNone/>
+            </a:pPr>
+            <a:r>
+              <a:rPr lang="ja-JP" sz="1000">
+                <a:solidFill>
+                  <a:schemeClr val="dk1"/>
+                </a:solidFill>
+                <a:latin typeface="メイリオ"/>
+                <a:ea typeface="Meiryo"/>
+                <a:cs typeface="Meiryo"/>
+                <a:sym typeface="Meiryo"/>
+              </a:rPr>
+              <a:t>開発</a:t>
+            </a:r>
+            <a:endParaRPr sz="1000">
+              <a:solidFill>
+                <a:schemeClr val="dk1"/>
+              </a:solidFill>
+              <a:latin typeface="Meiryo"/>
+              <a:ea typeface="Meiryo"/>
+              <a:cs typeface="Meiryo"/>
+              <a:sym typeface="Meiryo"/>
+            </a:endParaRPr>
+          </a:p>
+          <a:p>
+            <a:pPr indent="0" lvl="0" marL="0" marR="0" rtl="0" algn="ctr">
+              <a:spcBef>
+                <a:spcPts val="0"/>
+              </a:spcBef>
+              <a:spcAft>
+                <a:spcPts val="0"/>
+              </a:spcAft>
+              <a:buClr>
+                <a:schemeClr val="dk1"/>
+              </a:buClr>
+              <a:buSzPts val="1000"/>
+              <a:buFont typeface="Meiryo"/>
+              <a:buNone/>
+            </a:pPr>
+            <a:r>
+              <a:rPr lang="ja-JP" sz="1000">
+                <a:solidFill>
+                  <a:schemeClr val="dk1"/>
+                </a:solidFill>
+                <a:latin typeface="メイリオ"/>
+                <a:ea typeface="Meiryo"/>
+                <a:cs typeface="Meiryo"/>
+                <a:sym typeface="Meiryo"/>
+              </a:rPr>
+              <a:t>LINE API</a:t>
+            </a:r>
+            <a:endParaRPr sz="1000">
+              <a:solidFill>
+                <a:schemeClr val="dk1"/>
+              </a:solidFill>
+              <a:latin typeface="Meiryo"/>
+              <a:ea typeface="Meiryo"/>
+              <a:cs typeface="Meiryo"/>
+              <a:sym typeface="Meiryo"/>
+            </a:endParaRPr>
+          </a:p>
+        </p:txBody>
+      </p:sp>
+      <p:sp>
+        <p:nvSpPr>
+          <p:cNvPr id="49" name="Google Shape;49;p3"/>
+          <p:cNvSpPr/>
+          <p:nvPr/>
+        </p:nvSpPr>
+        <p:spPr>
+          <a:xfrm>
+            <a:off x="4915470" y="730955"/>
+            <a:ext cx="829618" cy="435690"/>
+          </a:xfrm>
+          <a:prstGeom prst="rect">
+            <a:avLst/>
+          </a:prstGeom>
+          <a:solidFill>
+            <a:schemeClr val="bg1"/>
+          </a:solidFill>
+          <a:ln cap="flat" cmpd="sng" w="9525">
+            <a:solidFill>
+              <a:srgbClr val="4F81BD"/>
+            </a:solidFill>
+            <a:prstDash val="sysDash"/>
+            <a:round/>
+            <a:headEnd len="sm" w="sm" type="none"/>
+            <a:tailEnd len="sm" w="sm" type="none"/>
+          </a:ln>
+        </p:spPr>
+        <p:txBody>
+          <a:bodyPr anchorCtr="0" anchor="ctr" bIns="45700" lIns="91425" spcFirstLastPara="1" rIns="91425" wrap="square" tIns="45700">
+            <a:noAutofit/>
+          </a:bodyPr>
+          <a:lstStyle/>
+          <a:p>
+            <a:pPr indent="0" lvl="0" marL="0" marR="0" rtl="0" algn="ctr">
+              <a:spcBef>
+                <a:spcPts val="0"/>
+              </a:spcBef>
+              <a:spcAft>
+                <a:spcPts val="0"/>
+              </a:spcAft>
+              <a:buNone/>
+            </a:pPr>
+            <a:r>
+              <a:rPr lang="ja-JP" sz="1000">
+                <a:solidFill>
+                  <a:schemeClr val="dk1"/>
+                </a:solidFill>
+                <a:latin typeface="メイリオ"/>
+                <a:ea typeface="Meiryo"/>
+                <a:cs typeface="Meiryo"/>
+                <a:sym typeface="Meiryo"/>
+              </a:rPr>
+              <a:t>LINE公式アカウント</a:t>
+            </a:r>
+            <a:endParaRPr sz="1000">
+              <a:solidFill>
+                <a:schemeClr val="dk1"/>
+              </a:solidFill>
+              <a:latin typeface="Meiryo"/>
+              <a:ea typeface="Meiryo"/>
+              <a:cs typeface="Meiryo"/>
+              <a:sym typeface="Meiryo"/>
+            </a:endParaRPr>
+          </a:p>
+        </p:txBody>
+      </p:sp>
+      <p:sp>
+        <p:nvSpPr>
+          <p:cNvPr id="50" name="Google Shape;50;p3"/>
+          <p:cNvSpPr/>
+          <p:nvPr/>
+        </p:nvSpPr>
+        <p:spPr>
+          <a:xfrm>
+            <a:off x="0" y="1890267"/>
+            <a:ext cx="9906000" cy="733579"/>
+          </a:xfrm>
+          <a:prstGeom prst="rect">
+            <a:avLst/>
+          </a:prstGeom>
+          <a:solidFill>
+            <a:srgbClr val="F2F2F2"/>
+          </a:solidFill>
+          <a:ln>
+            <a:noFill/>
+          </a:ln>
+        </p:spPr>
+        <p:txBody>
+          <a:bodyPr anchorCtr="0" anchor="ctr" bIns="45700" lIns="91425" spcFirstLastPara="1" rIns="91425" wrap="square" tIns="45700">
+            <a:noAutofit/>
+          </a:bodyPr>
+          <a:lstStyle/>
+          <a:p>
+            <a:pPr indent="0" lvl="0" marL="0" marR="0" rtl="0" algn="ctr">
+              <a:spcBef>
+                <a:spcPts val="0"/>
+              </a:spcBef>
+              <a:spcAft>
+                <a:spcPts val="0"/>
+              </a:spcAft>
+              <a:buNone/>
+            </a:pPr>
+            <a:r>
+              <a:rPr>
+                <a:latin typeface="メイリオ"/>
+              </a:rPr>
+              <a:t/>
+            </a:r>
+            <a:endParaRPr sz="1200">
+              <a:solidFill>
+                <a:schemeClr val="dk1"/>
+              </a:solidFill>
+              <a:latin typeface="Meiryo"/>
+              <a:ea typeface="Meiryo"/>
+              <a:cs typeface="Meiryo"/>
+              <a:sym typeface="Meiryo"/>
+            </a:endParaRPr>
+          </a:p>
+        </p:txBody>
+      </p:sp>
+      <p:sp>
+        <p:nvSpPr>
+          <p:cNvPr id="51" name="Google Shape;51;p3"/>
+          <p:cNvSpPr/>
+          <p:nvPr/>
+        </p:nvSpPr>
+        <p:spPr>
+          <a:xfrm>
+            <a:off x="544108" y="1961282"/>
+            <a:ext cx="8817783" cy="646331"/>
+          </a:xfrm>
+          <a:prstGeom prst="rect">
+            <a:avLst/>
+          </a:prstGeom>
+          <a:noFill/>
+          <a:ln>
+            <a:noFill/>
+          </a:ln>
+        </p:spPr>
+        <p:txBody>
+          <a:bodyPr anchorCtr="0" anchor="t" bIns="45700" lIns="91425" spcFirstLastPara="1" rIns="91425" wrap="square" tIns="45700">
+            <a:spAutoFit/>
+          </a:bodyPr>
+          <a:lstStyle/>
+          <a:p>
+            <a:pPr indent="0" lvl="0" marL="0" marR="0" rtl="0" algn="ctr">
+              <a:spcBef>
+                <a:spcPts val="0"/>
+              </a:spcBef>
+              <a:spcAft>
+                <a:spcPts val="0"/>
+              </a:spcAft>
+              <a:buNone/>
+            </a:pPr>
+            <a:r>
+              <a:rPr b="1" lang="ja-JP" sz="1200">
+                <a:solidFill>
+                  <a:schemeClr val="dk1"/>
+                </a:solidFill>
+                <a:latin typeface="メイリオ"/>
+                <a:ea typeface="Meiryo"/>
+                <a:cs typeface="Meiryo"/>
+                <a:sym typeface="Meiryo"/>
+              </a:rPr>
+              <a:t>キャンセル規定・割引の併用可否など、提案前に必ず確認したい4点。</a:t>
+            </a:r>
+            <a:endParaRPr b="1" sz="1200">
+              <a:solidFill>
+                <a:schemeClr val="dk1"/>
+              </a:solidFill>
+              <a:latin typeface="Meiryo"/>
+              <a:ea typeface="Meiryo"/>
+              <a:cs typeface="Meiryo"/>
+              <a:sym typeface="Meiryo"/>
+            </a:endParaRPr>
+          </a:p>
+          <a:p>
+            <a:pPr indent="0" lvl="0" marL="0" marR="0" rtl="0" algn="ctr">
+              <a:spcBef>
+                <a:spcPts val="0"/>
+              </a:spcBef>
+              <a:spcAft>
+                <a:spcPts val="0"/>
+              </a:spcAft>
+              <a:buNone/>
+            </a:pPr>
+            <a:r>
+              <a:rPr b="1" lang="ja-JP" sz="1200">
+                <a:solidFill>
+                  <a:schemeClr val="dk1"/>
+                </a:solidFill>
+                <a:latin typeface="メイリオ"/>
+                <a:ea typeface="Meiryo"/>
+                <a:cs typeface="Meiryo"/>
+                <a:sym typeface="Meiryo"/>
+              </a:rPr>
+              <a:t>特にキャンセル規定は発注後の費用に直結するため要注意。</a:t>
+            </a:r>
+            <a:endParaRPr/>
+          </a:p>
+          <a:p>
+            <a:pPr indent="0" lvl="0" marL="0" marR="0" rtl="0" algn="ctr">
+              <a:spcBef>
+                <a:spcPts val="0"/>
+              </a:spcBef>
+              <a:spcAft>
+                <a:spcPts val="0"/>
+              </a:spcAft>
+              <a:buNone/>
+            </a:pPr>
+            <a:r>
+              <a:rPr b="1" lang="ja-JP" sz="1200">
+                <a:solidFill>
+                  <a:schemeClr val="dk1"/>
+                </a:solidFill>
+                <a:latin typeface="メイリオ"/>
+                <a:ea typeface="Meiryo"/>
+                <a:cs typeface="Meiryo"/>
+                <a:sym typeface="Meiryo"/>
+              </a:rPr>
+              <a:t>景品内容は変更となる場合があり、事前の合意形成が欠かせない。</a:t>
+            </a:r>
+            <a:endParaRPr b="1" sz="1400">
+              <a:solidFill>
+                <a:schemeClr val="dk1"/>
+              </a:solidFill>
+              <a:latin typeface="Meiryo"/>
+              <a:ea typeface="Meiryo"/>
+              <a:cs typeface="Meiryo"/>
+              <a:sym typeface="Meiryo"/>
+            </a:endParaRPr>
+          </a:p>
+        </p:txBody>
+      </p:sp>
+      <p:sp>
+        <p:nvSpPr>
+          <p:cNvPr id="52" name="Google Shape;52;p3"/>
+          <p:cNvSpPr/>
+          <p:nvPr/>
+        </p:nvSpPr>
+        <p:spPr>
+          <a:xfrm>
+            <a:off x="351381" y="2714173"/>
+            <a:ext cx="5200000" cy="338554"/>
+          </a:xfrm>
+          <a:prstGeom prst="rect">
+            <a:avLst/>
+          </a:prstGeom>
+          <a:noFill/>
+          <a:ln>
+            <a:noFill/>
+          </a:ln>
+        </p:spPr>
+        <p:txBody>
+          <a:bodyPr anchorCtr="0" anchor="t" bIns="45700" lIns="91425" spcFirstLastPara="1" rIns="91425" wrap="square" tIns="45700">
+            <a:noAutofit/>
+          </a:bodyPr>
+          <a:lstStyle/>
+          <a:p>
+            <a:pPr indent="0" lvl="0" marL="0" marR="0" rtl="0" algn="l">
+              <a:spcBef>
+                <a:spcPts val="0"/>
+              </a:spcBef>
+              <a:spcAft>
+                <a:spcPts val="0"/>
+              </a:spcAft>
+              <a:buNone/>
+            </a:pPr>
+            <a:r>
+              <a:rPr b="1" lang="ja-JP" sz="1400">
+                <a:solidFill>
+                  <a:srgbClr val="15133D"/>
+                </a:solidFill>
+                <a:latin typeface="メイリオ"/>
+                <a:ea typeface="Meiryo"/>
+                <a:cs typeface="Meiryo"/>
+                <a:sym typeface="Meiryo"/>
+              </a:rPr>
+              <a:t>■ 詳細</a:t>
+            </a:r>
+            <a:endParaRPr/>
+          </a:p>
+        </p:txBody>
+      </p:sp>
+      <p:grpSp>
+        <p:nvGrpSpPr>
+          <p:cNvPr id="53" name="Google Shape;53;p3"/>
+          <p:cNvGrpSpPr/>
+          <p:nvPr/>
+        </p:nvGrpSpPr>
+        <p:grpSpPr>
+          <a:xfrm>
+            <a:off x="8473303" y="730955"/>
+            <a:ext cx="1376241" cy="1131930"/>
+            <a:chOff x="0" y="0"/>
+            <a:chExt cx="1376241" cy="1131930"/>
+          </a:xfrm>
+        </p:grpSpPr>
+        <p:sp>
+          <p:nvSpPr>
+            <p:cNvPr id="54" name="Google Shape;54;p3"/>
+            <p:cNvSpPr/>
+            <p:nvPr/>
+          </p:nvSpPr>
+          <p:spPr>
+            <a:xfrm rot="10800000">
+              <a:off x="0" y="0"/>
+              <a:ext cx="1376241" cy="282982"/>
+            </a:xfrm>
+            <a:prstGeom prst="trapezoid">
+              <a:avLst>
+                <a:gd fmla="val 60792" name="adj"/>
+              </a:avLst>
+            </a:prstGeom>
+            <a:solidFill>
+              <a:srgbClr val="EAEDF5"/>
+            </a:solidFill>
+            <a:ln cap="flat" cmpd="sng" w="25400">
+              <a:solidFill>
+                <a:schemeClr val="dk2"/>
+              </a:solidFill>
+              <a:prstDash val="solid"/>
+              <a:round/>
+              <a:headEnd len="sm" w="sm" type="none"/>
+              <a:tailEnd len="sm" w="sm" type="none"/>
+            </a:ln>
+          </p:spPr>
+          <p:txBody>
+            <a:bodyPr anchorCtr="0" anchor="ctr" bIns="91425" lIns="91425" spcFirstLastPara="1" rIns="91425" wrap="square" tIns="91425">
+              <a:noAutofit/>
+            </a:bodyPr>
+            <a:lstStyle/>
+            <a:p>
+              <a:pPr indent="0" lvl="0" marL="0" rtl="0" algn="l">
+                <a:spcBef>
+                  <a:spcPts val="0"/>
+                </a:spcBef>
+                <a:spcAft>
+                  <a:spcPts val="0"/>
+                </a:spcAft>
+                <a:buNone/>
+              </a:pPr>
+              <a:r>
+                <a:t/>
+              </a:r>
+              <a:endParaRPr/>
+            </a:p>
+          </p:txBody>
+        </p:sp>
+        <p:sp>
+          <p:nvSpPr>
+            <p:cNvPr id="55" name="Google Shape;55;p3"/>
+            <p:cNvSpPr txBox="1"/>
+            <p:nvPr/>
+          </p:nvSpPr>
+          <p:spPr>
+            <a:xfrm>
+              <a:off x="240842" y="0"/>
+              <a:ext cx="894556" cy="282982"/>
+            </a:xfrm>
+            <a:prstGeom prst="rect">
+              <a:avLst/>
+            </a:prstGeom>
+            <a:noFill/>
+            <a:ln>
+              <a:noFill/>
+            </a:ln>
+          </p:spPr>
+          <p:txBody>
+            <a:bodyPr anchorCtr="0" anchor="ctr" bIns="10150" lIns="10150" spcFirstLastPara="1" rIns="10150" wrap="square" tIns="10150">
+              <a:noAutofit/>
+            </a:bodyPr>
+            <a:lstStyle/>
+            <a:p>
+              <a:pPr indent="0" lvl="0" marL="0" marR="0" rtl="0" algn="ctr">
+                <a:lnSpc>
+                  <a:spcPct val="90000"/>
+                </a:lnSpc>
+                <a:spcBef>
+                  <a:spcPts val="0"/>
+                </a:spcBef>
+                <a:spcAft>
+                  <a:spcPts val="0"/>
+                </a:spcAft>
+                <a:buClr>
+                  <a:srgbClr val="262626"/>
+                </a:buClr>
+                <a:buSzPts val="800"/>
+                <a:buFont typeface="Arial"/>
+                <a:buNone/>
+              </a:pPr>
+              <a:r>
+                <a:rPr b="1" lang="ja-JP" sz="800">
+                  <a:solidFill>
+                    <a:srgbClr val="262626"/>
+                  </a:solidFill>
+                  <a:latin typeface="Arial"/>
+                  <a:ea typeface="Arial"/>
+                  <a:cs typeface="Arial"/>
+                  <a:sym typeface="Arial"/>
+                </a:rPr>
+                <a:t>認知</a:t>
+              </a:r>
+              <a:endParaRPr/>
+            </a:p>
+          </p:txBody>
+        </p:sp>
+        <p:sp>
+          <p:nvSpPr>
+            <p:cNvPr id="56" name="Google Shape;56;p3"/>
+            <p:cNvSpPr/>
+            <p:nvPr/>
+          </p:nvSpPr>
+          <p:spPr>
+            <a:xfrm rot="10800000">
+              <a:off x="172030" y="282982"/>
+              <a:ext cx="1032180" cy="282982"/>
+            </a:xfrm>
+            <a:prstGeom prst="trapezoid">
+              <a:avLst>
+                <a:gd fmla="val 60792" name="adj"/>
+              </a:avLst>
+            </a:prstGeom>
+            <a:solidFill>
+              <a:schemeClr val="lt1"/>
+            </a:solidFill>
+            <a:ln cap="flat" cmpd="sng" w="25400">
+              <a:solidFill>
+                <a:schemeClr val="dk2"/>
+              </a:solidFill>
+              <a:prstDash val="solid"/>
+              <a:round/>
+              <a:headEnd len="sm" w="sm" type="none"/>
+              <a:tailEnd len="sm" w="sm" type="none"/>
+            </a:ln>
+          </p:spPr>
+          <p:txBody>
+            <a:bodyPr anchorCtr="0" anchor="ctr" bIns="91425" lIns="91425" spcFirstLastPara="1" rIns="91425" wrap="square" tIns="91425">
+              <a:noAutofit/>
+            </a:bodyPr>
+            <a:lstStyle/>
+            <a:p>
+              <a:pPr indent="0" lvl="0" marL="0" rtl="0" algn="l">
+                <a:spcBef>
+                  <a:spcPts val="0"/>
+                </a:spcBef>
+                <a:spcAft>
+                  <a:spcPts val="0"/>
+                </a:spcAft>
+                <a:buNone/>
+              </a:pPr>
+              <a:r>
+                <a:t/>
+              </a:r>
+              <a:endParaRPr/>
+            </a:p>
+          </p:txBody>
+        </p:sp>
+        <p:sp>
+          <p:nvSpPr>
+            <p:cNvPr id="57" name="Google Shape;57;p3"/>
+            <p:cNvSpPr txBox="1"/>
+            <p:nvPr/>
+          </p:nvSpPr>
+          <p:spPr>
+            <a:xfrm>
+              <a:off x="352661" y="282982"/>
+              <a:ext cx="670917" cy="282982"/>
+            </a:xfrm>
+            <a:prstGeom prst="rect">
+              <a:avLst/>
+            </a:prstGeom>
+            <a:noFill/>
+            <a:ln>
+              <a:noFill/>
+            </a:ln>
+          </p:spPr>
+          <p:txBody>
+            <a:bodyPr anchorCtr="0" anchor="ctr" bIns="10150" lIns="10150" spcFirstLastPara="1" rIns="10150" wrap="square" tIns="10150">
+              <a:noAutofit/>
+            </a:bodyPr>
+            <a:lstStyle/>
+            <a:p>
+              <a:pPr indent="0" lvl="0" marL="0" marR="0" rtl="0" algn="ctr">
+                <a:lnSpc>
+                  <a:spcPct val="90000"/>
+                </a:lnSpc>
+                <a:spcBef>
+                  <a:spcPts val="0"/>
+                </a:spcBef>
+                <a:spcAft>
+                  <a:spcPts val="0"/>
+                </a:spcAft>
+                <a:buClr>
+                  <a:srgbClr val="262626"/>
+                </a:buClr>
+                <a:buSzPts val="800"/>
+                <a:buFont typeface="Arial"/>
+                <a:buNone/>
+              </a:pPr>
+              <a:r>
+                <a:rPr b="1" lang="ja-JP" sz="800">
+                  <a:solidFill>
+                    <a:srgbClr val="262626"/>
+                  </a:solidFill>
+                  <a:latin typeface="Arial"/>
+                  <a:ea typeface="Arial"/>
+                  <a:cs typeface="Arial"/>
+                  <a:sym typeface="Arial"/>
+                </a:rPr>
+                <a:t>検討</a:t>
+              </a:r>
+              <a:endParaRPr/>
+            </a:p>
+          </p:txBody>
+        </p:sp>
+        <p:sp>
+          <p:nvSpPr>
+            <p:cNvPr id="58" name="Google Shape;58;p3"/>
+            <p:cNvSpPr/>
+            <p:nvPr/>
+          </p:nvSpPr>
+          <p:spPr>
+            <a:xfrm rot="10800000">
+              <a:off x="344060" y="565965"/>
+              <a:ext cx="688120" cy="282982"/>
+            </a:xfrm>
+            <a:prstGeom prst="trapezoid">
+              <a:avLst>
+                <a:gd fmla="val 60792" name="adj"/>
+              </a:avLst>
+            </a:prstGeom>
+            <a:solidFill>
+              <a:schemeClr val="lt1"/>
+            </a:solidFill>
+            <a:ln cap="flat" cmpd="sng" w="25400">
+              <a:solidFill>
+                <a:schemeClr val="dk2"/>
+              </a:solidFill>
+              <a:prstDash val="solid"/>
+              <a:round/>
+              <a:headEnd len="sm" w="sm" type="none"/>
+              <a:tailEnd len="sm" w="sm" type="none"/>
+            </a:ln>
+          </p:spPr>
+          <p:txBody>
+            <a:bodyPr anchorCtr="0" anchor="ctr" bIns="91425" lIns="91425" spcFirstLastPara="1" rIns="91425" wrap="square" tIns="91425">
+              <a:noAutofit/>
+            </a:bodyPr>
+            <a:lstStyle/>
+            <a:p>
+              <a:pPr indent="0" lvl="0" marL="0" rtl="0" algn="l">
+                <a:spcBef>
+                  <a:spcPts val="0"/>
+                </a:spcBef>
+                <a:spcAft>
+                  <a:spcPts val="0"/>
+                </a:spcAft>
+                <a:buNone/>
+              </a:pPr>
+              <a:r>
+                <a:t/>
+              </a:r>
+              <a:endParaRPr/>
+            </a:p>
+          </p:txBody>
+        </p:sp>
+        <p:sp>
+          <p:nvSpPr>
+            <p:cNvPr id="59" name="Google Shape;59;p3"/>
+            <p:cNvSpPr txBox="1"/>
+            <p:nvPr/>
+          </p:nvSpPr>
+          <p:spPr>
+            <a:xfrm>
+              <a:off x="464481" y="565965"/>
+              <a:ext cx="447278" cy="282982"/>
+            </a:xfrm>
+            <a:prstGeom prst="rect">
+              <a:avLst/>
+            </a:prstGeom>
+            <a:noFill/>
+            <a:ln>
+              <a:noFill/>
+            </a:ln>
+          </p:spPr>
+          <p:txBody>
+            <a:bodyPr anchorCtr="0" anchor="ctr" bIns="10150" lIns="10150" spcFirstLastPara="1" rIns="10150" wrap="square" tIns="10150">
+              <a:noAutofit/>
+            </a:bodyPr>
+            <a:lstStyle/>
+            <a:p>
+              <a:pPr indent="0" lvl="0" marL="0" marR="0" rtl="0" algn="ctr">
+                <a:lnSpc>
+                  <a:spcPct val="90000"/>
+                </a:lnSpc>
+                <a:spcBef>
+                  <a:spcPts val="0"/>
+                </a:spcBef>
+                <a:spcAft>
+                  <a:spcPts val="0"/>
+                </a:spcAft>
+                <a:buClr>
+                  <a:srgbClr val="262626"/>
+                </a:buClr>
+                <a:buSzPts val="800"/>
+                <a:buFont typeface="Arial"/>
+                <a:buNone/>
+              </a:pPr>
+              <a:r>
+                <a:rPr b="1" lang="ja-JP" sz="800">
+                  <a:solidFill>
+                    <a:srgbClr val="262626"/>
+                  </a:solidFill>
+                  <a:latin typeface="Arial"/>
+                  <a:ea typeface="Arial"/>
+                  <a:cs typeface="Arial"/>
+                  <a:sym typeface="Arial"/>
+                </a:rPr>
+                <a:t>獲得</a:t>
+              </a:r>
+              <a:endParaRPr/>
+            </a:p>
+          </p:txBody>
+        </p:sp>
+        <p:sp>
+          <p:nvSpPr>
+            <p:cNvPr id="60" name="Google Shape;60;p3"/>
+            <p:cNvSpPr/>
+            <p:nvPr/>
+          </p:nvSpPr>
+          <p:spPr>
+            <a:xfrm rot="10800000">
+              <a:off x="516090" y="848948"/>
+              <a:ext cx="344060" cy="282982"/>
+            </a:xfrm>
+            <a:prstGeom prst="trapezoid">
+              <a:avLst>
+                <a:gd fmla="val 60792" name="adj"/>
+              </a:avLst>
+            </a:prstGeom>
+            <a:noFill/>
+            <a:ln cap="flat" cmpd="sng" w="25400">
+              <a:solidFill>
+                <a:schemeClr val="dk2"/>
+              </a:solidFill>
+              <a:prstDash val="solid"/>
+              <a:round/>
+              <a:headEnd len="sm" w="sm" type="none"/>
+              <a:tailEnd len="sm" w="sm" type="none"/>
+            </a:ln>
+          </p:spPr>
+          <p:txBody>
+            <a:bodyPr anchorCtr="0" anchor="ctr" bIns="91425" lIns="91425" spcFirstLastPara="1" rIns="91425" wrap="square" tIns="91425">
+              <a:noAutofit/>
+            </a:bodyPr>
+            <a:lstStyle/>
+            <a:p>
+              <a:pPr indent="0" lvl="0" marL="0" rtl="0" algn="l">
+                <a:spcBef>
+                  <a:spcPts val="0"/>
+                </a:spcBef>
+                <a:spcAft>
+                  <a:spcPts val="0"/>
+                </a:spcAft>
+                <a:buNone/>
+              </a:pPr>
+              <a:r>
+                <a:t/>
+              </a:r>
+              <a:endParaRPr/>
+            </a:p>
+          </p:txBody>
+        </p:sp>
+        <p:sp>
+          <p:nvSpPr>
+            <p:cNvPr id="61" name="Google Shape;61;p3"/>
+            <p:cNvSpPr txBox="1"/>
+            <p:nvPr/>
+          </p:nvSpPr>
+          <p:spPr>
+            <a:xfrm>
+              <a:off x="516090" y="848948"/>
+              <a:ext cx="344060" cy="282982"/>
+            </a:xfrm>
+            <a:prstGeom prst="rect">
+              <a:avLst/>
+            </a:prstGeom>
+            <a:noFill/>
+            <a:ln>
+              <a:noFill/>
+            </a:ln>
+          </p:spPr>
+          <p:txBody>
+            <a:bodyPr anchorCtr="0" anchor="ctr" bIns="10150" lIns="10150" spcFirstLastPara="1" rIns="10150" wrap="square" tIns="10150">
+              <a:noAutofit/>
+            </a:bodyPr>
+            <a:lstStyle/>
+            <a:p>
+              <a:pPr indent="0" lvl="0" marL="0" marR="0" rtl="0" algn="ctr">
+                <a:lnSpc>
+                  <a:spcPct val="90000"/>
+                </a:lnSpc>
+                <a:spcBef>
+                  <a:spcPts val="0"/>
+                </a:spcBef>
+                <a:spcAft>
+                  <a:spcPts val="0"/>
+                </a:spcAft>
+                <a:buClr>
+                  <a:srgbClr val="262626"/>
+                </a:buClr>
+                <a:buSzPts val="800"/>
+                <a:buFont typeface="Arial"/>
+                <a:buNone/>
+              </a:pPr>
+              <a:r>
+                <a:rPr b="1" lang="ja-JP" sz="800">
+                  <a:solidFill>
+                    <a:srgbClr val="262626"/>
+                  </a:solidFill>
+                  <a:latin typeface="Arial"/>
+                  <a:ea typeface="Arial"/>
+                  <a:cs typeface="Arial"/>
+                  <a:sym typeface="Arial"/>
+                </a:rPr>
+                <a:t>伸長</a:t>
+              </a:r>
+              <a:endParaRPr/>
+            </a:p>
+          </p:txBody>
+        </p:sp>
+      </p:grpSp>
+      <p:pic>
+        <p:nvPicPr>
+          <p:cNvPr descr="LINE公式アカウントのロゴの使用方法とは？種類やダウンロード方法、利用時の注意点を紹介 | Mico（ミコ）" id="62" name="Google Shape;62;p3"/>
+          <p:cNvPicPr preferRelativeResize="0"/>
+          <p:nvPr/>
+        </p:nvPicPr>
+        <p:blipFill rotWithShape="1">
+          <a:blip r:embed="rId2">
+            <a:alphaModFix/>
+          </a:blip>
+          <a:srcRect b="0" l="0" r="0" t="0"/>
+          <a:stretch/>
+        </p:blipFill>
+        <p:spPr>
+          <a:xfrm>
+            <a:off x="351381" y="1234746"/>
+            <a:ext cx="656177" cy="655521"/>
+          </a:xfrm>
+          <a:prstGeom prst="rect">
+            <a:avLst/>
+          </a:prstGeom>
+          <a:noFill/>
+          <a:ln>
+            <a:noFill/>
+          </a:ln>
+        </p:spPr>
+      </p:pic>
+      <p:sp>
+        <p:nvSpPr>
+          <p:cNvPr id="63" name="Rounded Rectangle 62"/>
+          <p:cNvSpPr/>
+          <p:nvPr/>
+        </p:nvSpPr>
+        <p:spPr>
+          <a:xfrm>
+            <a:off x="544108" y="3068960"/>
+            <a:ext cx="4572000" cy="1463040"/>
+          </a:xfrm>
+          <a:prstGeom prst="roundRect">
+            <a:avLst>
+              <a:gd name="adj" fmla="val 6000"/>
+            </a:avLst>
+          </a:prstGeom>
+          <a:solidFill>
+            <a:srgbClr val="EAF0FA"/>
+          </a:solidFill>
+          <a:ln w="12700">
+            <a:solidFill>
+              <a:srgbClr val="3467B2"/>
+            </a:solidFill>
+          </a:ln>
+          <a:effectLst/>
+        </p:spPr>
+        <p:style>
+          <a:lnRef idx="1">
+            <a:schemeClr val="accent1"/>
+          </a:lnRef>
+          <a:fillRef idx="3">
+            <a:schemeClr val="accent1"/>
+          </a:fillRef>
+          <a:effectRef idx="2">
+            <a:schemeClr val="accent1"/>
+          </a:effectRef>
+          <a:fontRef idx="minor">
+            <a:schemeClr val="lt1"/>
+          </a:fontRef>
+        </p:style>
+        <p:txBody>
+          <a:bodyPr rtlCol="0" anchor="ctr" wrap="square" lIns="228600" rIns="182880"/>
+          <a:lstStyle/>
+          <a:p>
+            <a:pPr algn="l"/>
+            <a:r>
+              <a:rPr sz="1700" b="1">
+                <a:solidFill>
+                  <a:srgbClr val="15133D"/>
+                </a:solidFill>
+                <a:latin typeface="メイリオ"/>
+              </a:rPr>
+              <a:t>キャンセル規定</a:t>
+            </a:r>
+          </a:p>
+          <a:p>
+            <a:pPr algn="l">
+              <a:lnSpc>
+                <a:spcPct val="115000"/>
+              </a:lnSpc>
+              <a:spcBef>
+                <a:spcPts val="600"/>
+              </a:spcBef>
+            </a:pPr>
+            <a:r>
+              <a:rPr sz="1100">
+                <a:solidFill>
+                  <a:srgbClr val="333333"/>
+                </a:solidFill>
+                <a:latin typeface="メイリオ"/>
+              </a:rPr>
+              <a:t>発注期日超過後のキャンセルは、最低発注金額1,500万円を請求。</a:t>
+            </a:r>
+          </a:p>
+        </p:txBody>
+      </p:sp>
+      <p:sp>
+        <p:nvSpPr>
+          <p:cNvPr id="64" name="Rounded Rectangle 63"/>
+          <p:cNvSpPr/>
+          <p:nvPr/>
+        </p:nvSpPr>
+        <p:spPr>
+          <a:xfrm>
+            <a:off x="5298988" y="3068960"/>
+            <a:ext cx="4572000" cy="1463040"/>
+          </a:xfrm>
+          <a:prstGeom prst="roundRect">
+            <a:avLst>
+              <a:gd name="adj" fmla="val 6000"/>
+            </a:avLst>
+          </a:prstGeom>
+          <a:solidFill>
+            <a:srgbClr val="EAF0FA"/>
+          </a:solidFill>
+          <a:ln w="12700">
+            <a:solidFill>
+              <a:srgbClr val="3467B2"/>
+            </a:solidFill>
+          </a:ln>
+          <a:effectLst/>
+        </p:spPr>
+        <p:style>
+          <a:lnRef idx="1">
+            <a:schemeClr val="accent1"/>
+          </a:lnRef>
+          <a:fillRef idx="3">
+            <a:schemeClr val="accent1"/>
+          </a:fillRef>
+          <a:effectRef idx="2">
+            <a:schemeClr val="accent1"/>
+          </a:effectRef>
+          <a:fontRef idx="minor">
+            <a:schemeClr val="lt1"/>
+          </a:fontRef>
+        </p:style>
+        <p:txBody>
+          <a:bodyPr rtlCol="0" anchor="ctr" wrap="square" lIns="228600" rIns="182880"/>
+          <a:lstStyle/>
+          <a:p>
+            <a:pPr algn="l"/>
+            <a:r>
+              <a:rPr sz="1700" b="1">
+                <a:solidFill>
+                  <a:srgbClr val="15133D"/>
+                </a:solidFill>
+                <a:latin typeface="メイリオ"/>
+              </a:rPr>
+              <a:t>他割引との併用不可</a:t>
+            </a:r>
+          </a:p>
+          <a:p>
+            <a:pPr algn="l">
+              <a:lnSpc>
+                <a:spcPct val="115000"/>
+              </a:lnSpc>
+              <a:spcBef>
+                <a:spcPts val="600"/>
+              </a:spcBef>
+            </a:pPr>
+            <a:r>
+              <a:rPr sz="1100">
+                <a:solidFill>
+                  <a:srgbClr val="333333"/>
+                </a:solidFill>
+                <a:latin typeface="メイリオ"/>
+              </a:rPr>
+              <a:t>既存の各種割引施策とは併用不可。特別プラン単体での提案が前提。</a:t>
+            </a:r>
+          </a:p>
+        </p:txBody>
+      </p:sp>
+      <p:sp>
+        <p:nvSpPr>
+          <p:cNvPr id="65" name="Rounded Rectangle 64"/>
+          <p:cNvSpPr/>
+          <p:nvPr/>
+        </p:nvSpPr>
+        <p:spPr>
+          <a:xfrm>
+            <a:off x="544108" y="4714880"/>
+            <a:ext cx="4572000" cy="1463040"/>
+          </a:xfrm>
+          <a:prstGeom prst="roundRect">
+            <a:avLst>
+              <a:gd name="adj" fmla="val 6000"/>
+            </a:avLst>
+          </a:prstGeom>
+          <a:solidFill>
+            <a:srgbClr val="EAF0FA"/>
+          </a:solidFill>
+          <a:ln w="12700">
+            <a:solidFill>
+              <a:srgbClr val="3467B2"/>
+            </a:solidFill>
+          </a:ln>
+          <a:effectLst/>
+        </p:spPr>
+        <p:style>
+          <a:lnRef idx="1">
+            <a:schemeClr val="accent1"/>
+          </a:lnRef>
+          <a:fillRef idx="3">
+            <a:schemeClr val="accent1"/>
+          </a:fillRef>
+          <a:effectRef idx="2">
+            <a:schemeClr val="accent1"/>
+          </a:effectRef>
+          <a:fontRef idx="minor">
+            <a:schemeClr val="lt1"/>
+          </a:fontRef>
+        </p:style>
+        <p:txBody>
+          <a:bodyPr rtlCol="0" anchor="ctr" wrap="square" lIns="228600" rIns="182880"/>
+          <a:lstStyle/>
+          <a:p>
+            <a:pPr algn="l"/>
+            <a:r>
+              <a:rPr sz="1700" b="1">
+                <a:solidFill>
+                  <a:srgbClr val="15133D"/>
+                </a:solidFill>
+                <a:latin typeface="メイリオ"/>
+              </a:rPr>
+              <a:t>景品変更の可能性あり</a:t>
+            </a:r>
+          </a:p>
+          <a:p>
+            <a:pPr algn="l">
+              <a:lnSpc>
+                <a:spcPct val="115000"/>
+              </a:lnSpc>
+              <a:spcBef>
+                <a:spcPts val="600"/>
+              </a:spcBef>
+            </a:pPr>
+            <a:r>
+              <a:rPr sz="1100">
+                <a:solidFill>
+                  <a:srgbClr val="333333"/>
+                </a:solidFill>
+                <a:latin typeface="メイリオ"/>
+              </a:rPr>
+              <a:t>景品はLINEポイント2pt固定だが変更となる場合があり、変更不可のお申し出は受付不可。</a:t>
+            </a:r>
+          </a:p>
+        </p:txBody>
+      </p:sp>
+      <p:sp>
+        <p:nvSpPr>
+          <p:cNvPr id="66" name="Rounded Rectangle 65"/>
+          <p:cNvSpPr/>
+          <p:nvPr/>
+        </p:nvSpPr>
+        <p:spPr>
+          <a:xfrm>
+            <a:off x="5298988" y="4714880"/>
+            <a:ext cx="4572000" cy="1463040"/>
+          </a:xfrm>
+          <a:prstGeom prst="roundRect">
+            <a:avLst>
+              <a:gd name="adj" fmla="val 6000"/>
+            </a:avLst>
+          </a:prstGeom>
+          <a:solidFill>
+            <a:srgbClr val="EAF0FA"/>
+          </a:solidFill>
+          <a:ln w="12700">
+            <a:solidFill>
+              <a:srgbClr val="3467B2"/>
+            </a:solidFill>
+          </a:ln>
+          <a:effectLst/>
+        </p:spPr>
+        <p:style>
+          <a:lnRef idx="1">
+            <a:schemeClr val="accent1"/>
+          </a:lnRef>
+          <a:fillRef idx="3">
+            <a:schemeClr val="accent1"/>
+          </a:fillRef>
+          <a:effectRef idx="2">
+            <a:schemeClr val="accent1"/>
+          </a:effectRef>
+          <a:fontRef idx="minor">
+            <a:schemeClr val="lt1"/>
+          </a:fontRef>
+        </p:style>
+        <p:txBody>
+          <a:bodyPr rtlCol="0" anchor="ctr" wrap="square" lIns="228600" rIns="182880"/>
+          <a:lstStyle/>
+          <a:p>
+            <a:pPr algn="l"/>
+            <a:r>
+              <a:rPr sz="1700" b="1">
+                <a:solidFill>
+                  <a:srgbClr val="15133D"/>
+                </a:solidFill>
+                <a:latin typeface="メイリオ"/>
+              </a:rPr>
+              <a:t>対象は認証プロバイダー必須</a:t>
+            </a:r>
+          </a:p>
+          <a:p>
+            <a:pPr algn="l">
+              <a:lnSpc>
+                <a:spcPct val="115000"/>
+              </a:lnSpc>
+              <a:spcBef>
+                <a:spcPts val="600"/>
+              </a:spcBef>
+            </a:pPr>
+            <a:r>
+              <a:rPr sz="1100">
+                <a:solidFill>
+                  <a:srgbClr val="333333"/>
+                </a:solidFill>
+                <a:latin typeface="メイリオ"/>
+              </a:rPr>
+              <a:t>LINE公式アカウント・Messaging API対応かつ認証プロバイダーのアカウントが対象。</a:t>
+            </a:r>
+          </a:p>
+        </p:txBody>
+      </p:sp>
+    </p:spTree>
+  </p:cSld>
+  <p:clrMapOvr>
+    <a:masterClrMapping/>
+  </p:clrMapOvr>
+</p:sld>
+</file>
+
 <file path=ppt/slides/slide2.xml><?xml version="1.0" encoding="utf-8"?>
 <p:sld xmlns:a="http://schemas.openxmlformats.org/drawingml/2006/main" xmlns:r="http://schemas.openxmlformats.org/officeDocument/2006/relationships" xmlns:mc="http://schemas.openxmlformats.org/markup-compatibility/2006" xmlns:mv="urn:schemas-microsoft-com:mac:vml" xmlns:p="http://schemas.openxmlformats.org/presentationml/2006/main" xmlns:c="http://schemas.openxmlformats.org/drawingml/2006/chart" xmlns:dgm="http://schemas.openxmlformats.org/drawingml/2006/diagram" xmlns:o="urn:schemas-microsoft-com:office:office" xmlns:v="urn:schemas-microsoft-com:vml" xmlns:pvml="urn:schemas-microsoft-com:office:powerpoint" xmlns:com="http://schemas.openxmlformats.org/drawingml/2006/compatibility" xmlns:p14="http://schemas.microsoft.com/office/powerpoint/2010/main" xmlns:p15="http://schemas.microsoft.com/office/powerpoint/2012/main" xmlns:ahyp="http://schemas.microsoft.com/office/drawing/2018/hyperlinkcolor">
   <p:cSld>
@@ -3467,7 +7192,77 @@
                 <a:cs typeface="Meiryo"/>
                 <a:sym typeface="Meiryo"/>
               </a:rPr>
-              <a:t>P.9　　【LINEオープンキャンペーン】26年10-12月 期間限定キャンペーン</a:t>
+              <a:t>P.9　　【LINEオープンキャンペーン】特典内容</a:t>
+            </a:r>
+            <a:endParaRPr b="1" i="0" sz="1500" u="none" cap="none" strike="noStrike">
+              <a:solidFill>
+                <a:schemeClr val="dk1"/>
+              </a:solidFill>
+              <a:latin typeface="Meiryo"/>
+              <a:ea typeface="Meiryo"/>
+              <a:cs typeface="Meiryo"/>
+              <a:sym typeface="Meiryo"/>
+            </a:endParaRPr>
+          </a:p>
+          <a:p>
+            <a:pPr indent="0" lvl="0" marL="0" marR="0" rtl="0" algn="l">
+              <a:lnSpc>
+                <a:spcPct val="200000"/>
+              </a:lnSpc>
+              <a:spcBef>
+                <a:spcPts val="0"/>
+              </a:spcBef>
+              <a:spcAft>
+                <a:spcPts val="0"/>
+              </a:spcAft>
+              <a:buNone/>
+            </a:pPr>
+            <a:r>
+              <a:rPr b="1" i="0" lang="ja-JP" sz="1500" u="none" cap="none" strike="noStrike">
+                <a:solidFill>
+                  <a:schemeClr val="dk1"/>
+                </a:solidFill>
+                <a:latin typeface="メイリオ"/>
+                <a:ea typeface="Meiryo"/>
+                <a:cs typeface="Meiryo"/>
+                <a:sym typeface="Meiryo"/>
+              </a:rPr>
+              <a:t>P.10　　【LINEオープンキャンペーン】実施スケジュール</a:t>
+            </a:r>
+            <a:endParaRPr b="1" i="0" sz="1500" u="none" cap="none" strike="noStrike">
+              <a:solidFill>
+                <a:schemeClr val="dk1"/>
+              </a:solidFill>
+              <a:latin typeface="Meiryo"/>
+              <a:ea typeface="Meiryo"/>
+              <a:cs typeface="Meiryo"/>
+              <a:sym typeface="Meiryo"/>
+            </a:endParaRPr>
+          </a:p>
+          <a:p>
+            <a:pPr indent="0" lvl="0" marL="0" marR="0" rtl="0" algn="l">
+              <a:lnSpc>
+                <a:spcPct val="200000"/>
+              </a:lnSpc>
+              <a:spcBef>
+                <a:spcPts val="0"/>
+              </a:spcBef>
+              <a:spcAft>
+                <a:spcPts val="0"/>
+              </a:spcAft>
+              <a:buNone/>
+            </a:pPr>
+            <a:r>
+              <a:rPr b="1" i="0" lang="ja-JP" sz="1500" u="none" cap="none" strike="noStrike">
+                <a:solidFill>
+                  <a:schemeClr val="dk1"/>
+                </a:solidFill>
+                <a:latin typeface="メイリオ"/>
+                <a:ea typeface="Meiryo"/>
+                <a:cs typeface="Meiryo"/>
+                <a:sym typeface="Meiryo"/>
+              </a:rPr>
+              <a:t>P.11　　【LINEオープンキャンペーン】注意点・ご利用条件</a:t>
             </a:r>
             <a:endParaRPr b="1" i="0" sz="1500" u="none" cap="none" strike="noStrike">
               <a:solidFill>
@@ -13548,7 +17343,7 @@
                 <a:cs typeface="Meiryo"/>
                 <a:sym typeface="Meiryo"/>
               </a:rPr>
-              <a:t>【LINEオープンキャンペーン】26年10-12月 期間限定キャンペーン</a:t>
+              <a:t>【LINEオープンキャンペーン】特典内容</a:t>
             </a:r>
             <a:endParaRPr b="1" sz="1600">
               <a:solidFill>
@@ -13929,7 +17724,7 @@
                 <a:cs typeface="Meiryo"/>
                 <a:sym typeface="Meiryo"/>
               </a:rPr>
-              <a:t>特別価格・特別掲載期間・特別通数の3特典が適用される期間限定キャンペーン。</a:t>
+              <a:t>基本費用・掲載期間・配信通数の3点が特別条件になるキャンペーン。</a:t>
             </a:r>
             <a:endParaRPr/>
           </a:p>
@@ -14493,30 +18288,436 @@
           </a:ln>
         </p:spPr>
       </p:pic>
-      <p:pic>
-        <p:nvPicPr>
-          <p:cNvPr id="63" name="Picture 62" descr="topic6.png"/>
-          <p:cNvPicPr>
-            <a:picLocks noChangeAspect="1"/>
-          </p:cNvPicPr>
+      <p:sp>
+        <p:nvSpPr>
+          <p:cNvPr id="63" name="Rectangle 62"/>
+          <p:cNvSpPr/>
           <p:nvPr/>
-        </p:nvPicPr>
-        <p:blipFill>
-          <a:blip r:embed="rId3"/>
-          <a:stretch>
-            <a:fillRect/>
-          </a:stretch>
-        </p:blipFill>
+        </p:nvSpPr>
         <p:spPr>
           <a:xfrm>
-            <a:off x="2161168" y="3068960"/>
-            <a:ext cx="6092760" cy="3429000"/>
+            <a:off x="544108" y="3068960"/>
+            <a:ext cx="4434840" cy="274320"/>
           </a:xfrm>
           <a:prstGeom prst="rect">
             <a:avLst/>
           </a:prstGeom>
+          <a:solidFill>
+            <a:srgbClr val="F2F2F2"/>
+          </a:solidFill>
+          <a:ln>
+            <a:noFill/>
+          </a:ln>
+          <a:effectLst/>
         </p:spPr>
-      </p:pic>
+        <p:style>
+          <a:lnRef idx="1">
+            <a:schemeClr val="accent1"/>
+          </a:lnRef>
+          <a:fillRef idx="3">
+            <a:schemeClr val="accent1"/>
+          </a:fillRef>
+          <a:effectRef idx="2">
+            <a:schemeClr val="accent1"/>
+          </a:effectRef>
+          <a:fontRef idx="minor">
+            <a:schemeClr val="lt1"/>
+          </a:fontRef>
+        </p:style>
+        <p:txBody>
+          <a:bodyPr rtlCol="0" anchor="ctr" wrap="square" rIns="45720"/>
+          <a:lstStyle/>
+          <a:p>
+            <a:pPr algn="ctr"/>
+            <a:r>
+              <a:rPr sz="1300" b="1">
+                <a:solidFill>
+                  <a:srgbClr val="333333"/>
+                </a:solidFill>
+                <a:latin typeface="メイリオ"/>
+              </a:rPr>
+              <a:t>AS-IS</a:t>
+            </a:r>
+          </a:p>
+        </p:txBody>
+      </p:sp>
+      <p:sp>
+        <p:nvSpPr>
+          <p:cNvPr id="64" name="Rectangle 63"/>
+          <p:cNvSpPr/>
+          <p:nvPr/>
+        </p:nvSpPr>
+        <p:spPr>
+          <a:xfrm>
+            <a:off x="544108" y="3343280"/>
+            <a:ext cx="4434840" cy="640080"/>
+          </a:xfrm>
+          <a:prstGeom prst="rect">
+            <a:avLst/>
+          </a:prstGeom>
+          <a:solidFill>
+            <a:srgbClr val="F2F2F2"/>
+          </a:solidFill>
+          <a:ln w="12700">
+            <a:solidFill>
+              <a:srgbClr val="D9D9D9"/>
+            </a:solidFill>
+          </a:ln>
+          <a:effectLst/>
+        </p:spPr>
+        <p:style>
+          <a:lnRef idx="1">
+            <a:schemeClr val="accent1"/>
+          </a:lnRef>
+          <a:fillRef idx="3">
+            <a:schemeClr val="accent1"/>
+          </a:fillRef>
+          <a:effectRef idx="2">
+            <a:schemeClr val="accent1"/>
+          </a:effectRef>
+          <a:fontRef idx="minor">
+            <a:schemeClr val="lt1"/>
+          </a:fontRef>
+        </p:style>
+        <p:txBody>
+          <a:bodyPr rtlCol="0" anchor="ctr" wrap="square" lIns="182880" rIns="137160" tIns="54864" bIns="54864"/>
+          <a:lstStyle/>
+          <a:p>
+            <a:pPr algn="ctr">
+              <a:lnSpc>
+                <a:spcPct val="110000"/>
+              </a:lnSpc>
+            </a:pPr>
+            <a:r>
+              <a:rPr sz="1800" b="1">
+                <a:solidFill>
+                  <a:srgbClr val="15133D"/>
+                </a:solidFill>
+                <a:latin typeface="メイリオ"/>
+              </a:rPr>
+              <a:t>通常プラン｜基本費用1,800万円・掲載期間7日間・配信900万通</a:t>
+            </a:r>
+          </a:p>
+        </p:txBody>
+      </p:sp>
+      <p:sp>
+        <p:nvSpPr>
+          <p:cNvPr id="65" name="TextBox 64"/>
+          <p:cNvSpPr txBox="1"/>
+          <p:nvPr/>
+        </p:nvSpPr>
+        <p:spPr>
+          <a:xfrm>
+            <a:off x="4978948" y="3068960"/>
+            <a:ext cx="457200" cy="914400"/>
+          </a:xfrm>
+          <a:prstGeom prst="rect">
+            <a:avLst/>
+          </a:prstGeom>
+          <a:noFill/>
+        </p:spPr>
+        <p:txBody>
+          <a:bodyPr wrap="none" anchor="ctr">
+            <a:spAutoFit/>
+          </a:bodyPr>
+          <a:lstStyle/>
+          <a:p>
+            <a:pPr algn="ctr"/>
+            <a:r>
+              <a:rPr sz="1800" b="1">
+                <a:solidFill>
+                  <a:srgbClr val="3467B2"/>
+                </a:solidFill>
+                <a:latin typeface="メイリオ"/>
+              </a:rPr>
+              <a:t>▶</a:t>
+            </a:r>
+          </a:p>
+        </p:txBody>
+      </p:sp>
+      <p:sp>
+        <p:nvSpPr>
+          <p:cNvPr id="66" name="Rectangle 65"/>
+          <p:cNvSpPr/>
+          <p:nvPr/>
+        </p:nvSpPr>
+        <p:spPr>
+          <a:xfrm>
+            <a:off x="5436148" y="3068960"/>
+            <a:ext cx="4434840" cy="274320"/>
+          </a:xfrm>
+          <a:prstGeom prst="rect">
+            <a:avLst/>
+          </a:prstGeom>
+          <a:solidFill>
+            <a:srgbClr val="15133D"/>
+          </a:solidFill>
+          <a:ln>
+            <a:noFill/>
+          </a:ln>
+          <a:effectLst/>
+        </p:spPr>
+        <p:style>
+          <a:lnRef idx="1">
+            <a:schemeClr val="accent1"/>
+          </a:lnRef>
+          <a:fillRef idx="3">
+            <a:schemeClr val="accent1"/>
+          </a:fillRef>
+          <a:effectRef idx="2">
+            <a:schemeClr val="accent1"/>
+          </a:effectRef>
+          <a:fontRef idx="minor">
+            <a:schemeClr val="lt1"/>
+          </a:fontRef>
+        </p:style>
+        <p:txBody>
+          <a:bodyPr rtlCol="0" anchor="ctr" wrap="square" rIns="45720"/>
+          <a:lstStyle/>
+          <a:p>
+            <a:pPr algn="ctr"/>
+            <a:r>
+              <a:rPr sz="1300" b="1">
+                <a:solidFill>
+                  <a:srgbClr val="FFFFFF"/>
+                </a:solidFill>
+                <a:latin typeface="メイリオ"/>
+              </a:rPr>
+              <a:t>TO-BE</a:t>
+            </a:r>
+          </a:p>
+        </p:txBody>
+      </p:sp>
+      <p:sp>
+        <p:nvSpPr>
+          <p:cNvPr id="67" name="Rectangle 66"/>
+          <p:cNvSpPr/>
+          <p:nvPr/>
+        </p:nvSpPr>
+        <p:spPr>
+          <a:xfrm>
+            <a:off x="5436148" y="3343280"/>
+            <a:ext cx="4434840" cy="640080"/>
+          </a:xfrm>
+          <a:prstGeom prst="rect">
+            <a:avLst/>
+          </a:prstGeom>
+          <a:solidFill>
+            <a:srgbClr val="EAF0FA"/>
+          </a:solidFill>
+          <a:ln w="12700">
+            <a:solidFill>
+              <a:srgbClr val="3467B2"/>
+            </a:solidFill>
+          </a:ln>
+          <a:effectLst/>
+        </p:spPr>
+        <p:style>
+          <a:lnRef idx="1">
+            <a:schemeClr val="accent1"/>
+          </a:lnRef>
+          <a:fillRef idx="3">
+            <a:schemeClr val="accent1"/>
+          </a:fillRef>
+          <a:effectRef idx="2">
+            <a:schemeClr val="accent1"/>
+          </a:effectRef>
+          <a:fontRef idx="minor">
+            <a:schemeClr val="lt1"/>
+          </a:fontRef>
+        </p:style>
+        <p:txBody>
+          <a:bodyPr rtlCol="0" anchor="ctr" wrap="square" lIns="182880" rIns="137160" tIns="54864" bIns="54864"/>
+          <a:lstStyle/>
+          <a:p>
+            <a:pPr algn="ctr">
+              <a:lnSpc>
+                <a:spcPct val="110000"/>
+              </a:lnSpc>
+            </a:pPr>
+            <a:r>
+              <a:rPr sz="1600" b="1">
+                <a:solidFill>
+                  <a:srgbClr val="15133D"/>
+                </a:solidFill>
+                <a:latin typeface="メイリオ"/>
+              </a:rPr>
+              <a:t>特別プラン｜基本費用1,500万円</a:t>
+            </a:r>
+          </a:p>
+          <a:p>
+            <a:pPr>
+              <a:lnSpc>
+                <a:spcPct val="110000"/>
+              </a:lnSpc>
+              <a:spcBef>
+                <a:spcPts val="500"/>
+              </a:spcBef>
+            </a:pPr>
+            <a:r>
+              <a:rPr sz="1050">
+                <a:solidFill>
+                  <a:srgbClr val="333333"/>
+                </a:solidFill>
+                <a:latin typeface="メイリオ"/>
+              </a:rPr>
+              <a:t>掲載期間15日間・配信1,050万通に拡大</a:t>
+            </a:r>
+          </a:p>
+        </p:txBody>
+      </p:sp>
+      <p:sp>
+        <p:nvSpPr>
+          <p:cNvPr id="68" name="Rounded Rectangle 67"/>
+          <p:cNvSpPr/>
+          <p:nvPr/>
+        </p:nvSpPr>
+        <p:spPr>
+          <a:xfrm>
+            <a:off x="544108" y="4211960"/>
+            <a:ext cx="4572000" cy="1371600"/>
+          </a:xfrm>
+          <a:prstGeom prst="roundRect">
+            <a:avLst>
+              <a:gd name="adj" fmla="val 6000"/>
+            </a:avLst>
+          </a:prstGeom>
+          <a:solidFill>
+            <a:srgbClr val="EAF0FA"/>
+          </a:solidFill>
+          <a:ln w="12700">
+            <a:solidFill>
+              <a:srgbClr val="3467B2"/>
+            </a:solidFill>
+          </a:ln>
+          <a:effectLst/>
+        </p:spPr>
+        <p:style>
+          <a:lnRef idx="1">
+            <a:schemeClr val="accent1"/>
+          </a:lnRef>
+          <a:fillRef idx="3">
+            <a:schemeClr val="accent1"/>
+          </a:fillRef>
+          <a:effectRef idx="2">
+            <a:schemeClr val="accent1"/>
+          </a:effectRef>
+          <a:fontRef idx="minor">
+            <a:schemeClr val="lt1"/>
+          </a:fontRef>
+        </p:style>
+        <p:txBody>
+          <a:bodyPr rtlCol="0" anchor="ctr" wrap="square" lIns="228600" rIns="182880"/>
+          <a:lstStyle/>
+          <a:p>
+            <a:pPr algn="l"/>
+            <a:r>
+              <a:rPr sz="1700" b="1">
+                <a:solidFill>
+                  <a:srgbClr val="15133D"/>
+                </a:solidFill>
+                <a:latin typeface="メイリオ"/>
+              </a:rPr>
+              <a:t>特別価格で提案しやすい</a:t>
+            </a:r>
+          </a:p>
+          <a:p>
+            <a:pPr algn="l">
+              <a:lnSpc>
+                <a:spcPct val="115000"/>
+              </a:lnSpc>
+              <a:spcBef>
+                <a:spcPts val="600"/>
+              </a:spcBef>
+            </a:pPr>
+            <a:r>
+              <a:rPr sz="1100">
+                <a:solidFill>
+                  <a:srgbClr val="333333"/>
+                </a:solidFill>
+                <a:latin typeface="メイリオ"/>
+              </a:rPr>
+              <a:t>基本費用が1,800万円→1,500万円に。期間限定の特別プランとして提案の後押しになる。</a:t>
+            </a:r>
+          </a:p>
+        </p:txBody>
+      </p:sp>
+      <p:sp>
+        <p:nvSpPr>
+          <p:cNvPr id="69" name="Rounded Rectangle 68"/>
+          <p:cNvSpPr/>
+          <p:nvPr/>
+        </p:nvSpPr>
+        <p:spPr>
+          <a:xfrm>
+            <a:off x="5298988" y="4211960"/>
+            <a:ext cx="4572000" cy="1371600"/>
+          </a:xfrm>
+          <a:prstGeom prst="roundRect">
+            <a:avLst>
+              <a:gd name="adj" fmla="val 6000"/>
+            </a:avLst>
+          </a:prstGeom>
+          <a:solidFill>
+            <a:srgbClr val="EAF0FA"/>
+          </a:solidFill>
+          <a:ln w="12700">
+            <a:solidFill>
+              <a:srgbClr val="3467B2"/>
+            </a:solidFill>
+          </a:ln>
+          <a:effectLst/>
+        </p:spPr>
+        <p:style>
+          <a:lnRef idx="1">
+            <a:schemeClr val="accent1"/>
+          </a:lnRef>
+          <a:fillRef idx="3">
+            <a:schemeClr val="accent1"/>
+          </a:fillRef>
+          <a:effectRef idx="2">
+            <a:schemeClr val="accent1"/>
+          </a:effectRef>
+          <a:fontRef idx="minor">
+            <a:schemeClr val="lt1"/>
+          </a:fontRef>
+        </p:style>
+        <p:txBody>
+          <a:bodyPr rtlCol="0" anchor="ctr" wrap="square" lIns="228600" rIns="182880"/>
+          <a:lstStyle/>
+          <a:p>
+            <a:pPr algn="l"/>
+            <a:r>
+              <a:rPr sz="1700" b="1">
+                <a:solidFill>
+                  <a:srgbClr val="15133D"/>
+                </a:solidFill>
+                <a:latin typeface="メイリオ"/>
+              </a:rPr>
+              <a:t>景品はLINEポイント2pt総付</a:t>
+            </a:r>
+          </a:p>
+          <a:p>
+            <a:pPr algn="l">
+              <a:lnSpc>
+                <a:spcPct val="115000"/>
+              </a:lnSpc>
+              <a:spcBef>
+                <a:spcPts val="600"/>
+              </a:spcBef>
+            </a:pPr>
+            <a:r>
+              <a:rPr sz="1100">
+                <a:solidFill>
+                  <a:srgbClr val="333333"/>
+                </a:solidFill>
+                <a:latin typeface="メイリオ"/>
+              </a:rPr>
+              <a:t>応募者全員にLINEポイント2ptを進呈するアンケート型キャンペーン。対象はLINE公式アカウント・Messaging API対応かつ認証プロバイダー必須。</a:t>
+            </a:r>
+          </a:p>
+        </p:txBody>
+      </p:sp>
     </p:spTree>
   </p:cSld>
   <p:clrMapOvr>

--- a/LINEOA媒体最新情報_2026年9月トレンドレポート.pptx
+++ b/LINEOA媒体最新情報_2026年9月トレンドレポート.pptx
@@ -18297,7 +18297,7 @@
         <p:spPr>
           <a:xfrm>
             <a:off x="544108" y="3068960"/>
-            <a:ext cx="4434840" cy="274320"/>
+            <a:ext cx="3547872" cy="274320"/>
           </a:xfrm>
           <a:prstGeom prst="rect">
             <a:avLst/>
@@ -18350,7 +18350,7 @@
         <p:spPr>
           <a:xfrm>
             <a:off x="544108" y="3343280"/>
-            <a:ext cx="4434840" cy="640080"/>
+            <a:ext cx="3547872" cy="640080"/>
           </a:xfrm>
           <a:prstGeom prst="rect">
             <a:avLst/>
@@ -18389,7 +18389,7 @@
               </a:lnSpc>
             </a:pPr>
             <a:r>
-              <a:rPr sz="1800" b="1">
+              <a:rPr sz="1300" b="1">
                 <a:solidFill>
                   <a:srgbClr val="15133D"/>
                 </a:solidFill>
@@ -18408,7 +18408,7 @@
         </p:nvSpPr>
         <p:spPr>
           <a:xfrm>
-            <a:off x="4978948" y="3068960"/>
+            <a:off x="4091980" y="3068960"/>
             <a:ext cx="457200" cy="914400"/>
           </a:xfrm>
           <a:prstGeom prst="rect">
@@ -18443,8 +18443,8 @@
         </p:nvSpPr>
         <p:spPr>
           <a:xfrm>
-            <a:off x="5436148" y="3068960"/>
-            <a:ext cx="4434840" cy="274320"/>
+            <a:off x="4549180" y="3068960"/>
+            <a:ext cx="5321808" cy="274320"/>
           </a:xfrm>
           <a:prstGeom prst="rect">
             <a:avLst/>
@@ -18496,8 +18496,8 @@
         </p:nvSpPr>
         <p:spPr>
           <a:xfrm>
-            <a:off x="5436148" y="3343280"/>
-            <a:ext cx="4434840" cy="640080"/>
+            <a:off x="4549180" y="3343280"/>
+            <a:ext cx="5321808" cy="640080"/>
           </a:xfrm>
           <a:prstGeom prst="rect">
             <a:avLst/>
@@ -18536,7 +18536,7 @@
               </a:lnSpc>
             </a:pPr>
             <a:r>
-              <a:rPr sz="1600" b="1">
+              <a:rPr sz="2200" b="1">
                 <a:solidFill>
                   <a:srgbClr val="15133D"/>
                 </a:solidFill>

--- a/LINEOA媒体最新情報_2026年9月トレンドレポート.pptx
+++ b/LINEOA媒体最新情報_2026年9月トレンドレポート.pptx
@@ -5027,7 +5027,7 @@
                 <a:cs typeface="Meiryo"/>
                 <a:sym typeface="Meiryo"/>
               </a:rPr>
-              <a:t>P.5　　【LINEプロモーションスタンプ】アップデート内容</a:t>
+              <a:t>P.5-6　　【LINEプロモーションスタンプ】アップデート内容・インパクト</a:t>
             </a:r>
             <a:endParaRPr b="1" i="0" sz="1500" u="none" cap="none" strike="noStrike">
               <a:solidFill>
@@ -5062,7 +5062,7 @@
                 <a:cs typeface="Meiryo"/>
                 <a:sym typeface="Meiryo"/>
               </a:rPr>
-              <a:t>P.6　　【LINEプロモーションスタンプ】インパクト</a:t>
+              <a:t>P.7　　【LINEミニアプリ】友だち追加オプションの複数アカウント対応</a:t>
             </a:r>
             <a:endParaRPr b="1" i="0" sz="1500" u="none" cap="none" strike="noStrike">
               <a:solidFill>
@@ -5097,112 +5097,7 @@
                 <a:cs typeface="Meiryo"/>
                 <a:sym typeface="Meiryo"/>
               </a:rPr>
-              <a:t>P.7　　【LINEミニアプリ】友だち追加オプションの複数アカウント対応</a:t>
-            </a:r>
-            <a:endParaRPr b="1" i="0" sz="1500" u="none" cap="none" strike="noStrike">
-              <a:solidFill>
-                <a:schemeClr val="dk1"/>
-              </a:solidFill>
-              <a:latin typeface="Meiryo"/>
-              <a:ea typeface="Meiryo"/>
-              <a:cs typeface="Meiryo"/>
-              <a:sym typeface="Meiryo"/>
-            </a:endParaRPr>
-          </a:p>
-          <a:p>
-            <a:pPr indent="0" lvl="0" marL="0" marR="0" rtl="0" algn="l">
-              <a:lnSpc>
-                <a:spcPct val="200000"/>
-              </a:lnSpc>
-              <a:spcBef>
-                <a:spcPts val="0"/>
-              </a:spcBef>
-              <a:spcAft>
-                <a:spcPts val="0"/>
-              </a:spcAft>
-              <a:buNone/>
-            </a:pPr>
-            <a:r>
-              <a:rPr b="1" i="0" lang="ja-JP" sz="1500" u="none" cap="none" strike="noStrike">
-                <a:solidFill>
-                  <a:schemeClr val="dk1"/>
-                </a:solidFill>
-                <a:latin typeface="メイリオ"/>
-                <a:ea typeface="Meiryo"/>
-                <a:cs typeface="Meiryo"/>
-                <a:sym typeface="Meiryo"/>
-              </a:rPr>
-              <a:t>P.8　　【LINEオープンキャンペーン】特典内容</a:t>
-            </a:r>
-            <a:endParaRPr b="1" i="0" sz="1500" u="none" cap="none" strike="noStrike">
-              <a:solidFill>
-                <a:schemeClr val="dk1"/>
-              </a:solidFill>
-              <a:latin typeface="Meiryo"/>
-              <a:ea typeface="Meiryo"/>
-              <a:cs typeface="Meiryo"/>
-              <a:sym typeface="Meiryo"/>
-            </a:endParaRPr>
-          </a:p>
-          <a:p>
-            <a:pPr indent="0" lvl="0" marL="0" marR="0" rtl="0" algn="l">
-              <a:lnSpc>
-                <a:spcPct val="200000"/>
-              </a:lnSpc>
-              <a:spcBef>
-                <a:spcPts val="0"/>
-              </a:spcBef>
-              <a:spcAft>
-                <a:spcPts val="0"/>
-              </a:spcAft>
-              <a:buNone/>
-            </a:pPr>
-            <a:r>
-              <a:rPr b="1" i="0" lang="ja-JP" sz="1500" u="none" cap="none" strike="noStrike">
-                <a:solidFill>
-                  <a:schemeClr val="dk1"/>
-                </a:solidFill>
-                <a:latin typeface="メイリオ"/>
-                <a:ea typeface="Meiryo"/>
-                <a:cs typeface="Meiryo"/>
-                <a:sym typeface="Meiryo"/>
-              </a:rPr>
-              <a:t>P.9　　【LINEオープンキャンペーン】実施スケジュール</a:t>
-            </a:r>
-            <a:endParaRPr b="1" i="0" sz="1500" u="none" cap="none" strike="noStrike">
-              <a:solidFill>
-                <a:schemeClr val="dk1"/>
-              </a:solidFill>
-              <a:latin typeface="Meiryo"/>
-              <a:ea typeface="Meiryo"/>
-              <a:cs typeface="Meiryo"/>
-              <a:sym typeface="Meiryo"/>
-            </a:endParaRPr>
-          </a:p>
-          <a:p>
-            <a:pPr indent="0" lvl="0" marL="0" marR="0" rtl="0" algn="l">
-              <a:lnSpc>
-                <a:spcPct val="200000"/>
-              </a:lnSpc>
-              <a:spcBef>
-                <a:spcPts val="0"/>
-              </a:spcBef>
-              <a:spcAft>
-                <a:spcPts val="0"/>
-              </a:spcAft>
-              <a:buNone/>
-            </a:pPr>
-            <a:r>
-              <a:rPr b="1" i="0" lang="ja-JP" sz="1500" u="none" cap="none" strike="noStrike">
-                <a:solidFill>
-                  <a:schemeClr val="dk1"/>
-                </a:solidFill>
-                <a:latin typeface="メイリオ"/>
-                <a:ea typeface="Meiryo"/>
-                <a:cs typeface="Meiryo"/>
-                <a:sym typeface="Meiryo"/>
-              </a:rPr>
-              <a:t>P.10　　【LINEオープンキャンペーン】注意点・ご利用条件</a:t>
+              <a:t>P.8-10　　【LINEオープンキャンペーン】特典内容・実施スケジュール・注意点・ご利用条件</a:t>
             </a:r>
             <a:endParaRPr b="1" i="0" sz="1500" u="none" cap="none" strike="noStrike">
               <a:solidFill>

--- a/LINEOA媒体最新情報_2026年9月トレンドレポート.pptx
+++ b/LINEOA媒体最新情報_2026年9月トレンドレポート.pptx
@@ -3534,7 +3534,7 @@
                 <a:cs typeface="Meiryo"/>
                 <a:sym typeface="Meiryo"/>
               </a:rPr>
-              <a:t>出典：https://workers-hub.box.com/s/odilqpe44tp398zlfko148yggcgj68ny</a:t>
+              <a:t>出典：https://www.lycbiz.com/jp/service/line-sales-promotion/</a:t>
             </a:r>
             <a:endParaRPr sz="800">
               <a:solidFill>
@@ -4928,14 +4928,14 @@
       </p:grpSpPr>
       <p:sp>
         <p:nvSpPr>
-          <p:cNvPr id="34" name="Google Shape;34;p2"/>
+          <p:cNvPr id="1034" name="Google Shape;34;p2_page"/>
           <p:cNvSpPr txBox="1"/>
           <p:nvPr/>
         </p:nvSpPr>
         <p:spPr>
           <a:xfrm>
             <a:off x="318183" y="1483585"/>
-            <a:ext cx="9298331" cy="4279033"/>
+            <a:ext cx="1005840" cy="4279033"/>
           </a:xfrm>
           <a:prstGeom prst="rect">
             <a:avLst/>
@@ -4973,7 +4973,7 @@
                 <a:cs typeface="Meiryo"/>
                 <a:sym typeface="Meiryo"/>
               </a:rPr>
-              <a:t>P.3　　【LINEミニアプリ】お気に入り追加促進機能のご案内</a:t>
+              <a:t>P.3</a:t>
             </a:r>
             <a:endParaRPr/>
           </a:p>
@@ -5000,7 +5000,7 @@
                 <a:cs typeface="Meiryo"/>
                 <a:sym typeface="Meiryo"/>
               </a:rPr>
-              <a:t>P.4　　【LINE公式アカウント】「分析」データ参照期間 過去36カ月への変更</a:t>
+              <a:t>P.4</a:t>
             </a:r>
             <a:endParaRPr/>
           </a:p>
@@ -5027,7 +5027,7 @@
                 <a:cs typeface="Meiryo"/>
                 <a:sym typeface="Meiryo"/>
               </a:rPr>
-              <a:t>P.5-6　　【LINEプロモーションスタンプ】アップデート内容・インパクト</a:t>
+              <a:t>P.5-6</a:t>
             </a:r>
             <a:endParaRPr b="1" i="0" sz="1500" u="none" cap="none" strike="noStrike">
               <a:solidFill>
@@ -5062,7 +5062,7 @@
                 <a:cs typeface="Meiryo"/>
                 <a:sym typeface="Meiryo"/>
               </a:rPr>
-              <a:t>P.7　　【LINEミニアプリ】友だち追加オプションの複数アカウント対応</a:t>
+              <a:t>P.7</a:t>
             </a:r>
             <a:endParaRPr b="1" i="0" sz="1500" u="none" cap="none" strike="noStrike">
               <a:solidFill>
@@ -5097,7 +5097,192 @@
                 <a:cs typeface="Meiryo"/>
                 <a:sym typeface="Meiryo"/>
               </a:rPr>
-              <a:t>P.8-10　　【LINEオープンキャンペーン】特典内容・実施スケジュール・注意点・ご利用条件</a:t>
+              <a:t>P.8-10</a:t>
+            </a:r>
+            <a:endParaRPr b="1" i="0" sz="1500" u="none" cap="none" strike="noStrike">
+              <a:solidFill>
+                <a:schemeClr val="dk1"/>
+              </a:solidFill>
+              <a:latin typeface="Meiryo"/>
+              <a:ea typeface="Meiryo"/>
+              <a:cs typeface="Meiryo"/>
+              <a:sym typeface="Meiryo"/>
+            </a:endParaRPr>
+          </a:p>
+        </p:txBody>
+      </p:sp>
+      <p:sp>
+        <p:nvSpPr>
+          <p:cNvPr id="34" name="Google Shape;34;p2"/>
+          <p:cNvSpPr txBox="1"/>
+          <p:nvPr/>
+        </p:nvSpPr>
+        <p:spPr>
+          <a:xfrm>
+            <a:off x="1461183" y="1483585"/>
+            <a:ext cx="8155331" cy="4279033"/>
+          </a:xfrm>
+          <a:prstGeom prst="rect">
+            <a:avLst/>
+          </a:prstGeom>
+          <a:noFill/>
+          <a:ln>
+            <a:noFill/>
+          </a:ln>
+        </p:spPr>
+        <p:txBody>
+          <a:bodyPr anchorCtr="0" anchor="t" bIns="90000" lIns="91425" spcFirstLastPara="1" rIns="91425" wrap="square" tIns="90000">
+            <a:spAutoFit/>
+          </a:bodyPr>
+          <a:lstStyle/>
+          <a:p>
+            <a:pPr indent="0" lvl="0" marL="0" marR="0" rtl="0" algn="l">
+              <a:lnSpc>
+                <a:spcPct val="200000"/>
+              </a:lnSpc>
+              <a:spcBef>
+                <a:spcPts val="0"/>
+              </a:spcBef>
+              <a:spcAft>
+                <a:spcPts val="0"/>
+              </a:spcAft>
+              <a:buNone/>
+            </a:pPr>
+            <a:r>
+              <a:rPr b="1" i="0" lang="ja-JP" sz="1500" u="none" cap="none" strike="noStrike">
+                <a:solidFill>
+                  <a:schemeClr val="dk1"/>
+                </a:solidFill>
+                <a:latin typeface="メイリオ"/>
+                <a:ea typeface="Meiryo"/>
+                <a:cs typeface="Meiryo"/>
+                <a:sym typeface="Meiryo"/>
+              </a:rPr>
+              <a:t>【LINEミニアプリ】お気に入り追加促進機能のご案内</a:t>
+            </a:r>
+            <a:endParaRPr/>
+          </a:p>
+          <a:p>
+            <a:pPr indent="0" lvl="0" marL="0" marR="0" rtl="0" algn="l">
+              <a:lnSpc>
+                <a:spcPct val="200000"/>
+              </a:lnSpc>
+              <a:spcBef>
+                <a:spcPts val="0"/>
+              </a:spcBef>
+              <a:spcAft>
+                <a:spcPts val="0"/>
+              </a:spcAft>
+              <a:buNone/>
+            </a:pPr>
+            <a:r>
+              <a:rPr b="1" i="0" lang="ja-JP" sz="1500" u="none" cap="none" strike="noStrike">
+                <a:solidFill>
+                  <a:schemeClr val="dk1"/>
+                </a:solidFill>
+                <a:latin typeface="メイリオ"/>
+                <a:ea typeface="Meiryo"/>
+                <a:cs typeface="Meiryo"/>
+                <a:sym typeface="Meiryo"/>
+              </a:rPr>
+              <a:t>【LINE公式アカウント】「分析」データ参照期間 過去36カ月への変更</a:t>
+            </a:r>
+            <a:endParaRPr/>
+          </a:p>
+          <a:p>
+            <a:pPr indent="0" lvl="0" marL="0" marR="0" rtl="0" algn="l">
+              <a:lnSpc>
+                <a:spcPct val="200000"/>
+              </a:lnSpc>
+              <a:spcBef>
+                <a:spcPts val="0"/>
+              </a:spcBef>
+              <a:spcAft>
+                <a:spcPts val="0"/>
+              </a:spcAft>
+              <a:buNone/>
+            </a:pPr>
+            <a:r>
+              <a:rPr b="1" i="0" lang="ja-JP" sz="1500" u="none" cap="none" strike="noStrike">
+                <a:solidFill>
+                  <a:schemeClr val="dk1"/>
+                </a:solidFill>
+                <a:latin typeface="メイリオ"/>
+                <a:ea typeface="Meiryo"/>
+                <a:cs typeface="Meiryo"/>
+                <a:sym typeface="Meiryo"/>
+              </a:rPr>
+              <a:t>【LINEプロモーションスタンプ】アップデート内容・インパクト</a:t>
+            </a:r>
+            <a:endParaRPr b="1" i="0" sz="1500" u="none" cap="none" strike="noStrike">
+              <a:solidFill>
+                <a:schemeClr val="dk1"/>
+              </a:solidFill>
+              <a:latin typeface="Meiryo"/>
+              <a:ea typeface="Meiryo"/>
+              <a:cs typeface="Meiryo"/>
+              <a:sym typeface="Meiryo"/>
+            </a:endParaRPr>
+          </a:p>
+          <a:p>
+            <a:pPr indent="0" lvl="0" marL="0" marR="0" rtl="0" algn="l">
+              <a:lnSpc>
+                <a:spcPct val="200000"/>
+              </a:lnSpc>
+              <a:spcBef>
+                <a:spcPts val="0"/>
+              </a:spcBef>
+              <a:spcAft>
+                <a:spcPts val="0"/>
+              </a:spcAft>
+              <a:buNone/>
+            </a:pPr>
+            <a:r>
+              <a:rPr b="1" i="0" lang="ja-JP" sz="1500" u="none" cap="none" strike="noStrike">
+                <a:solidFill>
+                  <a:schemeClr val="dk1"/>
+                </a:solidFill>
+                <a:latin typeface="メイリオ"/>
+                <a:ea typeface="Meiryo"/>
+                <a:cs typeface="Meiryo"/>
+                <a:sym typeface="Meiryo"/>
+              </a:rPr>
+              <a:t>【LINEミニアプリ】友だち追加オプションの複数アカウント対応</a:t>
+            </a:r>
+            <a:endParaRPr b="1" i="0" sz="1500" u="none" cap="none" strike="noStrike">
+              <a:solidFill>
+                <a:schemeClr val="dk1"/>
+              </a:solidFill>
+              <a:latin typeface="Meiryo"/>
+              <a:ea typeface="Meiryo"/>
+              <a:cs typeface="Meiryo"/>
+              <a:sym typeface="Meiryo"/>
+            </a:endParaRPr>
+          </a:p>
+          <a:p>
+            <a:pPr indent="0" lvl="0" marL="0" marR="0" rtl="0" algn="l">
+              <a:lnSpc>
+                <a:spcPct val="200000"/>
+              </a:lnSpc>
+              <a:spcBef>
+                <a:spcPts val="0"/>
+              </a:spcBef>
+              <a:spcAft>
+                <a:spcPts val="0"/>
+              </a:spcAft>
+              <a:buNone/>
+            </a:pPr>
+            <a:r>
+              <a:rPr b="1" i="0" lang="ja-JP" sz="1500" u="none" cap="none" strike="noStrike">
+                <a:solidFill>
+                  <a:schemeClr val="dk1"/>
+                </a:solidFill>
+                <a:latin typeface="メイリオ"/>
+                <a:ea typeface="Meiryo"/>
+                <a:cs typeface="Meiryo"/>
+                <a:sym typeface="Meiryo"/>
+              </a:rPr>
+              <a:t>【LINEオープンキャンペーン】特典内容・実施スケジュール・注意点・ご利用条件</a:t>
             </a:r>
             <a:endParaRPr b="1" i="0" sz="1500" u="none" cap="none" strike="noStrike">
               <a:solidFill>
@@ -5516,7 +5701,7 @@
                 <a:cs typeface="Meiryo"/>
                 <a:sym typeface="Meiryo"/>
               </a:rPr>
-              <a:t>出典：https://workers-hub.box.com/s/9uo4m0fiqyxmddz5br3xe9691w0q4ht7</a:t>
+              <a:t>出典：代理店情報</a:t>
             </a:r>
             <a:endParaRPr sz="800">
               <a:solidFill>
@@ -6935,7 +7120,7 @@
                 <a:cs typeface="Meiryo"/>
                 <a:sym typeface="Meiryo"/>
               </a:rPr>
-              <a:t>出典：https://workers-hub.box.com/s/ms8iztyci2dn5z2qna88rklxwxp7o5ja</a:t>
+              <a:t>出典：代理店情報</a:t>
             </a:r>
             <a:endParaRPr sz="800">
               <a:solidFill>
@@ -8354,7 +8539,7 @@
                 <a:cs typeface="Meiryo"/>
                 <a:sym typeface="Meiryo"/>
               </a:rPr>
-              <a:t>出典：https://workers-hub.box.com/s/rgfhp6hxyusj7domi1irjx68jld23k9r</a:t>
+              <a:t>出典：代理店情報</a:t>
             </a:r>
             <a:endParaRPr sz="800">
               <a:solidFill>
@@ -10179,7 +10364,7 @@
                 <a:cs typeface="Meiryo"/>
                 <a:sym typeface="Meiryo"/>
               </a:rPr>
-              <a:t>出典：https://workers-hub.box.com/s/rgfhp6hxyusj7domi1irjx68jld23k9r</a:t>
+              <a:t>出典：代理店情報</a:t>
             </a:r>
             <a:endParaRPr sz="800">
               <a:solidFill>
@@ -12222,7 +12407,7 @@
                 <a:cs typeface="Meiryo"/>
                 <a:sym typeface="Meiryo"/>
               </a:rPr>
-              <a:t>出典：https://workers-hub.box.com/s/ko2jjwgxk5fs18ejrs97fvfqv3bm3089</a:t>
+              <a:t>出典：https://developers.line.biz/ja/docs/line-mini-app/service/add-friend-option/#what-is-add-friend-option</a:t>
             </a:r>
             <a:endParaRPr sz="800">
               <a:solidFill>
@@ -13641,7 +13826,7 @@
                 <a:cs typeface="Meiryo"/>
                 <a:sym typeface="Meiryo"/>
               </a:rPr>
-              <a:t>出典：https://workers-hub.box.com/s/odilqpe44tp398zlfko148yggcgj68ny</a:t>
+              <a:t>出典：https://www.lycbiz.com/jp/service/line-sales-promotion/</a:t>
             </a:r>
             <a:endParaRPr sz="800">
               <a:solidFill>
@@ -15466,7 +15651,7 @@
                 <a:cs typeface="Meiryo"/>
                 <a:sym typeface="Meiryo"/>
               </a:rPr>
-              <a:t>出典：https://workers-hub.box.com/s/odilqpe44tp398zlfko148yggcgj68ny</a:t>
+              <a:t>出典：https://www.lycbiz.com/jp/service/line-sales-promotion/</a:t>
             </a:r>
             <a:endParaRPr sz="800">
               <a:solidFill>
